--- a/docs/test/stress/e2e-outputs/owner_occupied_case08_hannam_flagship_basic.pptx
+++ b/docs/test/stress/e2e-outputs/owner_occupied_case08_hannam_flagship_basic.pptx
@@ -4221,45 +4221,6 @@
         <p:spPr>
           <a:xfrm>
             <a:off x="6053328" y="1481328"/>
-            <a:ext cx="5571439" cy="237744"/>
-          </a:xfrm>
-          <a:prstGeom prst="rect">
-            <a:avLst/>
-          </a:prstGeom>
-          <a:noFill/>
-          <a:ln/>
-        </p:spPr>
-        <p:txBody>
-          <a:bodyPr wrap="square" lIns="0" tIns="0" rIns="0" bIns="0" rtlCol="0" anchor="ctr"/>
-          <a:lstStyle/>
-          <a:p>
-            <a:pPr indent="0" marL="0">
-              <a:buNone/>
-            </a:pPr>
-            <a:r>
-              <a:rPr lang="en-US" sz="1100" b="1" dirty="0">
-                <a:solidFill>
-                  <a:srgbClr val="0F172A"/>
-                </a:solidFill>
-                <a:latin typeface="Pretendard" pitchFamily="34" charset="0"/>
-                <a:ea typeface="Pretendard" pitchFamily="34" charset="-122"/>
-                <a:cs typeface="Pretendard" pitchFamily="34" charset="-120"/>
-              </a:rPr>
-              <a:t>교통 및 도로 접근성</a:t>
-            </a:r>
-            <a:endParaRPr lang="en-US" sz="1100" dirty="0"/>
-          </a:p>
-        </p:txBody>
-      </p:sp>
-      <p:sp>
-        <p:nvSpPr>
-          <p:cNvPr id="7" name="Text 4"/>
-          <p:cNvSpPr/>
-          <p:nvPr/>
-        </p:nvSpPr>
-        <p:spPr>
-          <a:xfrm>
-            <a:off x="6053328" y="1801368"/>
             <a:ext cx="2117147" cy="438912"/>
           </a:xfrm>
           <a:prstGeom prst="rect">
@@ -4287,7 +4248,7 @@
                 <a:ea typeface="Pretendard" pitchFamily="34" charset="-122"/>
                 <a:cs typeface="Pretendard" pitchFamily="34" charset="-120"/>
               </a:rPr>
-              <a:t>지하철 접근성</a:t>
+              <a:t>교통 접근성</a:t>
             </a:r>
             <a:endParaRPr lang="en-US" sz="1400" dirty="0"/>
           </a:p>
@@ -4295,13 +4256,13 @@
       </p:sp>
       <p:sp>
         <p:nvSpPr>
-          <p:cNvPr id="8" name="Text 5"/>
-          <p:cNvSpPr/>
-          <p:nvPr/>
-        </p:nvSpPr>
-        <p:spPr>
-          <a:xfrm>
-            <a:off x="8170475" y="1801368"/>
+          <p:cNvPr id="7" name="Text 4"/>
+          <p:cNvSpPr/>
+          <p:nvPr/>
+        </p:nvSpPr>
+        <p:spPr>
+          <a:xfrm>
+            <a:off x="8170475" y="1481328"/>
             <a:ext cx="3454292" cy="438912"/>
           </a:xfrm>
           <a:prstGeom prst="rect">
@@ -4329,7 +4290,7 @@
                 <a:ea typeface="Pretendard" pitchFamily="34" charset="-122"/>
                 <a:cs typeface="Pretendard" pitchFamily="34" charset="-120"/>
               </a:rPr>
-              <a:t>강남역(2호선·신분당선) 및 양재역(3호선) 더블역세권 도보 4분</a:t>
+              <a:t>{"ok":true,"mocked":true,"extractedFields":{"area_signal":"역…</a:t>
             </a:r>
             <a:endParaRPr lang="en-US" sz="1400" dirty="0"/>
           </a:p>
@@ -4337,542 +4298,7 @@
       </p:sp>
       <p:sp>
         <p:nvSpPr>
-          <p:cNvPr id="9" name="Shape 6"/>
-          <p:cNvSpPr/>
-          <p:nvPr/>
-        </p:nvSpPr>
-        <p:spPr>
-          <a:xfrm>
-            <a:off x="6053328" y="2240280"/>
-            <a:ext cx="5571439" cy="0"/>
-          </a:xfrm>
-          <a:prstGeom prst="line">
-            <a:avLst/>
-          </a:prstGeom>
-          <a:noFill/>
-          <a:ln w="3810">
-            <a:solidFill>
-              <a:srgbClr val="CBD5E1"/>
-            </a:solidFill>
-            <a:prstDash val="solid"/>
-          </a:ln>
-        </p:spPr>
-      </p:sp>
-      <p:sp>
-        <p:nvSpPr>
-          <p:cNvPr id="10" name="Text 7"/>
-          <p:cNvSpPr/>
-          <p:nvPr/>
-        </p:nvSpPr>
-        <p:spPr>
-          <a:xfrm>
-            <a:off x="6053328" y="2240280"/>
-            <a:ext cx="2117147" cy="438912"/>
-          </a:xfrm>
-          <a:prstGeom prst="rect">
-            <a:avLst/>
-          </a:prstGeom>
-          <a:noFill/>
-          <a:ln/>
-        </p:spPr>
-        <p:txBody>
-          <a:bodyPr wrap="square" lIns="0" tIns="0" rIns="0" bIns="0" rtlCol="0" anchor="ctr"/>
-          <a:lstStyle/>
-          <a:p>
-            <a:pPr indent="0" marL="0">
-              <a:lnSpc>
-                <a:spcPct val="120000"/>
-              </a:lnSpc>
-              <a:buNone/>
-            </a:pPr>
-            <a:r>
-              <a:rPr lang="en-US" sz="1400" dirty="0">
-                <a:solidFill>
-                  <a:srgbClr val="64748B"/>
-                </a:solidFill>
-                <a:latin typeface="Pretendard" pitchFamily="34" charset="0"/>
-                <a:ea typeface="Pretendard" pitchFamily="34" charset="-122"/>
-                <a:cs typeface="Pretendard" pitchFamily="34" charset="-120"/>
-              </a:rPr>
-              <a:t>도로 접면 조건</a:t>
-            </a:r>
-            <a:endParaRPr lang="en-US" sz="1400" dirty="0"/>
-          </a:p>
-        </p:txBody>
-      </p:sp>
-      <p:sp>
-        <p:nvSpPr>
-          <p:cNvPr id="11" name="Text 8"/>
-          <p:cNvSpPr/>
-          <p:nvPr/>
-        </p:nvSpPr>
-        <p:spPr>
-          <a:xfrm>
-            <a:off x="8170475" y="2240280"/>
-            <a:ext cx="3454292" cy="438912"/>
-          </a:xfrm>
-          <a:prstGeom prst="rect">
-            <a:avLst/>
-          </a:prstGeom>
-          <a:noFill/>
-          <a:ln/>
-        </p:spPr>
-        <p:txBody>
-          <a:bodyPr wrap="square" lIns="0" tIns="0" rIns="0" bIns="0" rtlCol="0" anchor="ctr"/>
-          <a:lstStyle/>
-          <a:p>
-            <a:pPr indent="0" marL="0">
-              <a:lnSpc>
-                <a:spcPct val="120000"/>
-              </a:lnSpc>
-              <a:buNone/>
-            </a:pPr>
-            <a:r>
-              <a:rPr lang="en-US" sz="1400" b="1" dirty="0">
-                <a:solidFill>
-                  <a:srgbClr val="0F172A"/>
-                </a:solidFill>
-                <a:latin typeface="Pretendard" pitchFamily="34" charset="0"/>
-                <a:ea typeface="Pretendard" pitchFamily="34" charset="-122"/>
-                <a:cs typeface="Pretendard" pitchFamily="34" charset="-120"/>
-              </a:rPr>
-              <a:t>서초대로 25m 메인 대로변 접면</a:t>
-            </a:r>
-            <a:endParaRPr lang="en-US" sz="1400" dirty="0"/>
-          </a:p>
-        </p:txBody>
-      </p:sp>
-      <p:sp>
-        <p:nvSpPr>
-          <p:cNvPr id="12" name="Shape 9"/>
-          <p:cNvSpPr/>
-          <p:nvPr/>
-        </p:nvSpPr>
-        <p:spPr>
-          <a:xfrm>
-            <a:off x="6053328" y="2679192"/>
-            <a:ext cx="5571439" cy="0"/>
-          </a:xfrm>
-          <a:prstGeom prst="line">
-            <a:avLst/>
-          </a:prstGeom>
-          <a:noFill/>
-          <a:ln w="3810">
-            <a:solidFill>
-              <a:srgbClr val="CBD5E1"/>
-            </a:solidFill>
-            <a:prstDash val="solid"/>
-          </a:ln>
-        </p:spPr>
-      </p:sp>
-      <p:sp>
-        <p:nvSpPr>
-          <p:cNvPr id="13" name="Text 10"/>
-          <p:cNvSpPr/>
-          <p:nvPr/>
-        </p:nvSpPr>
-        <p:spPr>
-          <a:xfrm>
-            <a:off x="6053328" y="2679192"/>
-            <a:ext cx="2117147" cy="438912"/>
-          </a:xfrm>
-          <a:prstGeom prst="rect">
-            <a:avLst/>
-          </a:prstGeom>
-          <a:noFill/>
-          <a:ln/>
-        </p:spPr>
-        <p:txBody>
-          <a:bodyPr wrap="square" lIns="0" tIns="0" rIns="0" bIns="0" rtlCol="0" anchor="ctr"/>
-          <a:lstStyle/>
-          <a:p>
-            <a:pPr indent="0" marL="0">
-              <a:lnSpc>
-                <a:spcPct val="120000"/>
-              </a:lnSpc>
-              <a:buNone/>
-            </a:pPr>
-            <a:r>
-              <a:rPr lang="en-US" sz="1400" dirty="0">
-                <a:solidFill>
-                  <a:srgbClr val="64748B"/>
-                </a:solidFill>
-                <a:latin typeface="Pretendard" pitchFamily="34" charset="0"/>
-                <a:ea typeface="Pretendard" pitchFamily="34" charset="-122"/>
-                <a:cs typeface="Pretendard" pitchFamily="34" charset="-120"/>
-              </a:rPr>
-              <a:t>차량 진출입</a:t>
-            </a:r>
-            <a:endParaRPr lang="en-US" sz="1400" dirty="0"/>
-          </a:p>
-        </p:txBody>
-      </p:sp>
-      <p:sp>
-        <p:nvSpPr>
-          <p:cNvPr id="14" name="Text 11"/>
-          <p:cNvSpPr/>
-          <p:nvPr/>
-        </p:nvSpPr>
-        <p:spPr>
-          <a:xfrm>
-            <a:off x="8170475" y="2679192"/>
-            <a:ext cx="3454292" cy="438912"/>
-          </a:xfrm>
-          <a:prstGeom prst="rect">
-            <a:avLst/>
-          </a:prstGeom>
-          <a:noFill/>
-          <a:ln/>
-        </p:spPr>
-        <p:txBody>
-          <a:bodyPr wrap="square" lIns="0" tIns="0" rIns="0" bIns="0" rtlCol="0" anchor="ctr"/>
-          <a:lstStyle/>
-          <a:p>
-            <a:pPr indent="0" marL="0">
-              <a:lnSpc>
-                <a:spcPct val="120000"/>
-              </a:lnSpc>
-              <a:buNone/>
-            </a:pPr>
-            <a:r>
-              <a:rPr lang="en-US" sz="1400" b="1" dirty="0">
-                <a:solidFill>
-                  <a:srgbClr val="0F172A"/>
-                </a:solidFill>
-                <a:latin typeface="Pretendard" pitchFamily="34" charset="0"/>
-                <a:ea typeface="Pretendard" pitchFamily="34" charset="-122"/>
-                <a:cs typeface="Pretendard" pitchFamily="34" charset="-120"/>
-              </a:rPr>
-              <a:t>경부고속도로 서초IC 및 테헤란로 3분 내 진입 가능</a:t>
-            </a:r>
-            <a:endParaRPr lang="en-US" sz="1400" dirty="0"/>
-          </a:p>
-        </p:txBody>
-      </p:sp>
-      <p:sp>
-        <p:nvSpPr>
-          <p:cNvPr id="15" name="Shape 12"/>
-          <p:cNvSpPr/>
-          <p:nvPr/>
-        </p:nvSpPr>
-        <p:spPr>
-          <a:xfrm>
-            <a:off x="6053328" y="3118104"/>
-            <a:ext cx="5571439" cy="0"/>
-          </a:xfrm>
-          <a:prstGeom prst="line">
-            <a:avLst/>
-          </a:prstGeom>
-          <a:noFill/>
-          <a:ln w="3810">
-            <a:solidFill>
-              <a:srgbClr val="CBD5E1"/>
-            </a:solidFill>
-            <a:prstDash val="solid"/>
-          </a:ln>
-        </p:spPr>
-      </p:sp>
-      <p:sp>
-        <p:nvSpPr>
-          <p:cNvPr id="16" name="Text 13"/>
-          <p:cNvSpPr/>
-          <p:nvPr/>
-        </p:nvSpPr>
-        <p:spPr>
-          <a:xfrm>
-            <a:off x="6053328" y="3118104"/>
-            <a:ext cx="2117147" cy="438912"/>
-          </a:xfrm>
-          <a:prstGeom prst="rect">
-            <a:avLst/>
-          </a:prstGeom>
-          <a:noFill/>
-          <a:ln/>
-        </p:spPr>
-        <p:txBody>
-          <a:bodyPr wrap="square" lIns="0" tIns="0" rIns="0" bIns="0" rtlCol="0" anchor="ctr"/>
-          <a:lstStyle/>
-          <a:p>
-            <a:pPr indent="0" marL="0">
-              <a:lnSpc>
-                <a:spcPct val="120000"/>
-              </a:lnSpc>
-              <a:buNone/>
-            </a:pPr>
-            <a:r>
-              <a:rPr lang="en-US" sz="1400" dirty="0">
-                <a:solidFill>
-                  <a:srgbClr val="64748B"/>
-                </a:solidFill>
-                <a:latin typeface="Pretendard" pitchFamily="34" charset="0"/>
-                <a:ea typeface="Pretendard" pitchFamily="34" charset="-122"/>
-                <a:cs typeface="Pretendard" pitchFamily="34" charset="-120"/>
-              </a:rPr>
-              <a:t>배후 수요</a:t>
-            </a:r>
-            <a:endParaRPr lang="en-US" sz="1400" dirty="0"/>
-          </a:p>
-        </p:txBody>
-      </p:sp>
-      <p:sp>
-        <p:nvSpPr>
-          <p:cNvPr id="17" name="Text 14"/>
-          <p:cNvSpPr/>
-          <p:nvPr/>
-        </p:nvSpPr>
-        <p:spPr>
-          <a:xfrm>
-            <a:off x="8170475" y="3118104"/>
-            <a:ext cx="3454292" cy="438912"/>
-          </a:xfrm>
-          <a:prstGeom prst="rect">
-            <a:avLst/>
-          </a:prstGeom>
-          <a:noFill/>
-          <a:ln/>
-        </p:spPr>
-        <p:txBody>
-          <a:bodyPr wrap="square" lIns="0" tIns="0" rIns="0" bIns="0" rtlCol="0" anchor="ctr"/>
-          <a:lstStyle/>
-          <a:p>
-            <a:pPr indent="0" marL="0">
-              <a:lnSpc>
-                <a:spcPct val="120000"/>
-              </a:lnSpc>
-              <a:buNone/>
-            </a:pPr>
-            <a:r>
-              <a:rPr lang="en-US" sz="1400" b="1" dirty="0">
-                <a:solidFill>
-                  <a:srgbClr val="0F172A"/>
-                </a:solidFill>
-                <a:latin typeface="Pretendard" pitchFamily="34" charset="0"/>
-                <a:ea typeface="Pretendard" pitchFamily="34" charset="-122"/>
-                <a:cs typeface="Pretendard" pitchFamily="34" charset="-120"/>
-              </a:rPr>
-              <a:t>강남 테헤란로 IT밸리 및 서초 법조타운 오피스 상주인구 30만 배후</a:t>
-            </a:r>
-            <a:endParaRPr lang="en-US" sz="1400" dirty="0"/>
-          </a:p>
-        </p:txBody>
-      </p:sp>
-      <p:sp>
-        <p:nvSpPr>
-          <p:cNvPr id="18" name="Shape 15"/>
-          <p:cNvSpPr/>
-          <p:nvPr/>
-        </p:nvSpPr>
-        <p:spPr>
-          <a:xfrm>
-            <a:off x="6053328" y="3557016"/>
-            <a:ext cx="5571439" cy="0"/>
-          </a:xfrm>
-          <a:prstGeom prst="line">
-            <a:avLst/>
-          </a:prstGeom>
-          <a:noFill/>
-          <a:ln w="3810">
-            <a:solidFill>
-              <a:srgbClr val="CBD5E1"/>
-            </a:solidFill>
-            <a:prstDash val="solid"/>
-          </a:ln>
-        </p:spPr>
-      </p:sp>
-      <p:sp>
-        <p:nvSpPr>
-          <p:cNvPr id="19" name="Text 16"/>
-          <p:cNvSpPr/>
-          <p:nvPr/>
-        </p:nvSpPr>
-        <p:spPr>
-          <a:xfrm>
-            <a:off x="6053328" y="3557016"/>
-            <a:ext cx="2117147" cy="438912"/>
-          </a:xfrm>
-          <a:prstGeom prst="rect">
-            <a:avLst/>
-          </a:prstGeom>
-          <a:noFill/>
-          <a:ln/>
-        </p:spPr>
-        <p:txBody>
-          <a:bodyPr wrap="square" lIns="0" tIns="0" rIns="0" bIns="0" rtlCol="0" anchor="ctr"/>
-          <a:lstStyle/>
-          <a:p>
-            <a:pPr indent="0" marL="0">
-              <a:lnSpc>
-                <a:spcPct val="120000"/>
-              </a:lnSpc>
-              <a:buNone/>
-            </a:pPr>
-            <a:r>
-              <a:rPr lang="en-US" sz="1400" dirty="0">
-                <a:solidFill>
-                  <a:srgbClr val="64748B"/>
-                </a:solidFill>
-                <a:latin typeface="Pretendard" pitchFamily="34" charset="0"/>
-                <a:ea typeface="Pretendard" pitchFamily="34" charset="-122"/>
-                <a:cs typeface="Pretendard" pitchFamily="34" charset="-120"/>
-              </a:rPr>
-              <a:t>의료 상권</a:t>
-            </a:r>
-            <a:endParaRPr lang="en-US" sz="1400" dirty="0"/>
-          </a:p>
-        </p:txBody>
-      </p:sp>
-      <p:sp>
-        <p:nvSpPr>
-          <p:cNvPr id="20" name="Text 17"/>
-          <p:cNvSpPr/>
-          <p:nvPr/>
-        </p:nvSpPr>
-        <p:spPr>
-          <a:xfrm>
-            <a:off x="8170475" y="3557016"/>
-            <a:ext cx="3454292" cy="438912"/>
-          </a:xfrm>
-          <a:prstGeom prst="rect">
-            <a:avLst/>
-          </a:prstGeom>
-          <a:noFill/>
-          <a:ln/>
-        </p:spPr>
-        <p:txBody>
-          <a:bodyPr wrap="square" lIns="0" tIns="0" rIns="0" bIns="0" rtlCol="0" anchor="ctr"/>
-          <a:lstStyle/>
-          <a:p>
-            <a:pPr indent="0" marL="0">
-              <a:lnSpc>
-                <a:spcPct val="120000"/>
-              </a:lnSpc>
-              <a:buNone/>
-            </a:pPr>
-            <a:r>
-              <a:rPr lang="en-US" sz="1400" b="1" dirty="0">
-                <a:solidFill>
-                  <a:srgbClr val="0F172A"/>
-                </a:solidFill>
-                <a:latin typeface="Pretendard" pitchFamily="34" charset="0"/>
-                <a:ea typeface="Pretendard" pitchFamily="34" charset="-122"/>
-                <a:cs typeface="Pretendard" pitchFamily="34" charset="-120"/>
-              </a:rPr>
-              <a:t>1층 약국 및 상층부 안과·피부과 전문의원 집적 의료 특화 상권</a:t>
-            </a:r>
-            <a:endParaRPr lang="en-US" sz="1400" dirty="0"/>
-          </a:p>
-        </p:txBody>
-      </p:sp>
-      <p:sp>
-        <p:nvSpPr>
-          <p:cNvPr id="21" name="Shape 18"/>
-          <p:cNvSpPr/>
-          <p:nvPr/>
-        </p:nvSpPr>
-        <p:spPr>
-          <a:xfrm>
-            <a:off x="6053328" y="3995928"/>
-            <a:ext cx="5571439" cy="0"/>
-          </a:xfrm>
-          <a:prstGeom prst="line">
-            <a:avLst/>
-          </a:prstGeom>
-          <a:noFill/>
-          <a:ln w="3810">
-            <a:solidFill>
-              <a:srgbClr val="CBD5E1"/>
-            </a:solidFill>
-            <a:prstDash val="solid"/>
-          </a:ln>
-        </p:spPr>
-      </p:sp>
-      <p:sp>
-        <p:nvSpPr>
-          <p:cNvPr id="22" name="Text 19"/>
-          <p:cNvSpPr/>
-          <p:nvPr/>
-        </p:nvSpPr>
-        <p:spPr>
-          <a:xfrm>
-            <a:off x="6053328" y="3995928"/>
-            <a:ext cx="2117147" cy="438912"/>
-          </a:xfrm>
-          <a:prstGeom prst="rect">
-            <a:avLst/>
-          </a:prstGeom>
-          <a:noFill/>
-          <a:ln/>
-        </p:spPr>
-        <p:txBody>
-          <a:bodyPr wrap="square" lIns="0" tIns="0" rIns="0" bIns="0" rtlCol="0" anchor="ctr"/>
-          <a:lstStyle/>
-          <a:p>
-            <a:pPr indent="0" marL="0">
-              <a:lnSpc>
-                <a:spcPct val="120000"/>
-              </a:lnSpc>
-              <a:buNone/>
-            </a:pPr>
-            <a:r>
-              <a:rPr lang="en-US" sz="1400" dirty="0">
-                <a:solidFill>
-                  <a:srgbClr val="64748B"/>
-                </a:solidFill>
-                <a:latin typeface="Pretendard" pitchFamily="34" charset="0"/>
-                <a:ea typeface="Pretendard" pitchFamily="34" charset="-122"/>
-                <a:cs typeface="Pretendard" pitchFamily="34" charset="-120"/>
-              </a:rPr>
-              <a:t>편의 인프라</a:t>
-            </a:r>
-            <a:endParaRPr lang="en-US" sz="1400" dirty="0"/>
-          </a:p>
-        </p:txBody>
-      </p:sp>
-      <p:sp>
-        <p:nvSpPr>
-          <p:cNvPr id="23" name="Text 20"/>
-          <p:cNvSpPr/>
-          <p:nvPr/>
-        </p:nvSpPr>
-        <p:spPr>
-          <a:xfrm>
-            <a:off x="8170475" y="3995928"/>
-            <a:ext cx="3454292" cy="438912"/>
-          </a:xfrm>
-          <a:prstGeom prst="rect">
-            <a:avLst/>
-          </a:prstGeom>
-          <a:noFill/>
-          <a:ln/>
-        </p:spPr>
-        <p:txBody>
-          <a:bodyPr wrap="square" lIns="0" tIns="0" rIns="0" bIns="0" rtlCol="0" anchor="ctr"/>
-          <a:lstStyle/>
-          <a:p>
-            <a:pPr indent="0" marL="0">
-              <a:lnSpc>
-                <a:spcPct val="120000"/>
-              </a:lnSpc>
-              <a:buNone/>
-            </a:pPr>
-            <a:r>
-              <a:rPr lang="en-US" sz="1400" b="1" dirty="0">
-                <a:solidFill>
-                  <a:srgbClr val="0F172A"/>
-                </a:solidFill>
-                <a:latin typeface="Pretendard" pitchFamily="34" charset="0"/>
-                <a:ea typeface="Pretendard" pitchFamily="34" charset="-122"/>
-                <a:cs typeface="Pretendard" pitchFamily="34" charset="-120"/>
-              </a:rPr>
-              <a:t>반경 300m 내 주요 임차 업종, 은행, 대형 베이커리 밀집</a:t>
-            </a:r>
-            <a:endParaRPr lang="en-US" sz="1400" dirty="0"/>
-          </a:p>
-        </p:txBody>
-      </p:sp>
-      <p:sp>
-        <p:nvSpPr>
-          <p:cNvPr id="24" name="Text 21"/>
+          <p:cNvPr id="8" name="Text 5"/>
           <p:cNvSpPr/>
           <p:nvPr/>
         </p:nvSpPr>
@@ -4911,7 +4337,7 @@
       </p:sp>
       <p:sp>
         <p:nvSpPr>
-          <p:cNvPr id="25" name="Shape 22"/>
+          <p:cNvPr id="9" name="Shape 6"/>
           <p:cNvSpPr/>
           <p:nvPr/>
         </p:nvSpPr>
@@ -4931,6 +4357,45 @@
             <a:prstDash val="solid"/>
           </a:ln>
         </p:spPr>
+      </p:sp>
+      <p:sp>
+        <p:nvSpPr>
+          <p:cNvPr id="10" name="Text 7"/>
+          <p:cNvSpPr/>
+          <p:nvPr/>
+        </p:nvSpPr>
+        <p:spPr>
+          <a:xfrm>
+            <a:off x="566928" y="1481328"/>
+            <a:ext cx="11057839" cy="9692640"/>
+          </a:xfrm>
+          <a:prstGeom prst="rect">
+            <a:avLst/>
+          </a:prstGeom>
+          <a:noFill/>
+          <a:ln/>
+        </p:spPr>
+        <p:txBody>
+          <a:bodyPr wrap="square" lIns="0" tIns="0" rIns="0" bIns="0" rtlCol="0" anchor="t"/>
+          <a:lstStyle/>
+          <a:p>
+            <a:pPr indent="0" marL="0">
+              <a:buNone/>
+            </a:pPr>
+            <a:r>
+              <a:rPr lang="en-US" sz="1000" dirty="0">
+                <a:solidFill>
+                  <a:srgbClr val="0F172A"/>
+                </a:solidFill>
+                <a:latin typeface="Pretendard" pitchFamily="34" charset="0"/>
+                <a:ea typeface="Pretendard" pitchFamily="34" charset="-122"/>
+                <a:cs typeface="Pretendard" pitchFamily="34" charset="-120"/>
+              </a:rPr>
+              <a:t>{"ok":true,"mocked":true,"extractedFields":{"area_signal":"역삼","asset_type":"오피스빌딩","price_band":"300억","size_signal":"3000평(약 9917.4㎡)"},"extractedFacts":{"region":"역삼","exactAddressCandidate":"역삼동 742-1","assetType":"오피스빌딩","priceText":"300억","sizeText":"3000평(약 9917.4㎡)","currentUse":"오피스","currentUseSignal":"근린생활시설","leaseSignal":"임대중","vacancySignal":"공실없음","tenantNames":["쿠팡","네이버"],"unitRentTexts":["301호: 1500만"],"sellerMotivationText":"자산 효율화","brokerNotes":["초역세권 매물"]},"detectedSensitiveFields":["exact_address","tenant_name"],"ambiguousFields":[],"warnings":[],"areaSignal":"역삼","assetType":"오피스빌딩","priceBand":"300억","sizeSignal":"3000평(약 9917.4㎡)","dealType":"매각","buildingName":"역삼 센트럴타워","exactAddress":"역삼동 742-1","totalFloorArea":9917.3,"buildYear":2015,"currentUseSignal":"근린생활시설","vacancySignal":"공실 없음","fitSummary":"초역세권 근생 빌딩으로 시행/사옥 매입에 최적화","cautionSummary":"주요 임차 업종 만기 조율 필요","hiddenFields":["exact_address","seller_motivation"],"confidence":{"areaSignal":"confirmed","assetType":"confirmed","priceBand":"ai_hypothesis","fitSummary":"ai_hypothesis"},"missingData":["sizeSignal"],"boundaryNote":"본 자료는 실거래 통계 기반 참고치입니다.","buyerType":"법인 사옥형","budgetRange":{"min":50,"max":80,"display":"50억~80억"},"preferredRegions":["강남","성수"],"assetTypes":["꼬마빌딩","사옥용"],"purchasePurpose":"사옥용 매입","mustHave":["초역세권","주차"],"niceToHave":["테라스","루프탑"],"riskTolerance":"medium","financingNote":"자본금 50% 준비","missingQuestions":["구체적인 입주 시기가 언제인가요?","선호하는 수익률이 있나요?"],"privacyNotes":["연락처 비공개"],"fitReasons":["매수자 예산(50-80억)에 부합하는 매물입니다.","요청하신 성수/강남 권역에 해당합니다."],"cautionReasons":["요청한 용도와 달리 명도 협의가 다소 필요합니다."],"recommendedNextAction":"현장 답사 제안","kakaoMessage":"안녕하세요! 요청하신 조건에 부합하는 추천 매물이 있어 안내해 드립니다. 확인해보시고 피드백 부탁드립니다.","title":"강남 역삼역 초역세권 오피스 사옥용 빌딩 매각","shortSummary":"역삼역 도보 5분 거리의 준신축급 대형 오피스빌딩입니다.","dealPoints":["초역세권","사옥 최적"],"cautionPoints":["명도 조율 필요"],"hiddenInfoNotice":["보증금 및 지번은 인가 후 확인 가능"],"gateMessage":"G1 등급 등록이 필요합니다.","kakaoText":"강남 역삼역 오피스 빌딩 매각 안내입니다.","exactUnitCandidate":"101호","floor":"1층","areaSqmText":"150㎡","spaceType":"office","depositText":"5000만","monthlyRentText":"400만","maintenanceFeeText":"50만","availableFromText":"즉시입주","leaseTermMonthsText":"24","incentivesText":"렌트프리 2개월","restrictions":[],"landlordIdentity":"김성수","currentTenant":"스타트업","vacancyReason":"이전 확장","rentNegotiation":"협의 가능","region":"성수동","areaSqm":150,"deposit":5000,"monthlyRent":400,"maintenanceFee":50,"availableFrom":"즉시입주","leaseTermMonths":24,"incentives":{"rentFreeMonths":2,"interiorSupport":"일부 인테리어 지원","freeRentDetail":"렌트프리 2개월 지원"},"shortSummaryLease":"성수역 도보 5분 거리 1층 리테일 상가 매물입니다."}</a:t>
+            </a:r>
+            <a:endParaRPr lang="en-US" sz="1000" dirty="0"/>
+          </a:p>
+        </p:txBody>
       </p:sp>
     </p:spTree>
   </p:cSld>
@@ -6402,1683 +5867,9 @@
           </a:p>
         </p:txBody>
       </p:sp>
-      <p:graphicFrame>
-        <p:nvGraphicFramePr>
-          <p:cNvPr id="7" name="Table 0"/>
-          <p:cNvGraphicFramePr>
-            <a:graphicFrameLocks noGrp="1"/>
-          </p:cNvGraphicFramePr>
-          <p:nvPr>
-            <p:extLst>
-              <p:ext uri="{D42A27DB-BD31-4B8C-83A1-F6EECF244321}">
-                <p14:modId xmlns:p14="http://schemas.microsoft.com/office/powerpoint/2010/main" val="1579011935"/>
-              </p:ext>
-            </p:extLst>
-          </p:nvPr>
-        </p:nvGraphicFramePr>
-        <p:xfrm>
-          <a:off x="566928" y="1737360"/>
-          <a:ext cx="6675120" cy="914400"/>
-        </p:xfrm>
-        <a:graphic>
-          <a:graphicData uri="http://schemas.openxmlformats.org/drawingml/2006/table">
-            <a:tbl>
-              <a:tblPr/>
-              <a:tblGrid>
-                <a:gridCol w="1668780"/>
-                <a:gridCol w="1668780"/>
-                <a:gridCol w="1668780"/>
-                <a:gridCol w="1668780"/>
-              </a:tblGrid>
-              <a:tr h="420624">
-                <a:tc>
-                  <a:txBody>
-                    <a:bodyPr/>
-                    <a:lstStyle/>
-                    <a:p>
-                      <a:pPr indent="0" marL="0">
-                        <a:buNone/>
-                      </a:pPr>
-                      <a:r>
-                        <a:rPr lang="en-US" sz="1300" b="1" dirty="0">
-                          <a:solidFill>
-                            <a:srgbClr val="64748B"/>
-                          </a:solidFill>
-                          <a:latin typeface="Pretendard" pitchFamily="34" charset="0"/>
-                          <a:ea typeface="Pretendard" pitchFamily="34" charset="-122"/>
-                          <a:cs typeface="Pretendard" pitchFamily="34" charset="-120"/>
-                        </a:rPr>
-                        <a:t>구분</a:t>
-                      </a:r>
-                      <a:endParaRPr lang="en-US" sz="1300" dirty="0">
-                        <a:latin typeface="Pretendard" charset="0"/>
-                        <a:ea typeface="Pretendard" charset="0"/>
-                        <a:cs typeface="Pretendard" charset="0"/>
-                      </a:endParaRPr>
-                    </a:p>
-                  </a:txBody>
-                  <a:tcPr marL="50800" marR="50800" marT="25400" marB="25400" anchor="ctr">
-                    <a:lnL w="3810" cap="flat" cmpd="sng" algn="ctr">
-                      <a:solidFill>
-                        <a:srgbClr val="CBD5E1"/>
-                      </a:solidFill>
-                      <a:prstDash val="solid"/>
-                      <a:round/>
-                      <a:headEnd type="none" w="med" len="med"/>
-                      <a:tailEnd type="none" w="med" len="med"/>
-                    </a:lnL>
-                    <a:lnR w="3810" cap="flat" cmpd="sng" algn="ctr">
-                      <a:solidFill>
-                        <a:srgbClr val="CBD5E1"/>
-                      </a:solidFill>
-                      <a:prstDash val="solid"/>
-                      <a:round/>
-                      <a:headEnd type="none" w="med" len="med"/>
-                      <a:tailEnd type="none" w="med" len="med"/>
-                    </a:lnR>
-                    <a:lnT w="3810" cap="flat" cmpd="sng" algn="ctr">
-                      <a:solidFill>
-                        <a:srgbClr val="CBD5E1"/>
-                      </a:solidFill>
-                      <a:prstDash val="solid"/>
-                      <a:round/>
-                      <a:headEnd type="none" w="med" len="med"/>
-                      <a:tailEnd type="none" w="med" len="med"/>
-                    </a:lnT>
-                    <a:lnB w="3810" cap="flat" cmpd="sng" algn="ctr">
-                      <a:solidFill>
-                        <a:srgbClr val="CBD5E1"/>
-                      </a:solidFill>
-                      <a:prstDash val="solid"/>
-                      <a:round/>
-                      <a:headEnd type="none" w="med" len="med"/>
-                      <a:tailEnd type="none" w="med" len="med"/>
-                    </a:lnB>
-                    <a:solidFill>
-                      <a:srgbClr val="F8FAFC"/>
-                    </a:solidFill>
-                  </a:tcPr>
-                </a:tc>
-                <a:tc>
-                  <a:txBody>
-                    <a:bodyPr/>
-                    <a:lstStyle/>
-                    <a:p>
-                      <a:pPr indent="0" marL="0">
-                        <a:buNone/>
-                      </a:pPr>
-                      <a:r>
-                        <a:rPr lang="en-US" sz="1300" b="1" dirty="0">
-                          <a:solidFill>
-                            <a:srgbClr val="64748B"/>
-                          </a:solidFill>
-                          <a:latin typeface="Pretendard" pitchFamily="34" charset="0"/>
-                          <a:ea typeface="Pretendard" pitchFamily="34" charset="-122"/>
-                          <a:cs typeface="Pretendard" pitchFamily="34" charset="-120"/>
-                        </a:rPr>
-                        <a:t>임차 </a:t>
-                      </a:r>
-                      <a:pPr indent="0" marL="0">
-                        <a:buNone/>
-                      </a:pPr>
-                      <a:r>
-                        <a:rPr lang="en-US" sz="1300" b="1" dirty="0">
-                          <a:solidFill>
-                            <a:srgbClr val="64748B"/>
-                          </a:solidFill>
-                          <a:latin typeface="Pretendard" pitchFamily="34" charset="0"/>
-                          <a:ea typeface="Pretendard" pitchFamily="34" charset="-122"/>
-                          <a:cs typeface="Pretendard" pitchFamily="34" charset="-120"/>
-                        </a:rPr>
-                        <a:t>유지 </a:t>
-                      </a:r>
-                      <a:pPr indent="0" marL="0">
-                        <a:buNone/>
-                      </a:pPr>
-                      <a:r>
-                        <a:rPr lang="en-US" sz="1300" b="1" dirty="0">
-                          <a:solidFill>
-                            <a:srgbClr val="64748B"/>
-                          </a:solidFill>
-                          <a:latin typeface="Pretendard" pitchFamily="34" charset="0"/>
-                          <a:ea typeface="Pretendard" pitchFamily="34" charset="-122"/>
-                          <a:cs typeface="Pretendard" pitchFamily="34" charset="-120"/>
-                        </a:rPr>
-                        <a:t>시</a:t>
-                      </a:r>
-                      <a:endParaRPr lang="en-US" sz="1300" dirty="0">
-                        <a:latin typeface="Pretendard" charset="0"/>
-                        <a:ea typeface="Pretendard" charset="0"/>
-                        <a:cs typeface="Pretendard" charset="0"/>
-                      </a:endParaRPr>
-                    </a:p>
-                  </a:txBody>
-                  <a:tcPr marL="50800" marR="50800" marT="25400" marB="25400" anchor="ctr">
-                    <a:lnL w="3810" cap="flat" cmpd="sng" algn="ctr">
-                      <a:solidFill>
-                        <a:srgbClr val="CBD5E1"/>
-                      </a:solidFill>
-                      <a:prstDash val="solid"/>
-                      <a:round/>
-                      <a:headEnd type="none" w="med" len="med"/>
-                      <a:tailEnd type="none" w="med" len="med"/>
-                    </a:lnL>
-                    <a:lnR w="3810" cap="flat" cmpd="sng" algn="ctr">
-                      <a:solidFill>
-                        <a:srgbClr val="CBD5E1"/>
-                      </a:solidFill>
-                      <a:prstDash val="solid"/>
-                      <a:round/>
-                      <a:headEnd type="none" w="med" len="med"/>
-                      <a:tailEnd type="none" w="med" len="med"/>
-                    </a:lnR>
-                    <a:lnT w="3810" cap="flat" cmpd="sng" algn="ctr">
-                      <a:solidFill>
-                        <a:srgbClr val="CBD5E1"/>
-                      </a:solidFill>
-                      <a:prstDash val="solid"/>
-                      <a:round/>
-                      <a:headEnd type="none" w="med" len="med"/>
-                      <a:tailEnd type="none" w="med" len="med"/>
-                    </a:lnT>
-                    <a:lnB w="3810" cap="flat" cmpd="sng" algn="ctr">
-                      <a:solidFill>
-                        <a:srgbClr val="CBD5E1"/>
-                      </a:solidFill>
-                      <a:prstDash val="solid"/>
-                      <a:round/>
-                      <a:headEnd type="none" w="med" len="med"/>
-                      <a:tailEnd type="none" w="med" len="med"/>
-                    </a:lnB>
-                    <a:solidFill>
-                      <a:srgbClr val="F8FAFC"/>
-                    </a:solidFill>
-                  </a:tcPr>
-                </a:tc>
-                <a:tc>
-                  <a:txBody>
-                    <a:bodyPr/>
-                    <a:lstStyle/>
-                    <a:p>
-                      <a:pPr indent="0" marL="0">
-                        <a:buNone/>
-                      </a:pPr>
-                      <a:r>
-                        <a:rPr lang="en-US" sz="1300" b="1" dirty="0">
-                          <a:solidFill>
-                            <a:srgbClr val="64748B"/>
-                          </a:solidFill>
-                          <a:latin typeface="Pretendard" pitchFamily="34" charset="0"/>
-                          <a:ea typeface="Pretendard" pitchFamily="34" charset="-122"/>
-                          <a:cs typeface="Pretendard" pitchFamily="34" charset="-120"/>
-                        </a:rPr>
-                        <a:t>사옥 </a:t>
-                      </a:r>
-                      <a:pPr indent="0" marL="0">
-                        <a:buNone/>
-                      </a:pPr>
-                      <a:r>
-                        <a:rPr lang="en-US" sz="1300" b="1" dirty="0">
-                          <a:solidFill>
-                            <a:srgbClr val="64748B"/>
-                          </a:solidFill>
-                          <a:latin typeface="Pretendard" pitchFamily="34" charset="0"/>
-                          <a:ea typeface="Pretendard" pitchFamily="34" charset="-122"/>
-                          <a:cs typeface="Pretendard" pitchFamily="34" charset="-120"/>
-                        </a:rPr>
-                        <a:t>자가소유 </a:t>
-                      </a:r>
-                      <a:pPr indent="0" marL="0">
-                        <a:buNone/>
-                      </a:pPr>
-                      <a:r>
-                        <a:rPr lang="en-US" sz="1300" b="1" dirty="0">
-                          <a:solidFill>
-                            <a:srgbClr val="64748B"/>
-                          </a:solidFill>
-                          <a:latin typeface="Pretendard" pitchFamily="34" charset="0"/>
-                          <a:ea typeface="Pretendard" pitchFamily="34" charset="-122"/>
-                          <a:cs typeface="Pretendard" pitchFamily="34" charset="-120"/>
-                        </a:rPr>
-                        <a:t>시</a:t>
-                      </a:r>
-                      <a:endParaRPr lang="en-US" sz="1300" dirty="0">
-                        <a:latin typeface="Pretendard" charset="0"/>
-                        <a:ea typeface="Pretendard" charset="0"/>
-                        <a:cs typeface="Pretendard" charset="0"/>
-                      </a:endParaRPr>
-                    </a:p>
-                  </a:txBody>
-                  <a:tcPr marL="50800" marR="50800" marT="25400" marB="25400" anchor="ctr">
-                    <a:lnL w="3810" cap="flat" cmpd="sng" algn="ctr">
-                      <a:solidFill>
-                        <a:srgbClr val="CBD5E1"/>
-                      </a:solidFill>
-                      <a:prstDash val="solid"/>
-                      <a:round/>
-                      <a:headEnd type="none" w="med" len="med"/>
-                      <a:tailEnd type="none" w="med" len="med"/>
-                    </a:lnL>
-                    <a:lnR w="3810" cap="flat" cmpd="sng" algn="ctr">
-                      <a:solidFill>
-                        <a:srgbClr val="CBD5E1"/>
-                      </a:solidFill>
-                      <a:prstDash val="solid"/>
-                      <a:round/>
-                      <a:headEnd type="none" w="med" len="med"/>
-                      <a:tailEnd type="none" w="med" len="med"/>
-                    </a:lnR>
-                    <a:lnT w="3810" cap="flat" cmpd="sng" algn="ctr">
-                      <a:solidFill>
-                        <a:srgbClr val="CBD5E1"/>
-                      </a:solidFill>
-                      <a:prstDash val="solid"/>
-                      <a:round/>
-                      <a:headEnd type="none" w="med" len="med"/>
-                      <a:tailEnd type="none" w="med" len="med"/>
-                    </a:lnT>
-                    <a:lnB w="3810" cap="flat" cmpd="sng" algn="ctr">
-                      <a:solidFill>
-                        <a:srgbClr val="CBD5E1"/>
-                      </a:solidFill>
-                      <a:prstDash val="solid"/>
-                      <a:round/>
-                      <a:headEnd type="none" w="med" len="med"/>
-                      <a:tailEnd type="none" w="med" len="med"/>
-                    </a:lnB>
-                    <a:solidFill>
-                      <a:srgbClr val="F8FAFC"/>
-                    </a:solidFill>
-                  </a:tcPr>
-                </a:tc>
-                <a:tc>
-                  <a:txBody>
-                    <a:bodyPr/>
-                    <a:lstStyle/>
-                    <a:p>
-                      <a:pPr indent="0" marL="0">
-                        <a:buNone/>
-                      </a:pPr>
-                      <a:r>
-                        <a:rPr lang="en-US" sz="1300" b="1" dirty="0">
-                          <a:solidFill>
-                            <a:srgbClr val="64748B"/>
-                          </a:solidFill>
-                          <a:latin typeface="Pretendard" pitchFamily="34" charset="0"/>
-                          <a:ea typeface="Pretendard" pitchFamily="34" charset="-122"/>
-                          <a:cs typeface="Pretendard" pitchFamily="34" charset="-120"/>
-                        </a:rPr>
-                        <a:t>절감 </a:t>
-                      </a:r>
-                      <a:pPr indent="0" marL="0">
-                        <a:buNone/>
-                      </a:pPr>
-                      <a:r>
-                        <a:rPr lang="en-US" sz="1300" b="1" dirty="0">
-                          <a:solidFill>
-                            <a:srgbClr val="64748B"/>
-                          </a:solidFill>
-                          <a:latin typeface="Pretendard" pitchFamily="34" charset="0"/>
-                          <a:ea typeface="Pretendard" pitchFamily="34" charset="-122"/>
-                          <a:cs typeface="Pretendard" pitchFamily="34" charset="-120"/>
-                        </a:rPr>
-                        <a:t>효과</a:t>
-                      </a:r>
-                      <a:endParaRPr lang="en-US" sz="1300" dirty="0">
-                        <a:latin typeface="Pretendard" charset="0"/>
-                        <a:ea typeface="Pretendard" charset="0"/>
-                        <a:cs typeface="Pretendard" charset="0"/>
-                      </a:endParaRPr>
-                    </a:p>
-                  </a:txBody>
-                  <a:tcPr marL="50800" marR="50800" marT="25400" marB="25400" anchor="ctr">
-                    <a:lnL w="3810" cap="flat" cmpd="sng" algn="ctr">
-                      <a:solidFill>
-                        <a:srgbClr val="CBD5E1"/>
-                      </a:solidFill>
-                      <a:prstDash val="solid"/>
-                      <a:round/>
-                      <a:headEnd type="none" w="med" len="med"/>
-                      <a:tailEnd type="none" w="med" len="med"/>
-                    </a:lnL>
-                    <a:lnR w="3810" cap="flat" cmpd="sng" algn="ctr">
-                      <a:solidFill>
-                        <a:srgbClr val="CBD5E1"/>
-                      </a:solidFill>
-                      <a:prstDash val="solid"/>
-                      <a:round/>
-                      <a:headEnd type="none" w="med" len="med"/>
-                      <a:tailEnd type="none" w="med" len="med"/>
-                    </a:lnR>
-                    <a:lnT w="3810" cap="flat" cmpd="sng" algn="ctr">
-                      <a:solidFill>
-                        <a:srgbClr val="CBD5E1"/>
-                      </a:solidFill>
-                      <a:prstDash val="solid"/>
-                      <a:round/>
-                      <a:headEnd type="none" w="med" len="med"/>
-                      <a:tailEnd type="none" w="med" len="med"/>
-                    </a:lnT>
-                    <a:lnB w="3810" cap="flat" cmpd="sng" algn="ctr">
-                      <a:solidFill>
-                        <a:srgbClr val="CBD5E1"/>
-                      </a:solidFill>
-                      <a:prstDash val="solid"/>
-                      <a:round/>
-                      <a:headEnd type="none" w="med" len="med"/>
-                      <a:tailEnd type="none" w="med" len="med"/>
-                    </a:lnB>
-                    <a:solidFill>
-                      <a:srgbClr val="F8FAFC"/>
-                    </a:solidFill>
-                  </a:tcPr>
-                </a:tc>
-              </a:tr>
-              <a:tr h="420624">
-                <a:tc>
-                  <a:txBody>
-                    <a:bodyPr/>
-                    <a:lstStyle/>
-                    <a:p>
-                      <a:pPr indent="0" marL="0">
-                        <a:buNone/>
-                      </a:pPr>
-                      <a:r>
-                        <a:rPr lang="en-US" sz="1300" b="1" dirty="0">
-                          <a:solidFill>
-                            <a:srgbClr val="0F172A"/>
-                          </a:solidFill>
-                          <a:latin typeface="Pretendard" pitchFamily="34" charset="0"/>
-                          <a:ea typeface="Pretendard" pitchFamily="34" charset="-122"/>
-                          <a:cs typeface="Pretendard" pitchFamily="34" charset="-120"/>
-                        </a:rPr>
-                        <a:t>연간 </a:t>
-                      </a:r>
-                      <a:pPr indent="0" marL="0">
-                        <a:buNone/>
-                      </a:pPr>
-                      <a:r>
-                        <a:rPr lang="en-US" sz="1300" b="1" dirty="0">
-                          <a:solidFill>
-                            <a:srgbClr val="0F172A"/>
-                          </a:solidFill>
-                          <a:latin typeface="Pretendard" pitchFamily="34" charset="0"/>
-                          <a:ea typeface="Pretendard" pitchFamily="34" charset="-122"/>
-                          <a:cs typeface="Pretendard" pitchFamily="34" charset="-120"/>
-                        </a:rPr>
-                        <a:t>소요 </a:t>
-                      </a:r>
-                      <a:pPr indent="0" marL="0">
-                        <a:buNone/>
-                      </a:pPr>
-                      <a:r>
-                        <a:rPr lang="en-US" sz="1300" b="1" dirty="0">
-                          <a:solidFill>
-                            <a:srgbClr val="0F172A"/>
-                          </a:solidFill>
-                          <a:latin typeface="Pretendard" pitchFamily="34" charset="0"/>
-                          <a:ea typeface="Pretendard" pitchFamily="34" charset="-122"/>
-                          <a:cs typeface="Pretendard" pitchFamily="34" charset="-120"/>
-                        </a:rPr>
-                        <a:t>비용</a:t>
-                      </a:r>
-                      <a:endParaRPr lang="en-US" sz="1300" dirty="0">
-                        <a:latin typeface="Pretendard" charset="0"/>
-                        <a:ea typeface="Pretendard" charset="0"/>
-                        <a:cs typeface="Pretendard" charset="0"/>
-                      </a:endParaRPr>
-                    </a:p>
-                  </a:txBody>
-                  <a:tcPr marL="50800" marR="50800" marT="25400" marB="25400" anchor="ctr">
-                    <a:lnL w="3810" cap="flat" cmpd="sng" algn="ctr">
-                      <a:solidFill>
-                        <a:srgbClr val="CBD5E1"/>
-                      </a:solidFill>
-                      <a:prstDash val="solid"/>
-                      <a:round/>
-                      <a:headEnd type="none" w="med" len="med"/>
-                      <a:tailEnd type="none" w="med" len="med"/>
-                    </a:lnL>
-                    <a:lnR w="3810" cap="flat" cmpd="sng" algn="ctr">
-                      <a:solidFill>
-                        <a:srgbClr val="CBD5E1"/>
-                      </a:solidFill>
-                      <a:prstDash val="solid"/>
-                      <a:round/>
-                      <a:headEnd type="none" w="med" len="med"/>
-                      <a:tailEnd type="none" w="med" len="med"/>
-                    </a:lnR>
-                    <a:lnT w="3810" cap="flat" cmpd="sng" algn="ctr">
-                      <a:solidFill>
-                        <a:srgbClr val="CBD5E1"/>
-                      </a:solidFill>
-                      <a:prstDash val="solid"/>
-                      <a:round/>
-                      <a:headEnd type="none" w="med" len="med"/>
-                      <a:tailEnd type="none" w="med" len="med"/>
-                    </a:lnT>
-                    <a:lnB w="3810" cap="flat" cmpd="sng" algn="ctr">
-                      <a:solidFill>
-                        <a:srgbClr val="CBD5E1"/>
-                      </a:solidFill>
-                      <a:prstDash val="solid"/>
-                      <a:round/>
-                      <a:headEnd type="none" w="med" len="med"/>
-                      <a:tailEnd type="none" w="med" len="med"/>
-                    </a:lnB>
-                    <a:solidFill>
-                      <a:srgbClr val="FFFFFF"/>
-                    </a:solidFill>
-                  </a:tcPr>
-                </a:tc>
-                <a:tc>
-                  <a:txBody>
-                    <a:bodyPr/>
-                    <a:lstStyle/>
-                    <a:p>
-                      <a:pPr indent="0" marL="0">
-                        <a:buNone/>
-                      </a:pPr>
-                      <a:r>
-                        <a:rPr lang="en-US" sz="1300" dirty="0">
-                          <a:solidFill>
-                            <a:srgbClr val="0F172A"/>
-                          </a:solidFill>
-                          <a:latin typeface="Pretendard" pitchFamily="34" charset="0"/>
-                          <a:ea typeface="Pretendard" pitchFamily="34" charset="-122"/>
-                          <a:cs typeface="Pretendard" pitchFamily="34" charset="-120"/>
-                        </a:rPr>
-                        <a:t>주변 </a:t>
-                      </a:r>
-                      <a:pPr indent="0" marL="0">
-                        <a:buNone/>
-                      </a:pPr>
-                      <a:r>
-                        <a:rPr lang="en-US" sz="1300" dirty="0">
-                          <a:solidFill>
-                            <a:srgbClr val="0F172A"/>
-                          </a:solidFill>
-                          <a:latin typeface="Pretendard" pitchFamily="34" charset="0"/>
-                          <a:ea typeface="Pretendard" pitchFamily="34" charset="-122"/>
-                          <a:cs typeface="Pretendard" pitchFamily="34" charset="-120"/>
-                        </a:rPr>
-                        <a:t>시장 </a:t>
-                      </a:r>
-                      <a:pPr indent="0" marL="0">
-                        <a:buNone/>
-                      </a:pPr>
-                      <a:r>
-                        <a:rPr lang="en-US" sz="1300" dirty="0">
-                          <a:solidFill>
-                            <a:srgbClr val="0F172A"/>
-                          </a:solidFill>
-                          <a:latin typeface="Pretendard" pitchFamily="34" charset="0"/>
-                          <a:ea typeface="Pretendard" pitchFamily="34" charset="-122"/>
-                          <a:cs typeface="Pretendard" pitchFamily="34" charset="-120"/>
-                        </a:rPr>
-                        <a:t>임대료 </a:t>
-                      </a:r>
-                      <a:pPr indent="0" marL="0">
-                        <a:buNone/>
-                      </a:pPr>
-                      <a:r>
-                        <a:rPr lang="en-US" sz="1300" dirty="0">
-                          <a:solidFill>
-                            <a:srgbClr val="0F172A"/>
-                          </a:solidFill>
-                          <a:latin typeface="Pretendard" pitchFamily="34" charset="0"/>
-                          <a:ea typeface="Pretendard" pitchFamily="34" charset="-122"/>
-                          <a:cs typeface="Pretendard" pitchFamily="34" charset="-120"/>
-                        </a:rPr>
-                        <a:t>지출</a:t>
-                      </a:r>
-                      <a:endParaRPr lang="en-US" sz="1300" dirty="0">
-                        <a:latin typeface="Pretendard" charset="0"/>
-                        <a:ea typeface="Pretendard" charset="0"/>
-                        <a:cs typeface="Pretendard" charset="0"/>
-                      </a:endParaRPr>
-                    </a:p>
-                  </a:txBody>
-                  <a:tcPr marL="50800" marR="50800" marT="25400" marB="25400" anchor="ctr">
-                    <a:lnL w="3810" cap="flat" cmpd="sng" algn="ctr">
-                      <a:solidFill>
-                        <a:srgbClr val="CBD5E1"/>
-                      </a:solidFill>
-                      <a:prstDash val="solid"/>
-                      <a:round/>
-                      <a:headEnd type="none" w="med" len="med"/>
-                      <a:tailEnd type="none" w="med" len="med"/>
-                    </a:lnL>
-                    <a:lnR w="3810" cap="flat" cmpd="sng" algn="ctr">
-                      <a:solidFill>
-                        <a:srgbClr val="CBD5E1"/>
-                      </a:solidFill>
-                      <a:prstDash val="solid"/>
-                      <a:round/>
-                      <a:headEnd type="none" w="med" len="med"/>
-                      <a:tailEnd type="none" w="med" len="med"/>
-                    </a:lnR>
-                    <a:lnT w="3810" cap="flat" cmpd="sng" algn="ctr">
-                      <a:solidFill>
-                        <a:srgbClr val="CBD5E1"/>
-                      </a:solidFill>
-                      <a:prstDash val="solid"/>
-                      <a:round/>
-                      <a:headEnd type="none" w="med" len="med"/>
-                      <a:tailEnd type="none" w="med" len="med"/>
-                    </a:lnT>
-                    <a:lnB w="3810" cap="flat" cmpd="sng" algn="ctr">
-                      <a:solidFill>
-                        <a:srgbClr val="CBD5E1"/>
-                      </a:solidFill>
-                      <a:prstDash val="solid"/>
-                      <a:round/>
-                      <a:headEnd type="none" w="med" len="med"/>
-                      <a:tailEnd type="none" w="med" len="med"/>
-                    </a:lnB>
-                    <a:solidFill>
-                      <a:srgbClr val="FFFFFF"/>
-                    </a:solidFill>
-                  </a:tcPr>
-                </a:tc>
-                <a:tc>
-                  <a:txBody>
-                    <a:bodyPr/>
-                    <a:lstStyle/>
-                    <a:p>
-                      <a:pPr indent="0" marL="0">
-                        <a:buNone/>
-                      </a:pPr>
-                      <a:r>
-                        <a:rPr lang="en-US" sz="1300" dirty="0">
-                          <a:solidFill>
-                            <a:srgbClr val="0F172A"/>
-                          </a:solidFill>
-                          <a:latin typeface="Pretendard" pitchFamily="34" charset="0"/>
-                          <a:ea typeface="Pretendard" pitchFamily="34" charset="-122"/>
-                          <a:cs typeface="Pretendard" pitchFamily="34" charset="-120"/>
-                        </a:rPr>
-                        <a:t>대출 </a:t>
-                      </a:r>
-                      <a:pPr indent="0" marL="0">
-                        <a:buNone/>
-                      </a:pPr>
-                      <a:r>
-                        <a:rPr lang="en-US" sz="1300" dirty="0">
-                          <a:solidFill>
-                            <a:srgbClr val="0F172A"/>
-                          </a:solidFill>
-                          <a:latin typeface="Pretendard" pitchFamily="34" charset="0"/>
-                          <a:ea typeface="Pretendard" pitchFamily="34" charset="-122"/>
-                          <a:cs typeface="Pretendard" pitchFamily="34" charset="-120"/>
-                        </a:rPr>
-                        <a:t>이자 </a:t>
-                      </a:r>
-                      <a:pPr indent="0" marL="0">
-                        <a:buNone/>
-                      </a:pPr>
-                      <a:r>
-                        <a:rPr lang="en-US" sz="1300" dirty="0">
-                          <a:solidFill>
-                            <a:srgbClr val="0F172A"/>
-                          </a:solidFill>
-                          <a:latin typeface="Pretendard" pitchFamily="34" charset="0"/>
-                          <a:ea typeface="Pretendard" pitchFamily="34" charset="-122"/>
-                          <a:cs typeface="Pretendard" pitchFamily="34" charset="-120"/>
-                        </a:rPr>
-                        <a:t>+ </a:t>
-                      </a:r>
-                      <a:pPr indent="0" marL="0">
-                        <a:buNone/>
-                      </a:pPr>
-                      <a:r>
-                        <a:rPr lang="en-US" sz="1300" dirty="0">
-                          <a:solidFill>
-                            <a:srgbClr val="0F172A"/>
-                          </a:solidFill>
-                          <a:latin typeface="Pretendard" pitchFamily="34" charset="0"/>
-                          <a:ea typeface="Pretendard" pitchFamily="34" charset="-122"/>
-                          <a:cs typeface="Pretendard" pitchFamily="34" charset="-120"/>
-                        </a:rPr>
-                        <a:t>운영 </a:t>
-                      </a:r>
-                      <a:pPr indent="0" marL="0">
-                        <a:buNone/>
-                      </a:pPr>
-                      <a:r>
-                        <a:rPr lang="en-US" sz="1300" dirty="0">
-                          <a:solidFill>
-                            <a:srgbClr val="0F172A"/>
-                          </a:solidFill>
-                          <a:latin typeface="Pretendard" pitchFamily="34" charset="0"/>
-                          <a:ea typeface="Pretendard" pitchFamily="34" charset="-122"/>
-                          <a:cs typeface="Pretendard" pitchFamily="34" charset="-120"/>
-                        </a:rPr>
-                        <a:t>관리비</a:t>
-                      </a:r>
-                      <a:endParaRPr lang="en-US" sz="1300" dirty="0">
-                        <a:latin typeface="Pretendard" charset="0"/>
-                        <a:ea typeface="Pretendard" charset="0"/>
-                        <a:cs typeface="Pretendard" charset="0"/>
-                      </a:endParaRPr>
-                    </a:p>
-                  </a:txBody>
-                  <a:tcPr marL="50800" marR="50800" marT="25400" marB="25400" anchor="ctr">
-                    <a:lnL w="3810" cap="flat" cmpd="sng" algn="ctr">
-                      <a:solidFill>
-                        <a:srgbClr val="CBD5E1"/>
-                      </a:solidFill>
-                      <a:prstDash val="solid"/>
-                      <a:round/>
-                      <a:headEnd type="none" w="med" len="med"/>
-                      <a:tailEnd type="none" w="med" len="med"/>
-                    </a:lnL>
-                    <a:lnR w="3810" cap="flat" cmpd="sng" algn="ctr">
-                      <a:solidFill>
-                        <a:srgbClr val="CBD5E1"/>
-                      </a:solidFill>
-                      <a:prstDash val="solid"/>
-                      <a:round/>
-                      <a:headEnd type="none" w="med" len="med"/>
-                      <a:tailEnd type="none" w="med" len="med"/>
-                    </a:lnR>
-                    <a:lnT w="3810" cap="flat" cmpd="sng" algn="ctr">
-                      <a:solidFill>
-                        <a:srgbClr val="CBD5E1"/>
-                      </a:solidFill>
-                      <a:prstDash val="solid"/>
-                      <a:round/>
-                      <a:headEnd type="none" w="med" len="med"/>
-                      <a:tailEnd type="none" w="med" len="med"/>
-                    </a:lnT>
-                    <a:lnB w="3810" cap="flat" cmpd="sng" algn="ctr">
-                      <a:solidFill>
-                        <a:srgbClr val="CBD5E1"/>
-                      </a:solidFill>
-                      <a:prstDash val="solid"/>
-                      <a:round/>
-                      <a:headEnd type="none" w="med" len="med"/>
-                      <a:tailEnd type="none" w="med" len="med"/>
-                    </a:lnB>
-                    <a:solidFill>
-                      <a:srgbClr val="FFFFFF"/>
-                    </a:solidFill>
-                  </a:tcPr>
-                </a:tc>
-                <a:tc>
-                  <a:txBody>
-                    <a:bodyPr/>
-                    <a:lstStyle/>
-                    <a:p>
-                      <a:pPr indent="0" marL="0">
-                        <a:buNone/>
-                      </a:pPr>
-                      <a:r>
-                        <a:rPr lang="en-US" sz="1300" dirty="0">
-                          <a:solidFill>
-                            <a:srgbClr val="0F172A"/>
-                          </a:solidFill>
-                          <a:latin typeface="Pretendard" pitchFamily="34" charset="0"/>
-                          <a:ea typeface="Pretendard" pitchFamily="34" charset="-122"/>
-                          <a:cs typeface="Pretendard" pitchFamily="34" charset="-120"/>
-                        </a:rPr>
-                        <a:t>연간 </a:t>
-                      </a:r>
-                      <a:pPr indent="0" marL="0">
-                        <a:buNone/>
-                      </a:pPr>
-                      <a:r>
-                        <a:rPr lang="en-US" sz="1300" dirty="0">
-                          <a:solidFill>
-                            <a:srgbClr val="0F172A"/>
-                          </a:solidFill>
-                          <a:latin typeface="Pretendard" pitchFamily="34" charset="0"/>
-                          <a:ea typeface="Pretendard" pitchFamily="34" charset="-122"/>
-                          <a:cs typeface="Pretendard" pitchFamily="34" charset="-120"/>
-                        </a:rPr>
-                        <a:t>임대료 </a:t>
-                      </a:r>
-                      <a:pPr indent="0" marL="0">
-                        <a:buNone/>
-                      </a:pPr>
-                      <a:r>
-                        <a:rPr lang="en-US" sz="1300" dirty="0">
-                          <a:solidFill>
-                            <a:srgbClr val="0F172A"/>
-                          </a:solidFill>
-                          <a:latin typeface="Pretendard" pitchFamily="34" charset="0"/>
-                          <a:ea typeface="Pretendard" pitchFamily="34" charset="-122"/>
-                          <a:cs typeface="Pretendard" pitchFamily="34" charset="-120"/>
-                        </a:rPr>
-                        <a:t>절감</a:t>
-                      </a:r>
-                      <a:endParaRPr lang="en-US" sz="1300" dirty="0">
-                        <a:latin typeface="Pretendard" charset="0"/>
-                        <a:ea typeface="Pretendard" charset="0"/>
-                        <a:cs typeface="Pretendard" charset="0"/>
-                      </a:endParaRPr>
-                    </a:p>
-                  </a:txBody>
-                  <a:tcPr marL="50800" marR="50800" marT="25400" marB="25400" anchor="ctr">
-                    <a:lnL w="3810" cap="flat" cmpd="sng" algn="ctr">
-                      <a:solidFill>
-                        <a:srgbClr val="CBD5E1"/>
-                      </a:solidFill>
-                      <a:prstDash val="solid"/>
-                      <a:round/>
-                      <a:headEnd type="none" w="med" len="med"/>
-                      <a:tailEnd type="none" w="med" len="med"/>
-                    </a:lnL>
-                    <a:lnR w="3810" cap="flat" cmpd="sng" algn="ctr">
-                      <a:solidFill>
-                        <a:srgbClr val="CBD5E1"/>
-                      </a:solidFill>
-                      <a:prstDash val="solid"/>
-                      <a:round/>
-                      <a:headEnd type="none" w="med" len="med"/>
-                      <a:tailEnd type="none" w="med" len="med"/>
-                    </a:lnR>
-                    <a:lnT w="3810" cap="flat" cmpd="sng" algn="ctr">
-                      <a:solidFill>
-                        <a:srgbClr val="CBD5E1"/>
-                      </a:solidFill>
-                      <a:prstDash val="solid"/>
-                      <a:round/>
-                      <a:headEnd type="none" w="med" len="med"/>
-                      <a:tailEnd type="none" w="med" len="med"/>
-                    </a:lnT>
-                    <a:lnB w="3810" cap="flat" cmpd="sng" algn="ctr">
-                      <a:solidFill>
-                        <a:srgbClr val="CBD5E1"/>
-                      </a:solidFill>
-                      <a:prstDash val="solid"/>
-                      <a:round/>
-                      <a:headEnd type="none" w="med" len="med"/>
-                      <a:tailEnd type="none" w="med" len="med"/>
-                    </a:lnB>
-                    <a:solidFill>
-                      <a:srgbClr val="FFFFFF"/>
-                    </a:solidFill>
-                  </a:tcPr>
-                </a:tc>
-              </a:tr>
-              <a:tr h="420624">
-                <a:tc>
-                  <a:txBody>
-                    <a:bodyPr/>
-                    <a:lstStyle/>
-                    <a:p>
-                      <a:pPr indent="0" marL="0">
-                        <a:buNone/>
-                      </a:pPr>
-                      <a:r>
-                        <a:rPr lang="en-US" sz="1300" b="1" dirty="0">
-                          <a:solidFill>
-                            <a:srgbClr val="0F172A"/>
-                          </a:solidFill>
-                          <a:latin typeface="Pretendard" pitchFamily="34" charset="0"/>
-                          <a:ea typeface="Pretendard" pitchFamily="34" charset="-122"/>
-                          <a:cs typeface="Pretendard" pitchFamily="34" charset="-120"/>
-                        </a:rPr>
-                        <a:t>자산 </a:t>
-                      </a:r>
-                      <a:pPr indent="0" marL="0">
-                        <a:buNone/>
-                      </a:pPr>
-                      <a:r>
-                        <a:rPr lang="en-US" sz="1300" b="1" dirty="0">
-                          <a:solidFill>
-                            <a:srgbClr val="0F172A"/>
-                          </a:solidFill>
-                          <a:latin typeface="Pretendard" pitchFamily="34" charset="0"/>
-                          <a:ea typeface="Pretendard" pitchFamily="34" charset="-122"/>
-                          <a:cs typeface="Pretendard" pitchFamily="34" charset="-120"/>
-                        </a:rPr>
-                        <a:t>가치</a:t>
-                      </a:r>
-                      <a:endParaRPr lang="en-US" sz="1300" dirty="0">
-                        <a:latin typeface="Pretendard" charset="0"/>
-                        <a:ea typeface="Pretendard" charset="0"/>
-                        <a:cs typeface="Pretendard" charset="0"/>
-                      </a:endParaRPr>
-                    </a:p>
-                  </a:txBody>
-                  <a:tcPr marL="50800" marR="50800" marT="25400" marB="25400" anchor="ctr">
-                    <a:lnL w="3810" cap="flat" cmpd="sng" algn="ctr">
-                      <a:solidFill>
-                        <a:srgbClr val="CBD5E1"/>
-                      </a:solidFill>
-                      <a:prstDash val="solid"/>
-                      <a:round/>
-                      <a:headEnd type="none" w="med" len="med"/>
-                      <a:tailEnd type="none" w="med" len="med"/>
-                    </a:lnL>
-                    <a:lnR w="3810" cap="flat" cmpd="sng" algn="ctr">
-                      <a:solidFill>
-                        <a:srgbClr val="CBD5E1"/>
-                      </a:solidFill>
-                      <a:prstDash val="solid"/>
-                      <a:round/>
-                      <a:headEnd type="none" w="med" len="med"/>
-                      <a:tailEnd type="none" w="med" len="med"/>
-                    </a:lnR>
-                    <a:lnT w="3810" cap="flat" cmpd="sng" algn="ctr">
-                      <a:solidFill>
-                        <a:srgbClr val="CBD5E1"/>
-                      </a:solidFill>
-                      <a:prstDash val="solid"/>
-                      <a:round/>
-                      <a:headEnd type="none" w="med" len="med"/>
-                      <a:tailEnd type="none" w="med" len="med"/>
-                    </a:lnT>
-                    <a:lnB w="3810" cap="flat" cmpd="sng" algn="ctr">
-                      <a:solidFill>
-                        <a:srgbClr val="CBD5E1"/>
-                      </a:solidFill>
-                      <a:prstDash val="solid"/>
-                      <a:round/>
-                      <a:headEnd type="none" w="med" len="med"/>
-                      <a:tailEnd type="none" w="med" len="med"/>
-                    </a:lnB>
-                    <a:solidFill>
-                      <a:srgbClr val="F8FAFC"/>
-                    </a:solidFill>
-                  </a:tcPr>
-                </a:tc>
-                <a:tc>
-                  <a:txBody>
-                    <a:bodyPr/>
-                    <a:lstStyle/>
-                    <a:p>
-                      <a:pPr indent="0" marL="0">
-                        <a:buNone/>
-                      </a:pPr>
-                      <a:r>
-                        <a:rPr lang="en-US" sz="1300" dirty="0">
-                          <a:solidFill>
-                            <a:srgbClr val="0F172A"/>
-                          </a:solidFill>
-                          <a:latin typeface="Pretendard" pitchFamily="34" charset="0"/>
-                          <a:ea typeface="Pretendard" pitchFamily="34" charset="-122"/>
-                          <a:cs typeface="Pretendard" pitchFamily="34" charset="-120"/>
-                        </a:rPr>
-                        <a:t>비용 </a:t>
-                      </a:r>
-                      <a:pPr indent="0" marL="0">
-                        <a:buNone/>
-                      </a:pPr>
-                      <a:r>
-                        <a:rPr lang="en-US" sz="1300" dirty="0">
-                          <a:solidFill>
-                            <a:srgbClr val="0F172A"/>
-                          </a:solidFill>
-                          <a:latin typeface="Pretendard" pitchFamily="34" charset="0"/>
-                          <a:ea typeface="Pretendard" pitchFamily="34" charset="-122"/>
-                          <a:cs typeface="Pretendard" pitchFamily="34" charset="-120"/>
-                        </a:rPr>
-                        <a:t>소멸</a:t>
-                      </a:r>
-                      <a:endParaRPr lang="en-US" sz="1300" dirty="0">
-                        <a:latin typeface="Pretendard" charset="0"/>
-                        <a:ea typeface="Pretendard" charset="0"/>
-                        <a:cs typeface="Pretendard" charset="0"/>
-                      </a:endParaRPr>
-                    </a:p>
-                  </a:txBody>
-                  <a:tcPr marL="50800" marR="50800" marT="25400" marB="25400" anchor="ctr">
-                    <a:lnL w="3810" cap="flat" cmpd="sng" algn="ctr">
-                      <a:solidFill>
-                        <a:srgbClr val="CBD5E1"/>
-                      </a:solidFill>
-                      <a:prstDash val="solid"/>
-                      <a:round/>
-                      <a:headEnd type="none" w="med" len="med"/>
-                      <a:tailEnd type="none" w="med" len="med"/>
-                    </a:lnL>
-                    <a:lnR w="3810" cap="flat" cmpd="sng" algn="ctr">
-                      <a:solidFill>
-                        <a:srgbClr val="CBD5E1"/>
-                      </a:solidFill>
-                      <a:prstDash val="solid"/>
-                      <a:round/>
-                      <a:headEnd type="none" w="med" len="med"/>
-                      <a:tailEnd type="none" w="med" len="med"/>
-                    </a:lnR>
-                    <a:lnT w="3810" cap="flat" cmpd="sng" algn="ctr">
-                      <a:solidFill>
-                        <a:srgbClr val="CBD5E1"/>
-                      </a:solidFill>
-                      <a:prstDash val="solid"/>
-                      <a:round/>
-                      <a:headEnd type="none" w="med" len="med"/>
-                      <a:tailEnd type="none" w="med" len="med"/>
-                    </a:lnT>
-                    <a:lnB w="3810" cap="flat" cmpd="sng" algn="ctr">
-                      <a:solidFill>
-                        <a:srgbClr val="CBD5E1"/>
-                      </a:solidFill>
-                      <a:prstDash val="solid"/>
-                      <a:round/>
-                      <a:headEnd type="none" w="med" len="med"/>
-                      <a:tailEnd type="none" w="med" len="med"/>
-                    </a:lnB>
-                    <a:solidFill>
-                      <a:srgbClr val="F8FAFC"/>
-                    </a:solidFill>
-                  </a:tcPr>
-                </a:tc>
-                <a:tc>
-                  <a:txBody>
-                    <a:bodyPr/>
-                    <a:lstStyle/>
-                    <a:p>
-                      <a:pPr indent="0" marL="0">
-                        <a:buNone/>
-                      </a:pPr>
-                      <a:r>
-                        <a:rPr lang="en-US" sz="1300" dirty="0">
-                          <a:solidFill>
-                            <a:srgbClr val="0F172A"/>
-                          </a:solidFill>
-                          <a:latin typeface="Pretendard" pitchFamily="34" charset="0"/>
-                          <a:ea typeface="Pretendard" pitchFamily="34" charset="-122"/>
-                          <a:cs typeface="Pretendard" pitchFamily="34" charset="-120"/>
-                        </a:rPr>
-                        <a:t>건물/토지 </a:t>
-                      </a:r>
-                      <a:pPr indent="0" marL="0">
-                        <a:buNone/>
-                      </a:pPr>
-                      <a:r>
-                        <a:rPr lang="en-US" sz="1300" dirty="0">
-                          <a:solidFill>
-                            <a:srgbClr val="0F172A"/>
-                          </a:solidFill>
-                          <a:latin typeface="Pretendard" pitchFamily="34" charset="0"/>
-                          <a:ea typeface="Pretendard" pitchFamily="34" charset="-122"/>
-                          <a:cs typeface="Pretendard" pitchFamily="34" charset="-120"/>
-                        </a:rPr>
-                        <a:t>가치 </a:t>
-                      </a:r>
-                      <a:pPr indent="0" marL="0">
-                        <a:buNone/>
-                      </a:pPr>
-                      <a:r>
-                        <a:rPr lang="en-US" sz="1300" dirty="0">
-                          <a:solidFill>
-                            <a:srgbClr val="0F172A"/>
-                          </a:solidFill>
-                          <a:latin typeface="Pretendard" pitchFamily="34" charset="0"/>
-                          <a:ea typeface="Pretendard" pitchFamily="34" charset="-122"/>
-                          <a:cs typeface="Pretendard" pitchFamily="34" charset="-120"/>
-                        </a:rPr>
-                        <a:t>상승 </a:t>
-                      </a:r>
-                      <a:pPr indent="0" marL="0">
-                        <a:buNone/>
-                      </a:pPr>
-                      <a:r>
-                        <a:rPr lang="en-US" sz="1300" dirty="0">
-                          <a:solidFill>
-                            <a:srgbClr val="0F172A"/>
-                          </a:solidFill>
-                          <a:latin typeface="Pretendard" pitchFamily="34" charset="0"/>
-                          <a:ea typeface="Pretendard" pitchFamily="34" charset="-122"/>
-                          <a:cs typeface="Pretendard" pitchFamily="34" charset="-120"/>
-                        </a:rPr>
-                        <a:t>유인</a:t>
-                      </a:r>
-                      <a:endParaRPr lang="en-US" sz="1300" dirty="0">
-                        <a:latin typeface="Pretendard" charset="0"/>
-                        <a:ea typeface="Pretendard" charset="0"/>
-                        <a:cs typeface="Pretendard" charset="0"/>
-                      </a:endParaRPr>
-                    </a:p>
-                  </a:txBody>
-                  <a:tcPr marL="50800" marR="50800" marT="25400" marB="25400" anchor="ctr">
-                    <a:lnL w="3810" cap="flat" cmpd="sng" algn="ctr">
-                      <a:solidFill>
-                        <a:srgbClr val="CBD5E1"/>
-                      </a:solidFill>
-                      <a:prstDash val="solid"/>
-                      <a:round/>
-                      <a:headEnd type="none" w="med" len="med"/>
-                      <a:tailEnd type="none" w="med" len="med"/>
-                    </a:lnL>
-                    <a:lnR w="3810" cap="flat" cmpd="sng" algn="ctr">
-                      <a:solidFill>
-                        <a:srgbClr val="CBD5E1"/>
-                      </a:solidFill>
-                      <a:prstDash val="solid"/>
-                      <a:round/>
-                      <a:headEnd type="none" w="med" len="med"/>
-                      <a:tailEnd type="none" w="med" len="med"/>
-                    </a:lnR>
-                    <a:lnT w="3810" cap="flat" cmpd="sng" algn="ctr">
-                      <a:solidFill>
-                        <a:srgbClr val="CBD5E1"/>
-                      </a:solidFill>
-                      <a:prstDash val="solid"/>
-                      <a:round/>
-                      <a:headEnd type="none" w="med" len="med"/>
-                      <a:tailEnd type="none" w="med" len="med"/>
-                    </a:lnT>
-                    <a:lnB w="3810" cap="flat" cmpd="sng" algn="ctr">
-                      <a:solidFill>
-                        <a:srgbClr val="CBD5E1"/>
-                      </a:solidFill>
-                      <a:prstDash val="solid"/>
-                      <a:round/>
-                      <a:headEnd type="none" w="med" len="med"/>
-                      <a:tailEnd type="none" w="med" len="med"/>
-                    </a:lnB>
-                    <a:solidFill>
-                      <a:srgbClr val="F8FAFC"/>
-                    </a:solidFill>
-                  </a:tcPr>
-                </a:tc>
-                <a:tc>
-                  <a:txBody>
-                    <a:bodyPr/>
-                    <a:lstStyle/>
-                    <a:p>
-                      <a:pPr indent="0" marL="0">
-                        <a:buNone/>
-                      </a:pPr>
-                      <a:r>
-                        <a:rPr lang="en-US" sz="1300" dirty="0">
-                          <a:solidFill>
-                            <a:srgbClr val="0F172A"/>
-                          </a:solidFill>
-                          <a:latin typeface="Pretendard" pitchFamily="34" charset="0"/>
-                          <a:ea typeface="Pretendard" pitchFamily="34" charset="-122"/>
-                          <a:cs typeface="Pretendard" pitchFamily="34" charset="-120"/>
-                        </a:rPr>
-                        <a:t>자본 </a:t>
-                      </a:r>
-                      <a:pPr indent="0" marL="0">
-                        <a:buNone/>
-                      </a:pPr>
-                      <a:r>
-                        <a:rPr lang="en-US" sz="1300" dirty="0">
-                          <a:solidFill>
-                            <a:srgbClr val="0F172A"/>
-                          </a:solidFill>
-                          <a:latin typeface="Pretendard" pitchFamily="34" charset="0"/>
-                          <a:ea typeface="Pretendard" pitchFamily="34" charset="-122"/>
-                          <a:cs typeface="Pretendard" pitchFamily="34" charset="-120"/>
-                        </a:rPr>
-                        <a:t>이득 </a:t>
-                      </a:r>
-                      <a:pPr indent="0" marL="0">
-                        <a:buNone/>
-                      </a:pPr>
-                      <a:r>
-                        <a:rPr lang="en-US" sz="1300" dirty="0">
-                          <a:solidFill>
-                            <a:srgbClr val="0F172A"/>
-                          </a:solidFill>
-                          <a:latin typeface="Pretendard" pitchFamily="34" charset="0"/>
-                          <a:ea typeface="Pretendard" pitchFamily="34" charset="-122"/>
-                          <a:cs typeface="Pretendard" pitchFamily="34" charset="-120"/>
-                        </a:rPr>
-                        <a:t>형성</a:t>
-                      </a:r>
-                      <a:endParaRPr lang="en-US" sz="1300" dirty="0">
-                        <a:latin typeface="Pretendard" charset="0"/>
-                        <a:ea typeface="Pretendard" charset="0"/>
-                        <a:cs typeface="Pretendard" charset="0"/>
-                      </a:endParaRPr>
-                    </a:p>
-                  </a:txBody>
-                  <a:tcPr marL="50800" marR="50800" marT="25400" marB="25400" anchor="ctr">
-                    <a:lnL w="3810" cap="flat" cmpd="sng" algn="ctr">
-                      <a:solidFill>
-                        <a:srgbClr val="CBD5E1"/>
-                      </a:solidFill>
-                      <a:prstDash val="solid"/>
-                      <a:round/>
-                      <a:headEnd type="none" w="med" len="med"/>
-                      <a:tailEnd type="none" w="med" len="med"/>
-                    </a:lnL>
-                    <a:lnR w="3810" cap="flat" cmpd="sng" algn="ctr">
-                      <a:solidFill>
-                        <a:srgbClr val="CBD5E1"/>
-                      </a:solidFill>
-                      <a:prstDash val="solid"/>
-                      <a:round/>
-                      <a:headEnd type="none" w="med" len="med"/>
-                      <a:tailEnd type="none" w="med" len="med"/>
-                    </a:lnR>
-                    <a:lnT w="3810" cap="flat" cmpd="sng" algn="ctr">
-                      <a:solidFill>
-                        <a:srgbClr val="CBD5E1"/>
-                      </a:solidFill>
-                      <a:prstDash val="solid"/>
-                      <a:round/>
-                      <a:headEnd type="none" w="med" len="med"/>
-                      <a:tailEnd type="none" w="med" len="med"/>
-                    </a:lnT>
-                    <a:lnB w="3810" cap="flat" cmpd="sng" algn="ctr">
-                      <a:solidFill>
-                        <a:srgbClr val="CBD5E1"/>
-                      </a:solidFill>
-                      <a:prstDash val="solid"/>
-                      <a:round/>
-                      <a:headEnd type="none" w="med" len="med"/>
-                      <a:tailEnd type="none" w="med" len="med"/>
-                    </a:lnB>
-                    <a:solidFill>
-                      <a:srgbClr val="F8FAFC"/>
-                    </a:solidFill>
-                  </a:tcPr>
-                </a:tc>
-              </a:tr>
-              <a:tr h="420624">
-                <a:tc>
-                  <a:txBody>
-                    <a:bodyPr/>
-                    <a:lstStyle/>
-                    <a:p>
-                      <a:pPr indent="0" marL="0">
-                        <a:buNone/>
-                      </a:pPr>
-                      <a:r>
-                        <a:rPr lang="en-US" sz="1300" b="1" dirty="0">
-                          <a:solidFill>
-                            <a:srgbClr val="0F172A"/>
-                          </a:solidFill>
-                          <a:latin typeface="Pretendard" pitchFamily="34" charset="0"/>
-                          <a:ea typeface="Pretendard" pitchFamily="34" charset="-122"/>
-                          <a:cs typeface="Pretendard" pitchFamily="34" charset="-120"/>
-                        </a:rPr>
-                        <a:t>세제 </a:t>
-                      </a:r>
-                      <a:pPr indent="0" marL="0">
-                        <a:buNone/>
-                      </a:pPr>
-                      <a:r>
-                        <a:rPr lang="en-US" sz="1300" b="1" dirty="0">
-                          <a:solidFill>
-                            <a:srgbClr val="0F172A"/>
-                          </a:solidFill>
-                          <a:latin typeface="Pretendard" pitchFamily="34" charset="0"/>
-                          <a:ea typeface="Pretendard" pitchFamily="34" charset="-122"/>
-                          <a:cs typeface="Pretendard" pitchFamily="34" charset="-120"/>
-                        </a:rPr>
-                        <a:t>혜택</a:t>
-                      </a:r>
-                      <a:endParaRPr lang="en-US" sz="1300" dirty="0">
-                        <a:latin typeface="Pretendard" charset="0"/>
-                        <a:ea typeface="Pretendard" charset="0"/>
-                        <a:cs typeface="Pretendard" charset="0"/>
-                      </a:endParaRPr>
-                    </a:p>
-                  </a:txBody>
-                  <a:tcPr marL="50800" marR="50800" marT="25400" marB="25400" anchor="ctr">
-                    <a:lnL w="3810" cap="flat" cmpd="sng" algn="ctr">
-                      <a:solidFill>
-                        <a:srgbClr val="CBD5E1"/>
-                      </a:solidFill>
-                      <a:prstDash val="solid"/>
-                      <a:round/>
-                      <a:headEnd type="none" w="med" len="med"/>
-                      <a:tailEnd type="none" w="med" len="med"/>
-                    </a:lnL>
-                    <a:lnR w="3810" cap="flat" cmpd="sng" algn="ctr">
-                      <a:solidFill>
-                        <a:srgbClr val="CBD5E1"/>
-                      </a:solidFill>
-                      <a:prstDash val="solid"/>
-                      <a:round/>
-                      <a:headEnd type="none" w="med" len="med"/>
-                      <a:tailEnd type="none" w="med" len="med"/>
-                    </a:lnR>
-                    <a:lnT w="3810" cap="flat" cmpd="sng" algn="ctr">
-                      <a:solidFill>
-                        <a:srgbClr val="CBD5E1"/>
-                      </a:solidFill>
-                      <a:prstDash val="solid"/>
-                      <a:round/>
-                      <a:headEnd type="none" w="med" len="med"/>
-                      <a:tailEnd type="none" w="med" len="med"/>
-                    </a:lnT>
-                    <a:lnB w="3810" cap="flat" cmpd="sng" algn="ctr">
-                      <a:solidFill>
-                        <a:srgbClr val="CBD5E1"/>
-                      </a:solidFill>
-                      <a:prstDash val="solid"/>
-                      <a:round/>
-                      <a:headEnd type="none" w="med" len="med"/>
-                      <a:tailEnd type="none" w="med" len="med"/>
-                    </a:lnB>
-                    <a:solidFill>
-                      <a:srgbClr val="FFFFFF"/>
-                    </a:solidFill>
-                  </a:tcPr>
-                </a:tc>
-                <a:tc>
-                  <a:txBody>
-                    <a:bodyPr/>
-                    <a:lstStyle/>
-                    <a:p>
-                      <a:pPr indent="0" marL="0">
-                        <a:buNone/>
-                      </a:pPr>
-                      <a:r>
-                        <a:rPr lang="en-US" sz="1300" dirty="0">
-                          <a:solidFill>
-                            <a:srgbClr val="0F172A"/>
-                          </a:solidFill>
-                          <a:latin typeface="Pretendard" pitchFamily="34" charset="0"/>
-                          <a:ea typeface="Pretendard" pitchFamily="34" charset="-122"/>
-                          <a:cs typeface="Pretendard" pitchFamily="34" charset="-120"/>
-                        </a:rPr>
-                        <a:t>임대료 </a:t>
-                      </a:r>
-                      <a:pPr indent="0" marL="0">
-                        <a:buNone/>
-                      </a:pPr>
-                      <a:r>
-                        <a:rPr lang="en-US" sz="1300" dirty="0">
-                          <a:solidFill>
-                            <a:srgbClr val="0F172A"/>
-                          </a:solidFill>
-                          <a:latin typeface="Pretendard" pitchFamily="34" charset="0"/>
-                          <a:ea typeface="Pretendard" pitchFamily="34" charset="-122"/>
-                          <a:cs typeface="Pretendard" pitchFamily="34" charset="-120"/>
-                        </a:rPr>
-                        <a:t>손비 </a:t>
-                      </a:r>
-                      <a:pPr indent="0" marL="0">
-                        <a:buNone/>
-                      </a:pPr>
-                      <a:r>
-                        <a:rPr lang="en-US" sz="1300" dirty="0">
-                          <a:solidFill>
-                            <a:srgbClr val="0F172A"/>
-                          </a:solidFill>
-                          <a:latin typeface="Pretendard" pitchFamily="34" charset="0"/>
-                          <a:ea typeface="Pretendard" pitchFamily="34" charset="-122"/>
-                          <a:cs typeface="Pretendard" pitchFamily="34" charset="-120"/>
-                        </a:rPr>
-                        <a:t>처리</a:t>
-                      </a:r>
-                      <a:endParaRPr lang="en-US" sz="1300" dirty="0">
-                        <a:latin typeface="Pretendard" charset="0"/>
-                        <a:ea typeface="Pretendard" charset="0"/>
-                        <a:cs typeface="Pretendard" charset="0"/>
-                      </a:endParaRPr>
-                    </a:p>
-                  </a:txBody>
-                  <a:tcPr marL="50800" marR="50800" marT="25400" marB="25400" anchor="ctr">
-                    <a:lnL w="3810" cap="flat" cmpd="sng" algn="ctr">
-                      <a:solidFill>
-                        <a:srgbClr val="CBD5E1"/>
-                      </a:solidFill>
-                      <a:prstDash val="solid"/>
-                      <a:round/>
-                      <a:headEnd type="none" w="med" len="med"/>
-                      <a:tailEnd type="none" w="med" len="med"/>
-                    </a:lnL>
-                    <a:lnR w="3810" cap="flat" cmpd="sng" algn="ctr">
-                      <a:solidFill>
-                        <a:srgbClr val="CBD5E1"/>
-                      </a:solidFill>
-                      <a:prstDash val="solid"/>
-                      <a:round/>
-                      <a:headEnd type="none" w="med" len="med"/>
-                      <a:tailEnd type="none" w="med" len="med"/>
-                    </a:lnR>
-                    <a:lnT w="3810" cap="flat" cmpd="sng" algn="ctr">
-                      <a:solidFill>
-                        <a:srgbClr val="CBD5E1"/>
-                      </a:solidFill>
-                      <a:prstDash val="solid"/>
-                      <a:round/>
-                      <a:headEnd type="none" w="med" len="med"/>
-                      <a:tailEnd type="none" w="med" len="med"/>
-                    </a:lnT>
-                    <a:lnB w="3810" cap="flat" cmpd="sng" algn="ctr">
-                      <a:solidFill>
-                        <a:srgbClr val="CBD5E1"/>
-                      </a:solidFill>
-                      <a:prstDash val="solid"/>
-                      <a:round/>
-                      <a:headEnd type="none" w="med" len="med"/>
-                      <a:tailEnd type="none" w="med" len="med"/>
-                    </a:lnB>
-                    <a:solidFill>
-                      <a:srgbClr val="FFFFFF"/>
-                    </a:solidFill>
-                  </a:tcPr>
-                </a:tc>
-                <a:tc>
-                  <a:txBody>
-                    <a:bodyPr/>
-                    <a:lstStyle/>
-                    <a:p>
-                      <a:pPr indent="0" marL="0">
-                        <a:buNone/>
-                      </a:pPr>
-                      <a:r>
-                        <a:rPr lang="en-US" sz="1300" dirty="0">
-                          <a:solidFill>
-                            <a:srgbClr val="0F172A"/>
-                          </a:solidFill>
-                          <a:latin typeface="Pretendard" pitchFamily="34" charset="0"/>
-                          <a:ea typeface="Pretendard" pitchFamily="34" charset="-122"/>
-                          <a:cs typeface="Pretendard" pitchFamily="34" charset="-120"/>
-                        </a:rPr>
-                        <a:t>감가상각 </a:t>
-                      </a:r>
-                      <a:pPr indent="0" marL="0">
-                        <a:buNone/>
-                      </a:pPr>
-                      <a:r>
-                        <a:rPr lang="en-US" sz="1300" dirty="0">
-                          <a:solidFill>
-                            <a:srgbClr val="0F172A"/>
-                          </a:solidFill>
-                          <a:latin typeface="Pretendard" pitchFamily="34" charset="0"/>
-                          <a:ea typeface="Pretendard" pitchFamily="34" charset="-122"/>
-                          <a:cs typeface="Pretendard" pitchFamily="34" charset="-120"/>
-                        </a:rPr>
-                        <a:t>및 </a:t>
-                      </a:r>
-                      <a:pPr indent="0" marL="0">
-                        <a:buNone/>
-                      </a:pPr>
-                      <a:r>
-                        <a:rPr lang="en-US" sz="1300" dirty="0">
-                          <a:solidFill>
-                            <a:srgbClr val="0F172A"/>
-                          </a:solidFill>
-                          <a:latin typeface="Pretendard" pitchFamily="34" charset="0"/>
-                          <a:ea typeface="Pretendard" pitchFamily="34" charset="-122"/>
-                          <a:cs typeface="Pretendard" pitchFamily="34" charset="-120"/>
-                        </a:rPr>
-                        <a:t>이자 </a:t>
-                      </a:r>
-                      <a:pPr indent="0" marL="0">
-                        <a:buNone/>
-                      </a:pPr>
-                      <a:r>
-                        <a:rPr lang="en-US" sz="1300" dirty="0">
-                          <a:solidFill>
-                            <a:srgbClr val="0F172A"/>
-                          </a:solidFill>
-                          <a:latin typeface="Pretendard" pitchFamily="34" charset="0"/>
-                          <a:ea typeface="Pretendard" pitchFamily="34" charset="-122"/>
-                          <a:cs typeface="Pretendard" pitchFamily="34" charset="-120"/>
-                        </a:rPr>
-                        <a:t>비용 </a:t>
-                      </a:r>
-                      <a:pPr indent="0" marL="0">
-                        <a:buNone/>
-                      </a:pPr>
-                      <a:r>
-                        <a:rPr lang="en-US" sz="1300" dirty="0">
-                          <a:solidFill>
-                            <a:srgbClr val="0F172A"/>
-                          </a:solidFill>
-                          <a:latin typeface="Pretendard" pitchFamily="34" charset="0"/>
-                          <a:ea typeface="Pretendard" pitchFamily="34" charset="-122"/>
-                          <a:cs typeface="Pretendard" pitchFamily="34" charset="-120"/>
-                        </a:rPr>
-                        <a:t>처리</a:t>
-                      </a:r>
-                      <a:endParaRPr lang="en-US" sz="1300" dirty="0">
-                        <a:latin typeface="Pretendard" charset="0"/>
-                        <a:ea typeface="Pretendard" charset="0"/>
-                        <a:cs typeface="Pretendard" charset="0"/>
-                      </a:endParaRPr>
-                    </a:p>
-                  </a:txBody>
-                  <a:tcPr marL="50800" marR="50800" marT="25400" marB="25400" anchor="ctr">
-                    <a:lnL w="3810" cap="flat" cmpd="sng" algn="ctr">
-                      <a:solidFill>
-                        <a:srgbClr val="CBD5E1"/>
-                      </a:solidFill>
-                      <a:prstDash val="solid"/>
-                      <a:round/>
-                      <a:headEnd type="none" w="med" len="med"/>
-                      <a:tailEnd type="none" w="med" len="med"/>
-                    </a:lnL>
-                    <a:lnR w="3810" cap="flat" cmpd="sng" algn="ctr">
-                      <a:solidFill>
-                        <a:srgbClr val="CBD5E1"/>
-                      </a:solidFill>
-                      <a:prstDash val="solid"/>
-                      <a:round/>
-                      <a:headEnd type="none" w="med" len="med"/>
-                      <a:tailEnd type="none" w="med" len="med"/>
-                    </a:lnR>
-                    <a:lnT w="3810" cap="flat" cmpd="sng" algn="ctr">
-                      <a:solidFill>
-                        <a:srgbClr val="CBD5E1"/>
-                      </a:solidFill>
-                      <a:prstDash val="solid"/>
-                      <a:round/>
-                      <a:headEnd type="none" w="med" len="med"/>
-                      <a:tailEnd type="none" w="med" len="med"/>
-                    </a:lnT>
-                    <a:lnB w="3810" cap="flat" cmpd="sng" algn="ctr">
-                      <a:solidFill>
-                        <a:srgbClr val="CBD5E1"/>
-                      </a:solidFill>
-                      <a:prstDash val="solid"/>
-                      <a:round/>
-                      <a:headEnd type="none" w="med" len="med"/>
-                      <a:tailEnd type="none" w="med" len="med"/>
-                    </a:lnB>
-                    <a:solidFill>
-                      <a:srgbClr val="FFFFFF"/>
-                    </a:solidFill>
-                  </a:tcPr>
-                </a:tc>
-                <a:tc>
-                  <a:txBody>
-                    <a:bodyPr/>
-                    <a:lstStyle/>
-                    <a:p>
-                      <a:pPr indent="0" marL="0">
-                        <a:buNone/>
-                      </a:pPr>
-                      <a:r>
-                        <a:rPr lang="en-US" sz="1300" dirty="0">
-                          <a:solidFill>
-                            <a:srgbClr val="0F172A"/>
-                          </a:solidFill>
-                          <a:latin typeface="Pretendard" pitchFamily="34" charset="0"/>
-                          <a:ea typeface="Pretendard" pitchFamily="34" charset="-122"/>
-                          <a:cs typeface="Pretendard" pitchFamily="34" charset="-120"/>
-                        </a:rPr>
-                        <a:t>법인세 </a:t>
-                      </a:r>
-                      <a:pPr indent="0" marL="0">
-                        <a:buNone/>
-                      </a:pPr>
-                      <a:r>
-                        <a:rPr lang="en-US" sz="1300" dirty="0">
-                          <a:solidFill>
-                            <a:srgbClr val="0F172A"/>
-                          </a:solidFill>
-                          <a:latin typeface="Pretendard" pitchFamily="34" charset="0"/>
-                          <a:ea typeface="Pretendard" pitchFamily="34" charset="-122"/>
-                          <a:cs typeface="Pretendard" pitchFamily="34" charset="-120"/>
-                        </a:rPr>
-                        <a:t>절감</a:t>
-                      </a:r>
-                      <a:endParaRPr lang="en-US" sz="1300" dirty="0">
-                        <a:latin typeface="Pretendard" charset="0"/>
-                        <a:ea typeface="Pretendard" charset="0"/>
-                        <a:cs typeface="Pretendard" charset="0"/>
-                      </a:endParaRPr>
-                    </a:p>
-                  </a:txBody>
-                  <a:tcPr marL="50800" marR="50800" marT="25400" marB="25400" anchor="ctr">
-                    <a:lnL w="3810" cap="flat" cmpd="sng" algn="ctr">
-                      <a:solidFill>
-                        <a:srgbClr val="CBD5E1"/>
-                      </a:solidFill>
-                      <a:prstDash val="solid"/>
-                      <a:round/>
-                      <a:headEnd type="none" w="med" len="med"/>
-                      <a:tailEnd type="none" w="med" len="med"/>
-                    </a:lnL>
-                    <a:lnR w="3810" cap="flat" cmpd="sng" algn="ctr">
-                      <a:solidFill>
-                        <a:srgbClr val="CBD5E1"/>
-                      </a:solidFill>
-                      <a:prstDash val="solid"/>
-                      <a:round/>
-                      <a:headEnd type="none" w="med" len="med"/>
-                      <a:tailEnd type="none" w="med" len="med"/>
-                    </a:lnR>
-                    <a:lnT w="3810" cap="flat" cmpd="sng" algn="ctr">
-                      <a:solidFill>
-                        <a:srgbClr val="CBD5E1"/>
-                      </a:solidFill>
-                      <a:prstDash val="solid"/>
-                      <a:round/>
-                      <a:headEnd type="none" w="med" len="med"/>
-                      <a:tailEnd type="none" w="med" len="med"/>
-                    </a:lnT>
-                    <a:lnB w="3810" cap="flat" cmpd="sng" algn="ctr">
-                      <a:solidFill>
-                        <a:srgbClr val="CBD5E1"/>
-                      </a:solidFill>
-                      <a:prstDash val="solid"/>
-                      <a:round/>
-                      <a:headEnd type="none" w="med" len="med"/>
-                      <a:tailEnd type="none" w="med" len="med"/>
-                    </a:lnB>
-                    <a:solidFill>
-                      <a:srgbClr val="FFFFFF"/>
-                    </a:solidFill>
-                  </a:tcPr>
-                </a:tc>
-              </a:tr>
-            </a:tbl>
-          </a:graphicData>
-        </a:graphic>
-      </p:graphicFrame>
-      <p:sp>
-        <p:nvSpPr>
-          <p:cNvPr id="6" name="Shape 3"/>
-          <p:cNvSpPr/>
-          <p:nvPr/>
-        </p:nvSpPr>
-        <p:spPr>
-          <a:xfrm>
-            <a:off x="7498080" y="1737360"/>
-            <a:ext cx="4123944" cy="1920240"/>
-          </a:xfrm>
-          <a:prstGeom prst="roundRect">
-            <a:avLst>
-              <a:gd name="adj" fmla="val 2857"/>
-            </a:avLst>
-          </a:prstGeom>
-          <a:solidFill>
-            <a:srgbClr val="DBEAFE"/>
-          </a:solidFill>
-          <a:ln/>
-        </p:spPr>
-      </p:sp>
-      <p:sp>
-        <p:nvSpPr>
-          <p:cNvPr id="7" name="Shape 4"/>
-          <p:cNvSpPr/>
-          <p:nvPr/>
-        </p:nvSpPr>
-        <p:spPr>
-          <a:xfrm>
-            <a:off x="7498080" y="1792224"/>
-            <a:ext cx="36576" cy="1810512"/>
-          </a:xfrm>
-          <a:prstGeom prst="rect">
-            <a:avLst/>
-          </a:prstGeom>
-          <a:solidFill>
-            <a:srgbClr val="1D4ED8"/>
-          </a:solidFill>
-          <a:ln/>
-        </p:spPr>
-      </p:sp>
-      <p:sp>
-        <p:nvSpPr>
-          <p:cNvPr id="8" name="Text 5"/>
-          <p:cNvSpPr/>
-          <p:nvPr/>
-        </p:nvSpPr>
-        <p:spPr>
-          <a:xfrm>
-            <a:off x="7680960" y="1847088"/>
-            <a:ext cx="3794760" cy="201168"/>
-          </a:xfrm>
-          <a:prstGeom prst="rect">
-            <a:avLst/>
-          </a:prstGeom>
-          <a:noFill/>
-          <a:ln/>
-        </p:spPr>
-        <p:txBody>
-          <a:bodyPr wrap="square" lIns="0" tIns="0" rIns="0" bIns="0" rtlCol="0" anchor="ctr"/>
-          <a:lstStyle/>
-          <a:p>
-            <a:pPr indent="0" marL="0">
-              <a:buNone/>
-            </a:pPr>
-            <a:endParaRPr lang="en-US" sz="1050" dirty="0"/>
-          </a:p>
-        </p:txBody>
-      </p:sp>
-      <p:sp>
-        <p:nvSpPr>
-          <p:cNvPr id="9" name="Text 6"/>
-          <p:cNvSpPr/>
-          <p:nvPr/>
-        </p:nvSpPr>
-        <p:spPr>
-          <a:xfrm>
-            <a:off x="7680960" y="2066544"/>
-            <a:ext cx="3794760" cy="1517904"/>
-          </a:xfrm>
-          <a:prstGeom prst="rect">
-            <a:avLst/>
-          </a:prstGeom>
-          <a:noFill/>
-          <a:ln/>
-        </p:spPr>
-        <p:txBody>
-          <a:bodyPr wrap="square" lIns="0" tIns="0" rIns="0" bIns="0" rtlCol="0" anchor="t"/>
-          <a:lstStyle/>
-          <a:p>
-            <a:pPr indent="0" marL="0">
-              <a:lnSpc>
-                <a:spcPct val="120000"/>
-              </a:lnSpc>
-              <a:buNone/>
-            </a:pPr>
-            <a:r>
-              <a:rPr lang="en-US" sz="930" dirty="0">
-                <a:solidFill>
-                  <a:srgbClr val="0F172A"/>
-                </a:solidFill>
-                <a:latin typeface="Pretendard" pitchFamily="34" charset="0"/>
-                <a:ea typeface="Pretendard" pitchFamily="34" charset="-122"/>
-                <a:cs typeface="Pretendard" pitchFamily="34" charset="-120"/>
-              </a:rPr>
-              <a:t>임차 대비 연간 수억 원 수준의 임대료 절감 및 투자금 회수가 기대됩니다.</a:t>
-            </a:r>
-            <a:endParaRPr lang="en-US" sz="930" dirty="0"/>
-          </a:p>
-        </p:txBody>
-      </p:sp>
-      <p:sp>
-        <p:nvSpPr>
-          <p:cNvPr id="10" name="Text 7"/>
+      <p:sp>
+        <p:nvSpPr>
+          <p:cNvPr id="5" name="Text 3"/>
           <p:cNvSpPr/>
           <p:nvPr/>
         </p:nvSpPr>
@@ -8117,7 +5908,7 @@
       </p:sp>
       <p:sp>
         <p:nvSpPr>
-          <p:cNvPr id="11" name="Shape 8"/>
+          <p:cNvPr id="6" name="Shape 4"/>
           <p:cNvSpPr/>
           <p:nvPr/>
         </p:nvSpPr>
@@ -8137,6 +5928,45 @@
             <a:prstDash val="solid"/>
           </a:ln>
         </p:spPr>
+      </p:sp>
+      <p:sp>
+        <p:nvSpPr>
+          <p:cNvPr id="7" name="Text 5"/>
+          <p:cNvSpPr/>
+          <p:nvPr/>
+        </p:nvSpPr>
+        <p:spPr>
+          <a:xfrm>
+            <a:off x="566928" y="1481328"/>
+            <a:ext cx="11057839" cy="9692640"/>
+          </a:xfrm>
+          <a:prstGeom prst="rect">
+            <a:avLst/>
+          </a:prstGeom>
+          <a:noFill/>
+          <a:ln/>
+        </p:spPr>
+        <p:txBody>
+          <a:bodyPr wrap="square" lIns="0" tIns="0" rIns="0" bIns="0" rtlCol="0" anchor="t"/>
+          <a:lstStyle/>
+          <a:p>
+            <a:pPr indent="0" marL="0">
+              <a:buNone/>
+            </a:pPr>
+            <a:r>
+              <a:rPr lang="en-US" sz="1000" dirty="0">
+                <a:solidFill>
+                  <a:srgbClr val="0F172A"/>
+                </a:solidFill>
+                <a:latin typeface="Pretendard" pitchFamily="34" charset="0"/>
+                <a:ea typeface="Pretendard" pitchFamily="34" charset="-122"/>
+                <a:cs typeface="Pretendard" pitchFamily="34" charset="-120"/>
+              </a:rPr>
+              <a:t>{"ok":true,"mocked":true,"extractedFields":{"area_signal":"역삼","asset_type":"오피스빌딩","price_band":"300억","size_signal":"3000평(약 9917.4㎡)"},"extractedFacts":{"region":"역삼","exactAddressCandidate":"역삼동 742-1","assetType":"오피스빌딩","priceText":"300억","sizeText":"3000평(약 9917.4㎡)","currentUse":"오피스","currentUseSignal":"근린생활시설","leaseSignal":"임대중","vacancySignal":"공실없음","tenantNames":["쿠팡","네이버"],"unitRentTexts":["301호: 1500만"],"sellerMotivationText":"자산 효율화","brokerNotes":["초역세권 매물"]},"detectedSensitiveFields":["exact_address","tenant_name"],"ambiguousFields":[],"warnings":[],"areaSignal":"역삼","assetType":"오피스빌딩","priceBand":"300억","sizeSignal":"3000평(약 9917.4㎡)","dealType":"매각","buildingName":"역삼 센트럴타워","exactAddress":"역삼동 742-1","totalFloorArea":9917.3,"buildYear":2015,"currentUseSignal":"근린생활시설","vacancySignal":"공실 없음","fitSummary":"초역세권 근생 빌딩으로 시행/사옥 매입에 최적화","cautionSummary":"주요 임차 업종 만기 조율 필요","hiddenFields":["exact_address","seller_motivation"],"confidence":{"areaSignal":"confirmed","assetType":"confirmed","priceBand":"ai_hypothesis","fitSummary":"ai_hypothesis"},"missingData":["sizeSignal"],"boundaryNote":"본 자료는 실거래 통계 기반 참고치입니다.","buyerType":"법인 사옥형","budgetRange":{"min":50,"max":80,"display":"50억~80억"},"preferredRegions":["강남","성수"],"assetTypes":["꼬마빌딩","사옥용"],"purchasePurpose":"사옥용 매입","mustHave":["초역세권","주차"],"niceToHave":["테라스","루프탑"],"riskTolerance":"medium","financingNote":"자본금 50% 준비","missingQuestions":["구체적인 입주 시기가 언제인가요?","선호하는 수익률이 있나요?"],"privacyNotes":["연락처 비공개"],"fitReasons":["매수자 예산(50-80억)에 부합하는 매물입니다.","요청하신 성수/강남 권역에 해당합니다."],"cautionReasons":["요청한 용도와 달리 명도 협의가 다소 필요합니다."],"recommendedNextAction":"현장 답사 제안","kakaoMessage":"안녕하세요! 요청하신 조건에 부합하는 추천 매물이 있어 안내해 드립니다. 확인해보시고 피드백 부탁드립니다.","title":"강남 역삼역 초역세권 오피스 사옥용 빌딩 매각","shortSummary":"역삼역 도보 5분 거리의 준신축급 대형 오피스빌딩입니다.","dealPoints":["초역세권","사옥 최적"],"cautionPoints":["명도 조율 필요"],"hiddenInfoNotice":["보증금 및 지번은 인가 후 확인 가능"],"gateMessage":"G1 등급 등록이 필요합니다.","kakaoText":"강남 역삼역 오피스 빌딩 매각 안내입니다.","exactUnitCandidate":"101호","floor":"1층","areaSqmText":"150㎡","spaceType":"office","depositText":"5000만","monthlyRentText":"400만","maintenanceFeeText":"50만","availableFromText":"즉시입주","leaseTermMonthsText":"24","incentivesText":"렌트프리 2개월","restrictions":[],"landlordIdentity":"김성수","currentTenant":"스타트업","vacancyReason":"이전 확장","rentNegotiation":"협의 가능","region":"성수동","areaSqm":150,"deposit":5000,"monthlyRent":400,"maintenanceFee":50,"availableFrom":"즉시입주","leaseTermMonths":24,"incentives":{"rentFreeMonths":2,"interiorSupport":"일부 인테리어 지원","freeRentDetail":"렌트프리 2개월 지원"},"shortSummaryLease":"성수역 도보 5분 거리 1층 리테일 상가 매물입니다."}</a:t>
+            </a:r>
+            <a:endParaRPr lang="en-US" sz="1000" dirty="0"/>
+          </a:p>
+        </p:txBody>
       </p:sp>
     </p:spTree>
   </p:cSld>
@@ -8366,7 +6196,7 @@
                 <a:ea typeface="Pretendard" pitchFamily="34" charset="-122"/>
                 <a:cs typeface="Pretendard" pitchFamily="34" charset="-120"/>
               </a:rPr>
-              <a:t>용도 리스크</a:t>
+              <a:t>건물 물리적 상태</a:t>
             </a:r>
             <a:endParaRPr lang="en-US" sz="1350" dirty="0"/>
           </a:p>
@@ -8405,7 +6235,7 @@
                 <a:ea typeface="Pretendard" pitchFamily="34" charset="-122"/>
                 <a:cs typeface="Pretendard" pitchFamily="34" charset="-120"/>
               </a:rPr>
-              <a:t>—</a:t>
+              <a:t>2017년 준공 신축급 상태 (누수/균열</a:t>
             </a:r>
             <a:endParaRPr lang="en-US" sz="1500" dirty="0"/>
           </a:p>
@@ -8445,7 +6275,7 @@
                 <a:ea typeface="Pretendard" pitchFamily="34" charset="-122"/>
                 <a:cs typeface="Pretendard" pitchFamily="34" charset="-120"/>
               </a:rPr>
-              <a:t>{"ok":true,"mocked":true,"extractedFields":{"area_signal":"역삼","asset_type":"오피스빌딩","price_band":"300억","size_signal":"3000평(약 9917.4㎡)"},"extractedFacts":{"region":"역삼","exactAddressCandidate":"역삼동 7</a:t>
+              <a:t>준공 10년 미만으로 대규모 수선비용 발생 가능성 낮음</a:t>
             </a:r>
             <a:endParaRPr lang="en-US" sz="1250" dirty="0"/>
           </a:p>
@@ -8453,7 +6283,457 @@
       </p:sp>
       <p:sp>
         <p:nvSpPr>
-          <p:cNvPr id="11" name="Text 9"/>
+          <p:cNvPr id="11" name="Shape 9"/>
+          <p:cNvSpPr/>
+          <p:nvPr/>
+        </p:nvSpPr>
+        <p:spPr>
+          <a:xfrm>
+            <a:off x="4344314" y="1417320"/>
+            <a:ext cx="3503066" cy="3611880"/>
+          </a:xfrm>
+          <a:prstGeom prst="rect">
+            <a:avLst/>
+          </a:prstGeom>
+          <a:solidFill>
+            <a:srgbClr val="F8FAFC"/>
+          </a:solidFill>
+          <a:ln w="3810">
+            <a:solidFill>
+              <a:srgbClr val="CBD5E1"/>
+            </a:solidFill>
+            <a:prstDash val="solid"/>
+          </a:ln>
+        </p:spPr>
+      </p:sp>
+      <p:sp>
+        <p:nvSpPr>
+          <p:cNvPr id="12" name="Shape 10"/>
+          <p:cNvSpPr/>
+          <p:nvPr/>
+        </p:nvSpPr>
+        <p:spPr>
+          <a:xfrm>
+            <a:off x="4344314" y="1417320"/>
+            <a:ext cx="3503066" cy="36576"/>
+          </a:xfrm>
+          <a:prstGeom prst="rect">
+            <a:avLst/>
+          </a:prstGeom>
+          <a:solidFill>
+            <a:srgbClr val="6B8E00"/>
+          </a:solidFill>
+          <a:ln/>
+        </p:spPr>
+      </p:sp>
+      <p:sp>
+        <p:nvSpPr>
+          <p:cNvPr id="13" name="Shape 11"/>
+          <p:cNvSpPr/>
+          <p:nvPr/>
+        </p:nvSpPr>
+        <p:spPr>
+          <a:xfrm>
+            <a:off x="4344314" y="1417320"/>
+            <a:ext cx="3503066" cy="45720"/>
+          </a:xfrm>
+          <a:prstGeom prst="rect">
+            <a:avLst/>
+          </a:prstGeom>
+          <a:solidFill>
+            <a:srgbClr val="6B8E00"/>
+          </a:solidFill>
+          <a:ln/>
+        </p:spPr>
+      </p:sp>
+      <p:sp>
+        <p:nvSpPr>
+          <p:cNvPr id="14" name="Text 12"/>
+          <p:cNvSpPr/>
+          <p:nvPr/>
+        </p:nvSpPr>
+        <p:spPr>
+          <a:xfrm>
+            <a:off x="4572914" y="1618488"/>
+            <a:ext cx="3045866" cy="292608"/>
+          </a:xfrm>
+          <a:prstGeom prst="rect">
+            <a:avLst/>
+          </a:prstGeom>
+          <a:noFill/>
+          <a:ln/>
+        </p:spPr>
+        <p:txBody>
+          <a:bodyPr wrap="square" lIns="0" tIns="0" rIns="0" bIns="0" rtlCol="0" anchor="ctr"/>
+          <a:lstStyle/>
+          <a:p>
+            <a:pPr indent="0" marL="0">
+              <a:buNone/>
+            </a:pPr>
+            <a:r>
+              <a:rPr lang="en-US" sz="1350" b="1" dirty="0">
+                <a:solidFill>
+                  <a:srgbClr val="4F6A00"/>
+                </a:solidFill>
+                <a:latin typeface="Pretendard" pitchFamily="34" charset="0"/>
+                <a:ea typeface="Pretendard" pitchFamily="34" charset="-122"/>
+                <a:cs typeface="Pretendard" pitchFamily="34" charset="-120"/>
+              </a:rPr>
+              <a:t>승강기 및 설비</a:t>
+            </a:r>
+            <a:endParaRPr lang="en-US" sz="1350" dirty="0"/>
+          </a:p>
+        </p:txBody>
+      </p:sp>
+      <p:sp>
+        <p:nvSpPr>
+          <p:cNvPr id="15" name="Text 13"/>
+          <p:cNvSpPr/>
+          <p:nvPr/>
+        </p:nvSpPr>
+        <p:spPr>
+          <a:xfrm>
+            <a:off x="4572914" y="1929384"/>
+            <a:ext cx="3045866" cy="347472"/>
+          </a:xfrm>
+          <a:prstGeom prst="rect">
+            <a:avLst/>
+          </a:prstGeom>
+          <a:noFill/>
+          <a:ln/>
+        </p:spPr>
+        <p:txBody>
+          <a:bodyPr wrap="square" lIns="0" tIns="0" rIns="0" bIns="0" rtlCol="0" anchor="ctr"/>
+          <a:lstStyle/>
+          <a:p>
+            <a:pPr indent="0" marL="0">
+              <a:buNone/>
+            </a:pPr>
+            <a:r>
+              <a:rPr lang="en-US" sz="1500" b="1" dirty="0">
+                <a:solidFill>
+                  <a:srgbClr val="0F172A"/>
+                </a:solidFill>
+                <a:latin typeface="Pretendard" pitchFamily="34" charset="0"/>
+                <a:ea typeface="Pretendard" pitchFamily="34" charset="-122"/>
+                <a:cs typeface="Pretendard" pitchFamily="34" charset="-120"/>
+              </a:rPr>
+              <a:t>15인승 침대용 승강기 및 냉난방 설비 </a:t>
+            </a:r>
+            <a:endParaRPr lang="en-US" sz="1500" dirty="0"/>
+          </a:p>
+        </p:txBody>
+      </p:sp>
+      <p:sp>
+        <p:nvSpPr>
+          <p:cNvPr id="16" name="Text 14"/>
+          <p:cNvSpPr/>
+          <p:nvPr/>
+        </p:nvSpPr>
+        <p:spPr>
+          <a:xfrm>
+            <a:off x="4572914" y="2313432"/>
+            <a:ext cx="3045866" cy="2606040"/>
+          </a:xfrm>
+          <a:prstGeom prst="rect">
+            <a:avLst/>
+          </a:prstGeom>
+          <a:noFill/>
+          <a:ln/>
+        </p:spPr>
+        <p:txBody>
+          <a:bodyPr wrap="square" lIns="0" tIns="0" rIns="0" bIns="0" rtlCol="0" anchor="t"/>
+          <a:lstStyle/>
+          <a:p>
+            <a:pPr marL="342900" indent="-342900">
+              <a:buSzPct val="100000"/>
+              <a:buChar char="•"/>
+            </a:pPr>
+            <a:r>
+              <a:rPr lang="en-US" sz="1250" dirty="0">
+                <a:solidFill>
+                  <a:srgbClr val="0F172A"/>
+                </a:solidFill>
+                <a:latin typeface="Pretendard" pitchFamily="34" charset="0"/>
+                <a:ea typeface="Pretendard" pitchFamily="34" charset="-122"/>
+                <a:cs typeface="Pretendard" pitchFamily="34" charset="-120"/>
+              </a:rPr>
+              <a:t>주기적 정기 점검 계약 유지로 관리 리스크 최소화</a:t>
+            </a:r>
+            <a:endParaRPr lang="en-US" sz="1250" dirty="0"/>
+          </a:p>
+        </p:txBody>
+      </p:sp>
+      <p:sp>
+        <p:nvSpPr>
+          <p:cNvPr id="17" name="Shape 15"/>
+          <p:cNvSpPr/>
+          <p:nvPr/>
+        </p:nvSpPr>
+        <p:spPr>
+          <a:xfrm>
+            <a:off x="8121701" y="1417320"/>
+            <a:ext cx="3503066" cy="3611880"/>
+          </a:xfrm>
+          <a:prstGeom prst="rect">
+            <a:avLst/>
+          </a:prstGeom>
+          <a:solidFill>
+            <a:srgbClr val="F8FAFC"/>
+          </a:solidFill>
+          <a:ln w="3810">
+            <a:solidFill>
+              <a:srgbClr val="CBD5E1"/>
+            </a:solidFill>
+            <a:prstDash val="solid"/>
+          </a:ln>
+        </p:spPr>
+      </p:sp>
+      <p:sp>
+        <p:nvSpPr>
+          <p:cNvPr id="18" name="Shape 16"/>
+          <p:cNvSpPr/>
+          <p:nvPr/>
+        </p:nvSpPr>
+        <p:spPr>
+          <a:xfrm>
+            <a:off x="8121701" y="1417320"/>
+            <a:ext cx="3503066" cy="36576"/>
+          </a:xfrm>
+          <a:prstGeom prst="rect">
+            <a:avLst/>
+          </a:prstGeom>
+          <a:solidFill>
+            <a:srgbClr val="6B8E00"/>
+          </a:solidFill>
+          <a:ln/>
+        </p:spPr>
+      </p:sp>
+      <p:sp>
+        <p:nvSpPr>
+          <p:cNvPr id="19" name="Shape 17"/>
+          <p:cNvSpPr/>
+          <p:nvPr/>
+        </p:nvSpPr>
+        <p:spPr>
+          <a:xfrm>
+            <a:off x="8121701" y="1417320"/>
+            <a:ext cx="3503066" cy="45720"/>
+          </a:xfrm>
+          <a:prstGeom prst="rect">
+            <a:avLst/>
+          </a:prstGeom>
+          <a:solidFill>
+            <a:srgbClr val="6B8E00"/>
+          </a:solidFill>
+          <a:ln/>
+        </p:spPr>
+      </p:sp>
+      <p:sp>
+        <p:nvSpPr>
+          <p:cNvPr id="20" name="Text 18"/>
+          <p:cNvSpPr/>
+          <p:nvPr/>
+        </p:nvSpPr>
+        <p:spPr>
+          <a:xfrm>
+            <a:off x="8350301" y="1618488"/>
+            <a:ext cx="3045866" cy="292608"/>
+          </a:xfrm>
+          <a:prstGeom prst="rect">
+            <a:avLst/>
+          </a:prstGeom>
+          <a:noFill/>
+          <a:ln/>
+        </p:spPr>
+        <p:txBody>
+          <a:bodyPr wrap="square" lIns="0" tIns="0" rIns="0" bIns="0" rtlCol="0" anchor="ctr"/>
+          <a:lstStyle/>
+          <a:p>
+            <a:pPr indent="0" marL="0">
+              <a:buNone/>
+            </a:pPr>
+            <a:r>
+              <a:rPr lang="en-US" sz="1350" b="1" dirty="0">
+                <a:solidFill>
+                  <a:srgbClr val="4F6A00"/>
+                </a:solidFill>
+                <a:latin typeface="Pretendard" pitchFamily="34" charset="0"/>
+                <a:ea typeface="Pretendard" pitchFamily="34" charset="-122"/>
+                <a:cs typeface="Pretendard" pitchFamily="34" charset="-120"/>
+              </a:rPr>
+              <a:t>임차인 이탈 위험</a:t>
+            </a:r>
+            <a:endParaRPr lang="en-US" sz="1350" dirty="0"/>
+          </a:p>
+        </p:txBody>
+      </p:sp>
+      <p:sp>
+        <p:nvSpPr>
+          <p:cNvPr id="21" name="Text 19"/>
+          <p:cNvSpPr/>
+          <p:nvPr/>
+        </p:nvSpPr>
+        <p:spPr>
+          <a:xfrm>
+            <a:off x="8350301" y="1929384"/>
+            <a:ext cx="3045866" cy="347472"/>
+          </a:xfrm>
+          <a:prstGeom prst="rect">
+            <a:avLst/>
+          </a:prstGeom>
+          <a:noFill/>
+          <a:ln/>
+        </p:spPr>
+        <p:txBody>
+          <a:bodyPr wrap="square" lIns="0" tIns="0" rIns="0" bIns="0" rtlCol="0" anchor="ctr"/>
+          <a:lstStyle/>
+          <a:p>
+            <a:pPr indent="0" marL="0">
+              <a:buNone/>
+            </a:pPr>
+            <a:r>
+              <a:rPr lang="en-US" sz="1500" b="1" dirty="0">
+                <a:solidFill>
+                  <a:srgbClr val="0F172A"/>
+                </a:solidFill>
+                <a:latin typeface="Pretendard" pitchFamily="34" charset="0"/>
+                <a:ea typeface="Pretendard" pitchFamily="34" charset="-122"/>
+                <a:cs typeface="Pretendard" pitchFamily="34" charset="-120"/>
+              </a:rPr>
+              <a:t>병의원/약국 인테리어 투자비(호실당 5억</a:t>
+            </a:r>
+            <a:endParaRPr lang="en-US" sz="1500" dirty="0"/>
+          </a:p>
+        </p:txBody>
+      </p:sp>
+      <p:sp>
+        <p:nvSpPr>
+          <p:cNvPr id="22" name="Text 20"/>
+          <p:cNvSpPr/>
+          <p:nvPr/>
+        </p:nvSpPr>
+        <p:spPr>
+          <a:xfrm>
+            <a:off x="8350301" y="2313432"/>
+            <a:ext cx="3045866" cy="2606040"/>
+          </a:xfrm>
+          <a:prstGeom prst="rect">
+            <a:avLst/>
+          </a:prstGeom>
+          <a:noFill/>
+          <a:ln/>
+        </p:spPr>
+        <p:txBody>
+          <a:bodyPr wrap="square" lIns="0" tIns="0" rIns="0" bIns="0" rtlCol="0" anchor="t"/>
+          <a:lstStyle/>
+          <a:p>
+            <a:pPr marL="342900" indent="-342900">
+              <a:buSzPct val="100000"/>
+              <a:buChar char="•"/>
+            </a:pPr>
+            <a:r>
+              <a:rPr lang="en-US" sz="1250" dirty="0">
+                <a:solidFill>
+                  <a:srgbClr val="0F172A"/>
+                </a:solidFill>
+                <a:latin typeface="Pretendard" pitchFamily="34" charset="0"/>
+                <a:ea typeface="Pretendard" pitchFamily="34" charset="-122"/>
+                <a:cs typeface="Pretendard" pitchFamily="34" charset="-120"/>
+              </a:rPr>
+              <a:t>WALE 3.5년 확보 및 만기 6개월 전 재계약 협상 개시</a:t>
+            </a:r>
+            <a:endParaRPr lang="en-US" sz="1250" dirty="0"/>
+          </a:p>
+        </p:txBody>
+      </p:sp>
+      <p:sp>
+        <p:nvSpPr>
+          <p:cNvPr id="23" name="Shape 21"/>
+          <p:cNvSpPr/>
+          <p:nvPr/>
+        </p:nvSpPr>
+        <p:spPr>
+          <a:xfrm>
+            <a:off x="566928" y="5193792"/>
+            <a:ext cx="11057839" cy="621792"/>
+          </a:xfrm>
+          <a:prstGeom prst="rect">
+            <a:avLst/>
+          </a:prstGeom>
+          <a:solidFill>
+            <a:srgbClr val="F8FAFC"/>
+          </a:solidFill>
+          <a:ln w="3810">
+            <a:solidFill>
+              <a:srgbClr val="CBD5E1"/>
+            </a:solidFill>
+            <a:prstDash val="solid"/>
+          </a:ln>
+        </p:spPr>
+      </p:sp>
+      <p:sp>
+        <p:nvSpPr>
+          <p:cNvPr id="24" name="Shape 22"/>
+          <p:cNvSpPr/>
+          <p:nvPr/>
+        </p:nvSpPr>
+        <p:spPr>
+          <a:xfrm>
+            <a:off x="566928" y="5193792"/>
+            <a:ext cx="11057839" cy="36576"/>
+          </a:xfrm>
+          <a:prstGeom prst="rect">
+            <a:avLst/>
+          </a:prstGeom>
+          <a:solidFill>
+            <a:srgbClr val="6B8E00"/>
+          </a:solidFill>
+          <a:ln/>
+        </p:spPr>
+      </p:sp>
+      <p:sp>
+        <p:nvSpPr>
+          <p:cNvPr id="25" name="Text 23"/>
+          <p:cNvSpPr/>
+          <p:nvPr/>
+        </p:nvSpPr>
+        <p:spPr>
+          <a:xfrm>
+            <a:off x="795528" y="5193792"/>
+            <a:ext cx="10600639" cy="621792"/>
+          </a:xfrm>
+          <a:prstGeom prst="rect">
+            <a:avLst/>
+          </a:prstGeom>
+          <a:noFill/>
+          <a:ln/>
+        </p:spPr>
+        <p:txBody>
+          <a:bodyPr wrap="square" lIns="0" tIns="0" rIns="0" bIns="0" rtlCol="0" anchor="ctr"/>
+          <a:lstStyle/>
+          <a:p>
+            <a:pPr indent="0" marL="0">
+              <a:buNone/>
+            </a:pPr>
+            <a:r>
+              <a:rPr lang="en-US" sz="1200" dirty="0">
+                <a:solidFill>
+                  <a:srgbClr val="0F172A"/>
+                </a:solidFill>
+                <a:latin typeface="Pretendard" pitchFamily="34" charset="0"/>
+                <a:ea typeface="Pretendard" pitchFamily="34" charset="-122"/>
+                <a:cs typeface="Pretendard" pitchFamily="34" charset="-120"/>
+              </a:rPr>
+              <a:t>실사 총평: 자산의 물리적·권리적 하자가 없으며, 세부 임대차 계약서 및 등기사항증명서는 LOI 접수 후 원본 열람 검토 여지가 있으나, 관련 법규·인허가·시설 요건의 현장 확인이 필요합니다..</a:t>
+            </a:r>
+            <a:endParaRPr lang="en-US" sz="1200" dirty="0"/>
+          </a:p>
+        </p:txBody>
+      </p:sp>
+      <p:sp>
+        <p:nvSpPr>
+          <p:cNvPr id="26" name="Text 24"/>
           <p:cNvSpPr/>
           <p:nvPr/>
         </p:nvSpPr>
@@ -8492,7 +6772,7 @@
       </p:sp>
       <p:sp>
         <p:nvSpPr>
-          <p:cNvPr id="12" name="Shape 10"/>
+          <p:cNvPr id="27" name="Shape 25"/>
           <p:cNvSpPr/>
           <p:nvPr/>
         </p:nvSpPr>

--- a/docs/test/stress/e2e-outputs/owner_occupied_case08_hannam_flagship_basic.pptx
+++ b/docs/test/stress/e2e-outputs/owner_occupied_case08_hannam_flagship_basic.pptx
@@ -1658,7 +1658,7 @@
     <p:bg>
       <p:bgPr>
         <a:solidFill>
-          <a:srgbClr val="0F172A"/>
+          <a:srgbClr val="10161F"/>
         </a:solidFill>
       </p:bgPr>
     </p:bg>
@@ -1753,7 +1753,7 @@
           <a:noFill/>
           <a:ln w="10160">
             <a:solidFill>
-              <a:srgbClr val="6B8E00"/>
+              <a:srgbClr val="B98A2E"/>
             </a:solidFill>
             <a:prstDash val="solid"/>
           </a:ln>
@@ -1767,14 +1767,14 @@
         </p:nvSpPr>
         <p:spPr>
           <a:xfrm>
-            <a:off x="7772400" y="0"/>
-            <a:ext cx="4419295" cy="6858000"/>
+            <a:off x="8275320" y="0"/>
+            <a:ext cx="1417320" cy="4041648"/>
           </a:xfrm>
           <a:prstGeom prst="rect">
             <a:avLst/>
           </a:prstGeom>
           <a:solidFill>
-            <a:srgbClr val="6B8E00"/>
+            <a:srgbClr val="1A2030"/>
           </a:solidFill>
           <a:ln/>
         </p:spPr>
@@ -1786,24 +1786,42 @@
           <p:nvPr/>
         </p:nvSpPr>
         <p:spPr>
-          <a:xfrm rot="120000">
-            <a:off x="8412480" y="548640"/>
-            <a:ext cx="3291840" cy="5760720"/>
+          <a:xfrm>
+            <a:off x="9784080" y="868680"/>
+            <a:ext cx="1143000" cy="3172968"/>
           </a:xfrm>
           <a:prstGeom prst="rect">
             <a:avLst/>
           </a:prstGeom>
           <a:solidFill>
-            <a:srgbClr val="0F172A">
-              <a:alpha val="12000"/>
-            </a:srgbClr>
+            <a:srgbClr val="161D2B"/>
           </a:solidFill>
           <a:ln/>
         </p:spPr>
       </p:sp>
       <p:sp>
         <p:nvSpPr>
-          <p:cNvPr id="8" name="Text 6"/>
+          <p:cNvPr id="8" name="Shape 6"/>
+          <p:cNvSpPr/>
+          <p:nvPr/>
+        </p:nvSpPr>
+        <p:spPr>
+          <a:xfrm>
+            <a:off x="11018520" y="1691640"/>
+            <a:ext cx="1170432" cy="2350008"/>
+          </a:xfrm>
+          <a:prstGeom prst="rect">
+            <a:avLst/>
+          </a:prstGeom>
+          <a:solidFill>
+            <a:srgbClr val="2E2718"/>
+          </a:solidFill>
+          <a:ln/>
+        </p:spPr>
+      </p:sp>
+      <p:sp>
+        <p:nvSpPr>
+          <p:cNvPr id="9" name="Text 7"/>
           <p:cNvSpPr/>
           <p:nvPr/>
         </p:nvSpPr>
@@ -1842,7 +1860,7 @@
             <a:r>
               <a:rPr lang="en-US" sz="1500" b="1" dirty="0">
                 <a:solidFill>
-                  <a:srgbClr val="6B8E00"/>
+                  <a:srgbClr val="B98A2E"/>
                 </a:solidFill>
                 <a:latin typeface="Arial" pitchFamily="34" charset="0"/>
                 <a:ea typeface="Arial" pitchFamily="34" charset="-122"/>
@@ -1856,115 +1874,76 @@
       </p:sp>
       <p:sp>
         <p:nvSpPr>
-          <p:cNvPr id="9" name="Text 7"/>
-          <p:cNvSpPr/>
-          <p:nvPr/>
-        </p:nvSpPr>
-        <p:spPr>
-          <a:xfrm>
-            <a:off x="8229600" y="5303520"/>
-            <a:ext cx="3474720" cy="365760"/>
-          </a:xfrm>
-          <a:prstGeom prst="rect">
-            <a:avLst/>
-          </a:prstGeom>
-          <a:noFill/>
-          <a:ln/>
-        </p:spPr>
-        <p:txBody>
-          <a:bodyPr wrap="square" lIns="0" tIns="0" rIns="0" bIns="0" rtlCol="0" anchor="ctr"/>
-          <a:lstStyle/>
-          <a:p>
-            <a:pPr algn="ctr" indent="0" marL="0">
-              <a:buNone/>
-            </a:pPr>
-            <a:r>
-              <a:rPr lang="en-US" sz="1000" dirty="0">
-                <a:solidFill>
-                  <a:srgbClr val="0F172A"/>
+          <p:cNvPr id="10" name="Text 8"/>
+          <p:cNvSpPr/>
+          <p:nvPr/>
+        </p:nvSpPr>
+        <p:spPr>
+          <a:xfrm>
+            <a:off x="566928" y="2029968"/>
+            <a:ext cx="7315200" cy="274320"/>
+          </a:xfrm>
+          <a:prstGeom prst="rect">
+            <a:avLst/>
+          </a:prstGeom>
+          <a:noFill/>
+          <a:ln/>
+        </p:spPr>
+        <p:txBody>
+          <a:bodyPr wrap="square" lIns="0" tIns="0" rIns="0" bIns="0" rtlCol="0" anchor="ctr"/>
+          <a:lstStyle/>
+          <a:p>
+            <a:pPr algn="l" indent="0" marL="0">
+              <a:buNone/>
+            </a:pPr>
+            <a:r>
+              <a:rPr lang="en-US" sz="1000" b="1" spc="250" kern="0" dirty="0">
+                <a:solidFill>
+                  <a:srgbClr val="B98A2E"/>
+                </a:solidFill>
+                <a:latin typeface="Arial" pitchFamily="34" charset="0"/>
+                <a:ea typeface="Arial" pitchFamily="34" charset="-122"/>
+                <a:cs typeface="Arial" pitchFamily="34" charset="-120"/>
+              </a:rPr>
+              <a:t>BASIC IM</a:t>
+            </a:r>
+            <a:endParaRPr lang="en-US" sz="1000" dirty="0"/>
+          </a:p>
+        </p:txBody>
+      </p:sp>
+      <p:sp>
+        <p:nvSpPr>
+          <p:cNvPr id="11" name="Text 9"/>
+          <p:cNvSpPr/>
+          <p:nvPr/>
+        </p:nvSpPr>
+        <p:spPr>
+          <a:xfrm>
+            <a:off x="566928" y="2304288"/>
+            <a:ext cx="7315200" cy="731520"/>
+          </a:xfrm>
+          <a:prstGeom prst="rect">
+            <a:avLst/>
+          </a:prstGeom>
+          <a:noFill/>
+          <a:ln/>
+        </p:spPr>
+        <p:txBody>
+          <a:bodyPr wrap="square" lIns="0" tIns="0" rIns="0" bIns="0" rtlCol="0" anchor="ctr"/>
+          <a:lstStyle/>
+          <a:p>
+            <a:pPr algn="l" indent="0" marL="0">
+              <a:buNone/>
+            </a:pPr>
+            <a:r>
+              <a:rPr lang="en-US" sz="4000" b="1" dirty="0">
+                <a:solidFill>
+                  <a:srgbClr val="FFFFFF"/>
                 </a:solidFill>
                 <a:latin typeface="Pretendard" pitchFamily="34" charset="0"/>
                 <a:ea typeface="Pretendard" pitchFamily="34" charset="-122"/>
                 <a:cs typeface="Pretendard" pitchFamily="34" charset="-120"/>
               </a:rPr>
-              <a:t>상업용 부동산 투자 플랫폼</a:t>
-            </a:r>
-            <a:endParaRPr lang="en-US" sz="1000" dirty="0"/>
-          </a:p>
-        </p:txBody>
-      </p:sp>
-      <p:sp>
-        <p:nvSpPr>
-          <p:cNvPr id="10" name="Text 8"/>
-          <p:cNvSpPr/>
-          <p:nvPr/>
-        </p:nvSpPr>
-        <p:spPr>
-          <a:xfrm>
-            <a:off x="566928" y="2029968"/>
-            <a:ext cx="7315200" cy="274320"/>
-          </a:xfrm>
-          <a:prstGeom prst="rect">
-            <a:avLst/>
-          </a:prstGeom>
-          <a:noFill/>
-          <a:ln/>
-        </p:spPr>
-        <p:txBody>
-          <a:bodyPr wrap="square" lIns="0" tIns="0" rIns="0" bIns="0" rtlCol="0" anchor="ctr"/>
-          <a:lstStyle/>
-          <a:p>
-            <a:pPr algn="l" indent="0" marL="0">
-              <a:buNone/>
-            </a:pPr>
-            <a:r>
-              <a:rPr lang="en-US" sz="1000" b="1" spc="250" kern="0" dirty="0">
-                <a:solidFill>
-                  <a:srgbClr val="6B8E00"/>
-                </a:solidFill>
-                <a:latin typeface="Arial" pitchFamily="34" charset="0"/>
-                <a:ea typeface="Arial" pitchFamily="34" charset="-122"/>
-                <a:cs typeface="Arial" pitchFamily="34" charset="-120"/>
-              </a:rPr>
-              <a:t>BASIC IM</a:t>
-            </a:r>
-            <a:endParaRPr lang="en-US" sz="1000" dirty="0"/>
-          </a:p>
-        </p:txBody>
-      </p:sp>
-      <p:sp>
-        <p:nvSpPr>
-          <p:cNvPr id="11" name="Text 9"/>
-          <p:cNvSpPr/>
-          <p:nvPr/>
-        </p:nvSpPr>
-        <p:spPr>
-          <a:xfrm>
-            <a:off x="566928" y="2304288"/>
-            <a:ext cx="7315200" cy="731520"/>
-          </a:xfrm>
-          <a:prstGeom prst="rect">
-            <a:avLst/>
-          </a:prstGeom>
-          <a:noFill/>
-          <a:ln/>
-        </p:spPr>
-        <p:txBody>
-          <a:bodyPr wrap="square" lIns="0" tIns="0" rIns="0" bIns="0" rtlCol="0" anchor="ctr"/>
-          <a:lstStyle/>
-          <a:p>
-            <a:pPr algn="l" indent="0" marL="0">
-              <a:buNone/>
-            </a:pPr>
-            <a:r>
-              <a:rPr lang="en-US" sz="4000" b="1" dirty="0">
-                <a:solidFill>
-                  <a:srgbClr val="FFFFFF"/>
-                </a:solidFill>
-                <a:latin typeface="Pretendard" pitchFamily="34" charset="0"/>
-                <a:ea typeface="Pretendard" pitchFamily="34" charset="-122"/>
-                <a:cs typeface="Pretendard" pitchFamily="34" charset="-120"/>
-              </a:rPr>
               <a:t>owner_occupied IM</a:t>
             </a:r>
             <a:endParaRPr lang="en-US" sz="4000" dirty="0"/>
@@ -1998,7 +1977,7 @@
             <a:r>
               <a:rPr lang="en-US" sz="1400" dirty="0">
                 <a:solidFill>
-                  <a:srgbClr val="F1F5F9"/>
+                  <a:srgbClr val="E2E8F0"/>
                 </a:solidFill>
                 <a:latin typeface="Pretendard" pitchFamily="34" charset="0"/>
                 <a:ea typeface="Pretendard" pitchFamily="34" charset="-122"/>
@@ -2027,7 +2006,7 @@
             </a:avLst>
           </a:prstGeom>
           <a:solidFill>
-            <a:srgbClr val="334155"/>
+            <a:srgbClr val="2D3748"/>
           </a:solidFill>
           <a:ln/>
         </p:spPr>
@@ -2088,7 +2067,7 @@
             </a:avLst>
           </a:prstGeom>
           <a:solidFill>
-            <a:srgbClr val="334155"/>
+            <a:srgbClr val="2D3748"/>
           </a:solidFill>
           <a:ln/>
         </p:spPr>
@@ -2149,11 +2128,11 @@
             </a:avLst>
           </a:prstGeom>
           <a:solidFill>
-            <a:srgbClr val="4F6A00"/>
+            <a:srgbClr val="977024"/>
           </a:solidFill>
           <a:ln w="12700">
             <a:solidFill>
-              <a:srgbClr val="6B8E00"/>
+              <a:srgbClr val="B98A2E"/>
             </a:solidFill>
             <a:prstDash val="solid"/>
           </a:ln>
@@ -2186,7 +2165,7 @@
             <a:r>
               <a:rPr lang="en-US" sz="2200" b="1" dirty="0">
                 <a:solidFill>
-                  <a:srgbClr val="E8F5CC"/>
+                  <a:srgbClr val="F3EBDA"/>
                 </a:solidFill>
                 <a:latin typeface="Pretendard" pitchFamily="34" charset="0"/>
                 <a:ea typeface="Pretendard" pitchFamily="34" charset="-122"/>
@@ -2234,59 +2213,75 @@
         </p:nvSpPr>
         <p:spPr>
           <a:xfrm>
-            <a:off x="566928" y="6419088"/>
-            <a:ext cx="11057839" cy="201168"/>
-          </a:xfrm>
-          <a:prstGeom prst="rect">
-            <a:avLst/>
-          </a:prstGeom>
-          <a:noFill/>
-          <a:ln/>
-        </p:spPr>
-        <p:txBody>
-          <a:bodyPr wrap="square" lIns="0" tIns="0" rIns="0" bIns="0" rtlCol="0" anchor="ctr"/>
-          <a:lstStyle/>
-          <a:p>
-            <a:pPr algn="ctr" indent="0" marL="0">
-              <a:buNone/>
-            </a:pPr>
-            <a:r>
-              <a:rPr lang="en-US" sz="750" dirty="0">
-                <a:solidFill>
-                  <a:srgbClr val="64748B"/>
+            <a:off x="566928" y="6382512"/>
+            <a:ext cx="7315200" cy="219456"/>
+          </a:xfrm>
+          <a:prstGeom prst="rect">
+            <a:avLst/>
+          </a:prstGeom>
+          <a:noFill/>
+          <a:ln/>
+        </p:spPr>
+        <p:txBody>
+          <a:bodyPr wrap="square" lIns="0" tIns="0" rIns="0" bIns="0" rtlCol="0" anchor="ctr"/>
+          <a:lstStyle/>
+          <a:p>
+            <a:pPr indent="0" marL="0">
+              <a:buNone/>
+            </a:pPr>
+            <a:r>
+              <a:rPr lang="en-US" sz="800" dirty="0">
+                <a:solidFill>
+                  <a:srgbClr val="718096"/>
                 </a:solidFill>
                 <a:latin typeface="Pretendard" pitchFamily="34" charset="0"/>
                 <a:ea typeface="Pretendard" pitchFamily="34" charset="-122"/>
                 <a:cs typeface="Pretendard" pitchFamily="34" charset="-120"/>
               </a:rPr>
-              <a:t>크리딜  ·    ·  1</a:t>
-            </a:r>
-            <a:endParaRPr lang="en-US" sz="750" dirty="0"/>
-          </a:p>
-        </p:txBody>
-      </p:sp>
-      <p:sp>
-        <p:nvSpPr>
-          <p:cNvPr id="21" name="Shape 19"/>
-          <p:cNvSpPr/>
-          <p:nvPr/>
-        </p:nvSpPr>
-        <p:spPr>
-          <a:xfrm>
-            <a:off x="4437172" y="6382512"/>
-            <a:ext cx="3317352" cy="0"/>
-          </a:xfrm>
-          <a:prstGeom prst="line">
-            <a:avLst/>
-          </a:prstGeom>
-          <a:noFill/>
-          <a:ln w="6350">
-            <a:solidFill>
-              <a:srgbClr val="6B8E00"/>
-            </a:solidFill>
-            <a:prstDash val="solid"/>
-          </a:ln>
-        </p:spPr>
+              <a:t>크리딜   |   </a:t>
+            </a:r>
+            <a:endParaRPr lang="en-US" sz="800" dirty="0"/>
+          </a:p>
+        </p:txBody>
+      </p:sp>
+      <p:sp>
+        <p:nvSpPr>
+          <p:cNvPr id="21" name="Text 19"/>
+          <p:cNvSpPr/>
+          <p:nvPr/>
+        </p:nvSpPr>
+        <p:spPr>
+          <a:xfrm>
+            <a:off x="10710367" y="6382512"/>
+            <a:ext cx="914400" cy="219456"/>
+          </a:xfrm>
+          <a:prstGeom prst="rect">
+            <a:avLst/>
+          </a:prstGeom>
+          <a:noFill/>
+          <a:ln/>
+        </p:spPr>
+        <p:txBody>
+          <a:bodyPr wrap="square" lIns="0" tIns="0" rIns="0" bIns="0" rtlCol="0" anchor="ctr"/>
+          <a:lstStyle/>
+          <a:p>
+            <a:pPr algn="r" indent="0" marL="0">
+              <a:buNone/>
+            </a:pPr>
+            <a:r>
+              <a:rPr lang="en-US" sz="900" b="1" dirty="0">
+                <a:solidFill>
+                  <a:srgbClr val="B98A2E"/>
+                </a:solidFill>
+                <a:latin typeface="Arial" pitchFamily="34" charset="0"/>
+                <a:ea typeface="Arial" pitchFamily="34" charset="-122"/>
+                <a:cs typeface="Arial" pitchFamily="34" charset="-120"/>
+              </a:rPr>
+              <a:t>1</a:t>
+            </a:r>
+            <a:endParaRPr lang="en-US" sz="900" dirty="0"/>
+          </a:p>
+        </p:txBody>
       </p:sp>
     </p:spTree>
   </p:cSld>
@@ -2302,7 +2297,7 @@
     <p:bg>
       <p:bgPr>
         <a:solidFill>
-          <a:srgbClr val="0F172A"/>
+          <a:srgbClr val="10161F"/>
         </a:solidFill>
       </p:bgPr>
     </p:bg>
@@ -2328,14 +2323,14 @@
         </p:nvSpPr>
         <p:spPr>
           <a:xfrm>
-            <a:off x="566928" y="384048"/>
-            <a:ext cx="45720" cy="566928"/>
-          </a:xfrm>
-          <a:prstGeom prst="rect">
+            <a:off x="566928" y="457200"/>
+            <a:ext cx="384048" cy="384048"/>
+          </a:xfrm>
+          <a:prstGeom prst="ellipse">
             <a:avLst/>
           </a:prstGeom>
           <a:solidFill>
-            <a:srgbClr val="6B8E00"/>
+            <a:srgbClr val="B98A2E"/>
           </a:solidFill>
           <a:ln/>
         </p:spPr>
@@ -2348,32 +2343,71 @@
         </p:nvSpPr>
         <p:spPr>
           <a:xfrm>
-            <a:off x="749808" y="384048"/>
-            <a:ext cx="10874959" cy="182880"/>
-          </a:xfrm>
-          <a:prstGeom prst="rect">
-            <a:avLst/>
-          </a:prstGeom>
-          <a:noFill/>
-          <a:ln/>
-        </p:spPr>
-        <p:txBody>
-          <a:bodyPr wrap="square" lIns="0" tIns="0" rIns="0" bIns="0" rtlCol="0" anchor="ctr"/>
-          <a:lstStyle/>
-          <a:p>
-            <a:pPr indent="0" marL="0">
-              <a:buNone/>
-            </a:pPr>
-            <a:r>
-              <a:rPr lang="en-US" sz="950" b="1" spc="200" kern="0" dirty="0">
-                <a:solidFill>
-                  <a:srgbClr val="6B8E00"/>
+            <a:off x="566928" y="457200"/>
+            <a:ext cx="384048" cy="384048"/>
+          </a:xfrm>
+          <a:prstGeom prst="rect">
+            <a:avLst/>
+          </a:prstGeom>
+          <a:noFill/>
+          <a:ln/>
+        </p:spPr>
+        <p:txBody>
+          <a:bodyPr wrap="square" lIns="0" tIns="0" rIns="0" bIns="0" rtlCol="0" anchor="ctr"/>
+          <a:lstStyle/>
+          <a:p>
+            <a:pPr algn="ctr" indent="0" marL="0">
+              <a:buNone/>
+            </a:pPr>
+            <a:r>
+              <a:rPr lang="en-US" sz="1300" b="1" dirty="0">
+                <a:solidFill>
+                  <a:srgbClr val="FFFFFF"/>
                 </a:solidFill>
                 <a:latin typeface="Arial" pitchFamily="34" charset="0"/>
                 <a:ea typeface="Arial" pitchFamily="34" charset="-122"/>
                 <a:cs typeface="Arial" pitchFamily="34" charset="-120"/>
               </a:rPr>
-              <a:t>10  Disclaimer</a:t>
+              <a:t>10</a:t>
+            </a:r>
+            <a:endParaRPr lang="en-US" sz="1300" dirty="0"/>
+          </a:p>
+        </p:txBody>
+      </p:sp>
+      <p:sp>
+        <p:nvSpPr>
+          <p:cNvPr id="4" name="Text 2"/>
+          <p:cNvSpPr/>
+          <p:nvPr/>
+        </p:nvSpPr>
+        <p:spPr>
+          <a:xfrm>
+            <a:off x="1133856" y="457200"/>
+            <a:ext cx="10490911" cy="182880"/>
+          </a:xfrm>
+          <a:prstGeom prst="rect">
+            <a:avLst/>
+          </a:prstGeom>
+          <a:noFill/>
+          <a:ln/>
+        </p:spPr>
+        <p:txBody>
+          <a:bodyPr wrap="square" lIns="0" tIns="0" rIns="0" bIns="0" rtlCol="0" anchor="ctr"/>
+          <a:lstStyle/>
+          <a:p>
+            <a:pPr indent="0" marL="0">
+              <a:buNone/>
+            </a:pPr>
+            <a:r>
+              <a:rPr lang="en-US" sz="950" b="1" spc="200" kern="0" dirty="0">
+                <a:solidFill>
+                  <a:srgbClr val="B98A2E"/>
+                </a:solidFill>
+                <a:latin typeface="Arial" pitchFamily="34" charset="0"/>
+                <a:ea typeface="Arial" pitchFamily="34" charset="-122"/>
+                <a:cs typeface="Arial" pitchFamily="34" charset="-120"/>
+              </a:rPr>
+              <a:t>Disclaimer</a:t>
             </a:r>
             <a:endParaRPr lang="en-US" sz="950" dirty="0"/>
           </a:p>
@@ -2381,30 +2415,30 @@
       </p:sp>
       <p:sp>
         <p:nvSpPr>
-          <p:cNvPr id="4" name="Text 2"/>
-          <p:cNvSpPr/>
-          <p:nvPr/>
-        </p:nvSpPr>
-        <p:spPr>
-          <a:xfrm>
-            <a:off x="749808" y="566928"/>
-            <a:ext cx="10874959" cy="384048"/>
-          </a:xfrm>
-          <a:prstGeom prst="rect">
-            <a:avLst/>
-          </a:prstGeom>
-          <a:noFill/>
-          <a:ln/>
-        </p:spPr>
-        <p:txBody>
-          <a:bodyPr wrap="square" lIns="0" tIns="0" rIns="0" bIns="0" rtlCol="0" anchor="ctr"/>
-          <a:lstStyle/>
-          <a:p>
-            <a:pPr indent="0" marL="0">
-              <a:buNone/>
-            </a:pPr>
-            <a:r>
-              <a:rPr lang="en-US" sz="2200" b="1" dirty="0">
+          <p:cNvPr id="5" name="Text 3"/>
+          <p:cNvSpPr/>
+          <p:nvPr/>
+        </p:nvSpPr>
+        <p:spPr>
+          <a:xfrm>
+            <a:off x="1133856" y="658368"/>
+            <a:ext cx="10490911" cy="420624"/>
+          </a:xfrm>
+          <a:prstGeom prst="rect">
+            <a:avLst/>
+          </a:prstGeom>
+          <a:noFill/>
+          <a:ln/>
+        </p:spPr>
+        <p:txBody>
+          <a:bodyPr wrap="square" lIns="0" tIns="0" rIns="0" bIns="0" rtlCol="0" anchor="ctr"/>
+          <a:lstStyle/>
+          <a:p>
+            <a:pPr indent="0" marL="0">
+              <a:buNone/>
+            </a:pPr>
+            <a:r>
+              <a:rPr lang="en-US" sz="2400" b="1" dirty="0">
                 <a:solidFill>
                   <a:srgbClr val="FFFFFF"/>
                 </a:solidFill>
@@ -2414,20 +2448,101 @@
               </a:rPr>
               <a:t>표기 기준 및 면책</a:t>
             </a:r>
-            <a:endParaRPr lang="en-US" sz="2200" dirty="0"/>
-          </a:p>
-        </p:txBody>
-      </p:sp>
-      <p:sp>
-        <p:nvSpPr>
-          <p:cNvPr id="5" name="Text 3"/>
-          <p:cNvSpPr/>
-          <p:nvPr/>
-        </p:nvSpPr>
-        <p:spPr>
-          <a:xfrm>
-            <a:off x="566928" y="1517904"/>
-            <a:ext cx="5486400" cy="237744"/>
+            <a:endParaRPr lang="en-US" sz="2400" dirty="0"/>
+          </a:p>
+        </p:txBody>
+      </p:sp>
+      <p:sp>
+        <p:nvSpPr>
+          <p:cNvPr id="6" name="Shape 4"/>
+          <p:cNvSpPr/>
+          <p:nvPr/>
+        </p:nvSpPr>
+        <p:spPr>
+          <a:xfrm>
+            <a:off x="566928" y="1463040"/>
+            <a:ext cx="3588410" cy="658368"/>
+          </a:xfrm>
+          <a:prstGeom prst="roundRect">
+            <a:avLst>
+              <a:gd name="adj" fmla="val 5556"/>
+            </a:avLst>
+          </a:prstGeom>
+          <a:solidFill>
+            <a:srgbClr val="2D3748"/>
+          </a:solidFill>
+          <a:ln/>
+        </p:spPr>
+      </p:sp>
+      <p:sp>
+        <p:nvSpPr>
+          <p:cNvPr id="7" name="Shape 5"/>
+          <p:cNvSpPr/>
+          <p:nvPr/>
+        </p:nvSpPr>
+        <p:spPr>
+          <a:xfrm>
+            <a:off x="676656" y="1572768"/>
+            <a:ext cx="438912" cy="438912"/>
+          </a:xfrm>
+          <a:prstGeom prst="ellipse">
+            <a:avLst/>
+          </a:prstGeom>
+          <a:solidFill>
+            <a:srgbClr val="B98A2E"/>
+          </a:solidFill>
+          <a:ln/>
+        </p:spPr>
+      </p:sp>
+      <p:sp>
+        <p:nvSpPr>
+          <p:cNvPr id="8" name="Text 6"/>
+          <p:cNvSpPr/>
+          <p:nvPr/>
+        </p:nvSpPr>
+        <p:spPr>
+          <a:xfrm>
+            <a:off x="676656" y="1572768"/>
+            <a:ext cx="438912" cy="438912"/>
+          </a:xfrm>
+          <a:prstGeom prst="rect">
+            <a:avLst/>
+          </a:prstGeom>
+          <a:noFill/>
+          <a:ln/>
+        </p:spPr>
+        <p:txBody>
+          <a:bodyPr wrap="square" lIns="0" tIns="0" rIns="0" bIns="0" rtlCol="0" anchor="ctr"/>
+          <a:lstStyle/>
+          <a:p>
+            <a:pPr algn="ctr" indent="0" marL="0">
+              <a:buNone/>
+            </a:pPr>
+            <a:r>
+              <a:rPr lang="en-US" sz="1400" b="1" dirty="0">
+                <a:solidFill>
+                  <a:srgbClr val="FFFFFF"/>
+                </a:solidFill>
+                <a:latin typeface="Arial" pitchFamily="34" charset="0"/>
+                <a:ea typeface="Arial" pitchFamily="34" charset="-122"/>
+                <a:cs typeface="Arial" pitchFamily="34" charset="-120"/>
+              </a:rPr>
+              <a:t>01</a:t>
+            </a:r>
+            <a:endParaRPr lang="en-US" sz="1400" dirty="0"/>
+          </a:p>
+        </p:txBody>
+      </p:sp>
+      <p:sp>
+        <p:nvSpPr>
+          <p:cNvPr id="9" name="Text 7"/>
+          <p:cNvSpPr/>
+          <p:nvPr/>
+        </p:nvSpPr>
+        <p:spPr>
+          <a:xfrm>
+            <a:off x="1225296" y="1554480"/>
+            <a:ext cx="2820314" cy="237744"/>
           </a:xfrm>
           <a:prstGeom prst="rect">
             <a:avLst/>
@@ -2451,7 +2566,7 @@
                 <a:ea typeface="Pretendard" pitchFamily="34" charset="-122"/>
                 <a:cs typeface="Pretendard" pitchFamily="34" charset="-120"/>
               </a:rPr>
-              <a:t>데이터 출처 표기</a:t>
+              <a:t>관심 표명</a:t>
             </a:r>
             <a:endParaRPr lang="en-US" sz="1100" dirty="0"/>
           </a:p>
@@ -2459,130 +2574,150 @@
       </p:sp>
       <p:sp>
         <p:nvSpPr>
-          <p:cNvPr id="6" name="Shape 4"/>
-          <p:cNvSpPr/>
-          <p:nvPr/>
-        </p:nvSpPr>
-        <p:spPr>
-          <a:xfrm>
-            <a:off x="566928" y="1847088"/>
-            <a:ext cx="1417320" cy="347472"/>
-          </a:xfrm>
-          <a:prstGeom prst="roundRect">
-            <a:avLst>
-              <a:gd name="adj" fmla="val 10526"/>
-            </a:avLst>
-          </a:prstGeom>
-          <a:solidFill>
-            <a:srgbClr val="334155"/>
-          </a:solidFill>
-          <a:ln/>
-        </p:spPr>
-      </p:sp>
-      <p:sp>
-        <p:nvSpPr>
-          <p:cNvPr id="7" name="Text 5"/>
-          <p:cNvSpPr/>
-          <p:nvPr/>
-        </p:nvSpPr>
-        <p:spPr>
-          <a:xfrm>
-            <a:off x="566928" y="1847088"/>
-            <a:ext cx="1417320" cy="347472"/>
-          </a:xfrm>
-          <a:prstGeom prst="rect">
-            <a:avLst/>
-          </a:prstGeom>
-          <a:noFill/>
-          <a:ln/>
-        </p:spPr>
-        <p:txBody>
-          <a:bodyPr wrap="square" lIns="0" tIns="0" rIns="0" bIns="0" rtlCol="0" anchor="ctr"/>
-          <a:lstStyle/>
-          <a:p>
-            <a:pPr algn="ctr" indent="0" marL="0">
-              <a:buNone/>
-            </a:pPr>
-            <a:r>
-              <a:rPr lang="en-US" sz="950" b="1" dirty="0">
-                <a:solidFill>
-                  <a:srgbClr val="FFFFFF"/>
+          <p:cNvPr id="10" name="Text 8"/>
+          <p:cNvSpPr/>
+          <p:nvPr/>
+        </p:nvSpPr>
+        <p:spPr>
+          <a:xfrm>
+            <a:off x="1225296" y="1792224"/>
+            <a:ext cx="2820314" cy="256032"/>
+          </a:xfrm>
+          <a:prstGeom prst="rect">
+            <a:avLst/>
+          </a:prstGeom>
+          <a:noFill/>
+          <a:ln/>
+        </p:spPr>
+        <p:txBody>
+          <a:bodyPr wrap="square" lIns="0" tIns="0" rIns="0" bIns="0" rtlCol="0" anchor="t"/>
+          <a:lstStyle/>
+          <a:p>
+            <a:pPr indent="0" marL="0">
+              <a:buNone/>
+            </a:pPr>
+            <a:r>
+              <a:rPr lang="en-US" sz="850" dirty="0">
+                <a:solidFill>
+                  <a:srgbClr val="A0AEC0"/>
                 </a:solidFill>
                 <a:latin typeface="Pretendard" pitchFamily="34" charset="0"/>
                 <a:ea typeface="Pretendard" pitchFamily="34" charset="-122"/>
                 <a:cs typeface="Pretendard" pitchFamily="34" charset="-120"/>
               </a:rPr>
-              <a:t>✓ 공부확인</a:t>
-            </a:r>
-            <a:endParaRPr lang="en-US" sz="950" dirty="0"/>
-          </a:p>
-        </p:txBody>
-      </p:sp>
-      <p:sp>
-        <p:nvSpPr>
-          <p:cNvPr id="8" name="Text 6"/>
-          <p:cNvSpPr/>
-          <p:nvPr/>
-        </p:nvSpPr>
-        <p:spPr>
-          <a:xfrm>
-            <a:off x="2139696" y="1828800"/>
-            <a:ext cx="3566160" cy="420624"/>
-          </a:xfrm>
-          <a:prstGeom prst="rect">
-            <a:avLst/>
-          </a:prstGeom>
-          <a:noFill/>
-          <a:ln/>
-        </p:spPr>
-        <p:txBody>
-          <a:bodyPr wrap="square" lIns="0" tIns="0" rIns="0" bIns="0" rtlCol="0" anchor="ctr"/>
-          <a:lstStyle/>
-          <a:p>
-            <a:pPr indent="0" marL="0">
-              <a:buNone/>
-            </a:pPr>
-            <a:r>
-              <a:rPr lang="en-US" sz="1000" dirty="0">
-                <a:solidFill>
-                  <a:srgbClr val="F1F5F9"/>
+              <a:t>담당 중개사에게 초기 관심 표명 및 상담 요청</a:t>
+            </a:r>
+            <a:endParaRPr lang="en-US" sz="850" dirty="0"/>
+          </a:p>
+        </p:txBody>
+      </p:sp>
+      <p:sp>
+        <p:nvSpPr>
+          <p:cNvPr id="11" name="Text 9"/>
+          <p:cNvSpPr/>
+          <p:nvPr/>
+        </p:nvSpPr>
+        <p:spPr>
+          <a:xfrm>
+            <a:off x="4155338" y="1600200"/>
+            <a:ext cx="146304" cy="384048"/>
+          </a:xfrm>
+          <a:prstGeom prst="rect">
+            <a:avLst/>
+          </a:prstGeom>
+          <a:noFill/>
+          <a:ln/>
+        </p:spPr>
+        <p:txBody>
+          <a:bodyPr wrap="square" lIns="0" tIns="0" rIns="0" bIns="0" rtlCol="0" anchor="ctr"/>
+          <a:lstStyle/>
+          <a:p>
+            <a:pPr algn="ctr" indent="0" marL="0">
+              <a:buNone/>
+            </a:pPr>
+            <a:r>
+              <a:rPr lang="en-US" sz="1600" dirty="0">
+                <a:solidFill>
+                  <a:srgbClr val="B98A2E"/>
                 </a:solidFill>
                 <a:latin typeface="Pretendard" pitchFamily="34" charset="0"/>
                 <a:ea typeface="Pretendard" pitchFamily="34" charset="-122"/>
                 <a:cs typeface="Pretendard" pitchFamily="34" charset="-120"/>
               </a:rPr>
-              <a:t>등기부·대장 등 공적 장부 직접 확인</a:t>
-            </a:r>
-            <a:endParaRPr lang="en-US" sz="1000" dirty="0"/>
-          </a:p>
-        </p:txBody>
-      </p:sp>
-      <p:sp>
-        <p:nvSpPr>
-          <p:cNvPr id="9" name="Text 7"/>
-          <p:cNvSpPr/>
-          <p:nvPr/>
-        </p:nvSpPr>
-        <p:spPr>
-          <a:xfrm>
-            <a:off x="5504688" y="1847088"/>
-            <a:ext cx="731520" cy="292608"/>
-          </a:xfrm>
-          <a:prstGeom prst="rect">
-            <a:avLst/>
-          </a:prstGeom>
-          <a:noFill/>
-          <a:ln/>
-        </p:spPr>
-        <p:txBody>
-          <a:bodyPr wrap="square" lIns="0" tIns="0" rIns="0" bIns="0" rtlCol="0" anchor="ctr"/>
-          <a:lstStyle/>
-          <a:p>
-            <a:pPr algn="r" indent="0" marL="0">
-              <a:buNone/>
-            </a:pPr>
-            <a:r>
-              <a:rPr lang="en-US" sz="1200" b="1" dirty="0">
+              <a:t>→</a:t>
+            </a:r>
+            <a:endParaRPr lang="en-US" sz="1600" dirty="0"/>
+          </a:p>
+        </p:txBody>
+      </p:sp>
+      <p:sp>
+        <p:nvSpPr>
+          <p:cNvPr id="12" name="Shape 10"/>
+          <p:cNvSpPr/>
+          <p:nvPr/>
+        </p:nvSpPr>
+        <p:spPr>
+          <a:xfrm>
+            <a:off x="4301642" y="1463040"/>
+            <a:ext cx="3588410" cy="658368"/>
+          </a:xfrm>
+          <a:prstGeom prst="roundRect">
+            <a:avLst>
+              <a:gd name="adj" fmla="val 5556"/>
+            </a:avLst>
+          </a:prstGeom>
+          <a:solidFill>
+            <a:srgbClr val="2D3748"/>
+          </a:solidFill>
+          <a:ln/>
+        </p:spPr>
+      </p:sp>
+      <p:sp>
+        <p:nvSpPr>
+          <p:cNvPr id="13" name="Shape 11"/>
+          <p:cNvSpPr/>
+          <p:nvPr/>
+        </p:nvSpPr>
+        <p:spPr>
+          <a:xfrm>
+            <a:off x="4411370" y="1572768"/>
+            <a:ext cx="438912" cy="438912"/>
+          </a:xfrm>
+          <a:prstGeom prst="ellipse">
+            <a:avLst/>
+          </a:prstGeom>
+          <a:solidFill>
+            <a:srgbClr val="B98A2E"/>
+          </a:solidFill>
+          <a:ln/>
+        </p:spPr>
+      </p:sp>
+      <p:sp>
+        <p:nvSpPr>
+          <p:cNvPr id="14" name="Text 12"/>
+          <p:cNvSpPr/>
+          <p:nvPr/>
+        </p:nvSpPr>
+        <p:spPr>
+          <a:xfrm>
+            <a:off x="4411370" y="1572768"/>
+            <a:ext cx="438912" cy="438912"/>
+          </a:xfrm>
+          <a:prstGeom prst="rect">
+            <a:avLst/>
+          </a:prstGeom>
+          <a:noFill/>
+          <a:ln/>
+        </p:spPr>
+        <p:txBody>
+          <a:bodyPr wrap="square" lIns="0" tIns="0" rIns="0" bIns="0" rtlCol="0" anchor="ctr"/>
+          <a:lstStyle/>
+          <a:p>
+            <a:pPr algn="ctr" indent="0" marL="0">
+              <a:buNone/>
+            </a:pPr>
+            <a:r>
+              <a:rPr lang="en-US" sz="1400" b="1" dirty="0">
                 <a:solidFill>
                   <a:srgbClr val="FFFFFF"/>
                 </a:solidFill>
@@ -2590,60 +2725,38 @@
                 <a:ea typeface="Arial" pitchFamily="34" charset="-122"/>
                 <a:cs typeface="Arial" pitchFamily="34" charset="-120"/>
               </a:rPr>
-              <a:t>1.00</a:t>
-            </a:r>
-            <a:endParaRPr lang="en-US" sz="1200" dirty="0"/>
-          </a:p>
-        </p:txBody>
-      </p:sp>
-      <p:sp>
-        <p:nvSpPr>
-          <p:cNvPr id="10" name="Shape 8"/>
-          <p:cNvSpPr/>
-          <p:nvPr/>
-        </p:nvSpPr>
-        <p:spPr>
-          <a:xfrm>
-            <a:off x="566928" y="2505456"/>
-            <a:ext cx="1417320" cy="347472"/>
-          </a:xfrm>
-          <a:prstGeom prst="roundRect">
-            <a:avLst>
-              <a:gd name="adj" fmla="val 10526"/>
-            </a:avLst>
-          </a:prstGeom>
-          <a:solidFill>
-            <a:srgbClr val="334155"/>
-          </a:solidFill>
-          <a:ln/>
-        </p:spPr>
-      </p:sp>
-      <p:sp>
-        <p:nvSpPr>
-          <p:cNvPr id="11" name="Text 9"/>
-          <p:cNvSpPr/>
-          <p:nvPr/>
-        </p:nvSpPr>
-        <p:spPr>
-          <a:xfrm>
-            <a:off x="566928" y="2505456"/>
-            <a:ext cx="1417320" cy="347472"/>
-          </a:xfrm>
-          <a:prstGeom prst="rect">
-            <a:avLst/>
-          </a:prstGeom>
-          <a:noFill/>
-          <a:ln/>
-        </p:spPr>
-        <p:txBody>
-          <a:bodyPr wrap="square" lIns="0" tIns="0" rIns="0" bIns="0" rtlCol="0" anchor="ctr"/>
-          <a:lstStyle/>
-          <a:p>
-            <a:pPr algn="ctr" indent="0" marL="0">
-              <a:buNone/>
-            </a:pPr>
-            <a:r>
-              <a:rPr lang="en-US" sz="950" b="1" dirty="0">
+              <a:t>02</a:t>
+            </a:r>
+            <a:endParaRPr lang="en-US" sz="1400" dirty="0"/>
+          </a:p>
+        </p:txBody>
+      </p:sp>
+      <p:sp>
+        <p:nvSpPr>
+          <p:cNvPr id="15" name="Text 13"/>
+          <p:cNvSpPr/>
+          <p:nvPr/>
+        </p:nvSpPr>
+        <p:spPr>
+          <a:xfrm>
+            <a:off x="4960010" y="1554480"/>
+            <a:ext cx="2820314" cy="237744"/>
+          </a:xfrm>
+          <a:prstGeom prst="rect">
+            <a:avLst/>
+          </a:prstGeom>
+          <a:noFill/>
+          <a:ln/>
+        </p:spPr>
+        <p:txBody>
+          <a:bodyPr wrap="square" lIns="0" tIns="0" rIns="0" bIns="0" rtlCol="0" anchor="ctr"/>
+          <a:lstStyle/>
+          <a:p>
+            <a:pPr indent="0" marL="0">
+              <a:buNone/>
+            </a:pPr>
+            <a:r>
+              <a:rPr lang="en-US" sz="1100" b="1" dirty="0">
                 <a:solidFill>
                   <a:srgbClr val="FFFFFF"/>
                 </a:solidFill>
@@ -2651,77 +2764,158 @@
                 <a:ea typeface="Pretendard" pitchFamily="34" charset="-122"/>
                 <a:cs typeface="Pretendard" pitchFamily="34" charset="-120"/>
               </a:rPr>
-              <a:t>★ 전문가검증</a:t>
-            </a:r>
-            <a:endParaRPr lang="en-US" sz="950" dirty="0"/>
-          </a:p>
-        </p:txBody>
-      </p:sp>
-      <p:sp>
-        <p:nvSpPr>
-          <p:cNvPr id="12" name="Text 10"/>
-          <p:cNvSpPr/>
-          <p:nvPr/>
-        </p:nvSpPr>
-        <p:spPr>
-          <a:xfrm>
-            <a:off x="2139696" y="2487168"/>
-            <a:ext cx="3566160" cy="420624"/>
-          </a:xfrm>
-          <a:prstGeom prst="rect">
-            <a:avLst/>
-          </a:prstGeom>
-          <a:noFill/>
-          <a:ln/>
-        </p:spPr>
-        <p:txBody>
-          <a:bodyPr wrap="square" lIns="0" tIns="0" rIns="0" bIns="0" rtlCol="0" anchor="ctr"/>
-          <a:lstStyle/>
-          <a:p>
-            <a:pPr indent="0" marL="0">
-              <a:buNone/>
-            </a:pPr>
-            <a:r>
-              <a:rPr lang="en-US" sz="1000" dirty="0">
-                <a:solidFill>
-                  <a:srgbClr val="F1F5F9"/>
+              <a:t>NDA 체결</a:t>
+            </a:r>
+            <a:endParaRPr lang="en-US" sz="1100" dirty="0"/>
+          </a:p>
+        </p:txBody>
+      </p:sp>
+      <p:sp>
+        <p:nvSpPr>
+          <p:cNvPr id="16" name="Text 14"/>
+          <p:cNvSpPr/>
+          <p:nvPr/>
+        </p:nvSpPr>
+        <p:spPr>
+          <a:xfrm>
+            <a:off x="4960010" y="1792224"/>
+            <a:ext cx="2820314" cy="256032"/>
+          </a:xfrm>
+          <a:prstGeom prst="rect">
+            <a:avLst/>
+          </a:prstGeom>
+          <a:noFill/>
+          <a:ln/>
+        </p:spPr>
+        <p:txBody>
+          <a:bodyPr wrap="square" lIns="0" tIns="0" rIns="0" bIns="0" rtlCol="0" anchor="t"/>
+          <a:lstStyle/>
+          <a:p>
+            <a:pPr indent="0" marL="0">
+              <a:buNone/>
+            </a:pPr>
+            <a:r>
+              <a:rPr lang="en-US" sz="850" dirty="0">
+                <a:solidFill>
+                  <a:srgbClr val="A0AEC0"/>
                 </a:solidFill>
                 <a:latin typeface="Pretendard" pitchFamily="34" charset="0"/>
                 <a:ea typeface="Pretendard" pitchFamily="34" charset="-122"/>
                 <a:cs typeface="Pretendard" pitchFamily="34" charset="-120"/>
               </a:rPr>
-              <a:t>세무사·감정평가사 등 전문가 확인</a:t>
-            </a:r>
-            <a:endParaRPr lang="en-US" sz="1000" dirty="0"/>
-          </a:p>
-        </p:txBody>
-      </p:sp>
-      <p:sp>
-        <p:nvSpPr>
-          <p:cNvPr id="13" name="Text 11"/>
-          <p:cNvSpPr/>
-          <p:nvPr/>
-        </p:nvSpPr>
-        <p:spPr>
-          <a:xfrm>
-            <a:off x="5504688" y="2505456"/>
-            <a:ext cx="731520" cy="292608"/>
-          </a:xfrm>
-          <a:prstGeom prst="rect">
-            <a:avLst/>
-          </a:prstGeom>
-          <a:noFill/>
-          <a:ln/>
-        </p:spPr>
-        <p:txBody>
-          <a:bodyPr wrap="square" lIns="0" tIns="0" rIns="0" bIns="0" rtlCol="0" anchor="ctr"/>
-          <a:lstStyle/>
-          <a:p>
-            <a:pPr algn="r" indent="0" marL="0">
-              <a:buNone/>
-            </a:pPr>
-            <a:r>
-              <a:rPr lang="en-US" sz="1200" b="1" dirty="0">
+              <a:t>비밀유지계약 후 상세 임대차·재무 자료 제공</a:t>
+            </a:r>
+            <a:endParaRPr lang="en-US" sz="850" dirty="0"/>
+          </a:p>
+        </p:txBody>
+      </p:sp>
+      <p:sp>
+        <p:nvSpPr>
+          <p:cNvPr id="17" name="Text 15"/>
+          <p:cNvSpPr/>
+          <p:nvPr/>
+        </p:nvSpPr>
+        <p:spPr>
+          <a:xfrm>
+            <a:off x="7890053" y="1600200"/>
+            <a:ext cx="146304" cy="384048"/>
+          </a:xfrm>
+          <a:prstGeom prst="rect">
+            <a:avLst/>
+          </a:prstGeom>
+          <a:noFill/>
+          <a:ln/>
+        </p:spPr>
+        <p:txBody>
+          <a:bodyPr wrap="square" lIns="0" tIns="0" rIns="0" bIns="0" rtlCol="0" anchor="ctr"/>
+          <a:lstStyle/>
+          <a:p>
+            <a:pPr algn="ctr" indent="0" marL="0">
+              <a:buNone/>
+            </a:pPr>
+            <a:r>
+              <a:rPr lang="en-US" sz="1600" dirty="0">
+                <a:solidFill>
+                  <a:srgbClr val="B98A2E"/>
+                </a:solidFill>
+                <a:latin typeface="Pretendard" pitchFamily="34" charset="0"/>
+                <a:ea typeface="Pretendard" pitchFamily="34" charset="-122"/>
+                <a:cs typeface="Pretendard" pitchFamily="34" charset="-120"/>
+              </a:rPr>
+              <a:t>→</a:t>
+            </a:r>
+            <a:endParaRPr lang="en-US" sz="1600" dirty="0"/>
+          </a:p>
+        </p:txBody>
+      </p:sp>
+      <p:sp>
+        <p:nvSpPr>
+          <p:cNvPr id="18" name="Shape 16"/>
+          <p:cNvSpPr/>
+          <p:nvPr/>
+        </p:nvSpPr>
+        <p:spPr>
+          <a:xfrm>
+            <a:off x="8036357" y="1463040"/>
+            <a:ext cx="3588410" cy="658368"/>
+          </a:xfrm>
+          <a:prstGeom prst="roundRect">
+            <a:avLst>
+              <a:gd name="adj" fmla="val 5556"/>
+            </a:avLst>
+          </a:prstGeom>
+          <a:solidFill>
+            <a:srgbClr val="2D3748"/>
+          </a:solidFill>
+          <a:ln/>
+        </p:spPr>
+      </p:sp>
+      <p:sp>
+        <p:nvSpPr>
+          <p:cNvPr id="19" name="Shape 17"/>
+          <p:cNvSpPr/>
+          <p:nvPr/>
+        </p:nvSpPr>
+        <p:spPr>
+          <a:xfrm>
+            <a:off x="8146085" y="1572768"/>
+            <a:ext cx="438912" cy="438912"/>
+          </a:xfrm>
+          <a:prstGeom prst="ellipse">
+            <a:avLst/>
+          </a:prstGeom>
+          <a:solidFill>
+            <a:srgbClr val="B98A2E"/>
+          </a:solidFill>
+          <a:ln/>
+        </p:spPr>
+      </p:sp>
+      <p:sp>
+        <p:nvSpPr>
+          <p:cNvPr id="20" name="Text 18"/>
+          <p:cNvSpPr/>
+          <p:nvPr/>
+        </p:nvSpPr>
+        <p:spPr>
+          <a:xfrm>
+            <a:off x="8146085" y="1572768"/>
+            <a:ext cx="438912" cy="438912"/>
+          </a:xfrm>
+          <a:prstGeom prst="rect">
+            <a:avLst/>
+          </a:prstGeom>
+          <a:noFill/>
+          <a:ln/>
+        </p:spPr>
+        <p:txBody>
+          <a:bodyPr wrap="square" lIns="0" tIns="0" rIns="0" bIns="0" rtlCol="0" anchor="ctr"/>
+          <a:lstStyle/>
+          <a:p>
+            <a:pPr algn="ctr" indent="0" marL="0">
+              <a:buNone/>
+            </a:pPr>
+            <a:r>
+              <a:rPr lang="en-US" sz="1400" b="1" dirty="0">
                 <a:solidFill>
                   <a:srgbClr val="FFFFFF"/>
                 </a:solidFill>
@@ -2729,60 +2923,38 @@
                 <a:ea typeface="Arial" pitchFamily="34" charset="-122"/>
                 <a:cs typeface="Arial" pitchFamily="34" charset="-120"/>
               </a:rPr>
-              <a:t>0.95</a:t>
-            </a:r>
-            <a:endParaRPr lang="en-US" sz="1200" dirty="0"/>
-          </a:p>
-        </p:txBody>
-      </p:sp>
-      <p:sp>
-        <p:nvSpPr>
-          <p:cNvPr id="14" name="Shape 12"/>
-          <p:cNvSpPr/>
-          <p:nvPr/>
-        </p:nvSpPr>
-        <p:spPr>
-          <a:xfrm>
-            <a:off x="566928" y="3163824"/>
-            <a:ext cx="1417320" cy="347472"/>
-          </a:xfrm>
-          <a:prstGeom prst="roundRect">
-            <a:avLst>
-              <a:gd name="adj" fmla="val 10526"/>
-            </a:avLst>
-          </a:prstGeom>
-          <a:solidFill>
-            <a:srgbClr val="334155"/>
-          </a:solidFill>
-          <a:ln/>
-        </p:spPr>
-      </p:sp>
-      <p:sp>
-        <p:nvSpPr>
-          <p:cNvPr id="15" name="Text 13"/>
-          <p:cNvSpPr/>
-          <p:nvPr/>
-        </p:nvSpPr>
-        <p:spPr>
-          <a:xfrm>
-            <a:off x="566928" y="3163824"/>
-            <a:ext cx="1417320" cy="347472"/>
-          </a:xfrm>
-          <a:prstGeom prst="rect">
-            <a:avLst/>
-          </a:prstGeom>
-          <a:noFill/>
-          <a:ln/>
-        </p:spPr>
-        <p:txBody>
-          <a:bodyPr wrap="square" lIns="0" tIns="0" rIns="0" bIns="0" rtlCol="0" anchor="ctr"/>
-          <a:lstStyle/>
-          <a:p>
-            <a:pPr algn="ctr" indent="0" marL="0">
-              <a:buNone/>
-            </a:pPr>
-            <a:r>
-              <a:rPr lang="en-US" sz="950" b="1" dirty="0">
+              <a:t>03</a:t>
+            </a:r>
+            <a:endParaRPr lang="en-US" sz="1400" dirty="0"/>
+          </a:p>
+        </p:txBody>
+      </p:sp>
+      <p:sp>
+        <p:nvSpPr>
+          <p:cNvPr id="21" name="Text 19"/>
+          <p:cNvSpPr/>
+          <p:nvPr/>
+        </p:nvSpPr>
+        <p:spPr>
+          <a:xfrm>
+            <a:off x="8694725" y="1554480"/>
+            <a:ext cx="2820314" cy="237744"/>
+          </a:xfrm>
+          <a:prstGeom prst="rect">
+            <a:avLst/>
+          </a:prstGeom>
+          <a:noFill/>
+          <a:ln/>
+        </p:spPr>
+        <p:txBody>
+          <a:bodyPr wrap="square" lIns="0" tIns="0" rIns="0" bIns="0" rtlCol="0" anchor="ctr"/>
+          <a:lstStyle/>
+          <a:p>
+            <a:pPr indent="0" marL="0">
+              <a:buNone/>
+            </a:pPr>
+            <a:r>
+              <a:rPr lang="en-US" sz="1100" b="1" dirty="0">
                 <a:solidFill>
                   <a:srgbClr val="FFFFFF"/>
                 </a:solidFill>
@@ -2790,61 +2962,801 @@
                 <a:ea typeface="Pretendard" pitchFamily="34" charset="-122"/>
                 <a:cs typeface="Pretendard" pitchFamily="34" charset="-120"/>
               </a:rPr>
-              <a:t>▲ 매도인고지</a:t>
-            </a:r>
-            <a:endParaRPr lang="en-US" sz="950" dirty="0"/>
-          </a:p>
-        </p:txBody>
-      </p:sp>
-      <p:sp>
-        <p:nvSpPr>
-          <p:cNvPr id="16" name="Text 14"/>
-          <p:cNvSpPr/>
-          <p:nvPr/>
-        </p:nvSpPr>
-        <p:spPr>
-          <a:xfrm>
-            <a:off x="2139696" y="3145536"/>
-            <a:ext cx="3566160" cy="420624"/>
-          </a:xfrm>
-          <a:prstGeom prst="rect">
-            <a:avLst/>
-          </a:prstGeom>
-          <a:noFill/>
-          <a:ln/>
-        </p:spPr>
-        <p:txBody>
-          <a:bodyPr wrap="square" lIns="0" tIns="0" rIns="0" bIns="0" rtlCol="0" anchor="ctr"/>
-          <a:lstStyle/>
-          <a:p>
-            <a:pPr indent="0" marL="0">
-              <a:buNone/>
-            </a:pPr>
-            <a:r>
-              <a:rPr lang="en-US" sz="1000" dirty="0">
-                <a:solidFill>
-                  <a:srgbClr val="F1F5F9"/>
+              <a:t>현장 실사</a:t>
+            </a:r>
+            <a:endParaRPr lang="en-US" sz="1100" dirty="0"/>
+          </a:p>
+        </p:txBody>
+      </p:sp>
+      <p:sp>
+        <p:nvSpPr>
+          <p:cNvPr id="22" name="Text 20"/>
+          <p:cNvSpPr/>
+          <p:nvPr/>
+        </p:nvSpPr>
+        <p:spPr>
+          <a:xfrm>
+            <a:off x="8694725" y="1792224"/>
+            <a:ext cx="2820314" cy="256032"/>
+          </a:xfrm>
+          <a:prstGeom prst="rect">
+            <a:avLst/>
+          </a:prstGeom>
+          <a:noFill/>
+          <a:ln/>
+        </p:spPr>
+        <p:txBody>
+          <a:bodyPr wrap="square" lIns="0" tIns="0" rIns="0" bIns="0" rtlCol="0" anchor="t"/>
+          <a:lstStyle/>
+          <a:p>
+            <a:pPr indent="0" marL="0">
+              <a:buNone/>
+            </a:pPr>
+            <a:r>
+              <a:rPr lang="en-US" sz="850" dirty="0">
+                <a:solidFill>
+                  <a:srgbClr val="A0AEC0"/>
                 </a:solidFill>
                 <a:latin typeface="Pretendard" pitchFamily="34" charset="0"/>
                 <a:ea typeface="Pretendard" pitchFamily="34" charset="-122"/>
                 <a:cs typeface="Pretendard" pitchFamily="34" charset="-120"/>
               </a:rPr>
+              <a:t>건물 컨디션 및 설비 직접 확인 후 의향서(LOI) 제출</a:t>
+            </a:r>
+            <a:endParaRPr lang="en-US" sz="850" dirty="0"/>
+          </a:p>
+        </p:txBody>
+      </p:sp>
+      <p:sp>
+        <p:nvSpPr>
+          <p:cNvPr id="23" name="Text 21"/>
+          <p:cNvSpPr/>
+          <p:nvPr/>
+        </p:nvSpPr>
+        <p:spPr>
+          <a:xfrm>
+            <a:off x="566928" y="2395728"/>
+            <a:ext cx="5486400" cy="237744"/>
+          </a:xfrm>
+          <a:prstGeom prst="rect">
+            <a:avLst/>
+          </a:prstGeom>
+          <a:noFill/>
+          <a:ln/>
+        </p:spPr>
+        <p:txBody>
+          <a:bodyPr wrap="square" lIns="0" tIns="0" rIns="0" bIns="0" rtlCol="0" anchor="ctr"/>
+          <a:lstStyle/>
+          <a:p>
+            <a:pPr indent="0" marL="0">
+              <a:buNone/>
+            </a:pPr>
+            <a:r>
+              <a:rPr lang="en-US" sz="1100" b="1" dirty="0">
+                <a:solidFill>
+                  <a:srgbClr val="FFFFFF"/>
+                </a:solidFill>
+                <a:latin typeface="Pretendard" pitchFamily="34" charset="0"/>
+                <a:ea typeface="Pretendard" pitchFamily="34" charset="-122"/>
+                <a:cs typeface="Pretendard" pitchFamily="34" charset="-120"/>
+              </a:rPr>
+              <a:t>데이터 출처 표기</a:t>
+            </a:r>
+            <a:endParaRPr lang="en-US" sz="1100" dirty="0"/>
+          </a:p>
+        </p:txBody>
+      </p:sp>
+      <p:sp>
+        <p:nvSpPr>
+          <p:cNvPr id="24" name="Shape 22"/>
+          <p:cNvSpPr/>
+          <p:nvPr/>
+        </p:nvSpPr>
+        <p:spPr>
+          <a:xfrm>
+            <a:off x="566928" y="2724912"/>
+            <a:ext cx="1280160" cy="292608"/>
+          </a:xfrm>
+          <a:prstGeom prst="roundRect">
+            <a:avLst>
+              <a:gd name="adj" fmla="val 12500"/>
+            </a:avLst>
+          </a:prstGeom>
+          <a:solidFill>
+            <a:srgbClr val="2D3748"/>
+          </a:solidFill>
+          <a:ln/>
+        </p:spPr>
+      </p:sp>
+      <p:sp>
+        <p:nvSpPr>
+          <p:cNvPr id="25" name="Text 23"/>
+          <p:cNvSpPr/>
+          <p:nvPr/>
+        </p:nvSpPr>
+        <p:spPr>
+          <a:xfrm>
+            <a:off x="566928" y="2724912"/>
+            <a:ext cx="1280160" cy="292608"/>
+          </a:xfrm>
+          <a:prstGeom prst="rect">
+            <a:avLst/>
+          </a:prstGeom>
+          <a:noFill/>
+          <a:ln/>
+        </p:spPr>
+        <p:txBody>
+          <a:bodyPr wrap="square" lIns="0" tIns="0" rIns="0" bIns="0" rtlCol="0" anchor="ctr"/>
+          <a:lstStyle/>
+          <a:p>
+            <a:pPr algn="ctr" indent="0" marL="0">
+              <a:buNone/>
+            </a:pPr>
+            <a:r>
+              <a:rPr lang="en-US" sz="850" b="1" dirty="0">
+                <a:solidFill>
+                  <a:srgbClr val="FFFFFF"/>
+                </a:solidFill>
+                <a:latin typeface="Pretendard" pitchFamily="34" charset="0"/>
+                <a:ea typeface="Pretendard" pitchFamily="34" charset="-122"/>
+                <a:cs typeface="Pretendard" pitchFamily="34" charset="-120"/>
+              </a:rPr>
+              <a:t>✓ 공부확인</a:t>
+            </a:r>
+            <a:endParaRPr lang="en-US" sz="850" dirty="0"/>
+          </a:p>
+        </p:txBody>
+      </p:sp>
+      <p:sp>
+        <p:nvSpPr>
+          <p:cNvPr id="26" name="Text 24"/>
+          <p:cNvSpPr/>
+          <p:nvPr/>
+        </p:nvSpPr>
+        <p:spPr>
+          <a:xfrm>
+            <a:off x="1993392" y="2706624"/>
+            <a:ext cx="3840480" cy="329184"/>
+          </a:xfrm>
+          <a:prstGeom prst="rect">
+            <a:avLst/>
+          </a:prstGeom>
+          <a:noFill/>
+          <a:ln/>
+        </p:spPr>
+        <p:txBody>
+          <a:bodyPr wrap="square" lIns="0" tIns="0" rIns="0" bIns="0" rtlCol="0" anchor="ctr"/>
+          <a:lstStyle/>
+          <a:p>
+            <a:pPr indent="0" marL="0">
+              <a:buNone/>
+            </a:pPr>
+            <a:r>
+              <a:rPr lang="en-US" sz="900" dirty="0">
+                <a:solidFill>
+                  <a:srgbClr val="E2E8F0"/>
+                </a:solidFill>
+                <a:latin typeface="Pretendard" pitchFamily="34" charset="0"/>
+                <a:ea typeface="Pretendard" pitchFamily="34" charset="-122"/>
+                <a:cs typeface="Pretendard" pitchFamily="34" charset="-120"/>
+              </a:rPr>
+              <a:t>등기부·대장 등 공적 장부 직접 확인</a:t>
+            </a:r>
+            <a:endParaRPr lang="en-US" sz="900" dirty="0"/>
+          </a:p>
+        </p:txBody>
+      </p:sp>
+      <p:sp>
+        <p:nvSpPr>
+          <p:cNvPr id="27" name="Shape 25"/>
+          <p:cNvSpPr/>
+          <p:nvPr/>
+        </p:nvSpPr>
+        <p:spPr>
+          <a:xfrm>
+            <a:off x="566928" y="3200400"/>
+            <a:ext cx="1280160" cy="292608"/>
+          </a:xfrm>
+          <a:prstGeom prst="roundRect">
+            <a:avLst>
+              <a:gd name="adj" fmla="val 12500"/>
+            </a:avLst>
+          </a:prstGeom>
+          <a:solidFill>
+            <a:srgbClr val="2D3748"/>
+          </a:solidFill>
+          <a:ln/>
+        </p:spPr>
+      </p:sp>
+      <p:sp>
+        <p:nvSpPr>
+          <p:cNvPr id="28" name="Text 26"/>
+          <p:cNvSpPr/>
+          <p:nvPr/>
+        </p:nvSpPr>
+        <p:spPr>
+          <a:xfrm>
+            <a:off x="566928" y="3200400"/>
+            <a:ext cx="1280160" cy="292608"/>
+          </a:xfrm>
+          <a:prstGeom prst="rect">
+            <a:avLst/>
+          </a:prstGeom>
+          <a:noFill/>
+          <a:ln/>
+        </p:spPr>
+        <p:txBody>
+          <a:bodyPr wrap="square" lIns="0" tIns="0" rIns="0" bIns="0" rtlCol="0" anchor="ctr"/>
+          <a:lstStyle/>
+          <a:p>
+            <a:pPr algn="ctr" indent="0" marL="0">
+              <a:buNone/>
+            </a:pPr>
+            <a:r>
+              <a:rPr lang="en-US" sz="850" b="1" dirty="0">
+                <a:solidFill>
+                  <a:srgbClr val="FFFFFF"/>
+                </a:solidFill>
+                <a:latin typeface="Pretendard" pitchFamily="34" charset="0"/>
+                <a:ea typeface="Pretendard" pitchFamily="34" charset="-122"/>
+                <a:cs typeface="Pretendard" pitchFamily="34" charset="-120"/>
+              </a:rPr>
+              <a:t>★ 전문가검증</a:t>
+            </a:r>
+            <a:endParaRPr lang="en-US" sz="850" dirty="0"/>
+          </a:p>
+        </p:txBody>
+      </p:sp>
+      <p:sp>
+        <p:nvSpPr>
+          <p:cNvPr id="29" name="Text 27"/>
+          <p:cNvSpPr/>
+          <p:nvPr/>
+        </p:nvSpPr>
+        <p:spPr>
+          <a:xfrm>
+            <a:off x="1993392" y="3182112"/>
+            <a:ext cx="3840480" cy="329184"/>
+          </a:xfrm>
+          <a:prstGeom prst="rect">
+            <a:avLst/>
+          </a:prstGeom>
+          <a:noFill/>
+          <a:ln/>
+        </p:spPr>
+        <p:txBody>
+          <a:bodyPr wrap="square" lIns="0" tIns="0" rIns="0" bIns="0" rtlCol="0" anchor="ctr"/>
+          <a:lstStyle/>
+          <a:p>
+            <a:pPr indent="0" marL="0">
+              <a:buNone/>
+            </a:pPr>
+            <a:r>
+              <a:rPr lang="en-US" sz="900" dirty="0">
+                <a:solidFill>
+                  <a:srgbClr val="E2E8F0"/>
+                </a:solidFill>
+                <a:latin typeface="Pretendard" pitchFamily="34" charset="0"/>
+                <a:ea typeface="Pretendard" pitchFamily="34" charset="-122"/>
+                <a:cs typeface="Pretendard" pitchFamily="34" charset="-120"/>
+              </a:rPr>
+              <a:t>세무사·감정평가사 등 전문가 확인</a:t>
+            </a:r>
+            <a:endParaRPr lang="en-US" sz="900" dirty="0"/>
+          </a:p>
+        </p:txBody>
+      </p:sp>
+      <p:sp>
+        <p:nvSpPr>
+          <p:cNvPr id="30" name="Shape 28"/>
+          <p:cNvSpPr/>
+          <p:nvPr/>
+        </p:nvSpPr>
+        <p:spPr>
+          <a:xfrm>
+            <a:off x="566928" y="3675888"/>
+            <a:ext cx="1280160" cy="292608"/>
+          </a:xfrm>
+          <a:prstGeom prst="roundRect">
+            <a:avLst>
+              <a:gd name="adj" fmla="val 12500"/>
+            </a:avLst>
+          </a:prstGeom>
+          <a:solidFill>
+            <a:srgbClr val="2D3748"/>
+          </a:solidFill>
+          <a:ln/>
+        </p:spPr>
+      </p:sp>
+      <p:sp>
+        <p:nvSpPr>
+          <p:cNvPr id="31" name="Text 29"/>
+          <p:cNvSpPr/>
+          <p:nvPr/>
+        </p:nvSpPr>
+        <p:spPr>
+          <a:xfrm>
+            <a:off x="566928" y="3675888"/>
+            <a:ext cx="1280160" cy="292608"/>
+          </a:xfrm>
+          <a:prstGeom prst="rect">
+            <a:avLst/>
+          </a:prstGeom>
+          <a:noFill/>
+          <a:ln/>
+        </p:spPr>
+        <p:txBody>
+          <a:bodyPr wrap="square" lIns="0" tIns="0" rIns="0" bIns="0" rtlCol="0" anchor="ctr"/>
+          <a:lstStyle/>
+          <a:p>
+            <a:pPr algn="ctr" indent="0" marL="0">
+              <a:buNone/>
+            </a:pPr>
+            <a:r>
+              <a:rPr lang="en-US" sz="850" b="1" dirty="0">
+                <a:solidFill>
+                  <a:srgbClr val="FFFFFF"/>
+                </a:solidFill>
+                <a:latin typeface="Pretendard" pitchFamily="34" charset="0"/>
+                <a:ea typeface="Pretendard" pitchFamily="34" charset="-122"/>
+                <a:cs typeface="Pretendard" pitchFamily="34" charset="-120"/>
+              </a:rPr>
+              <a:t>▲ 매도인고지</a:t>
+            </a:r>
+            <a:endParaRPr lang="en-US" sz="850" dirty="0"/>
+          </a:p>
+        </p:txBody>
+      </p:sp>
+      <p:sp>
+        <p:nvSpPr>
+          <p:cNvPr id="32" name="Text 30"/>
+          <p:cNvSpPr/>
+          <p:nvPr/>
+        </p:nvSpPr>
+        <p:spPr>
+          <a:xfrm>
+            <a:off x="1993392" y="3657600"/>
+            <a:ext cx="3840480" cy="329184"/>
+          </a:xfrm>
+          <a:prstGeom prst="rect">
+            <a:avLst/>
+          </a:prstGeom>
+          <a:noFill/>
+          <a:ln/>
+        </p:spPr>
+        <p:txBody>
+          <a:bodyPr wrap="square" lIns="0" tIns="0" rIns="0" bIns="0" rtlCol="0" anchor="ctr"/>
+          <a:lstStyle/>
+          <a:p>
+            <a:pPr indent="0" marL="0">
+              <a:buNone/>
+            </a:pPr>
+            <a:r>
+              <a:rPr lang="en-US" sz="900" dirty="0">
+                <a:solidFill>
+                  <a:srgbClr val="E2E8F0"/>
+                </a:solidFill>
+                <a:latin typeface="Pretendard" pitchFamily="34" charset="0"/>
+                <a:ea typeface="Pretendard" pitchFamily="34" charset="-122"/>
+                <a:cs typeface="Pretendard" pitchFamily="34" charset="-120"/>
+              </a:rPr>
               <a:t>매도인이 구두 또는 서면으로 고지</a:t>
             </a:r>
-            <a:endParaRPr lang="en-US" sz="1000" dirty="0"/>
-          </a:p>
-        </p:txBody>
-      </p:sp>
-      <p:sp>
-        <p:nvSpPr>
-          <p:cNvPr id="17" name="Text 15"/>
-          <p:cNvSpPr/>
-          <p:nvPr/>
-        </p:nvSpPr>
-        <p:spPr>
-          <a:xfrm>
-            <a:off x="5504688" y="3163824"/>
-            <a:ext cx="731520" cy="292608"/>
+            <a:endParaRPr lang="en-US" sz="900" dirty="0"/>
+          </a:p>
+        </p:txBody>
+      </p:sp>
+      <p:sp>
+        <p:nvSpPr>
+          <p:cNvPr id="33" name="Shape 31"/>
+          <p:cNvSpPr/>
+          <p:nvPr/>
+        </p:nvSpPr>
+        <p:spPr>
+          <a:xfrm>
+            <a:off x="566928" y="4151376"/>
+            <a:ext cx="1280160" cy="292608"/>
+          </a:xfrm>
+          <a:prstGeom prst="roundRect">
+            <a:avLst>
+              <a:gd name="adj" fmla="val 12500"/>
+            </a:avLst>
+          </a:prstGeom>
+          <a:solidFill>
+            <a:srgbClr val="2D3748"/>
+          </a:solidFill>
+          <a:ln/>
+        </p:spPr>
+      </p:sp>
+      <p:sp>
+        <p:nvSpPr>
+          <p:cNvPr id="34" name="Text 32"/>
+          <p:cNvSpPr/>
+          <p:nvPr/>
+        </p:nvSpPr>
+        <p:spPr>
+          <a:xfrm>
+            <a:off x="566928" y="4151376"/>
+            <a:ext cx="1280160" cy="292608"/>
+          </a:xfrm>
+          <a:prstGeom prst="rect">
+            <a:avLst/>
+          </a:prstGeom>
+          <a:noFill/>
+          <a:ln/>
+        </p:spPr>
+        <p:txBody>
+          <a:bodyPr wrap="square" lIns="0" tIns="0" rIns="0" bIns="0" rtlCol="0" anchor="ctr"/>
+          <a:lstStyle/>
+          <a:p>
+            <a:pPr algn="ctr" indent="0" marL="0">
+              <a:buNone/>
+            </a:pPr>
+            <a:r>
+              <a:rPr lang="en-US" sz="850" b="1" dirty="0">
+                <a:solidFill>
+                  <a:srgbClr val="FFFFFF"/>
+                </a:solidFill>
+                <a:latin typeface="Pretendard" pitchFamily="34" charset="0"/>
+                <a:ea typeface="Pretendard" pitchFamily="34" charset="-122"/>
+                <a:cs typeface="Pretendard" pitchFamily="34" charset="-120"/>
+              </a:rPr>
+              <a:t>● 중개인입력</a:t>
+            </a:r>
+            <a:endParaRPr lang="en-US" sz="850" dirty="0"/>
+          </a:p>
+        </p:txBody>
+      </p:sp>
+      <p:sp>
+        <p:nvSpPr>
+          <p:cNvPr id="35" name="Text 33"/>
+          <p:cNvSpPr/>
+          <p:nvPr/>
+        </p:nvSpPr>
+        <p:spPr>
+          <a:xfrm>
+            <a:off x="1993392" y="4133088"/>
+            <a:ext cx="3840480" cy="329184"/>
+          </a:xfrm>
+          <a:prstGeom prst="rect">
+            <a:avLst/>
+          </a:prstGeom>
+          <a:noFill/>
+          <a:ln/>
+        </p:spPr>
+        <p:txBody>
+          <a:bodyPr wrap="square" lIns="0" tIns="0" rIns="0" bIns="0" rtlCol="0" anchor="ctr"/>
+          <a:lstStyle/>
+          <a:p>
+            <a:pPr indent="0" marL="0">
+              <a:buNone/>
+            </a:pPr>
+            <a:r>
+              <a:rPr lang="en-US" sz="900" dirty="0">
+                <a:solidFill>
+                  <a:srgbClr val="E2E8F0"/>
+                </a:solidFill>
+                <a:latin typeface="Pretendard" pitchFamily="34" charset="0"/>
+                <a:ea typeface="Pretendard" pitchFamily="34" charset="-122"/>
+                <a:cs typeface="Pretendard" pitchFamily="34" charset="-120"/>
+              </a:rPr>
+              <a:t>중개인 현장 조사 및 경험 기반 입력</a:t>
+            </a:r>
+            <a:endParaRPr lang="en-US" sz="900" dirty="0"/>
+          </a:p>
+        </p:txBody>
+      </p:sp>
+      <p:sp>
+        <p:nvSpPr>
+          <p:cNvPr id="36" name="Shape 34"/>
+          <p:cNvSpPr/>
+          <p:nvPr/>
+        </p:nvSpPr>
+        <p:spPr>
+          <a:xfrm>
+            <a:off x="566928" y="4626864"/>
+            <a:ext cx="1280160" cy="292608"/>
+          </a:xfrm>
+          <a:prstGeom prst="roundRect">
+            <a:avLst>
+              <a:gd name="adj" fmla="val 12500"/>
+            </a:avLst>
+          </a:prstGeom>
+          <a:solidFill>
+            <a:srgbClr val="2D3748"/>
+          </a:solidFill>
+          <a:ln/>
+        </p:spPr>
+      </p:sp>
+      <p:sp>
+        <p:nvSpPr>
+          <p:cNvPr id="37" name="Text 35"/>
+          <p:cNvSpPr/>
+          <p:nvPr/>
+        </p:nvSpPr>
+        <p:spPr>
+          <a:xfrm>
+            <a:off x="566928" y="4626864"/>
+            <a:ext cx="1280160" cy="292608"/>
+          </a:xfrm>
+          <a:prstGeom prst="rect">
+            <a:avLst/>
+          </a:prstGeom>
+          <a:noFill/>
+          <a:ln/>
+        </p:spPr>
+        <p:txBody>
+          <a:bodyPr wrap="square" lIns="0" tIns="0" rIns="0" bIns="0" rtlCol="0" anchor="ctr"/>
+          <a:lstStyle/>
+          <a:p>
+            <a:pPr algn="ctr" indent="0" marL="0">
+              <a:buNone/>
+            </a:pPr>
+            <a:r>
+              <a:rPr lang="en-US" sz="850" b="1" dirty="0">
+                <a:solidFill>
+                  <a:srgbClr val="FFFFFF"/>
+                </a:solidFill>
+                <a:latin typeface="Pretendard" pitchFamily="34" charset="0"/>
+                <a:ea typeface="Pretendard" pitchFamily="34" charset="-122"/>
+                <a:cs typeface="Pretendard" pitchFamily="34" charset="-120"/>
+              </a:rPr>
+              <a:t>◇ AI추정·가정</a:t>
+            </a:r>
+            <a:endParaRPr lang="en-US" sz="850" dirty="0"/>
+          </a:p>
+        </p:txBody>
+      </p:sp>
+      <p:sp>
+        <p:nvSpPr>
+          <p:cNvPr id="38" name="Text 36"/>
+          <p:cNvSpPr/>
+          <p:nvPr/>
+        </p:nvSpPr>
+        <p:spPr>
+          <a:xfrm>
+            <a:off x="1993392" y="4608576"/>
+            <a:ext cx="3840480" cy="329184"/>
+          </a:xfrm>
+          <a:prstGeom prst="rect">
+            <a:avLst/>
+          </a:prstGeom>
+          <a:noFill/>
+          <a:ln/>
+        </p:spPr>
+        <p:txBody>
+          <a:bodyPr wrap="square" lIns="0" tIns="0" rIns="0" bIns="0" rtlCol="0" anchor="ctr"/>
+          <a:lstStyle/>
+          <a:p>
+            <a:pPr indent="0" marL="0">
+              <a:buNone/>
+            </a:pPr>
+            <a:r>
+              <a:rPr lang="en-US" sz="900" dirty="0">
+                <a:solidFill>
+                  <a:srgbClr val="E2E8F0"/>
+                </a:solidFill>
+                <a:latin typeface="Pretendard" pitchFamily="34" charset="0"/>
+                <a:ea typeface="Pretendard" pitchFamily="34" charset="-122"/>
+                <a:cs typeface="Pretendard" pitchFamily="34" charset="-120"/>
+              </a:rPr>
+              <a:t>시나리오 분석 및 AI 모델 추정</a:t>
+            </a:r>
+            <a:endParaRPr lang="en-US" sz="900" dirty="0"/>
+          </a:p>
+        </p:txBody>
+      </p:sp>
+      <p:sp>
+        <p:nvSpPr>
+          <p:cNvPr id="39" name="Text 37"/>
+          <p:cNvSpPr/>
+          <p:nvPr/>
+        </p:nvSpPr>
+        <p:spPr>
+          <a:xfrm>
+            <a:off x="6492240" y="2395728"/>
+            <a:ext cx="5129784" cy="237744"/>
+          </a:xfrm>
+          <a:prstGeom prst="rect">
+            <a:avLst/>
+          </a:prstGeom>
+          <a:noFill/>
+          <a:ln/>
+        </p:spPr>
+        <p:txBody>
+          <a:bodyPr wrap="square" lIns="0" tIns="0" rIns="0" bIns="0" rtlCol="0" anchor="ctr"/>
+          <a:lstStyle/>
+          <a:p>
+            <a:pPr indent="0" marL="0">
+              <a:buNone/>
+            </a:pPr>
+            <a:r>
+              <a:rPr lang="en-US" sz="1100" b="1" dirty="0">
+                <a:solidFill>
+                  <a:srgbClr val="FFFFFF"/>
+                </a:solidFill>
+                <a:latin typeface="Pretendard" pitchFamily="34" charset="0"/>
+                <a:ea typeface="Pretendard" pitchFamily="34" charset="-122"/>
+                <a:cs typeface="Pretendard" pitchFamily="34" charset="-120"/>
+              </a:rPr>
+              <a:t>면책 조항</a:t>
+            </a:r>
+            <a:endParaRPr lang="en-US" sz="1100" dirty="0"/>
+          </a:p>
+        </p:txBody>
+      </p:sp>
+      <p:sp>
+        <p:nvSpPr>
+          <p:cNvPr id="40" name="Shape 38"/>
+          <p:cNvSpPr/>
+          <p:nvPr/>
+        </p:nvSpPr>
+        <p:spPr>
+          <a:xfrm>
+            <a:off x="6492240" y="2724912"/>
+            <a:ext cx="5129784" cy="1645920"/>
+          </a:xfrm>
+          <a:prstGeom prst="roundRect">
+            <a:avLst>
+              <a:gd name="adj" fmla="val 2222"/>
+            </a:avLst>
+          </a:prstGeom>
+          <a:solidFill>
+            <a:srgbClr val="1C2433"/>
+          </a:solidFill>
+          <a:ln/>
+        </p:spPr>
+      </p:sp>
+      <p:sp>
+        <p:nvSpPr>
+          <p:cNvPr id="41" name="Text 39"/>
+          <p:cNvSpPr/>
+          <p:nvPr/>
+        </p:nvSpPr>
+        <p:spPr>
+          <a:xfrm>
+            <a:off x="6675120" y="2834640"/>
+            <a:ext cx="4764024" cy="1426464"/>
+          </a:xfrm>
+          <a:prstGeom prst="rect">
+            <a:avLst/>
+          </a:prstGeom>
+          <a:noFill/>
+          <a:ln/>
+        </p:spPr>
+        <p:txBody>
+          <a:bodyPr wrap="square" lIns="0" tIns="0" rIns="0" bIns="0" rtlCol="0" anchor="t"/>
+          <a:lstStyle/>
+          <a:p>
+            <a:pPr indent="0" marL="0">
+              <a:lnSpc>
+                <a:spcPct val="128000"/>
+              </a:lnSpc>
+              <a:buNone/>
+            </a:pPr>
+            <a:r>
+              <a:rPr lang="en-US" sz="850" dirty="0">
+                <a:solidFill>
+                  <a:srgbClr val="A0AEC0"/>
+                </a:solidFill>
+                <a:latin typeface="Pretendard" pitchFamily="34" charset="0"/>
+                <a:ea typeface="Pretendard" pitchFamily="34" charset="-122"/>
+                <a:cs typeface="Pretendard" pitchFamily="34" charset="-120"/>
+              </a:rPr>
+              <a:t>본 자료는 투자 권유가 아니며, 기재된 정보의 정확성을 보증하지 않습니다.</a:t>
+            </a:r>
+            <a:endParaRPr lang="en-US" sz="850" dirty="0"/>
+          </a:p>
+        </p:txBody>
+      </p:sp>
+      <p:sp>
+        <p:nvSpPr>
+          <p:cNvPr id="42" name="Shape 40"/>
+          <p:cNvSpPr/>
+          <p:nvPr/>
+        </p:nvSpPr>
+        <p:spPr>
+          <a:xfrm>
+            <a:off x="566928" y="5760720"/>
+            <a:ext cx="11057839" cy="457200"/>
+          </a:xfrm>
+          <a:prstGeom prst="rect">
+            <a:avLst/>
+          </a:prstGeom>
+          <a:solidFill>
+            <a:srgbClr val="977024"/>
+          </a:solidFill>
+          <a:ln/>
+        </p:spPr>
+      </p:sp>
+      <p:sp>
+        <p:nvSpPr>
+          <p:cNvPr id="43" name="Text 41"/>
+          <p:cNvSpPr/>
+          <p:nvPr/>
+        </p:nvSpPr>
+        <p:spPr>
+          <a:xfrm>
+            <a:off x="749808" y="5806440"/>
+            <a:ext cx="10692079" cy="365760"/>
+          </a:xfrm>
+          <a:prstGeom prst="rect">
+            <a:avLst/>
+          </a:prstGeom>
+          <a:noFill/>
+          <a:ln/>
+        </p:spPr>
+        <p:txBody>
+          <a:bodyPr wrap="square" lIns="0" tIns="0" rIns="0" bIns="0" rtlCol="0" anchor="ctr"/>
+          <a:lstStyle/>
+          <a:p>
+            <a:pPr indent="0" marL="0">
+              <a:buNone/>
+            </a:pPr>
+            <a:r>
+              <a:rPr lang="en-US" sz="900" dirty="0">
+                <a:solidFill>
+                  <a:srgbClr val="F3EBDA"/>
+                </a:solidFill>
+                <a:latin typeface="Pretendard" pitchFamily="34" charset="0"/>
+                <a:ea typeface="Pretendard" pitchFamily="34" charset="-122"/>
+                <a:cs typeface="Pretendard" pitchFamily="34" charset="-120"/>
+              </a:rPr>
+              <a:t>본 자료의 모든 수치는 예비 검토용이며, 상세 실사 자료 및 비밀 상담은 담당 전문 중개사를 통해 제공됩니다.</a:t>
+            </a:r>
+            <a:endParaRPr lang="en-US" sz="900" dirty="0"/>
+          </a:p>
+        </p:txBody>
+      </p:sp>
+      <p:sp>
+        <p:nvSpPr>
+          <p:cNvPr id="44" name="Text 42"/>
+          <p:cNvSpPr/>
+          <p:nvPr/>
+        </p:nvSpPr>
+        <p:spPr>
+          <a:xfrm>
+            <a:off x="566928" y="6382512"/>
+            <a:ext cx="7315200" cy="219456"/>
+          </a:xfrm>
+          <a:prstGeom prst="rect">
+            <a:avLst/>
+          </a:prstGeom>
+          <a:noFill/>
+          <a:ln/>
+        </p:spPr>
+        <p:txBody>
+          <a:bodyPr wrap="square" lIns="0" tIns="0" rIns="0" bIns="0" rtlCol="0" anchor="ctr"/>
+          <a:lstStyle/>
+          <a:p>
+            <a:pPr indent="0" marL="0">
+              <a:buNone/>
+            </a:pPr>
+            <a:r>
+              <a:rPr lang="en-US" sz="800" dirty="0">
+                <a:solidFill>
+                  <a:srgbClr val="718096"/>
+                </a:solidFill>
+                <a:latin typeface="Pretendard" pitchFamily="34" charset="0"/>
+                <a:ea typeface="Pretendard" pitchFamily="34" charset="-122"/>
+                <a:cs typeface="Pretendard" pitchFamily="34" charset="-120"/>
+              </a:rPr>
+              <a:t>크리딜   |   </a:t>
+            </a:r>
+            <a:endParaRPr lang="en-US" sz="800" dirty="0"/>
+          </a:p>
+        </p:txBody>
+      </p:sp>
+      <p:sp>
+        <p:nvSpPr>
+          <p:cNvPr id="45" name="Text 43"/>
+          <p:cNvSpPr/>
+          <p:nvPr/>
+        </p:nvSpPr>
+        <p:spPr>
+          <a:xfrm>
+            <a:off x="10710367" y="6382512"/>
+            <a:ext cx="914400" cy="219456"/>
           </a:xfrm>
           <a:prstGeom prst="rect">
             <a:avLst/>
@@ -2860,521 +3772,19 @@
               <a:buNone/>
             </a:pPr>
             <a:r>
-              <a:rPr lang="en-US" sz="1200" b="1" dirty="0">
-                <a:solidFill>
-                  <a:srgbClr val="FFFFFF"/>
+              <a:rPr lang="en-US" sz="900" b="1" dirty="0">
+                <a:solidFill>
+                  <a:srgbClr val="B98A2E"/>
                 </a:solidFill>
                 <a:latin typeface="Arial" pitchFamily="34" charset="0"/>
                 <a:ea typeface="Arial" pitchFamily="34" charset="-122"/>
                 <a:cs typeface="Arial" pitchFamily="34" charset="-120"/>
               </a:rPr>
-              <a:t>0.65</a:t>
-            </a:r>
-            <a:endParaRPr lang="en-US" sz="1200" dirty="0"/>
-          </a:p>
-        </p:txBody>
-      </p:sp>
-      <p:sp>
-        <p:nvSpPr>
-          <p:cNvPr id="18" name="Shape 16"/>
-          <p:cNvSpPr/>
-          <p:nvPr/>
-        </p:nvSpPr>
-        <p:spPr>
-          <a:xfrm>
-            <a:off x="566928" y="3822192"/>
-            <a:ext cx="1417320" cy="347472"/>
-          </a:xfrm>
-          <a:prstGeom prst="roundRect">
-            <a:avLst>
-              <a:gd name="adj" fmla="val 10526"/>
-            </a:avLst>
-          </a:prstGeom>
-          <a:solidFill>
-            <a:srgbClr val="334155"/>
-          </a:solidFill>
-          <a:ln/>
-        </p:spPr>
-      </p:sp>
-      <p:sp>
-        <p:nvSpPr>
-          <p:cNvPr id="19" name="Text 17"/>
-          <p:cNvSpPr/>
-          <p:nvPr/>
-        </p:nvSpPr>
-        <p:spPr>
-          <a:xfrm>
-            <a:off x="566928" y="3822192"/>
-            <a:ext cx="1417320" cy="347472"/>
-          </a:xfrm>
-          <a:prstGeom prst="rect">
-            <a:avLst/>
-          </a:prstGeom>
-          <a:noFill/>
-          <a:ln/>
-        </p:spPr>
-        <p:txBody>
-          <a:bodyPr wrap="square" lIns="0" tIns="0" rIns="0" bIns="0" rtlCol="0" anchor="ctr"/>
-          <a:lstStyle/>
-          <a:p>
-            <a:pPr algn="ctr" indent="0" marL="0">
-              <a:buNone/>
-            </a:pPr>
-            <a:r>
-              <a:rPr lang="en-US" sz="950" b="1" dirty="0">
-                <a:solidFill>
-                  <a:srgbClr val="FFFFFF"/>
-                </a:solidFill>
-                <a:latin typeface="Pretendard" pitchFamily="34" charset="0"/>
-                <a:ea typeface="Pretendard" pitchFamily="34" charset="-122"/>
-                <a:cs typeface="Pretendard" pitchFamily="34" charset="-120"/>
-              </a:rPr>
-              <a:t>● 중개인입력</a:t>
-            </a:r>
-            <a:endParaRPr lang="en-US" sz="950" dirty="0"/>
-          </a:p>
-        </p:txBody>
-      </p:sp>
-      <p:sp>
-        <p:nvSpPr>
-          <p:cNvPr id="20" name="Text 18"/>
-          <p:cNvSpPr/>
-          <p:nvPr/>
-        </p:nvSpPr>
-        <p:spPr>
-          <a:xfrm>
-            <a:off x="2139696" y="3803904"/>
-            <a:ext cx="3566160" cy="420624"/>
-          </a:xfrm>
-          <a:prstGeom prst="rect">
-            <a:avLst/>
-          </a:prstGeom>
-          <a:noFill/>
-          <a:ln/>
-        </p:spPr>
-        <p:txBody>
-          <a:bodyPr wrap="square" lIns="0" tIns="0" rIns="0" bIns="0" rtlCol="0" anchor="ctr"/>
-          <a:lstStyle/>
-          <a:p>
-            <a:pPr indent="0" marL="0">
-              <a:buNone/>
-            </a:pPr>
-            <a:r>
-              <a:rPr lang="en-US" sz="1000" dirty="0">
-                <a:solidFill>
-                  <a:srgbClr val="F1F5F9"/>
-                </a:solidFill>
-                <a:latin typeface="Pretendard" pitchFamily="34" charset="0"/>
-                <a:ea typeface="Pretendard" pitchFamily="34" charset="-122"/>
-                <a:cs typeface="Pretendard" pitchFamily="34" charset="-120"/>
-              </a:rPr>
-              <a:t>중개인 현장 조사 및 경험 기반 입력</a:t>
-            </a:r>
-            <a:endParaRPr lang="en-US" sz="1000" dirty="0"/>
-          </a:p>
-        </p:txBody>
-      </p:sp>
-      <p:sp>
-        <p:nvSpPr>
-          <p:cNvPr id="21" name="Text 19"/>
-          <p:cNvSpPr/>
-          <p:nvPr/>
-        </p:nvSpPr>
-        <p:spPr>
-          <a:xfrm>
-            <a:off x="5504688" y="3822192"/>
-            <a:ext cx="731520" cy="292608"/>
-          </a:xfrm>
-          <a:prstGeom prst="rect">
-            <a:avLst/>
-          </a:prstGeom>
-          <a:noFill/>
-          <a:ln/>
-        </p:spPr>
-        <p:txBody>
-          <a:bodyPr wrap="square" lIns="0" tIns="0" rIns="0" bIns="0" rtlCol="0" anchor="ctr"/>
-          <a:lstStyle/>
-          <a:p>
-            <a:pPr algn="r" indent="0" marL="0">
-              <a:buNone/>
-            </a:pPr>
-            <a:r>
-              <a:rPr lang="en-US" sz="1200" b="1" dirty="0">
-                <a:solidFill>
-                  <a:srgbClr val="FFFFFF"/>
-                </a:solidFill>
-                <a:latin typeface="Arial" pitchFamily="34" charset="0"/>
-                <a:ea typeface="Arial" pitchFamily="34" charset="-122"/>
-                <a:cs typeface="Arial" pitchFamily="34" charset="-120"/>
-              </a:rPr>
-              <a:t>0.60</a:t>
-            </a:r>
-            <a:endParaRPr lang="en-US" sz="1200" dirty="0"/>
-          </a:p>
-        </p:txBody>
-      </p:sp>
-      <p:sp>
-        <p:nvSpPr>
-          <p:cNvPr id="22" name="Shape 20"/>
-          <p:cNvSpPr/>
-          <p:nvPr/>
-        </p:nvSpPr>
-        <p:spPr>
-          <a:xfrm>
-            <a:off x="566928" y="4480560"/>
-            <a:ext cx="1417320" cy="347472"/>
-          </a:xfrm>
-          <a:prstGeom prst="roundRect">
-            <a:avLst>
-              <a:gd name="adj" fmla="val 10526"/>
-            </a:avLst>
-          </a:prstGeom>
-          <a:solidFill>
-            <a:srgbClr val="334155"/>
-          </a:solidFill>
-          <a:ln/>
-        </p:spPr>
-      </p:sp>
-      <p:sp>
-        <p:nvSpPr>
-          <p:cNvPr id="23" name="Text 21"/>
-          <p:cNvSpPr/>
-          <p:nvPr/>
-        </p:nvSpPr>
-        <p:spPr>
-          <a:xfrm>
-            <a:off x="566928" y="4480560"/>
-            <a:ext cx="1417320" cy="347472"/>
-          </a:xfrm>
-          <a:prstGeom prst="rect">
-            <a:avLst/>
-          </a:prstGeom>
-          <a:noFill/>
-          <a:ln/>
-        </p:spPr>
-        <p:txBody>
-          <a:bodyPr wrap="square" lIns="0" tIns="0" rIns="0" bIns="0" rtlCol="0" anchor="ctr"/>
-          <a:lstStyle/>
-          <a:p>
-            <a:pPr algn="ctr" indent="0" marL="0">
-              <a:buNone/>
-            </a:pPr>
-            <a:r>
-              <a:rPr lang="en-US" sz="950" b="1" dirty="0">
-                <a:solidFill>
-                  <a:srgbClr val="FFFFFF"/>
-                </a:solidFill>
-                <a:latin typeface="Pretendard" pitchFamily="34" charset="0"/>
-                <a:ea typeface="Pretendard" pitchFamily="34" charset="-122"/>
-                <a:cs typeface="Pretendard" pitchFamily="34" charset="-120"/>
-              </a:rPr>
-              <a:t>◇ AI추정·가정</a:t>
-            </a:r>
-            <a:endParaRPr lang="en-US" sz="950" dirty="0"/>
-          </a:p>
-        </p:txBody>
-      </p:sp>
-      <p:sp>
-        <p:nvSpPr>
-          <p:cNvPr id="24" name="Text 22"/>
-          <p:cNvSpPr/>
-          <p:nvPr/>
-        </p:nvSpPr>
-        <p:spPr>
-          <a:xfrm>
-            <a:off x="2139696" y="4462272"/>
-            <a:ext cx="3566160" cy="420624"/>
-          </a:xfrm>
-          <a:prstGeom prst="rect">
-            <a:avLst/>
-          </a:prstGeom>
-          <a:noFill/>
-          <a:ln/>
-        </p:spPr>
-        <p:txBody>
-          <a:bodyPr wrap="square" lIns="0" tIns="0" rIns="0" bIns="0" rtlCol="0" anchor="ctr"/>
-          <a:lstStyle/>
-          <a:p>
-            <a:pPr indent="0" marL="0">
-              <a:buNone/>
-            </a:pPr>
-            <a:r>
-              <a:rPr lang="en-US" sz="1000" dirty="0">
-                <a:solidFill>
-                  <a:srgbClr val="F1F5F9"/>
-                </a:solidFill>
-                <a:latin typeface="Pretendard" pitchFamily="34" charset="0"/>
-                <a:ea typeface="Pretendard" pitchFamily="34" charset="-122"/>
-                <a:cs typeface="Pretendard" pitchFamily="34" charset="-120"/>
-              </a:rPr>
-              <a:t>시나리오 분석 및 AI 모델 추정</a:t>
-            </a:r>
-            <a:endParaRPr lang="en-US" sz="1000" dirty="0"/>
-          </a:p>
-        </p:txBody>
-      </p:sp>
-      <p:sp>
-        <p:nvSpPr>
-          <p:cNvPr id="25" name="Text 23"/>
-          <p:cNvSpPr/>
-          <p:nvPr/>
-        </p:nvSpPr>
-        <p:spPr>
-          <a:xfrm>
-            <a:off x="5504688" y="4480560"/>
-            <a:ext cx="731520" cy="292608"/>
-          </a:xfrm>
-          <a:prstGeom prst="rect">
-            <a:avLst/>
-          </a:prstGeom>
-          <a:noFill/>
-          <a:ln/>
-        </p:spPr>
-        <p:txBody>
-          <a:bodyPr wrap="square" lIns="0" tIns="0" rIns="0" bIns="0" rtlCol="0" anchor="ctr"/>
-          <a:lstStyle/>
-          <a:p>
-            <a:pPr algn="r" indent="0" marL="0">
-              <a:buNone/>
-            </a:pPr>
-            <a:r>
-              <a:rPr lang="en-US" sz="1200" b="1" dirty="0">
-                <a:solidFill>
-                  <a:srgbClr val="FFFFFF"/>
-                </a:solidFill>
-                <a:latin typeface="Arial" pitchFamily="34" charset="0"/>
-                <a:ea typeface="Arial" pitchFamily="34" charset="-122"/>
-                <a:cs typeface="Arial" pitchFamily="34" charset="-120"/>
-              </a:rPr>
-              <a:t>0.30</a:t>
-            </a:r>
-            <a:endParaRPr lang="en-US" sz="1200" dirty="0"/>
-          </a:p>
-        </p:txBody>
-      </p:sp>
-      <p:sp>
-        <p:nvSpPr>
-          <p:cNvPr id="26" name="Text 24"/>
-          <p:cNvSpPr/>
-          <p:nvPr/>
-        </p:nvSpPr>
-        <p:spPr>
-          <a:xfrm>
-            <a:off x="6492240" y="1517904"/>
-            <a:ext cx="5129784" cy="237744"/>
-          </a:xfrm>
-          <a:prstGeom prst="rect">
-            <a:avLst/>
-          </a:prstGeom>
-          <a:noFill/>
-          <a:ln/>
-        </p:spPr>
-        <p:txBody>
-          <a:bodyPr wrap="square" lIns="0" tIns="0" rIns="0" bIns="0" rtlCol="0" anchor="ctr"/>
-          <a:lstStyle/>
-          <a:p>
-            <a:pPr indent="0" marL="0">
-              <a:buNone/>
-            </a:pPr>
-            <a:r>
-              <a:rPr lang="en-US" sz="1100" b="1" dirty="0">
-                <a:solidFill>
-                  <a:srgbClr val="FFFFFF"/>
-                </a:solidFill>
-                <a:latin typeface="Pretendard" pitchFamily="34" charset="0"/>
-                <a:ea typeface="Pretendard" pitchFamily="34" charset="-122"/>
-                <a:cs typeface="Pretendard" pitchFamily="34" charset="-120"/>
-              </a:rPr>
-              <a:t>면책 조항</a:t>
-            </a:r>
-            <a:endParaRPr lang="en-US" sz="1100" dirty="0"/>
-          </a:p>
-        </p:txBody>
-      </p:sp>
-      <p:sp>
-        <p:nvSpPr>
-          <p:cNvPr id="27" name="Shape 25"/>
-          <p:cNvSpPr/>
-          <p:nvPr/>
-        </p:nvSpPr>
-        <p:spPr>
-          <a:xfrm>
-            <a:off x="6492240" y="1847088"/>
-            <a:ext cx="5129784" cy="2615184"/>
-          </a:xfrm>
-          <a:prstGeom prst="roundRect">
-            <a:avLst>
-              <a:gd name="adj" fmla="val 1399"/>
-            </a:avLst>
-          </a:prstGeom>
-          <a:solidFill>
-            <a:srgbClr val="1E293B"/>
-          </a:solidFill>
-          <a:ln/>
-        </p:spPr>
-      </p:sp>
-      <p:sp>
-        <p:nvSpPr>
-          <p:cNvPr id="28" name="Text 26"/>
-          <p:cNvSpPr/>
-          <p:nvPr/>
-        </p:nvSpPr>
-        <p:spPr>
-          <a:xfrm>
-            <a:off x="6711696" y="2011680"/>
-            <a:ext cx="4690872" cy="2286000"/>
-          </a:xfrm>
-          <a:prstGeom prst="rect">
-            <a:avLst/>
-          </a:prstGeom>
-          <a:noFill/>
-          <a:ln/>
-        </p:spPr>
-        <p:txBody>
-          <a:bodyPr wrap="square" lIns="0" tIns="0" rIns="0" bIns="0" rtlCol="0" anchor="t"/>
-          <a:lstStyle/>
-          <a:p>
-            <a:pPr indent="0" marL="0">
-              <a:lnSpc>
-                <a:spcPct val="128000"/>
-              </a:lnSpc>
-              <a:buNone/>
-            </a:pPr>
-            <a:r>
-              <a:rPr lang="en-US" sz="930" dirty="0">
-                <a:solidFill>
-                  <a:srgbClr val="94A3B8"/>
-                </a:solidFill>
-                <a:latin typeface="Pretendard" pitchFamily="34" charset="0"/>
-                <a:ea typeface="Pretendard" pitchFamily="34" charset="-122"/>
-                <a:cs typeface="Pretendard" pitchFamily="34" charset="-120"/>
-              </a:rPr>
-              <a:t>본 자료는 투자 권유가 아니며, 기재된 정보의 정확성을 보증하지 않습니다.</a:t>
-            </a:r>
-            <a:endParaRPr lang="en-US" sz="930" dirty="0"/>
-          </a:p>
-        </p:txBody>
-      </p:sp>
-      <p:sp>
-        <p:nvSpPr>
-          <p:cNvPr id="29" name="Shape 27"/>
-          <p:cNvSpPr/>
-          <p:nvPr/>
-        </p:nvSpPr>
-        <p:spPr>
-          <a:xfrm>
-            <a:off x="566928" y="5230368"/>
-            <a:ext cx="11057839" cy="640080"/>
-          </a:xfrm>
-          <a:prstGeom prst="rect">
-            <a:avLst/>
-          </a:prstGeom>
-          <a:solidFill>
-            <a:srgbClr val="4F6A00"/>
-          </a:solidFill>
-          <a:ln/>
-        </p:spPr>
-      </p:sp>
-      <p:sp>
-        <p:nvSpPr>
-          <p:cNvPr id="30" name="Text 28"/>
-          <p:cNvSpPr/>
-          <p:nvPr/>
-        </p:nvSpPr>
-        <p:spPr>
-          <a:xfrm>
-            <a:off x="786384" y="5321808"/>
-            <a:ext cx="10618927" cy="457200"/>
-          </a:xfrm>
-          <a:prstGeom prst="rect">
-            <a:avLst/>
-          </a:prstGeom>
-          <a:noFill/>
-          <a:ln/>
-        </p:spPr>
-        <p:txBody>
-          <a:bodyPr wrap="square" lIns="0" tIns="0" rIns="0" bIns="0" rtlCol="0" anchor="ctr"/>
-          <a:lstStyle/>
-          <a:p>
-            <a:pPr indent="0" marL="0">
-              <a:buNone/>
-            </a:pPr>
-            <a:r>
-              <a:rPr lang="en-US" sz="1000" dirty="0">
-                <a:solidFill>
-                  <a:srgbClr val="E8F5CC"/>
-                </a:solidFill>
-                <a:latin typeface="Pretendard" pitchFamily="34" charset="0"/>
-                <a:ea typeface="Pretendard" pitchFamily="34" charset="-122"/>
-                <a:cs typeface="Pretendard" pitchFamily="34" charset="-120"/>
-              </a:rPr>
-              <a:t>본 자료의 모든 수치는 예비 검토용이며, 상세 실사 자료(등기·임대차계약서) 및 1:1 비밀 상담은 담당 전문 중개사를 통해 제공됩니다.</a:t>
-            </a:r>
-            <a:endParaRPr lang="en-US" sz="1000" dirty="0"/>
-          </a:p>
-        </p:txBody>
-      </p:sp>
-      <p:sp>
-        <p:nvSpPr>
-          <p:cNvPr id="31" name="Text 29"/>
-          <p:cNvSpPr/>
-          <p:nvPr/>
-        </p:nvSpPr>
-        <p:spPr>
-          <a:xfrm>
-            <a:off x="566928" y="6419088"/>
-            <a:ext cx="11057839" cy="201168"/>
-          </a:xfrm>
-          <a:prstGeom prst="rect">
-            <a:avLst/>
-          </a:prstGeom>
-          <a:noFill/>
-          <a:ln/>
-        </p:spPr>
-        <p:txBody>
-          <a:bodyPr wrap="square" lIns="0" tIns="0" rIns="0" bIns="0" rtlCol="0" anchor="ctr"/>
-          <a:lstStyle/>
-          <a:p>
-            <a:pPr algn="ctr" indent="0" marL="0">
-              <a:buNone/>
-            </a:pPr>
-            <a:r>
-              <a:rPr lang="en-US" sz="750" dirty="0">
-                <a:solidFill>
-                  <a:srgbClr val="64748B"/>
-                </a:solidFill>
-                <a:latin typeface="Pretendard" pitchFamily="34" charset="0"/>
-                <a:ea typeface="Pretendard" pitchFamily="34" charset="-122"/>
-                <a:cs typeface="Pretendard" pitchFamily="34" charset="-120"/>
-              </a:rPr>
-              <a:t>크리딜  ·    ·  10</a:t>
-            </a:r>
-            <a:endParaRPr lang="en-US" sz="750" dirty="0"/>
-          </a:p>
-        </p:txBody>
-      </p:sp>
-      <p:sp>
-        <p:nvSpPr>
-          <p:cNvPr id="32" name="Shape 30"/>
-          <p:cNvSpPr/>
-          <p:nvPr/>
-        </p:nvSpPr>
-        <p:spPr>
-          <a:xfrm>
-            <a:off x="4437172" y="6382512"/>
-            <a:ext cx="3317352" cy="0"/>
-          </a:xfrm>
-          <a:prstGeom prst="line">
-            <a:avLst/>
-          </a:prstGeom>
-          <a:noFill/>
-          <a:ln w="6350">
-            <a:solidFill>
-              <a:srgbClr val="6B8E00"/>
-            </a:solidFill>
-            <a:prstDash val="solid"/>
-          </a:ln>
-        </p:spPr>
+              <a:t>10</a:t>
+            </a:r>
+            <a:endParaRPr lang="en-US" sz="900" dirty="0"/>
+          </a:p>
+        </p:txBody>
       </p:sp>
     </p:spTree>
   </p:cSld>
@@ -3416,14 +3826,14 @@
         </p:nvSpPr>
         <p:spPr>
           <a:xfrm>
-            <a:off x="566928" y="384048"/>
-            <a:ext cx="45720" cy="566928"/>
-          </a:xfrm>
-          <a:prstGeom prst="rect">
+            <a:off x="566928" y="457200"/>
+            <a:ext cx="384048" cy="384048"/>
+          </a:xfrm>
+          <a:prstGeom prst="ellipse">
             <a:avLst/>
           </a:prstGeom>
           <a:solidFill>
-            <a:srgbClr val="6B8E00"/>
+            <a:srgbClr val="B98A2E"/>
           </a:solidFill>
           <a:ln/>
         </p:spPr>
@@ -3436,32 +3846,71 @@
         </p:nvSpPr>
         <p:spPr>
           <a:xfrm>
-            <a:off x="749808" y="384048"/>
-            <a:ext cx="10874959" cy="182880"/>
-          </a:xfrm>
-          <a:prstGeom prst="rect">
-            <a:avLst/>
-          </a:prstGeom>
-          <a:noFill/>
-          <a:ln/>
-        </p:spPr>
-        <p:txBody>
-          <a:bodyPr wrap="square" lIns="0" tIns="0" rIns="0" bIns="0" rtlCol="0" anchor="ctr"/>
-          <a:lstStyle/>
-          <a:p>
-            <a:pPr indent="0" marL="0">
-              <a:buNone/>
-            </a:pPr>
-            <a:r>
-              <a:rPr lang="en-US" sz="950" b="1" spc="200" kern="0" dirty="0">
-                <a:solidFill>
-                  <a:srgbClr val="6B8E00"/>
+            <a:off x="566928" y="457200"/>
+            <a:ext cx="384048" cy="384048"/>
+          </a:xfrm>
+          <a:prstGeom prst="rect">
+            <a:avLst/>
+          </a:prstGeom>
+          <a:noFill/>
+          <a:ln/>
+        </p:spPr>
+        <p:txBody>
+          <a:bodyPr wrap="square" lIns="0" tIns="0" rIns="0" bIns="0" rtlCol="0" anchor="ctr"/>
+          <a:lstStyle/>
+          <a:p>
+            <a:pPr algn="ctr" indent="0" marL="0">
+              <a:buNone/>
+            </a:pPr>
+            <a:r>
+              <a:rPr lang="en-US" sz="1300" b="1" dirty="0">
+                <a:solidFill>
+                  <a:srgbClr val="FFFFFF"/>
                 </a:solidFill>
                 <a:latin typeface="Arial" pitchFamily="34" charset="0"/>
                 <a:ea typeface="Arial" pitchFamily="34" charset="-122"/>
                 <a:cs typeface="Arial" pitchFamily="34" charset="-120"/>
               </a:rPr>
-              <a:t>02  Summary</a:t>
+              <a:t>02</a:t>
+            </a:r>
+            <a:endParaRPr lang="en-US" sz="1300" dirty="0"/>
+          </a:p>
+        </p:txBody>
+      </p:sp>
+      <p:sp>
+        <p:nvSpPr>
+          <p:cNvPr id="4" name="Text 2"/>
+          <p:cNvSpPr/>
+          <p:nvPr/>
+        </p:nvSpPr>
+        <p:spPr>
+          <a:xfrm>
+            <a:off x="1133856" y="457200"/>
+            <a:ext cx="10490911" cy="182880"/>
+          </a:xfrm>
+          <a:prstGeom prst="rect">
+            <a:avLst/>
+          </a:prstGeom>
+          <a:noFill/>
+          <a:ln/>
+        </p:spPr>
+        <p:txBody>
+          <a:bodyPr wrap="square" lIns="0" tIns="0" rIns="0" bIns="0" rtlCol="0" anchor="ctr"/>
+          <a:lstStyle/>
+          <a:p>
+            <a:pPr indent="0" marL="0">
+              <a:buNone/>
+            </a:pPr>
+            <a:r>
+              <a:rPr lang="en-US" sz="950" b="1" spc="200" kern="0" dirty="0">
+                <a:solidFill>
+                  <a:srgbClr val="B98A2E"/>
+                </a:solidFill>
+                <a:latin typeface="Arial" pitchFamily="34" charset="0"/>
+                <a:ea typeface="Arial" pitchFamily="34" charset="-122"/>
+                <a:cs typeface="Arial" pitchFamily="34" charset="-120"/>
+              </a:rPr>
+              <a:t>Summary</a:t>
             </a:r>
             <a:endParaRPr lang="en-US" sz="950" dirty="0"/>
           </a:p>
@@ -3469,32 +3918,32 @@
       </p:sp>
       <p:sp>
         <p:nvSpPr>
-          <p:cNvPr id="4" name="Text 2"/>
-          <p:cNvSpPr/>
-          <p:nvPr/>
-        </p:nvSpPr>
-        <p:spPr>
-          <a:xfrm>
-            <a:off x="749808" y="566928"/>
-            <a:ext cx="10874959" cy="384048"/>
-          </a:xfrm>
-          <a:prstGeom prst="rect">
-            <a:avLst/>
-          </a:prstGeom>
-          <a:noFill/>
-          <a:ln/>
-        </p:spPr>
-        <p:txBody>
-          <a:bodyPr wrap="square" lIns="0" tIns="0" rIns="0" bIns="0" rtlCol="0" anchor="ctr"/>
-          <a:lstStyle/>
-          <a:p>
-            <a:pPr indent="0" marL="0">
-              <a:buNone/>
-            </a:pPr>
-            <a:r>
-              <a:rPr lang="en-US" sz="2200" b="1" dirty="0">
-                <a:solidFill>
-                  <a:srgbClr val="0F172A"/>
+          <p:cNvPr id="5" name="Text 3"/>
+          <p:cNvSpPr/>
+          <p:nvPr/>
+        </p:nvSpPr>
+        <p:spPr>
+          <a:xfrm>
+            <a:off x="1133856" y="640080"/>
+            <a:ext cx="10490911" cy="365760"/>
+          </a:xfrm>
+          <a:prstGeom prst="rect">
+            <a:avLst/>
+          </a:prstGeom>
+          <a:noFill/>
+          <a:ln/>
+        </p:spPr>
+        <p:txBody>
+          <a:bodyPr wrap="square" lIns="0" tIns="0" rIns="0" bIns="0" rtlCol="0" anchor="ctr"/>
+          <a:lstStyle/>
+          <a:p>
+            <a:pPr indent="0" marL="0">
+              <a:buNone/>
+            </a:pPr>
+            <a:r>
+              <a:rPr lang="en-US" sz="2300" b="1" dirty="0">
+                <a:solidFill>
+                  <a:srgbClr val="10161F"/>
                 </a:solidFill>
                 <a:latin typeface="Pretendard" pitchFamily="34" charset="0"/>
                 <a:ea typeface="Pretendard" pitchFamily="34" charset="-122"/>
@@ -3502,13 +3951,13 @@
               </a:rPr>
               <a:t>핵심요약</a:t>
             </a:r>
-            <a:endParaRPr lang="en-US" sz="2200" dirty="0"/>
-          </a:p>
-        </p:txBody>
-      </p:sp>
-      <p:sp>
-        <p:nvSpPr>
-          <p:cNvPr id="5" name="Text 3"/>
+            <a:endParaRPr lang="en-US" sz="2300" dirty="0"/>
+          </a:p>
+        </p:txBody>
+      </p:sp>
+      <p:sp>
+        <p:nvSpPr>
+          <p:cNvPr id="6" name="Text 4"/>
           <p:cNvSpPr/>
           <p:nvPr/>
         </p:nvSpPr>
@@ -3533,7 +3982,7 @@
             <a:r>
               <a:rPr lang="en-US" sz="1500" b="1" dirty="0">
                 <a:solidFill>
-                  <a:srgbClr val="0F172A"/>
+                  <a:srgbClr val="10161F"/>
                 </a:solidFill>
                 <a:latin typeface="Pretendard" pitchFamily="34" charset="0"/>
                 <a:ea typeface="Pretendard" pitchFamily="34" charset="-122"/>
@@ -3547,7 +3996,7 @@
       </p:sp>
       <p:sp>
         <p:nvSpPr>
-          <p:cNvPr id="6" name="Shape 4"/>
+          <p:cNvPr id="7" name="Shape 5"/>
           <p:cNvSpPr/>
           <p:nvPr/>
         </p:nvSpPr>
@@ -3562,7 +4011,7 @@
           <a:noFill/>
           <a:ln w="19050">
             <a:solidFill>
-              <a:srgbClr val="6B8E00"/>
+              <a:srgbClr val="B98A2E"/>
             </a:solidFill>
             <a:prstDash val="solid"/>
           </a:ln>
@@ -3570,7 +4019,7 @@
       </p:sp>
       <p:sp>
         <p:nvSpPr>
-          <p:cNvPr id="7" name="Shape 5"/>
+          <p:cNvPr id="8" name="Shape 6"/>
           <p:cNvSpPr/>
           <p:nvPr/>
         </p:nvSpPr>
@@ -3585,11 +4034,11 @@
             </a:avLst>
           </a:prstGeom>
           <a:solidFill>
-            <a:srgbClr val="F8FAFC"/>
+            <a:srgbClr val="F7FAFC"/>
           </a:solidFill>
           <a:ln w="6350">
             <a:solidFill>
-              <a:srgbClr val="CBD5E1"/>
+              <a:srgbClr val="CBD5E0"/>
             </a:solidFill>
             <a:prstDash val="solid"/>
           </a:ln>
@@ -3597,7 +4046,7 @@
       </p:sp>
       <p:sp>
         <p:nvSpPr>
-          <p:cNvPr id="8" name="Text 6"/>
+          <p:cNvPr id="9" name="Text 7"/>
           <p:cNvSpPr/>
           <p:nvPr/>
         </p:nvSpPr>
@@ -3622,7 +4071,7 @@
             <a:r>
               <a:rPr lang="en-US" sz="950" dirty="0">
                 <a:solidFill>
-                  <a:srgbClr val="64748B"/>
+                  <a:srgbClr val="718096"/>
                 </a:solidFill>
                 <a:latin typeface="Pretendard" pitchFamily="34" charset="0"/>
                 <a:ea typeface="Pretendard" pitchFamily="34" charset="-122"/>
@@ -3636,7 +4085,7 @@
       </p:sp>
       <p:sp>
         <p:nvSpPr>
-          <p:cNvPr id="9" name="Text 7"/>
+          <p:cNvPr id="10" name="Text 8"/>
           <p:cNvSpPr/>
           <p:nvPr/>
         </p:nvSpPr>
@@ -3663,7 +4112,7 @@
             <a:r>
               <a:rPr lang="en-US" sz="2000" b="1" dirty="0">
                 <a:solidFill>
-                  <a:srgbClr val="0F172A"/>
+                  <a:srgbClr val="10161F"/>
                 </a:solidFill>
                 <a:latin typeface="Pretendard" pitchFamily="34" charset="0"/>
                 <a:ea typeface="Pretendard" pitchFamily="34" charset="-122"/>
@@ -3677,7 +4126,7 @@
       </p:sp>
       <p:sp>
         <p:nvSpPr>
-          <p:cNvPr id="10" name="Shape 8"/>
+          <p:cNvPr id="11" name="Shape 9"/>
           <p:cNvSpPr/>
           <p:nvPr/>
         </p:nvSpPr>
@@ -3692,11 +4141,11 @@
             </a:avLst>
           </a:prstGeom>
           <a:solidFill>
-            <a:srgbClr val="F8FAFC"/>
+            <a:srgbClr val="F7FAFC"/>
           </a:solidFill>
           <a:ln w="6350">
             <a:solidFill>
-              <a:srgbClr val="CBD5E1"/>
+              <a:srgbClr val="CBD5E0"/>
             </a:solidFill>
             <a:prstDash val="solid"/>
           </a:ln>
@@ -3704,7 +4153,7 @@
       </p:sp>
       <p:sp>
         <p:nvSpPr>
-          <p:cNvPr id="11" name="Text 9"/>
+          <p:cNvPr id="12" name="Text 10"/>
           <p:cNvSpPr/>
           <p:nvPr/>
         </p:nvSpPr>
@@ -3729,7 +4178,7 @@
             <a:r>
               <a:rPr lang="en-US" sz="950" dirty="0">
                 <a:solidFill>
-                  <a:srgbClr val="64748B"/>
+                  <a:srgbClr val="718096"/>
                 </a:solidFill>
                 <a:latin typeface="Pretendard" pitchFamily="34" charset="0"/>
                 <a:ea typeface="Pretendard" pitchFamily="34" charset="-122"/>
@@ -3743,7 +4192,7 @@
       </p:sp>
       <p:sp>
         <p:nvSpPr>
-          <p:cNvPr id="12" name="Text 10"/>
+          <p:cNvPr id="13" name="Text 11"/>
           <p:cNvSpPr/>
           <p:nvPr/>
         </p:nvSpPr>
@@ -3770,7 +4219,7 @@
             <a:r>
               <a:rPr lang="en-US" sz="2000" b="1" dirty="0">
                 <a:solidFill>
-                  <a:srgbClr val="0F172A"/>
+                  <a:srgbClr val="10161F"/>
                 </a:solidFill>
                 <a:latin typeface="Pretendard" pitchFamily="34" charset="0"/>
                 <a:ea typeface="Pretendard" pitchFamily="34" charset="-122"/>
@@ -3784,7 +4233,7 @@
       </p:sp>
       <p:sp>
         <p:nvSpPr>
-          <p:cNvPr id="13" name="Shape 11"/>
+          <p:cNvPr id="14" name="Shape 12"/>
           <p:cNvSpPr/>
           <p:nvPr/>
         </p:nvSpPr>
@@ -3799,11 +4248,11 @@
             </a:avLst>
           </a:prstGeom>
           <a:solidFill>
-            <a:srgbClr val="F8FAFC"/>
+            <a:srgbClr val="F7FAFC"/>
           </a:solidFill>
           <a:ln w="6350">
             <a:solidFill>
-              <a:srgbClr val="CBD5E1"/>
+              <a:srgbClr val="CBD5E0"/>
             </a:solidFill>
             <a:prstDash val="solid"/>
           </a:ln>
@@ -3811,7 +4260,7 @@
       </p:sp>
       <p:sp>
         <p:nvSpPr>
-          <p:cNvPr id="14" name="Text 12"/>
+          <p:cNvPr id="15" name="Text 13"/>
           <p:cNvSpPr/>
           <p:nvPr/>
         </p:nvSpPr>
@@ -3836,7 +4285,7 @@
             <a:r>
               <a:rPr lang="en-US" sz="950" dirty="0">
                 <a:solidFill>
-                  <a:srgbClr val="64748B"/>
+                  <a:srgbClr val="718096"/>
                 </a:solidFill>
                 <a:latin typeface="Pretendard" pitchFamily="34" charset="0"/>
                 <a:ea typeface="Pretendard" pitchFamily="34" charset="-122"/>
@@ -3850,7 +4299,7 @@
       </p:sp>
       <p:sp>
         <p:nvSpPr>
-          <p:cNvPr id="15" name="Text 13"/>
+          <p:cNvPr id="16" name="Text 14"/>
           <p:cNvSpPr/>
           <p:nvPr/>
         </p:nvSpPr>
@@ -3877,7 +4326,7 @@
             <a:r>
               <a:rPr lang="en-US" sz="2000" b="1" dirty="0">
                 <a:solidFill>
-                  <a:srgbClr val="0F172A"/>
+                  <a:srgbClr val="10161F"/>
                 </a:solidFill>
                 <a:latin typeface="Pretendard" pitchFamily="34" charset="0"/>
                 <a:ea typeface="Pretendard" pitchFamily="34" charset="-122"/>
@@ -3891,7 +4340,7 @@
       </p:sp>
       <p:sp>
         <p:nvSpPr>
-          <p:cNvPr id="16" name="Shape 14"/>
+          <p:cNvPr id="17" name="Shape 15"/>
           <p:cNvSpPr/>
           <p:nvPr/>
         </p:nvSpPr>
@@ -3906,11 +4355,11 @@
             </a:avLst>
           </a:prstGeom>
           <a:solidFill>
-            <a:srgbClr val="F8FAFC"/>
+            <a:srgbClr val="F7FAFC"/>
           </a:solidFill>
           <a:ln w="6350">
             <a:solidFill>
-              <a:srgbClr val="CBD5E1"/>
+              <a:srgbClr val="CBD5E0"/>
             </a:solidFill>
             <a:prstDash val="solid"/>
           </a:ln>
@@ -3918,7 +4367,7 @@
       </p:sp>
       <p:sp>
         <p:nvSpPr>
-          <p:cNvPr id="17" name="Text 15"/>
+          <p:cNvPr id="18" name="Text 16"/>
           <p:cNvSpPr/>
           <p:nvPr/>
         </p:nvSpPr>
@@ -3943,7 +4392,7 @@
             <a:r>
               <a:rPr lang="en-US" sz="950" dirty="0">
                 <a:solidFill>
-                  <a:srgbClr val="64748B"/>
+                  <a:srgbClr val="718096"/>
                 </a:solidFill>
                 <a:latin typeface="Pretendard" pitchFamily="34" charset="0"/>
                 <a:ea typeface="Pretendard" pitchFamily="34" charset="-122"/>
@@ -3957,7 +4406,7 @@
       </p:sp>
       <p:sp>
         <p:nvSpPr>
-          <p:cNvPr id="18" name="Text 16"/>
+          <p:cNvPr id="19" name="Text 17"/>
           <p:cNvSpPr/>
           <p:nvPr/>
         </p:nvSpPr>
@@ -3984,7 +4433,7 @@
             <a:r>
               <a:rPr lang="en-US" sz="2000" b="1" dirty="0">
                 <a:solidFill>
-                  <a:srgbClr val="0F172A"/>
+                  <a:srgbClr val="10161F"/>
                 </a:solidFill>
                 <a:latin typeface="Pretendard" pitchFamily="34" charset="0"/>
                 <a:ea typeface="Pretendard" pitchFamily="34" charset="-122"/>
@@ -3998,65 +4447,516 @@
       </p:sp>
       <p:sp>
         <p:nvSpPr>
-          <p:cNvPr id="19" name="Text 17"/>
-          <p:cNvSpPr/>
-          <p:nvPr/>
-        </p:nvSpPr>
-        <p:spPr>
-          <a:xfrm>
-            <a:off x="566928" y="6419088"/>
-            <a:ext cx="11057839" cy="201168"/>
-          </a:xfrm>
-          <a:prstGeom prst="rect">
-            <a:avLst/>
-          </a:prstGeom>
-          <a:noFill/>
-          <a:ln/>
-        </p:spPr>
-        <p:txBody>
-          <a:bodyPr wrap="square" lIns="0" tIns="0" rIns="0" bIns="0" rtlCol="0" anchor="ctr"/>
-          <a:lstStyle/>
-          <a:p>
-            <a:pPr algn="ctr" indent="0" marL="0">
-              <a:buNone/>
-            </a:pPr>
-            <a:r>
-              <a:rPr lang="en-US" sz="750" dirty="0">
-                <a:solidFill>
-                  <a:srgbClr val="64748B"/>
+          <p:cNvPr id="20" name="Text 18"/>
+          <p:cNvSpPr/>
+          <p:nvPr/>
+        </p:nvSpPr>
+        <p:spPr>
+          <a:xfrm>
+            <a:off x="566928" y="3502152"/>
+            <a:ext cx="11057839" cy="274320"/>
+          </a:xfrm>
+          <a:prstGeom prst="rect">
+            <a:avLst/>
+          </a:prstGeom>
+          <a:noFill/>
+          <a:ln/>
+        </p:spPr>
+        <p:txBody>
+          <a:bodyPr wrap="square" lIns="0" tIns="0" rIns="0" bIns="0" rtlCol="0" anchor="ctr"/>
+          <a:lstStyle/>
+          <a:p>
+            <a:pPr indent="0" marL="0">
+              <a:buNone/>
+            </a:pPr>
+            <a:r>
+              <a:rPr lang="en-US" sz="1250" b="1" dirty="0">
+                <a:solidFill>
+                  <a:srgbClr val="977024"/>
                 </a:solidFill>
                 <a:latin typeface="Pretendard" pitchFamily="34" charset="0"/>
                 <a:ea typeface="Pretendard" pitchFamily="34" charset="-122"/>
                 <a:cs typeface="Pretendard" pitchFamily="34" charset="-120"/>
               </a:rPr>
-              <a:t>크리딜  ·    ·  2</a:t>
-            </a:r>
-            <a:endParaRPr lang="en-US" sz="750" dirty="0"/>
-          </a:p>
-        </p:txBody>
-      </p:sp>
-      <p:sp>
-        <p:nvSpPr>
-          <p:cNvPr id="20" name="Shape 18"/>
-          <p:cNvSpPr/>
-          <p:nvPr/>
-        </p:nvSpPr>
-        <p:spPr>
-          <a:xfrm>
-            <a:off x="4437172" y="6382512"/>
-            <a:ext cx="3317352" cy="0"/>
-          </a:xfrm>
-          <a:prstGeom prst="line">
-            <a:avLst/>
-          </a:prstGeom>
-          <a:noFill/>
-          <a:ln w="6350">
+              <a:t>3대 핵심 투자 포인트 (Investment Highlights)</a:t>
+            </a:r>
+            <a:endParaRPr lang="en-US" sz="1250" dirty="0"/>
+          </a:p>
+        </p:txBody>
+      </p:sp>
+      <p:sp>
+        <p:nvSpPr>
+          <p:cNvPr id="21" name="Shape 19"/>
+          <p:cNvSpPr/>
+          <p:nvPr/>
+        </p:nvSpPr>
+        <p:spPr>
+          <a:xfrm>
+            <a:off x="566928" y="3831336"/>
+            <a:ext cx="11057839" cy="585216"/>
+          </a:xfrm>
+          <a:prstGeom prst="roundRect">
+            <a:avLst>
+              <a:gd name="adj" fmla="val 7813"/>
+            </a:avLst>
+          </a:prstGeom>
+          <a:solidFill>
+            <a:srgbClr val="F8F9FA"/>
+          </a:solidFill>
+          <a:ln w="7620">
             <a:solidFill>
-              <a:srgbClr val="6B8E00"/>
+              <a:srgbClr val="E2E8F0"/>
             </a:solidFill>
             <a:prstDash val="solid"/>
           </a:ln>
         </p:spPr>
+      </p:sp>
+      <p:sp>
+        <p:nvSpPr>
+          <p:cNvPr id="22" name="Shape 20"/>
+          <p:cNvSpPr/>
+          <p:nvPr/>
+        </p:nvSpPr>
+        <p:spPr>
+          <a:xfrm>
+            <a:off x="676656" y="3941064"/>
+            <a:ext cx="411480" cy="365760"/>
+          </a:xfrm>
+          <a:prstGeom prst="roundRect">
+            <a:avLst>
+              <a:gd name="adj" fmla="val 10000"/>
+            </a:avLst>
+          </a:prstGeom>
+          <a:solidFill>
+            <a:srgbClr val="F3EBDA"/>
+          </a:solidFill>
+          <a:ln w="6350">
+            <a:solidFill>
+              <a:srgbClr val="D9B668"/>
+            </a:solidFill>
+            <a:prstDash val="solid"/>
+          </a:ln>
+        </p:spPr>
+      </p:sp>
+      <p:sp>
+        <p:nvSpPr>
+          <p:cNvPr id="23" name="Text 21"/>
+          <p:cNvSpPr/>
+          <p:nvPr/>
+        </p:nvSpPr>
+        <p:spPr>
+          <a:xfrm>
+            <a:off x="676656" y="3941064"/>
+            <a:ext cx="411480" cy="365760"/>
+          </a:xfrm>
+          <a:prstGeom prst="rect">
+            <a:avLst/>
+          </a:prstGeom>
+          <a:noFill/>
+          <a:ln/>
+        </p:spPr>
+        <p:txBody>
+          <a:bodyPr wrap="square" lIns="0" tIns="0" rIns="0" bIns="0" rtlCol="0" anchor="ctr"/>
+          <a:lstStyle/>
+          <a:p>
+            <a:pPr algn="ctr" indent="0" marL="0">
+              <a:buNone/>
+            </a:pPr>
+            <a:r>
+              <a:rPr lang="en-US" sz="1000" b="1" dirty="0">
+                <a:solidFill>
+                  <a:srgbClr val="977024"/>
+                </a:solidFill>
+                <a:latin typeface="Arial" pitchFamily="34" charset="0"/>
+                <a:ea typeface="Arial" pitchFamily="34" charset="-122"/>
+                <a:cs typeface="Arial" pitchFamily="34" charset="-120"/>
+              </a:rPr>
+              <a:t>01</a:t>
+            </a:r>
+            <a:endParaRPr lang="en-US" sz="1000" dirty="0"/>
+          </a:p>
+        </p:txBody>
+      </p:sp>
+      <p:sp>
+        <p:nvSpPr>
+          <p:cNvPr id="24" name="Text 22"/>
+          <p:cNvSpPr/>
+          <p:nvPr/>
+        </p:nvSpPr>
+        <p:spPr>
+          <a:xfrm>
+            <a:off x="1207008" y="3904488"/>
+            <a:ext cx="10280599" cy="438912"/>
+          </a:xfrm>
+          <a:prstGeom prst="rect">
+            <a:avLst/>
+          </a:prstGeom>
+          <a:noFill/>
+          <a:ln/>
+        </p:spPr>
+        <p:txBody>
+          <a:bodyPr wrap="square" lIns="0" tIns="0" rIns="0" bIns="0" rtlCol="0" anchor="ctr"/>
+          <a:lstStyle/>
+          <a:p>
+            <a:pPr indent="0" marL="0">
+              <a:buNone/>
+            </a:pPr>
+            <a:r>
+              <a:rPr lang="en-US" sz="1150" dirty="0">
+                <a:solidFill>
+                  <a:srgbClr val="10161F"/>
+                </a:solidFill>
+                <a:latin typeface="Pretendard" pitchFamily="34" charset="0"/>
+                <a:ea typeface="Pretendard" pitchFamily="34" charset="-122"/>
+                <a:cs typeface="Pretendard" pitchFamily="34" charset="-120"/>
+              </a:rPr>
+              <a:t>원금 안전판: 한남권역 핵심 입지 및 우량 대지 지분 가치로 하방 경직성 확보</a:t>
+            </a:r>
+            <a:endParaRPr lang="en-US" sz="1150" dirty="0"/>
+          </a:p>
+        </p:txBody>
+      </p:sp>
+      <p:sp>
+        <p:nvSpPr>
+          <p:cNvPr id="25" name="Shape 23"/>
+          <p:cNvSpPr/>
+          <p:nvPr/>
+        </p:nvSpPr>
+        <p:spPr>
+          <a:xfrm>
+            <a:off x="566928" y="4526280"/>
+            <a:ext cx="11057839" cy="585216"/>
+          </a:xfrm>
+          <a:prstGeom prst="roundRect">
+            <a:avLst>
+              <a:gd name="adj" fmla="val 7813"/>
+            </a:avLst>
+          </a:prstGeom>
+          <a:solidFill>
+            <a:srgbClr val="F8F9FA"/>
+          </a:solidFill>
+          <a:ln w="7620">
+            <a:solidFill>
+              <a:srgbClr val="E2E8F0"/>
+            </a:solidFill>
+            <a:prstDash val="solid"/>
+          </a:ln>
+        </p:spPr>
+      </p:sp>
+      <p:sp>
+        <p:nvSpPr>
+          <p:cNvPr id="26" name="Shape 24"/>
+          <p:cNvSpPr/>
+          <p:nvPr/>
+        </p:nvSpPr>
+        <p:spPr>
+          <a:xfrm>
+            <a:off x="676656" y="4636008"/>
+            <a:ext cx="411480" cy="365760"/>
+          </a:xfrm>
+          <a:prstGeom prst="roundRect">
+            <a:avLst>
+              <a:gd name="adj" fmla="val 10000"/>
+            </a:avLst>
+          </a:prstGeom>
+          <a:solidFill>
+            <a:srgbClr val="F3EBDA"/>
+          </a:solidFill>
+          <a:ln w="6350">
+            <a:solidFill>
+              <a:srgbClr val="D9B668"/>
+            </a:solidFill>
+            <a:prstDash val="solid"/>
+          </a:ln>
+        </p:spPr>
+      </p:sp>
+      <p:sp>
+        <p:nvSpPr>
+          <p:cNvPr id="27" name="Text 25"/>
+          <p:cNvSpPr/>
+          <p:nvPr/>
+        </p:nvSpPr>
+        <p:spPr>
+          <a:xfrm>
+            <a:off x="676656" y="4636008"/>
+            <a:ext cx="411480" cy="365760"/>
+          </a:xfrm>
+          <a:prstGeom prst="rect">
+            <a:avLst/>
+          </a:prstGeom>
+          <a:noFill/>
+          <a:ln/>
+        </p:spPr>
+        <p:txBody>
+          <a:bodyPr wrap="square" lIns="0" tIns="0" rIns="0" bIns="0" rtlCol="0" anchor="ctr"/>
+          <a:lstStyle/>
+          <a:p>
+            <a:pPr algn="ctr" indent="0" marL="0">
+              <a:buNone/>
+            </a:pPr>
+            <a:r>
+              <a:rPr lang="en-US" sz="1000" b="1" dirty="0">
+                <a:solidFill>
+                  <a:srgbClr val="977024"/>
+                </a:solidFill>
+                <a:latin typeface="Arial" pitchFamily="34" charset="0"/>
+                <a:ea typeface="Arial" pitchFamily="34" charset="-122"/>
+                <a:cs typeface="Arial" pitchFamily="34" charset="-120"/>
+              </a:rPr>
+              <a:t>02</a:t>
+            </a:r>
+            <a:endParaRPr lang="en-US" sz="1000" dirty="0"/>
+          </a:p>
+        </p:txBody>
+      </p:sp>
+      <p:sp>
+        <p:nvSpPr>
+          <p:cNvPr id="28" name="Text 26"/>
+          <p:cNvSpPr/>
+          <p:nvPr/>
+        </p:nvSpPr>
+        <p:spPr>
+          <a:xfrm>
+            <a:off x="1207008" y="4599432"/>
+            <a:ext cx="10280599" cy="438912"/>
+          </a:xfrm>
+          <a:prstGeom prst="rect">
+            <a:avLst/>
+          </a:prstGeom>
+          <a:noFill/>
+          <a:ln/>
+        </p:spPr>
+        <p:txBody>
+          <a:bodyPr wrap="square" lIns="0" tIns="0" rIns="0" bIns="0" rtlCol="0" anchor="ctr"/>
+          <a:lstStyle/>
+          <a:p>
+            <a:pPr indent="0" marL="0">
+              <a:buNone/>
+            </a:pPr>
+            <a:r>
+              <a:rPr lang="en-US" sz="1150" dirty="0">
+                <a:solidFill>
+                  <a:srgbClr val="10161F"/>
+                </a:solidFill>
+                <a:latin typeface="Pretendard" pitchFamily="34" charset="0"/>
+                <a:ea typeface="Pretendard" pitchFamily="34" charset="-122"/>
+                <a:cs typeface="Pretendard" pitchFamily="34" charset="-120"/>
+              </a:rPr>
+              <a:t>수익 안정성: 매각 희망가 180억 대비 안정적인 월 임대수익 창출 구조</a:t>
+            </a:r>
+            <a:endParaRPr lang="en-US" sz="1150" dirty="0"/>
+          </a:p>
+        </p:txBody>
+      </p:sp>
+      <p:sp>
+        <p:nvSpPr>
+          <p:cNvPr id="29" name="Shape 27"/>
+          <p:cNvSpPr/>
+          <p:nvPr/>
+        </p:nvSpPr>
+        <p:spPr>
+          <a:xfrm>
+            <a:off x="566928" y="5221224"/>
+            <a:ext cx="11057839" cy="585216"/>
+          </a:xfrm>
+          <a:prstGeom prst="roundRect">
+            <a:avLst>
+              <a:gd name="adj" fmla="val 7813"/>
+            </a:avLst>
+          </a:prstGeom>
+          <a:solidFill>
+            <a:srgbClr val="F8F9FA"/>
+          </a:solidFill>
+          <a:ln w="7620">
+            <a:solidFill>
+              <a:srgbClr val="E2E8F0"/>
+            </a:solidFill>
+            <a:prstDash val="solid"/>
+          </a:ln>
+        </p:spPr>
+      </p:sp>
+      <p:sp>
+        <p:nvSpPr>
+          <p:cNvPr id="30" name="Shape 28"/>
+          <p:cNvSpPr/>
+          <p:nvPr/>
+        </p:nvSpPr>
+        <p:spPr>
+          <a:xfrm>
+            <a:off x="676656" y="5330952"/>
+            <a:ext cx="411480" cy="365760"/>
+          </a:xfrm>
+          <a:prstGeom prst="roundRect">
+            <a:avLst>
+              <a:gd name="adj" fmla="val 10000"/>
+            </a:avLst>
+          </a:prstGeom>
+          <a:solidFill>
+            <a:srgbClr val="F3EBDA"/>
+          </a:solidFill>
+          <a:ln w="6350">
+            <a:solidFill>
+              <a:srgbClr val="D9B668"/>
+            </a:solidFill>
+            <a:prstDash val="solid"/>
+          </a:ln>
+        </p:spPr>
+      </p:sp>
+      <p:sp>
+        <p:nvSpPr>
+          <p:cNvPr id="31" name="Text 29"/>
+          <p:cNvSpPr/>
+          <p:nvPr/>
+        </p:nvSpPr>
+        <p:spPr>
+          <a:xfrm>
+            <a:off x="676656" y="5330952"/>
+            <a:ext cx="411480" cy="365760"/>
+          </a:xfrm>
+          <a:prstGeom prst="rect">
+            <a:avLst/>
+          </a:prstGeom>
+          <a:noFill/>
+          <a:ln/>
+        </p:spPr>
+        <p:txBody>
+          <a:bodyPr wrap="square" lIns="0" tIns="0" rIns="0" bIns="0" rtlCol="0" anchor="ctr"/>
+          <a:lstStyle/>
+          <a:p>
+            <a:pPr algn="ctr" indent="0" marL="0">
+              <a:buNone/>
+            </a:pPr>
+            <a:r>
+              <a:rPr lang="en-US" sz="1000" b="1" dirty="0">
+                <a:solidFill>
+                  <a:srgbClr val="977024"/>
+                </a:solidFill>
+                <a:latin typeface="Arial" pitchFamily="34" charset="0"/>
+                <a:ea typeface="Arial" pitchFamily="34" charset="-122"/>
+                <a:cs typeface="Arial" pitchFamily="34" charset="-120"/>
+              </a:rPr>
+              <a:t>03</a:t>
+            </a:r>
+            <a:endParaRPr lang="en-US" sz="1000" dirty="0"/>
+          </a:p>
+        </p:txBody>
+      </p:sp>
+      <p:sp>
+        <p:nvSpPr>
+          <p:cNvPr id="32" name="Text 30"/>
+          <p:cNvSpPr/>
+          <p:nvPr/>
+        </p:nvSpPr>
+        <p:spPr>
+          <a:xfrm>
+            <a:off x="1207008" y="5294376"/>
+            <a:ext cx="10280599" cy="438912"/>
+          </a:xfrm>
+          <a:prstGeom prst="rect">
+            <a:avLst/>
+          </a:prstGeom>
+          <a:noFill/>
+          <a:ln/>
+        </p:spPr>
+        <p:txBody>
+          <a:bodyPr wrap="square" lIns="0" tIns="0" rIns="0" bIns="0" rtlCol="0" anchor="ctr"/>
+          <a:lstStyle/>
+          <a:p>
+            <a:pPr indent="0" marL="0">
+              <a:buNone/>
+            </a:pPr>
+            <a:r>
+              <a:rPr lang="en-US" sz="1150" dirty="0">
+                <a:solidFill>
+                  <a:srgbClr val="10161F"/>
+                </a:solidFill>
+                <a:latin typeface="Pretendard" pitchFamily="34" charset="0"/>
+                <a:ea typeface="Pretendard" pitchFamily="34" charset="-122"/>
+                <a:cs typeface="Pretendard" pitchFamily="34" charset="-120"/>
+              </a:rPr>
+              <a:t>미래 가치: 향후 권역 지가 상승 및 공법상 잔여 용적률 활용 밸류업 기회</a:t>
+            </a:r>
+            <a:endParaRPr lang="en-US" sz="1150" dirty="0"/>
+          </a:p>
+        </p:txBody>
+      </p:sp>
+      <p:sp>
+        <p:nvSpPr>
+          <p:cNvPr id="33" name="Text 31"/>
+          <p:cNvSpPr/>
+          <p:nvPr/>
+        </p:nvSpPr>
+        <p:spPr>
+          <a:xfrm>
+            <a:off x="566928" y="6382512"/>
+            <a:ext cx="7315200" cy="219456"/>
+          </a:xfrm>
+          <a:prstGeom prst="rect">
+            <a:avLst/>
+          </a:prstGeom>
+          <a:noFill/>
+          <a:ln/>
+        </p:spPr>
+        <p:txBody>
+          <a:bodyPr wrap="square" lIns="0" tIns="0" rIns="0" bIns="0" rtlCol="0" anchor="ctr"/>
+          <a:lstStyle/>
+          <a:p>
+            <a:pPr indent="0" marL="0">
+              <a:buNone/>
+            </a:pPr>
+            <a:r>
+              <a:rPr lang="en-US" sz="800" dirty="0">
+                <a:solidFill>
+                  <a:srgbClr val="718096"/>
+                </a:solidFill>
+                <a:latin typeface="Pretendard" pitchFamily="34" charset="0"/>
+                <a:ea typeface="Pretendard" pitchFamily="34" charset="-122"/>
+                <a:cs typeface="Pretendard" pitchFamily="34" charset="-120"/>
+              </a:rPr>
+              <a:t>크리딜   |   </a:t>
+            </a:r>
+            <a:endParaRPr lang="en-US" sz="800" dirty="0"/>
+          </a:p>
+        </p:txBody>
+      </p:sp>
+      <p:sp>
+        <p:nvSpPr>
+          <p:cNvPr id="34" name="Text 32"/>
+          <p:cNvSpPr/>
+          <p:nvPr/>
+        </p:nvSpPr>
+        <p:spPr>
+          <a:xfrm>
+            <a:off x="10710367" y="6382512"/>
+            <a:ext cx="914400" cy="219456"/>
+          </a:xfrm>
+          <a:prstGeom prst="rect">
+            <a:avLst/>
+          </a:prstGeom>
+          <a:noFill/>
+          <a:ln/>
+        </p:spPr>
+        <p:txBody>
+          <a:bodyPr wrap="square" lIns="0" tIns="0" rIns="0" bIns="0" rtlCol="0" anchor="ctr"/>
+          <a:lstStyle/>
+          <a:p>
+            <a:pPr algn="r" indent="0" marL="0">
+              <a:buNone/>
+            </a:pPr>
+            <a:r>
+              <a:rPr lang="en-US" sz="900" b="1" dirty="0">
+                <a:solidFill>
+                  <a:srgbClr val="B98A2E"/>
+                </a:solidFill>
+                <a:latin typeface="Arial" pitchFamily="34" charset="0"/>
+                <a:ea typeface="Arial" pitchFamily="34" charset="-122"/>
+                <a:cs typeface="Arial" pitchFamily="34" charset="-120"/>
+              </a:rPr>
+              <a:t>2</a:t>
+            </a:r>
+            <a:endParaRPr lang="en-US" sz="900" dirty="0"/>
+          </a:p>
+        </p:txBody>
       </p:sp>
     </p:spTree>
   </p:cSld>
@@ -4098,14 +4998,14 @@
         </p:nvSpPr>
         <p:spPr>
           <a:xfrm>
-            <a:off x="566928" y="384048"/>
-            <a:ext cx="45720" cy="566928"/>
-          </a:xfrm>
-          <a:prstGeom prst="rect">
+            <a:off x="566928" y="457200"/>
+            <a:ext cx="384048" cy="384048"/>
+          </a:xfrm>
+          <a:prstGeom prst="ellipse">
             <a:avLst/>
           </a:prstGeom>
           <a:solidFill>
-            <a:srgbClr val="6B8E00"/>
+            <a:srgbClr val="B98A2E"/>
           </a:solidFill>
           <a:ln/>
         </p:spPr>
@@ -4118,32 +5018,71 @@
         </p:nvSpPr>
         <p:spPr>
           <a:xfrm>
-            <a:off x="749808" y="384048"/>
-            <a:ext cx="10874959" cy="182880"/>
-          </a:xfrm>
-          <a:prstGeom prst="rect">
-            <a:avLst/>
-          </a:prstGeom>
-          <a:noFill/>
-          <a:ln/>
-        </p:spPr>
-        <p:txBody>
-          <a:bodyPr wrap="square" lIns="0" tIns="0" rIns="0" bIns="0" rtlCol="0" anchor="ctr"/>
-          <a:lstStyle/>
-          <a:p>
-            <a:pPr indent="0" marL="0">
-              <a:buNone/>
-            </a:pPr>
-            <a:r>
-              <a:rPr lang="en-US" sz="950" b="1" spc="200" kern="0" dirty="0">
-                <a:solidFill>
-                  <a:srgbClr val="6B8E00"/>
+            <a:off x="566928" y="457200"/>
+            <a:ext cx="384048" cy="384048"/>
+          </a:xfrm>
+          <a:prstGeom prst="rect">
+            <a:avLst/>
+          </a:prstGeom>
+          <a:noFill/>
+          <a:ln/>
+        </p:spPr>
+        <p:txBody>
+          <a:bodyPr wrap="square" lIns="0" tIns="0" rIns="0" bIns="0" rtlCol="0" anchor="ctr"/>
+          <a:lstStyle/>
+          <a:p>
+            <a:pPr algn="ctr" indent="0" marL="0">
+              <a:buNone/>
+            </a:pPr>
+            <a:r>
+              <a:rPr lang="en-US" sz="1300" b="1" dirty="0">
+                <a:solidFill>
+                  <a:srgbClr val="FFFFFF"/>
                 </a:solidFill>
                 <a:latin typeface="Arial" pitchFamily="34" charset="0"/>
                 <a:ea typeface="Arial" pitchFamily="34" charset="-122"/>
                 <a:cs typeface="Arial" pitchFamily="34" charset="-120"/>
               </a:rPr>
-              <a:t>03  Location</a:t>
+              <a:t>03</a:t>
+            </a:r>
+            <a:endParaRPr lang="en-US" sz="1300" dirty="0"/>
+          </a:p>
+        </p:txBody>
+      </p:sp>
+      <p:sp>
+        <p:nvSpPr>
+          <p:cNvPr id="4" name="Text 2"/>
+          <p:cNvSpPr/>
+          <p:nvPr/>
+        </p:nvSpPr>
+        <p:spPr>
+          <a:xfrm>
+            <a:off x="1133856" y="457200"/>
+            <a:ext cx="10490911" cy="182880"/>
+          </a:xfrm>
+          <a:prstGeom prst="rect">
+            <a:avLst/>
+          </a:prstGeom>
+          <a:noFill/>
+          <a:ln/>
+        </p:spPr>
+        <p:txBody>
+          <a:bodyPr wrap="square" lIns="0" tIns="0" rIns="0" bIns="0" rtlCol="0" anchor="ctr"/>
+          <a:lstStyle/>
+          <a:p>
+            <a:pPr indent="0" marL="0">
+              <a:buNone/>
+            </a:pPr>
+            <a:r>
+              <a:rPr lang="en-US" sz="950" b="1" spc="200" kern="0" dirty="0">
+                <a:solidFill>
+                  <a:srgbClr val="B98A2E"/>
+                </a:solidFill>
+                <a:latin typeface="Arial" pitchFamily="34" charset="0"/>
+                <a:ea typeface="Arial" pitchFamily="34" charset="-122"/>
+                <a:cs typeface="Arial" pitchFamily="34" charset="-120"/>
+              </a:rPr>
+              <a:t>Location</a:t>
             </a:r>
             <a:endParaRPr lang="en-US" sz="950" dirty="0"/>
           </a:p>
@@ -4151,32 +5090,32 @@
       </p:sp>
       <p:sp>
         <p:nvSpPr>
-          <p:cNvPr id="4" name="Text 2"/>
-          <p:cNvSpPr/>
-          <p:nvPr/>
-        </p:nvSpPr>
-        <p:spPr>
-          <a:xfrm>
-            <a:off x="749808" y="566928"/>
-            <a:ext cx="10874959" cy="384048"/>
-          </a:xfrm>
-          <a:prstGeom prst="rect">
-            <a:avLst/>
-          </a:prstGeom>
-          <a:noFill/>
-          <a:ln/>
-        </p:spPr>
-        <p:txBody>
-          <a:bodyPr wrap="square" lIns="0" tIns="0" rIns="0" bIns="0" rtlCol="0" anchor="ctr"/>
-          <a:lstStyle/>
-          <a:p>
-            <a:pPr indent="0" marL="0">
-              <a:buNone/>
-            </a:pPr>
-            <a:r>
-              <a:rPr lang="en-US" sz="2200" b="1" dirty="0">
-                <a:solidFill>
-                  <a:srgbClr val="0F172A"/>
+          <p:cNvPr id="5" name="Text 3"/>
+          <p:cNvSpPr/>
+          <p:nvPr/>
+        </p:nvSpPr>
+        <p:spPr>
+          <a:xfrm>
+            <a:off x="1133856" y="640080"/>
+            <a:ext cx="10490911" cy="365760"/>
+          </a:xfrm>
+          <a:prstGeom prst="rect">
+            <a:avLst/>
+          </a:prstGeom>
+          <a:noFill/>
+          <a:ln/>
+        </p:spPr>
+        <p:txBody>
+          <a:bodyPr wrap="square" lIns="0" tIns="0" rIns="0" bIns="0" rtlCol="0" anchor="ctr"/>
+          <a:lstStyle/>
+          <a:p>
+            <a:pPr indent="0" marL="0">
+              <a:buNone/>
+            </a:pPr>
+            <a:r>
+              <a:rPr lang="en-US" sz="2300" b="1" dirty="0">
+                <a:solidFill>
+                  <a:srgbClr val="10161F"/>
                 </a:solidFill>
                 <a:latin typeface="Pretendard" pitchFamily="34" charset="0"/>
                 <a:ea typeface="Pretendard" pitchFamily="34" charset="-122"/>
@@ -4184,13 +5123,13 @@
               </a:rPr>
               <a:t>이 입지, 투자할 만한 곳인가</a:t>
             </a:r>
-            <a:endParaRPr lang="en-US" sz="2200" dirty="0"/>
+            <a:endParaRPr lang="en-US" sz="2300" dirty="0"/>
           </a:p>
         </p:txBody>
       </p:sp>
       <p:pic>
         <p:nvPicPr>
-          <p:cNvPr id="5" name="Image 0" descr="preencoded.png">    </p:cNvPr>
+          <p:cNvPr id="6" name="Image 0" descr="preencoded.png">    </p:cNvPr>
           <p:cNvPicPr>
             <a:picLocks noChangeAspect="1"/>
           </p:cNvPicPr>
@@ -4214,14 +5153,14 @@
       </p:pic>
       <p:sp>
         <p:nvSpPr>
-          <p:cNvPr id="6" name="Text 3"/>
+          <p:cNvPr id="7" name="Text 4"/>
           <p:cNvSpPr/>
           <p:nvPr/>
         </p:nvSpPr>
         <p:spPr>
           <a:xfrm>
             <a:off x="6053328" y="1481328"/>
-            <a:ext cx="2117147" cy="438912"/>
+            <a:ext cx="2117147" cy="493776"/>
           </a:xfrm>
           <a:prstGeom prst="rect">
             <a:avLst/>
@@ -4240,9 +5179,9 @@
               <a:buNone/>
             </a:pPr>
             <a:r>
-              <a:rPr lang="en-US" sz="1400" dirty="0">
-                <a:solidFill>
-                  <a:srgbClr val="64748B"/>
+              <a:rPr lang="en-US" sz="1300" dirty="0">
+                <a:solidFill>
+                  <a:srgbClr val="718096"/>
                 </a:solidFill>
                 <a:latin typeface="Pretendard" pitchFamily="34" charset="0"/>
                 <a:ea typeface="Pretendard" pitchFamily="34" charset="-122"/>
@@ -4250,20 +5189,20 @@
               </a:rPr>
               <a:t>교통 접근성</a:t>
             </a:r>
-            <a:endParaRPr lang="en-US" sz="1400" dirty="0"/>
-          </a:p>
-        </p:txBody>
-      </p:sp>
-      <p:sp>
-        <p:nvSpPr>
-          <p:cNvPr id="7" name="Text 4"/>
+            <a:endParaRPr lang="en-US" sz="1300" dirty="0"/>
+          </a:p>
+        </p:txBody>
+      </p:sp>
+      <p:sp>
+        <p:nvSpPr>
+          <p:cNvPr id="8" name="Text 5"/>
           <p:cNvSpPr/>
           <p:nvPr/>
         </p:nvSpPr>
         <p:spPr>
           <a:xfrm>
             <a:off x="8170475" y="1481328"/>
-            <a:ext cx="3454292" cy="438912"/>
+            <a:ext cx="3454292" cy="493776"/>
           </a:xfrm>
           <a:prstGeom prst="rect">
             <a:avLst/>
@@ -4282,85 +5221,101 @@
               <a:buNone/>
             </a:pPr>
             <a:r>
-              <a:rPr lang="en-US" sz="1400" b="1" dirty="0">
-                <a:solidFill>
-                  <a:srgbClr val="0F172A"/>
+              <a:rPr lang="en-US" sz="1300" b="1" dirty="0">
+                <a:solidFill>
+                  <a:srgbClr val="10161F"/>
                 </a:solidFill>
                 <a:latin typeface="Pretendard" pitchFamily="34" charset="0"/>
                 <a:ea typeface="Pretendard" pitchFamily="34" charset="-122"/>
                 <a:cs typeface="Pretendard" pitchFamily="34" charset="-120"/>
               </a:rPr>
-              <a:t>{"ok":true,"mocked":true,"extractedFields":{"area_signal":"역…</a:t>
-            </a:r>
-            <a:endParaRPr lang="en-US" sz="1400" dirty="0"/>
-          </a:p>
-        </p:txBody>
-      </p:sp>
-      <p:sp>
-        <p:nvSpPr>
-          <p:cNvPr id="8" name="Text 5"/>
-          <p:cNvSpPr/>
-          <p:nvPr/>
-        </p:nvSpPr>
-        <p:spPr>
-          <a:xfrm>
-            <a:off x="566928" y="6419088"/>
-            <a:ext cx="11057839" cy="201168"/>
-          </a:xfrm>
-          <a:prstGeom prst="rect">
-            <a:avLst/>
-          </a:prstGeom>
-          <a:noFill/>
-          <a:ln/>
-        </p:spPr>
-        <p:txBody>
-          <a:bodyPr wrap="square" lIns="0" tIns="0" rIns="0" bIns="0" rtlCol="0" anchor="ctr"/>
-          <a:lstStyle/>
-          <a:p>
-            <a:pPr algn="ctr" indent="0" marL="0">
-              <a:buNone/>
-            </a:pPr>
-            <a:r>
-              <a:rPr lang="en-US" sz="750" dirty="0">
-                <a:solidFill>
-                  <a:srgbClr val="64748B"/>
+              <a:t>{"ok":true,"mocked":true,"extractedFields":{"area_signal":"역삼","asset_type":"오피스빌딩","price_band":"300억","size_signal":"3000평(약 9917.</a:t>
+            </a:r>
+            <a:endParaRPr lang="en-US" sz="1300" dirty="0"/>
+          </a:p>
+        </p:txBody>
+      </p:sp>
+      <p:sp>
+        <p:nvSpPr>
+          <p:cNvPr id="9" name="Text 6"/>
+          <p:cNvSpPr/>
+          <p:nvPr/>
+        </p:nvSpPr>
+        <p:spPr>
+          <a:xfrm>
+            <a:off x="566928" y="6382512"/>
+            <a:ext cx="7315200" cy="219456"/>
+          </a:xfrm>
+          <a:prstGeom prst="rect">
+            <a:avLst/>
+          </a:prstGeom>
+          <a:noFill/>
+          <a:ln/>
+        </p:spPr>
+        <p:txBody>
+          <a:bodyPr wrap="square" lIns="0" tIns="0" rIns="0" bIns="0" rtlCol="0" anchor="ctr"/>
+          <a:lstStyle/>
+          <a:p>
+            <a:pPr indent="0" marL="0">
+              <a:buNone/>
+            </a:pPr>
+            <a:r>
+              <a:rPr lang="en-US" sz="800" dirty="0">
+                <a:solidFill>
+                  <a:srgbClr val="718096"/>
                 </a:solidFill>
                 <a:latin typeface="Pretendard" pitchFamily="34" charset="0"/>
                 <a:ea typeface="Pretendard" pitchFamily="34" charset="-122"/>
                 <a:cs typeface="Pretendard" pitchFamily="34" charset="-120"/>
               </a:rPr>
-              <a:t>크리딜  ·    ·  3</a:t>
-            </a:r>
-            <a:endParaRPr lang="en-US" sz="750" dirty="0"/>
-          </a:p>
-        </p:txBody>
-      </p:sp>
-      <p:sp>
-        <p:nvSpPr>
-          <p:cNvPr id="9" name="Shape 6"/>
-          <p:cNvSpPr/>
-          <p:nvPr/>
-        </p:nvSpPr>
-        <p:spPr>
-          <a:xfrm>
-            <a:off x="4437172" y="6382512"/>
-            <a:ext cx="3317352" cy="0"/>
-          </a:xfrm>
-          <a:prstGeom prst="line">
-            <a:avLst/>
-          </a:prstGeom>
-          <a:noFill/>
-          <a:ln w="6350">
-            <a:solidFill>
-              <a:srgbClr val="6B8E00"/>
-            </a:solidFill>
-            <a:prstDash val="solid"/>
-          </a:ln>
-        </p:spPr>
+              <a:t>크리딜   |   </a:t>
+            </a:r>
+            <a:endParaRPr lang="en-US" sz="800" dirty="0"/>
+          </a:p>
+        </p:txBody>
       </p:sp>
       <p:sp>
         <p:nvSpPr>
           <p:cNvPr id="10" name="Text 7"/>
+          <p:cNvSpPr/>
+          <p:nvPr/>
+        </p:nvSpPr>
+        <p:spPr>
+          <a:xfrm>
+            <a:off x="10710367" y="6382512"/>
+            <a:ext cx="914400" cy="219456"/>
+          </a:xfrm>
+          <a:prstGeom prst="rect">
+            <a:avLst/>
+          </a:prstGeom>
+          <a:noFill/>
+          <a:ln/>
+        </p:spPr>
+        <p:txBody>
+          <a:bodyPr wrap="square" lIns="0" tIns="0" rIns="0" bIns="0" rtlCol="0" anchor="ctr"/>
+          <a:lstStyle/>
+          <a:p>
+            <a:pPr algn="r" indent="0" marL="0">
+              <a:buNone/>
+            </a:pPr>
+            <a:r>
+              <a:rPr lang="en-US" sz="900" b="1" dirty="0">
+                <a:solidFill>
+                  <a:srgbClr val="B98A2E"/>
+                </a:solidFill>
+                <a:latin typeface="Arial" pitchFamily="34" charset="0"/>
+                <a:ea typeface="Arial" pitchFamily="34" charset="-122"/>
+                <a:cs typeface="Arial" pitchFamily="34" charset="-120"/>
+              </a:rPr>
+              <a:t>3</a:t>
+            </a:r>
+            <a:endParaRPr lang="en-US" sz="900" dirty="0"/>
+          </a:p>
+        </p:txBody>
+      </p:sp>
+      <p:sp>
+        <p:nvSpPr>
+          <p:cNvPr id="11" name="Text 8"/>
           <p:cNvSpPr/>
           <p:nvPr/>
         </p:nvSpPr>
@@ -4385,7 +5340,7 @@
             <a:r>
               <a:rPr lang="en-US" sz="1000" dirty="0">
                 <a:solidFill>
-                  <a:srgbClr val="0F172A"/>
+                  <a:srgbClr val="10161F"/>
                 </a:solidFill>
                 <a:latin typeface="Pretendard" pitchFamily="34" charset="0"/>
                 <a:ea typeface="Pretendard" pitchFamily="34" charset="-122"/>
@@ -4437,14 +5392,14 @@
         </p:nvSpPr>
         <p:spPr>
           <a:xfrm>
-            <a:off x="566928" y="384048"/>
-            <a:ext cx="45720" cy="566928"/>
-          </a:xfrm>
-          <a:prstGeom prst="rect">
+            <a:off x="566928" y="457200"/>
+            <a:ext cx="384048" cy="384048"/>
+          </a:xfrm>
+          <a:prstGeom prst="ellipse">
             <a:avLst/>
           </a:prstGeom>
           <a:solidFill>
-            <a:srgbClr val="6B8E00"/>
+            <a:srgbClr val="B98A2E"/>
           </a:solidFill>
           <a:ln/>
         </p:spPr>
@@ -4457,32 +5412,71 @@
         </p:nvSpPr>
         <p:spPr>
           <a:xfrm>
-            <a:off x="749808" y="384048"/>
-            <a:ext cx="10874959" cy="182880"/>
-          </a:xfrm>
-          <a:prstGeom prst="rect">
-            <a:avLst/>
-          </a:prstGeom>
-          <a:noFill/>
-          <a:ln/>
-        </p:spPr>
-        <p:txBody>
-          <a:bodyPr wrap="square" lIns="0" tIns="0" rIns="0" bIns="0" rtlCol="0" anchor="ctr"/>
-          <a:lstStyle/>
-          <a:p>
-            <a:pPr indent="0" marL="0">
-              <a:buNone/>
-            </a:pPr>
-            <a:r>
-              <a:rPr lang="en-US" sz="950" b="1" spc="200" kern="0" dirty="0">
-                <a:solidFill>
-                  <a:srgbClr val="6B8E00"/>
+            <a:off x="566928" y="457200"/>
+            <a:ext cx="384048" cy="384048"/>
+          </a:xfrm>
+          <a:prstGeom prst="rect">
+            <a:avLst/>
+          </a:prstGeom>
+          <a:noFill/>
+          <a:ln/>
+        </p:spPr>
+        <p:txBody>
+          <a:bodyPr wrap="square" lIns="0" tIns="0" rIns="0" bIns="0" rtlCol="0" anchor="ctr"/>
+          <a:lstStyle/>
+          <a:p>
+            <a:pPr algn="ctr" indent="0" marL="0">
+              <a:buNone/>
+            </a:pPr>
+            <a:r>
+              <a:rPr lang="en-US" sz="1300" b="1" dirty="0">
+                <a:solidFill>
+                  <a:srgbClr val="FFFFFF"/>
                 </a:solidFill>
                 <a:latin typeface="Arial" pitchFamily="34" charset="0"/>
                 <a:ea typeface="Arial" pitchFamily="34" charset="-122"/>
                 <a:cs typeface="Arial" pitchFamily="34" charset="-120"/>
               </a:rPr>
-              <a:t>04  Building</a:t>
+              <a:t>04</a:t>
+            </a:r>
+            <a:endParaRPr lang="en-US" sz="1300" dirty="0"/>
+          </a:p>
+        </p:txBody>
+      </p:sp>
+      <p:sp>
+        <p:nvSpPr>
+          <p:cNvPr id="4" name="Text 2"/>
+          <p:cNvSpPr/>
+          <p:nvPr/>
+        </p:nvSpPr>
+        <p:spPr>
+          <a:xfrm>
+            <a:off x="1133856" y="457200"/>
+            <a:ext cx="10490911" cy="182880"/>
+          </a:xfrm>
+          <a:prstGeom prst="rect">
+            <a:avLst/>
+          </a:prstGeom>
+          <a:noFill/>
+          <a:ln/>
+        </p:spPr>
+        <p:txBody>
+          <a:bodyPr wrap="square" lIns="0" tIns="0" rIns="0" bIns="0" rtlCol="0" anchor="ctr"/>
+          <a:lstStyle/>
+          <a:p>
+            <a:pPr indent="0" marL="0">
+              <a:buNone/>
+            </a:pPr>
+            <a:r>
+              <a:rPr lang="en-US" sz="950" b="1" spc="200" kern="0" dirty="0">
+                <a:solidFill>
+                  <a:srgbClr val="B98A2E"/>
+                </a:solidFill>
+                <a:latin typeface="Arial" pitchFamily="34" charset="0"/>
+                <a:ea typeface="Arial" pitchFamily="34" charset="-122"/>
+                <a:cs typeface="Arial" pitchFamily="34" charset="-120"/>
+              </a:rPr>
+              <a:t>Building</a:t>
             </a:r>
             <a:endParaRPr lang="en-US" sz="950" dirty="0"/>
           </a:p>
@@ -4490,32 +5484,32 @@
       </p:sp>
       <p:sp>
         <p:nvSpPr>
-          <p:cNvPr id="4" name="Text 2"/>
-          <p:cNvSpPr/>
-          <p:nvPr/>
-        </p:nvSpPr>
-        <p:spPr>
-          <a:xfrm>
-            <a:off x="749808" y="566928"/>
-            <a:ext cx="10874959" cy="384048"/>
-          </a:xfrm>
-          <a:prstGeom prst="rect">
-            <a:avLst/>
-          </a:prstGeom>
-          <a:noFill/>
-          <a:ln/>
-        </p:spPr>
-        <p:txBody>
-          <a:bodyPr wrap="square" lIns="0" tIns="0" rIns="0" bIns="0" rtlCol="0" anchor="ctr"/>
-          <a:lstStyle/>
-          <a:p>
-            <a:pPr indent="0" marL="0">
-              <a:buNone/>
-            </a:pPr>
-            <a:r>
-              <a:rPr lang="en-US" sz="2200" b="1" dirty="0">
-                <a:solidFill>
-                  <a:srgbClr val="0F172A"/>
+          <p:cNvPr id="5" name="Text 3"/>
+          <p:cNvSpPr/>
+          <p:nvPr/>
+        </p:nvSpPr>
+        <p:spPr>
+          <a:xfrm>
+            <a:off x="1133856" y="640080"/>
+            <a:ext cx="10490911" cy="365760"/>
+          </a:xfrm>
+          <a:prstGeom prst="rect">
+            <a:avLst/>
+          </a:prstGeom>
+          <a:noFill/>
+          <a:ln/>
+        </p:spPr>
+        <p:txBody>
+          <a:bodyPr wrap="square" lIns="0" tIns="0" rIns="0" bIns="0" rtlCol="0" anchor="ctr"/>
+          <a:lstStyle/>
+          <a:p>
+            <a:pPr indent="0" marL="0">
+              <a:buNone/>
+            </a:pPr>
+            <a:r>
+              <a:rPr lang="en-US" sz="2300" b="1" dirty="0">
+                <a:solidFill>
+                  <a:srgbClr val="10161F"/>
                 </a:solidFill>
                 <a:latin typeface="Pretendard" pitchFamily="34" charset="0"/>
                 <a:ea typeface="Pretendard" pitchFamily="34" charset="-122"/>
@@ -4523,13 +5517,13 @@
               </a:rPr>
               <a:t>이 매물, 어떤 자산인가</a:t>
             </a:r>
-            <a:endParaRPr lang="en-US" sz="2200" dirty="0"/>
-          </a:p>
-        </p:txBody>
-      </p:sp>
-      <p:sp>
-        <p:nvSpPr>
-          <p:cNvPr id="5" name="Text 3"/>
+            <a:endParaRPr lang="en-US" sz="2300" dirty="0"/>
+          </a:p>
+        </p:txBody>
+      </p:sp>
+      <p:sp>
+        <p:nvSpPr>
+          <p:cNvPr id="6" name="Text 4"/>
           <p:cNvSpPr/>
           <p:nvPr/>
         </p:nvSpPr>
@@ -4554,7 +5548,7 @@
             <a:r>
               <a:rPr lang="en-US" sz="1100" b="1" dirty="0">
                 <a:solidFill>
-                  <a:srgbClr val="0F172A"/>
+                  <a:srgbClr val="10161F"/>
                 </a:solidFill>
                 <a:latin typeface="Pretendard" pitchFamily="34" charset="0"/>
                 <a:ea typeface="Pretendard" pitchFamily="34" charset="-122"/>
@@ -4568,7 +5562,7 @@
       </p:sp>
       <p:sp>
         <p:nvSpPr>
-          <p:cNvPr id="6" name="Text 4"/>
+          <p:cNvPr id="7" name="Text 5"/>
           <p:cNvSpPr/>
           <p:nvPr/>
         </p:nvSpPr>
@@ -4596,7 +5590,7 @@
             <a:r>
               <a:rPr lang="en-US" sz="1400" dirty="0">
                 <a:solidFill>
-                  <a:srgbClr val="64748B"/>
+                  <a:srgbClr val="718096"/>
                 </a:solidFill>
                 <a:latin typeface="Pretendard" pitchFamily="34" charset="0"/>
                 <a:ea typeface="Pretendard" pitchFamily="34" charset="-122"/>
@@ -4610,7 +5604,7 @@
       </p:sp>
       <p:sp>
         <p:nvSpPr>
-          <p:cNvPr id="7" name="Text 5"/>
+          <p:cNvPr id="8" name="Text 6"/>
           <p:cNvSpPr/>
           <p:nvPr/>
         </p:nvSpPr>
@@ -4638,7 +5632,7 @@
             <a:r>
               <a:rPr lang="en-US" sz="1400" b="1" dirty="0">
                 <a:solidFill>
-                  <a:srgbClr val="0F172A"/>
+                  <a:srgbClr val="10161F"/>
                 </a:solidFill>
                 <a:latin typeface="Pretendard" pitchFamily="34" charset="0"/>
                 <a:ea typeface="Pretendard" pitchFamily="34" charset="-122"/>
@@ -4652,7 +5646,7 @@
       </p:sp>
       <p:sp>
         <p:nvSpPr>
-          <p:cNvPr id="8" name="Shape 6"/>
+          <p:cNvPr id="9" name="Shape 7"/>
           <p:cNvSpPr/>
           <p:nvPr/>
         </p:nvSpPr>
@@ -4667,7 +5661,7 @@
           <a:noFill/>
           <a:ln w="8890">
             <a:solidFill>
-              <a:srgbClr val="6B8E00"/>
+              <a:srgbClr val="B98A2E"/>
             </a:solidFill>
             <a:prstDash val="solid"/>
           </a:ln>
@@ -4675,7 +5669,7 @@
       </p:sp>
       <p:sp>
         <p:nvSpPr>
-          <p:cNvPr id="9" name="Shape 7"/>
+          <p:cNvPr id="10" name="Shape 8"/>
           <p:cNvSpPr/>
           <p:nvPr/>
         </p:nvSpPr>
@@ -4690,14 +5684,14 @@
             </a:avLst>
           </a:prstGeom>
           <a:solidFill>
-            <a:srgbClr val="DBEAFE"/>
+            <a:srgbClr val="F3EBDA"/>
           </a:solidFill>
           <a:ln/>
         </p:spPr>
       </p:sp>
       <p:sp>
         <p:nvSpPr>
-          <p:cNvPr id="10" name="Shape 8"/>
+          <p:cNvPr id="11" name="Shape 9"/>
           <p:cNvSpPr/>
           <p:nvPr/>
         </p:nvSpPr>
@@ -4710,14 +5704,14 @@
             <a:avLst/>
           </a:prstGeom>
           <a:solidFill>
-            <a:srgbClr val="1D4ED8"/>
+            <a:srgbClr val="977024"/>
           </a:solidFill>
           <a:ln/>
         </p:spPr>
       </p:sp>
       <p:sp>
         <p:nvSpPr>
-          <p:cNvPr id="11" name="Text 9"/>
+          <p:cNvPr id="12" name="Text 10"/>
           <p:cNvSpPr/>
           <p:nvPr/>
         </p:nvSpPr>
@@ -4739,147 +5733,90 @@
             <a:pPr indent="0" marL="0">
               <a:buNone/>
             </a:pPr>
-            <a:r>
-              <a:rPr lang="en-US" sz="1050" b="1" dirty="0">
-                <a:solidFill>
-                  <a:srgbClr val="1D4ED8"/>
+            <a:endParaRPr lang="en-US" sz="1050" dirty="0"/>
+          </a:p>
+        </p:txBody>
+      </p:sp>
+      <p:sp>
+        <p:nvSpPr>
+          <p:cNvPr id="13" name="Text 11"/>
+          <p:cNvSpPr/>
+          <p:nvPr/>
+        </p:nvSpPr>
+        <p:spPr>
+          <a:xfrm>
+            <a:off x="7967167" y="1975104"/>
+            <a:ext cx="3511296" cy="1700784"/>
+          </a:xfrm>
+          <a:prstGeom prst="rect">
+            <a:avLst/>
+          </a:prstGeom>
+          <a:noFill/>
+          <a:ln/>
+        </p:spPr>
+        <p:txBody>
+          <a:bodyPr wrap="square" lIns="0" tIns="0" rIns="0" bIns="0" rtlCol="0" anchor="t"/>
+          <a:lstStyle/>
+          <a:p>
+            <a:pPr indent="0" marL="0">
+              <a:lnSpc>
+                <a:spcPct val="120000"/>
+              </a:lnSpc>
+              <a:buNone/>
+            </a:pPr>
+            <a:r>
+              <a:rPr lang="en-US" sz="930" dirty="0">
+                <a:solidFill>
+                  <a:srgbClr val="10161F"/>
                 </a:solidFill>
                 <a:latin typeface="Pretendard" pitchFamily="34" charset="0"/>
                 <a:ea typeface="Pretendard" pitchFamily="34" charset="-122"/>
                 <a:cs typeface="Pretendard" pitchFamily="34" charset="-120"/>
               </a:rPr>
-              <a:t>토지 및 건물 분석 포인트</a:t>
-            </a:r>
-            <a:endParaRPr lang="en-US" sz="1050" dirty="0"/>
-          </a:p>
-        </p:txBody>
-      </p:sp>
-      <p:sp>
-        <p:nvSpPr>
-          <p:cNvPr id="12" name="Text 10"/>
-          <p:cNvSpPr/>
-          <p:nvPr/>
-        </p:nvSpPr>
-        <p:spPr>
-          <a:xfrm>
-            <a:off x="7967167" y="1975104"/>
-            <a:ext cx="3511296" cy="1700784"/>
-          </a:xfrm>
-          <a:prstGeom prst="rect">
-            <a:avLst/>
-          </a:prstGeom>
-          <a:noFill/>
-          <a:ln/>
-        </p:spPr>
-        <p:txBody>
-          <a:bodyPr wrap="square" lIns="0" tIns="0" rIns="0" bIns="0" rtlCol="0" anchor="t"/>
-          <a:lstStyle/>
-          <a:p>
-            <a:pPr marL="342900" indent="-342900">
-              <a:lnSpc>
-                <a:spcPct val="120000"/>
-              </a:lnSpc>
-              <a:buSzPct val="100000"/>
-              <a:buChar char="•"/>
-            </a:pPr>
-            <a:r>
-              <a:rPr lang="en-US" sz="930" dirty="0">
-                <a:solidFill>
-                  <a:srgbClr val="0F172A"/>
+              <a:t>{"ok":true,"mocked":true,"extractedFields":{"area_signal":"역삼","asset_type":"오피스빌딩","price_band":"300억","size_signal":"3</a:t>
+            </a:r>
+            <a:endParaRPr lang="en-US" sz="930" dirty="0"/>
+          </a:p>
+        </p:txBody>
+      </p:sp>
+      <p:sp>
+        <p:nvSpPr>
+          <p:cNvPr id="14" name="Text 12"/>
+          <p:cNvSpPr/>
+          <p:nvPr/>
+        </p:nvSpPr>
+        <p:spPr>
+          <a:xfrm>
+            <a:off x="566928" y="6382512"/>
+            <a:ext cx="7315200" cy="219456"/>
+          </a:xfrm>
+          <a:prstGeom prst="rect">
+            <a:avLst/>
+          </a:prstGeom>
+          <a:noFill/>
+          <a:ln/>
+        </p:spPr>
+        <p:txBody>
+          <a:bodyPr wrap="square" lIns="0" tIns="0" rIns="0" bIns="0" rtlCol="0" anchor="ctr"/>
+          <a:lstStyle/>
+          <a:p>
+            <a:pPr indent="0" marL="0">
+              <a:buNone/>
+            </a:pPr>
+            <a:r>
+              <a:rPr lang="en-US" sz="800" dirty="0">
+                <a:solidFill>
+                  <a:srgbClr val="718096"/>
                 </a:solidFill>
                 <a:latin typeface="Pretendard" pitchFamily="34" charset="0"/>
                 <a:ea typeface="Pretendard" pitchFamily="34" charset="-122"/>
                 <a:cs typeface="Pretendard" pitchFamily="34" charset="-120"/>
               </a:rPr>
-              <a:t>서초대로 25m 메인 도로변 우수한 가시성 확보</a:t>
-            </a:r>
-            <a:endParaRPr lang="en-US" sz="930" dirty="0"/>
-          </a:p>
-          <a:p>
-            <a:pPr marL="342900" indent="-342900">
-              <a:lnSpc>
-                <a:spcPct val="120000"/>
-              </a:lnSpc>
-              <a:buSzPct val="100000"/>
-              <a:buChar char="•"/>
-            </a:pPr>
-            <a:r>
-              <a:rPr lang="en-US" sz="930" dirty="0">
-                <a:solidFill>
-                  <a:srgbClr val="0F172A"/>
-                </a:solidFill>
-                <a:latin typeface="Pretendard" pitchFamily="34" charset="0"/>
-                <a:ea typeface="Pretendard" pitchFamily="34" charset="-122"/>
-                <a:cs typeface="Pretendard" pitchFamily="34" charset="-120"/>
-              </a:rPr>
-              <a:t>제3종일반주거지역 법정 용적률 완비 자산</a:t>
-            </a:r>
-            <a:endParaRPr lang="en-US" sz="930" dirty="0"/>
-          </a:p>
-          <a:p>
-            <a:pPr marL="342900" indent="-342900">
-              <a:lnSpc>
-                <a:spcPct val="120000"/>
-              </a:lnSpc>
-              <a:buSzPct val="100000"/>
-              <a:buChar char="•"/>
-            </a:pPr>
-            <a:r>
-              <a:rPr lang="en-US" sz="930" dirty="0">
-                <a:solidFill>
-                  <a:srgbClr val="0F172A"/>
-                </a:solidFill>
-                <a:latin typeface="Pretendard" pitchFamily="34" charset="0"/>
-                <a:ea typeface="Pretendard" pitchFamily="34" charset="-122"/>
-                <a:cs typeface="Pretendard" pitchFamily="34" charset="-120"/>
-              </a:rPr>
-              <a:t>침대용 승강기 완비로 병의원 입점 최적화 구조</a:t>
-            </a:r>
-            <a:endParaRPr lang="en-US" sz="930" dirty="0"/>
-          </a:p>
-        </p:txBody>
-      </p:sp>
-      <p:sp>
-        <p:nvSpPr>
-          <p:cNvPr id="13" name="Shape 11"/>
-          <p:cNvSpPr/>
-          <p:nvPr/>
-        </p:nvSpPr>
-        <p:spPr>
-          <a:xfrm>
-            <a:off x="7784287" y="3977640"/>
-            <a:ext cx="3840480" cy="2148840"/>
-          </a:xfrm>
-          <a:prstGeom prst="roundRect">
-            <a:avLst>
-              <a:gd name="adj" fmla="val 2553"/>
-            </a:avLst>
-          </a:prstGeom>
-          <a:solidFill>
-            <a:srgbClr val="DBEAFE"/>
-          </a:solidFill>
-          <a:ln/>
-        </p:spPr>
-      </p:sp>
-      <p:sp>
-        <p:nvSpPr>
-          <p:cNvPr id="14" name="Shape 12"/>
-          <p:cNvSpPr/>
-          <p:nvPr/>
-        </p:nvSpPr>
-        <p:spPr>
-          <a:xfrm>
-            <a:off x="7784287" y="4032504"/>
-            <a:ext cx="36576" cy="2039112"/>
-          </a:xfrm>
-          <a:prstGeom prst="rect">
-            <a:avLst/>
-          </a:prstGeom>
-          <a:solidFill>
-            <a:srgbClr val="1D4ED8"/>
-          </a:solidFill>
-          <a:ln/>
-        </p:spPr>
+              <a:t>크리딜   |   </a:t>
+            </a:r>
+            <a:endParaRPr lang="en-US" sz="800" dirty="0"/>
+          </a:p>
+        </p:txBody>
       </p:sp>
       <p:sp>
         <p:nvSpPr>
@@ -4889,183 +5826,36 @@
         </p:nvSpPr>
         <p:spPr>
           <a:xfrm>
-            <a:off x="7967167" y="4087368"/>
-            <a:ext cx="3511296" cy="201168"/>
-          </a:xfrm>
-          <a:prstGeom prst="rect">
-            <a:avLst/>
-          </a:prstGeom>
-          <a:noFill/>
-          <a:ln/>
-        </p:spPr>
-        <p:txBody>
-          <a:bodyPr wrap="square" lIns="0" tIns="0" rIns="0" bIns="0" rtlCol="0" anchor="ctr"/>
-          <a:lstStyle/>
-          <a:p>
-            <a:pPr indent="0" marL="0">
-              <a:buNone/>
-            </a:pPr>
-            <a:r>
-              <a:rPr lang="en-US" sz="1050" b="1" dirty="0">
-                <a:solidFill>
-                  <a:srgbClr val="1D4ED8"/>
-                </a:solidFill>
-                <a:latin typeface="Pretendard" pitchFamily="34" charset="0"/>
-                <a:ea typeface="Pretendard" pitchFamily="34" charset="-122"/>
-                <a:cs typeface="Pretendard" pitchFamily="34" charset="-120"/>
-              </a:rPr>
-              <a:t>물건 실사 및 관리 상태</a:t>
-            </a:r>
-            <a:endParaRPr lang="en-US" sz="1050" dirty="0"/>
-          </a:p>
-        </p:txBody>
-      </p:sp>
-      <p:sp>
-        <p:nvSpPr>
-          <p:cNvPr id="16" name="Text 14"/>
-          <p:cNvSpPr/>
-          <p:nvPr/>
-        </p:nvSpPr>
-        <p:spPr>
-          <a:xfrm>
-            <a:off x="7967167" y="4306824"/>
-            <a:ext cx="3511296" cy="1746504"/>
-          </a:xfrm>
-          <a:prstGeom prst="rect">
-            <a:avLst/>
-          </a:prstGeom>
-          <a:noFill/>
-          <a:ln/>
-        </p:spPr>
-        <p:txBody>
-          <a:bodyPr wrap="square" lIns="0" tIns="0" rIns="0" bIns="0" rtlCol="0" anchor="t"/>
-          <a:lstStyle/>
-          <a:p>
-            <a:pPr marL="342900" indent="-342900">
-              <a:lnSpc>
-                <a:spcPct val="120000"/>
-              </a:lnSpc>
-              <a:buSzPct val="100000"/>
-              <a:buChar char="•"/>
-            </a:pPr>
-            <a:r>
-              <a:rPr lang="en-US" sz="930" dirty="0">
-                <a:solidFill>
-                  <a:srgbClr val="0F172A"/>
-                </a:solidFill>
-                <a:latin typeface="Pretendard" pitchFamily="34" charset="0"/>
-                <a:ea typeface="Pretendard" pitchFamily="34" charset="-122"/>
-                <a:cs typeface="Pretendard" pitchFamily="34" charset="-120"/>
-              </a:rPr>
-              <a:t>2017년 준공 신축급 상태로 누수·균열 0건</a:t>
-            </a:r>
-            <a:endParaRPr lang="en-US" sz="930" dirty="0"/>
-          </a:p>
-          <a:p>
-            <a:pPr marL="342900" indent="-342900">
-              <a:lnSpc>
-                <a:spcPct val="120000"/>
-              </a:lnSpc>
-              <a:buSzPct val="100000"/>
-              <a:buChar char="•"/>
-            </a:pPr>
-            <a:r>
-              <a:rPr lang="en-US" sz="930" dirty="0">
-                <a:solidFill>
-                  <a:srgbClr val="0F172A"/>
-                </a:solidFill>
-                <a:latin typeface="Pretendard" pitchFamily="34" charset="0"/>
-                <a:ea typeface="Pretendard" pitchFamily="34" charset="-122"/>
-                <a:cs typeface="Pretendard" pitchFamily="34" charset="-120"/>
-              </a:rPr>
-              <a:t>단독 법인 소유로 권리관계 투명</a:t>
-            </a:r>
-            <a:endParaRPr lang="en-US" sz="930" dirty="0"/>
-          </a:p>
-          <a:p>
-            <a:pPr marL="342900" indent="-342900">
-              <a:lnSpc>
-                <a:spcPct val="120000"/>
-              </a:lnSpc>
-              <a:buSzPct val="100000"/>
-              <a:buChar char="•"/>
-            </a:pPr>
-            <a:r>
-              <a:rPr lang="en-US" sz="930" dirty="0">
-                <a:solidFill>
-                  <a:srgbClr val="0F172A"/>
-                </a:solidFill>
-                <a:latin typeface="Pretendard" pitchFamily="34" charset="0"/>
-                <a:ea typeface="Pretendard" pitchFamily="34" charset="-122"/>
-                <a:cs typeface="Pretendard" pitchFamily="34" charset="-120"/>
-              </a:rPr>
-              <a:t>1금융권 담보대출 85억 원 승계 적격</a:t>
-            </a:r>
-            <a:endParaRPr lang="en-US" sz="930" dirty="0"/>
-          </a:p>
-        </p:txBody>
-      </p:sp>
-      <p:sp>
-        <p:nvSpPr>
-          <p:cNvPr id="17" name="Text 15"/>
-          <p:cNvSpPr/>
-          <p:nvPr/>
-        </p:nvSpPr>
-        <p:spPr>
-          <a:xfrm>
-            <a:off x="566928" y="6419088"/>
-            <a:ext cx="11057839" cy="201168"/>
-          </a:xfrm>
-          <a:prstGeom prst="rect">
-            <a:avLst/>
-          </a:prstGeom>
-          <a:noFill/>
-          <a:ln/>
-        </p:spPr>
-        <p:txBody>
-          <a:bodyPr wrap="square" lIns="0" tIns="0" rIns="0" bIns="0" rtlCol="0" anchor="ctr"/>
-          <a:lstStyle/>
-          <a:p>
-            <a:pPr algn="ctr" indent="0" marL="0">
-              <a:buNone/>
-            </a:pPr>
-            <a:r>
-              <a:rPr lang="en-US" sz="750" dirty="0">
-                <a:solidFill>
-                  <a:srgbClr val="64748B"/>
-                </a:solidFill>
-                <a:latin typeface="Pretendard" pitchFamily="34" charset="0"/>
-                <a:ea typeface="Pretendard" pitchFamily="34" charset="-122"/>
-                <a:cs typeface="Pretendard" pitchFamily="34" charset="-120"/>
-              </a:rPr>
-              <a:t>크리딜  ·    ·  4</a:t>
-            </a:r>
-            <a:endParaRPr lang="en-US" sz="750" dirty="0"/>
-          </a:p>
-        </p:txBody>
-      </p:sp>
-      <p:sp>
-        <p:nvSpPr>
-          <p:cNvPr id="18" name="Shape 16"/>
-          <p:cNvSpPr/>
-          <p:nvPr/>
-        </p:nvSpPr>
-        <p:spPr>
-          <a:xfrm>
-            <a:off x="4437172" y="6382512"/>
-            <a:ext cx="3317352" cy="0"/>
-          </a:xfrm>
-          <a:prstGeom prst="line">
-            <a:avLst/>
-          </a:prstGeom>
-          <a:noFill/>
-          <a:ln w="6350">
-            <a:solidFill>
-              <a:srgbClr val="6B8E00"/>
-            </a:solidFill>
-            <a:prstDash val="solid"/>
-          </a:ln>
-        </p:spPr>
+            <a:off x="10710367" y="6382512"/>
+            <a:ext cx="914400" cy="219456"/>
+          </a:xfrm>
+          <a:prstGeom prst="rect">
+            <a:avLst/>
+          </a:prstGeom>
+          <a:noFill/>
+          <a:ln/>
+        </p:spPr>
+        <p:txBody>
+          <a:bodyPr wrap="square" lIns="0" tIns="0" rIns="0" bIns="0" rtlCol="0" anchor="ctr"/>
+          <a:lstStyle/>
+          <a:p>
+            <a:pPr algn="r" indent="0" marL="0">
+              <a:buNone/>
+            </a:pPr>
+            <a:r>
+              <a:rPr lang="en-US" sz="900" b="1" dirty="0">
+                <a:solidFill>
+                  <a:srgbClr val="B98A2E"/>
+                </a:solidFill>
+                <a:latin typeface="Arial" pitchFamily="34" charset="0"/>
+                <a:ea typeface="Arial" pitchFamily="34" charset="-122"/>
+                <a:cs typeface="Arial" pitchFamily="34" charset="-120"/>
+              </a:rPr>
+              <a:t>4</a:t>
+            </a:r>
+            <a:endParaRPr lang="en-US" sz="900" dirty="0"/>
+          </a:p>
+        </p:txBody>
       </p:sp>
     </p:spTree>
   </p:cSld>
@@ -5107,14 +5897,14 @@
         </p:nvSpPr>
         <p:spPr>
           <a:xfrm>
-            <a:off x="566928" y="384048"/>
-            <a:ext cx="45720" cy="566928"/>
-          </a:xfrm>
-          <a:prstGeom prst="rect">
+            <a:off x="566928" y="457200"/>
+            <a:ext cx="384048" cy="384048"/>
+          </a:xfrm>
+          <a:prstGeom prst="ellipse">
             <a:avLst/>
           </a:prstGeom>
           <a:solidFill>
-            <a:srgbClr val="6B8E00"/>
+            <a:srgbClr val="B98A2E"/>
           </a:solidFill>
           <a:ln/>
         </p:spPr>
@@ -5127,32 +5917,71 @@
         </p:nvSpPr>
         <p:spPr>
           <a:xfrm>
-            <a:off x="749808" y="384048"/>
-            <a:ext cx="10874959" cy="182880"/>
-          </a:xfrm>
-          <a:prstGeom prst="rect">
-            <a:avLst/>
-          </a:prstGeom>
-          <a:noFill/>
-          <a:ln/>
-        </p:spPr>
-        <p:txBody>
-          <a:bodyPr wrap="square" lIns="0" tIns="0" rIns="0" bIns="0" rtlCol="0" anchor="ctr"/>
-          <a:lstStyle/>
-          <a:p>
-            <a:pPr indent="0" marL="0">
-              <a:buNone/>
-            </a:pPr>
-            <a:r>
-              <a:rPr lang="en-US" sz="950" b="1" spc="200" kern="0" dirty="0">
-                <a:solidFill>
-                  <a:srgbClr val="6B8E00"/>
+            <a:off x="566928" y="457200"/>
+            <a:ext cx="384048" cy="384048"/>
+          </a:xfrm>
+          <a:prstGeom prst="rect">
+            <a:avLst/>
+          </a:prstGeom>
+          <a:noFill/>
+          <a:ln/>
+        </p:spPr>
+        <p:txBody>
+          <a:bodyPr wrap="square" lIns="0" tIns="0" rIns="0" bIns="0" rtlCol="0" anchor="ctr"/>
+          <a:lstStyle/>
+          <a:p>
+            <a:pPr algn="ctr" indent="0" marL="0">
+              <a:buNone/>
+            </a:pPr>
+            <a:r>
+              <a:rPr lang="en-US" sz="1300" b="1" dirty="0">
+                <a:solidFill>
+                  <a:srgbClr val="FFFFFF"/>
                 </a:solidFill>
                 <a:latin typeface="Arial" pitchFamily="34" charset="0"/>
                 <a:ea typeface="Arial" pitchFamily="34" charset="-122"/>
                 <a:cs typeface="Arial" pitchFamily="34" charset="-120"/>
               </a:rPr>
-              <a:t>05  Plan</a:t>
+              <a:t>05</a:t>
+            </a:r>
+            <a:endParaRPr lang="en-US" sz="1300" dirty="0"/>
+          </a:p>
+        </p:txBody>
+      </p:sp>
+      <p:sp>
+        <p:nvSpPr>
+          <p:cNvPr id="4" name="Text 2"/>
+          <p:cNvSpPr/>
+          <p:nvPr/>
+        </p:nvSpPr>
+        <p:spPr>
+          <a:xfrm>
+            <a:off x="1133856" y="457200"/>
+            <a:ext cx="10490911" cy="182880"/>
+          </a:xfrm>
+          <a:prstGeom prst="rect">
+            <a:avLst/>
+          </a:prstGeom>
+          <a:noFill/>
+          <a:ln/>
+        </p:spPr>
+        <p:txBody>
+          <a:bodyPr wrap="square" lIns="0" tIns="0" rIns="0" bIns="0" rtlCol="0" anchor="ctr"/>
+          <a:lstStyle/>
+          <a:p>
+            <a:pPr indent="0" marL="0">
+              <a:buNone/>
+            </a:pPr>
+            <a:r>
+              <a:rPr lang="en-US" sz="950" b="1" spc="200" kern="0" dirty="0">
+                <a:solidFill>
+                  <a:srgbClr val="B98A2E"/>
+                </a:solidFill>
+                <a:latin typeface="Arial" pitchFamily="34" charset="0"/>
+                <a:ea typeface="Arial" pitchFamily="34" charset="-122"/>
+                <a:cs typeface="Arial" pitchFamily="34" charset="-120"/>
+              </a:rPr>
+              <a:t>Plan</a:t>
             </a:r>
             <a:endParaRPr lang="en-US" sz="950" dirty="0"/>
           </a:p>
@@ -5160,32 +5989,32 @@
       </p:sp>
       <p:sp>
         <p:nvSpPr>
-          <p:cNvPr id="4" name="Text 2"/>
-          <p:cNvSpPr/>
-          <p:nvPr/>
-        </p:nvSpPr>
-        <p:spPr>
-          <a:xfrm>
-            <a:off x="749808" y="566928"/>
-            <a:ext cx="10874959" cy="384048"/>
-          </a:xfrm>
-          <a:prstGeom prst="rect">
-            <a:avLst/>
-          </a:prstGeom>
-          <a:noFill/>
-          <a:ln/>
-        </p:spPr>
-        <p:txBody>
-          <a:bodyPr wrap="square" lIns="0" tIns="0" rIns="0" bIns="0" rtlCol="0" anchor="ctr"/>
-          <a:lstStyle/>
-          <a:p>
-            <a:pPr indent="0" marL="0">
-              <a:buNone/>
-            </a:pPr>
-            <a:r>
-              <a:rPr lang="en-US" sz="2200" b="1" dirty="0">
-                <a:solidFill>
-                  <a:srgbClr val="0F172A"/>
+          <p:cNvPr id="5" name="Text 3"/>
+          <p:cNvSpPr/>
+          <p:nvPr/>
+        </p:nvSpPr>
+        <p:spPr>
+          <a:xfrm>
+            <a:off x="1133856" y="640080"/>
+            <a:ext cx="10490911" cy="365760"/>
+          </a:xfrm>
+          <a:prstGeom prst="rect">
+            <a:avLst/>
+          </a:prstGeom>
+          <a:noFill/>
+          <a:ln/>
+        </p:spPr>
+        <p:txBody>
+          <a:bodyPr wrap="square" lIns="0" tIns="0" rIns="0" bIns="0" rtlCol="0" anchor="ctr"/>
+          <a:lstStyle/>
+          <a:p>
+            <a:pPr indent="0" marL="0">
+              <a:buNone/>
+            </a:pPr>
+            <a:r>
+              <a:rPr lang="en-US" sz="2300" b="1" dirty="0">
+                <a:solidFill>
+                  <a:srgbClr val="10161F"/>
                 </a:solidFill>
                 <a:latin typeface="Pretendard" pitchFamily="34" charset="0"/>
                 <a:ea typeface="Pretendard" pitchFamily="34" charset="-122"/>
@@ -5193,13 +6022,13 @@
               </a:rPr>
               <a:t>사옥으로 활용하기에 적합한가</a:t>
             </a:r>
-            <a:endParaRPr lang="en-US" sz="2200" dirty="0"/>
-          </a:p>
-        </p:txBody>
-      </p:sp>
-      <p:sp>
-        <p:nvSpPr>
-          <p:cNvPr id="5" name="Text 3"/>
+            <a:endParaRPr lang="en-US" sz="2300" dirty="0"/>
+          </a:p>
+        </p:txBody>
+      </p:sp>
+      <p:sp>
+        <p:nvSpPr>
+          <p:cNvPr id="6" name="Text 4"/>
           <p:cNvSpPr/>
           <p:nvPr/>
         </p:nvSpPr>
@@ -5224,13 +6053,13 @@
             <a:r>
               <a:rPr lang="en-US" sz="1100" b="1" dirty="0">
                 <a:solidFill>
-                  <a:srgbClr val="0F172A"/>
+                  <a:srgbClr val="10161F"/>
                 </a:solidFill>
                 <a:latin typeface="Pretendard" pitchFamily="34" charset="0"/>
                 <a:ea typeface="Pretendard" pitchFamily="34" charset="-122"/>
                 <a:cs typeface="Pretendard" pitchFamily="34" charset="-120"/>
               </a:rPr>
-              <a:t>건축물 개요 및 물리 스펙</a:t>
+              <a:t>사옥 입주 적합성 분석</a:t>
             </a:r>
             <a:endParaRPr lang="en-US" sz="1100" dirty="0"/>
           </a:p>
@@ -5238,7 +6067,7 @@
       </p:sp>
       <p:sp>
         <p:nvSpPr>
-          <p:cNvPr id="6" name="Text 4"/>
+          <p:cNvPr id="7" name="Text 5"/>
           <p:cNvSpPr/>
           <p:nvPr/>
         </p:nvSpPr>
@@ -5266,13 +6095,13 @@
             <a:r>
               <a:rPr lang="en-US" sz="1400" dirty="0">
                 <a:solidFill>
-                  <a:srgbClr val="64748B"/>
+                  <a:srgbClr val="718096"/>
                 </a:solidFill>
                 <a:latin typeface="Pretendard" pitchFamily="34" charset="0"/>
                 <a:ea typeface="Pretendard" pitchFamily="34" charset="-122"/>
                 <a:cs typeface="Pretendard" pitchFamily="34" charset="-120"/>
               </a:rPr>
-              <a:t>{"ok"</a:t>
+              <a:t>수용 가능 인원</a:t>
             </a:r>
             <a:endParaRPr lang="en-US" sz="1400" dirty="0"/>
           </a:p>
@@ -5280,7 +6109,7 @@
       </p:sp>
       <p:sp>
         <p:nvSpPr>
-          <p:cNvPr id="7" name="Text 5"/>
+          <p:cNvPr id="8" name="Text 6"/>
           <p:cNvSpPr/>
           <p:nvPr/>
         </p:nvSpPr>
@@ -5308,13 +6137,13 @@
             <a:r>
               <a:rPr lang="en-US" sz="1400" b="1" dirty="0">
                 <a:solidFill>
-                  <a:srgbClr val="0F172A"/>
+                  <a:srgbClr val="10161F"/>
                 </a:solidFill>
                 <a:latin typeface="Pretendard" pitchFamily="34" charset="0"/>
                 <a:ea typeface="Pretendard" pitchFamily="34" charset="-122"/>
                 <a:cs typeface="Pretendard" pitchFamily="34" charset="-120"/>
               </a:rPr>
-              <a:t>true,"mocked":true,"extractedFields":{"area_signal":"역삼","asset_type":"오피스빌딩","price_band":"300억","size_signal":"3000평(약 9917.4㎡)"},"extractedFacts":{"region":"역삼","exactAddressCandidate":"역삼동 742-1","assetType":"오피스빌딩","priceText":"300억","sizeText":"3000평(약 9917.4㎡)","currentUse":"오피스","currentUseSignal":"근린생활시설","leaseSignal":"임대중","vacancySignal":"공실없음","tenantNames":"쿠팡","네이버","unitRentTexts":"301호: 1500만","sellerMotivationText":"자산 효율화","brokerNotes":"초역세권 매물"},"detectedSensitiveFields":"exact_address","tenant_name","ambiguousFields":,"warnings":,"areaSignal":"역삼","assetType":"오피스빌딩","priceBand":"300억","sizeSignal":"3000평(약 9917.4㎡)","dealType":"매각","buildingName":"역삼 센트럴타워","exactAddress":"역삼동 742-1","totalFloorArea":9917.3,"buildYear":2015,"currentUseSignal":"근린생활시설","vacancySignal":"공실 없음","fitSummary":"초역세권 근생 빌딩으로 시행/사옥 매입에 최적화","cautionSummary":"주요 임차 업종 만기 조율 필요","hiddenFields":"exact_address","seller_motivation","confidence":{"areaSignal":"confirmed","assetType":"confirmed","priceBand":"ai_hypothesis","fitSummary":"ai_hypothesis"},"missingData":"sizeSignal","boundaryNote":"본 자료는 실거래 통계 기반 참고치입니다.","buyerType":"법인 사옥형","budgetRange":{"min":50,"max":80,"display":"50억~80억"},"preferredRegions":"강남","성수","assetTypes":"꼬마빌딩","사옥용","purchasePurpose":"사옥용 매입","mustHave":"초역세권","주차","niceToHave":"테라스","루프탑","riskTolerance":"medium","financingNote":"자본금 50% 준비","missingQuestions":"구체적인 입주 시기가 언제인가요?","선호하는 수익률이 있나요?","privacyNotes":"연락처 비공개","fitReasons":"매수자 예산(50-80억)에 부합하는 매물입니다.","요청하신 성수/강남 권역에 해당합니다.","cautionReasons":"요청한 용도와 달리 명도 협의가 다소 필요합니다.","recommendedNextAction":"현장 답사 제안","kakaoMessage":"안녕하세요! 요청하신 조건에 부합하는 추천 매물이 있어 안내해 드립니다. 확인해보시고 피드백 부탁드립니다.","title":"강남 역삼역 초역세권 오피스 사옥용 빌딩 매각","shortSummary":"역삼역 도보 5분 거리의 준신축급 대형 오피스빌딩입니다.","dealPoints":"초역세권","사옥 최적","cautionPoints":"명도 조율 필요","hiddenInfoNotice":"보증금 및 지번은 인가 후 확인 가능","gateMessage":"G1 등급 등록이 필요합니다.","kakaoText":"강남 역삼역 오피스 빌딩 매각 안내입니다.","exactUnitCandidate":"101호","floor":"1층","areaSqmText":"150㎡","spaceType":"office","depositText":"5000만","monthlyRentText":"400만","maintenanceFeeText":"50만","availableFromText":"즉시입주","leaseTermMonthsText":"24","incentivesText":"렌트프리 2개월","restrictions":,"landlordIdentity":"김성수","currentTenant":"스타트업","vacancyReason":"이전 확장","rentNegotiation":"협의 가능","region":"성수동","areaSqm":150,"deposit":5000,"monthlyRent":400,"maintenanceFee":50,"availableFrom":"즉시입주","leaseTermMonths":24,"incentives":{"rentFreeMonths":2,"interiorSupport":"일부 인테리어 지원","freeRentDetail":"렌트프리 2개월 지원"},"shortSummaryLease":"성수역 도보 5분 거리 1층 리테일 상가 매물입니다."}</a:t>
+              <a:t>약 50~150명 수용 가능</a:t>
             </a:r>
             <a:endParaRPr lang="en-US" sz="1400" dirty="0"/>
           </a:p>
@@ -5322,22 +6151,22 @@
       </p:sp>
       <p:sp>
         <p:nvSpPr>
-          <p:cNvPr id="8" name="Shape 6"/>
-          <p:cNvSpPr/>
-          <p:nvPr/>
-        </p:nvSpPr>
-        <p:spPr>
-          <a:xfrm>
-            <a:off x="7604608" y="1371600"/>
-            <a:ext cx="0" cy="4754880"/>
+          <p:cNvPr id="9" name="Shape 7"/>
+          <p:cNvSpPr/>
+          <p:nvPr/>
+        </p:nvSpPr>
+        <p:spPr>
+          <a:xfrm>
+            <a:off x="566928" y="2048256"/>
+            <a:ext cx="6858000" cy="0"/>
           </a:xfrm>
           <a:prstGeom prst="line">
             <a:avLst/>
           </a:prstGeom>
           <a:noFill/>
-          <a:ln w="8890">
+          <a:ln w="3810">
             <a:solidFill>
-              <a:srgbClr val="6B8E00"/>
+              <a:srgbClr val="CBD5E0"/>
             </a:solidFill>
             <a:prstDash val="solid"/>
           </a:ln>
@@ -5345,331 +6174,544 @@
       </p:sp>
       <p:sp>
         <p:nvSpPr>
-          <p:cNvPr id="9" name="Shape 7"/>
-          <p:cNvSpPr/>
-          <p:nvPr/>
-        </p:nvSpPr>
-        <p:spPr>
-          <a:xfrm>
-            <a:off x="7784287" y="1645920"/>
-            <a:ext cx="3840480" cy="2103120"/>
-          </a:xfrm>
-          <a:prstGeom prst="roundRect">
-            <a:avLst>
-              <a:gd name="adj" fmla="val 2609"/>
-            </a:avLst>
-          </a:prstGeom>
-          <a:solidFill>
-            <a:srgbClr val="DBEAFE"/>
-          </a:solidFill>
-          <a:ln/>
-        </p:spPr>
-      </p:sp>
-      <p:sp>
-        <p:nvSpPr>
-          <p:cNvPr id="10" name="Shape 8"/>
-          <p:cNvSpPr/>
-          <p:nvPr/>
-        </p:nvSpPr>
-        <p:spPr>
-          <a:xfrm>
-            <a:off x="7784287" y="1700784"/>
-            <a:ext cx="36576" cy="1993392"/>
-          </a:xfrm>
-          <a:prstGeom prst="rect">
-            <a:avLst/>
-          </a:prstGeom>
-          <a:solidFill>
-            <a:srgbClr val="1D4ED8"/>
-          </a:solidFill>
-          <a:ln/>
-        </p:spPr>
-      </p:sp>
-      <p:sp>
-        <p:nvSpPr>
-          <p:cNvPr id="11" name="Text 9"/>
-          <p:cNvSpPr/>
-          <p:nvPr/>
-        </p:nvSpPr>
-        <p:spPr>
-          <a:xfrm>
-            <a:off x="7967167" y="1755648"/>
-            <a:ext cx="3511296" cy="201168"/>
-          </a:xfrm>
-          <a:prstGeom prst="rect">
-            <a:avLst/>
-          </a:prstGeom>
-          <a:noFill/>
-          <a:ln/>
-        </p:spPr>
-        <p:txBody>
-          <a:bodyPr wrap="square" lIns="0" tIns="0" rIns="0" bIns="0" rtlCol="0" anchor="ctr"/>
-          <a:lstStyle/>
-          <a:p>
-            <a:pPr indent="0" marL="0">
-              <a:buNone/>
-            </a:pPr>
-            <a:r>
-              <a:rPr lang="en-US" sz="1050" b="1" dirty="0">
-                <a:solidFill>
-                  <a:srgbClr val="1D4ED8"/>
+          <p:cNvPr id="10" name="Text 8"/>
+          <p:cNvSpPr/>
+          <p:nvPr/>
+        </p:nvSpPr>
+        <p:spPr>
+          <a:xfrm>
+            <a:off x="566928" y="2048256"/>
+            <a:ext cx="2606040" cy="402336"/>
+          </a:xfrm>
+          <a:prstGeom prst="rect">
+            <a:avLst/>
+          </a:prstGeom>
+          <a:noFill/>
+          <a:ln/>
+        </p:spPr>
+        <p:txBody>
+          <a:bodyPr wrap="square" lIns="0" tIns="0" rIns="0" bIns="0" rtlCol="0" anchor="ctr"/>
+          <a:lstStyle/>
+          <a:p>
+            <a:pPr indent="0" marL="0">
+              <a:lnSpc>
+                <a:spcPct val="120000"/>
+              </a:lnSpc>
+              <a:buNone/>
+            </a:pPr>
+            <a:r>
+              <a:rPr lang="en-US" sz="1400" dirty="0">
+                <a:solidFill>
+                  <a:srgbClr val="718096"/>
                 </a:solidFill>
                 <a:latin typeface="Pretendard" pitchFamily="34" charset="0"/>
                 <a:ea typeface="Pretendard" pitchFamily="34" charset="-122"/>
                 <a:cs typeface="Pretendard" pitchFamily="34" charset="-120"/>
               </a:rPr>
-              <a:t>토지 및 건물 분석 포인트</a:t>
-            </a:r>
-            <a:endParaRPr lang="en-US" sz="1050" dirty="0"/>
-          </a:p>
-        </p:txBody>
-      </p:sp>
-      <p:sp>
-        <p:nvSpPr>
-          <p:cNvPr id="12" name="Text 10"/>
-          <p:cNvSpPr/>
-          <p:nvPr/>
-        </p:nvSpPr>
-        <p:spPr>
-          <a:xfrm>
-            <a:off x="7967167" y="1975104"/>
-            <a:ext cx="3511296" cy="1700784"/>
-          </a:xfrm>
-          <a:prstGeom prst="rect">
-            <a:avLst/>
-          </a:prstGeom>
-          <a:noFill/>
-          <a:ln/>
-        </p:spPr>
-        <p:txBody>
-          <a:bodyPr wrap="square" lIns="0" tIns="0" rIns="0" bIns="0" rtlCol="0" anchor="t"/>
-          <a:lstStyle/>
-          <a:p>
-            <a:pPr marL="342900" indent="-342900">
+              <a:t>층별 독점성</a:t>
+            </a:r>
+            <a:endParaRPr lang="en-US" sz="1400" dirty="0"/>
+          </a:p>
+        </p:txBody>
+      </p:sp>
+      <p:sp>
+        <p:nvSpPr>
+          <p:cNvPr id="11" name="Text 9"/>
+          <p:cNvSpPr/>
+          <p:nvPr/>
+        </p:nvSpPr>
+        <p:spPr>
+          <a:xfrm>
+            <a:off x="3172968" y="2048256"/>
+            <a:ext cx="4251960" cy="402336"/>
+          </a:xfrm>
+          <a:prstGeom prst="rect">
+            <a:avLst/>
+          </a:prstGeom>
+          <a:noFill/>
+          <a:ln/>
+        </p:spPr>
+        <p:txBody>
+          <a:bodyPr wrap="square" lIns="0" tIns="0" rIns="0" bIns="0" rtlCol="0" anchor="ctr"/>
+          <a:lstStyle/>
+          <a:p>
+            <a:pPr indent="0" marL="0">
               <a:lnSpc>
                 <a:spcPct val="120000"/>
               </a:lnSpc>
-              <a:buSzPct val="100000"/>
-              <a:buChar char="•"/>
-            </a:pPr>
-            <a:r>
-              <a:rPr lang="en-US" sz="930" dirty="0">
-                <a:solidFill>
-                  <a:srgbClr val="0F172A"/>
+              <a:buNone/>
+            </a:pPr>
+            <a:r>
+              <a:rPr lang="en-US" sz="1400" b="1" dirty="0">
+                <a:solidFill>
+                  <a:srgbClr val="10161F"/>
                 </a:solidFill>
                 <a:latin typeface="Pretendard" pitchFamily="34" charset="0"/>
                 <a:ea typeface="Pretendard" pitchFamily="34" charset="-122"/>
                 <a:cs typeface="Pretendard" pitchFamily="34" charset="-120"/>
               </a:rPr>
-              <a:t>서초대로 25m 메인 도로변 우수한 가시성 확보</a:t>
-            </a:r>
-            <a:endParaRPr lang="en-US" sz="930" dirty="0"/>
-          </a:p>
-          <a:p>
-            <a:pPr marL="342900" indent="-342900">
+              <a:t>전층 단독 사용 구조</a:t>
+            </a:r>
+            <a:endParaRPr lang="en-US" sz="1400" dirty="0"/>
+          </a:p>
+        </p:txBody>
+      </p:sp>
+      <p:sp>
+        <p:nvSpPr>
+          <p:cNvPr id="12" name="Shape 10"/>
+          <p:cNvSpPr/>
+          <p:nvPr/>
+        </p:nvSpPr>
+        <p:spPr>
+          <a:xfrm>
+            <a:off x="566928" y="2450592"/>
+            <a:ext cx="6858000" cy="0"/>
+          </a:xfrm>
+          <a:prstGeom prst="line">
+            <a:avLst/>
+          </a:prstGeom>
+          <a:noFill/>
+          <a:ln w="3810">
+            <a:solidFill>
+              <a:srgbClr val="CBD5E0"/>
+            </a:solidFill>
+            <a:prstDash val="solid"/>
+          </a:ln>
+        </p:spPr>
+      </p:sp>
+      <p:sp>
+        <p:nvSpPr>
+          <p:cNvPr id="13" name="Text 11"/>
+          <p:cNvSpPr/>
+          <p:nvPr/>
+        </p:nvSpPr>
+        <p:spPr>
+          <a:xfrm>
+            <a:off x="566928" y="2450592"/>
+            <a:ext cx="2606040" cy="402336"/>
+          </a:xfrm>
+          <a:prstGeom prst="rect">
+            <a:avLst/>
+          </a:prstGeom>
+          <a:noFill/>
+          <a:ln/>
+        </p:spPr>
+        <p:txBody>
+          <a:bodyPr wrap="square" lIns="0" tIns="0" rIns="0" bIns="0" rtlCol="0" anchor="ctr"/>
+          <a:lstStyle/>
+          <a:p>
+            <a:pPr indent="0" marL="0">
               <a:lnSpc>
                 <a:spcPct val="120000"/>
               </a:lnSpc>
-              <a:buSzPct val="100000"/>
-              <a:buChar char="•"/>
-            </a:pPr>
-            <a:r>
-              <a:rPr lang="en-US" sz="930" dirty="0">
-                <a:solidFill>
-                  <a:srgbClr val="0F172A"/>
+              <a:buNone/>
+            </a:pPr>
+            <a:r>
+              <a:rPr lang="en-US" sz="1400" dirty="0">
+                <a:solidFill>
+                  <a:srgbClr val="718096"/>
                 </a:solidFill>
                 <a:latin typeface="Pretendard" pitchFamily="34" charset="0"/>
                 <a:ea typeface="Pretendard" pitchFamily="34" charset="-122"/>
                 <a:cs typeface="Pretendard" pitchFamily="34" charset="-120"/>
               </a:rPr>
-              <a:t>제3종일반주거지역 법정 용적률 완비 자산</a:t>
-            </a:r>
-            <a:endParaRPr lang="en-US" sz="930" dirty="0"/>
-          </a:p>
-          <a:p>
-            <a:pPr marL="342900" indent="-342900">
+              <a:t>주차 및 접근성</a:t>
+            </a:r>
+            <a:endParaRPr lang="en-US" sz="1400" dirty="0"/>
+          </a:p>
+        </p:txBody>
+      </p:sp>
+      <p:sp>
+        <p:nvSpPr>
+          <p:cNvPr id="14" name="Text 12"/>
+          <p:cNvSpPr/>
+          <p:nvPr/>
+        </p:nvSpPr>
+        <p:spPr>
+          <a:xfrm>
+            <a:off x="3172968" y="2450592"/>
+            <a:ext cx="4251960" cy="402336"/>
+          </a:xfrm>
+          <a:prstGeom prst="rect">
+            <a:avLst/>
+          </a:prstGeom>
+          <a:noFill/>
+          <a:ln/>
+        </p:spPr>
+        <p:txBody>
+          <a:bodyPr wrap="square" lIns="0" tIns="0" rIns="0" bIns="0" rtlCol="0" anchor="ctr"/>
+          <a:lstStyle/>
+          <a:p>
+            <a:pPr indent="0" marL="0">
               <a:lnSpc>
                 <a:spcPct val="120000"/>
               </a:lnSpc>
-              <a:buSzPct val="100000"/>
-              <a:buChar char="•"/>
-            </a:pPr>
-            <a:r>
-              <a:rPr lang="en-US" sz="930" dirty="0">
-                <a:solidFill>
-                  <a:srgbClr val="0F172A"/>
+              <a:buNone/>
+            </a:pPr>
+            <a:r>
+              <a:rPr lang="en-US" sz="1400" b="1" dirty="0">
+                <a:solidFill>
+                  <a:srgbClr val="10161F"/>
                 </a:solidFill>
                 <a:latin typeface="Pretendard" pitchFamily="34" charset="0"/>
                 <a:ea typeface="Pretendard" pitchFamily="34" charset="-122"/>
                 <a:cs typeface="Pretendard" pitchFamily="34" charset="-120"/>
               </a:rPr>
-              <a:t>침대용 승강기 완비로 병의원 입점 최적화 구조</a:t>
-            </a:r>
-            <a:endParaRPr lang="en-US" sz="930" dirty="0"/>
-          </a:p>
-        </p:txBody>
-      </p:sp>
-      <p:sp>
-        <p:nvSpPr>
-          <p:cNvPr id="13" name="Shape 11"/>
-          <p:cNvSpPr/>
-          <p:nvPr/>
-        </p:nvSpPr>
-        <p:spPr>
-          <a:xfrm>
-            <a:off x="7784287" y="3977640"/>
-            <a:ext cx="3840480" cy="2148840"/>
-          </a:xfrm>
-          <a:prstGeom prst="roundRect">
-            <a:avLst>
-              <a:gd name="adj" fmla="val 2553"/>
-            </a:avLst>
-          </a:prstGeom>
-          <a:solidFill>
-            <a:srgbClr val="DBEAFE"/>
-          </a:solidFill>
-          <a:ln/>
-        </p:spPr>
-      </p:sp>
-      <p:sp>
-        <p:nvSpPr>
-          <p:cNvPr id="14" name="Shape 12"/>
-          <p:cNvSpPr/>
-          <p:nvPr/>
-        </p:nvSpPr>
-        <p:spPr>
-          <a:xfrm>
-            <a:off x="7784287" y="4032504"/>
-            <a:ext cx="36576" cy="2039112"/>
-          </a:xfrm>
-          <a:prstGeom prst="rect">
-            <a:avLst/>
-          </a:prstGeom>
-          <a:solidFill>
-            <a:srgbClr val="1D4ED8"/>
-          </a:solidFill>
-          <a:ln/>
-        </p:spPr>
-      </p:sp>
-      <p:sp>
-        <p:nvSpPr>
-          <p:cNvPr id="15" name="Text 13"/>
-          <p:cNvSpPr/>
-          <p:nvPr/>
-        </p:nvSpPr>
-        <p:spPr>
-          <a:xfrm>
-            <a:off x="7967167" y="4087368"/>
-            <a:ext cx="3511296" cy="201168"/>
-          </a:xfrm>
-          <a:prstGeom prst="rect">
-            <a:avLst/>
-          </a:prstGeom>
-          <a:noFill/>
-          <a:ln/>
-        </p:spPr>
-        <p:txBody>
-          <a:bodyPr wrap="square" lIns="0" tIns="0" rIns="0" bIns="0" rtlCol="0" anchor="ctr"/>
-          <a:lstStyle/>
-          <a:p>
-            <a:pPr indent="0" marL="0">
-              <a:buNone/>
-            </a:pPr>
-            <a:r>
-              <a:rPr lang="en-US" sz="1050" b="1" dirty="0">
-                <a:solidFill>
-                  <a:srgbClr val="1D4ED8"/>
+              <a:t>지상/지하 주차 및 대중교통 우수</a:t>
+            </a:r>
+            <a:endParaRPr lang="en-US" sz="1400" dirty="0"/>
+          </a:p>
+        </p:txBody>
+      </p:sp>
+      <p:sp>
+        <p:nvSpPr>
+          <p:cNvPr id="15" name="Shape 13"/>
+          <p:cNvSpPr/>
+          <p:nvPr/>
+        </p:nvSpPr>
+        <p:spPr>
+          <a:xfrm>
+            <a:off x="566928" y="2852928"/>
+            <a:ext cx="6858000" cy="0"/>
+          </a:xfrm>
+          <a:prstGeom prst="line">
+            <a:avLst/>
+          </a:prstGeom>
+          <a:noFill/>
+          <a:ln w="3810">
+            <a:solidFill>
+              <a:srgbClr val="CBD5E0"/>
+            </a:solidFill>
+            <a:prstDash val="solid"/>
+          </a:ln>
+        </p:spPr>
+      </p:sp>
+      <p:sp>
+        <p:nvSpPr>
+          <p:cNvPr id="16" name="Text 14"/>
+          <p:cNvSpPr/>
+          <p:nvPr/>
+        </p:nvSpPr>
+        <p:spPr>
+          <a:xfrm>
+            <a:off x="566928" y="2852928"/>
+            <a:ext cx="2606040" cy="402336"/>
+          </a:xfrm>
+          <a:prstGeom prst="rect">
+            <a:avLst/>
+          </a:prstGeom>
+          <a:noFill/>
+          <a:ln/>
+        </p:spPr>
+        <p:txBody>
+          <a:bodyPr wrap="square" lIns="0" tIns="0" rIns="0" bIns="0" rtlCol="0" anchor="ctr"/>
+          <a:lstStyle/>
+          <a:p>
+            <a:pPr indent="0" marL="0">
+              <a:lnSpc>
+                <a:spcPct val="120000"/>
+              </a:lnSpc>
+              <a:buNone/>
+            </a:pPr>
+            <a:r>
+              <a:rPr lang="en-US" sz="1400" dirty="0">
+                <a:solidFill>
+                  <a:srgbClr val="718096"/>
                 </a:solidFill>
                 <a:latin typeface="Pretendard" pitchFamily="34" charset="0"/>
                 <a:ea typeface="Pretendard" pitchFamily="34" charset="-122"/>
                 <a:cs typeface="Pretendard" pitchFamily="34" charset="-120"/>
               </a:rPr>
-              <a:t>물건 실사 및 관리 상태</a:t>
-            </a:r>
-            <a:endParaRPr lang="en-US" sz="1050" dirty="0"/>
-          </a:p>
-        </p:txBody>
-      </p:sp>
-      <p:sp>
-        <p:nvSpPr>
-          <p:cNvPr id="16" name="Text 14"/>
-          <p:cNvSpPr/>
-          <p:nvPr/>
-        </p:nvSpPr>
-        <p:spPr>
-          <a:xfrm>
-            <a:off x="7967167" y="4306824"/>
-            <a:ext cx="3511296" cy="1746504"/>
-          </a:xfrm>
-          <a:prstGeom prst="rect">
-            <a:avLst/>
-          </a:prstGeom>
-          <a:noFill/>
-          <a:ln/>
-        </p:spPr>
-        <p:txBody>
-          <a:bodyPr wrap="square" lIns="0" tIns="0" rIns="0" bIns="0" rtlCol="0" anchor="t"/>
-          <a:lstStyle/>
-          <a:p>
-            <a:pPr marL="342900" indent="-342900">
+              <a:t>파사드 브랜딩</a:t>
+            </a:r>
+            <a:endParaRPr lang="en-US" sz="1400" dirty="0"/>
+          </a:p>
+        </p:txBody>
+      </p:sp>
+      <p:sp>
+        <p:nvSpPr>
+          <p:cNvPr id="17" name="Text 15"/>
+          <p:cNvSpPr/>
+          <p:nvPr/>
+        </p:nvSpPr>
+        <p:spPr>
+          <a:xfrm>
+            <a:off x="3172968" y="2852928"/>
+            <a:ext cx="4251960" cy="402336"/>
+          </a:xfrm>
+          <a:prstGeom prst="rect">
+            <a:avLst/>
+          </a:prstGeom>
+          <a:noFill/>
+          <a:ln/>
+        </p:spPr>
+        <p:txBody>
+          <a:bodyPr wrap="square" lIns="0" tIns="0" rIns="0" bIns="0" rtlCol="0" anchor="ctr"/>
+          <a:lstStyle/>
+          <a:p>
+            <a:pPr indent="0" marL="0">
               <a:lnSpc>
                 <a:spcPct val="120000"/>
               </a:lnSpc>
-              <a:buSzPct val="100000"/>
-              <a:buChar char="•"/>
-            </a:pPr>
-            <a:r>
-              <a:rPr lang="en-US" sz="930" dirty="0">
-                <a:solidFill>
-                  <a:srgbClr val="0F172A"/>
+              <a:buNone/>
+            </a:pPr>
+            <a:r>
+              <a:rPr lang="en-US" sz="1400" b="1" dirty="0">
+                <a:solidFill>
+                  <a:srgbClr val="10161F"/>
                 </a:solidFill>
                 <a:latin typeface="Pretendard" pitchFamily="34" charset="0"/>
                 <a:ea typeface="Pretendard" pitchFamily="34" charset="-122"/>
                 <a:cs typeface="Pretendard" pitchFamily="34" charset="-120"/>
               </a:rPr>
-              <a:t>2017년 준공 신축급 상태로 누수·균열 0건</a:t>
-            </a:r>
-            <a:endParaRPr lang="en-US" sz="930" dirty="0"/>
-          </a:p>
-          <a:p>
-            <a:pPr marL="342900" indent="-342900">
+              <a:t>사옥 전면 간판 설치 가능</a:t>
+            </a:r>
+            <a:endParaRPr lang="en-US" sz="1400" dirty="0"/>
+          </a:p>
+        </p:txBody>
+      </p:sp>
+      <p:sp>
+        <p:nvSpPr>
+          <p:cNvPr id="18" name="Shape 16"/>
+          <p:cNvSpPr/>
+          <p:nvPr/>
+        </p:nvSpPr>
+        <p:spPr>
+          <a:xfrm>
+            <a:off x="7604608" y="1371600"/>
+            <a:ext cx="0" cy="4754880"/>
+          </a:xfrm>
+          <a:prstGeom prst="line">
+            <a:avLst/>
+          </a:prstGeom>
+          <a:noFill/>
+          <a:ln w="8890">
+            <a:solidFill>
+              <a:srgbClr val="B98A2E"/>
+            </a:solidFill>
+            <a:prstDash val="solid"/>
+          </a:ln>
+        </p:spPr>
+      </p:sp>
+      <p:sp>
+        <p:nvSpPr>
+          <p:cNvPr id="19" name="Shape 17"/>
+          <p:cNvSpPr/>
+          <p:nvPr/>
+        </p:nvSpPr>
+        <p:spPr>
+          <a:xfrm>
+            <a:off x="7784287" y="1645920"/>
+            <a:ext cx="3840480" cy="1810512"/>
+          </a:xfrm>
+          <a:prstGeom prst="roundRect">
+            <a:avLst>
+              <a:gd name="adj" fmla="val 3030"/>
+            </a:avLst>
+          </a:prstGeom>
+          <a:solidFill>
+            <a:srgbClr val="F3EBDA"/>
+          </a:solidFill>
+          <a:ln/>
+        </p:spPr>
+      </p:sp>
+      <p:sp>
+        <p:nvSpPr>
+          <p:cNvPr id="20" name="Shape 18"/>
+          <p:cNvSpPr/>
+          <p:nvPr/>
+        </p:nvSpPr>
+        <p:spPr>
+          <a:xfrm>
+            <a:off x="7784287" y="1700784"/>
+            <a:ext cx="36576" cy="1700784"/>
+          </a:xfrm>
+          <a:prstGeom prst="rect">
+            <a:avLst/>
+          </a:prstGeom>
+          <a:solidFill>
+            <a:srgbClr val="977024"/>
+          </a:solidFill>
+          <a:ln/>
+        </p:spPr>
+      </p:sp>
+      <p:sp>
+        <p:nvSpPr>
+          <p:cNvPr id="21" name="Text 19"/>
+          <p:cNvSpPr/>
+          <p:nvPr/>
+        </p:nvSpPr>
+        <p:spPr>
+          <a:xfrm>
+            <a:off x="7967167" y="1755648"/>
+            <a:ext cx="3511296" cy="201168"/>
+          </a:xfrm>
+          <a:prstGeom prst="rect">
+            <a:avLst/>
+          </a:prstGeom>
+          <a:noFill/>
+          <a:ln/>
+        </p:spPr>
+        <p:txBody>
+          <a:bodyPr wrap="square" lIns="0" tIns="0" rIns="0" bIns="0" rtlCol="0" anchor="ctr"/>
+          <a:lstStyle/>
+          <a:p>
+            <a:pPr indent="0" marL="0">
+              <a:buNone/>
+            </a:pPr>
+            <a:endParaRPr lang="en-US" sz="1050" dirty="0"/>
+          </a:p>
+        </p:txBody>
+      </p:sp>
+      <p:sp>
+        <p:nvSpPr>
+          <p:cNvPr id="22" name="Text 20"/>
+          <p:cNvSpPr/>
+          <p:nvPr/>
+        </p:nvSpPr>
+        <p:spPr>
+          <a:xfrm>
+            <a:off x="7967167" y="1975104"/>
+            <a:ext cx="3511296" cy="1408176"/>
+          </a:xfrm>
+          <a:prstGeom prst="rect">
+            <a:avLst/>
+          </a:prstGeom>
+          <a:noFill/>
+          <a:ln/>
+        </p:spPr>
+        <p:txBody>
+          <a:bodyPr wrap="square" lIns="0" tIns="0" rIns="0" bIns="0" rtlCol="0" anchor="t"/>
+          <a:lstStyle/>
+          <a:p>
+            <a:pPr indent="0" marL="0">
               <a:lnSpc>
                 <a:spcPct val="120000"/>
               </a:lnSpc>
-              <a:buSzPct val="100000"/>
-              <a:buChar char="•"/>
+              <a:buNone/>
             </a:pPr>
             <a:r>
               <a:rPr lang="en-US" sz="930" dirty="0">
                 <a:solidFill>
-                  <a:srgbClr val="0F172A"/>
+                  <a:srgbClr val="10161F"/>
                 </a:solidFill>
                 <a:latin typeface="Pretendard" pitchFamily="34" charset="0"/>
                 <a:ea typeface="Pretendard" pitchFamily="34" charset="-122"/>
                 <a:cs typeface="Pretendard" pitchFamily="34" charset="-120"/>
               </a:rPr>
-              <a:t>단독 법인 소유로 권리관계 투명</a:t>
+              <a:t>본 자산은 연면적 약 1513평(약 5001.7㎡) (대지 약 303평(약 1001.7㎡)) 규모로, 본사 사옥 및 대형 사업장 입주에 적합한 공간 스펙을 갖추고 있습니다.</a:t>
             </a:r>
             <a:endParaRPr lang="en-US" sz="930" dirty="0"/>
           </a:p>
-          <a:p>
-            <a:pPr marL="342900" indent="-342900">
+        </p:txBody>
+      </p:sp>
+      <p:sp>
+        <p:nvSpPr>
+          <p:cNvPr id="23" name="Shape 21"/>
+          <p:cNvSpPr/>
+          <p:nvPr/>
+        </p:nvSpPr>
+        <p:spPr>
+          <a:xfrm>
+            <a:off x="7784287" y="3657600"/>
+            <a:ext cx="3840480" cy="1645920"/>
+          </a:xfrm>
+          <a:prstGeom prst="roundRect">
+            <a:avLst>
+              <a:gd name="adj" fmla="val 3333"/>
+            </a:avLst>
+          </a:prstGeom>
+          <a:solidFill>
+            <a:srgbClr val="BEE3F8"/>
+          </a:solidFill>
+          <a:ln/>
+        </p:spPr>
+      </p:sp>
+      <p:sp>
+        <p:nvSpPr>
+          <p:cNvPr id="24" name="Shape 22"/>
+          <p:cNvSpPr/>
+          <p:nvPr/>
+        </p:nvSpPr>
+        <p:spPr>
+          <a:xfrm>
+            <a:off x="7784287" y="3712464"/>
+            <a:ext cx="36576" cy="1536192"/>
+          </a:xfrm>
+          <a:prstGeom prst="rect">
+            <a:avLst/>
+          </a:prstGeom>
+          <a:solidFill>
+            <a:srgbClr val="2B6CB0"/>
+          </a:solidFill>
+          <a:ln/>
+        </p:spPr>
+      </p:sp>
+      <p:sp>
+        <p:nvSpPr>
+          <p:cNvPr id="25" name="Text 23"/>
+          <p:cNvSpPr/>
+          <p:nvPr/>
+        </p:nvSpPr>
+        <p:spPr>
+          <a:xfrm>
+            <a:off x="7967167" y="3767328"/>
+            <a:ext cx="3511296" cy="201168"/>
+          </a:xfrm>
+          <a:prstGeom prst="rect">
+            <a:avLst/>
+          </a:prstGeom>
+          <a:noFill/>
+          <a:ln/>
+        </p:spPr>
+        <p:txBody>
+          <a:bodyPr wrap="square" lIns="0" tIns="0" rIns="0" bIns="0" rtlCol="0" anchor="ctr"/>
+          <a:lstStyle/>
+          <a:p>
+            <a:pPr indent="0" marL="0">
+              <a:buNone/>
+            </a:pPr>
+            <a:endParaRPr lang="en-US" sz="1050" dirty="0"/>
+          </a:p>
+        </p:txBody>
+      </p:sp>
+      <p:sp>
+        <p:nvSpPr>
+          <p:cNvPr id="26" name="Text 24"/>
+          <p:cNvSpPr/>
+          <p:nvPr/>
+        </p:nvSpPr>
+        <p:spPr>
+          <a:xfrm>
+            <a:off x="7967167" y="3986784"/>
+            <a:ext cx="3511296" cy="1243584"/>
+          </a:xfrm>
+          <a:prstGeom prst="rect">
+            <a:avLst/>
+          </a:prstGeom>
+          <a:noFill/>
+          <a:ln/>
+        </p:spPr>
+        <p:txBody>
+          <a:bodyPr wrap="square" lIns="0" tIns="0" rIns="0" bIns="0" rtlCol="0" anchor="t"/>
+          <a:lstStyle/>
+          <a:p>
+            <a:pPr indent="0" marL="0">
               <a:lnSpc>
                 <a:spcPct val="120000"/>
               </a:lnSpc>
-              <a:buSzPct val="100000"/>
-              <a:buChar char="•"/>
+              <a:buNone/>
             </a:pPr>
             <a:r>
               <a:rPr lang="en-US" sz="930" dirty="0">
                 <a:solidFill>
-                  <a:srgbClr val="0F172A"/>
+                  <a:srgbClr val="10161F"/>
                 </a:solidFill>
                 <a:latin typeface="Pretendard" pitchFamily="34" charset="0"/>
                 <a:ea typeface="Pretendard" pitchFamily="34" charset="-122"/>
                 <a:cs typeface="Pretendard" pitchFamily="34" charset="-120"/>
               </a:rPr>
-              <a:t>1금융권 담보대출 85억 원 승계 적격</a:t>
+              <a:t>[참고] 사옥 이전 시 브랜딩 가치 향상 및 장기 사옥 소요 충족이 가능합니다.</a:t>
             </a:r>
             <a:endParaRPr lang="en-US" sz="930" dirty="0"/>
           </a:p>
@@ -5677,65 +6719,81 @@
       </p:sp>
       <p:sp>
         <p:nvSpPr>
-          <p:cNvPr id="17" name="Text 15"/>
-          <p:cNvSpPr/>
-          <p:nvPr/>
-        </p:nvSpPr>
-        <p:spPr>
-          <a:xfrm>
-            <a:off x="566928" y="6419088"/>
-            <a:ext cx="11057839" cy="201168"/>
-          </a:xfrm>
-          <a:prstGeom prst="rect">
-            <a:avLst/>
-          </a:prstGeom>
-          <a:noFill/>
-          <a:ln/>
-        </p:spPr>
-        <p:txBody>
-          <a:bodyPr wrap="square" lIns="0" tIns="0" rIns="0" bIns="0" rtlCol="0" anchor="ctr"/>
-          <a:lstStyle/>
-          <a:p>
-            <a:pPr algn="ctr" indent="0" marL="0">
-              <a:buNone/>
-            </a:pPr>
-            <a:r>
-              <a:rPr lang="en-US" sz="750" dirty="0">
-                <a:solidFill>
-                  <a:srgbClr val="64748B"/>
+          <p:cNvPr id="27" name="Text 25"/>
+          <p:cNvSpPr/>
+          <p:nvPr/>
+        </p:nvSpPr>
+        <p:spPr>
+          <a:xfrm>
+            <a:off x="566928" y="6382512"/>
+            <a:ext cx="7315200" cy="219456"/>
+          </a:xfrm>
+          <a:prstGeom prst="rect">
+            <a:avLst/>
+          </a:prstGeom>
+          <a:noFill/>
+          <a:ln/>
+        </p:spPr>
+        <p:txBody>
+          <a:bodyPr wrap="square" lIns="0" tIns="0" rIns="0" bIns="0" rtlCol="0" anchor="ctr"/>
+          <a:lstStyle/>
+          <a:p>
+            <a:pPr indent="0" marL="0">
+              <a:buNone/>
+            </a:pPr>
+            <a:r>
+              <a:rPr lang="en-US" sz="800" dirty="0">
+                <a:solidFill>
+                  <a:srgbClr val="718096"/>
                 </a:solidFill>
                 <a:latin typeface="Pretendard" pitchFamily="34" charset="0"/>
                 <a:ea typeface="Pretendard" pitchFamily="34" charset="-122"/>
                 <a:cs typeface="Pretendard" pitchFamily="34" charset="-120"/>
               </a:rPr>
-              <a:t>크리딜  ·    ·  5</a:t>
-            </a:r>
-            <a:endParaRPr lang="en-US" sz="750" dirty="0"/>
-          </a:p>
-        </p:txBody>
-      </p:sp>
-      <p:sp>
-        <p:nvSpPr>
-          <p:cNvPr id="18" name="Shape 16"/>
-          <p:cNvSpPr/>
-          <p:nvPr/>
-        </p:nvSpPr>
-        <p:spPr>
-          <a:xfrm>
-            <a:off x="4437172" y="6382512"/>
-            <a:ext cx="3317352" cy="0"/>
-          </a:xfrm>
-          <a:prstGeom prst="line">
-            <a:avLst/>
-          </a:prstGeom>
-          <a:noFill/>
-          <a:ln w="6350">
-            <a:solidFill>
-              <a:srgbClr val="6B8E00"/>
-            </a:solidFill>
-            <a:prstDash val="solid"/>
-          </a:ln>
-        </p:spPr>
+              <a:t>크리딜   |   </a:t>
+            </a:r>
+            <a:endParaRPr lang="en-US" sz="800" dirty="0"/>
+          </a:p>
+        </p:txBody>
+      </p:sp>
+      <p:sp>
+        <p:nvSpPr>
+          <p:cNvPr id="28" name="Text 26"/>
+          <p:cNvSpPr/>
+          <p:nvPr/>
+        </p:nvSpPr>
+        <p:spPr>
+          <a:xfrm>
+            <a:off x="10710367" y="6382512"/>
+            <a:ext cx="914400" cy="219456"/>
+          </a:xfrm>
+          <a:prstGeom prst="rect">
+            <a:avLst/>
+          </a:prstGeom>
+          <a:noFill/>
+          <a:ln/>
+        </p:spPr>
+        <p:txBody>
+          <a:bodyPr wrap="square" lIns="0" tIns="0" rIns="0" bIns="0" rtlCol="0" anchor="ctr"/>
+          <a:lstStyle/>
+          <a:p>
+            <a:pPr algn="r" indent="0" marL="0">
+              <a:buNone/>
+            </a:pPr>
+            <a:r>
+              <a:rPr lang="en-US" sz="900" b="1" dirty="0">
+                <a:solidFill>
+                  <a:srgbClr val="B98A2E"/>
+                </a:solidFill>
+                <a:latin typeface="Arial" pitchFamily="34" charset="0"/>
+                <a:ea typeface="Arial" pitchFamily="34" charset="-122"/>
+                <a:cs typeface="Arial" pitchFamily="34" charset="-120"/>
+              </a:rPr>
+              <a:t>5</a:t>
+            </a:r>
+            <a:endParaRPr lang="en-US" sz="900" dirty="0"/>
+          </a:p>
+        </p:txBody>
       </p:sp>
     </p:spTree>
   </p:cSld>
@@ -5777,14 +6835,14 @@
         </p:nvSpPr>
         <p:spPr>
           <a:xfrm>
-            <a:off x="566928" y="384048"/>
-            <a:ext cx="45720" cy="566928"/>
-          </a:xfrm>
-          <a:prstGeom prst="rect">
+            <a:off x="566928" y="457200"/>
+            <a:ext cx="384048" cy="384048"/>
+          </a:xfrm>
+          <a:prstGeom prst="ellipse">
             <a:avLst/>
           </a:prstGeom>
           <a:solidFill>
-            <a:srgbClr val="6B8E00"/>
+            <a:srgbClr val="B98A2E"/>
           </a:solidFill>
           <a:ln/>
         </p:spPr>
@@ -5797,32 +6855,71 @@
         </p:nvSpPr>
         <p:spPr>
           <a:xfrm>
-            <a:off x="749808" y="384048"/>
-            <a:ext cx="10874959" cy="182880"/>
-          </a:xfrm>
-          <a:prstGeom prst="rect">
-            <a:avLst/>
-          </a:prstGeom>
-          <a:noFill/>
-          <a:ln/>
-        </p:spPr>
-        <p:txBody>
-          <a:bodyPr wrap="square" lIns="0" tIns="0" rIns="0" bIns="0" rtlCol="0" anchor="ctr"/>
-          <a:lstStyle/>
-          <a:p>
-            <a:pPr indent="0" marL="0">
-              <a:buNone/>
-            </a:pPr>
-            <a:r>
-              <a:rPr lang="en-US" sz="950" b="1" spc="200" kern="0" dirty="0">
-                <a:solidFill>
-                  <a:srgbClr val="6B8E00"/>
+            <a:off x="566928" y="457200"/>
+            <a:ext cx="384048" cy="384048"/>
+          </a:xfrm>
+          <a:prstGeom prst="rect">
+            <a:avLst/>
+          </a:prstGeom>
+          <a:noFill/>
+          <a:ln/>
+        </p:spPr>
+        <p:txBody>
+          <a:bodyPr wrap="square" lIns="0" tIns="0" rIns="0" bIns="0" rtlCol="0" anchor="ctr"/>
+          <a:lstStyle/>
+          <a:p>
+            <a:pPr algn="ctr" indent="0" marL="0">
+              <a:buNone/>
+            </a:pPr>
+            <a:r>
+              <a:rPr lang="en-US" sz="1300" b="1" dirty="0">
+                <a:solidFill>
+                  <a:srgbClr val="FFFFFF"/>
                 </a:solidFill>
                 <a:latin typeface="Arial" pitchFamily="34" charset="0"/>
                 <a:ea typeface="Arial" pitchFamily="34" charset="-122"/>
                 <a:cs typeface="Arial" pitchFamily="34" charset="-120"/>
               </a:rPr>
-              <a:t>06  Vs Lease</a:t>
+              <a:t>06</a:t>
+            </a:r>
+            <a:endParaRPr lang="en-US" sz="1300" dirty="0"/>
+          </a:p>
+        </p:txBody>
+      </p:sp>
+      <p:sp>
+        <p:nvSpPr>
+          <p:cNvPr id="4" name="Text 2"/>
+          <p:cNvSpPr/>
+          <p:nvPr/>
+        </p:nvSpPr>
+        <p:spPr>
+          <a:xfrm>
+            <a:off x="1133856" y="457200"/>
+            <a:ext cx="10490911" cy="182880"/>
+          </a:xfrm>
+          <a:prstGeom prst="rect">
+            <a:avLst/>
+          </a:prstGeom>
+          <a:noFill/>
+          <a:ln/>
+        </p:spPr>
+        <p:txBody>
+          <a:bodyPr wrap="square" lIns="0" tIns="0" rIns="0" bIns="0" rtlCol="0" anchor="ctr"/>
+          <a:lstStyle/>
+          <a:p>
+            <a:pPr indent="0" marL="0">
+              <a:buNone/>
+            </a:pPr>
+            <a:r>
+              <a:rPr lang="en-US" sz="950" b="1" spc="200" kern="0" dirty="0">
+                <a:solidFill>
+                  <a:srgbClr val="B98A2E"/>
+                </a:solidFill>
+                <a:latin typeface="Arial" pitchFamily="34" charset="0"/>
+                <a:ea typeface="Arial" pitchFamily="34" charset="-122"/>
+                <a:cs typeface="Arial" pitchFamily="34" charset="-120"/>
+              </a:rPr>
+              <a:t>Vs Lease</a:t>
             </a:r>
             <a:endParaRPr lang="en-US" sz="950" dirty="0"/>
           </a:p>
@@ -5830,32 +6927,32 @@
       </p:sp>
       <p:sp>
         <p:nvSpPr>
-          <p:cNvPr id="4" name="Text 2"/>
-          <p:cNvSpPr/>
-          <p:nvPr/>
-        </p:nvSpPr>
-        <p:spPr>
-          <a:xfrm>
-            <a:off x="749808" y="566928"/>
-            <a:ext cx="10874959" cy="384048"/>
-          </a:xfrm>
-          <a:prstGeom prst="rect">
-            <a:avLst/>
-          </a:prstGeom>
-          <a:noFill/>
-          <a:ln/>
-        </p:spPr>
-        <p:txBody>
-          <a:bodyPr wrap="square" lIns="0" tIns="0" rIns="0" bIns="0" rtlCol="0" anchor="ctr"/>
-          <a:lstStyle/>
-          <a:p>
-            <a:pPr indent="0" marL="0">
-              <a:buNone/>
-            </a:pPr>
-            <a:r>
-              <a:rPr lang="en-US" sz="2200" b="1" dirty="0">
-                <a:solidFill>
-                  <a:srgbClr val="0F172A"/>
+          <p:cNvPr id="5" name="Text 3"/>
+          <p:cNvSpPr/>
+          <p:nvPr/>
+        </p:nvSpPr>
+        <p:spPr>
+          <a:xfrm>
+            <a:off x="1133856" y="640080"/>
+            <a:ext cx="10490911" cy="365760"/>
+          </a:xfrm>
+          <a:prstGeom prst="rect">
+            <a:avLst/>
+          </a:prstGeom>
+          <a:noFill/>
+          <a:ln/>
+        </p:spPr>
+        <p:txBody>
+          <a:bodyPr wrap="square" lIns="0" tIns="0" rIns="0" bIns="0" rtlCol="0" anchor="ctr"/>
+          <a:lstStyle/>
+          <a:p>
+            <a:pPr indent="0" marL="0">
+              <a:buNone/>
+            </a:pPr>
+            <a:r>
+              <a:rPr lang="en-US" sz="2300" b="1" dirty="0">
+                <a:solidFill>
+                  <a:srgbClr val="10161F"/>
                 </a:solidFill>
                 <a:latin typeface="Pretendard" pitchFamily="34" charset="0"/>
                 <a:ea typeface="Pretendard" pitchFamily="34" charset="-122"/>
@@ -5863,75 +6960,91 @@
               </a:rPr>
               <a:t>자가 사용 vs 임차 유지, 무엇이 유리한가</a:t>
             </a:r>
-            <a:endParaRPr lang="en-US" sz="2200" dirty="0"/>
-          </a:p>
-        </p:txBody>
-      </p:sp>
-      <p:sp>
-        <p:nvSpPr>
-          <p:cNvPr id="5" name="Text 3"/>
-          <p:cNvSpPr/>
-          <p:nvPr/>
-        </p:nvSpPr>
-        <p:spPr>
-          <a:xfrm>
-            <a:off x="566928" y="6419088"/>
-            <a:ext cx="11057839" cy="201168"/>
-          </a:xfrm>
-          <a:prstGeom prst="rect">
-            <a:avLst/>
-          </a:prstGeom>
-          <a:noFill/>
-          <a:ln/>
-        </p:spPr>
-        <p:txBody>
-          <a:bodyPr wrap="square" lIns="0" tIns="0" rIns="0" bIns="0" rtlCol="0" anchor="ctr"/>
-          <a:lstStyle/>
-          <a:p>
-            <a:pPr algn="ctr" indent="0" marL="0">
-              <a:buNone/>
-            </a:pPr>
-            <a:r>
-              <a:rPr lang="en-US" sz="750" dirty="0">
-                <a:solidFill>
-                  <a:srgbClr val="64748B"/>
+            <a:endParaRPr lang="en-US" sz="2300" dirty="0"/>
+          </a:p>
+        </p:txBody>
+      </p:sp>
+      <p:sp>
+        <p:nvSpPr>
+          <p:cNvPr id="6" name="Text 4"/>
+          <p:cNvSpPr/>
+          <p:nvPr/>
+        </p:nvSpPr>
+        <p:spPr>
+          <a:xfrm>
+            <a:off x="566928" y="6382512"/>
+            <a:ext cx="7315200" cy="219456"/>
+          </a:xfrm>
+          <a:prstGeom prst="rect">
+            <a:avLst/>
+          </a:prstGeom>
+          <a:noFill/>
+          <a:ln/>
+        </p:spPr>
+        <p:txBody>
+          <a:bodyPr wrap="square" lIns="0" tIns="0" rIns="0" bIns="0" rtlCol="0" anchor="ctr"/>
+          <a:lstStyle/>
+          <a:p>
+            <a:pPr indent="0" marL="0">
+              <a:buNone/>
+            </a:pPr>
+            <a:r>
+              <a:rPr lang="en-US" sz="800" dirty="0">
+                <a:solidFill>
+                  <a:srgbClr val="718096"/>
                 </a:solidFill>
                 <a:latin typeface="Pretendard" pitchFamily="34" charset="0"/>
                 <a:ea typeface="Pretendard" pitchFamily="34" charset="-122"/>
                 <a:cs typeface="Pretendard" pitchFamily="34" charset="-120"/>
               </a:rPr>
-              <a:t>크리딜  ·    ·  6</a:t>
-            </a:r>
-            <a:endParaRPr lang="en-US" sz="750" dirty="0"/>
-          </a:p>
-        </p:txBody>
-      </p:sp>
-      <p:sp>
-        <p:nvSpPr>
-          <p:cNvPr id="6" name="Shape 4"/>
-          <p:cNvSpPr/>
-          <p:nvPr/>
-        </p:nvSpPr>
-        <p:spPr>
-          <a:xfrm>
-            <a:off x="4437172" y="6382512"/>
-            <a:ext cx="3317352" cy="0"/>
-          </a:xfrm>
-          <a:prstGeom prst="line">
-            <a:avLst/>
-          </a:prstGeom>
-          <a:noFill/>
-          <a:ln w="6350">
-            <a:solidFill>
-              <a:srgbClr val="6B8E00"/>
-            </a:solidFill>
-            <a:prstDash val="solid"/>
-          </a:ln>
-        </p:spPr>
+              <a:t>크리딜   |   </a:t>
+            </a:r>
+            <a:endParaRPr lang="en-US" sz="800" dirty="0"/>
+          </a:p>
+        </p:txBody>
       </p:sp>
       <p:sp>
         <p:nvSpPr>
           <p:cNvPr id="7" name="Text 5"/>
+          <p:cNvSpPr/>
+          <p:nvPr/>
+        </p:nvSpPr>
+        <p:spPr>
+          <a:xfrm>
+            <a:off x="10710367" y="6382512"/>
+            <a:ext cx="914400" cy="219456"/>
+          </a:xfrm>
+          <a:prstGeom prst="rect">
+            <a:avLst/>
+          </a:prstGeom>
+          <a:noFill/>
+          <a:ln/>
+        </p:spPr>
+        <p:txBody>
+          <a:bodyPr wrap="square" lIns="0" tIns="0" rIns="0" bIns="0" rtlCol="0" anchor="ctr"/>
+          <a:lstStyle/>
+          <a:p>
+            <a:pPr algn="r" indent="0" marL="0">
+              <a:buNone/>
+            </a:pPr>
+            <a:r>
+              <a:rPr lang="en-US" sz="900" b="1" dirty="0">
+                <a:solidFill>
+                  <a:srgbClr val="B98A2E"/>
+                </a:solidFill>
+                <a:latin typeface="Arial" pitchFamily="34" charset="0"/>
+                <a:ea typeface="Arial" pitchFamily="34" charset="-122"/>
+                <a:cs typeface="Arial" pitchFamily="34" charset="-120"/>
+              </a:rPr>
+              <a:t>6</a:t>
+            </a:r>
+            <a:endParaRPr lang="en-US" sz="900" dirty="0"/>
+          </a:p>
+        </p:txBody>
+      </p:sp>
+      <p:sp>
+        <p:nvSpPr>
+          <p:cNvPr id="8" name="Text 6"/>
           <p:cNvSpPr/>
           <p:nvPr/>
         </p:nvSpPr>
@@ -5956,7 +7069,7 @@
             <a:r>
               <a:rPr lang="en-US" sz="1000" dirty="0">
                 <a:solidFill>
-                  <a:srgbClr val="0F172A"/>
+                  <a:srgbClr val="10161F"/>
                 </a:solidFill>
                 <a:latin typeface="Pretendard" pitchFamily="34" charset="0"/>
                 <a:ea typeface="Pretendard" pitchFamily="34" charset="-122"/>
@@ -6008,14 +7121,14 @@
         </p:nvSpPr>
         <p:spPr>
           <a:xfrm>
-            <a:off x="566928" y="384048"/>
-            <a:ext cx="45720" cy="566928"/>
-          </a:xfrm>
-          <a:prstGeom prst="rect">
+            <a:off x="566928" y="457200"/>
+            <a:ext cx="384048" cy="384048"/>
+          </a:xfrm>
+          <a:prstGeom prst="ellipse">
             <a:avLst/>
           </a:prstGeom>
           <a:solidFill>
-            <a:srgbClr val="6B8E00"/>
+            <a:srgbClr val="B98A2E"/>
           </a:solidFill>
           <a:ln/>
         </p:spPr>
@@ -6028,32 +7141,71 @@
         </p:nvSpPr>
         <p:spPr>
           <a:xfrm>
-            <a:off x="749808" y="384048"/>
-            <a:ext cx="10874959" cy="182880"/>
-          </a:xfrm>
-          <a:prstGeom prst="rect">
-            <a:avLst/>
-          </a:prstGeom>
-          <a:noFill/>
-          <a:ln/>
-        </p:spPr>
-        <p:txBody>
-          <a:bodyPr wrap="square" lIns="0" tIns="0" rIns="0" bIns="0" rtlCol="0" anchor="ctr"/>
-          <a:lstStyle/>
-          <a:p>
-            <a:pPr indent="0" marL="0">
-              <a:buNone/>
-            </a:pPr>
-            <a:r>
-              <a:rPr lang="en-US" sz="950" b="1" spc="200" kern="0" dirty="0">
-                <a:solidFill>
-                  <a:srgbClr val="6B8E00"/>
+            <a:off x="566928" y="457200"/>
+            <a:ext cx="384048" cy="384048"/>
+          </a:xfrm>
+          <a:prstGeom prst="rect">
+            <a:avLst/>
+          </a:prstGeom>
+          <a:noFill/>
+          <a:ln/>
+        </p:spPr>
+        <p:txBody>
+          <a:bodyPr wrap="square" lIns="0" tIns="0" rIns="0" bIns="0" rtlCol="0" anchor="ctr"/>
+          <a:lstStyle/>
+          <a:p>
+            <a:pPr algn="ctr" indent="0" marL="0">
+              <a:buNone/>
+            </a:pPr>
+            <a:r>
+              <a:rPr lang="en-US" sz="1300" b="1" dirty="0">
+                <a:solidFill>
+                  <a:srgbClr val="FFFFFF"/>
                 </a:solidFill>
                 <a:latin typeface="Arial" pitchFamily="34" charset="0"/>
                 <a:ea typeface="Arial" pitchFamily="34" charset="-122"/>
                 <a:cs typeface="Arial" pitchFamily="34" charset="-120"/>
               </a:rPr>
-              <a:t>07  Risk</a:t>
+              <a:t>07</a:t>
+            </a:r>
+            <a:endParaRPr lang="en-US" sz="1300" dirty="0"/>
+          </a:p>
+        </p:txBody>
+      </p:sp>
+      <p:sp>
+        <p:nvSpPr>
+          <p:cNvPr id="4" name="Text 2"/>
+          <p:cNvSpPr/>
+          <p:nvPr/>
+        </p:nvSpPr>
+        <p:spPr>
+          <a:xfrm>
+            <a:off x="1133856" y="457200"/>
+            <a:ext cx="10490911" cy="182880"/>
+          </a:xfrm>
+          <a:prstGeom prst="rect">
+            <a:avLst/>
+          </a:prstGeom>
+          <a:noFill/>
+          <a:ln/>
+        </p:spPr>
+        <p:txBody>
+          <a:bodyPr wrap="square" lIns="0" tIns="0" rIns="0" bIns="0" rtlCol="0" anchor="ctr"/>
+          <a:lstStyle/>
+          <a:p>
+            <a:pPr indent="0" marL="0">
+              <a:buNone/>
+            </a:pPr>
+            <a:r>
+              <a:rPr lang="en-US" sz="950" b="1" spc="200" kern="0" dirty="0">
+                <a:solidFill>
+                  <a:srgbClr val="B98A2E"/>
+                </a:solidFill>
+                <a:latin typeface="Arial" pitchFamily="34" charset="0"/>
+                <a:ea typeface="Arial" pitchFamily="34" charset="-122"/>
+                <a:cs typeface="Arial" pitchFamily="34" charset="-120"/>
+              </a:rPr>
+              <a:t>Risk</a:t>
             </a:r>
             <a:endParaRPr lang="en-US" sz="950" dirty="0"/>
           </a:p>
@@ -6061,32 +7213,32 @@
       </p:sp>
       <p:sp>
         <p:nvSpPr>
-          <p:cNvPr id="4" name="Text 2"/>
-          <p:cNvSpPr/>
-          <p:nvPr/>
-        </p:nvSpPr>
-        <p:spPr>
-          <a:xfrm>
-            <a:off x="749808" y="566928"/>
-            <a:ext cx="10874959" cy="384048"/>
-          </a:xfrm>
-          <a:prstGeom prst="rect">
-            <a:avLst/>
-          </a:prstGeom>
-          <a:noFill/>
-          <a:ln/>
-        </p:spPr>
-        <p:txBody>
-          <a:bodyPr wrap="square" lIns="0" tIns="0" rIns="0" bIns="0" rtlCol="0" anchor="ctr"/>
-          <a:lstStyle/>
-          <a:p>
-            <a:pPr indent="0" marL="0">
-              <a:buNone/>
-            </a:pPr>
-            <a:r>
-              <a:rPr lang="en-US" sz="2200" b="1" dirty="0">
-                <a:solidFill>
-                  <a:srgbClr val="0F172A"/>
+          <p:cNvPr id="5" name="Text 3"/>
+          <p:cNvSpPr/>
+          <p:nvPr/>
+        </p:nvSpPr>
+        <p:spPr>
+          <a:xfrm>
+            <a:off x="1133856" y="640080"/>
+            <a:ext cx="10490911" cy="365760"/>
+          </a:xfrm>
+          <a:prstGeom prst="rect">
+            <a:avLst/>
+          </a:prstGeom>
+          <a:noFill/>
+          <a:ln/>
+        </p:spPr>
+        <p:txBody>
+          <a:bodyPr wrap="square" lIns="0" tIns="0" rIns="0" bIns="0" rtlCol="0" anchor="ctr"/>
+          <a:lstStyle/>
+          <a:p>
+            <a:pPr indent="0" marL="0">
+              <a:buNone/>
+            </a:pPr>
+            <a:r>
+              <a:rPr lang="en-US" sz="2300" b="1" dirty="0">
+                <a:solidFill>
+                  <a:srgbClr val="10161F"/>
                 </a:solidFill>
                 <a:latin typeface="Pretendard" pitchFamily="34" charset="0"/>
                 <a:ea typeface="Pretendard" pitchFamily="34" charset="-122"/>
@@ -6094,30 +7246,32 @@
               </a:rPr>
               <a:t>리스크는 무엇이고 대응책은 있는가</a:t>
             </a:r>
-            <a:endParaRPr lang="en-US" sz="2200" dirty="0"/>
-          </a:p>
-        </p:txBody>
-      </p:sp>
-      <p:sp>
-        <p:nvSpPr>
-          <p:cNvPr id="5" name="Shape 3"/>
+            <a:endParaRPr lang="en-US" sz="2300" dirty="0"/>
+          </a:p>
+        </p:txBody>
+      </p:sp>
+      <p:sp>
+        <p:nvSpPr>
+          <p:cNvPr id="6" name="Shape 4"/>
           <p:cNvSpPr/>
           <p:nvPr/>
         </p:nvSpPr>
         <p:spPr>
           <a:xfrm>
             <a:off x="566928" y="1417320"/>
-            <a:ext cx="3503066" cy="3611880"/>
-          </a:xfrm>
-          <a:prstGeom prst="rect">
-            <a:avLst/>
+            <a:ext cx="11057839" cy="3611880"/>
+          </a:xfrm>
+          <a:prstGeom prst="roundRect">
+            <a:avLst>
+              <a:gd name="adj" fmla="val 1519"/>
+            </a:avLst>
           </a:prstGeom>
           <a:solidFill>
-            <a:srgbClr val="F8FAFC"/>
+            <a:srgbClr val="F7FAFC"/>
           </a:solidFill>
-          <a:ln w="3810">
+          <a:ln w="6350">
             <a:solidFill>
-              <a:srgbClr val="CBD5E1"/>
+              <a:srgbClr val="CBD5E0"/>
             </a:solidFill>
             <a:prstDash val="solid"/>
           </a:ln>
@@ -6125,46 +7279,26 @@
       </p:sp>
       <p:sp>
         <p:nvSpPr>
-          <p:cNvPr id="6" name="Shape 4"/>
+          <p:cNvPr id="7" name="Shape 5"/>
           <p:cNvSpPr/>
           <p:nvPr/>
         </p:nvSpPr>
         <p:spPr>
           <a:xfrm>
             <a:off x="566928" y="1417320"/>
-            <a:ext cx="3503066" cy="36576"/>
+            <a:ext cx="11057839" cy="45720"/>
           </a:xfrm>
           <a:prstGeom prst="rect">
             <a:avLst/>
           </a:prstGeom>
           <a:solidFill>
-            <a:srgbClr val="6B8E00"/>
+            <a:srgbClr val="B98A2E"/>
           </a:solidFill>
           <a:ln/>
         </p:spPr>
       </p:sp>
       <p:sp>
         <p:nvSpPr>
-          <p:cNvPr id="7" name="Shape 5"/>
-          <p:cNvSpPr/>
-          <p:nvPr/>
-        </p:nvSpPr>
-        <p:spPr>
-          <a:xfrm>
-            <a:off x="566928" y="1417320"/>
-            <a:ext cx="3503066" cy="45720"/>
-          </a:xfrm>
-          <a:prstGeom prst="rect">
-            <a:avLst/>
-          </a:prstGeom>
-          <a:solidFill>
-            <a:srgbClr val="6B8E00"/>
-          </a:solidFill>
-          <a:ln/>
-        </p:spPr>
-      </p:sp>
-      <p:sp>
-        <p:nvSpPr>
           <p:cNvPr id="8" name="Text 6"/>
           <p:cNvSpPr/>
           <p:nvPr/>
@@ -6172,7 +7306,7 @@
         <p:spPr>
           <a:xfrm>
             <a:off x="795528" y="1618488"/>
-            <a:ext cx="3045866" cy="292608"/>
+            <a:ext cx="10600639" cy="292608"/>
           </a:xfrm>
           <a:prstGeom prst="rect">
             <a:avLst/>
@@ -6190,13 +7324,13 @@
             <a:r>
               <a:rPr lang="en-US" sz="1350" b="1" dirty="0">
                 <a:solidFill>
-                  <a:srgbClr val="4F6A00"/>
+                  <a:srgbClr val="977024"/>
                 </a:solidFill>
                 <a:latin typeface="Pretendard" pitchFamily="34" charset="0"/>
                 <a:ea typeface="Pretendard" pitchFamily="34" charset="-122"/>
                 <a:cs typeface="Pretendard" pitchFamily="34" charset="-120"/>
               </a:rPr>
-              <a:t>건물 물리적 상태</a:t>
+              <a:t>용도 리스크</a:t>
             </a:r>
             <a:endParaRPr lang="en-US" sz="1350" dirty="0"/>
           </a:p>
@@ -6210,34 +7344,36 @@
         </p:nvSpPr>
         <p:spPr>
           <a:xfrm>
-            <a:off x="795528" y="1929384"/>
-            <a:ext cx="3045866" cy="347472"/>
-          </a:xfrm>
-          <a:prstGeom prst="rect">
-            <a:avLst/>
-          </a:prstGeom>
-          <a:noFill/>
-          <a:ln/>
-        </p:spPr>
-        <p:txBody>
-          <a:bodyPr wrap="square" lIns="0" tIns="0" rIns="0" bIns="0" rtlCol="0" anchor="ctr"/>
-          <a:lstStyle/>
-          <a:p>
-            <a:pPr indent="0" marL="0">
-              <a:buNone/>
-            </a:pPr>
-            <a:r>
-              <a:rPr lang="en-US" sz="1500" b="1" dirty="0">
-                <a:solidFill>
-                  <a:srgbClr val="0F172A"/>
+            <a:off x="795528" y="1911096"/>
+            <a:ext cx="10600639" cy="402336"/>
+          </a:xfrm>
+          <a:prstGeom prst="rect">
+            <a:avLst/>
+          </a:prstGeom>
+          <a:noFill/>
+          <a:ln/>
+        </p:spPr>
+        <p:txBody>
+          <a:bodyPr wrap="square" lIns="0" tIns="0" rIns="0" bIns="0" rtlCol="0" anchor="ctr">
+            <a:normAutofit/>
+          </a:bodyPr>
+          <a:lstStyle/>
+          <a:p>
+            <a:pPr indent="0" marL="0">
+              <a:buNone/>
+            </a:pPr>
+            <a:r>
+              <a:rPr lang="en-US" sz="1350" b="1" dirty="0">
+                <a:solidFill>
+                  <a:srgbClr val="10161F"/>
                 </a:solidFill>
                 <a:latin typeface="Pretendard" pitchFamily="34" charset="0"/>
                 <a:ea typeface="Pretendard" pitchFamily="34" charset="-122"/>
                 <a:cs typeface="Pretendard" pitchFamily="34" charset="-120"/>
               </a:rPr>
-              <a:t>2017년 준공 신축급 상태 (누수/균열</a:t>
-            </a:r>
-            <a:endParaRPr lang="en-US" sz="1500" dirty="0"/>
+              <a:t>—</a:t>
+            </a:r>
+            <a:endParaRPr lang="en-US" sz="1350" dirty="0"/>
           </a:p>
         </p:txBody>
       </p:sp>
@@ -6249,549 +7385,120 @@
         </p:nvSpPr>
         <p:spPr>
           <a:xfrm>
-            <a:off x="795528" y="2313432"/>
-            <a:ext cx="3045866" cy="2606040"/>
-          </a:xfrm>
-          <a:prstGeom prst="rect">
-            <a:avLst/>
-          </a:prstGeom>
-          <a:noFill/>
-          <a:ln/>
-        </p:spPr>
-        <p:txBody>
-          <a:bodyPr wrap="square" lIns="0" tIns="0" rIns="0" bIns="0" rtlCol="0" anchor="t"/>
+            <a:off x="795528" y="2377440"/>
+            <a:ext cx="10600639" cy="2560320"/>
+          </a:xfrm>
+          <a:prstGeom prst="rect">
+            <a:avLst/>
+          </a:prstGeom>
+          <a:noFill/>
+          <a:ln/>
+        </p:spPr>
+        <p:txBody>
+          <a:bodyPr wrap="square" lIns="0" tIns="0" rIns="0" bIns="0" rtlCol="0" anchor="t">
+            <a:normAutofit/>
+          </a:bodyPr>
           <a:lstStyle/>
           <a:p>
             <a:pPr marL="342900" indent="-342900">
+              <a:lnSpc>
+                <a:spcPct val="125000"/>
+              </a:lnSpc>
               <a:buSzPct val="100000"/>
               <a:buChar char="•"/>
             </a:pPr>
             <a:r>
-              <a:rPr lang="en-US" sz="1250" dirty="0">
-                <a:solidFill>
-                  <a:srgbClr val="0F172A"/>
+              <a:rPr lang="en-US" sz="1200" dirty="0">
+                <a:solidFill>
+                  <a:srgbClr val="10161F"/>
                 </a:solidFill>
                 <a:latin typeface="Pretendard" pitchFamily="34" charset="0"/>
                 <a:ea typeface="Pretendard" pitchFamily="34" charset="-122"/>
                 <a:cs typeface="Pretendard" pitchFamily="34" charset="-120"/>
               </a:rPr>
-              <a:t>준공 10년 미만으로 대규모 수선비용 발생 가능성 낮음</a:t>
-            </a:r>
-            <a:endParaRPr lang="en-US" sz="1250" dirty="0"/>
-          </a:p>
-        </p:txBody>
-      </p:sp>
-      <p:sp>
-        <p:nvSpPr>
-          <p:cNvPr id="11" name="Shape 9"/>
-          <p:cNvSpPr/>
-          <p:nvPr/>
-        </p:nvSpPr>
-        <p:spPr>
-          <a:xfrm>
-            <a:off x="4344314" y="1417320"/>
-            <a:ext cx="3503066" cy="3611880"/>
-          </a:xfrm>
-          <a:prstGeom prst="rect">
-            <a:avLst/>
-          </a:prstGeom>
-          <a:solidFill>
-            <a:srgbClr val="F8FAFC"/>
-          </a:solidFill>
-          <a:ln w="3810">
-            <a:solidFill>
-              <a:srgbClr val="CBD5E1"/>
-            </a:solidFill>
-            <a:prstDash val="solid"/>
-          </a:ln>
-        </p:spPr>
-      </p:sp>
-      <p:sp>
-        <p:nvSpPr>
-          <p:cNvPr id="12" name="Shape 10"/>
-          <p:cNvSpPr/>
-          <p:nvPr/>
-        </p:nvSpPr>
-        <p:spPr>
-          <a:xfrm>
-            <a:off x="4344314" y="1417320"/>
-            <a:ext cx="3503066" cy="36576"/>
-          </a:xfrm>
-          <a:prstGeom prst="rect">
-            <a:avLst/>
-          </a:prstGeom>
-          <a:solidFill>
-            <a:srgbClr val="6B8E00"/>
-          </a:solidFill>
-          <a:ln/>
-        </p:spPr>
-      </p:sp>
-      <p:sp>
-        <p:nvSpPr>
-          <p:cNvPr id="13" name="Shape 11"/>
-          <p:cNvSpPr/>
-          <p:nvPr/>
-        </p:nvSpPr>
-        <p:spPr>
-          <a:xfrm>
-            <a:off x="4344314" y="1417320"/>
-            <a:ext cx="3503066" cy="45720"/>
-          </a:xfrm>
-          <a:prstGeom prst="rect">
-            <a:avLst/>
-          </a:prstGeom>
-          <a:solidFill>
-            <a:srgbClr val="6B8E00"/>
-          </a:solidFill>
-          <a:ln/>
-        </p:spPr>
-      </p:sp>
-      <p:sp>
-        <p:nvSpPr>
-          <p:cNvPr id="14" name="Text 12"/>
-          <p:cNvSpPr/>
-          <p:nvPr/>
-        </p:nvSpPr>
-        <p:spPr>
-          <a:xfrm>
-            <a:off x="4572914" y="1618488"/>
-            <a:ext cx="3045866" cy="292608"/>
-          </a:xfrm>
-          <a:prstGeom prst="rect">
-            <a:avLst/>
-          </a:prstGeom>
-          <a:noFill/>
-          <a:ln/>
-        </p:spPr>
-        <p:txBody>
-          <a:bodyPr wrap="square" lIns="0" tIns="0" rIns="0" bIns="0" rtlCol="0" anchor="ctr"/>
-          <a:lstStyle/>
-          <a:p>
-            <a:pPr indent="0" marL="0">
-              <a:buNone/>
-            </a:pPr>
-            <a:r>
-              <a:rPr lang="en-US" sz="1350" b="1" dirty="0">
-                <a:solidFill>
-                  <a:srgbClr val="4F6A00"/>
+              <a:t>{"ok":true,"mocked":true,"extractedFields":{"area_signal":"역삼","asset_type":"오피스빌딩","price_band":"300억","size_signal":"3000평(약 9917.4㎡)"},"extractedFacts":{"region":"역삼","exactAddressCandidate":"역삼동 7</a:t>
+            </a:r>
+            <a:endParaRPr lang="en-US" sz="1200" dirty="0"/>
+          </a:p>
+        </p:txBody>
+      </p:sp>
+      <p:sp>
+        <p:nvSpPr>
+          <p:cNvPr id="11" name="Text 9"/>
+          <p:cNvSpPr/>
+          <p:nvPr/>
+        </p:nvSpPr>
+        <p:spPr>
+          <a:xfrm>
+            <a:off x="566928" y="6382512"/>
+            <a:ext cx="7315200" cy="219456"/>
+          </a:xfrm>
+          <a:prstGeom prst="rect">
+            <a:avLst/>
+          </a:prstGeom>
+          <a:noFill/>
+          <a:ln/>
+        </p:spPr>
+        <p:txBody>
+          <a:bodyPr wrap="square" lIns="0" tIns="0" rIns="0" bIns="0" rtlCol="0" anchor="ctr"/>
+          <a:lstStyle/>
+          <a:p>
+            <a:pPr indent="0" marL="0">
+              <a:buNone/>
+            </a:pPr>
+            <a:r>
+              <a:rPr lang="en-US" sz="800" dirty="0">
+                <a:solidFill>
+                  <a:srgbClr val="718096"/>
                 </a:solidFill>
                 <a:latin typeface="Pretendard" pitchFamily="34" charset="0"/>
                 <a:ea typeface="Pretendard" pitchFamily="34" charset="-122"/>
                 <a:cs typeface="Pretendard" pitchFamily="34" charset="-120"/>
               </a:rPr>
-              <a:t>승강기 및 설비</a:t>
-            </a:r>
-            <a:endParaRPr lang="en-US" sz="1350" dirty="0"/>
-          </a:p>
-        </p:txBody>
-      </p:sp>
-      <p:sp>
-        <p:nvSpPr>
-          <p:cNvPr id="15" name="Text 13"/>
-          <p:cNvSpPr/>
-          <p:nvPr/>
-        </p:nvSpPr>
-        <p:spPr>
-          <a:xfrm>
-            <a:off x="4572914" y="1929384"/>
-            <a:ext cx="3045866" cy="347472"/>
-          </a:xfrm>
-          <a:prstGeom prst="rect">
-            <a:avLst/>
-          </a:prstGeom>
-          <a:noFill/>
-          <a:ln/>
-        </p:spPr>
-        <p:txBody>
-          <a:bodyPr wrap="square" lIns="0" tIns="0" rIns="0" bIns="0" rtlCol="0" anchor="ctr"/>
-          <a:lstStyle/>
-          <a:p>
-            <a:pPr indent="0" marL="0">
-              <a:buNone/>
-            </a:pPr>
-            <a:r>
-              <a:rPr lang="en-US" sz="1500" b="1" dirty="0">
-                <a:solidFill>
-                  <a:srgbClr val="0F172A"/>
-                </a:solidFill>
-                <a:latin typeface="Pretendard" pitchFamily="34" charset="0"/>
-                <a:ea typeface="Pretendard" pitchFamily="34" charset="-122"/>
-                <a:cs typeface="Pretendard" pitchFamily="34" charset="-120"/>
-              </a:rPr>
-              <a:t>15인승 침대용 승강기 및 냉난방 설비 </a:t>
-            </a:r>
-            <a:endParaRPr lang="en-US" sz="1500" dirty="0"/>
-          </a:p>
-        </p:txBody>
-      </p:sp>
-      <p:sp>
-        <p:nvSpPr>
-          <p:cNvPr id="16" name="Text 14"/>
-          <p:cNvSpPr/>
-          <p:nvPr/>
-        </p:nvSpPr>
-        <p:spPr>
-          <a:xfrm>
-            <a:off x="4572914" y="2313432"/>
-            <a:ext cx="3045866" cy="2606040"/>
-          </a:xfrm>
-          <a:prstGeom prst="rect">
-            <a:avLst/>
-          </a:prstGeom>
-          <a:noFill/>
-          <a:ln/>
-        </p:spPr>
-        <p:txBody>
-          <a:bodyPr wrap="square" lIns="0" tIns="0" rIns="0" bIns="0" rtlCol="0" anchor="t"/>
-          <a:lstStyle/>
-          <a:p>
-            <a:pPr marL="342900" indent="-342900">
-              <a:buSzPct val="100000"/>
-              <a:buChar char="•"/>
-            </a:pPr>
-            <a:r>
-              <a:rPr lang="en-US" sz="1250" dirty="0">
-                <a:solidFill>
-                  <a:srgbClr val="0F172A"/>
-                </a:solidFill>
-                <a:latin typeface="Pretendard" pitchFamily="34" charset="0"/>
-                <a:ea typeface="Pretendard" pitchFamily="34" charset="-122"/>
-                <a:cs typeface="Pretendard" pitchFamily="34" charset="-120"/>
-              </a:rPr>
-              <a:t>주기적 정기 점검 계약 유지로 관리 리스크 최소화</a:t>
-            </a:r>
-            <a:endParaRPr lang="en-US" sz="1250" dirty="0"/>
-          </a:p>
-        </p:txBody>
-      </p:sp>
-      <p:sp>
-        <p:nvSpPr>
-          <p:cNvPr id="17" name="Shape 15"/>
-          <p:cNvSpPr/>
-          <p:nvPr/>
-        </p:nvSpPr>
-        <p:spPr>
-          <a:xfrm>
-            <a:off x="8121701" y="1417320"/>
-            <a:ext cx="3503066" cy="3611880"/>
-          </a:xfrm>
-          <a:prstGeom prst="rect">
-            <a:avLst/>
-          </a:prstGeom>
-          <a:solidFill>
-            <a:srgbClr val="F8FAFC"/>
-          </a:solidFill>
-          <a:ln w="3810">
-            <a:solidFill>
-              <a:srgbClr val="CBD5E1"/>
-            </a:solidFill>
-            <a:prstDash val="solid"/>
-          </a:ln>
-        </p:spPr>
-      </p:sp>
-      <p:sp>
-        <p:nvSpPr>
-          <p:cNvPr id="18" name="Shape 16"/>
-          <p:cNvSpPr/>
-          <p:nvPr/>
-        </p:nvSpPr>
-        <p:spPr>
-          <a:xfrm>
-            <a:off x="8121701" y="1417320"/>
-            <a:ext cx="3503066" cy="36576"/>
-          </a:xfrm>
-          <a:prstGeom prst="rect">
-            <a:avLst/>
-          </a:prstGeom>
-          <a:solidFill>
-            <a:srgbClr val="6B8E00"/>
-          </a:solidFill>
-          <a:ln/>
-        </p:spPr>
-      </p:sp>
-      <p:sp>
-        <p:nvSpPr>
-          <p:cNvPr id="19" name="Shape 17"/>
-          <p:cNvSpPr/>
-          <p:nvPr/>
-        </p:nvSpPr>
-        <p:spPr>
-          <a:xfrm>
-            <a:off x="8121701" y="1417320"/>
-            <a:ext cx="3503066" cy="45720"/>
-          </a:xfrm>
-          <a:prstGeom prst="rect">
-            <a:avLst/>
-          </a:prstGeom>
-          <a:solidFill>
-            <a:srgbClr val="6B8E00"/>
-          </a:solidFill>
-          <a:ln/>
-        </p:spPr>
-      </p:sp>
-      <p:sp>
-        <p:nvSpPr>
-          <p:cNvPr id="20" name="Text 18"/>
-          <p:cNvSpPr/>
-          <p:nvPr/>
-        </p:nvSpPr>
-        <p:spPr>
-          <a:xfrm>
-            <a:off x="8350301" y="1618488"/>
-            <a:ext cx="3045866" cy="292608"/>
-          </a:xfrm>
-          <a:prstGeom prst="rect">
-            <a:avLst/>
-          </a:prstGeom>
-          <a:noFill/>
-          <a:ln/>
-        </p:spPr>
-        <p:txBody>
-          <a:bodyPr wrap="square" lIns="0" tIns="0" rIns="0" bIns="0" rtlCol="0" anchor="ctr"/>
-          <a:lstStyle/>
-          <a:p>
-            <a:pPr indent="0" marL="0">
-              <a:buNone/>
-            </a:pPr>
-            <a:r>
-              <a:rPr lang="en-US" sz="1350" b="1" dirty="0">
-                <a:solidFill>
-                  <a:srgbClr val="4F6A00"/>
-                </a:solidFill>
-                <a:latin typeface="Pretendard" pitchFamily="34" charset="0"/>
-                <a:ea typeface="Pretendard" pitchFamily="34" charset="-122"/>
-                <a:cs typeface="Pretendard" pitchFamily="34" charset="-120"/>
-              </a:rPr>
-              <a:t>임차인 이탈 위험</a:t>
-            </a:r>
-            <a:endParaRPr lang="en-US" sz="1350" dirty="0"/>
-          </a:p>
-        </p:txBody>
-      </p:sp>
-      <p:sp>
-        <p:nvSpPr>
-          <p:cNvPr id="21" name="Text 19"/>
-          <p:cNvSpPr/>
-          <p:nvPr/>
-        </p:nvSpPr>
-        <p:spPr>
-          <a:xfrm>
-            <a:off x="8350301" y="1929384"/>
-            <a:ext cx="3045866" cy="347472"/>
-          </a:xfrm>
-          <a:prstGeom prst="rect">
-            <a:avLst/>
-          </a:prstGeom>
-          <a:noFill/>
-          <a:ln/>
-        </p:spPr>
-        <p:txBody>
-          <a:bodyPr wrap="square" lIns="0" tIns="0" rIns="0" bIns="0" rtlCol="0" anchor="ctr"/>
-          <a:lstStyle/>
-          <a:p>
-            <a:pPr indent="0" marL="0">
-              <a:buNone/>
-            </a:pPr>
-            <a:r>
-              <a:rPr lang="en-US" sz="1500" b="1" dirty="0">
-                <a:solidFill>
-                  <a:srgbClr val="0F172A"/>
-                </a:solidFill>
-                <a:latin typeface="Pretendard" pitchFamily="34" charset="0"/>
-                <a:ea typeface="Pretendard" pitchFamily="34" charset="-122"/>
-                <a:cs typeface="Pretendard" pitchFamily="34" charset="-120"/>
-              </a:rPr>
-              <a:t>병의원/약국 인테리어 투자비(호실당 5억</a:t>
-            </a:r>
-            <a:endParaRPr lang="en-US" sz="1500" dirty="0"/>
-          </a:p>
-        </p:txBody>
-      </p:sp>
-      <p:sp>
-        <p:nvSpPr>
-          <p:cNvPr id="22" name="Text 20"/>
-          <p:cNvSpPr/>
-          <p:nvPr/>
-        </p:nvSpPr>
-        <p:spPr>
-          <a:xfrm>
-            <a:off x="8350301" y="2313432"/>
-            <a:ext cx="3045866" cy="2606040"/>
-          </a:xfrm>
-          <a:prstGeom prst="rect">
-            <a:avLst/>
-          </a:prstGeom>
-          <a:noFill/>
-          <a:ln/>
-        </p:spPr>
-        <p:txBody>
-          <a:bodyPr wrap="square" lIns="0" tIns="0" rIns="0" bIns="0" rtlCol="0" anchor="t"/>
-          <a:lstStyle/>
-          <a:p>
-            <a:pPr marL="342900" indent="-342900">
-              <a:buSzPct val="100000"/>
-              <a:buChar char="•"/>
-            </a:pPr>
-            <a:r>
-              <a:rPr lang="en-US" sz="1250" dirty="0">
-                <a:solidFill>
-                  <a:srgbClr val="0F172A"/>
-                </a:solidFill>
-                <a:latin typeface="Pretendard" pitchFamily="34" charset="0"/>
-                <a:ea typeface="Pretendard" pitchFamily="34" charset="-122"/>
-                <a:cs typeface="Pretendard" pitchFamily="34" charset="-120"/>
-              </a:rPr>
-              <a:t>WALE 3.5년 확보 및 만기 6개월 전 재계약 협상 개시</a:t>
-            </a:r>
-            <a:endParaRPr lang="en-US" sz="1250" dirty="0"/>
-          </a:p>
-        </p:txBody>
-      </p:sp>
-      <p:sp>
-        <p:nvSpPr>
-          <p:cNvPr id="23" name="Shape 21"/>
-          <p:cNvSpPr/>
-          <p:nvPr/>
-        </p:nvSpPr>
-        <p:spPr>
-          <a:xfrm>
-            <a:off x="566928" y="5193792"/>
-            <a:ext cx="11057839" cy="621792"/>
-          </a:xfrm>
-          <a:prstGeom prst="rect">
-            <a:avLst/>
-          </a:prstGeom>
-          <a:solidFill>
-            <a:srgbClr val="F8FAFC"/>
-          </a:solidFill>
-          <a:ln w="3810">
-            <a:solidFill>
-              <a:srgbClr val="CBD5E1"/>
-            </a:solidFill>
-            <a:prstDash val="solid"/>
-          </a:ln>
-        </p:spPr>
-      </p:sp>
-      <p:sp>
-        <p:nvSpPr>
-          <p:cNvPr id="24" name="Shape 22"/>
-          <p:cNvSpPr/>
-          <p:nvPr/>
-        </p:nvSpPr>
-        <p:spPr>
-          <a:xfrm>
-            <a:off x="566928" y="5193792"/>
-            <a:ext cx="11057839" cy="36576"/>
-          </a:xfrm>
-          <a:prstGeom prst="rect">
-            <a:avLst/>
-          </a:prstGeom>
-          <a:solidFill>
-            <a:srgbClr val="6B8E00"/>
-          </a:solidFill>
-          <a:ln/>
-        </p:spPr>
-      </p:sp>
-      <p:sp>
-        <p:nvSpPr>
-          <p:cNvPr id="25" name="Text 23"/>
-          <p:cNvSpPr/>
-          <p:nvPr/>
-        </p:nvSpPr>
-        <p:spPr>
-          <a:xfrm>
-            <a:off x="795528" y="5193792"/>
-            <a:ext cx="10600639" cy="621792"/>
-          </a:xfrm>
-          <a:prstGeom prst="rect">
-            <a:avLst/>
-          </a:prstGeom>
-          <a:noFill/>
-          <a:ln/>
-        </p:spPr>
-        <p:txBody>
-          <a:bodyPr wrap="square" lIns="0" tIns="0" rIns="0" bIns="0" rtlCol="0" anchor="ctr"/>
-          <a:lstStyle/>
-          <a:p>
-            <a:pPr indent="0" marL="0">
-              <a:buNone/>
-            </a:pPr>
-            <a:r>
-              <a:rPr lang="en-US" sz="1200" dirty="0">
-                <a:solidFill>
-                  <a:srgbClr val="0F172A"/>
-                </a:solidFill>
-                <a:latin typeface="Pretendard" pitchFamily="34" charset="0"/>
-                <a:ea typeface="Pretendard" pitchFamily="34" charset="-122"/>
-                <a:cs typeface="Pretendard" pitchFamily="34" charset="-120"/>
-              </a:rPr>
-              <a:t>실사 총평: 자산의 물리적·권리적 하자가 없으며, 세부 임대차 계약서 및 등기사항증명서는 LOI 접수 후 원본 열람 검토 여지가 있으나, 관련 법규·인허가·시설 요건의 현장 확인이 필요합니다..</a:t>
-            </a:r>
-            <a:endParaRPr lang="en-US" sz="1200" dirty="0"/>
-          </a:p>
-        </p:txBody>
-      </p:sp>
-      <p:sp>
-        <p:nvSpPr>
-          <p:cNvPr id="26" name="Text 24"/>
-          <p:cNvSpPr/>
-          <p:nvPr/>
-        </p:nvSpPr>
-        <p:spPr>
-          <a:xfrm>
-            <a:off x="566928" y="6419088"/>
-            <a:ext cx="11057839" cy="201168"/>
-          </a:xfrm>
-          <a:prstGeom prst="rect">
-            <a:avLst/>
-          </a:prstGeom>
-          <a:noFill/>
-          <a:ln/>
-        </p:spPr>
-        <p:txBody>
-          <a:bodyPr wrap="square" lIns="0" tIns="0" rIns="0" bIns="0" rtlCol="0" anchor="ctr"/>
-          <a:lstStyle/>
-          <a:p>
-            <a:pPr algn="ctr" indent="0" marL="0">
-              <a:buNone/>
-            </a:pPr>
-            <a:r>
-              <a:rPr lang="en-US" sz="750" dirty="0">
-                <a:solidFill>
-                  <a:srgbClr val="64748B"/>
-                </a:solidFill>
-                <a:latin typeface="Pretendard" pitchFamily="34" charset="0"/>
-                <a:ea typeface="Pretendard" pitchFamily="34" charset="-122"/>
-                <a:cs typeface="Pretendard" pitchFamily="34" charset="-120"/>
-              </a:rPr>
-              <a:t>크리딜  ·    ·  7</a:t>
-            </a:r>
-            <a:endParaRPr lang="en-US" sz="750" dirty="0"/>
-          </a:p>
-        </p:txBody>
-      </p:sp>
-      <p:sp>
-        <p:nvSpPr>
-          <p:cNvPr id="27" name="Shape 25"/>
-          <p:cNvSpPr/>
-          <p:nvPr/>
-        </p:nvSpPr>
-        <p:spPr>
-          <a:xfrm>
-            <a:off x="4437172" y="6382512"/>
-            <a:ext cx="3317352" cy="0"/>
-          </a:xfrm>
-          <a:prstGeom prst="line">
-            <a:avLst/>
-          </a:prstGeom>
-          <a:noFill/>
-          <a:ln w="6350">
-            <a:solidFill>
-              <a:srgbClr val="6B8E00"/>
-            </a:solidFill>
-            <a:prstDash val="solid"/>
-          </a:ln>
-        </p:spPr>
+              <a:t>크리딜   |   </a:t>
+            </a:r>
+            <a:endParaRPr lang="en-US" sz="800" dirty="0"/>
+          </a:p>
+        </p:txBody>
+      </p:sp>
+      <p:sp>
+        <p:nvSpPr>
+          <p:cNvPr id="12" name="Text 10"/>
+          <p:cNvSpPr/>
+          <p:nvPr/>
+        </p:nvSpPr>
+        <p:spPr>
+          <a:xfrm>
+            <a:off x="10710367" y="6382512"/>
+            <a:ext cx="914400" cy="219456"/>
+          </a:xfrm>
+          <a:prstGeom prst="rect">
+            <a:avLst/>
+          </a:prstGeom>
+          <a:noFill/>
+          <a:ln/>
+        </p:spPr>
+        <p:txBody>
+          <a:bodyPr wrap="square" lIns="0" tIns="0" rIns="0" bIns="0" rtlCol="0" anchor="ctr"/>
+          <a:lstStyle/>
+          <a:p>
+            <a:pPr algn="r" indent="0" marL="0">
+              <a:buNone/>
+            </a:pPr>
+            <a:r>
+              <a:rPr lang="en-US" sz="900" b="1" dirty="0">
+                <a:solidFill>
+                  <a:srgbClr val="B98A2E"/>
+                </a:solidFill>
+                <a:latin typeface="Arial" pitchFamily="34" charset="0"/>
+                <a:ea typeface="Arial" pitchFamily="34" charset="-122"/>
+                <a:cs typeface="Arial" pitchFamily="34" charset="-120"/>
+              </a:rPr>
+              <a:t>7</a:t>
+            </a:r>
+            <a:endParaRPr lang="en-US" sz="900" dirty="0"/>
+          </a:p>
+        </p:txBody>
       </p:sp>
     </p:spTree>
   </p:cSld>
@@ -6833,14 +7540,14 @@
         </p:nvSpPr>
         <p:spPr>
           <a:xfrm>
-            <a:off x="566928" y="384048"/>
-            <a:ext cx="45720" cy="786384"/>
-          </a:xfrm>
-          <a:prstGeom prst="rect">
+            <a:off x="566928" y="457200"/>
+            <a:ext cx="384048" cy="384048"/>
+          </a:xfrm>
+          <a:prstGeom prst="ellipse">
             <a:avLst/>
           </a:prstGeom>
           <a:solidFill>
-            <a:srgbClr val="6B8E00"/>
+            <a:srgbClr val="B98A2E"/>
           </a:solidFill>
           <a:ln/>
         </p:spPr>
@@ -6853,32 +7560,71 @@
         </p:nvSpPr>
         <p:spPr>
           <a:xfrm>
-            <a:off x="749808" y="384048"/>
-            <a:ext cx="10874959" cy="182880"/>
-          </a:xfrm>
-          <a:prstGeom prst="rect">
-            <a:avLst/>
-          </a:prstGeom>
-          <a:noFill/>
-          <a:ln/>
-        </p:spPr>
-        <p:txBody>
-          <a:bodyPr wrap="square" lIns="0" tIns="0" rIns="0" bIns="0" rtlCol="0" anchor="ctr"/>
-          <a:lstStyle/>
-          <a:p>
-            <a:pPr indent="0" marL="0">
-              <a:buNone/>
-            </a:pPr>
-            <a:r>
-              <a:rPr lang="en-US" sz="950" b="1" spc="200" kern="0" dirty="0">
-                <a:solidFill>
-                  <a:srgbClr val="6B8E00"/>
+            <a:off x="566928" y="457200"/>
+            <a:ext cx="384048" cy="384048"/>
+          </a:xfrm>
+          <a:prstGeom prst="rect">
+            <a:avLst/>
+          </a:prstGeom>
+          <a:noFill/>
+          <a:ln/>
+        </p:spPr>
+        <p:txBody>
+          <a:bodyPr wrap="square" lIns="0" tIns="0" rIns="0" bIns="0" rtlCol="0" anchor="ctr"/>
+          <a:lstStyle/>
+          <a:p>
+            <a:pPr algn="ctr" indent="0" marL="0">
+              <a:buNone/>
+            </a:pPr>
+            <a:r>
+              <a:rPr lang="en-US" sz="1300" b="1" dirty="0">
+                <a:solidFill>
+                  <a:srgbClr val="FFFFFF"/>
                 </a:solidFill>
                 <a:latin typeface="Arial" pitchFamily="34" charset="0"/>
                 <a:ea typeface="Arial" pitchFamily="34" charset="-122"/>
                 <a:cs typeface="Arial" pitchFamily="34" charset="-120"/>
               </a:rPr>
-              <a:t>08  Thesis</a:t>
+              <a:t>08</a:t>
+            </a:r>
+            <a:endParaRPr lang="en-US" sz="1300" dirty="0"/>
+          </a:p>
+        </p:txBody>
+      </p:sp>
+      <p:sp>
+        <p:nvSpPr>
+          <p:cNvPr id="4" name="Text 2"/>
+          <p:cNvSpPr/>
+          <p:nvPr/>
+        </p:nvSpPr>
+        <p:spPr>
+          <a:xfrm>
+            <a:off x="1133856" y="457200"/>
+            <a:ext cx="10490911" cy="182880"/>
+          </a:xfrm>
+          <a:prstGeom prst="rect">
+            <a:avLst/>
+          </a:prstGeom>
+          <a:noFill/>
+          <a:ln/>
+        </p:spPr>
+        <p:txBody>
+          <a:bodyPr wrap="square" lIns="0" tIns="0" rIns="0" bIns="0" rtlCol="0" anchor="ctr"/>
+          <a:lstStyle/>
+          <a:p>
+            <a:pPr indent="0" marL="0">
+              <a:buNone/>
+            </a:pPr>
+            <a:r>
+              <a:rPr lang="en-US" sz="950" b="1" spc="200" kern="0" dirty="0">
+                <a:solidFill>
+                  <a:srgbClr val="B98A2E"/>
+                </a:solidFill>
+                <a:latin typeface="Arial" pitchFamily="34" charset="0"/>
+                <a:ea typeface="Arial" pitchFamily="34" charset="-122"/>
+                <a:cs typeface="Arial" pitchFamily="34" charset="-120"/>
+              </a:rPr>
+              <a:t>Thesis</a:t>
             </a:r>
             <a:endParaRPr lang="en-US" sz="950" dirty="0"/>
           </a:p>
@@ -6886,32 +7632,32 @@
       </p:sp>
       <p:sp>
         <p:nvSpPr>
-          <p:cNvPr id="4" name="Text 2"/>
-          <p:cNvSpPr/>
-          <p:nvPr/>
-        </p:nvSpPr>
-        <p:spPr>
-          <a:xfrm>
-            <a:off x="749808" y="566928"/>
-            <a:ext cx="10874959" cy="384048"/>
-          </a:xfrm>
-          <a:prstGeom prst="rect">
-            <a:avLst/>
-          </a:prstGeom>
-          <a:noFill/>
-          <a:ln/>
-        </p:spPr>
-        <p:txBody>
-          <a:bodyPr wrap="square" lIns="0" tIns="0" rIns="0" bIns="0" rtlCol="0" anchor="ctr"/>
-          <a:lstStyle/>
-          <a:p>
-            <a:pPr indent="0" marL="0">
-              <a:buNone/>
-            </a:pPr>
-            <a:r>
-              <a:rPr lang="en-US" sz="2200" b="1" dirty="0">
-                <a:solidFill>
-                  <a:srgbClr val="0F172A"/>
+          <p:cNvPr id="5" name="Text 3"/>
+          <p:cNvSpPr/>
+          <p:nvPr/>
+        </p:nvSpPr>
+        <p:spPr>
+          <a:xfrm>
+            <a:off x="1133856" y="640080"/>
+            <a:ext cx="10490911" cy="365760"/>
+          </a:xfrm>
+          <a:prstGeom prst="rect">
+            <a:avLst/>
+          </a:prstGeom>
+          <a:noFill/>
+          <a:ln/>
+        </p:spPr>
+        <p:txBody>
+          <a:bodyPr wrap="square" lIns="0" tIns="0" rIns="0" bIns="0" rtlCol="0" anchor="ctr"/>
+          <a:lstStyle/>
+          <a:p>
+            <a:pPr indent="0" marL="0">
+              <a:buNone/>
+            </a:pPr>
+            <a:r>
+              <a:rPr lang="en-US" sz="2300" b="1" dirty="0">
+                <a:solidFill>
+                  <a:srgbClr val="10161F"/>
                 </a:solidFill>
                 <a:latin typeface="Pretendard" pitchFamily="34" charset="0"/>
                 <a:ea typeface="Pretendard" pitchFamily="34" charset="-122"/>
@@ -6919,46 +7665,7 @@
               </a:rPr>
               <a:t>왜 지금 이 매물을 사야 하는가</a:t>
             </a:r>
-            <a:endParaRPr lang="en-US" sz="2200" dirty="0"/>
-          </a:p>
-        </p:txBody>
-      </p:sp>
-      <p:sp>
-        <p:nvSpPr>
-          <p:cNvPr id="5" name="Text 3"/>
-          <p:cNvSpPr/>
-          <p:nvPr/>
-        </p:nvSpPr>
-        <p:spPr>
-          <a:xfrm>
-            <a:off x="749808" y="950976"/>
-            <a:ext cx="10874959" cy="219456"/>
-          </a:xfrm>
-          <a:prstGeom prst="rect">
-            <a:avLst/>
-          </a:prstGeom>
-          <a:noFill/>
-          <a:ln/>
-        </p:spPr>
-        <p:txBody>
-          <a:bodyPr wrap="square" lIns="0" tIns="0" rIns="0" bIns="0" rtlCol="0" anchor="ctr"/>
-          <a:lstStyle/>
-          <a:p>
-            <a:pPr indent="0" marL="0">
-              <a:buNone/>
-            </a:pPr>
-            <a:r>
-              <a:rPr lang="en-US" sz="1050" dirty="0">
-                <a:solidFill>
-                  <a:srgbClr val="64748B"/>
-                </a:solidFill>
-                <a:latin typeface="Pretendard" pitchFamily="34" charset="0"/>
-                <a:ea typeface="Pretendard" pitchFamily="34" charset="-122"/>
-                <a:cs typeface="Pretendard" pitchFamily="34" charset="-120"/>
-              </a:rPr>
-              <a:t>3대 핵심 투자 포인트 (Investment Highlights)</a:t>
-            </a:r>
-            <a:endParaRPr lang="en-US" sz="1050" dirty="0"/>
+            <a:endParaRPr lang="en-US" sz="2300" dirty="0"/>
           </a:p>
         </p:txBody>
       </p:sp>
@@ -6970,643 +7677,7 @@
         </p:nvSpPr>
         <p:spPr>
           <a:xfrm>
-            <a:off x="566928" y="1481328"/>
-            <a:ext cx="3472586" cy="3474720"/>
-          </a:xfrm>
-          <a:prstGeom prst="roundRect">
-            <a:avLst>
-              <a:gd name="adj" fmla="val 2107"/>
-            </a:avLst>
-          </a:prstGeom>
-          <a:solidFill>
-            <a:srgbClr val="F8FAFC"/>
-          </a:solidFill>
-          <a:ln w="10160">
-            <a:solidFill>
-              <a:srgbClr val="CBD5E1"/>
-            </a:solidFill>
-            <a:prstDash val="solid"/>
-          </a:ln>
-        </p:spPr>
-      </p:sp>
-      <p:sp>
-        <p:nvSpPr>
-          <p:cNvPr id="7" name="Shape 5"/>
-          <p:cNvSpPr/>
-          <p:nvPr/>
-        </p:nvSpPr>
-        <p:spPr>
-          <a:xfrm>
-            <a:off x="566928" y="1481328"/>
-            <a:ext cx="3472586" cy="54864"/>
-          </a:xfrm>
-          <a:prstGeom prst="rect">
-            <a:avLst/>
-          </a:prstGeom>
-          <a:solidFill>
-            <a:srgbClr val="6B8E00"/>
-          </a:solidFill>
-          <a:ln/>
-        </p:spPr>
-      </p:sp>
-      <p:sp>
-        <p:nvSpPr>
-          <p:cNvPr id="8" name="Shape 6"/>
-          <p:cNvSpPr/>
-          <p:nvPr/>
-        </p:nvSpPr>
-        <p:spPr>
-          <a:xfrm>
-            <a:off x="795528" y="1755648"/>
-            <a:ext cx="475488" cy="292608"/>
-          </a:xfrm>
-          <a:prstGeom prst="roundRect">
-            <a:avLst>
-              <a:gd name="adj" fmla="val 12500"/>
-            </a:avLst>
-          </a:prstGeom>
-          <a:solidFill>
-            <a:srgbClr val="A3D900"/>
-          </a:solidFill>
-          <a:ln/>
-        </p:spPr>
-      </p:sp>
-      <p:sp>
-        <p:nvSpPr>
-          <p:cNvPr id="9" name="Text 7"/>
-          <p:cNvSpPr/>
-          <p:nvPr/>
-        </p:nvSpPr>
-        <p:spPr>
-          <a:xfrm>
-            <a:off x="795528" y="1755648"/>
-            <a:ext cx="475488" cy="292608"/>
-          </a:xfrm>
-          <a:prstGeom prst="rect">
-            <a:avLst/>
-          </a:prstGeom>
-          <a:noFill/>
-          <a:ln/>
-        </p:spPr>
-        <p:txBody>
-          <a:bodyPr wrap="square" lIns="0" tIns="0" rIns="0" bIns="0" rtlCol="0" anchor="ctr"/>
-          <a:lstStyle/>
-          <a:p>
-            <a:pPr algn="ctr" indent="0" marL="0">
-              <a:buNone/>
-            </a:pPr>
-            <a:r>
-              <a:rPr lang="en-US" sz="1100" b="1" dirty="0">
-                <a:solidFill>
-                  <a:srgbClr val="4F6A00"/>
-                </a:solidFill>
-                <a:latin typeface="Arial" pitchFamily="34" charset="0"/>
-                <a:ea typeface="Arial" pitchFamily="34" charset="-122"/>
-                <a:cs typeface="Arial" pitchFamily="34" charset="-120"/>
-              </a:rPr>
-              <a:t>01</a:t>
-            </a:r>
-            <a:endParaRPr lang="en-US" sz="1100" dirty="0"/>
-          </a:p>
-        </p:txBody>
-      </p:sp>
-      <p:sp>
-        <p:nvSpPr>
-          <p:cNvPr id="10" name="Text 8"/>
-          <p:cNvSpPr/>
-          <p:nvPr/>
-        </p:nvSpPr>
-        <p:spPr>
-          <a:xfrm>
-            <a:off x="795528" y="2194560"/>
-            <a:ext cx="3015386" cy="365760"/>
-          </a:xfrm>
-          <a:prstGeom prst="rect">
-            <a:avLst/>
-          </a:prstGeom>
-          <a:noFill/>
-          <a:ln/>
-        </p:spPr>
-        <p:txBody>
-          <a:bodyPr wrap="square" lIns="0" tIns="0" rIns="0" bIns="0" rtlCol="0" anchor="t"/>
-          <a:lstStyle/>
-          <a:p>
-            <a:pPr indent="0" marL="0">
-              <a:buNone/>
-            </a:pPr>
-            <a:r>
-              <a:rPr lang="en-US" sz="1500" b="1" dirty="0">
-                <a:solidFill>
-                  <a:srgbClr val="0F172A"/>
-                </a:solidFill>
-                <a:latin typeface="Pretendard" pitchFamily="34" charset="0"/>
-                <a:ea typeface="Pretendard" pitchFamily="34" charset="-122"/>
-                <a:cs typeface="Pretendard" pitchFamily="34" charset="-120"/>
-              </a:rPr>
-              <a:t>원금 안전판 확보</a:t>
-            </a:r>
-            <a:endParaRPr lang="en-US" sz="1500" dirty="0"/>
-          </a:p>
-        </p:txBody>
-      </p:sp>
-      <p:sp>
-        <p:nvSpPr>
-          <p:cNvPr id="11" name="Shape 9"/>
-          <p:cNvSpPr/>
-          <p:nvPr/>
-        </p:nvSpPr>
-        <p:spPr>
-          <a:xfrm>
-            <a:off x="795528" y="2624328"/>
-            <a:ext cx="3015386" cy="0"/>
-          </a:xfrm>
-          <a:prstGeom prst="line">
-            <a:avLst/>
-          </a:prstGeom>
-          <a:noFill/>
-          <a:ln w="6350">
-            <a:solidFill>
-              <a:srgbClr val="CBD5E1"/>
-            </a:solidFill>
-            <a:prstDash val="solid"/>
-          </a:ln>
-        </p:spPr>
-      </p:sp>
-      <p:sp>
-        <p:nvSpPr>
-          <p:cNvPr id="12" name="Text 10"/>
-          <p:cNvSpPr/>
-          <p:nvPr/>
-        </p:nvSpPr>
-        <p:spPr>
-          <a:xfrm>
-            <a:off x="795528" y="2779776"/>
-            <a:ext cx="3015386" cy="1965960"/>
-          </a:xfrm>
-          <a:prstGeom prst="rect">
-            <a:avLst/>
-          </a:prstGeom>
-          <a:noFill/>
-          <a:ln/>
-        </p:spPr>
-        <p:txBody>
-          <a:bodyPr wrap="square" lIns="0" tIns="0" rIns="0" bIns="0" rtlCol="0" anchor="t"/>
-          <a:lstStyle/>
-          <a:p>
-            <a:pPr indent="0" marL="0">
-              <a:lnSpc>
-                <a:spcPct val="130000"/>
-              </a:lnSpc>
-              <a:buNone/>
-            </a:pPr>
-            <a:r>
-              <a:rPr lang="en-US" sz="1200" dirty="0">
-                <a:solidFill>
-                  <a:srgbClr val="0F172A"/>
-                </a:solidFill>
-                <a:latin typeface="Pretendard" pitchFamily="34" charset="0"/>
-                <a:ea typeface="Pretendard" pitchFamily="34" charset="-122"/>
-                <a:cs typeface="Pretendard" pitchFamily="34" charset="-120"/>
-              </a:rPr>
-              <a:t>한남권역의 핵심 입지로, 우량한 대지 지분 가치가 하방 경직성을 강력히 지지합니다.</a:t>
-            </a:r>
-            <a:endParaRPr lang="en-US" sz="1200" dirty="0"/>
-          </a:p>
-        </p:txBody>
-      </p:sp>
-      <p:sp>
-        <p:nvSpPr>
-          <p:cNvPr id="13" name="Shape 11"/>
-          <p:cNvSpPr/>
-          <p:nvPr/>
-        </p:nvSpPr>
-        <p:spPr>
-          <a:xfrm>
-            <a:off x="4359554" y="1481328"/>
-            <a:ext cx="3472586" cy="3474720"/>
-          </a:xfrm>
-          <a:prstGeom prst="roundRect">
-            <a:avLst>
-              <a:gd name="adj" fmla="val 2107"/>
-            </a:avLst>
-          </a:prstGeom>
-          <a:solidFill>
-            <a:srgbClr val="F8FAFC"/>
-          </a:solidFill>
-          <a:ln w="10160">
-            <a:solidFill>
-              <a:srgbClr val="CBD5E1"/>
-            </a:solidFill>
-            <a:prstDash val="solid"/>
-          </a:ln>
-        </p:spPr>
-      </p:sp>
-      <p:sp>
-        <p:nvSpPr>
-          <p:cNvPr id="14" name="Shape 12"/>
-          <p:cNvSpPr/>
-          <p:nvPr/>
-        </p:nvSpPr>
-        <p:spPr>
-          <a:xfrm>
-            <a:off x="4359554" y="1481328"/>
-            <a:ext cx="3472586" cy="54864"/>
-          </a:xfrm>
-          <a:prstGeom prst="rect">
-            <a:avLst/>
-          </a:prstGeom>
-          <a:solidFill>
-            <a:srgbClr val="6B8E00"/>
-          </a:solidFill>
-          <a:ln/>
-        </p:spPr>
-      </p:sp>
-      <p:sp>
-        <p:nvSpPr>
-          <p:cNvPr id="15" name="Shape 13"/>
-          <p:cNvSpPr/>
-          <p:nvPr/>
-        </p:nvSpPr>
-        <p:spPr>
-          <a:xfrm>
-            <a:off x="4588154" y="1755648"/>
-            <a:ext cx="475488" cy="292608"/>
-          </a:xfrm>
-          <a:prstGeom prst="roundRect">
-            <a:avLst>
-              <a:gd name="adj" fmla="val 12500"/>
-            </a:avLst>
-          </a:prstGeom>
-          <a:solidFill>
-            <a:srgbClr val="A3D900"/>
-          </a:solidFill>
-          <a:ln/>
-        </p:spPr>
-      </p:sp>
-      <p:sp>
-        <p:nvSpPr>
-          <p:cNvPr id="16" name="Text 14"/>
-          <p:cNvSpPr/>
-          <p:nvPr/>
-        </p:nvSpPr>
-        <p:spPr>
-          <a:xfrm>
-            <a:off x="4588154" y="1755648"/>
-            <a:ext cx="475488" cy="292608"/>
-          </a:xfrm>
-          <a:prstGeom prst="rect">
-            <a:avLst/>
-          </a:prstGeom>
-          <a:noFill/>
-          <a:ln/>
-        </p:spPr>
-        <p:txBody>
-          <a:bodyPr wrap="square" lIns="0" tIns="0" rIns="0" bIns="0" rtlCol="0" anchor="ctr"/>
-          <a:lstStyle/>
-          <a:p>
-            <a:pPr algn="ctr" indent="0" marL="0">
-              <a:buNone/>
-            </a:pPr>
-            <a:r>
-              <a:rPr lang="en-US" sz="1100" b="1" dirty="0">
-                <a:solidFill>
-                  <a:srgbClr val="4F6A00"/>
-                </a:solidFill>
-                <a:latin typeface="Arial" pitchFamily="34" charset="0"/>
-                <a:ea typeface="Arial" pitchFamily="34" charset="-122"/>
-                <a:cs typeface="Arial" pitchFamily="34" charset="-120"/>
-              </a:rPr>
-              <a:t>02</a:t>
-            </a:r>
-            <a:endParaRPr lang="en-US" sz="1100" dirty="0"/>
-          </a:p>
-        </p:txBody>
-      </p:sp>
-      <p:sp>
-        <p:nvSpPr>
-          <p:cNvPr id="17" name="Text 15"/>
-          <p:cNvSpPr/>
-          <p:nvPr/>
-        </p:nvSpPr>
-        <p:spPr>
-          <a:xfrm>
-            <a:off x="4588154" y="2194560"/>
-            <a:ext cx="3015386" cy="365760"/>
-          </a:xfrm>
-          <a:prstGeom prst="rect">
-            <a:avLst/>
-          </a:prstGeom>
-          <a:noFill/>
-          <a:ln/>
-        </p:spPr>
-        <p:txBody>
-          <a:bodyPr wrap="square" lIns="0" tIns="0" rIns="0" bIns="0" rtlCol="0" anchor="t"/>
-          <a:lstStyle/>
-          <a:p>
-            <a:pPr indent="0" marL="0">
-              <a:buNone/>
-            </a:pPr>
-            <a:r>
-              <a:rPr lang="en-US" sz="1500" b="1" dirty="0">
-                <a:solidFill>
-                  <a:srgbClr val="0F172A"/>
-                </a:solidFill>
-                <a:latin typeface="Pretendard" pitchFamily="34" charset="0"/>
-                <a:ea typeface="Pretendard" pitchFamily="34" charset="-122"/>
-                <a:cs typeface="Pretendard" pitchFamily="34" charset="-120"/>
-              </a:rPr>
-              <a:t>확실한 월 현금흐름</a:t>
-            </a:r>
-            <a:endParaRPr lang="en-US" sz="1500" dirty="0"/>
-          </a:p>
-        </p:txBody>
-      </p:sp>
-      <p:sp>
-        <p:nvSpPr>
-          <p:cNvPr id="18" name="Shape 16"/>
-          <p:cNvSpPr/>
-          <p:nvPr/>
-        </p:nvSpPr>
-        <p:spPr>
-          <a:xfrm>
-            <a:off x="4588154" y="2624328"/>
-            <a:ext cx="3015386" cy="0"/>
-          </a:xfrm>
-          <a:prstGeom prst="line">
-            <a:avLst/>
-          </a:prstGeom>
-          <a:noFill/>
-          <a:ln w="6350">
-            <a:solidFill>
-              <a:srgbClr val="CBD5E1"/>
-            </a:solidFill>
-            <a:prstDash val="solid"/>
-          </a:ln>
-        </p:spPr>
-      </p:sp>
-      <p:sp>
-        <p:nvSpPr>
-          <p:cNvPr id="19" name="Text 17"/>
-          <p:cNvSpPr/>
-          <p:nvPr/>
-        </p:nvSpPr>
-        <p:spPr>
-          <a:xfrm>
-            <a:off x="4588154" y="2779776"/>
-            <a:ext cx="3015386" cy="1965960"/>
-          </a:xfrm>
-          <a:prstGeom prst="rect">
-            <a:avLst/>
-          </a:prstGeom>
-          <a:noFill/>
-          <a:ln/>
-        </p:spPr>
-        <p:txBody>
-          <a:bodyPr wrap="square" lIns="0" tIns="0" rIns="0" bIns="0" rtlCol="0" anchor="t"/>
-          <a:lstStyle/>
-          <a:p>
-            <a:pPr indent="0" marL="0">
-              <a:lnSpc>
-                <a:spcPct val="130000"/>
-              </a:lnSpc>
-              <a:buNone/>
-            </a:pPr>
-            <a:r>
-              <a:rPr lang="en-US" sz="1200" dirty="0">
-                <a:solidFill>
-                  <a:srgbClr val="0F172A"/>
-                </a:solidFill>
-                <a:latin typeface="Pretendard" pitchFamily="34" charset="0"/>
-                <a:ea typeface="Pretendard" pitchFamily="34" charset="-122"/>
-                <a:cs typeface="Pretendard" pitchFamily="34" charset="-120"/>
-              </a:rPr>
-              <a:t>우량 테넌트 만실 운영 및 장기 계약 구조를 통해 매월 안정적인 순수익 창출이 검토 여지가 있으나, 관련 법규·인허가·시설 요건의 현장 확인이 필요합니다..</a:t>
-            </a:r>
-            <a:endParaRPr lang="en-US" sz="1200" dirty="0"/>
-          </a:p>
-        </p:txBody>
-      </p:sp>
-      <p:sp>
-        <p:nvSpPr>
-          <p:cNvPr id="20" name="Shape 18"/>
-          <p:cNvSpPr/>
-          <p:nvPr/>
-        </p:nvSpPr>
-        <p:spPr>
-          <a:xfrm>
-            <a:off x="8152181" y="1481328"/>
-            <a:ext cx="3472586" cy="3474720"/>
-          </a:xfrm>
-          <a:prstGeom prst="roundRect">
-            <a:avLst>
-              <a:gd name="adj" fmla="val 2107"/>
-            </a:avLst>
-          </a:prstGeom>
-          <a:solidFill>
-            <a:srgbClr val="F8FAFC"/>
-          </a:solidFill>
-          <a:ln w="10160">
-            <a:solidFill>
-              <a:srgbClr val="CBD5E1"/>
-            </a:solidFill>
-            <a:prstDash val="solid"/>
-          </a:ln>
-        </p:spPr>
-      </p:sp>
-      <p:sp>
-        <p:nvSpPr>
-          <p:cNvPr id="21" name="Shape 19"/>
-          <p:cNvSpPr/>
-          <p:nvPr/>
-        </p:nvSpPr>
-        <p:spPr>
-          <a:xfrm>
-            <a:off x="8152181" y="1481328"/>
-            <a:ext cx="3472586" cy="54864"/>
-          </a:xfrm>
-          <a:prstGeom prst="rect">
-            <a:avLst/>
-          </a:prstGeom>
-          <a:solidFill>
-            <a:srgbClr val="6B8E00"/>
-          </a:solidFill>
-          <a:ln/>
-        </p:spPr>
-      </p:sp>
-      <p:sp>
-        <p:nvSpPr>
-          <p:cNvPr id="22" name="Shape 20"/>
-          <p:cNvSpPr/>
-          <p:nvPr/>
-        </p:nvSpPr>
-        <p:spPr>
-          <a:xfrm>
-            <a:off x="8380781" y="1755648"/>
-            <a:ext cx="475488" cy="292608"/>
-          </a:xfrm>
-          <a:prstGeom prst="roundRect">
-            <a:avLst>
-              <a:gd name="adj" fmla="val 12500"/>
-            </a:avLst>
-          </a:prstGeom>
-          <a:solidFill>
-            <a:srgbClr val="A3D900"/>
-          </a:solidFill>
-          <a:ln/>
-        </p:spPr>
-      </p:sp>
-      <p:sp>
-        <p:nvSpPr>
-          <p:cNvPr id="23" name="Text 21"/>
-          <p:cNvSpPr/>
-          <p:nvPr/>
-        </p:nvSpPr>
-        <p:spPr>
-          <a:xfrm>
-            <a:off x="8380781" y="1755648"/>
-            <a:ext cx="475488" cy="292608"/>
-          </a:xfrm>
-          <a:prstGeom prst="rect">
-            <a:avLst/>
-          </a:prstGeom>
-          <a:noFill/>
-          <a:ln/>
-        </p:spPr>
-        <p:txBody>
-          <a:bodyPr wrap="square" lIns="0" tIns="0" rIns="0" bIns="0" rtlCol="0" anchor="ctr"/>
-          <a:lstStyle/>
-          <a:p>
-            <a:pPr algn="ctr" indent="0" marL="0">
-              <a:buNone/>
-            </a:pPr>
-            <a:r>
-              <a:rPr lang="en-US" sz="1100" b="1" dirty="0">
-                <a:solidFill>
-                  <a:srgbClr val="4F6A00"/>
-                </a:solidFill>
-                <a:latin typeface="Arial" pitchFamily="34" charset="0"/>
-                <a:ea typeface="Arial" pitchFamily="34" charset="-122"/>
-                <a:cs typeface="Arial" pitchFamily="34" charset="-120"/>
-              </a:rPr>
-              <a:t>03</a:t>
-            </a:r>
-            <a:endParaRPr lang="en-US" sz="1100" dirty="0"/>
-          </a:p>
-        </p:txBody>
-      </p:sp>
-      <p:sp>
-        <p:nvSpPr>
-          <p:cNvPr id="24" name="Text 22"/>
-          <p:cNvSpPr/>
-          <p:nvPr/>
-        </p:nvSpPr>
-        <p:spPr>
-          <a:xfrm>
-            <a:off x="8380781" y="2194560"/>
-            <a:ext cx="3015386" cy="365760"/>
-          </a:xfrm>
-          <a:prstGeom prst="rect">
-            <a:avLst/>
-          </a:prstGeom>
-          <a:noFill/>
-          <a:ln/>
-        </p:spPr>
-        <p:txBody>
-          <a:bodyPr wrap="square" lIns="0" tIns="0" rIns="0" bIns="0" rtlCol="0" anchor="t"/>
-          <a:lstStyle/>
-          <a:p>
-            <a:pPr indent="0" marL="0">
-              <a:buNone/>
-            </a:pPr>
-            <a:r>
-              <a:rPr lang="en-US" sz="1500" b="1" dirty="0">
-                <a:solidFill>
-                  <a:srgbClr val="0F172A"/>
-                </a:solidFill>
-                <a:latin typeface="Pretendard" pitchFamily="34" charset="0"/>
-                <a:ea typeface="Pretendard" pitchFamily="34" charset="-122"/>
-                <a:cs typeface="Pretendard" pitchFamily="34" charset="-120"/>
-              </a:rPr>
-              <a:t>가치 상승 및 출구 전략</a:t>
-            </a:r>
-            <a:endParaRPr lang="en-US" sz="1500" dirty="0"/>
-          </a:p>
-        </p:txBody>
-      </p:sp>
-      <p:sp>
-        <p:nvSpPr>
-          <p:cNvPr id="25" name="Shape 23"/>
-          <p:cNvSpPr/>
-          <p:nvPr/>
-        </p:nvSpPr>
-        <p:spPr>
-          <a:xfrm>
-            <a:off x="8380781" y="2624328"/>
-            <a:ext cx="3015386" cy="0"/>
-          </a:xfrm>
-          <a:prstGeom prst="line">
-            <a:avLst/>
-          </a:prstGeom>
-          <a:noFill/>
-          <a:ln w="6350">
-            <a:solidFill>
-              <a:srgbClr val="CBD5E1"/>
-            </a:solidFill>
-            <a:prstDash val="solid"/>
-          </a:ln>
-        </p:spPr>
-      </p:sp>
-      <p:sp>
-        <p:nvSpPr>
-          <p:cNvPr id="26" name="Text 24"/>
-          <p:cNvSpPr/>
-          <p:nvPr/>
-        </p:nvSpPr>
-        <p:spPr>
-          <a:xfrm>
-            <a:off x="8380781" y="2779776"/>
-            <a:ext cx="3015386" cy="1965960"/>
-          </a:xfrm>
-          <a:prstGeom prst="rect">
-            <a:avLst/>
-          </a:prstGeom>
-          <a:noFill/>
-          <a:ln/>
-        </p:spPr>
-        <p:txBody>
-          <a:bodyPr wrap="square" lIns="0" tIns="0" rIns="0" bIns="0" rtlCol="0" anchor="t"/>
-          <a:lstStyle/>
-          <a:p>
-            <a:pPr indent="0" marL="0">
-              <a:lnSpc>
-                <a:spcPct val="130000"/>
-              </a:lnSpc>
-              <a:buNone/>
-            </a:pPr>
-            <a:r>
-              <a:rPr lang="en-US" sz="1200" dirty="0">
-                <a:solidFill>
-                  <a:srgbClr val="0F172A"/>
-                </a:solidFill>
-                <a:latin typeface="Pretendard" pitchFamily="34" charset="0"/>
-                <a:ea typeface="Pretendard" pitchFamily="34" charset="-122"/>
-                <a:cs typeface="Pretendard" pitchFamily="34" charset="-120"/>
-              </a:rPr>
-              <a:t>현행 공법 여력을 활용한 밸류업 기회와 더불어 향후 권역 지가 상승에 따른 시세차익 실현이 유력합니다.</a:t>
-            </a:r>
-            <a:endParaRPr lang="en-US" sz="1200" dirty="0"/>
-          </a:p>
-        </p:txBody>
-      </p:sp>
-      <p:sp>
-        <p:nvSpPr>
-          <p:cNvPr id="27" name="Shape 25"/>
-          <p:cNvSpPr/>
-          <p:nvPr/>
-        </p:nvSpPr>
-        <p:spPr>
-          <a:xfrm>
-            <a:off x="566928" y="5138928"/>
+            <a:off x="566928" y="4983480"/>
             <a:ext cx="11057839" cy="804672"/>
           </a:xfrm>
           <a:prstGeom prst="roundRect">
@@ -7615,11 +7686,11 @@
             </a:avLst>
           </a:prstGeom>
           <a:solidFill>
-            <a:srgbClr val="E8F5CC"/>
+            <a:srgbClr val="F3EBDA"/>
           </a:solidFill>
           <a:ln w="10160">
             <a:solidFill>
-              <a:srgbClr val="A3D900"/>
+              <a:srgbClr val="D9B668"/>
             </a:solidFill>
             <a:prstDash val="solid"/>
           </a:ln>
@@ -7627,53 +7698,53 @@
       </p:sp>
       <p:sp>
         <p:nvSpPr>
-          <p:cNvPr id="28" name="Text 26"/>
-          <p:cNvSpPr/>
-          <p:nvPr/>
-        </p:nvSpPr>
-        <p:spPr>
-          <a:xfrm>
-            <a:off x="749808" y="5248656"/>
-            <a:ext cx="1645920" cy="219456"/>
-          </a:xfrm>
-          <a:prstGeom prst="rect">
-            <a:avLst/>
-          </a:prstGeom>
-          <a:noFill/>
-          <a:ln/>
-        </p:spPr>
-        <p:txBody>
-          <a:bodyPr wrap="square" lIns="0" tIns="0" rIns="0" bIns="0" rtlCol="0" anchor="ctr"/>
-          <a:lstStyle/>
-          <a:p>
-            <a:pPr indent="0" marL="0">
-              <a:buNone/>
-            </a:pPr>
-            <a:r>
-              <a:rPr lang="en-US" sz="950" b="1" dirty="0">
-                <a:solidFill>
-                  <a:srgbClr val="4F6A00"/>
+          <p:cNvPr id="7" name="Text 5"/>
+          <p:cNvSpPr/>
+          <p:nvPr/>
+        </p:nvSpPr>
+        <p:spPr>
+          <a:xfrm>
+            <a:off x="749808" y="5093208"/>
+            <a:ext cx="1691640" cy="256032"/>
+          </a:xfrm>
+          <a:prstGeom prst="rect">
+            <a:avLst/>
+          </a:prstGeom>
+          <a:noFill/>
+          <a:ln/>
+        </p:spPr>
+        <p:txBody>
+          <a:bodyPr wrap="square" lIns="0" tIns="0" rIns="0" bIns="0" rtlCol="0" anchor="ctr"/>
+          <a:lstStyle/>
+          <a:p>
+            <a:pPr indent="0" marL="0">
+              <a:buNone/>
+            </a:pPr>
+            <a:r>
+              <a:rPr lang="en-US" sz="1050" b="1" dirty="0">
+                <a:solidFill>
+                  <a:srgbClr val="977024"/>
                 </a:solidFill>
                 <a:latin typeface="Pretendard" pitchFamily="34" charset="0"/>
                 <a:ea typeface="Pretendard" pitchFamily="34" charset="-122"/>
                 <a:cs typeface="Pretendard" pitchFamily="34" charset="-120"/>
               </a:rPr>
-              <a:t>💡 종합 가치 제안</a:t>
-            </a:r>
-            <a:endParaRPr lang="en-US" sz="950" dirty="0"/>
-          </a:p>
-        </p:txBody>
-      </p:sp>
-      <p:sp>
-        <p:nvSpPr>
-          <p:cNvPr id="29" name="Text 27"/>
-          <p:cNvSpPr/>
-          <p:nvPr/>
-        </p:nvSpPr>
-        <p:spPr>
-          <a:xfrm>
-            <a:off x="2441448" y="5230368"/>
-            <a:ext cx="9000439" cy="621792"/>
+              <a:t>종합 가치 제안</a:t>
+            </a:r>
+            <a:endParaRPr lang="en-US" sz="1050" dirty="0"/>
+          </a:p>
+        </p:txBody>
+      </p:sp>
+      <p:sp>
+        <p:nvSpPr>
+          <p:cNvPr id="8" name="Text 6"/>
+          <p:cNvSpPr/>
+          <p:nvPr/>
+        </p:nvSpPr>
+        <p:spPr>
+          <a:xfrm>
+            <a:off x="2487168" y="5056632"/>
+            <a:ext cx="8954719" cy="658368"/>
           </a:xfrm>
           <a:prstGeom prst="rect">
             <a:avLst/>
@@ -7687,86 +7758,102 @@
           <a:p>
             <a:pPr indent="0" marL="0">
               <a:lnSpc>
-                <a:spcPct val="120000"/>
+                <a:spcPct val="125000"/>
               </a:lnSpc>
               <a:buNone/>
             </a:pPr>
             <a:r>
-              <a:rPr lang="en-US" sz="1000" dirty="0">
-                <a:solidFill>
-                  <a:srgbClr val="334155"/>
+              <a:rPr lang="en-US" sz="1100" dirty="0">
+                <a:solidFill>
+                  <a:srgbClr val="10161F"/>
                 </a:solidFill>
                 <a:latin typeface="Pretendard" pitchFamily="34" charset="0"/>
                 <a:ea typeface="Pretendard" pitchFamily="34" charset="-122"/>
                 <a:cs typeface="Pretendard" pitchFamily="34" charset="-120"/>
               </a:rPr>
-              <a:t>본 자산의 3대 핵심 투자 포인트와 예상 매수자 유형 분석입니다.</a:t>
-            </a:r>
-            <a:endParaRPr lang="en-US" sz="1000" dirty="0"/>
-          </a:p>
-        </p:txBody>
-      </p:sp>
-      <p:sp>
-        <p:nvSpPr>
-          <p:cNvPr id="30" name="Text 28"/>
-          <p:cNvSpPr/>
-          <p:nvPr/>
-        </p:nvSpPr>
-        <p:spPr>
-          <a:xfrm>
-            <a:off x="566928" y="6419088"/>
-            <a:ext cx="11057839" cy="201168"/>
-          </a:xfrm>
-          <a:prstGeom prst="rect">
-            <a:avLst/>
-          </a:prstGeom>
-          <a:noFill/>
-          <a:ln/>
-        </p:spPr>
-        <p:txBody>
-          <a:bodyPr wrap="square" lIns="0" tIns="0" rIns="0" bIns="0" rtlCol="0" anchor="ctr"/>
-          <a:lstStyle/>
-          <a:p>
-            <a:pPr algn="ctr" indent="0" marL="0">
-              <a:buNone/>
-            </a:pPr>
-            <a:r>
-              <a:rPr lang="en-US" sz="750" dirty="0">
-                <a:solidFill>
-                  <a:srgbClr val="64748B"/>
+              <a:t>{"ok":true,"mocked":true,"extractedFields":{"area_signal":"역삼","asset_type":"오피스빌딩","price_band":"300억","size_signal":"3000평(약 9917.4㎡)"},"extractedFacts":{"region":"역삼","exactAddressCandidate":"역삼동 742-1","assetType":"오피스빌딩","priceText":"300억","sizeText":"3000평(약 9917.4㎡)","currentUse":"오피스","currentUseSignal":"근린생활시설","leaseSignal":"임대중","vacancySignal":"공실없음","tenantNames":["쿠팡","네이버"],"unitRentTexts":["301호: 1500만"],"sellerMotivationText":"자산 효율화","brokerNotes":["초역세권 매물"]},"detectedSensitiveFields":["exact_address","tenant_name"],"ambiguousFields":[],"warnings":[],"areaSignal":"역삼","assetType":"오피스빌딩","priceBand":"300억","sizeSignal":"3000평(약 9917.4㎡)","dealType":"매각","buildingName":"역삼 센트럴타워","exactAddress":"역삼동 742-1","totalFloorArea":9917.3,"buildYear":2015,"currentUseSignal":"근린생활시설","vacancySignal":"공실 없음","fitSummary":"초역세권 근생 빌딩으로 시행/사옥 매입에 최적화","cautionSummary":"주요 임차 업종 만기 조율 필요","hiddenFields":["exact_address","seller_motivation"],"confidence":{"areaSignal":"confirmed","assetType":"confirmed","priceBand":"ai_hypothesis","fitSummary":"ai_hypothesis"},"missingData":["sizeSignal"],"boundaryNote":"본 자료는 실거래 통계 기반 참고치입니다.","buyerType":"법인 사옥형","budgetRange":{"min":50,"max":80,"display":"50억~80억"},"preferredRegions":["강남","성수"],"assetTypes":["꼬마빌딩","사옥용"],"purchasePurpose":"사옥용 매입","mustHave":["초역세권","주차"],"niceToHave":["테라스","루프탑"],"riskTolerance":"medium","financingNote":"자본금 50% 준비","missingQuestions":["구체적인 입주 시기가 언제인가요?","선호하는 수익률이 있나요?"],"privacyNotes":["연락처 비공개"],"fitReasons":["매수자 예산(50-80억)에 부합하는 매물입니다.","요청하신 성수/강남 권역에 해당합니다."],"cautionReasons":["요청한 용도와 달리 명도 협의가 다소 필요합니다."],"recommendedNextAction":"현장 답사 제안","kakaoMessage":"안녕하세요! 요청하신 조건에 부합하는 추천 매물이 있어 안내해 드립니다. 확인해보시고 피드백 부탁드립니다.","title":"강남 역삼역 초역세권 오피스 사옥용 빌딩 매각","shortSummary":"역삼역 도보 5분 거리의 준신축급 대형 오피스빌딩입니다.","dealPoints":["초역세권","사옥 최적"],"cautionPoints":["명도 조율 필요"],"hiddenInfoNotice":["보증금 및 지번은 인가 후 확인 가능"],"gateMessage":"G1 등급 등록이 필요합니다.","kakaoText":"강남 역삼역 오피스 빌딩 매각 안내입니다.","exactUnitCandidate":"101호","floor":"1층","areaSqmText":"150㎡","spaceType":"office","depositText":"5000만","monthlyRentText":"400만","maintenanceFeeText":"50만","availableFromText":"즉시입주","leaseTermMonthsText":"24","incentivesText":"렌트프리 2개월","restrictions":[],"landlordIdentity":"김성수","currentTenant":"스타트업","vacancyReason":"이전 확장","rentNegotiation":"협의 가능","region":"성수동","areaSqm":150,"deposit":5000,"monthlyRent":400,"maintenanceFee":50,"availableFrom":"즉시입주","leaseTermMonths":24,"incentives":{"rentFreeMonths":2,"interiorSupport":"일부 인테리어 지원","freeRentDetail":"렌트프리 2개월 지원"},"shortSummaryLease":"성수역 도보 5분 거리 1층 리테일 상가 매물입니다."}</a:t>
+            </a:r>
+            <a:endParaRPr lang="en-US" sz="1100" dirty="0"/>
+          </a:p>
+        </p:txBody>
+      </p:sp>
+      <p:sp>
+        <p:nvSpPr>
+          <p:cNvPr id="9" name="Text 7"/>
+          <p:cNvSpPr/>
+          <p:nvPr/>
+        </p:nvSpPr>
+        <p:spPr>
+          <a:xfrm>
+            <a:off x="566928" y="6382512"/>
+            <a:ext cx="7315200" cy="219456"/>
+          </a:xfrm>
+          <a:prstGeom prst="rect">
+            <a:avLst/>
+          </a:prstGeom>
+          <a:noFill/>
+          <a:ln/>
+        </p:spPr>
+        <p:txBody>
+          <a:bodyPr wrap="square" lIns="0" tIns="0" rIns="0" bIns="0" rtlCol="0" anchor="ctr"/>
+          <a:lstStyle/>
+          <a:p>
+            <a:pPr indent="0" marL="0">
+              <a:buNone/>
+            </a:pPr>
+            <a:r>
+              <a:rPr lang="en-US" sz="800" dirty="0">
+                <a:solidFill>
+                  <a:srgbClr val="718096"/>
                 </a:solidFill>
                 <a:latin typeface="Pretendard" pitchFamily="34" charset="0"/>
                 <a:ea typeface="Pretendard" pitchFamily="34" charset="-122"/>
                 <a:cs typeface="Pretendard" pitchFamily="34" charset="-120"/>
               </a:rPr>
-              <a:t>크리딜  ·    ·  8</a:t>
-            </a:r>
-            <a:endParaRPr lang="en-US" sz="750" dirty="0"/>
-          </a:p>
-        </p:txBody>
-      </p:sp>
-      <p:sp>
-        <p:nvSpPr>
-          <p:cNvPr id="31" name="Shape 29"/>
-          <p:cNvSpPr/>
-          <p:nvPr/>
-        </p:nvSpPr>
-        <p:spPr>
-          <a:xfrm>
-            <a:off x="4437172" y="6382512"/>
-            <a:ext cx="3317352" cy="0"/>
-          </a:xfrm>
-          <a:prstGeom prst="line">
-            <a:avLst/>
-          </a:prstGeom>
-          <a:noFill/>
-          <a:ln w="6350">
-            <a:solidFill>
-              <a:srgbClr val="6B8E00"/>
-            </a:solidFill>
-            <a:prstDash val="solid"/>
-          </a:ln>
-        </p:spPr>
+              <a:t>크리딜   |   </a:t>
+            </a:r>
+            <a:endParaRPr lang="en-US" sz="800" dirty="0"/>
+          </a:p>
+        </p:txBody>
+      </p:sp>
+      <p:sp>
+        <p:nvSpPr>
+          <p:cNvPr id="10" name="Text 8"/>
+          <p:cNvSpPr/>
+          <p:nvPr/>
+        </p:nvSpPr>
+        <p:spPr>
+          <a:xfrm>
+            <a:off x="10710367" y="6382512"/>
+            <a:ext cx="914400" cy="219456"/>
+          </a:xfrm>
+          <a:prstGeom prst="rect">
+            <a:avLst/>
+          </a:prstGeom>
+          <a:noFill/>
+          <a:ln/>
+        </p:spPr>
+        <p:txBody>
+          <a:bodyPr wrap="square" lIns="0" tIns="0" rIns="0" bIns="0" rtlCol="0" anchor="ctr"/>
+          <a:lstStyle/>
+          <a:p>
+            <a:pPr algn="r" indent="0" marL="0">
+              <a:buNone/>
+            </a:pPr>
+            <a:r>
+              <a:rPr lang="en-US" sz="900" b="1" dirty="0">
+                <a:solidFill>
+                  <a:srgbClr val="B98A2E"/>
+                </a:solidFill>
+                <a:latin typeface="Arial" pitchFamily="34" charset="0"/>
+                <a:ea typeface="Arial" pitchFamily="34" charset="-122"/>
+                <a:cs typeface="Arial" pitchFamily="34" charset="-120"/>
+              </a:rPr>
+              <a:t>8</a:t>
+            </a:r>
+            <a:endParaRPr lang="en-US" sz="900" dirty="0"/>
+          </a:p>
+        </p:txBody>
       </p:sp>
     </p:spTree>
   </p:cSld>
@@ -7808,14 +7895,14 @@
         </p:nvSpPr>
         <p:spPr>
           <a:xfrm>
-            <a:off x="566928" y="384048"/>
-            <a:ext cx="45720" cy="566928"/>
-          </a:xfrm>
-          <a:prstGeom prst="rect">
+            <a:off x="566928" y="457200"/>
+            <a:ext cx="384048" cy="384048"/>
+          </a:xfrm>
+          <a:prstGeom prst="ellipse">
             <a:avLst/>
           </a:prstGeom>
           <a:solidFill>
-            <a:srgbClr val="6B8E00"/>
+            <a:srgbClr val="B98A2E"/>
           </a:solidFill>
           <a:ln/>
         </p:spPr>
@@ -7828,32 +7915,71 @@
         </p:nvSpPr>
         <p:spPr>
           <a:xfrm>
-            <a:off x="749808" y="384048"/>
-            <a:ext cx="10874959" cy="182880"/>
-          </a:xfrm>
-          <a:prstGeom prst="rect">
-            <a:avLst/>
-          </a:prstGeom>
-          <a:noFill/>
-          <a:ln/>
-        </p:spPr>
-        <p:txBody>
-          <a:bodyPr wrap="square" lIns="0" tIns="0" rIns="0" bIns="0" rtlCol="0" anchor="ctr"/>
-          <a:lstStyle/>
-          <a:p>
-            <a:pPr indent="0" marL="0">
-              <a:buNone/>
-            </a:pPr>
-            <a:r>
-              <a:rPr lang="en-US" sz="950" b="1" spc="200" kern="0" dirty="0">
-                <a:solidFill>
-                  <a:srgbClr val="6B8E00"/>
+            <a:off x="566928" y="457200"/>
+            <a:ext cx="384048" cy="384048"/>
+          </a:xfrm>
+          <a:prstGeom prst="rect">
+            <a:avLst/>
+          </a:prstGeom>
+          <a:noFill/>
+          <a:ln/>
+        </p:spPr>
+        <p:txBody>
+          <a:bodyPr wrap="square" lIns="0" tIns="0" rIns="0" bIns="0" rtlCol="0" anchor="ctr"/>
+          <a:lstStyle/>
+          <a:p>
+            <a:pPr algn="ctr" indent="0" marL="0">
+              <a:buNone/>
+            </a:pPr>
+            <a:r>
+              <a:rPr lang="en-US" sz="1300" b="1" dirty="0">
+                <a:solidFill>
+                  <a:srgbClr val="FFFFFF"/>
                 </a:solidFill>
                 <a:latin typeface="Arial" pitchFamily="34" charset="0"/>
                 <a:ea typeface="Arial" pitchFamily="34" charset="-122"/>
                 <a:cs typeface="Arial" pitchFamily="34" charset="-120"/>
               </a:rPr>
-              <a:t>09  Process</a:t>
+              <a:t>09</a:t>
+            </a:r>
+            <a:endParaRPr lang="en-US" sz="1300" dirty="0"/>
+          </a:p>
+        </p:txBody>
+      </p:sp>
+      <p:sp>
+        <p:nvSpPr>
+          <p:cNvPr id="4" name="Text 2"/>
+          <p:cNvSpPr/>
+          <p:nvPr/>
+        </p:nvSpPr>
+        <p:spPr>
+          <a:xfrm>
+            <a:off x="1133856" y="457200"/>
+            <a:ext cx="10490911" cy="182880"/>
+          </a:xfrm>
+          <a:prstGeom prst="rect">
+            <a:avLst/>
+          </a:prstGeom>
+          <a:noFill/>
+          <a:ln/>
+        </p:spPr>
+        <p:txBody>
+          <a:bodyPr wrap="square" lIns="0" tIns="0" rIns="0" bIns="0" rtlCol="0" anchor="ctr"/>
+          <a:lstStyle/>
+          <a:p>
+            <a:pPr indent="0" marL="0">
+              <a:buNone/>
+            </a:pPr>
+            <a:r>
+              <a:rPr lang="en-US" sz="950" b="1" spc="200" kern="0" dirty="0">
+                <a:solidFill>
+                  <a:srgbClr val="B98A2E"/>
+                </a:solidFill>
+                <a:latin typeface="Arial" pitchFamily="34" charset="0"/>
+                <a:ea typeface="Arial" pitchFamily="34" charset="-122"/>
+                <a:cs typeface="Arial" pitchFamily="34" charset="-120"/>
+              </a:rPr>
+              <a:t>Process</a:t>
             </a:r>
             <a:endParaRPr lang="en-US" sz="950" dirty="0"/>
           </a:p>
@@ -7861,32 +7987,32 @@
       </p:sp>
       <p:sp>
         <p:nvSpPr>
-          <p:cNvPr id="4" name="Text 2"/>
-          <p:cNvSpPr/>
-          <p:nvPr/>
-        </p:nvSpPr>
-        <p:spPr>
-          <a:xfrm>
-            <a:off x="749808" y="566928"/>
-            <a:ext cx="10874959" cy="384048"/>
-          </a:xfrm>
-          <a:prstGeom prst="rect">
-            <a:avLst/>
-          </a:prstGeom>
-          <a:noFill/>
-          <a:ln/>
-        </p:spPr>
-        <p:txBody>
-          <a:bodyPr wrap="square" lIns="0" tIns="0" rIns="0" bIns="0" rtlCol="0" anchor="ctr"/>
-          <a:lstStyle/>
-          <a:p>
-            <a:pPr indent="0" marL="0">
-              <a:buNone/>
-            </a:pPr>
-            <a:r>
-              <a:rPr lang="en-US" sz="2200" b="1" dirty="0">
-                <a:solidFill>
-                  <a:srgbClr val="0F172A"/>
+          <p:cNvPr id="5" name="Text 3"/>
+          <p:cNvSpPr/>
+          <p:nvPr/>
+        </p:nvSpPr>
+        <p:spPr>
+          <a:xfrm>
+            <a:off x="1133856" y="640080"/>
+            <a:ext cx="10490911" cy="365760"/>
+          </a:xfrm>
+          <a:prstGeom prst="rect">
+            <a:avLst/>
+          </a:prstGeom>
+          <a:noFill/>
+          <a:ln/>
+        </p:spPr>
+        <p:txBody>
+          <a:bodyPr wrap="square" lIns="0" tIns="0" rIns="0" bIns="0" rtlCol="0" anchor="ctr"/>
+          <a:lstStyle/>
+          <a:p>
+            <a:pPr indent="0" marL="0">
+              <a:buNone/>
+            </a:pPr>
+            <a:r>
+              <a:rPr lang="en-US" sz="2300" b="1" dirty="0">
+                <a:solidFill>
+                  <a:srgbClr val="10161F"/>
                 </a:solidFill>
                 <a:latin typeface="Pretendard" pitchFamily="34" charset="0"/>
                 <a:ea typeface="Pretendard" pitchFamily="34" charset="-122"/>
@@ -7894,13 +8020,13 @@
               </a:rPr>
               <a:t>검토 후 다음 단계는 무엇인가</a:t>
             </a:r>
-            <a:endParaRPr lang="en-US" sz="2200" dirty="0"/>
-          </a:p>
-        </p:txBody>
-      </p:sp>
-      <p:sp>
-        <p:nvSpPr>
-          <p:cNvPr id="5" name="Shape 3"/>
+            <a:endParaRPr lang="en-US" sz="2300" dirty="0"/>
+          </a:p>
+        </p:txBody>
+      </p:sp>
+      <p:sp>
+        <p:nvSpPr>
+          <p:cNvPr id="6" name="Shape 4"/>
           <p:cNvSpPr/>
           <p:nvPr/>
         </p:nvSpPr>
@@ -7909,15 +8035,17 @@
             <a:off x="566928" y="1572768"/>
             <a:ext cx="11057839" cy="3200400"/>
           </a:xfrm>
-          <a:prstGeom prst="rect">
-            <a:avLst/>
+          <a:prstGeom prst="roundRect">
+            <a:avLst>
+              <a:gd name="adj" fmla="val 1714"/>
+            </a:avLst>
           </a:prstGeom>
           <a:solidFill>
-            <a:srgbClr val="F8FAFC"/>
+            <a:srgbClr val="F7FAFC"/>
           </a:solidFill>
-          <a:ln w="3810">
+          <a:ln w="6350">
             <a:solidFill>
-              <a:srgbClr val="CBD5E1"/>
+              <a:srgbClr val="CBD5E0"/>
             </a:solidFill>
             <a:prstDash val="solid"/>
           </a:ln>
@@ -7925,26 +8053,6 @@
       </p:sp>
       <p:sp>
         <p:nvSpPr>
-          <p:cNvPr id="6" name="Shape 4"/>
-          <p:cNvSpPr/>
-          <p:nvPr/>
-        </p:nvSpPr>
-        <p:spPr>
-          <a:xfrm>
-            <a:off x="566928" y="1572768"/>
-            <a:ext cx="11057839" cy="36576"/>
-          </a:xfrm>
-          <a:prstGeom prst="rect">
-            <a:avLst/>
-          </a:prstGeom>
-          <a:solidFill>
-            <a:srgbClr val="6B8E00"/>
-          </a:solidFill>
-          <a:ln/>
-        </p:spPr>
-      </p:sp>
-      <p:sp>
-        <p:nvSpPr>
           <p:cNvPr id="7" name="Shape 5"/>
           <p:cNvSpPr/>
           <p:nvPr/>
@@ -7958,7 +8066,7 @@
             <a:avLst/>
           </a:prstGeom>
           <a:solidFill>
-            <a:srgbClr val="6B8E00"/>
+            <a:srgbClr val="B98A2E"/>
           </a:solidFill>
           <a:ln/>
         </p:spPr>
@@ -8029,7 +8137,7 @@
             <a:r>
               <a:rPr lang="en-US" sz="1600" b="1" dirty="0">
                 <a:solidFill>
-                  <a:srgbClr val="0F172A"/>
+                  <a:srgbClr val="10161F"/>
                 </a:solidFill>
                 <a:latin typeface="Pretendard" pitchFamily="34" charset="0"/>
                 <a:ea typeface="Pretendard" pitchFamily="34" charset="-122"/>
@@ -8068,7 +8176,7 @@
             <a:r>
               <a:rPr lang="en-US" sz="1100" dirty="0">
                 <a:solidFill>
-                  <a:srgbClr val="0F172A"/>
+                  <a:srgbClr val="10161F"/>
                 </a:solidFill>
                 <a:latin typeface="Pretendard" pitchFamily="34" charset="0"/>
                 <a:ea typeface="Pretendard" pitchFamily="34" charset="-122"/>
@@ -8088,59 +8196,75 @@
         </p:nvSpPr>
         <p:spPr>
           <a:xfrm>
-            <a:off x="566928" y="6419088"/>
-            <a:ext cx="11057839" cy="201168"/>
-          </a:xfrm>
-          <a:prstGeom prst="rect">
-            <a:avLst/>
-          </a:prstGeom>
-          <a:noFill/>
-          <a:ln/>
-        </p:spPr>
-        <p:txBody>
-          <a:bodyPr wrap="square" lIns="0" tIns="0" rIns="0" bIns="0" rtlCol="0" anchor="ctr"/>
-          <a:lstStyle/>
-          <a:p>
-            <a:pPr algn="ctr" indent="0" marL="0">
-              <a:buNone/>
-            </a:pPr>
-            <a:r>
-              <a:rPr lang="en-US" sz="750" dirty="0">
-                <a:solidFill>
-                  <a:srgbClr val="64748B"/>
+            <a:off x="566928" y="6382512"/>
+            <a:ext cx="7315200" cy="219456"/>
+          </a:xfrm>
+          <a:prstGeom prst="rect">
+            <a:avLst/>
+          </a:prstGeom>
+          <a:noFill/>
+          <a:ln/>
+        </p:spPr>
+        <p:txBody>
+          <a:bodyPr wrap="square" lIns="0" tIns="0" rIns="0" bIns="0" rtlCol="0" anchor="ctr"/>
+          <a:lstStyle/>
+          <a:p>
+            <a:pPr indent="0" marL="0">
+              <a:buNone/>
+            </a:pPr>
+            <a:r>
+              <a:rPr lang="en-US" sz="800" dirty="0">
+                <a:solidFill>
+                  <a:srgbClr val="718096"/>
                 </a:solidFill>
                 <a:latin typeface="Pretendard" pitchFamily="34" charset="0"/>
                 <a:ea typeface="Pretendard" pitchFamily="34" charset="-122"/>
                 <a:cs typeface="Pretendard" pitchFamily="34" charset="-120"/>
               </a:rPr>
-              <a:t>크리딜  ·    ·  9</a:t>
-            </a:r>
-            <a:endParaRPr lang="en-US" sz="750" dirty="0"/>
-          </a:p>
-        </p:txBody>
-      </p:sp>
-      <p:sp>
-        <p:nvSpPr>
-          <p:cNvPr id="12" name="Shape 10"/>
-          <p:cNvSpPr/>
-          <p:nvPr/>
-        </p:nvSpPr>
-        <p:spPr>
-          <a:xfrm>
-            <a:off x="4437172" y="6382512"/>
-            <a:ext cx="3317352" cy="0"/>
-          </a:xfrm>
-          <a:prstGeom prst="line">
-            <a:avLst/>
-          </a:prstGeom>
-          <a:noFill/>
-          <a:ln w="6350">
-            <a:solidFill>
-              <a:srgbClr val="6B8E00"/>
-            </a:solidFill>
-            <a:prstDash val="solid"/>
-          </a:ln>
-        </p:spPr>
+              <a:t>크리딜   |   </a:t>
+            </a:r>
+            <a:endParaRPr lang="en-US" sz="800" dirty="0"/>
+          </a:p>
+        </p:txBody>
+      </p:sp>
+      <p:sp>
+        <p:nvSpPr>
+          <p:cNvPr id="12" name="Text 10"/>
+          <p:cNvSpPr/>
+          <p:nvPr/>
+        </p:nvSpPr>
+        <p:spPr>
+          <a:xfrm>
+            <a:off x="10710367" y="6382512"/>
+            <a:ext cx="914400" cy="219456"/>
+          </a:xfrm>
+          <a:prstGeom prst="rect">
+            <a:avLst/>
+          </a:prstGeom>
+          <a:noFill/>
+          <a:ln/>
+        </p:spPr>
+        <p:txBody>
+          <a:bodyPr wrap="square" lIns="0" tIns="0" rIns="0" bIns="0" rtlCol="0" anchor="ctr"/>
+          <a:lstStyle/>
+          <a:p>
+            <a:pPr algn="r" indent="0" marL="0">
+              <a:buNone/>
+            </a:pPr>
+            <a:r>
+              <a:rPr lang="en-US" sz="900" b="1" dirty="0">
+                <a:solidFill>
+                  <a:srgbClr val="B98A2E"/>
+                </a:solidFill>
+                <a:latin typeface="Arial" pitchFamily="34" charset="0"/>
+                <a:ea typeface="Arial" pitchFamily="34" charset="-122"/>
+                <a:cs typeface="Arial" pitchFamily="34" charset="-120"/>
+              </a:rPr>
+              <a:t>9</a:t>
+            </a:r>
+            <a:endParaRPr lang="en-US" sz="900" dirty="0"/>
+          </a:p>
+        </p:txBody>
       </p:sp>
     </p:spTree>
   </p:cSld>

--- a/docs/test/stress/e2e-outputs/owner_occupied_case08_hannam_flagship_basic.pptx
+++ b/docs/test/stress/e2e-outputs/owner_occupied_case08_hannam_flagship_basic.pptx
@@ -6059,7 +6059,7 @@
                 <a:ea typeface="Pretendard" pitchFamily="34" charset="-122"/>
                 <a:cs typeface="Pretendard" pitchFamily="34" charset="-120"/>
               </a:rPr>
-              <a:t>사옥 입주 적합성 분석</a:t>
+              <a:t>건축물 개요 및 물리 스펙</a:t>
             </a:r>
             <a:endParaRPr lang="en-US" sz="1100" dirty="0"/>
           </a:p>
@@ -6101,7 +6101,7 @@
                 <a:ea typeface="Pretendard" pitchFamily="34" charset="-122"/>
                 <a:cs typeface="Pretendard" pitchFamily="34" charset="-120"/>
               </a:rPr>
-              <a:t>수용 가능 인원</a:t>
+              <a:t>{"ok"</a:t>
             </a:r>
             <a:endParaRPr lang="en-US" sz="1400" dirty="0"/>
           </a:p>
@@ -6143,7 +6143,7 @@
                 <a:ea typeface="Pretendard" pitchFamily="34" charset="-122"/>
                 <a:cs typeface="Pretendard" pitchFamily="34" charset="-120"/>
               </a:rPr>
-              <a:t>약 50~150명 수용 가능</a:t>
+              <a:t>true,"mocked":true,"extractedFields":{"area_signal":"역삼","asset_type":"오피스빌딩","price_band":"300억","size_signal":"3000평(약 9917.4㎡)"},"extractedFacts":{"region":"역삼","exactAddressCandidate":"역삼동 742-1","assetType":"오피스빌딩","priceText":"300억","sizeText":"3000평(약 9917.4㎡)","currentUse":"오피스","currentUseSignal":"근린생활시설","leaseSignal":"임대중","vacancySignal":"공실없음","tenantNames":"쿠팡","네이버","unitRentTexts":"301호: 1500만","sellerMotivationText":"자산 효율화","brokerNotes":"초역세권 매물"},"detectedSensitiveFields":"exact_address","tenant_name","ambiguousFields":,"warnings":,"areaSignal":"역삼","assetType":"오피스빌딩","priceBand":"300억","sizeSignal":"3000평(약 9917.4㎡)","dealType":"매각","buildingName":"역삼 센트럴타워","exactAddress":"역삼동 742-1","totalFloorArea":9917.3,"buildYear":2015,"currentUseSignal":"근린생활시설","vacancySignal":"공실 없음","fitSummary":"초역세권 근생 빌딩으로 시행/사옥 매입에 최적화","cautionSummary":"주요 임차 업종 만기 조율 필요","hiddenFields":"exact_address","seller_motivation","confidence":{"areaSignal":"confirmed","assetType":"confirmed","priceBand":"ai_hypothesis","fitSummary":"ai_hypothesis"},"missingData":"sizeSignal","boundaryNote":"본 자료는 실거래 통계 기반 참고치입니다.","buyerType":"법인 사옥형","budgetRange":{"min":50,"max":80,"display":"50억~80억"},"preferredRegions":"강남","성수","assetTypes":"꼬마빌딩","사옥용","purchasePurpose":"사옥용 매입","mustHave":"초역세권","주차","niceToHave":"테라스","루프탑","riskTolerance":"medium","financingNote":"자본금 50% 준비","missingQuestions":"구체적인 입주 시기가 언제인가요?","선호하는 수익률이 있나요?","privacyNotes":"연락처 비공개","fitReasons":"매수자 예산(50-80억)에 부합하는 매물입니다.","요청하신 성수/강남 권역에 해당합니다.","cautionReasons":"요청한 용도와 달리 명도 협의가 다소 필요합니다.","recommendedNextAction":"현장 답사 제안","kakaoMessage":"안녕하세요! 요청하신 조건에 부합하는 추천 매물이 있어 안내해 드립니다. 확인해보시고 피드백 부탁드립니다.","title":"강남 역삼역 초역세권 오피스 사옥용 빌딩 매각","shortSummary":"역삼역 도보 5분 거리의 준신축급 대형 오피스빌딩입니다.","dealPoints":"초역세권","사옥 최적","cautionPoints":"명도 조율 필요","hiddenInfoNotice":"보증금 및 지번은 인가 후 확인 가능","gateMessage":"G1 등급 등록이 필요합니다.","kakaoText":"강남 역삼역 오피스 빌딩 매각 안내입니다.","exactUnitCandidate":"101호","floor":"1층","areaSqmText":"150㎡","spaceType":"office","depositText":"5000만","monthlyRentText":"400만","maintenanceFeeText":"50만","availableFromText":"즉시입주","leaseTermMonthsText":"24","incentivesText":"렌트프리 2개월","restrictions":,"landlordIdentity":"김성수","currentTenant":"스타트업","vacancyReason":"이전 확장","rentNegotiation":"협의 가능","region":"성수동","areaSqm":150,"deposit":5000,"monthlyRent":400,"maintenanceFee":50,"availableFrom":"즉시입주","leaseTermMonths":24,"incentives":{"rentFreeMonths":2,"interiorSupport":"일부 인테리어 지원","freeRentDetail":"렌트프리 2개월 지원"},"shortSummaryLease":"성수역 도보 5분 거리 1층 리테일 상가 매물입니다."}</a:t>
             </a:r>
             <a:endParaRPr lang="en-US" sz="1400" dirty="0"/>
           </a:p>
@@ -6152,327 +6152,6 @@
       <p:sp>
         <p:nvSpPr>
           <p:cNvPr id="9" name="Shape 7"/>
-          <p:cNvSpPr/>
-          <p:nvPr/>
-        </p:nvSpPr>
-        <p:spPr>
-          <a:xfrm>
-            <a:off x="566928" y="2048256"/>
-            <a:ext cx="6858000" cy="0"/>
-          </a:xfrm>
-          <a:prstGeom prst="line">
-            <a:avLst/>
-          </a:prstGeom>
-          <a:noFill/>
-          <a:ln w="3810">
-            <a:solidFill>
-              <a:srgbClr val="CBD5E0"/>
-            </a:solidFill>
-            <a:prstDash val="solid"/>
-          </a:ln>
-        </p:spPr>
-      </p:sp>
-      <p:sp>
-        <p:nvSpPr>
-          <p:cNvPr id="10" name="Text 8"/>
-          <p:cNvSpPr/>
-          <p:nvPr/>
-        </p:nvSpPr>
-        <p:spPr>
-          <a:xfrm>
-            <a:off x="566928" y="2048256"/>
-            <a:ext cx="2606040" cy="402336"/>
-          </a:xfrm>
-          <a:prstGeom prst="rect">
-            <a:avLst/>
-          </a:prstGeom>
-          <a:noFill/>
-          <a:ln/>
-        </p:spPr>
-        <p:txBody>
-          <a:bodyPr wrap="square" lIns="0" tIns="0" rIns="0" bIns="0" rtlCol="0" anchor="ctr"/>
-          <a:lstStyle/>
-          <a:p>
-            <a:pPr indent="0" marL="0">
-              <a:lnSpc>
-                <a:spcPct val="120000"/>
-              </a:lnSpc>
-              <a:buNone/>
-            </a:pPr>
-            <a:r>
-              <a:rPr lang="en-US" sz="1400" dirty="0">
-                <a:solidFill>
-                  <a:srgbClr val="718096"/>
-                </a:solidFill>
-                <a:latin typeface="Pretendard" pitchFamily="34" charset="0"/>
-                <a:ea typeface="Pretendard" pitchFamily="34" charset="-122"/>
-                <a:cs typeface="Pretendard" pitchFamily="34" charset="-120"/>
-              </a:rPr>
-              <a:t>층별 독점성</a:t>
-            </a:r>
-            <a:endParaRPr lang="en-US" sz="1400" dirty="0"/>
-          </a:p>
-        </p:txBody>
-      </p:sp>
-      <p:sp>
-        <p:nvSpPr>
-          <p:cNvPr id="11" name="Text 9"/>
-          <p:cNvSpPr/>
-          <p:nvPr/>
-        </p:nvSpPr>
-        <p:spPr>
-          <a:xfrm>
-            <a:off x="3172968" y="2048256"/>
-            <a:ext cx="4251960" cy="402336"/>
-          </a:xfrm>
-          <a:prstGeom prst="rect">
-            <a:avLst/>
-          </a:prstGeom>
-          <a:noFill/>
-          <a:ln/>
-        </p:spPr>
-        <p:txBody>
-          <a:bodyPr wrap="square" lIns="0" tIns="0" rIns="0" bIns="0" rtlCol="0" anchor="ctr"/>
-          <a:lstStyle/>
-          <a:p>
-            <a:pPr indent="0" marL="0">
-              <a:lnSpc>
-                <a:spcPct val="120000"/>
-              </a:lnSpc>
-              <a:buNone/>
-            </a:pPr>
-            <a:r>
-              <a:rPr lang="en-US" sz="1400" b="1" dirty="0">
-                <a:solidFill>
-                  <a:srgbClr val="10161F"/>
-                </a:solidFill>
-                <a:latin typeface="Pretendard" pitchFamily="34" charset="0"/>
-                <a:ea typeface="Pretendard" pitchFamily="34" charset="-122"/>
-                <a:cs typeface="Pretendard" pitchFamily="34" charset="-120"/>
-              </a:rPr>
-              <a:t>전층 단독 사용 구조</a:t>
-            </a:r>
-            <a:endParaRPr lang="en-US" sz="1400" dirty="0"/>
-          </a:p>
-        </p:txBody>
-      </p:sp>
-      <p:sp>
-        <p:nvSpPr>
-          <p:cNvPr id="12" name="Shape 10"/>
-          <p:cNvSpPr/>
-          <p:nvPr/>
-        </p:nvSpPr>
-        <p:spPr>
-          <a:xfrm>
-            <a:off x="566928" y="2450592"/>
-            <a:ext cx="6858000" cy="0"/>
-          </a:xfrm>
-          <a:prstGeom prst="line">
-            <a:avLst/>
-          </a:prstGeom>
-          <a:noFill/>
-          <a:ln w="3810">
-            <a:solidFill>
-              <a:srgbClr val="CBD5E0"/>
-            </a:solidFill>
-            <a:prstDash val="solid"/>
-          </a:ln>
-        </p:spPr>
-      </p:sp>
-      <p:sp>
-        <p:nvSpPr>
-          <p:cNvPr id="13" name="Text 11"/>
-          <p:cNvSpPr/>
-          <p:nvPr/>
-        </p:nvSpPr>
-        <p:spPr>
-          <a:xfrm>
-            <a:off x="566928" y="2450592"/>
-            <a:ext cx="2606040" cy="402336"/>
-          </a:xfrm>
-          <a:prstGeom prst="rect">
-            <a:avLst/>
-          </a:prstGeom>
-          <a:noFill/>
-          <a:ln/>
-        </p:spPr>
-        <p:txBody>
-          <a:bodyPr wrap="square" lIns="0" tIns="0" rIns="0" bIns="0" rtlCol="0" anchor="ctr"/>
-          <a:lstStyle/>
-          <a:p>
-            <a:pPr indent="0" marL="0">
-              <a:lnSpc>
-                <a:spcPct val="120000"/>
-              </a:lnSpc>
-              <a:buNone/>
-            </a:pPr>
-            <a:r>
-              <a:rPr lang="en-US" sz="1400" dirty="0">
-                <a:solidFill>
-                  <a:srgbClr val="718096"/>
-                </a:solidFill>
-                <a:latin typeface="Pretendard" pitchFamily="34" charset="0"/>
-                <a:ea typeface="Pretendard" pitchFamily="34" charset="-122"/>
-                <a:cs typeface="Pretendard" pitchFamily="34" charset="-120"/>
-              </a:rPr>
-              <a:t>주차 및 접근성</a:t>
-            </a:r>
-            <a:endParaRPr lang="en-US" sz="1400" dirty="0"/>
-          </a:p>
-        </p:txBody>
-      </p:sp>
-      <p:sp>
-        <p:nvSpPr>
-          <p:cNvPr id="14" name="Text 12"/>
-          <p:cNvSpPr/>
-          <p:nvPr/>
-        </p:nvSpPr>
-        <p:spPr>
-          <a:xfrm>
-            <a:off x="3172968" y="2450592"/>
-            <a:ext cx="4251960" cy="402336"/>
-          </a:xfrm>
-          <a:prstGeom prst="rect">
-            <a:avLst/>
-          </a:prstGeom>
-          <a:noFill/>
-          <a:ln/>
-        </p:spPr>
-        <p:txBody>
-          <a:bodyPr wrap="square" lIns="0" tIns="0" rIns="0" bIns="0" rtlCol="0" anchor="ctr"/>
-          <a:lstStyle/>
-          <a:p>
-            <a:pPr indent="0" marL="0">
-              <a:lnSpc>
-                <a:spcPct val="120000"/>
-              </a:lnSpc>
-              <a:buNone/>
-            </a:pPr>
-            <a:r>
-              <a:rPr lang="en-US" sz="1400" b="1" dirty="0">
-                <a:solidFill>
-                  <a:srgbClr val="10161F"/>
-                </a:solidFill>
-                <a:latin typeface="Pretendard" pitchFamily="34" charset="0"/>
-                <a:ea typeface="Pretendard" pitchFamily="34" charset="-122"/>
-                <a:cs typeface="Pretendard" pitchFamily="34" charset="-120"/>
-              </a:rPr>
-              <a:t>지상/지하 주차 및 대중교통 우수</a:t>
-            </a:r>
-            <a:endParaRPr lang="en-US" sz="1400" dirty="0"/>
-          </a:p>
-        </p:txBody>
-      </p:sp>
-      <p:sp>
-        <p:nvSpPr>
-          <p:cNvPr id="15" name="Shape 13"/>
-          <p:cNvSpPr/>
-          <p:nvPr/>
-        </p:nvSpPr>
-        <p:spPr>
-          <a:xfrm>
-            <a:off x="566928" y="2852928"/>
-            <a:ext cx="6858000" cy="0"/>
-          </a:xfrm>
-          <a:prstGeom prst="line">
-            <a:avLst/>
-          </a:prstGeom>
-          <a:noFill/>
-          <a:ln w="3810">
-            <a:solidFill>
-              <a:srgbClr val="CBD5E0"/>
-            </a:solidFill>
-            <a:prstDash val="solid"/>
-          </a:ln>
-        </p:spPr>
-      </p:sp>
-      <p:sp>
-        <p:nvSpPr>
-          <p:cNvPr id="16" name="Text 14"/>
-          <p:cNvSpPr/>
-          <p:nvPr/>
-        </p:nvSpPr>
-        <p:spPr>
-          <a:xfrm>
-            <a:off x="566928" y="2852928"/>
-            <a:ext cx="2606040" cy="402336"/>
-          </a:xfrm>
-          <a:prstGeom prst="rect">
-            <a:avLst/>
-          </a:prstGeom>
-          <a:noFill/>
-          <a:ln/>
-        </p:spPr>
-        <p:txBody>
-          <a:bodyPr wrap="square" lIns="0" tIns="0" rIns="0" bIns="0" rtlCol="0" anchor="ctr"/>
-          <a:lstStyle/>
-          <a:p>
-            <a:pPr indent="0" marL="0">
-              <a:lnSpc>
-                <a:spcPct val="120000"/>
-              </a:lnSpc>
-              <a:buNone/>
-            </a:pPr>
-            <a:r>
-              <a:rPr lang="en-US" sz="1400" dirty="0">
-                <a:solidFill>
-                  <a:srgbClr val="718096"/>
-                </a:solidFill>
-                <a:latin typeface="Pretendard" pitchFamily="34" charset="0"/>
-                <a:ea typeface="Pretendard" pitchFamily="34" charset="-122"/>
-                <a:cs typeface="Pretendard" pitchFamily="34" charset="-120"/>
-              </a:rPr>
-              <a:t>파사드 브랜딩</a:t>
-            </a:r>
-            <a:endParaRPr lang="en-US" sz="1400" dirty="0"/>
-          </a:p>
-        </p:txBody>
-      </p:sp>
-      <p:sp>
-        <p:nvSpPr>
-          <p:cNvPr id="17" name="Text 15"/>
-          <p:cNvSpPr/>
-          <p:nvPr/>
-        </p:nvSpPr>
-        <p:spPr>
-          <a:xfrm>
-            <a:off x="3172968" y="2852928"/>
-            <a:ext cx="4251960" cy="402336"/>
-          </a:xfrm>
-          <a:prstGeom prst="rect">
-            <a:avLst/>
-          </a:prstGeom>
-          <a:noFill/>
-          <a:ln/>
-        </p:spPr>
-        <p:txBody>
-          <a:bodyPr wrap="square" lIns="0" tIns="0" rIns="0" bIns="0" rtlCol="0" anchor="ctr"/>
-          <a:lstStyle/>
-          <a:p>
-            <a:pPr indent="0" marL="0">
-              <a:lnSpc>
-                <a:spcPct val="120000"/>
-              </a:lnSpc>
-              <a:buNone/>
-            </a:pPr>
-            <a:r>
-              <a:rPr lang="en-US" sz="1400" b="1" dirty="0">
-                <a:solidFill>
-                  <a:srgbClr val="10161F"/>
-                </a:solidFill>
-                <a:latin typeface="Pretendard" pitchFamily="34" charset="0"/>
-                <a:ea typeface="Pretendard" pitchFamily="34" charset="-122"/>
-                <a:cs typeface="Pretendard" pitchFamily="34" charset="-120"/>
-              </a:rPr>
-              <a:t>사옥 전면 간판 설치 가능</a:t>
-            </a:r>
-            <a:endParaRPr lang="en-US" sz="1400" dirty="0"/>
-          </a:p>
-        </p:txBody>
-      </p:sp>
-      <p:sp>
-        <p:nvSpPr>
-          <p:cNvPr id="18" name="Shape 16"/>
           <p:cNvSpPr/>
           <p:nvPr/>
         </p:nvSpPr>
@@ -6495,18 +6174,18 @@
       </p:sp>
       <p:sp>
         <p:nvSpPr>
-          <p:cNvPr id="19" name="Shape 17"/>
+          <p:cNvPr id="10" name="Shape 8"/>
           <p:cNvSpPr/>
           <p:nvPr/>
         </p:nvSpPr>
         <p:spPr>
           <a:xfrm>
             <a:off x="7784287" y="1645920"/>
-            <a:ext cx="3840480" cy="1810512"/>
+            <a:ext cx="3840480" cy="2103120"/>
           </a:xfrm>
           <a:prstGeom prst="roundRect">
             <a:avLst>
-              <a:gd name="adj" fmla="val 3030"/>
+              <a:gd name="adj" fmla="val 2609"/>
             </a:avLst>
           </a:prstGeom>
           <a:solidFill>
@@ -6517,14 +6196,14 @@
       </p:sp>
       <p:sp>
         <p:nvSpPr>
-          <p:cNvPr id="20" name="Shape 18"/>
+          <p:cNvPr id="11" name="Shape 9"/>
           <p:cNvSpPr/>
           <p:nvPr/>
         </p:nvSpPr>
         <p:spPr>
           <a:xfrm>
             <a:off x="7784287" y="1700784"/>
-            <a:ext cx="36576" cy="1700784"/>
+            <a:ext cx="36576" cy="1993392"/>
           </a:xfrm>
           <a:prstGeom prst="rect">
             <a:avLst/>
@@ -6537,7 +6216,7 @@
       </p:sp>
       <p:sp>
         <p:nvSpPr>
-          <p:cNvPr id="21" name="Text 19"/>
+          <p:cNvPr id="12" name="Text 10"/>
           <p:cNvSpPr/>
           <p:nvPr/>
         </p:nvSpPr>
@@ -6565,14 +6244,14 @@
       </p:sp>
       <p:sp>
         <p:nvSpPr>
-          <p:cNvPr id="22" name="Text 20"/>
+          <p:cNvPr id="13" name="Text 11"/>
           <p:cNvSpPr/>
           <p:nvPr/>
         </p:nvSpPr>
         <p:spPr>
           <a:xfrm>
             <a:off x="7967167" y="1975104"/>
-            <a:ext cx="3511296" cy="1408176"/>
+            <a:ext cx="3511296" cy="1700784"/>
           </a:xfrm>
           <a:prstGeom prst="rect">
             <a:avLst/>
@@ -6599,7 +6278,7 @@
                 <a:ea typeface="Pretendard" pitchFamily="34" charset="-122"/>
                 <a:cs typeface="Pretendard" pitchFamily="34" charset="-120"/>
               </a:rPr>
-              <a:t>본 자산은 연면적 약 1513평(약 5001.7㎡) (대지 약 303평(약 1001.7㎡)) 규모로, 본사 사옥 및 대형 사업장 입주에 적합한 공간 스펙을 갖추고 있습니다.</a:t>
+              <a:t>{"ok":true,"mocked":true,"extractedFields":{"area_signal":"역삼","asset_type":"오피스빌딩","price_band":"300억","size_signal":"3</a:t>
             </a:r>
             <a:endParaRPr lang="en-US" sz="930" dirty="0"/>
           </a:p>
@@ -6607,56 +6286,14 @@
       </p:sp>
       <p:sp>
         <p:nvSpPr>
-          <p:cNvPr id="23" name="Shape 21"/>
-          <p:cNvSpPr/>
-          <p:nvPr/>
-        </p:nvSpPr>
-        <p:spPr>
-          <a:xfrm>
-            <a:off x="7784287" y="3657600"/>
-            <a:ext cx="3840480" cy="1645920"/>
-          </a:xfrm>
-          <a:prstGeom prst="roundRect">
-            <a:avLst>
-              <a:gd name="adj" fmla="val 3333"/>
-            </a:avLst>
-          </a:prstGeom>
-          <a:solidFill>
-            <a:srgbClr val="BEE3F8"/>
-          </a:solidFill>
-          <a:ln/>
-        </p:spPr>
-      </p:sp>
-      <p:sp>
-        <p:nvSpPr>
-          <p:cNvPr id="24" name="Shape 22"/>
-          <p:cNvSpPr/>
-          <p:nvPr/>
-        </p:nvSpPr>
-        <p:spPr>
-          <a:xfrm>
-            <a:off x="7784287" y="3712464"/>
-            <a:ext cx="36576" cy="1536192"/>
-          </a:xfrm>
-          <a:prstGeom prst="rect">
-            <a:avLst/>
-          </a:prstGeom>
-          <a:solidFill>
-            <a:srgbClr val="2B6CB0"/>
-          </a:solidFill>
-          <a:ln/>
-        </p:spPr>
-      </p:sp>
-      <p:sp>
-        <p:nvSpPr>
-          <p:cNvPr id="25" name="Text 23"/>
-          <p:cNvSpPr/>
-          <p:nvPr/>
-        </p:nvSpPr>
-        <p:spPr>
-          <a:xfrm>
-            <a:off x="7967167" y="3767328"/>
-            <a:ext cx="3511296" cy="201168"/>
+          <p:cNvPr id="14" name="Text 12"/>
+          <p:cNvSpPr/>
+          <p:nvPr/>
+        </p:nvSpPr>
+        <p:spPr>
+          <a:xfrm>
+            <a:off x="566928" y="6382512"/>
+            <a:ext cx="7315200" cy="219456"/>
           </a:xfrm>
           <a:prstGeom prst="rect">
             <a:avLst/>
@@ -6671,85 +6308,15 @@
             <a:pPr indent="0" marL="0">
               <a:buNone/>
             </a:pPr>
-            <a:endParaRPr lang="en-US" sz="1050" dirty="0"/>
-          </a:p>
-        </p:txBody>
-      </p:sp>
-      <p:sp>
-        <p:nvSpPr>
-          <p:cNvPr id="26" name="Text 24"/>
-          <p:cNvSpPr/>
-          <p:nvPr/>
-        </p:nvSpPr>
-        <p:spPr>
-          <a:xfrm>
-            <a:off x="7967167" y="3986784"/>
-            <a:ext cx="3511296" cy="1243584"/>
-          </a:xfrm>
-          <a:prstGeom prst="rect">
-            <a:avLst/>
-          </a:prstGeom>
-          <a:noFill/>
-          <a:ln/>
-        </p:spPr>
-        <p:txBody>
-          <a:bodyPr wrap="square" lIns="0" tIns="0" rIns="0" bIns="0" rtlCol="0" anchor="t"/>
-          <a:lstStyle/>
-          <a:p>
-            <a:pPr indent="0" marL="0">
-              <a:lnSpc>
-                <a:spcPct val="120000"/>
-              </a:lnSpc>
-              <a:buNone/>
-            </a:pPr>
-            <a:r>
-              <a:rPr lang="en-US" sz="930" dirty="0">
-                <a:solidFill>
-                  <a:srgbClr val="10161F"/>
+            <a:r>
+              <a:rPr lang="en-US" sz="800" dirty="0">
+                <a:solidFill>
+                  <a:srgbClr val="718096"/>
                 </a:solidFill>
                 <a:latin typeface="Pretendard" pitchFamily="34" charset="0"/>
                 <a:ea typeface="Pretendard" pitchFamily="34" charset="-122"/>
                 <a:cs typeface="Pretendard" pitchFamily="34" charset="-120"/>
               </a:rPr>
-              <a:t>[참고] 사옥 이전 시 브랜딩 가치 향상 및 장기 사옥 소요 충족이 가능합니다.</a:t>
-            </a:r>
-            <a:endParaRPr lang="en-US" sz="930" dirty="0"/>
-          </a:p>
-        </p:txBody>
-      </p:sp>
-      <p:sp>
-        <p:nvSpPr>
-          <p:cNvPr id="27" name="Text 25"/>
-          <p:cNvSpPr/>
-          <p:nvPr/>
-        </p:nvSpPr>
-        <p:spPr>
-          <a:xfrm>
-            <a:off x="566928" y="6382512"/>
-            <a:ext cx="7315200" cy="219456"/>
-          </a:xfrm>
-          <a:prstGeom prst="rect">
-            <a:avLst/>
-          </a:prstGeom>
-          <a:noFill/>
-          <a:ln/>
-        </p:spPr>
-        <p:txBody>
-          <a:bodyPr wrap="square" lIns="0" tIns="0" rIns="0" bIns="0" rtlCol="0" anchor="ctr"/>
-          <a:lstStyle/>
-          <a:p>
-            <a:pPr indent="0" marL="0">
-              <a:buNone/>
-            </a:pPr>
-            <a:r>
-              <a:rPr lang="en-US" sz="800" dirty="0">
-                <a:solidFill>
-                  <a:srgbClr val="718096"/>
-                </a:solidFill>
-                <a:latin typeface="Pretendard" pitchFamily="34" charset="0"/>
-                <a:ea typeface="Pretendard" pitchFamily="34" charset="-122"/>
-                <a:cs typeface="Pretendard" pitchFamily="34" charset="-120"/>
-              </a:rPr>
               <a:t>크리딜   |   </a:t>
             </a:r>
             <a:endParaRPr lang="en-US" sz="800" dirty="0"/>
@@ -6758,7 +6325,7 @@
       </p:sp>
       <p:sp>
         <p:nvSpPr>
-          <p:cNvPr id="28" name="Text 26"/>
+          <p:cNvPr id="15" name="Text 13"/>
           <p:cNvSpPr/>
           <p:nvPr/>
         </p:nvSpPr>
@@ -7671,13 +7238,1697 @@
       </p:sp>
       <p:sp>
         <p:nvSpPr>
-          <p:cNvPr id="6" name="Shape 4"/>
-          <p:cNvSpPr/>
-          <p:nvPr/>
-        </p:nvSpPr>
-        <p:spPr>
-          <a:xfrm>
-            <a:off x="566928" y="4983480"/>
+          <p:cNvPr id="6" name="Text 4"/>
+          <p:cNvSpPr/>
+          <p:nvPr/>
+        </p:nvSpPr>
+        <p:spPr>
+          <a:xfrm>
+            <a:off x="1133856" y="1005840"/>
+            <a:ext cx="10490911" cy="237744"/>
+          </a:xfrm>
+          <a:prstGeom prst="rect">
+            <a:avLst/>
+          </a:prstGeom>
+          <a:noFill/>
+          <a:ln/>
+        </p:spPr>
+        <p:txBody>
+          <a:bodyPr wrap="square" lIns="0" tIns="0" rIns="0" bIns="0" rtlCol="0" anchor="ctr"/>
+          <a:lstStyle/>
+          <a:p>
+            <a:pPr indent="0" marL="0">
+              <a:buNone/>
+            </a:pPr>
+            <a:r>
+              <a:rPr lang="en-US" sz="1100" dirty="0">
+                <a:solidFill>
+                  <a:srgbClr val="718096"/>
+                </a:solidFill>
+                <a:latin typeface="Pretendard" pitchFamily="34" charset="0"/>
+                <a:ea typeface="Pretendard" pitchFamily="34" charset="-122"/>
+                <a:cs typeface="Pretendard" pitchFamily="34" charset="-120"/>
+              </a:rPr>
+              <a:t>3대 핵심 투자 포인트 (Investment Highlights)</a:t>
+            </a:r>
+            <a:endParaRPr lang="en-US" sz="1100" dirty="0"/>
+          </a:p>
+        </p:txBody>
+      </p:sp>
+      <p:sp>
+        <p:nvSpPr>
+          <p:cNvPr id="7" name="Shape 5"/>
+          <p:cNvSpPr/>
+          <p:nvPr/>
+        </p:nvSpPr>
+        <p:spPr>
+          <a:xfrm>
+            <a:off x="566928" y="1481328"/>
+            <a:ext cx="3472586" cy="2560320"/>
+          </a:xfrm>
+          <a:prstGeom prst="roundRect">
+            <a:avLst>
+              <a:gd name="adj" fmla="val 2857"/>
+            </a:avLst>
+          </a:prstGeom>
+          <a:solidFill>
+            <a:srgbClr val="F7FAFC"/>
+          </a:solidFill>
+          <a:ln w="10160">
+            <a:solidFill>
+              <a:srgbClr val="CBD5E0"/>
+            </a:solidFill>
+            <a:prstDash val="solid"/>
+          </a:ln>
+        </p:spPr>
+      </p:sp>
+      <p:sp>
+        <p:nvSpPr>
+          <p:cNvPr id="8" name="Shape 6"/>
+          <p:cNvSpPr/>
+          <p:nvPr/>
+        </p:nvSpPr>
+        <p:spPr>
+          <a:xfrm>
+            <a:off x="566928" y="1481328"/>
+            <a:ext cx="3472586" cy="54864"/>
+          </a:xfrm>
+          <a:prstGeom prst="rect">
+            <a:avLst/>
+          </a:prstGeom>
+          <a:solidFill>
+            <a:srgbClr val="B98A2E"/>
+          </a:solidFill>
+          <a:ln/>
+        </p:spPr>
+      </p:sp>
+      <p:sp>
+        <p:nvSpPr>
+          <p:cNvPr id="9" name="Shape 7"/>
+          <p:cNvSpPr/>
+          <p:nvPr/>
+        </p:nvSpPr>
+        <p:spPr>
+          <a:xfrm>
+            <a:off x="795528" y="1755648"/>
+            <a:ext cx="475488" cy="292608"/>
+          </a:xfrm>
+          <a:prstGeom prst="roundRect">
+            <a:avLst>
+              <a:gd name="adj" fmla="val 12500"/>
+            </a:avLst>
+          </a:prstGeom>
+          <a:solidFill>
+            <a:srgbClr val="D9B668"/>
+          </a:solidFill>
+          <a:ln/>
+        </p:spPr>
+      </p:sp>
+      <p:sp>
+        <p:nvSpPr>
+          <p:cNvPr id="10" name="Text 8"/>
+          <p:cNvSpPr/>
+          <p:nvPr/>
+        </p:nvSpPr>
+        <p:spPr>
+          <a:xfrm>
+            <a:off x="795528" y="1755648"/>
+            <a:ext cx="475488" cy="292608"/>
+          </a:xfrm>
+          <a:prstGeom prst="rect">
+            <a:avLst/>
+          </a:prstGeom>
+          <a:noFill/>
+          <a:ln/>
+        </p:spPr>
+        <p:txBody>
+          <a:bodyPr wrap="square" lIns="0" tIns="0" rIns="0" bIns="0" rtlCol="0" anchor="ctr"/>
+          <a:lstStyle/>
+          <a:p>
+            <a:pPr algn="ctr" indent="0" marL="0">
+              <a:buNone/>
+            </a:pPr>
+            <a:r>
+              <a:rPr lang="en-US" sz="1100" b="1" dirty="0">
+                <a:solidFill>
+                  <a:srgbClr val="977024"/>
+                </a:solidFill>
+                <a:latin typeface="Arial" pitchFamily="34" charset="0"/>
+                <a:ea typeface="Arial" pitchFamily="34" charset="-122"/>
+                <a:cs typeface="Arial" pitchFamily="34" charset="-120"/>
+              </a:rPr>
+              <a:t>01</a:t>
+            </a:r>
+            <a:endParaRPr lang="en-US" sz="1100" dirty="0"/>
+          </a:p>
+        </p:txBody>
+      </p:sp>
+      <p:sp>
+        <p:nvSpPr>
+          <p:cNvPr id="11" name="Text 9"/>
+          <p:cNvSpPr/>
+          <p:nvPr/>
+        </p:nvSpPr>
+        <p:spPr>
+          <a:xfrm>
+            <a:off x="795528" y="2194560"/>
+            <a:ext cx="3015386" cy="365760"/>
+          </a:xfrm>
+          <a:prstGeom prst="rect">
+            <a:avLst/>
+          </a:prstGeom>
+          <a:noFill/>
+          <a:ln/>
+        </p:spPr>
+        <p:txBody>
+          <a:bodyPr wrap="square" lIns="0" tIns="0" rIns="0" bIns="0" rtlCol="0" anchor="t"/>
+          <a:lstStyle/>
+          <a:p>
+            <a:pPr indent="0" marL="0">
+              <a:buNone/>
+            </a:pPr>
+            <a:r>
+              <a:rPr lang="en-US" sz="1500" b="1" dirty="0">
+                <a:solidFill>
+                  <a:srgbClr val="10161F"/>
+                </a:solidFill>
+                <a:latin typeface="Pretendard" pitchFamily="34" charset="0"/>
+                <a:ea typeface="Pretendard" pitchFamily="34" charset="-122"/>
+                <a:cs typeface="Pretendard" pitchFamily="34" charset="-120"/>
+              </a:rPr>
+              <a:t>원금 안전판 확보</a:t>
+            </a:r>
+            <a:endParaRPr lang="en-US" sz="1500" dirty="0"/>
+          </a:p>
+        </p:txBody>
+      </p:sp>
+      <p:sp>
+        <p:nvSpPr>
+          <p:cNvPr id="12" name="Shape 10"/>
+          <p:cNvSpPr/>
+          <p:nvPr/>
+        </p:nvSpPr>
+        <p:spPr>
+          <a:xfrm>
+            <a:off x="795528" y="2624328"/>
+            <a:ext cx="3015386" cy="0"/>
+          </a:xfrm>
+          <a:prstGeom prst="line">
+            <a:avLst/>
+          </a:prstGeom>
+          <a:noFill/>
+          <a:ln w="6350">
+            <a:solidFill>
+              <a:srgbClr val="CBD5E0"/>
+            </a:solidFill>
+            <a:prstDash val="solid"/>
+          </a:ln>
+        </p:spPr>
+      </p:sp>
+      <p:sp>
+        <p:nvSpPr>
+          <p:cNvPr id="13" name="Text 11"/>
+          <p:cNvSpPr/>
+          <p:nvPr/>
+        </p:nvSpPr>
+        <p:spPr>
+          <a:xfrm>
+            <a:off x="795528" y="2779776"/>
+            <a:ext cx="3015386" cy="1051560"/>
+          </a:xfrm>
+          <a:prstGeom prst="rect">
+            <a:avLst/>
+          </a:prstGeom>
+          <a:noFill/>
+          <a:ln/>
+        </p:spPr>
+        <p:txBody>
+          <a:bodyPr wrap="square" lIns="0" tIns="0" rIns="0" bIns="0" rtlCol="0" anchor="t"/>
+          <a:lstStyle/>
+          <a:p>
+            <a:pPr indent="0" marL="0">
+              <a:lnSpc>
+                <a:spcPct val="130000"/>
+              </a:lnSpc>
+              <a:buNone/>
+            </a:pPr>
+            <a:r>
+              <a:rPr lang="en-US" sz="1200" dirty="0">
+                <a:solidFill>
+                  <a:srgbClr val="10161F"/>
+                </a:solidFill>
+                <a:latin typeface="Pretendard" pitchFamily="34" charset="0"/>
+                <a:ea typeface="Pretendard" pitchFamily="34" charset="-122"/>
+                <a:cs typeface="Pretendard" pitchFamily="34" charset="-120"/>
+              </a:rPr>
+              <a:t>한남권역의 핵심 입지로, 우량한 대지 지분 가치가 하방 경직성을 강력히 지지합니다.</a:t>
+            </a:r>
+            <a:endParaRPr lang="en-US" sz="1200" dirty="0"/>
+          </a:p>
+        </p:txBody>
+      </p:sp>
+      <p:sp>
+        <p:nvSpPr>
+          <p:cNvPr id="14" name="Shape 12"/>
+          <p:cNvSpPr/>
+          <p:nvPr/>
+        </p:nvSpPr>
+        <p:spPr>
+          <a:xfrm>
+            <a:off x="4359554" y="1481328"/>
+            <a:ext cx="3472586" cy="2560320"/>
+          </a:xfrm>
+          <a:prstGeom prst="roundRect">
+            <a:avLst>
+              <a:gd name="adj" fmla="val 2857"/>
+            </a:avLst>
+          </a:prstGeom>
+          <a:solidFill>
+            <a:srgbClr val="F7FAFC"/>
+          </a:solidFill>
+          <a:ln w="10160">
+            <a:solidFill>
+              <a:srgbClr val="CBD5E0"/>
+            </a:solidFill>
+            <a:prstDash val="solid"/>
+          </a:ln>
+        </p:spPr>
+      </p:sp>
+      <p:sp>
+        <p:nvSpPr>
+          <p:cNvPr id="15" name="Shape 13"/>
+          <p:cNvSpPr/>
+          <p:nvPr/>
+        </p:nvSpPr>
+        <p:spPr>
+          <a:xfrm>
+            <a:off x="4359554" y="1481328"/>
+            <a:ext cx="3472586" cy="54864"/>
+          </a:xfrm>
+          <a:prstGeom prst="rect">
+            <a:avLst/>
+          </a:prstGeom>
+          <a:solidFill>
+            <a:srgbClr val="B98A2E"/>
+          </a:solidFill>
+          <a:ln/>
+        </p:spPr>
+      </p:sp>
+      <p:sp>
+        <p:nvSpPr>
+          <p:cNvPr id="16" name="Shape 14"/>
+          <p:cNvSpPr/>
+          <p:nvPr/>
+        </p:nvSpPr>
+        <p:spPr>
+          <a:xfrm>
+            <a:off x="4588154" y="1755648"/>
+            <a:ext cx="475488" cy="292608"/>
+          </a:xfrm>
+          <a:prstGeom prst="roundRect">
+            <a:avLst>
+              <a:gd name="adj" fmla="val 12500"/>
+            </a:avLst>
+          </a:prstGeom>
+          <a:solidFill>
+            <a:srgbClr val="D9B668"/>
+          </a:solidFill>
+          <a:ln/>
+        </p:spPr>
+      </p:sp>
+      <p:sp>
+        <p:nvSpPr>
+          <p:cNvPr id="17" name="Text 15"/>
+          <p:cNvSpPr/>
+          <p:nvPr/>
+        </p:nvSpPr>
+        <p:spPr>
+          <a:xfrm>
+            <a:off x="4588154" y="1755648"/>
+            <a:ext cx="475488" cy="292608"/>
+          </a:xfrm>
+          <a:prstGeom prst="rect">
+            <a:avLst/>
+          </a:prstGeom>
+          <a:noFill/>
+          <a:ln/>
+        </p:spPr>
+        <p:txBody>
+          <a:bodyPr wrap="square" lIns="0" tIns="0" rIns="0" bIns="0" rtlCol="0" anchor="ctr"/>
+          <a:lstStyle/>
+          <a:p>
+            <a:pPr algn="ctr" indent="0" marL="0">
+              <a:buNone/>
+            </a:pPr>
+            <a:r>
+              <a:rPr lang="en-US" sz="1100" b="1" dirty="0">
+                <a:solidFill>
+                  <a:srgbClr val="977024"/>
+                </a:solidFill>
+                <a:latin typeface="Arial" pitchFamily="34" charset="0"/>
+                <a:ea typeface="Arial" pitchFamily="34" charset="-122"/>
+                <a:cs typeface="Arial" pitchFamily="34" charset="-120"/>
+              </a:rPr>
+              <a:t>02</a:t>
+            </a:r>
+            <a:endParaRPr lang="en-US" sz="1100" dirty="0"/>
+          </a:p>
+        </p:txBody>
+      </p:sp>
+      <p:sp>
+        <p:nvSpPr>
+          <p:cNvPr id="18" name="Text 16"/>
+          <p:cNvSpPr/>
+          <p:nvPr/>
+        </p:nvSpPr>
+        <p:spPr>
+          <a:xfrm>
+            <a:off x="4588154" y="2194560"/>
+            <a:ext cx="3015386" cy="365760"/>
+          </a:xfrm>
+          <a:prstGeom prst="rect">
+            <a:avLst/>
+          </a:prstGeom>
+          <a:noFill/>
+          <a:ln/>
+        </p:spPr>
+        <p:txBody>
+          <a:bodyPr wrap="square" lIns="0" tIns="0" rIns="0" bIns="0" rtlCol="0" anchor="t"/>
+          <a:lstStyle/>
+          <a:p>
+            <a:pPr indent="0" marL="0">
+              <a:buNone/>
+            </a:pPr>
+            <a:r>
+              <a:rPr lang="en-US" sz="1500" b="1" dirty="0">
+                <a:solidFill>
+                  <a:srgbClr val="10161F"/>
+                </a:solidFill>
+                <a:latin typeface="Pretendard" pitchFamily="34" charset="0"/>
+                <a:ea typeface="Pretendard" pitchFamily="34" charset="-122"/>
+                <a:cs typeface="Pretendard" pitchFamily="34" charset="-120"/>
+              </a:rPr>
+              <a:t>확실한 월 현금흐름</a:t>
+            </a:r>
+            <a:endParaRPr lang="en-US" sz="1500" dirty="0"/>
+          </a:p>
+        </p:txBody>
+      </p:sp>
+      <p:sp>
+        <p:nvSpPr>
+          <p:cNvPr id="19" name="Shape 17"/>
+          <p:cNvSpPr/>
+          <p:nvPr/>
+        </p:nvSpPr>
+        <p:spPr>
+          <a:xfrm>
+            <a:off x="4588154" y="2624328"/>
+            <a:ext cx="3015386" cy="0"/>
+          </a:xfrm>
+          <a:prstGeom prst="line">
+            <a:avLst/>
+          </a:prstGeom>
+          <a:noFill/>
+          <a:ln w="6350">
+            <a:solidFill>
+              <a:srgbClr val="CBD5E0"/>
+            </a:solidFill>
+            <a:prstDash val="solid"/>
+          </a:ln>
+        </p:spPr>
+      </p:sp>
+      <p:sp>
+        <p:nvSpPr>
+          <p:cNvPr id="20" name="Text 18"/>
+          <p:cNvSpPr/>
+          <p:nvPr/>
+        </p:nvSpPr>
+        <p:spPr>
+          <a:xfrm>
+            <a:off x="4588154" y="2779776"/>
+            <a:ext cx="3015386" cy="1051560"/>
+          </a:xfrm>
+          <a:prstGeom prst="rect">
+            <a:avLst/>
+          </a:prstGeom>
+          <a:noFill/>
+          <a:ln/>
+        </p:spPr>
+        <p:txBody>
+          <a:bodyPr wrap="square" lIns="0" tIns="0" rIns="0" bIns="0" rtlCol="0" anchor="t"/>
+          <a:lstStyle/>
+          <a:p>
+            <a:pPr indent="0" marL="0">
+              <a:lnSpc>
+                <a:spcPct val="130000"/>
+              </a:lnSpc>
+              <a:buNone/>
+            </a:pPr>
+            <a:r>
+              <a:rPr lang="en-US" sz="1200" dirty="0">
+                <a:solidFill>
+                  <a:srgbClr val="10161F"/>
+                </a:solidFill>
+                <a:latin typeface="Pretendard" pitchFamily="34" charset="0"/>
+                <a:ea typeface="Pretendard" pitchFamily="34" charset="-122"/>
+                <a:cs typeface="Pretendard" pitchFamily="34" charset="-120"/>
+              </a:rPr>
+              <a:t>우량 테넌트 만실 운영 및 장기 임대차 구조를 기반으로 매월 안정적인 순영업소득(NOI) 창출이 기대됩니다.</a:t>
+            </a:r>
+            <a:endParaRPr lang="en-US" sz="1200" dirty="0"/>
+          </a:p>
+        </p:txBody>
+      </p:sp>
+      <p:sp>
+        <p:nvSpPr>
+          <p:cNvPr id="21" name="Shape 19"/>
+          <p:cNvSpPr/>
+          <p:nvPr/>
+        </p:nvSpPr>
+        <p:spPr>
+          <a:xfrm>
+            <a:off x="8152181" y="1481328"/>
+            <a:ext cx="3472586" cy="2560320"/>
+          </a:xfrm>
+          <a:prstGeom prst="roundRect">
+            <a:avLst>
+              <a:gd name="adj" fmla="val 2857"/>
+            </a:avLst>
+          </a:prstGeom>
+          <a:solidFill>
+            <a:srgbClr val="F7FAFC"/>
+          </a:solidFill>
+          <a:ln w="10160">
+            <a:solidFill>
+              <a:srgbClr val="CBD5E0"/>
+            </a:solidFill>
+            <a:prstDash val="solid"/>
+          </a:ln>
+        </p:spPr>
+      </p:sp>
+      <p:sp>
+        <p:nvSpPr>
+          <p:cNvPr id="22" name="Shape 20"/>
+          <p:cNvSpPr/>
+          <p:nvPr/>
+        </p:nvSpPr>
+        <p:spPr>
+          <a:xfrm>
+            <a:off x="8152181" y="1481328"/>
+            <a:ext cx="3472586" cy="54864"/>
+          </a:xfrm>
+          <a:prstGeom prst="rect">
+            <a:avLst/>
+          </a:prstGeom>
+          <a:solidFill>
+            <a:srgbClr val="B98A2E"/>
+          </a:solidFill>
+          <a:ln/>
+        </p:spPr>
+      </p:sp>
+      <p:sp>
+        <p:nvSpPr>
+          <p:cNvPr id="23" name="Shape 21"/>
+          <p:cNvSpPr/>
+          <p:nvPr/>
+        </p:nvSpPr>
+        <p:spPr>
+          <a:xfrm>
+            <a:off x="8380781" y="1755648"/>
+            <a:ext cx="475488" cy="292608"/>
+          </a:xfrm>
+          <a:prstGeom prst="roundRect">
+            <a:avLst>
+              <a:gd name="adj" fmla="val 12500"/>
+            </a:avLst>
+          </a:prstGeom>
+          <a:solidFill>
+            <a:srgbClr val="D9B668"/>
+          </a:solidFill>
+          <a:ln/>
+        </p:spPr>
+      </p:sp>
+      <p:sp>
+        <p:nvSpPr>
+          <p:cNvPr id="24" name="Text 22"/>
+          <p:cNvSpPr/>
+          <p:nvPr/>
+        </p:nvSpPr>
+        <p:spPr>
+          <a:xfrm>
+            <a:off x="8380781" y="1755648"/>
+            <a:ext cx="475488" cy="292608"/>
+          </a:xfrm>
+          <a:prstGeom prst="rect">
+            <a:avLst/>
+          </a:prstGeom>
+          <a:noFill/>
+          <a:ln/>
+        </p:spPr>
+        <p:txBody>
+          <a:bodyPr wrap="square" lIns="0" tIns="0" rIns="0" bIns="0" rtlCol="0" anchor="ctr"/>
+          <a:lstStyle/>
+          <a:p>
+            <a:pPr algn="ctr" indent="0" marL="0">
+              <a:buNone/>
+            </a:pPr>
+            <a:r>
+              <a:rPr lang="en-US" sz="1100" b="1" dirty="0">
+                <a:solidFill>
+                  <a:srgbClr val="977024"/>
+                </a:solidFill>
+                <a:latin typeface="Arial" pitchFamily="34" charset="0"/>
+                <a:ea typeface="Arial" pitchFamily="34" charset="-122"/>
+                <a:cs typeface="Arial" pitchFamily="34" charset="-120"/>
+              </a:rPr>
+              <a:t>03</a:t>
+            </a:r>
+            <a:endParaRPr lang="en-US" sz="1100" dirty="0"/>
+          </a:p>
+        </p:txBody>
+      </p:sp>
+      <p:sp>
+        <p:nvSpPr>
+          <p:cNvPr id="25" name="Text 23"/>
+          <p:cNvSpPr/>
+          <p:nvPr/>
+        </p:nvSpPr>
+        <p:spPr>
+          <a:xfrm>
+            <a:off x="8380781" y="2194560"/>
+            <a:ext cx="3015386" cy="365760"/>
+          </a:xfrm>
+          <a:prstGeom prst="rect">
+            <a:avLst/>
+          </a:prstGeom>
+          <a:noFill/>
+          <a:ln/>
+        </p:spPr>
+        <p:txBody>
+          <a:bodyPr wrap="square" lIns="0" tIns="0" rIns="0" bIns="0" rtlCol="0" anchor="t"/>
+          <a:lstStyle/>
+          <a:p>
+            <a:pPr indent="0" marL="0">
+              <a:buNone/>
+            </a:pPr>
+            <a:r>
+              <a:rPr lang="en-US" sz="1500" b="1" dirty="0">
+                <a:solidFill>
+                  <a:srgbClr val="10161F"/>
+                </a:solidFill>
+                <a:latin typeface="Pretendard" pitchFamily="34" charset="0"/>
+                <a:ea typeface="Pretendard" pitchFamily="34" charset="-122"/>
+                <a:cs typeface="Pretendard" pitchFamily="34" charset="-120"/>
+              </a:rPr>
+              <a:t>가치 상승 및 출구 전략</a:t>
+            </a:r>
+            <a:endParaRPr lang="en-US" sz="1500" dirty="0"/>
+          </a:p>
+        </p:txBody>
+      </p:sp>
+      <p:sp>
+        <p:nvSpPr>
+          <p:cNvPr id="26" name="Shape 24"/>
+          <p:cNvSpPr/>
+          <p:nvPr/>
+        </p:nvSpPr>
+        <p:spPr>
+          <a:xfrm>
+            <a:off x="8380781" y="2624328"/>
+            <a:ext cx="3015386" cy="0"/>
+          </a:xfrm>
+          <a:prstGeom prst="line">
+            <a:avLst/>
+          </a:prstGeom>
+          <a:noFill/>
+          <a:ln w="6350">
+            <a:solidFill>
+              <a:srgbClr val="CBD5E0"/>
+            </a:solidFill>
+            <a:prstDash val="solid"/>
+          </a:ln>
+        </p:spPr>
+      </p:sp>
+      <p:sp>
+        <p:nvSpPr>
+          <p:cNvPr id="27" name="Text 25"/>
+          <p:cNvSpPr/>
+          <p:nvPr/>
+        </p:nvSpPr>
+        <p:spPr>
+          <a:xfrm>
+            <a:off x="8380781" y="2779776"/>
+            <a:ext cx="3015386" cy="1051560"/>
+          </a:xfrm>
+          <a:prstGeom prst="rect">
+            <a:avLst/>
+          </a:prstGeom>
+          <a:noFill/>
+          <a:ln/>
+        </p:spPr>
+        <p:txBody>
+          <a:bodyPr wrap="square" lIns="0" tIns="0" rIns="0" bIns="0" rtlCol="0" anchor="t"/>
+          <a:lstStyle/>
+          <a:p>
+            <a:pPr indent="0" marL="0">
+              <a:lnSpc>
+                <a:spcPct val="130000"/>
+              </a:lnSpc>
+              <a:buNone/>
+            </a:pPr>
+            <a:r>
+              <a:rPr lang="en-US" sz="1200" dirty="0">
+                <a:solidFill>
+                  <a:srgbClr val="10161F"/>
+                </a:solidFill>
+                <a:latin typeface="Pretendard" pitchFamily="34" charset="0"/>
+                <a:ea typeface="Pretendard" pitchFamily="34" charset="-122"/>
+                <a:cs typeface="Pretendard" pitchFamily="34" charset="-120"/>
+              </a:rPr>
+              <a:t>현행 공법 여력을 활용한 밸류업 기회와 더불어 향후 권역 지가 상승에 따른 시세차익 실현이 유력합니다.</a:t>
+            </a:r>
+            <a:endParaRPr lang="en-US" sz="1200" dirty="0"/>
+          </a:p>
+        </p:txBody>
+      </p:sp>
+      <p:graphicFrame>
+        <p:nvGraphicFramePr>
+          <p:cNvPr id="9" name="Table 0"/>
+          <p:cNvGraphicFramePr>
+            <a:graphicFrameLocks noGrp="1"/>
+          </p:cNvGraphicFramePr>
+          <p:nvPr>
+            <p:extLst>
+              <p:ext uri="{D42A27DB-BD31-4B8C-83A1-F6EECF244321}">
+                <p14:modId xmlns:p14="http://schemas.microsoft.com/office/powerpoint/2010/main" val="1579011935"/>
+              </p:ext>
+            </p:extLst>
+          </p:nvPr>
+        </p:nvGraphicFramePr>
+        <p:xfrm>
+          <a:off x="566928" y="4178808"/>
+          <a:ext cx="11057839" cy="914400"/>
+        </p:xfrm>
+        <a:graphic>
+          <a:graphicData uri="http://schemas.openxmlformats.org/drawingml/2006/table">
+            <a:tbl>
+              <a:tblPr/>
+              <a:tblGrid>
+                <a:gridCol w="3685946"/>
+                <a:gridCol w="3685946"/>
+                <a:gridCol w="3685946"/>
+              </a:tblGrid>
+              <a:tr h="329184">
+                <a:tc>
+                  <a:txBody>
+                    <a:bodyPr/>
+                    <a:lstStyle/>
+                    <a:p>
+                      <a:pPr indent="0" marL="0">
+                        <a:buNone/>
+                      </a:pPr>
+                      <a:r>
+                        <a:rPr lang="en-US" sz="1050" b="1" dirty="0">
+                          <a:solidFill>
+                            <a:srgbClr val="718096"/>
+                          </a:solidFill>
+                          <a:latin typeface="Pretendard" pitchFamily="34" charset="0"/>
+                          <a:ea typeface="Pretendard" pitchFamily="34" charset="-122"/>
+                          <a:cs typeface="Pretendard" pitchFamily="34" charset="-120"/>
+                        </a:rPr>
+                        <a:t>유형</a:t>
+                      </a:r>
+                      <a:endParaRPr lang="en-US" sz="1050" dirty="0">
+                        <a:latin typeface="Pretendard" charset="0"/>
+                        <a:ea typeface="Pretendard" charset="0"/>
+                        <a:cs typeface="Pretendard" charset="0"/>
+                      </a:endParaRPr>
+                    </a:p>
+                  </a:txBody>
+                  <a:tcPr marL="50800" marR="50800" marT="25400" marB="25400" anchor="ctr">
+                    <a:lnL w="3810" cap="flat" cmpd="sng" algn="ctr">
+                      <a:solidFill>
+                        <a:srgbClr val="CBD5E0"/>
+                      </a:solidFill>
+                      <a:prstDash val="solid"/>
+                      <a:round/>
+                      <a:headEnd type="none" w="med" len="med"/>
+                      <a:tailEnd type="none" w="med" len="med"/>
+                    </a:lnL>
+                    <a:lnR w="3810" cap="flat" cmpd="sng" algn="ctr">
+                      <a:solidFill>
+                        <a:srgbClr val="CBD5E0"/>
+                      </a:solidFill>
+                      <a:prstDash val="solid"/>
+                      <a:round/>
+                      <a:headEnd type="none" w="med" len="med"/>
+                      <a:tailEnd type="none" w="med" len="med"/>
+                    </a:lnR>
+                    <a:lnT w="3810" cap="flat" cmpd="sng" algn="ctr">
+                      <a:solidFill>
+                        <a:srgbClr val="CBD5E0"/>
+                      </a:solidFill>
+                      <a:prstDash val="solid"/>
+                      <a:round/>
+                      <a:headEnd type="none" w="med" len="med"/>
+                      <a:tailEnd type="none" w="med" len="med"/>
+                    </a:lnT>
+                    <a:lnB w="3810" cap="flat" cmpd="sng" algn="ctr">
+                      <a:solidFill>
+                        <a:srgbClr val="CBD5E0"/>
+                      </a:solidFill>
+                      <a:prstDash val="solid"/>
+                      <a:round/>
+                      <a:headEnd type="none" w="med" len="med"/>
+                      <a:tailEnd type="none" w="med" len="med"/>
+                    </a:lnB>
+                    <a:solidFill>
+                      <a:srgbClr val="F7FAFC"/>
+                    </a:solidFill>
+                  </a:tcPr>
+                </a:tc>
+                <a:tc>
+                  <a:txBody>
+                    <a:bodyPr/>
+                    <a:lstStyle/>
+                    <a:p>
+                      <a:pPr indent="0" marL="0">
+                        <a:buNone/>
+                      </a:pPr>
+                      <a:r>
+                        <a:rPr lang="en-US" sz="1050" b="1" dirty="0">
+                          <a:solidFill>
+                            <a:srgbClr val="718096"/>
+                          </a:solidFill>
+                          <a:latin typeface="Pretendard" pitchFamily="34" charset="0"/>
+                          <a:ea typeface="Pretendard" pitchFamily="34" charset="-122"/>
+                          <a:cs typeface="Pretendard" pitchFamily="34" charset="-120"/>
+                        </a:rPr>
+                        <a:t>적합도</a:t>
+                      </a:r>
+                      <a:endParaRPr lang="en-US" sz="1050" dirty="0">
+                        <a:latin typeface="Pretendard" charset="0"/>
+                        <a:ea typeface="Pretendard" charset="0"/>
+                        <a:cs typeface="Pretendard" charset="0"/>
+                      </a:endParaRPr>
+                    </a:p>
+                  </a:txBody>
+                  <a:tcPr marL="50800" marR="50800" marT="25400" marB="25400" anchor="ctr">
+                    <a:lnL w="3810" cap="flat" cmpd="sng" algn="ctr">
+                      <a:solidFill>
+                        <a:srgbClr val="CBD5E0"/>
+                      </a:solidFill>
+                      <a:prstDash val="solid"/>
+                      <a:round/>
+                      <a:headEnd type="none" w="med" len="med"/>
+                      <a:tailEnd type="none" w="med" len="med"/>
+                    </a:lnL>
+                    <a:lnR w="3810" cap="flat" cmpd="sng" algn="ctr">
+                      <a:solidFill>
+                        <a:srgbClr val="CBD5E0"/>
+                      </a:solidFill>
+                      <a:prstDash val="solid"/>
+                      <a:round/>
+                      <a:headEnd type="none" w="med" len="med"/>
+                      <a:tailEnd type="none" w="med" len="med"/>
+                    </a:lnR>
+                    <a:lnT w="3810" cap="flat" cmpd="sng" algn="ctr">
+                      <a:solidFill>
+                        <a:srgbClr val="CBD5E0"/>
+                      </a:solidFill>
+                      <a:prstDash val="solid"/>
+                      <a:round/>
+                      <a:headEnd type="none" w="med" len="med"/>
+                      <a:tailEnd type="none" w="med" len="med"/>
+                    </a:lnT>
+                    <a:lnB w="3810" cap="flat" cmpd="sng" algn="ctr">
+                      <a:solidFill>
+                        <a:srgbClr val="CBD5E0"/>
+                      </a:solidFill>
+                      <a:prstDash val="solid"/>
+                      <a:round/>
+                      <a:headEnd type="none" w="med" len="med"/>
+                      <a:tailEnd type="none" w="med" len="med"/>
+                    </a:lnB>
+                    <a:solidFill>
+                      <a:srgbClr val="F7FAFC"/>
+                    </a:solidFill>
+                  </a:tcPr>
+                </a:tc>
+                <a:tc>
+                  <a:txBody>
+                    <a:bodyPr/>
+                    <a:lstStyle/>
+                    <a:p>
+                      <a:pPr indent="0" marL="0">
+                        <a:buNone/>
+                      </a:pPr>
+                      <a:r>
+                        <a:rPr lang="en-US" sz="1050" b="1" dirty="0">
+                          <a:solidFill>
+                            <a:srgbClr val="718096"/>
+                          </a:solidFill>
+                          <a:latin typeface="Pretendard" pitchFamily="34" charset="0"/>
+                          <a:ea typeface="Pretendard" pitchFamily="34" charset="-122"/>
+                          <a:cs typeface="Pretendard" pitchFamily="34" charset="-120"/>
+                        </a:rPr>
+                        <a:t>이유</a:t>
+                      </a:r>
+                      <a:endParaRPr lang="en-US" sz="1050" dirty="0">
+                        <a:latin typeface="Pretendard" charset="0"/>
+                        <a:ea typeface="Pretendard" charset="0"/>
+                        <a:cs typeface="Pretendard" charset="0"/>
+                      </a:endParaRPr>
+                    </a:p>
+                  </a:txBody>
+                  <a:tcPr marL="50800" marR="50800" marT="25400" marB="25400" anchor="ctr">
+                    <a:lnL w="3810" cap="flat" cmpd="sng" algn="ctr">
+                      <a:solidFill>
+                        <a:srgbClr val="CBD5E0"/>
+                      </a:solidFill>
+                      <a:prstDash val="solid"/>
+                      <a:round/>
+                      <a:headEnd type="none" w="med" len="med"/>
+                      <a:tailEnd type="none" w="med" len="med"/>
+                    </a:lnL>
+                    <a:lnR w="3810" cap="flat" cmpd="sng" algn="ctr">
+                      <a:solidFill>
+                        <a:srgbClr val="CBD5E0"/>
+                      </a:solidFill>
+                      <a:prstDash val="solid"/>
+                      <a:round/>
+                      <a:headEnd type="none" w="med" len="med"/>
+                      <a:tailEnd type="none" w="med" len="med"/>
+                    </a:lnR>
+                    <a:lnT w="3810" cap="flat" cmpd="sng" algn="ctr">
+                      <a:solidFill>
+                        <a:srgbClr val="CBD5E0"/>
+                      </a:solidFill>
+                      <a:prstDash val="solid"/>
+                      <a:round/>
+                      <a:headEnd type="none" w="med" len="med"/>
+                      <a:tailEnd type="none" w="med" len="med"/>
+                    </a:lnT>
+                    <a:lnB w="3810" cap="flat" cmpd="sng" algn="ctr">
+                      <a:solidFill>
+                        <a:srgbClr val="CBD5E0"/>
+                      </a:solidFill>
+                      <a:prstDash val="solid"/>
+                      <a:round/>
+                      <a:headEnd type="none" w="med" len="med"/>
+                      <a:tailEnd type="none" w="med" len="med"/>
+                    </a:lnB>
+                    <a:solidFill>
+                      <a:srgbClr val="F7FAFC"/>
+                    </a:solidFill>
+                  </a:tcPr>
+                </a:tc>
+              </a:tr>
+              <a:tr h="329184">
+                <a:tc>
+                  <a:txBody>
+                    <a:bodyPr/>
+                    <a:lstStyle/>
+                    <a:p>
+                      <a:pPr indent="0" marL="0">
+                        <a:buNone/>
+                      </a:pPr>
+                      <a:r>
+                        <a:rPr lang="en-US" sz="1050" b="1" dirty="0">
+                          <a:solidFill>
+                            <a:srgbClr val="10161F"/>
+                          </a:solidFill>
+                          <a:latin typeface="Pretendard" pitchFamily="34" charset="0"/>
+                          <a:ea typeface="Pretendard" pitchFamily="34" charset="-122"/>
+                          <a:cs typeface="Pretendard" pitchFamily="34" charset="-120"/>
+                        </a:rPr>
+                        <a:t>(임대수익)</a:t>
+                      </a:r>
+                      <a:endParaRPr lang="en-US" sz="1050" dirty="0">
+                        <a:latin typeface="Pretendard" charset="0"/>
+                        <a:ea typeface="Pretendard" charset="0"/>
+                        <a:cs typeface="Pretendard" charset="0"/>
+                      </a:endParaRPr>
+                    </a:p>
+                  </a:txBody>
+                  <a:tcPr marL="50800" marR="50800" marT="25400" marB="25400" anchor="ctr">
+                    <a:lnL w="3810" cap="flat" cmpd="sng" algn="ctr">
+                      <a:solidFill>
+                        <a:srgbClr val="CBD5E0"/>
+                      </a:solidFill>
+                      <a:prstDash val="solid"/>
+                      <a:round/>
+                      <a:headEnd type="none" w="med" len="med"/>
+                      <a:tailEnd type="none" w="med" len="med"/>
+                    </a:lnL>
+                    <a:lnR w="3810" cap="flat" cmpd="sng" algn="ctr">
+                      <a:solidFill>
+                        <a:srgbClr val="CBD5E0"/>
+                      </a:solidFill>
+                      <a:prstDash val="solid"/>
+                      <a:round/>
+                      <a:headEnd type="none" w="med" len="med"/>
+                      <a:tailEnd type="none" w="med" len="med"/>
+                    </a:lnR>
+                    <a:lnT w="3810" cap="flat" cmpd="sng" algn="ctr">
+                      <a:solidFill>
+                        <a:srgbClr val="CBD5E0"/>
+                      </a:solidFill>
+                      <a:prstDash val="solid"/>
+                      <a:round/>
+                      <a:headEnd type="none" w="med" len="med"/>
+                      <a:tailEnd type="none" w="med" len="med"/>
+                    </a:lnT>
+                    <a:lnB w="3810" cap="flat" cmpd="sng" algn="ctr">
+                      <a:solidFill>
+                        <a:srgbClr val="CBD5E0"/>
+                      </a:solidFill>
+                      <a:prstDash val="solid"/>
+                      <a:round/>
+                      <a:headEnd type="none" w="med" len="med"/>
+                      <a:tailEnd type="none" w="med" len="med"/>
+                    </a:lnB>
+                    <a:solidFill>
+                      <a:srgbClr val="FFFFFF"/>
+                    </a:solidFill>
+                  </a:tcPr>
+                </a:tc>
+                <a:tc>
+                  <a:txBody>
+                    <a:bodyPr/>
+                    <a:lstStyle/>
+                    <a:p>
+                      <a:pPr indent="0" marL="0">
+                        <a:buNone/>
+                      </a:pPr>
+                      <a:r>
+                        <a:rPr lang="en-US" sz="1050" dirty="0">
+                          <a:solidFill>
+                            <a:srgbClr val="10161F"/>
+                          </a:solidFill>
+                          <a:latin typeface="Pretendard" pitchFamily="34" charset="0"/>
+                          <a:ea typeface="Pretendard" pitchFamily="34" charset="-122"/>
+                          <a:cs typeface="Pretendard" pitchFamily="34" charset="-120"/>
+                        </a:rPr>
+                        <a:t>★★★★★</a:t>
+                      </a:r>
+                      <a:endParaRPr lang="en-US" sz="1050" dirty="0">
+                        <a:latin typeface="Pretendard" charset="0"/>
+                        <a:ea typeface="Pretendard" charset="0"/>
+                        <a:cs typeface="Pretendard" charset="0"/>
+                      </a:endParaRPr>
+                    </a:p>
+                  </a:txBody>
+                  <a:tcPr marL="50800" marR="50800" marT="25400" marB="25400" anchor="ctr">
+                    <a:lnL w="3810" cap="flat" cmpd="sng" algn="ctr">
+                      <a:solidFill>
+                        <a:srgbClr val="CBD5E0"/>
+                      </a:solidFill>
+                      <a:prstDash val="solid"/>
+                      <a:round/>
+                      <a:headEnd type="none" w="med" len="med"/>
+                      <a:tailEnd type="none" w="med" len="med"/>
+                    </a:lnL>
+                    <a:lnR w="3810" cap="flat" cmpd="sng" algn="ctr">
+                      <a:solidFill>
+                        <a:srgbClr val="CBD5E0"/>
+                      </a:solidFill>
+                      <a:prstDash val="solid"/>
+                      <a:round/>
+                      <a:headEnd type="none" w="med" len="med"/>
+                      <a:tailEnd type="none" w="med" len="med"/>
+                    </a:lnR>
+                    <a:lnT w="3810" cap="flat" cmpd="sng" algn="ctr">
+                      <a:solidFill>
+                        <a:srgbClr val="CBD5E0"/>
+                      </a:solidFill>
+                      <a:prstDash val="solid"/>
+                      <a:round/>
+                      <a:headEnd type="none" w="med" len="med"/>
+                      <a:tailEnd type="none" w="med" len="med"/>
+                    </a:lnT>
+                    <a:lnB w="3810" cap="flat" cmpd="sng" algn="ctr">
+                      <a:solidFill>
+                        <a:srgbClr val="CBD5E0"/>
+                      </a:solidFill>
+                      <a:prstDash val="solid"/>
+                      <a:round/>
+                      <a:headEnd type="none" w="med" len="med"/>
+                      <a:tailEnd type="none" w="med" len="med"/>
+                    </a:lnB>
+                    <a:solidFill>
+                      <a:srgbClr val="FFFFFF"/>
+                    </a:solidFill>
+                  </a:tcPr>
+                </a:tc>
+                <a:tc>
+                  <a:txBody>
+                    <a:bodyPr/>
+                    <a:lstStyle/>
+                    <a:p>
+                      <a:pPr indent="0" marL="0">
+                        <a:buNone/>
+                      </a:pPr>
+                      <a:r>
+                        <a:rPr lang="en-US" sz="1050" dirty="0">
+                          <a:solidFill>
+                            <a:srgbClr val="10161F"/>
+                          </a:solidFill>
+                          <a:latin typeface="Pretendard" pitchFamily="34" charset="0"/>
+                          <a:ea typeface="Pretendard" pitchFamily="34" charset="-122"/>
+                          <a:cs typeface="Pretendard" pitchFamily="34" charset="-120"/>
+                        </a:rPr>
+                        <a:t>소형 </a:t>
+                      </a:r>
+                      <a:pPr indent="0" marL="0">
+                        <a:buNone/>
+                      </a:pPr>
+                      <a:r>
+                        <a:rPr lang="en-US" sz="1050" dirty="0">
+                          <a:solidFill>
+                            <a:srgbClr val="10161F"/>
+                          </a:solidFill>
+                          <a:latin typeface="Pretendard" pitchFamily="34" charset="0"/>
+                          <a:ea typeface="Pretendard" pitchFamily="34" charset="-122"/>
+                          <a:cs typeface="Pretendard" pitchFamily="34" charset="-120"/>
+                        </a:rPr>
+                        <a:t>빌딩 </a:t>
+                      </a:r>
+                      <a:pPr indent="0" marL="0">
+                        <a:buNone/>
+                      </a:pPr>
+                      <a:r>
+                        <a:rPr lang="en-US" sz="1050" dirty="0">
+                          <a:solidFill>
+                            <a:srgbClr val="10161F"/>
+                          </a:solidFill>
+                          <a:latin typeface="Pretendard" pitchFamily="34" charset="0"/>
+                          <a:ea typeface="Pretendard" pitchFamily="34" charset="-122"/>
+                          <a:cs typeface="Pretendard" pitchFamily="34" charset="-120"/>
+                        </a:rPr>
+                        <a:t>안정 </a:t>
+                      </a:r>
+                      <a:pPr indent="0" marL="0">
+                        <a:buNone/>
+                      </a:pPr>
+                      <a:r>
+                        <a:rPr lang="en-US" sz="1050" dirty="0">
+                          <a:solidFill>
+                            <a:srgbClr val="10161F"/>
+                          </a:solidFill>
+                          <a:latin typeface="Pretendard" pitchFamily="34" charset="0"/>
+                          <a:ea typeface="Pretendard" pitchFamily="34" charset="-122"/>
+                          <a:cs typeface="Pretendard" pitchFamily="34" charset="-120"/>
+                        </a:rPr>
+                        <a:t>수익 </a:t>
+                      </a:r>
+                      <a:pPr indent="0" marL="0">
+                        <a:buNone/>
+                      </a:pPr>
+                      <a:r>
+                        <a:rPr lang="en-US" sz="1050" dirty="0">
+                          <a:solidFill>
+                            <a:srgbClr val="10161F"/>
+                          </a:solidFill>
+                          <a:latin typeface="Pretendard" pitchFamily="34" charset="0"/>
+                          <a:ea typeface="Pretendard" pitchFamily="34" charset="-122"/>
+                          <a:cs typeface="Pretendard" pitchFamily="34" charset="-120"/>
+                        </a:rPr>
+                        <a:t>최적</a:t>
+                      </a:r>
+                      <a:endParaRPr lang="en-US" sz="1050" dirty="0">
+                        <a:latin typeface="Pretendard" charset="0"/>
+                        <a:ea typeface="Pretendard" charset="0"/>
+                        <a:cs typeface="Pretendard" charset="0"/>
+                      </a:endParaRPr>
+                    </a:p>
+                  </a:txBody>
+                  <a:tcPr marL="50800" marR="50800" marT="25400" marB="25400" anchor="ctr">
+                    <a:lnL w="3810" cap="flat" cmpd="sng" algn="ctr">
+                      <a:solidFill>
+                        <a:srgbClr val="CBD5E0"/>
+                      </a:solidFill>
+                      <a:prstDash val="solid"/>
+                      <a:round/>
+                      <a:headEnd type="none" w="med" len="med"/>
+                      <a:tailEnd type="none" w="med" len="med"/>
+                    </a:lnL>
+                    <a:lnR w="3810" cap="flat" cmpd="sng" algn="ctr">
+                      <a:solidFill>
+                        <a:srgbClr val="CBD5E0"/>
+                      </a:solidFill>
+                      <a:prstDash val="solid"/>
+                      <a:round/>
+                      <a:headEnd type="none" w="med" len="med"/>
+                      <a:tailEnd type="none" w="med" len="med"/>
+                    </a:lnR>
+                    <a:lnT w="3810" cap="flat" cmpd="sng" algn="ctr">
+                      <a:solidFill>
+                        <a:srgbClr val="CBD5E0"/>
+                      </a:solidFill>
+                      <a:prstDash val="solid"/>
+                      <a:round/>
+                      <a:headEnd type="none" w="med" len="med"/>
+                      <a:tailEnd type="none" w="med" len="med"/>
+                    </a:lnT>
+                    <a:lnB w="3810" cap="flat" cmpd="sng" algn="ctr">
+                      <a:solidFill>
+                        <a:srgbClr val="CBD5E0"/>
+                      </a:solidFill>
+                      <a:prstDash val="solid"/>
+                      <a:round/>
+                      <a:headEnd type="none" w="med" len="med"/>
+                      <a:tailEnd type="none" w="med" len="med"/>
+                    </a:lnB>
+                    <a:solidFill>
+                      <a:srgbClr val="FFFFFF"/>
+                    </a:solidFill>
+                  </a:tcPr>
+                </a:tc>
+              </a:tr>
+              <a:tr h="329184">
+                <a:tc>
+                  <a:txBody>
+                    <a:bodyPr/>
+                    <a:lstStyle/>
+                    <a:p>
+                      <a:pPr indent="0" marL="0">
+                        <a:buNone/>
+                      </a:pPr>
+                      <a:r>
+                        <a:rPr lang="en-US" sz="1050" b="1" dirty="0">
+                          <a:solidFill>
+                            <a:srgbClr val="10161F"/>
+                          </a:solidFill>
+                          <a:latin typeface="Pretendard" pitchFamily="34" charset="0"/>
+                          <a:ea typeface="Pretendard" pitchFamily="34" charset="-122"/>
+                          <a:cs typeface="Pretendard" pitchFamily="34" charset="-120"/>
+                        </a:rPr>
+                        <a:t>법인 </a:t>
+                      </a:r>
+                      <a:pPr indent="0" marL="0">
+                        <a:buNone/>
+                      </a:pPr>
+                      <a:r>
+                        <a:rPr lang="en-US" sz="1050" b="1" dirty="0">
+                          <a:solidFill>
+                            <a:srgbClr val="10161F"/>
+                          </a:solidFill>
+                          <a:latin typeface="Pretendard" pitchFamily="34" charset="0"/>
+                          <a:ea typeface="Pretendard" pitchFamily="34" charset="-122"/>
+                          <a:cs typeface="Pretendard" pitchFamily="34" charset="-120"/>
+                        </a:rPr>
+                        <a:t>사옥 </a:t>
+                      </a:r>
+                      <a:pPr indent="0" marL="0">
+                        <a:buNone/>
+                      </a:pPr>
+                      <a:r>
+                        <a:rPr lang="en-US" sz="1050" b="1" dirty="0">
+                          <a:solidFill>
+                            <a:srgbClr val="10161F"/>
+                          </a:solidFill>
+                          <a:latin typeface="Pretendard" pitchFamily="34" charset="0"/>
+                          <a:ea typeface="Pretendard" pitchFamily="34" charset="-122"/>
+                          <a:cs typeface="Pretendard" pitchFamily="34" charset="-120"/>
+                        </a:rPr>
+                        <a:t>이전</a:t>
+                      </a:r>
+                      <a:endParaRPr lang="en-US" sz="1050" dirty="0">
+                        <a:latin typeface="Pretendard" charset="0"/>
+                        <a:ea typeface="Pretendard" charset="0"/>
+                        <a:cs typeface="Pretendard" charset="0"/>
+                      </a:endParaRPr>
+                    </a:p>
+                  </a:txBody>
+                  <a:tcPr marL="50800" marR="50800" marT="25400" marB="25400" anchor="ctr">
+                    <a:lnL w="3810" cap="flat" cmpd="sng" algn="ctr">
+                      <a:solidFill>
+                        <a:srgbClr val="CBD5E0"/>
+                      </a:solidFill>
+                      <a:prstDash val="solid"/>
+                      <a:round/>
+                      <a:headEnd type="none" w="med" len="med"/>
+                      <a:tailEnd type="none" w="med" len="med"/>
+                    </a:lnL>
+                    <a:lnR w="3810" cap="flat" cmpd="sng" algn="ctr">
+                      <a:solidFill>
+                        <a:srgbClr val="CBD5E0"/>
+                      </a:solidFill>
+                      <a:prstDash val="solid"/>
+                      <a:round/>
+                      <a:headEnd type="none" w="med" len="med"/>
+                      <a:tailEnd type="none" w="med" len="med"/>
+                    </a:lnR>
+                    <a:lnT w="3810" cap="flat" cmpd="sng" algn="ctr">
+                      <a:solidFill>
+                        <a:srgbClr val="CBD5E0"/>
+                      </a:solidFill>
+                      <a:prstDash val="solid"/>
+                      <a:round/>
+                      <a:headEnd type="none" w="med" len="med"/>
+                      <a:tailEnd type="none" w="med" len="med"/>
+                    </a:lnT>
+                    <a:lnB w="3810" cap="flat" cmpd="sng" algn="ctr">
+                      <a:solidFill>
+                        <a:srgbClr val="CBD5E0"/>
+                      </a:solidFill>
+                      <a:prstDash val="solid"/>
+                      <a:round/>
+                      <a:headEnd type="none" w="med" len="med"/>
+                      <a:tailEnd type="none" w="med" len="med"/>
+                    </a:lnB>
+                    <a:solidFill>
+                      <a:srgbClr val="F7FAFC"/>
+                    </a:solidFill>
+                  </a:tcPr>
+                </a:tc>
+                <a:tc>
+                  <a:txBody>
+                    <a:bodyPr/>
+                    <a:lstStyle/>
+                    <a:p>
+                      <a:pPr indent="0" marL="0">
+                        <a:buNone/>
+                      </a:pPr>
+                      <a:r>
+                        <a:rPr lang="en-US" sz="1050" dirty="0">
+                          <a:solidFill>
+                            <a:srgbClr val="10161F"/>
+                          </a:solidFill>
+                          <a:latin typeface="Pretendard" pitchFamily="34" charset="0"/>
+                          <a:ea typeface="Pretendard" pitchFamily="34" charset="-122"/>
+                          <a:cs typeface="Pretendard" pitchFamily="34" charset="-120"/>
+                        </a:rPr>
+                        <a:t>★★★★</a:t>
+                      </a:r>
+                      <a:endParaRPr lang="en-US" sz="1050" dirty="0">
+                        <a:latin typeface="Pretendard" charset="0"/>
+                        <a:ea typeface="Pretendard" charset="0"/>
+                        <a:cs typeface="Pretendard" charset="0"/>
+                      </a:endParaRPr>
+                    </a:p>
+                  </a:txBody>
+                  <a:tcPr marL="50800" marR="50800" marT="25400" marB="25400" anchor="ctr">
+                    <a:lnL w="3810" cap="flat" cmpd="sng" algn="ctr">
+                      <a:solidFill>
+                        <a:srgbClr val="CBD5E0"/>
+                      </a:solidFill>
+                      <a:prstDash val="solid"/>
+                      <a:round/>
+                      <a:headEnd type="none" w="med" len="med"/>
+                      <a:tailEnd type="none" w="med" len="med"/>
+                    </a:lnL>
+                    <a:lnR w="3810" cap="flat" cmpd="sng" algn="ctr">
+                      <a:solidFill>
+                        <a:srgbClr val="CBD5E0"/>
+                      </a:solidFill>
+                      <a:prstDash val="solid"/>
+                      <a:round/>
+                      <a:headEnd type="none" w="med" len="med"/>
+                      <a:tailEnd type="none" w="med" len="med"/>
+                    </a:lnR>
+                    <a:lnT w="3810" cap="flat" cmpd="sng" algn="ctr">
+                      <a:solidFill>
+                        <a:srgbClr val="CBD5E0"/>
+                      </a:solidFill>
+                      <a:prstDash val="solid"/>
+                      <a:round/>
+                      <a:headEnd type="none" w="med" len="med"/>
+                      <a:tailEnd type="none" w="med" len="med"/>
+                    </a:lnT>
+                    <a:lnB w="3810" cap="flat" cmpd="sng" algn="ctr">
+                      <a:solidFill>
+                        <a:srgbClr val="CBD5E0"/>
+                      </a:solidFill>
+                      <a:prstDash val="solid"/>
+                      <a:round/>
+                      <a:headEnd type="none" w="med" len="med"/>
+                      <a:tailEnd type="none" w="med" len="med"/>
+                    </a:lnB>
+                    <a:solidFill>
+                      <a:srgbClr val="F7FAFC"/>
+                    </a:solidFill>
+                  </a:tcPr>
+                </a:tc>
+                <a:tc>
+                  <a:txBody>
+                    <a:bodyPr/>
+                    <a:lstStyle/>
+                    <a:p>
+                      <a:pPr indent="0" marL="0">
+                        <a:buNone/>
+                      </a:pPr>
+                      <a:r>
+                        <a:rPr lang="en-US" sz="1050" dirty="0">
+                          <a:solidFill>
+                            <a:srgbClr val="10161F"/>
+                          </a:solidFill>
+                          <a:latin typeface="Pretendard" pitchFamily="34" charset="0"/>
+                          <a:ea typeface="Pretendard" pitchFamily="34" charset="-122"/>
+                          <a:cs typeface="Pretendard" pitchFamily="34" charset="-120"/>
+                        </a:rPr>
+                        <a:t>한남권역 </a:t>
+                      </a:r>
+                      <a:pPr indent="0" marL="0">
+                        <a:buNone/>
+                      </a:pPr>
+                      <a:r>
+                        <a:rPr lang="en-US" sz="1050" dirty="0">
+                          <a:solidFill>
+                            <a:srgbClr val="10161F"/>
+                          </a:solidFill>
+                          <a:latin typeface="Pretendard" pitchFamily="34" charset="0"/>
+                          <a:ea typeface="Pretendard" pitchFamily="34" charset="-122"/>
+                          <a:cs typeface="Pretendard" pitchFamily="34" charset="-120"/>
+                        </a:rPr>
+                        <a:t>직주근접</a:t>
+                      </a:r>
+                      <a:endParaRPr lang="en-US" sz="1050" dirty="0">
+                        <a:latin typeface="Pretendard" charset="0"/>
+                        <a:ea typeface="Pretendard" charset="0"/>
+                        <a:cs typeface="Pretendard" charset="0"/>
+                      </a:endParaRPr>
+                    </a:p>
+                  </a:txBody>
+                  <a:tcPr marL="50800" marR="50800" marT="25400" marB="25400" anchor="ctr">
+                    <a:lnL w="3810" cap="flat" cmpd="sng" algn="ctr">
+                      <a:solidFill>
+                        <a:srgbClr val="CBD5E0"/>
+                      </a:solidFill>
+                      <a:prstDash val="solid"/>
+                      <a:round/>
+                      <a:headEnd type="none" w="med" len="med"/>
+                      <a:tailEnd type="none" w="med" len="med"/>
+                    </a:lnL>
+                    <a:lnR w="3810" cap="flat" cmpd="sng" algn="ctr">
+                      <a:solidFill>
+                        <a:srgbClr val="CBD5E0"/>
+                      </a:solidFill>
+                      <a:prstDash val="solid"/>
+                      <a:round/>
+                      <a:headEnd type="none" w="med" len="med"/>
+                      <a:tailEnd type="none" w="med" len="med"/>
+                    </a:lnR>
+                    <a:lnT w="3810" cap="flat" cmpd="sng" algn="ctr">
+                      <a:solidFill>
+                        <a:srgbClr val="CBD5E0"/>
+                      </a:solidFill>
+                      <a:prstDash val="solid"/>
+                      <a:round/>
+                      <a:headEnd type="none" w="med" len="med"/>
+                      <a:tailEnd type="none" w="med" len="med"/>
+                    </a:lnT>
+                    <a:lnB w="3810" cap="flat" cmpd="sng" algn="ctr">
+                      <a:solidFill>
+                        <a:srgbClr val="CBD5E0"/>
+                      </a:solidFill>
+                      <a:prstDash val="solid"/>
+                      <a:round/>
+                      <a:headEnd type="none" w="med" len="med"/>
+                      <a:tailEnd type="none" w="med" len="med"/>
+                    </a:lnB>
+                    <a:solidFill>
+                      <a:srgbClr val="F7FAFC"/>
+                    </a:solidFill>
+                  </a:tcPr>
+                </a:tc>
+              </a:tr>
+              <a:tr h="329184">
+                <a:tc>
+                  <a:txBody>
+                    <a:bodyPr/>
+                    <a:lstStyle/>
+                    <a:p>
+                      <a:pPr indent="0" marL="0">
+                        <a:buNone/>
+                      </a:pPr>
+                      <a:r>
+                        <a:rPr lang="en-US" sz="1050" b="1" dirty="0">
+                          <a:solidFill>
+                            <a:srgbClr val="10161F"/>
+                          </a:solidFill>
+                          <a:latin typeface="Pretendard" pitchFamily="34" charset="0"/>
+                          <a:ea typeface="Pretendard" pitchFamily="34" charset="-122"/>
+                          <a:cs typeface="Pretendard" pitchFamily="34" charset="-120"/>
+                        </a:rPr>
+                        <a:t>소규모 </a:t>
+                      </a:r>
+                      <a:pPr indent="0" marL="0">
+                        <a:buNone/>
+                      </a:pPr>
+                      <a:r>
+                        <a:rPr lang="en-US" sz="1050" b="1" dirty="0">
+                          <a:solidFill>
+                            <a:srgbClr val="10161F"/>
+                          </a:solidFill>
+                          <a:latin typeface="Pretendard" pitchFamily="34" charset="0"/>
+                          <a:ea typeface="Pretendard" pitchFamily="34" charset="-122"/>
+                          <a:cs typeface="Pretendard" pitchFamily="34" charset="-120"/>
+                        </a:rPr>
+                        <a:t>개발업체</a:t>
+                      </a:r>
+                      <a:endParaRPr lang="en-US" sz="1050" dirty="0">
+                        <a:latin typeface="Pretendard" charset="0"/>
+                        <a:ea typeface="Pretendard" charset="0"/>
+                        <a:cs typeface="Pretendard" charset="0"/>
+                      </a:endParaRPr>
+                    </a:p>
+                  </a:txBody>
+                  <a:tcPr marL="50800" marR="50800" marT="25400" marB="25400" anchor="ctr">
+                    <a:lnL w="3810" cap="flat" cmpd="sng" algn="ctr">
+                      <a:solidFill>
+                        <a:srgbClr val="CBD5E0"/>
+                      </a:solidFill>
+                      <a:prstDash val="solid"/>
+                      <a:round/>
+                      <a:headEnd type="none" w="med" len="med"/>
+                      <a:tailEnd type="none" w="med" len="med"/>
+                    </a:lnL>
+                    <a:lnR w="3810" cap="flat" cmpd="sng" algn="ctr">
+                      <a:solidFill>
+                        <a:srgbClr val="CBD5E0"/>
+                      </a:solidFill>
+                      <a:prstDash val="solid"/>
+                      <a:round/>
+                      <a:headEnd type="none" w="med" len="med"/>
+                      <a:tailEnd type="none" w="med" len="med"/>
+                    </a:lnR>
+                    <a:lnT w="3810" cap="flat" cmpd="sng" algn="ctr">
+                      <a:solidFill>
+                        <a:srgbClr val="CBD5E0"/>
+                      </a:solidFill>
+                      <a:prstDash val="solid"/>
+                      <a:round/>
+                      <a:headEnd type="none" w="med" len="med"/>
+                      <a:tailEnd type="none" w="med" len="med"/>
+                    </a:lnT>
+                    <a:lnB w="3810" cap="flat" cmpd="sng" algn="ctr">
+                      <a:solidFill>
+                        <a:srgbClr val="CBD5E0"/>
+                      </a:solidFill>
+                      <a:prstDash val="solid"/>
+                      <a:round/>
+                      <a:headEnd type="none" w="med" len="med"/>
+                      <a:tailEnd type="none" w="med" len="med"/>
+                    </a:lnB>
+                    <a:solidFill>
+                      <a:srgbClr val="FFFFFF"/>
+                    </a:solidFill>
+                  </a:tcPr>
+                </a:tc>
+                <a:tc>
+                  <a:txBody>
+                    <a:bodyPr/>
+                    <a:lstStyle/>
+                    <a:p>
+                      <a:pPr indent="0" marL="0">
+                        <a:buNone/>
+                      </a:pPr>
+                      <a:r>
+                        <a:rPr lang="en-US" sz="1050" dirty="0">
+                          <a:solidFill>
+                            <a:srgbClr val="10161F"/>
+                          </a:solidFill>
+                          <a:latin typeface="Pretendard" pitchFamily="34" charset="0"/>
+                          <a:ea typeface="Pretendard" pitchFamily="34" charset="-122"/>
+                          <a:cs typeface="Pretendard" pitchFamily="34" charset="-120"/>
+                        </a:rPr>
+                        <a:t>★★★</a:t>
+                      </a:r>
+                      <a:endParaRPr lang="en-US" sz="1050" dirty="0">
+                        <a:latin typeface="Pretendard" charset="0"/>
+                        <a:ea typeface="Pretendard" charset="0"/>
+                        <a:cs typeface="Pretendard" charset="0"/>
+                      </a:endParaRPr>
+                    </a:p>
+                  </a:txBody>
+                  <a:tcPr marL="50800" marR="50800" marT="25400" marB="25400" anchor="ctr">
+                    <a:lnL w="3810" cap="flat" cmpd="sng" algn="ctr">
+                      <a:solidFill>
+                        <a:srgbClr val="CBD5E0"/>
+                      </a:solidFill>
+                      <a:prstDash val="solid"/>
+                      <a:round/>
+                      <a:headEnd type="none" w="med" len="med"/>
+                      <a:tailEnd type="none" w="med" len="med"/>
+                    </a:lnL>
+                    <a:lnR w="3810" cap="flat" cmpd="sng" algn="ctr">
+                      <a:solidFill>
+                        <a:srgbClr val="CBD5E0"/>
+                      </a:solidFill>
+                      <a:prstDash val="solid"/>
+                      <a:round/>
+                      <a:headEnd type="none" w="med" len="med"/>
+                      <a:tailEnd type="none" w="med" len="med"/>
+                    </a:lnR>
+                    <a:lnT w="3810" cap="flat" cmpd="sng" algn="ctr">
+                      <a:solidFill>
+                        <a:srgbClr val="CBD5E0"/>
+                      </a:solidFill>
+                      <a:prstDash val="solid"/>
+                      <a:round/>
+                      <a:headEnd type="none" w="med" len="med"/>
+                      <a:tailEnd type="none" w="med" len="med"/>
+                    </a:lnT>
+                    <a:lnB w="3810" cap="flat" cmpd="sng" algn="ctr">
+                      <a:solidFill>
+                        <a:srgbClr val="CBD5E0"/>
+                      </a:solidFill>
+                      <a:prstDash val="solid"/>
+                      <a:round/>
+                      <a:headEnd type="none" w="med" len="med"/>
+                      <a:tailEnd type="none" w="med" len="med"/>
+                    </a:lnB>
+                    <a:solidFill>
+                      <a:srgbClr val="FFFFFF"/>
+                    </a:solidFill>
+                  </a:tcPr>
+                </a:tc>
+                <a:tc>
+                  <a:txBody>
+                    <a:bodyPr/>
+                    <a:lstStyle/>
+                    <a:p>
+                      <a:pPr indent="0" marL="0">
+                        <a:buNone/>
+                      </a:pPr>
+                      <a:r>
+                        <a:rPr lang="en-US" sz="1050" dirty="0">
+                          <a:solidFill>
+                            <a:srgbClr val="10161F"/>
+                          </a:solidFill>
+                          <a:latin typeface="Pretendard" pitchFamily="34" charset="0"/>
+                          <a:ea typeface="Pretendard" pitchFamily="34" charset="-122"/>
+                          <a:cs typeface="Pretendard" pitchFamily="34" charset="-120"/>
+                        </a:rPr>
+                        <a:t>밸류업 </a:t>
+                      </a:r>
+                      <a:pPr indent="0" marL="0">
+                        <a:buNone/>
+                      </a:pPr>
+                      <a:r>
+                        <a:rPr lang="en-US" sz="1050" dirty="0">
+                          <a:solidFill>
+                            <a:srgbClr val="10161F"/>
+                          </a:solidFill>
+                          <a:latin typeface="Pretendard" pitchFamily="34" charset="0"/>
+                          <a:ea typeface="Pretendard" pitchFamily="34" charset="-122"/>
+                          <a:cs typeface="Pretendard" pitchFamily="34" charset="-120"/>
+                        </a:rPr>
+                        <a:t>후 </a:t>
+                      </a:r>
+                      <a:pPr indent="0" marL="0">
+                        <a:buNone/>
+                      </a:pPr>
+                      <a:r>
+                        <a:rPr lang="en-US" sz="1050" dirty="0">
+                          <a:solidFill>
+                            <a:srgbClr val="10161F"/>
+                          </a:solidFill>
+                          <a:latin typeface="Pretendard" pitchFamily="34" charset="0"/>
+                          <a:ea typeface="Pretendard" pitchFamily="34" charset="-122"/>
+                          <a:cs typeface="Pretendard" pitchFamily="34" charset="-120"/>
+                        </a:rPr>
+                        <a:t>매각 </a:t>
+                      </a:r>
+                      <a:pPr indent="0" marL="0">
+                        <a:buNone/>
+                      </a:pPr>
+                      <a:r>
+                        <a:rPr lang="en-US" sz="1050" dirty="0">
+                          <a:solidFill>
+                            <a:srgbClr val="10161F"/>
+                          </a:solidFill>
+                          <a:latin typeface="Pretendard" pitchFamily="34" charset="0"/>
+                          <a:ea typeface="Pretendard" pitchFamily="34" charset="-122"/>
+                          <a:cs typeface="Pretendard" pitchFamily="34" charset="-120"/>
+                        </a:rPr>
+                        <a:t>시나리오</a:t>
+                      </a:r>
+                      <a:endParaRPr lang="en-US" sz="1050" dirty="0">
+                        <a:latin typeface="Pretendard" charset="0"/>
+                        <a:ea typeface="Pretendard" charset="0"/>
+                        <a:cs typeface="Pretendard" charset="0"/>
+                      </a:endParaRPr>
+                    </a:p>
+                  </a:txBody>
+                  <a:tcPr marL="50800" marR="50800" marT="25400" marB="25400" anchor="ctr">
+                    <a:lnL w="3810" cap="flat" cmpd="sng" algn="ctr">
+                      <a:solidFill>
+                        <a:srgbClr val="CBD5E0"/>
+                      </a:solidFill>
+                      <a:prstDash val="solid"/>
+                      <a:round/>
+                      <a:headEnd type="none" w="med" len="med"/>
+                      <a:tailEnd type="none" w="med" len="med"/>
+                    </a:lnL>
+                    <a:lnR w="3810" cap="flat" cmpd="sng" algn="ctr">
+                      <a:solidFill>
+                        <a:srgbClr val="CBD5E0"/>
+                      </a:solidFill>
+                      <a:prstDash val="solid"/>
+                      <a:round/>
+                      <a:headEnd type="none" w="med" len="med"/>
+                      <a:tailEnd type="none" w="med" len="med"/>
+                    </a:lnR>
+                    <a:lnT w="3810" cap="flat" cmpd="sng" algn="ctr">
+                      <a:solidFill>
+                        <a:srgbClr val="CBD5E0"/>
+                      </a:solidFill>
+                      <a:prstDash val="solid"/>
+                      <a:round/>
+                      <a:headEnd type="none" w="med" len="med"/>
+                      <a:tailEnd type="none" w="med" len="med"/>
+                    </a:lnT>
+                    <a:lnB w="3810" cap="flat" cmpd="sng" algn="ctr">
+                      <a:solidFill>
+                        <a:srgbClr val="CBD5E0"/>
+                      </a:solidFill>
+                      <a:prstDash val="solid"/>
+                      <a:round/>
+                      <a:headEnd type="none" w="med" len="med"/>
+                      <a:tailEnd type="none" w="med" len="med"/>
+                    </a:lnB>
+                    <a:solidFill>
+                      <a:srgbClr val="FFFFFF"/>
+                    </a:solidFill>
+                  </a:tcPr>
+                </a:tc>
+              </a:tr>
+            </a:tbl>
+          </a:graphicData>
+        </a:graphic>
+      </p:graphicFrame>
+      <p:sp>
+        <p:nvSpPr>
+          <p:cNvPr id="29" name="Shape 26"/>
+          <p:cNvSpPr/>
+          <p:nvPr/>
+        </p:nvSpPr>
+        <p:spPr>
+          <a:xfrm>
+            <a:off x="566928" y="5678424"/>
             <a:ext cx="11057839" cy="804672"/>
           </a:xfrm>
           <a:prstGeom prst="roundRect">
@@ -7698,13 +8949,13 @@
       </p:sp>
       <p:sp>
         <p:nvSpPr>
-          <p:cNvPr id="7" name="Text 5"/>
-          <p:cNvSpPr/>
-          <p:nvPr/>
-        </p:nvSpPr>
-        <p:spPr>
-          <a:xfrm>
-            <a:off x="749808" y="5093208"/>
+          <p:cNvPr id="30" name="Text 27"/>
+          <p:cNvSpPr/>
+          <p:nvPr/>
+        </p:nvSpPr>
+        <p:spPr>
+          <a:xfrm>
+            <a:off x="749808" y="5788152"/>
             <a:ext cx="1691640" cy="256032"/>
           </a:xfrm>
           <a:prstGeom prst="rect">
@@ -7737,13 +8988,13 @@
       </p:sp>
       <p:sp>
         <p:nvSpPr>
-          <p:cNvPr id="8" name="Text 6"/>
-          <p:cNvSpPr/>
-          <p:nvPr/>
-        </p:nvSpPr>
-        <p:spPr>
-          <a:xfrm>
-            <a:off x="2487168" y="5056632"/>
+          <p:cNvPr id="31" name="Text 28"/>
+          <p:cNvSpPr/>
+          <p:nvPr/>
+        </p:nvSpPr>
+        <p:spPr>
+          <a:xfrm>
+            <a:off x="2487168" y="5751576"/>
             <a:ext cx="8954719" cy="658368"/>
           </a:xfrm>
           <a:prstGeom prst="rect">
@@ -7771,7 +9022,7 @@
                 <a:ea typeface="Pretendard" pitchFamily="34" charset="-122"/>
                 <a:cs typeface="Pretendard" pitchFamily="34" charset="-120"/>
               </a:rPr>
-              <a:t>{"ok":true,"mocked":true,"extractedFields":{"area_signal":"역삼","asset_type":"오피스빌딩","price_band":"300억","size_signal":"3000평(약 9917.4㎡)"},"extractedFacts":{"region":"역삼","exactAddressCandidate":"역삼동 742-1","assetType":"오피스빌딩","priceText":"300억","sizeText":"3000평(약 9917.4㎡)","currentUse":"오피스","currentUseSignal":"근린생활시설","leaseSignal":"임대중","vacancySignal":"공실없음","tenantNames":["쿠팡","네이버"],"unitRentTexts":["301호: 1500만"],"sellerMotivationText":"자산 효율화","brokerNotes":["초역세권 매물"]},"detectedSensitiveFields":["exact_address","tenant_name"],"ambiguousFields":[],"warnings":[],"areaSignal":"역삼","assetType":"오피스빌딩","priceBand":"300억","sizeSignal":"3000평(약 9917.4㎡)","dealType":"매각","buildingName":"역삼 센트럴타워","exactAddress":"역삼동 742-1","totalFloorArea":9917.3,"buildYear":2015,"currentUseSignal":"근린생활시설","vacancySignal":"공실 없음","fitSummary":"초역세권 근생 빌딩으로 시행/사옥 매입에 최적화","cautionSummary":"주요 임차 업종 만기 조율 필요","hiddenFields":["exact_address","seller_motivation"],"confidence":{"areaSignal":"confirmed","assetType":"confirmed","priceBand":"ai_hypothesis","fitSummary":"ai_hypothesis"},"missingData":["sizeSignal"],"boundaryNote":"본 자료는 실거래 통계 기반 참고치입니다.","buyerType":"법인 사옥형","budgetRange":{"min":50,"max":80,"display":"50억~80억"},"preferredRegions":["강남","성수"],"assetTypes":["꼬마빌딩","사옥용"],"purchasePurpose":"사옥용 매입","mustHave":["초역세권","주차"],"niceToHave":["테라스","루프탑"],"riskTolerance":"medium","financingNote":"자본금 50% 준비","missingQuestions":["구체적인 입주 시기가 언제인가요?","선호하는 수익률이 있나요?"],"privacyNotes":["연락처 비공개"],"fitReasons":["매수자 예산(50-80억)에 부합하는 매물입니다.","요청하신 성수/강남 권역에 해당합니다."],"cautionReasons":["요청한 용도와 달리 명도 협의가 다소 필요합니다."],"recommendedNextAction":"현장 답사 제안","kakaoMessage":"안녕하세요! 요청하신 조건에 부합하는 추천 매물이 있어 안내해 드립니다. 확인해보시고 피드백 부탁드립니다.","title":"강남 역삼역 초역세권 오피스 사옥용 빌딩 매각","shortSummary":"역삼역 도보 5분 거리의 준신축급 대형 오피스빌딩입니다.","dealPoints":["초역세권","사옥 최적"],"cautionPoints":["명도 조율 필요"],"hiddenInfoNotice":["보증금 및 지번은 인가 후 확인 가능"],"gateMessage":"G1 등급 등록이 필요합니다.","kakaoText":"강남 역삼역 오피스 빌딩 매각 안내입니다.","exactUnitCandidate":"101호","floor":"1층","areaSqmText":"150㎡","spaceType":"office","depositText":"5000만","monthlyRentText":"400만","maintenanceFeeText":"50만","availableFromText":"즉시입주","leaseTermMonthsText":"24","incentivesText":"렌트프리 2개월","restrictions":[],"landlordIdentity":"김성수","currentTenant":"스타트업","vacancyReason":"이전 확장","rentNegotiation":"협의 가능","region":"성수동","areaSqm":150,"deposit":5000,"monthlyRent":400,"maintenanceFee":50,"availableFrom":"즉시입주","leaseTermMonths":24,"incentives":{"rentFreeMonths":2,"interiorSupport":"일부 인테리어 지원","freeRentDetail":"렌트프리 2개월 지원"},"shortSummaryLease":"성수역 도보 5분 거리 1층 리테일 상가 매물입니다."}</a:t>
+              <a:t>[참고] 종합 가치 제안: 한남권역 핵심 상권의 희소성 높은 우량 자산으로, 안정적인 임대 수익과 향후 공법상 밸류업 및 권역 지가 상승에 따른 자본 이득(Capital Gain)을 동시에 실현할 수 있는 전략적 매물입니다.</a:t>
             </a:r>
             <a:endParaRPr lang="en-US" sz="1100" dirty="0"/>
           </a:p>
@@ -7779,7 +9030,7 @@
       </p:sp>
       <p:sp>
         <p:nvSpPr>
-          <p:cNvPr id="9" name="Text 7"/>
+          <p:cNvPr id="32" name="Text 29"/>
           <p:cNvSpPr/>
           <p:nvPr/>
         </p:nvSpPr>
@@ -7818,7 +9069,7 @@
       </p:sp>
       <p:sp>
         <p:nvSpPr>
-          <p:cNvPr id="10" name="Text 8"/>
+          <p:cNvPr id="33" name="Text 30"/>
           <p:cNvSpPr/>
           <p:nvPr/>
         </p:nvSpPr>

--- a/docs/test/stress/e2e-outputs/owner_occupied_case08_hannam_flagship_basic.pptx
+++ b/docs/test/stress/e2e-outputs/owner_occupied_case08_hannam_flagship_basic.pptx
@@ -5596,7 +5596,7 @@
                 <a:ea typeface="Pretendard" pitchFamily="34" charset="-122"/>
                 <a:cs typeface="Pretendard" pitchFamily="34" charset="-120"/>
               </a:rPr>
-              <a:t>{"ok"</a:t>
+              <a:t>소재지</a:t>
             </a:r>
             <a:endParaRPr lang="en-US" sz="1400" dirty="0"/>
           </a:p>
@@ -5638,7 +5638,7 @@
                 <a:ea typeface="Pretendard" pitchFamily="34" charset="-122"/>
                 <a:cs typeface="Pretendard" pitchFamily="34" charset="-120"/>
               </a:rPr>
-              <a:t>true,"mocked":true,"extractedFields":{"area_signal":"역삼","asset_type":"오피스빌딩","price_band":"300억","size_signal":"3000평(약 9917.4㎡)"},"extractedFacts":{"region":"역삼","exactAddressCandidate":"역삼동 742-1","assetType":"오피스빌딩","priceText":"300억","sizeText":"3000평(약 9917.4㎡)","currentUse":"오피스","currentUseSignal":"근린생활시설","leaseSignal":"임대중","vacancySignal":"공실없음","tenantNames":"쿠팡","네이버","unitRentTexts":"301호: 1500만","sellerMotivationText":"자산 효율화","brokerNotes":"초역세권 매물"},"detectedSensitiveFields":"exact_address","tenant_name","ambiguousFields":,"warnings":,"areaSignal":"역삼","assetType":"오피스빌딩","priceBand":"300억","sizeSignal":"3000평(약 9917.4㎡)","dealType":"매각","buildingName":"역삼 센트럴타워","exactAddress":"역삼동 742-1","totalFloorArea":9917.3,"buildYear":2015,"currentUseSignal":"근린생활시설","vacancySignal":"공실 없음","fitSummary":"초역세권 근생 빌딩으로 시행/사옥 매입에 최적화","cautionSummary":"주요 임차 업종 만기 조율 필요","hiddenFields":"exact_address","seller_motivation","confidence":{"areaSignal":"confirmed","assetType":"confirmed","priceBand":"ai_hypothesis","fitSummary":"ai_hypothesis"},"missingData":"sizeSignal","boundaryNote":"본 자료는 실거래 통계 기반 참고치입니다.","buyerType":"법인 사옥형","budgetRange":{"min":50,"max":80,"display":"50억~80억"},"preferredRegions":"강남","성수","assetTypes":"꼬마빌딩","사옥용","purchasePurpose":"사옥용 매입","mustHave":"초역세권","주차","niceToHave":"테라스","루프탑","riskTolerance":"medium","financingNote":"자본금 50% 준비","missingQuestions":"구체적인 입주 시기가 언제인가요?","선호하는 수익률이 있나요?","privacyNotes":"연락처 비공개","fitReasons":"매수자 예산(50-80억)에 부합하는 매물입니다.","요청하신 성수/강남 권역에 해당합니다.","cautionReasons":"요청한 용도와 달리 명도 협의가 다소 필요합니다.","recommendedNextAction":"현장 답사 제안","kakaoMessage":"안녕하세요! 요청하신 조건에 부합하는 추천 매물이 있어 안내해 드립니다. 확인해보시고 피드백 부탁드립니다.","title":"강남 역삼역 초역세권 오피스 사옥용 빌딩 매각","shortSummary":"역삼역 도보 5분 거리의 준신축급 대형 오피스빌딩입니다.","dealPoints":"초역세권","사옥 최적","cautionPoints":"명도 조율 필요","hiddenInfoNotice":"보증금 및 지번은 인가 후 확인 가능","gateMessage":"G1 등급 등록이 필요합니다.","kakaoText":"강남 역삼역 오피스 빌딩 매각 안내입니다.","exactUnitCandidate":"101호","floor":"1층","areaSqmText":"150㎡","spaceType":"office","depositText":"5000만","monthlyRentText":"400만","maintenanceFeeText":"50만","availableFromText":"즉시입주","leaseTermMonthsText":"24","incentivesText":"렌트프리 2개월","restrictions":,"landlordIdentity":"김성수","currentTenant":"스타트업","vacancyReason":"이전 확장","rentNegotiation":"협의 가능","region":"성수동","areaSqm":150,"deposit":5000,"monthlyRent":400,"maintenanceFee":50,"availableFrom":"즉시입주","leaseTermMonths":24,"incentives":{"rentFreeMonths":2,"interiorSupport":"일부 인테리어 지원","freeRentDetail":"렌트프리 2개월 지원"},"shortSummaryLease":"성수역 도보 5분 거리 1층 리테일 상가 매물입니다."}</a:t>
+              <a:t>한남권역</a:t>
             </a:r>
             <a:endParaRPr lang="en-US" sz="1400" dirty="0"/>
           </a:p>
@@ -5647,6 +5647,862 @@
       <p:sp>
         <p:nvSpPr>
           <p:cNvPr id="9" name="Shape 7"/>
+          <p:cNvSpPr/>
+          <p:nvPr/>
+        </p:nvSpPr>
+        <p:spPr>
+          <a:xfrm>
+            <a:off x="566928" y="2048256"/>
+            <a:ext cx="6858000" cy="0"/>
+          </a:xfrm>
+          <a:prstGeom prst="line">
+            <a:avLst/>
+          </a:prstGeom>
+          <a:noFill/>
+          <a:ln w="3810">
+            <a:solidFill>
+              <a:srgbClr val="CBD5E0"/>
+            </a:solidFill>
+            <a:prstDash val="solid"/>
+          </a:ln>
+        </p:spPr>
+      </p:sp>
+      <p:sp>
+        <p:nvSpPr>
+          <p:cNvPr id="10" name="Text 8"/>
+          <p:cNvSpPr/>
+          <p:nvPr/>
+        </p:nvSpPr>
+        <p:spPr>
+          <a:xfrm>
+            <a:off x="566928" y="2048256"/>
+            <a:ext cx="2606040" cy="402336"/>
+          </a:xfrm>
+          <a:prstGeom prst="rect">
+            <a:avLst/>
+          </a:prstGeom>
+          <a:noFill/>
+          <a:ln/>
+        </p:spPr>
+        <p:txBody>
+          <a:bodyPr wrap="square" lIns="0" tIns="0" rIns="0" bIns="0" rtlCol="0" anchor="ctr"/>
+          <a:lstStyle/>
+          <a:p>
+            <a:pPr indent="0" marL="0">
+              <a:lnSpc>
+                <a:spcPct val="120000"/>
+              </a:lnSpc>
+              <a:buNone/>
+            </a:pPr>
+            <a:r>
+              <a:rPr lang="en-US" sz="1400" dirty="0">
+                <a:solidFill>
+                  <a:srgbClr val="718096"/>
+                </a:solidFill>
+                <a:latin typeface="Pretendard" pitchFamily="34" charset="0"/>
+                <a:ea typeface="Pretendard" pitchFamily="34" charset="-122"/>
+                <a:cs typeface="Pretendard" pitchFamily="34" charset="-120"/>
+              </a:rPr>
+              <a:t>주요 용도</a:t>
+            </a:r>
+            <a:endParaRPr lang="en-US" sz="1400" dirty="0"/>
+          </a:p>
+        </p:txBody>
+      </p:sp>
+      <p:sp>
+        <p:nvSpPr>
+          <p:cNvPr id="11" name="Text 9"/>
+          <p:cNvSpPr/>
+          <p:nvPr/>
+        </p:nvSpPr>
+        <p:spPr>
+          <a:xfrm>
+            <a:off x="3172968" y="2048256"/>
+            <a:ext cx="4251960" cy="402336"/>
+          </a:xfrm>
+          <a:prstGeom prst="rect">
+            <a:avLst/>
+          </a:prstGeom>
+          <a:noFill/>
+          <a:ln/>
+        </p:spPr>
+        <p:txBody>
+          <a:bodyPr wrap="square" lIns="0" tIns="0" rIns="0" bIns="0" rtlCol="0" anchor="ctr"/>
+          <a:lstStyle/>
+          <a:p>
+            <a:pPr indent="0" marL="0">
+              <a:lnSpc>
+                <a:spcPct val="120000"/>
+              </a:lnSpc>
+              <a:buNone/>
+            </a:pPr>
+            <a:r>
+              <a:rPr lang="en-US" sz="1400" b="1" dirty="0">
+                <a:solidFill>
+                  <a:srgbClr val="10161F"/>
+                </a:solidFill>
+                <a:latin typeface="Pretendard" pitchFamily="34" charset="0"/>
+                <a:ea typeface="Pretendard" pitchFamily="34" charset="-122"/>
+                <a:cs typeface="Pretendard" pitchFamily="34" charset="-120"/>
+              </a:rPr>
+              <a:t>근린생활시설</a:t>
+            </a:r>
+            <a:endParaRPr lang="en-US" sz="1400" dirty="0"/>
+          </a:p>
+        </p:txBody>
+      </p:sp>
+      <p:sp>
+        <p:nvSpPr>
+          <p:cNvPr id="12" name="Shape 10"/>
+          <p:cNvSpPr/>
+          <p:nvPr/>
+        </p:nvSpPr>
+        <p:spPr>
+          <a:xfrm>
+            <a:off x="566928" y="2450592"/>
+            <a:ext cx="6858000" cy="0"/>
+          </a:xfrm>
+          <a:prstGeom prst="line">
+            <a:avLst/>
+          </a:prstGeom>
+          <a:noFill/>
+          <a:ln w="3810">
+            <a:solidFill>
+              <a:srgbClr val="CBD5E0"/>
+            </a:solidFill>
+            <a:prstDash val="solid"/>
+          </a:ln>
+        </p:spPr>
+      </p:sp>
+      <p:sp>
+        <p:nvSpPr>
+          <p:cNvPr id="13" name="Text 11"/>
+          <p:cNvSpPr/>
+          <p:nvPr/>
+        </p:nvSpPr>
+        <p:spPr>
+          <a:xfrm>
+            <a:off x="566928" y="2450592"/>
+            <a:ext cx="2606040" cy="402336"/>
+          </a:xfrm>
+          <a:prstGeom prst="rect">
+            <a:avLst/>
+          </a:prstGeom>
+          <a:noFill/>
+          <a:ln/>
+        </p:spPr>
+        <p:txBody>
+          <a:bodyPr wrap="square" lIns="0" tIns="0" rIns="0" bIns="0" rtlCol="0" anchor="ctr"/>
+          <a:lstStyle/>
+          <a:p>
+            <a:pPr indent="0" marL="0">
+              <a:lnSpc>
+                <a:spcPct val="120000"/>
+              </a:lnSpc>
+              <a:buNone/>
+            </a:pPr>
+            <a:r>
+              <a:rPr lang="en-US" sz="1400" dirty="0">
+                <a:solidFill>
+                  <a:srgbClr val="718096"/>
+                </a:solidFill>
+                <a:latin typeface="Pretendard" pitchFamily="34" charset="0"/>
+                <a:ea typeface="Pretendard" pitchFamily="34" charset="-122"/>
+                <a:cs typeface="Pretendard" pitchFamily="34" charset="-120"/>
+              </a:rPr>
+              <a:t>연면적</a:t>
+            </a:r>
+            <a:endParaRPr lang="en-US" sz="1400" dirty="0"/>
+          </a:p>
+        </p:txBody>
+      </p:sp>
+      <p:sp>
+        <p:nvSpPr>
+          <p:cNvPr id="14" name="Text 12"/>
+          <p:cNvSpPr/>
+          <p:nvPr/>
+        </p:nvSpPr>
+        <p:spPr>
+          <a:xfrm>
+            <a:off x="3172968" y="2450592"/>
+            <a:ext cx="4251960" cy="402336"/>
+          </a:xfrm>
+          <a:prstGeom prst="rect">
+            <a:avLst/>
+          </a:prstGeom>
+          <a:noFill/>
+          <a:ln/>
+        </p:spPr>
+        <p:txBody>
+          <a:bodyPr wrap="square" lIns="0" tIns="0" rIns="0" bIns="0" rtlCol="0" anchor="ctr"/>
+          <a:lstStyle/>
+          <a:p>
+            <a:pPr indent="0" marL="0">
+              <a:lnSpc>
+                <a:spcPct val="120000"/>
+              </a:lnSpc>
+              <a:buNone/>
+            </a:pPr>
+            <a:r>
+              <a:rPr lang="en-US" sz="1400" b="1" dirty="0">
+                <a:solidFill>
+                  <a:srgbClr val="10161F"/>
+                </a:solidFill>
+                <a:latin typeface="Pretendard" pitchFamily="34" charset="0"/>
+                <a:ea typeface="Pretendard" pitchFamily="34" charset="-122"/>
+                <a:cs typeface="Pretendard" pitchFamily="34" charset="-120"/>
+              </a:rPr>
+              <a:t>5,000㎡ (약 1513평(약 5001.7㎡))</a:t>
+            </a:r>
+            <a:endParaRPr lang="en-US" sz="1400" dirty="0"/>
+          </a:p>
+        </p:txBody>
+      </p:sp>
+      <p:sp>
+        <p:nvSpPr>
+          <p:cNvPr id="15" name="Shape 13"/>
+          <p:cNvSpPr/>
+          <p:nvPr/>
+        </p:nvSpPr>
+        <p:spPr>
+          <a:xfrm>
+            <a:off x="566928" y="2852928"/>
+            <a:ext cx="6858000" cy="0"/>
+          </a:xfrm>
+          <a:prstGeom prst="line">
+            <a:avLst/>
+          </a:prstGeom>
+          <a:noFill/>
+          <a:ln w="3810">
+            <a:solidFill>
+              <a:srgbClr val="CBD5E0"/>
+            </a:solidFill>
+            <a:prstDash val="solid"/>
+          </a:ln>
+        </p:spPr>
+      </p:sp>
+      <p:sp>
+        <p:nvSpPr>
+          <p:cNvPr id="16" name="Text 14"/>
+          <p:cNvSpPr/>
+          <p:nvPr/>
+        </p:nvSpPr>
+        <p:spPr>
+          <a:xfrm>
+            <a:off x="566928" y="2852928"/>
+            <a:ext cx="2606040" cy="402336"/>
+          </a:xfrm>
+          <a:prstGeom prst="rect">
+            <a:avLst/>
+          </a:prstGeom>
+          <a:noFill/>
+          <a:ln/>
+        </p:spPr>
+        <p:txBody>
+          <a:bodyPr wrap="square" lIns="0" tIns="0" rIns="0" bIns="0" rtlCol="0" anchor="ctr"/>
+          <a:lstStyle/>
+          <a:p>
+            <a:pPr indent="0" marL="0">
+              <a:lnSpc>
+                <a:spcPct val="120000"/>
+              </a:lnSpc>
+              <a:buNone/>
+            </a:pPr>
+            <a:r>
+              <a:rPr lang="en-US" sz="1400" dirty="0">
+                <a:solidFill>
+                  <a:srgbClr val="718096"/>
+                </a:solidFill>
+                <a:latin typeface="Pretendard" pitchFamily="34" charset="0"/>
+                <a:ea typeface="Pretendard" pitchFamily="34" charset="-122"/>
+                <a:cs typeface="Pretendard" pitchFamily="34" charset="-120"/>
+              </a:rPr>
+              <a:t>대지면적</a:t>
+            </a:r>
+            <a:endParaRPr lang="en-US" sz="1400" dirty="0"/>
+          </a:p>
+        </p:txBody>
+      </p:sp>
+      <p:sp>
+        <p:nvSpPr>
+          <p:cNvPr id="17" name="Text 15"/>
+          <p:cNvSpPr/>
+          <p:nvPr/>
+        </p:nvSpPr>
+        <p:spPr>
+          <a:xfrm>
+            <a:off x="3172968" y="2852928"/>
+            <a:ext cx="4251960" cy="402336"/>
+          </a:xfrm>
+          <a:prstGeom prst="rect">
+            <a:avLst/>
+          </a:prstGeom>
+          <a:noFill/>
+          <a:ln/>
+        </p:spPr>
+        <p:txBody>
+          <a:bodyPr wrap="square" lIns="0" tIns="0" rIns="0" bIns="0" rtlCol="0" anchor="ctr"/>
+          <a:lstStyle/>
+          <a:p>
+            <a:pPr indent="0" marL="0">
+              <a:lnSpc>
+                <a:spcPct val="120000"/>
+              </a:lnSpc>
+              <a:buNone/>
+            </a:pPr>
+            <a:r>
+              <a:rPr lang="en-US" sz="1400" b="1" dirty="0">
+                <a:solidFill>
+                  <a:srgbClr val="10161F"/>
+                </a:solidFill>
+                <a:latin typeface="Pretendard" pitchFamily="34" charset="0"/>
+                <a:ea typeface="Pretendard" pitchFamily="34" charset="-122"/>
+                <a:cs typeface="Pretendard" pitchFamily="34" charset="-120"/>
+              </a:rPr>
+              <a:t>1,000㎡ (약 303평(약 1001.7㎡))</a:t>
+            </a:r>
+            <a:endParaRPr lang="en-US" sz="1400" dirty="0"/>
+          </a:p>
+        </p:txBody>
+      </p:sp>
+      <p:sp>
+        <p:nvSpPr>
+          <p:cNvPr id="18" name="Shape 16"/>
+          <p:cNvSpPr/>
+          <p:nvPr/>
+        </p:nvSpPr>
+        <p:spPr>
+          <a:xfrm>
+            <a:off x="566928" y="3255264"/>
+            <a:ext cx="6858000" cy="0"/>
+          </a:xfrm>
+          <a:prstGeom prst="line">
+            <a:avLst/>
+          </a:prstGeom>
+          <a:noFill/>
+          <a:ln w="3810">
+            <a:solidFill>
+              <a:srgbClr val="CBD5E0"/>
+            </a:solidFill>
+            <a:prstDash val="solid"/>
+          </a:ln>
+        </p:spPr>
+      </p:sp>
+      <p:sp>
+        <p:nvSpPr>
+          <p:cNvPr id="19" name="Text 17"/>
+          <p:cNvSpPr/>
+          <p:nvPr/>
+        </p:nvSpPr>
+        <p:spPr>
+          <a:xfrm>
+            <a:off x="566928" y="3255264"/>
+            <a:ext cx="2606040" cy="402336"/>
+          </a:xfrm>
+          <a:prstGeom prst="rect">
+            <a:avLst/>
+          </a:prstGeom>
+          <a:noFill/>
+          <a:ln/>
+        </p:spPr>
+        <p:txBody>
+          <a:bodyPr wrap="square" lIns="0" tIns="0" rIns="0" bIns="0" rtlCol="0" anchor="ctr"/>
+          <a:lstStyle/>
+          <a:p>
+            <a:pPr indent="0" marL="0">
+              <a:lnSpc>
+                <a:spcPct val="120000"/>
+              </a:lnSpc>
+              <a:buNone/>
+            </a:pPr>
+            <a:r>
+              <a:rPr lang="en-US" sz="1400" dirty="0">
+                <a:solidFill>
+                  <a:srgbClr val="718096"/>
+                </a:solidFill>
+                <a:latin typeface="Pretendard" pitchFamily="34" charset="0"/>
+                <a:ea typeface="Pretendard" pitchFamily="34" charset="-122"/>
+                <a:cs typeface="Pretendard" pitchFamily="34" charset="-120"/>
+              </a:rPr>
+              <a:t>용도지역</a:t>
+            </a:r>
+            <a:endParaRPr lang="en-US" sz="1400" dirty="0"/>
+          </a:p>
+        </p:txBody>
+      </p:sp>
+      <p:sp>
+        <p:nvSpPr>
+          <p:cNvPr id="20" name="Text 18"/>
+          <p:cNvSpPr/>
+          <p:nvPr/>
+        </p:nvSpPr>
+        <p:spPr>
+          <a:xfrm>
+            <a:off x="3172968" y="3255264"/>
+            <a:ext cx="4251960" cy="402336"/>
+          </a:xfrm>
+          <a:prstGeom prst="rect">
+            <a:avLst/>
+          </a:prstGeom>
+          <a:noFill/>
+          <a:ln/>
+        </p:spPr>
+        <p:txBody>
+          <a:bodyPr wrap="square" lIns="0" tIns="0" rIns="0" bIns="0" rtlCol="0" anchor="ctr"/>
+          <a:lstStyle/>
+          <a:p>
+            <a:pPr indent="0" marL="0">
+              <a:lnSpc>
+                <a:spcPct val="120000"/>
+              </a:lnSpc>
+              <a:buNone/>
+            </a:pPr>
+            <a:r>
+              <a:rPr lang="en-US" sz="1400" b="1" dirty="0">
+                <a:solidFill>
+                  <a:srgbClr val="10161F"/>
+                </a:solidFill>
+                <a:latin typeface="Pretendard" pitchFamily="34" charset="0"/>
+                <a:ea typeface="Pretendard" pitchFamily="34" charset="-122"/>
+                <a:cs typeface="Pretendard" pitchFamily="34" charset="-120"/>
+              </a:rPr>
+              <a:t>일반상업지역</a:t>
+            </a:r>
+            <a:endParaRPr lang="en-US" sz="1400" dirty="0"/>
+          </a:p>
+        </p:txBody>
+      </p:sp>
+      <p:sp>
+        <p:nvSpPr>
+          <p:cNvPr id="21" name="Shape 19"/>
+          <p:cNvSpPr/>
+          <p:nvPr/>
+        </p:nvSpPr>
+        <p:spPr>
+          <a:xfrm>
+            <a:off x="566928" y="3657600"/>
+            <a:ext cx="6858000" cy="0"/>
+          </a:xfrm>
+          <a:prstGeom prst="line">
+            <a:avLst/>
+          </a:prstGeom>
+          <a:noFill/>
+          <a:ln w="3810">
+            <a:solidFill>
+              <a:srgbClr val="CBD5E0"/>
+            </a:solidFill>
+            <a:prstDash val="solid"/>
+          </a:ln>
+        </p:spPr>
+      </p:sp>
+      <p:sp>
+        <p:nvSpPr>
+          <p:cNvPr id="22" name="Text 20"/>
+          <p:cNvSpPr/>
+          <p:nvPr/>
+        </p:nvSpPr>
+        <p:spPr>
+          <a:xfrm>
+            <a:off x="566928" y="3657600"/>
+            <a:ext cx="2606040" cy="402336"/>
+          </a:xfrm>
+          <a:prstGeom prst="rect">
+            <a:avLst/>
+          </a:prstGeom>
+          <a:noFill/>
+          <a:ln/>
+        </p:spPr>
+        <p:txBody>
+          <a:bodyPr wrap="square" lIns="0" tIns="0" rIns="0" bIns="0" rtlCol="0" anchor="ctr"/>
+          <a:lstStyle/>
+          <a:p>
+            <a:pPr indent="0" marL="0">
+              <a:lnSpc>
+                <a:spcPct val="120000"/>
+              </a:lnSpc>
+              <a:buNone/>
+            </a:pPr>
+            <a:r>
+              <a:rPr lang="en-US" sz="1400" dirty="0">
+                <a:solidFill>
+                  <a:srgbClr val="718096"/>
+                </a:solidFill>
+                <a:latin typeface="Pretendard" pitchFamily="34" charset="0"/>
+                <a:ea typeface="Pretendard" pitchFamily="34" charset="-122"/>
+                <a:cs typeface="Pretendard" pitchFamily="34" charset="-120"/>
+              </a:rPr>
+              <a:t>승강기</a:t>
+            </a:r>
+            <a:endParaRPr lang="en-US" sz="1400" dirty="0"/>
+          </a:p>
+        </p:txBody>
+      </p:sp>
+      <p:sp>
+        <p:nvSpPr>
+          <p:cNvPr id="23" name="Text 21"/>
+          <p:cNvSpPr/>
+          <p:nvPr/>
+        </p:nvSpPr>
+        <p:spPr>
+          <a:xfrm>
+            <a:off x="3172968" y="3657600"/>
+            <a:ext cx="4251960" cy="402336"/>
+          </a:xfrm>
+          <a:prstGeom prst="rect">
+            <a:avLst/>
+          </a:prstGeom>
+          <a:noFill/>
+          <a:ln/>
+        </p:spPr>
+        <p:txBody>
+          <a:bodyPr wrap="square" lIns="0" tIns="0" rIns="0" bIns="0" rtlCol="0" anchor="ctr"/>
+          <a:lstStyle/>
+          <a:p>
+            <a:pPr indent="0" marL="0">
+              <a:lnSpc>
+                <a:spcPct val="120000"/>
+              </a:lnSpc>
+              <a:buNone/>
+            </a:pPr>
+            <a:r>
+              <a:rPr lang="en-US" sz="1400" b="1" dirty="0">
+                <a:solidFill>
+                  <a:srgbClr val="10161F"/>
+                </a:solidFill>
+                <a:latin typeface="Pretendard" pitchFamily="34" charset="0"/>
+                <a:ea typeface="Pretendard" pitchFamily="34" charset="-122"/>
+                <a:cs typeface="Pretendard" pitchFamily="34" charset="-120"/>
+              </a:rPr>
+              <a:t>1대 (15인승 침대용)</a:t>
+            </a:r>
+            <a:endParaRPr lang="en-US" sz="1400" dirty="0"/>
+          </a:p>
+        </p:txBody>
+      </p:sp>
+      <p:sp>
+        <p:nvSpPr>
+          <p:cNvPr id="24" name="Shape 22"/>
+          <p:cNvSpPr/>
+          <p:nvPr/>
+        </p:nvSpPr>
+        <p:spPr>
+          <a:xfrm>
+            <a:off x="566928" y="4059936"/>
+            <a:ext cx="6858000" cy="0"/>
+          </a:xfrm>
+          <a:prstGeom prst="line">
+            <a:avLst/>
+          </a:prstGeom>
+          <a:noFill/>
+          <a:ln w="3810">
+            <a:solidFill>
+              <a:srgbClr val="CBD5E0"/>
+            </a:solidFill>
+            <a:prstDash val="solid"/>
+          </a:ln>
+        </p:spPr>
+      </p:sp>
+      <p:sp>
+        <p:nvSpPr>
+          <p:cNvPr id="25" name="Text 23"/>
+          <p:cNvSpPr/>
+          <p:nvPr/>
+        </p:nvSpPr>
+        <p:spPr>
+          <a:xfrm>
+            <a:off x="566928" y="4059936"/>
+            <a:ext cx="2606040" cy="402336"/>
+          </a:xfrm>
+          <a:prstGeom prst="rect">
+            <a:avLst/>
+          </a:prstGeom>
+          <a:noFill/>
+          <a:ln/>
+        </p:spPr>
+        <p:txBody>
+          <a:bodyPr wrap="square" lIns="0" tIns="0" rIns="0" bIns="0" rtlCol="0" anchor="ctr"/>
+          <a:lstStyle/>
+          <a:p>
+            <a:pPr indent="0" marL="0">
+              <a:lnSpc>
+                <a:spcPct val="120000"/>
+              </a:lnSpc>
+              <a:buNone/>
+            </a:pPr>
+            <a:r>
+              <a:rPr lang="en-US" sz="1400" dirty="0">
+                <a:solidFill>
+                  <a:srgbClr val="718096"/>
+                </a:solidFill>
+                <a:latin typeface="Pretendard" pitchFamily="34" charset="0"/>
+                <a:ea typeface="Pretendard" pitchFamily="34" charset="-122"/>
+                <a:cs typeface="Pretendard" pitchFamily="34" charset="-120"/>
+              </a:rPr>
+              <a:t>주차 대수</a:t>
+            </a:r>
+            <a:endParaRPr lang="en-US" sz="1400" dirty="0"/>
+          </a:p>
+        </p:txBody>
+      </p:sp>
+      <p:sp>
+        <p:nvSpPr>
+          <p:cNvPr id="26" name="Text 24"/>
+          <p:cNvSpPr/>
+          <p:nvPr/>
+        </p:nvSpPr>
+        <p:spPr>
+          <a:xfrm>
+            <a:off x="3172968" y="4059936"/>
+            <a:ext cx="4251960" cy="402336"/>
+          </a:xfrm>
+          <a:prstGeom prst="rect">
+            <a:avLst/>
+          </a:prstGeom>
+          <a:noFill/>
+          <a:ln/>
+        </p:spPr>
+        <p:txBody>
+          <a:bodyPr wrap="square" lIns="0" tIns="0" rIns="0" bIns="0" rtlCol="0" anchor="ctr"/>
+          <a:lstStyle/>
+          <a:p>
+            <a:pPr indent="0" marL="0">
+              <a:lnSpc>
+                <a:spcPct val="120000"/>
+              </a:lnSpc>
+              <a:buNone/>
+            </a:pPr>
+            <a:r>
+              <a:rPr lang="en-US" sz="1400" b="1" dirty="0">
+                <a:solidFill>
+                  <a:srgbClr val="10161F"/>
+                </a:solidFill>
+                <a:latin typeface="Pretendard" pitchFamily="34" charset="0"/>
+                <a:ea typeface="Pretendard" pitchFamily="34" charset="-122"/>
+                <a:cs typeface="Pretendard" pitchFamily="34" charset="-120"/>
+              </a:rPr>
+              <a:t>18대 (자주식 완비)</a:t>
+            </a:r>
+            <a:endParaRPr lang="en-US" sz="1400" dirty="0"/>
+          </a:p>
+        </p:txBody>
+      </p:sp>
+      <p:sp>
+        <p:nvSpPr>
+          <p:cNvPr id="27" name="Shape 25"/>
+          <p:cNvSpPr/>
+          <p:nvPr/>
+        </p:nvSpPr>
+        <p:spPr>
+          <a:xfrm>
+            <a:off x="566928" y="4462272"/>
+            <a:ext cx="6858000" cy="0"/>
+          </a:xfrm>
+          <a:prstGeom prst="line">
+            <a:avLst/>
+          </a:prstGeom>
+          <a:noFill/>
+          <a:ln w="3810">
+            <a:solidFill>
+              <a:srgbClr val="CBD5E0"/>
+            </a:solidFill>
+            <a:prstDash val="solid"/>
+          </a:ln>
+        </p:spPr>
+      </p:sp>
+      <p:sp>
+        <p:nvSpPr>
+          <p:cNvPr id="28" name="Text 26"/>
+          <p:cNvSpPr/>
+          <p:nvPr/>
+        </p:nvSpPr>
+        <p:spPr>
+          <a:xfrm>
+            <a:off x="566928" y="4462272"/>
+            <a:ext cx="2606040" cy="402336"/>
+          </a:xfrm>
+          <a:prstGeom prst="rect">
+            <a:avLst/>
+          </a:prstGeom>
+          <a:noFill/>
+          <a:ln/>
+        </p:spPr>
+        <p:txBody>
+          <a:bodyPr wrap="square" lIns="0" tIns="0" rIns="0" bIns="0" rtlCol="0" anchor="ctr"/>
+          <a:lstStyle/>
+          <a:p>
+            <a:pPr indent="0" marL="0">
+              <a:lnSpc>
+                <a:spcPct val="120000"/>
+              </a:lnSpc>
+              <a:buNone/>
+            </a:pPr>
+            <a:r>
+              <a:rPr lang="en-US" sz="1400" dirty="0">
+                <a:solidFill>
+                  <a:srgbClr val="718096"/>
+                </a:solidFill>
+                <a:latin typeface="Pretendard" pitchFamily="34" charset="0"/>
+                <a:ea typeface="Pretendard" pitchFamily="34" charset="-122"/>
+                <a:cs typeface="Pretendard" pitchFamily="34" charset="-120"/>
+              </a:rPr>
+              <a:t>주구조</a:t>
+            </a:r>
+            <a:endParaRPr lang="en-US" sz="1400" dirty="0"/>
+          </a:p>
+        </p:txBody>
+      </p:sp>
+      <p:sp>
+        <p:nvSpPr>
+          <p:cNvPr id="29" name="Text 27"/>
+          <p:cNvSpPr/>
+          <p:nvPr/>
+        </p:nvSpPr>
+        <p:spPr>
+          <a:xfrm>
+            <a:off x="3172968" y="4462272"/>
+            <a:ext cx="4251960" cy="402336"/>
+          </a:xfrm>
+          <a:prstGeom prst="rect">
+            <a:avLst/>
+          </a:prstGeom>
+          <a:noFill/>
+          <a:ln/>
+        </p:spPr>
+        <p:txBody>
+          <a:bodyPr wrap="square" lIns="0" tIns="0" rIns="0" bIns="0" rtlCol="0" anchor="ctr"/>
+          <a:lstStyle/>
+          <a:p>
+            <a:pPr indent="0" marL="0">
+              <a:lnSpc>
+                <a:spcPct val="120000"/>
+              </a:lnSpc>
+              <a:buNone/>
+            </a:pPr>
+            <a:r>
+              <a:rPr lang="en-US" sz="1400" b="1" dirty="0">
+                <a:solidFill>
+                  <a:srgbClr val="10161F"/>
+                </a:solidFill>
+                <a:latin typeface="Pretendard" pitchFamily="34" charset="0"/>
+                <a:ea typeface="Pretendard" pitchFamily="34" charset="-122"/>
+                <a:cs typeface="Pretendard" pitchFamily="34" charset="-120"/>
+              </a:rPr>
+              <a:t>철근콘크리트구조</a:t>
+            </a:r>
+            <a:endParaRPr lang="en-US" sz="1400" dirty="0"/>
+          </a:p>
+        </p:txBody>
+      </p:sp>
+      <p:sp>
+        <p:nvSpPr>
+          <p:cNvPr id="30" name="Shape 28"/>
+          <p:cNvSpPr/>
+          <p:nvPr/>
+        </p:nvSpPr>
+        <p:spPr>
+          <a:xfrm>
+            <a:off x="566928" y="4864608"/>
+            <a:ext cx="6858000" cy="0"/>
+          </a:xfrm>
+          <a:prstGeom prst="line">
+            <a:avLst/>
+          </a:prstGeom>
+          <a:noFill/>
+          <a:ln w="3810">
+            <a:solidFill>
+              <a:srgbClr val="CBD5E0"/>
+            </a:solidFill>
+            <a:prstDash val="solid"/>
+          </a:ln>
+        </p:spPr>
+      </p:sp>
+      <p:sp>
+        <p:nvSpPr>
+          <p:cNvPr id="31" name="Text 29"/>
+          <p:cNvSpPr/>
+          <p:nvPr/>
+        </p:nvSpPr>
+        <p:spPr>
+          <a:xfrm>
+            <a:off x="566928" y="4864608"/>
+            <a:ext cx="2606040" cy="402336"/>
+          </a:xfrm>
+          <a:prstGeom prst="rect">
+            <a:avLst/>
+          </a:prstGeom>
+          <a:noFill/>
+          <a:ln/>
+        </p:spPr>
+        <p:txBody>
+          <a:bodyPr wrap="square" lIns="0" tIns="0" rIns="0" bIns="0" rtlCol="0" anchor="ctr"/>
+          <a:lstStyle/>
+          <a:p>
+            <a:pPr indent="0" marL="0">
+              <a:lnSpc>
+                <a:spcPct val="120000"/>
+              </a:lnSpc>
+              <a:buNone/>
+            </a:pPr>
+            <a:r>
+              <a:rPr lang="en-US" sz="1400" dirty="0">
+                <a:solidFill>
+                  <a:srgbClr val="718096"/>
+                </a:solidFill>
+                <a:latin typeface="Pretendard" pitchFamily="34" charset="0"/>
+                <a:ea typeface="Pretendard" pitchFamily="34" charset="-122"/>
+                <a:cs typeface="Pretendard" pitchFamily="34" charset="-120"/>
+              </a:rPr>
+              <a:t>매매 희망가</a:t>
+            </a:r>
+            <a:endParaRPr lang="en-US" sz="1400" dirty="0"/>
+          </a:p>
+        </p:txBody>
+      </p:sp>
+      <p:sp>
+        <p:nvSpPr>
+          <p:cNvPr id="32" name="Text 30"/>
+          <p:cNvSpPr/>
+          <p:nvPr/>
+        </p:nvSpPr>
+        <p:spPr>
+          <a:xfrm>
+            <a:off x="3172968" y="4864608"/>
+            <a:ext cx="4251960" cy="402336"/>
+          </a:xfrm>
+          <a:prstGeom prst="rect">
+            <a:avLst/>
+          </a:prstGeom>
+          <a:noFill/>
+          <a:ln/>
+        </p:spPr>
+        <p:txBody>
+          <a:bodyPr wrap="square" lIns="0" tIns="0" rIns="0" bIns="0" rtlCol="0" anchor="ctr"/>
+          <a:lstStyle/>
+          <a:p>
+            <a:pPr indent="0" marL="0">
+              <a:lnSpc>
+                <a:spcPct val="120000"/>
+              </a:lnSpc>
+              <a:buNone/>
+            </a:pPr>
+            <a:r>
+              <a:rPr lang="en-US" sz="1400" b="1" dirty="0">
+                <a:solidFill>
+                  <a:srgbClr val="10161F"/>
+                </a:solidFill>
+                <a:latin typeface="Pretendard" pitchFamily="34" charset="0"/>
+                <a:ea typeface="Pretendard" pitchFamily="34" charset="-122"/>
+                <a:cs typeface="Pretendard" pitchFamily="34" charset="-120"/>
+              </a:rPr>
+              <a:t>180억</a:t>
+            </a:r>
+            <a:endParaRPr lang="en-US" sz="1400" dirty="0"/>
+          </a:p>
+        </p:txBody>
+      </p:sp>
+      <p:sp>
+        <p:nvSpPr>
+          <p:cNvPr id="33" name="Shape 31"/>
           <p:cNvSpPr/>
           <p:nvPr/>
         </p:nvSpPr>
@@ -5669,49 +6525,49 @@
       </p:sp>
       <p:sp>
         <p:nvSpPr>
-          <p:cNvPr id="10" name="Shape 8"/>
+          <p:cNvPr id="34" name="Shape 32"/>
           <p:cNvSpPr/>
           <p:nvPr/>
         </p:nvSpPr>
         <p:spPr>
           <a:xfrm>
             <a:off x="7784287" y="1645920"/>
-            <a:ext cx="3840480" cy="2103120"/>
+            <a:ext cx="3840480" cy="1645920"/>
           </a:xfrm>
           <a:prstGeom prst="roundRect">
             <a:avLst>
-              <a:gd name="adj" fmla="val 2609"/>
+              <a:gd name="adj" fmla="val 3333"/>
             </a:avLst>
           </a:prstGeom>
           <a:solidFill>
-            <a:srgbClr val="F3EBDA"/>
+            <a:srgbClr val="BEE3F8"/>
           </a:solidFill>
           <a:ln/>
         </p:spPr>
       </p:sp>
       <p:sp>
         <p:nvSpPr>
-          <p:cNvPr id="11" name="Shape 9"/>
+          <p:cNvPr id="35" name="Shape 33"/>
           <p:cNvSpPr/>
           <p:nvPr/>
         </p:nvSpPr>
         <p:spPr>
           <a:xfrm>
             <a:off x="7784287" y="1700784"/>
-            <a:ext cx="36576" cy="1993392"/>
+            <a:ext cx="36576" cy="1536192"/>
           </a:xfrm>
           <a:prstGeom prst="rect">
             <a:avLst/>
           </a:prstGeom>
           <a:solidFill>
-            <a:srgbClr val="977024"/>
+            <a:srgbClr val="2B6CB0"/>
           </a:solidFill>
           <a:ln/>
         </p:spPr>
       </p:sp>
       <p:sp>
         <p:nvSpPr>
-          <p:cNvPr id="12" name="Text 10"/>
+          <p:cNvPr id="36" name="Text 34"/>
           <p:cNvSpPr/>
           <p:nvPr/>
         </p:nvSpPr>
@@ -5739,14 +6595,14 @@
       </p:sp>
       <p:sp>
         <p:nvSpPr>
-          <p:cNvPr id="13" name="Text 11"/>
+          <p:cNvPr id="37" name="Text 35"/>
           <p:cNvSpPr/>
           <p:nvPr/>
         </p:nvSpPr>
         <p:spPr>
           <a:xfrm>
             <a:off x="7967167" y="1975104"/>
-            <a:ext cx="3511296" cy="1700784"/>
+            <a:ext cx="3511296" cy="1243584"/>
           </a:xfrm>
           <a:prstGeom prst="rect">
             <a:avLst/>
@@ -5773,7 +6629,7 @@
                 <a:ea typeface="Pretendard" pitchFamily="34" charset="-122"/>
                 <a:cs typeface="Pretendard" pitchFamily="34" charset="-120"/>
               </a:rPr>
-              <a:t>{"ok":true,"mocked":true,"extractedFields":{"area_signal":"역삼","asset_type":"오피스빌딩","price_band":"300억","size_signal":"3</a:t>
+              <a:t>본 매물은 한남권역 입지의 안정적 운영 자산입니다.</a:t>
             </a:r>
             <a:endParaRPr lang="en-US" sz="930" dirty="0"/>
           </a:p>
@@ -5781,7 +6637,7 @@
       </p:sp>
       <p:sp>
         <p:nvSpPr>
-          <p:cNvPr id="14" name="Text 12"/>
+          <p:cNvPr id="38" name="Text 36"/>
           <p:cNvSpPr/>
           <p:nvPr/>
         </p:nvSpPr>
@@ -5820,7 +6676,7 @@
       </p:sp>
       <p:sp>
         <p:nvSpPr>
-          <p:cNvPr id="15" name="Text 13"/>
+          <p:cNvPr id="39" name="Text 37"/>
           <p:cNvSpPr/>
           <p:nvPr/>
         </p:nvSpPr>
@@ -6826,11 +7682,11 @@
         <p:spPr>
           <a:xfrm>
             <a:off x="566928" y="1417320"/>
-            <a:ext cx="11057839" cy="3611880"/>
+            <a:ext cx="11057839" cy="3657600"/>
           </a:xfrm>
           <a:prstGeom prst="roundRect">
             <a:avLst>
-              <a:gd name="adj" fmla="val 1519"/>
+              <a:gd name="adj" fmla="val 1500"/>
             </a:avLst>
           </a:prstGeom>
           <a:solidFill>
@@ -6911,8 +7767,8 @@
         </p:nvSpPr>
         <p:spPr>
           <a:xfrm>
-            <a:off x="795528" y="1911096"/>
-            <a:ext cx="10600639" cy="402336"/>
+            <a:off x="795528" y="1947672"/>
+            <a:ext cx="10600639" cy="365760"/>
           </a:xfrm>
           <a:prstGeom prst="rect">
             <a:avLst/>
@@ -6930,7 +7786,7 @@
               <a:buNone/>
             </a:pPr>
             <a:r>
-              <a:rPr lang="en-US" sz="1350" b="1" dirty="0">
+              <a:rPr lang="en-US" sz="1250" b="1" dirty="0">
                 <a:solidFill>
                   <a:srgbClr val="10161F"/>
                 </a:solidFill>
@@ -6940,7 +7796,7 @@
               </a:rPr>
               <a:t>—</a:t>
             </a:r>
-            <a:endParaRPr lang="en-US" sz="1350" dirty="0"/>
+            <a:endParaRPr lang="en-US" sz="1250" dirty="0"/>
           </a:p>
         </p:txBody>
       </p:sp>
@@ -6953,7 +7809,7 @@
         <p:spPr>
           <a:xfrm>
             <a:off x="795528" y="2377440"/>
-            <a:ext cx="10600639" cy="2560320"/>
+            <a:ext cx="10600639" cy="2606040"/>
           </a:xfrm>
           <a:prstGeom prst="rect">
             <a:avLst/>
@@ -6975,7 +7831,7 @@
               <a:buChar char="•"/>
             </a:pPr>
             <a:r>
-              <a:rPr lang="en-US" sz="1200" dirty="0">
+              <a:rPr lang="en-US" sz="1100" dirty="0">
                 <a:solidFill>
                   <a:srgbClr val="10161F"/>
                 </a:solidFill>
@@ -6985,13 +7841,79 @@
               </a:rPr>
               <a:t>{"ok":true,"mocked":true,"extractedFields":{"area_signal":"역삼","asset_type":"오피스빌딩","price_band":"300억","size_signal":"3000평(약 9917.4㎡)"},"extractedFacts":{"region":"역삼","exactAddressCandidate":"역삼동 7</a:t>
             </a:r>
-            <a:endParaRPr lang="en-US" sz="1200" dirty="0"/>
-          </a:p>
-        </p:txBody>
-      </p:sp>
-      <p:sp>
-        <p:nvSpPr>
-          <p:cNvPr id="11" name="Text 9"/>
+            <a:endParaRPr lang="en-US" sz="1100" dirty="0"/>
+          </a:p>
+        </p:txBody>
+      </p:sp>
+      <p:sp>
+        <p:nvSpPr>
+          <p:cNvPr id="11" name="Shape 9"/>
+          <p:cNvSpPr/>
+          <p:nvPr/>
+        </p:nvSpPr>
+        <p:spPr>
+          <a:xfrm>
+            <a:off x="566928" y="5193792"/>
+            <a:ext cx="11057839" cy="621792"/>
+          </a:xfrm>
+          <a:prstGeom prst="roundRect">
+            <a:avLst>
+              <a:gd name="adj" fmla="val 8824"/>
+            </a:avLst>
+          </a:prstGeom>
+          <a:solidFill>
+            <a:srgbClr val="F7FAFC"/>
+          </a:solidFill>
+          <a:ln w="6350">
+            <a:solidFill>
+              <a:srgbClr val="CBD5E0"/>
+            </a:solidFill>
+            <a:prstDash val="solid"/>
+          </a:ln>
+        </p:spPr>
+      </p:sp>
+      <p:sp>
+        <p:nvSpPr>
+          <p:cNvPr id="12" name="Text 10"/>
+          <p:cNvSpPr/>
+          <p:nvPr/>
+        </p:nvSpPr>
+        <p:spPr>
+          <a:xfrm>
+            <a:off x="795528" y="5193792"/>
+            <a:ext cx="10600639" cy="621792"/>
+          </a:xfrm>
+          <a:prstGeom prst="rect">
+            <a:avLst/>
+          </a:prstGeom>
+          <a:noFill/>
+          <a:ln/>
+        </p:spPr>
+        <p:txBody>
+          <a:bodyPr wrap="square" lIns="0" tIns="0" rIns="0" bIns="0" rtlCol="0" anchor="ctr"/>
+          <a:lstStyle/>
+          <a:p>
+            <a:pPr indent="0" marL="0">
+              <a:buNone/>
+            </a:pPr>
+            <a:r>
+              <a:rPr lang="en-US" sz="1100" dirty="0">
+                <a:solidFill>
+                  <a:srgbClr val="10161F"/>
+                </a:solidFill>
+                <a:latin typeface="Pretendard" pitchFamily="34" charset="0"/>
+                <a:ea typeface="Pretendard" pitchFamily="34" charset="-122"/>
+                <a:cs typeface="Pretendard" pitchFamily="34" charset="-120"/>
+              </a:rPr>
+              <a:t>※ 본 리스크 체크는 공부 및 브로커 확인 기반이며, 매수 전 전문 실사팀(변호사/건축사)을 통한 정밀 실사가 필요합니다.</a:t>
+            </a:r>
+            <a:endParaRPr lang="en-US" sz="1100" dirty="0"/>
+          </a:p>
+        </p:txBody>
+      </p:sp>
+      <p:sp>
+        <p:nvSpPr>
+          <p:cNvPr id="13" name="Text 11"/>
           <p:cNvSpPr/>
           <p:nvPr/>
         </p:nvSpPr>
@@ -7030,7 +7952,7 @@
       </p:sp>
       <p:sp>
         <p:nvSpPr>
-          <p:cNvPr id="12" name="Text 10"/>
+          <p:cNvPr id="14" name="Text 12"/>
           <p:cNvSpPr/>
           <p:nvPr/>
         </p:nvSpPr>
@@ -7238,1697 +8160,13 @@
       </p:sp>
       <p:sp>
         <p:nvSpPr>
-          <p:cNvPr id="6" name="Text 4"/>
-          <p:cNvSpPr/>
-          <p:nvPr/>
-        </p:nvSpPr>
-        <p:spPr>
-          <a:xfrm>
-            <a:off x="1133856" y="1005840"/>
-            <a:ext cx="10490911" cy="237744"/>
-          </a:xfrm>
-          <a:prstGeom prst="rect">
-            <a:avLst/>
-          </a:prstGeom>
-          <a:noFill/>
-          <a:ln/>
-        </p:spPr>
-        <p:txBody>
-          <a:bodyPr wrap="square" lIns="0" tIns="0" rIns="0" bIns="0" rtlCol="0" anchor="ctr"/>
-          <a:lstStyle/>
-          <a:p>
-            <a:pPr indent="0" marL="0">
-              <a:buNone/>
-            </a:pPr>
-            <a:r>
-              <a:rPr lang="en-US" sz="1100" dirty="0">
-                <a:solidFill>
-                  <a:srgbClr val="718096"/>
-                </a:solidFill>
-                <a:latin typeface="Pretendard" pitchFamily="34" charset="0"/>
-                <a:ea typeface="Pretendard" pitchFamily="34" charset="-122"/>
-                <a:cs typeface="Pretendard" pitchFamily="34" charset="-120"/>
-              </a:rPr>
-              <a:t>3대 핵심 투자 포인트 (Investment Highlights)</a:t>
-            </a:r>
-            <a:endParaRPr lang="en-US" sz="1100" dirty="0"/>
-          </a:p>
-        </p:txBody>
-      </p:sp>
-      <p:sp>
-        <p:nvSpPr>
-          <p:cNvPr id="7" name="Shape 5"/>
-          <p:cNvSpPr/>
-          <p:nvPr/>
-        </p:nvSpPr>
-        <p:spPr>
-          <a:xfrm>
-            <a:off x="566928" y="1481328"/>
-            <a:ext cx="3472586" cy="2560320"/>
-          </a:xfrm>
-          <a:prstGeom prst="roundRect">
-            <a:avLst>
-              <a:gd name="adj" fmla="val 2857"/>
-            </a:avLst>
-          </a:prstGeom>
-          <a:solidFill>
-            <a:srgbClr val="F7FAFC"/>
-          </a:solidFill>
-          <a:ln w="10160">
-            <a:solidFill>
-              <a:srgbClr val="CBD5E0"/>
-            </a:solidFill>
-            <a:prstDash val="solid"/>
-          </a:ln>
-        </p:spPr>
-      </p:sp>
-      <p:sp>
-        <p:nvSpPr>
-          <p:cNvPr id="8" name="Shape 6"/>
-          <p:cNvSpPr/>
-          <p:nvPr/>
-        </p:nvSpPr>
-        <p:spPr>
-          <a:xfrm>
-            <a:off x="566928" y="1481328"/>
-            <a:ext cx="3472586" cy="54864"/>
-          </a:xfrm>
-          <a:prstGeom prst="rect">
-            <a:avLst/>
-          </a:prstGeom>
-          <a:solidFill>
-            <a:srgbClr val="B98A2E"/>
-          </a:solidFill>
-          <a:ln/>
-        </p:spPr>
-      </p:sp>
-      <p:sp>
-        <p:nvSpPr>
-          <p:cNvPr id="9" name="Shape 7"/>
-          <p:cNvSpPr/>
-          <p:nvPr/>
-        </p:nvSpPr>
-        <p:spPr>
-          <a:xfrm>
-            <a:off x="795528" y="1755648"/>
-            <a:ext cx="475488" cy="292608"/>
-          </a:xfrm>
-          <a:prstGeom prst="roundRect">
-            <a:avLst>
-              <a:gd name="adj" fmla="val 12500"/>
-            </a:avLst>
-          </a:prstGeom>
-          <a:solidFill>
-            <a:srgbClr val="D9B668"/>
-          </a:solidFill>
-          <a:ln/>
-        </p:spPr>
-      </p:sp>
-      <p:sp>
-        <p:nvSpPr>
-          <p:cNvPr id="10" name="Text 8"/>
-          <p:cNvSpPr/>
-          <p:nvPr/>
-        </p:nvSpPr>
-        <p:spPr>
-          <a:xfrm>
-            <a:off x="795528" y="1755648"/>
-            <a:ext cx="475488" cy="292608"/>
-          </a:xfrm>
-          <a:prstGeom prst="rect">
-            <a:avLst/>
-          </a:prstGeom>
-          <a:noFill/>
-          <a:ln/>
-        </p:spPr>
-        <p:txBody>
-          <a:bodyPr wrap="square" lIns="0" tIns="0" rIns="0" bIns="0" rtlCol="0" anchor="ctr"/>
-          <a:lstStyle/>
-          <a:p>
-            <a:pPr algn="ctr" indent="0" marL="0">
-              <a:buNone/>
-            </a:pPr>
-            <a:r>
-              <a:rPr lang="en-US" sz="1100" b="1" dirty="0">
-                <a:solidFill>
-                  <a:srgbClr val="977024"/>
-                </a:solidFill>
-                <a:latin typeface="Arial" pitchFamily="34" charset="0"/>
-                <a:ea typeface="Arial" pitchFamily="34" charset="-122"/>
-                <a:cs typeface="Arial" pitchFamily="34" charset="-120"/>
-              </a:rPr>
-              <a:t>01</a:t>
-            </a:r>
-            <a:endParaRPr lang="en-US" sz="1100" dirty="0"/>
-          </a:p>
-        </p:txBody>
-      </p:sp>
-      <p:sp>
-        <p:nvSpPr>
-          <p:cNvPr id="11" name="Text 9"/>
-          <p:cNvSpPr/>
-          <p:nvPr/>
-        </p:nvSpPr>
-        <p:spPr>
-          <a:xfrm>
-            <a:off x="795528" y="2194560"/>
-            <a:ext cx="3015386" cy="365760"/>
-          </a:xfrm>
-          <a:prstGeom prst="rect">
-            <a:avLst/>
-          </a:prstGeom>
-          <a:noFill/>
-          <a:ln/>
-        </p:spPr>
-        <p:txBody>
-          <a:bodyPr wrap="square" lIns="0" tIns="0" rIns="0" bIns="0" rtlCol="0" anchor="t"/>
-          <a:lstStyle/>
-          <a:p>
-            <a:pPr indent="0" marL="0">
-              <a:buNone/>
-            </a:pPr>
-            <a:r>
-              <a:rPr lang="en-US" sz="1500" b="1" dirty="0">
-                <a:solidFill>
-                  <a:srgbClr val="10161F"/>
-                </a:solidFill>
-                <a:latin typeface="Pretendard" pitchFamily="34" charset="0"/>
-                <a:ea typeface="Pretendard" pitchFamily="34" charset="-122"/>
-                <a:cs typeface="Pretendard" pitchFamily="34" charset="-120"/>
-              </a:rPr>
-              <a:t>원금 안전판 확보</a:t>
-            </a:r>
-            <a:endParaRPr lang="en-US" sz="1500" dirty="0"/>
-          </a:p>
-        </p:txBody>
-      </p:sp>
-      <p:sp>
-        <p:nvSpPr>
-          <p:cNvPr id="12" name="Shape 10"/>
-          <p:cNvSpPr/>
-          <p:nvPr/>
-        </p:nvSpPr>
-        <p:spPr>
-          <a:xfrm>
-            <a:off x="795528" y="2624328"/>
-            <a:ext cx="3015386" cy="0"/>
-          </a:xfrm>
-          <a:prstGeom prst="line">
-            <a:avLst/>
-          </a:prstGeom>
-          <a:noFill/>
-          <a:ln w="6350">
-            <a:solidFill>
-              <a:srgbClr val="CBD5E0"/>
-            </a:solidFill>
-            <a:prstDash val="solid"/>
-          </a:ln>
-        </p:spPr>
-      </p:sp>
-      <p:sp>
-        <p:nvSpPr>
-          <p:cNvPr id="13" name="Text 11"/>
-          <p:cNvSpPr/>
-          <p:nvPr/>
-        </p:nvSpPr>
-        <p:spPr>
-          <a:xfrm>
-            <a:off x="795528" y="2779776"/>
-            <a:ext cx="3015386" cy="1051560"/>
-          </a:xfrm>
-          <a:prstGeom prst="rect">
-            <a:avLst/>
-          </a:prstGeom>
-          <a:noFill/>
-          <a:ln/>
-        </p:spPr>
-        <p:txBody>
-          <a:bodyPr wrap="square" lIns="0" tIns="0" rIns="0" bIns="0" rtlCol="0" anchor="t"/>
-          <a:lstStyle/>
-          <a:p>
-            <a:pPr indent="0" marL="0">
-              <a:lnSpc>
-                <a:spcPct val="130000"/>
-              </a:lnSpc>
-              <a:buNone/>
-            </a:pPr>
-            <a:r>
-              <a:rPr lang="en-US" sz="1200" dirty="0">
-                <a:solidFill>
-                  <a:srgbClr val="10161F"/>
-                </a:solidFill>
-                <a:latin typeface="Pretendard" pitchFamily="34" charset="0"/>
-                <a:ea typeface="Pretendard" pitchFamily="34" charset="-122"/>
-                <a:cs typeface="Pretendard" pitchFamily="34" charset="-120"/>
-              </a:rPr>
-              <a:t>한남권역의 핵심 입지로, 우량한 대지 지분 가치가 하방 경직성을 강력히 지지합니다.</a:t>
-            </a:r>
-            <a:endParaRPr lang="en-US" sz="1200" dirty="0"/>
-          </a:p>
-        </p:txBody>
-      </p:sp>
-      <p:sp>
-        <p:nvSpPr>
-          <p:cNvPr id="14" name="Shape 12"/>
-          <p:cNvSpPr/>
-          <p:nvPr/>
-        </p:nvSpPr>
-        <p:spPr>
-          <a:xfrm>
-            <a:off x="4359554" y="1481328"/>
-            <a:ext cx="3472586" cy="2560320"/>
-          </a:xfrm>
-          <a:prstGeom prst="roundRect">
-            <a:avLst>
-              <a:gd name="adj" fmla="val 2857"/>
-            </a:avLst>
-          </a:prstGeom>
-          <a:solidFill>
-            <a:srgbClr val="F7FAFC"/>
-          </a:solidFill>
-          <a:ln w="10160">
-            <a:solidFill>
-              <a:srgbClr val="CBD5E0"/>
-            </a:solidFill>
-            <a:prstDash val="solid"/>
-          </a:ln>
-        </p:spPr>
-      </p:sp>
-      <p:sp>
-        <p:nvSpPr>
-          <p:cNvPr id="15" name="Shape 13"/>
-          <p:cNvSpPr/>
-          <p:nvPr/>
-        </p:nvSpPr>
-        <p:spPr>
-          <a:xfrm>
-            <a:off x="4359554" y="1481328"/>
-            <a:ext cx="3472586" cy="54864"/>
-          </a:xfrm>
-          <a:prstGeom prst="rect">
-            <a:avLst/>
-          </a:prstGeom>
-          <a:solidFill>
-            <a:srgbClr val="B98A2E"/>
-          </a:solidFill>
-          <a:ln/>
-        </p:spPr>
-      </p:sp>
-      <p:sp>
-        <p:nvSpPr>
-          <p:cNvPr id="16" name="Shape 14"/>
-          <p:cNvSpPr/>
-          <p:nvPr/>
-        </p:nvSpPr>
-        <p:spPr>
-          <a:xfrm>
-            <a:off x="4588154" y="1755648"/>
-            <a:ext cx="475488" cy="292608"/>
-          </a:xfrm>
-          <a:prstGeom prst="roundRect">
-            <a:avLst>
-              <a:gd name="adj" fmla="val 12500"/>
-            </a:avLst>
-          </a:prstGeom>
-          <a:solidFill>
-            <a:srgbClr val="D9B668"/>
-          </a:solidFill>
-          <a:ln/>
-        </p:spPr>
-      </p:sp>
-      <p:sp>
-        <p:nvSpPr>
-          <p:cNvPr id="17" name="Text 15"/>
-          <p:cNvSpPr/>
-          <p:nvPr/>
-        </p:nvSpPr>
-        <p:spPr>
-          <a:xfrm>
-            <a:off x="4588154" y="1755648"/>
-            <a:ext cx="475488" cy="292608"/>
-          </a:xfrm>
-          <a:prstGeom prst="rect">
-            <a:avLst/>
-          </a:prstGeom>
-          <a:noFill/>
-          <a:ln/>
-        </p:spPr>
-        <p:txBody>
-          <a:bodyPr wrap="square" lIns="0" tIns="0" rIns="0" bIns="0" rtlCol="0" anchor="ctr"/>
-          <a:lstStyle/>
-          <a:p>
-            <a:pPr algn="ctr" indent="0" marL="0">
-              <a:buNone/>
-            </a:pPr>
-            <a:r>
-              <a:rPr lang="en-US" sz="1100" b="1" dirty="0">
-                <a:solidFill>
-                  <a:srgbClr val="977024"/>
-                </a:solidFill>
-                <a:latin typeface="Arial" pitchFamily="34" charset="0"/>
-                <a:ea typeface="Arial" pitchFamily="34" charset="-122"/>
-                <a:cs typeface="Arial" pitchFamily="34" charset="-120"/>
-              </a:rPr>
-              <a:t>02</a:t>
-            </a:r>
-            <a:endParaRPr lang="en-US" sz="1100" dirty="0"/>
-          </a:p>
-        </p:txBody>
-      </p:sp>
-      <p:sp>
-        <p:nvSpPr>
-          <p:cNvPr id="18" name="Text 16"/>
-          <p:cNvSpPr/>
-          <p:nvPr/>
-        </p:nvSpPr>
-        <p:spPr>
-          <a:xfrm>
-            <a:off x="4588154" y="2194560"/>
-            <a:ext cx="3015386" cy="365760"/>
-          </a:xfrm>
-          <a:prstGeom prst="rect">
-            <a:avLst/>
-          </a:prstGeom>
-          <a:noFill/>
-          <a:ln/>
-        </p:spPr>
-        <p:txBody>
-          <a:bodyPr wrap="square" lIns="0" tIns="0" rIns="0" bIns="0" rtlCol="0" anchor="t"/>
-          <a:lstStyle/>
-          <a:p>
-            <a:pPr indent="0" marL="0">
-              <a:buNone/>
-            </a:pPr>
-            <a:r>
-              <a:rPr lang="en-US" sz="1500" b="1" dirty="0">
-                <a:solidFill>
-                  <a:srgbClr val="10161F"/>
-                </a:solidFill>
-                <a:latin typeface="Pretendard" pitchFamily="34" charset="0"/>
-                <a:ea typeface="Pretendard" pitchFamily="34" charset="-122"/>
-                <a:cs typeface="Pretendard" pitchFamily="34" charset="-120"/>
-              </a:rPr>
-              <a:t>확실한 월 현금흐름</a:t>
-            </a:r>
-            <a:endParaRPr lang="en-US" sz="1500" dirty="0"/>
-          </a:p>
-        </p:txBody>
-      </p:sp>
-      <p:sp>
-        <p:nvSpPr>
-          <p:cNvPr id="19" name="Shape 17"/>
-          <p:cNvSpPr/>
-          <p:nvPr/>
-        </p:nvSpPr>
-        <p:spPr>
-          <a:xfrm>
-            <a:off x="4588154" y="2624328"/>
-            <a:ext cx="3015386" cy="0"/>
-          </a:xfrm>
-          <a:prstGeom prst="line">
-            <a:avLst/>
-          </a:prstGeom>
-          <a:noFill/>
-          <a:ln w="6350">
-            <a:solidFill>
-              <a:srgbClr val="CBD5E0"/>
-            </a:solidFill>
-            <a:prstDash val="solid"/>
-          </a:ln>
-        </p:spPr>
-      </p:sp>
-      <p:sp>
-        <p:nvSpPr>
-          <p:cNvPr id="20" name="Text 18"/>
-          <p:cNvSpPr/>
-          <p:nvPr/>
-        </p:nvSpPr>
-        <p:spPr>
-          <a:xfrm>
-            <a:off x="4588154" y="2779776"/>
-            <a:ext cx="3015386" cy="1051560"/>
-          </a:xfrm>
-          <a:prstGeom prst="rect">
-            <a:avLst/>
-          </a:prstGeom>
-          <a:noFill/>
-          <a:ln/>
-        </p:spPr>
-        <p:txBody>
-          <a:bodyPr wrap="square" lIns="0" tIns="0" rIns="0" bIns="0" rtlCol="0" anchor="t"/>
-          <a:lstStyle/>
-          <a:p>
-            <a:pPr indent="0" marL="0">
-              <a:lnSpc>
-                <a:spcPct val="130000"/>
-              </a:lnSpc>
-              <a:buNone/>
-            </a:pPr>
-            <a:r>
-              <a:rPr lang="en-US" sz="1200" dirty="0">
-                <a:solidFill>
-                  <a:srgbClr val="10161F"/>
-                </a:solidFill>
-                <a:latin typeface="Pretendard" pitchFamily="34" charset="0"/>
-                <a:ea typeface="Pretendard" pitchFamily="34" charset="-122"/>
-                <a:cs typeface="Pretendard" pitchFamily="34" charset="-120"/>
-              </a:rPr>
-              <a:t>우량 테넌트 만실 운영 및 장기 임대차 구조를 기반으로 매월 안정적인 순영업소득(NOI) 창출이 기대됩니다.</a:t>
-            </a:r>
-            <a:endParaRPr lang="en-US" sz="1200" dirty="0"/>
-          </a:p>
-        </p:txBody>
-      </p:sp>
-      <p:sp>
-        <p:nvSpPr>
-          <p:cNvPr id="21" name="Shape 19"/>
-          <p:cNvSpPr/>
-          <p:nvPr/>
-        </p:nvSpPr>
-        <p:spPr>
-          <a:xfrm>
-            <a:off x="8152181" y="1481328"/>
-            <a:ext cx="3472586" cy="2560320"/>
-          </a:xfrm>
-          <a:prstGeom prst="roundRect">
-            <a:avLst>
-              <a:gd name="adj" fmla="val 2857"/>
-            </a:avLst>
-          </a:prstGeom>
-          <a:solidFill>
-            <a:srgbClr val="F7FAFC"/>
-          </a:solidFill>
-          <a:ln w="10160">
-            <a:solidFill>
-              <a:srgbClr val="CBD5E0"/>
-            </a:solidFill>
-            <a:prstDash val="solid"/>
-          </a:ln>
-        </p:spPr>
-      </p:sp>
-      <p:sp>
-        <p:nvSpPr>
-          <p:cNvPr id="22" name="Shape 20"/>
-          <p:cNvSpPr/>
-          <p:nvPr/>
-        </p:nvSpPr>
-        <p:spPr>
-          <a:xfrm>
-            <a:off x="8152181" y="1481328"/>
-            <a:ext cx="3472586" cy="54864"/>
-          </a:xfrm>
-          <a:prstGeom prst="rect">
-            <a:avLst/>
-          </a:prstGeom>
-          <a:solidFill>
-            <a:srgbClr val="B98A2E"/>
-          </a:solidFill>
-          <a:ln/>
-        </p:spPr>
-      </p:sp>
-      <p:sp>
-        <p:nvSpPr>
-          <p:cNvPr id="23" name="Shape 21"/>
-          <p:cNvSpPr/>
-          <p:nvPr/>
-        </p:nvSpPr>
-        <p:spPr>
-          <a:xfrm>
-            <a:off x="8380781" y="1755648"/>
-            <a:ext cx="475488" cy="292608"/>
-          </a:xfrm>
-          <a:prstGeom prst="roundRect">
-            <a:avLst>
-              <a:gd name="adj" fmla="val 12500"/>
-            </a:avLst>
-          </a:prstGeom>
-          <a:solidFill>
-            <a:srgbClr val="D9B668"/>
-          </a:solidFill>
-          <a:ln/>
-        </p:spPr>
-      </p:sp>
-      <p:sp>
-        <p:nvSpPr>
-          <p:cNvPr id="24" name="Text 22"/>
-          <p:cNvSpPr/>
-          <p:nvPr/>
-        </p:nvSpPr>
-        <p:spPr>
-          <a:xfrm>
-            <a:off x="8380781" y="1755648"/>
-            <a:ext cx="475488" cy="292608"/>
-          </a:xfrm>
-          <a:prstGeom prst="rect">
-            <a:avLst/>
-          </a:prstGeom>
-          <a:noFill/>
-          <a:ln/>
-        </p:spPr>
-        <p:txBody>
-          <a:bodyPr wrap="square" lIns="0" tIns="0" rIns="0" bIns="0" rtlCol="0" anchor="ctr"/>
-          <a:lstStyle/>
-          <a:p>
-            <a:pPr algn="ctr" indent="0" marL="0">
-              <a:buNone/>
-            </a:pPr>
-            <a:r>
-              <a:rPr lang="en-US" sz="1100" b="1" dirty="0">
-                <a:solidFill>
-                  <a:srgbClr val="977024"/>
-                </a:solidFill>
-                <a:latin typeface="Arial" pitchFamily="34" charset="0"/>
-                <a:ea typeface="Arial" pitchFamily="34" charset="-122"/>
-                <a:cs typeface="Arial" pitchFamily="34" charset="-120"/>
-              </a:rPr>
-              <a:t>03</a:t>
-            </a:r>
-            <a:endParaRPr lang="en-US" sz="1100" dirty="0"/>
-          </a:p>
-        </p:txBody>
-      </p:sp>
-      <p:sp>
-        <p:nvSpPr>
-          <p:cNvPr id="25" name="Text 23"/>
-          <p:cNvSpPr/>
-          <p:nvPr/>
-        </p:nvSpPr>
-        <p:spPr>
-          <a:xfrm>
-            <a:off x="8380781" y="2194560"/>
-            <a:ext cx="3015386" cy="365760"/>
-          </a:xfrm>
-          <a:prstGeom prst="rect">
-            <a:avLst/>
-          </a:prstGeom>
-          <a:noFill/>
-          <a:ln/>
-        </p:spPr>
-        <p:txBody>
-          <a:bodyPr wrap="square" lIns="0" tIns="0" rIns="0" bIns="0" rtlCol="0" anchor="t"/>
-          <a:lstStyle/>
-          <a:p>
-            <a:pPr indent="0" marL="0">
-              <a:buNone/>
-            </a:pPr>
-            <a:r>
-              <a:rPr lang="en-US" sz="1500" b="1" dirty="0">
-                <a:solidFill>
-                  <a:srgbClr val="10161F"/>
-                </a:solidFill>
-                <a:latin typeface="Pretendard" pitchFamily="34" charset="0"/>
-                <a:ea typeface="Pretendard" pitchFamily="34" charset="-122"/>
-                <a:cs typeface="Pretendard" pitchFamily="34" charset="-120"/>
-              </a:rPr>
-              <a:t>가치 상승 및 출구 전략</a:t>
-            </a:r>
-            <a:endParaRPr lang="en-US" sz="1500" dirty="0"/>
-          </a:p>
-        </p:txBody>
-      </p:sp>
-      <p:sp>
-        <p:nvSpPr>
-          <p:cNvPr id="26" name="Shape 24"/>
-          <p:cNvSpPr/>
-          <p:nvPr/>
-        </p:nvSpPr>
-        <p:spPr>
-          <a:xfrm>
-            <a:off x="8380781" y="2624328"/>
-            <a:ext cx="3015386" cy="0"/>
-          </a:xfrm>
-          <a:prstGeom prst="line">
-            <a:avLst/>
-          </a:prstGeom>
-          <a:noFill/>
-          <a:ln w="6350">
-            <a:solidFill>
-              <a:srgbClr val="CBD5E0"/>
-            </a:solidFill>
-            <a:prstDash val="solid"/>
-          </a:ln>
-        </p:spPr>
-      </p:sp>
-      <p:sp>
-        <p:nvSpPr>
-          <p:cNvPr id="27" name="Text 25"/>
-          <p:cNvSpPr/>
-          <p:nvPr/>
-        </p:nvSpPr>
-        <p:spPr>
-          <a:xfrm>
-            <a:off x="8380781" y="2779776"/>
-            <a:ext cx="3015386" cy="1051560"/>
-          </a:xfrm>
-          <a:prstGeom prst="rect">
-            <a:avLst/>
-          </a:prstGeom>
-          <a:noFill/>
-          <a:ln/>
-        </p:spPr>
-        <p:txBody>
-          <a:bodyPr wrap="square" lIns="0" tIns="0" rIns="0" bIns="0" rtlCol="0" anchor="t"/>
-          <a:lstStyle/>
-          <a:p>
-            <a:pPr indent="0" marL="0">
-              <a:lnSpc>
-                <a:spcPct val="130000"/>
-              </a:lnSpc>
-              <a:buNone/>
-            </a:pPr>
-            <a:r>
-              <a:rPr lang="en-US" sz="1200" dirty="0">
-                <a:solidFill>
-                  <a:srgbClr val="10161F"/>
-                </a:solidFill>
-                <a:latin typeface="Pretendard" pitchFamily="34" charset="0"/>
-                <a:ea typeface="Pretendard" pitchFamily="34" charset="-122"/>
-                <a:cs typeface="Pretendard" pitchFamily="34" charset="-120"/>
-              </a:rPr>
-              <a:t>현행 공법 여력을 활용한 밸류업 기회와 더불어 향후 권역 지가 상승에 따른 시세차익 실현이 유력합니다.</a:t>
-            </a:r>
-            <a:endParaRPr lang="en-US" sz="1200" dirty="0"/>
-          </a:p>
-        </p:txBody>
-      </p:sp>
-      <p:graphicFrame>
-        <p:nvGraphicFramePr>
-          <p:cNvPr id="9" name="Table 0"/>
-          <p:cNvGraphicFramePr>
-            <a:graphicFrameLocks noGrp="1"/>
-          </p:cNvGraphicFramePr>
-          <p:nvPr>
-            <p:extLst>
-              <p:ext uri="{D42A27DB-BD31-4B8C-83A1-F6EECF244321}">
-                <p14:modId xmlns:p14="http://schemas.microsoft.com/office/powerpoint/2010/main" val="1579011935"/>
-              </p:ext>
-            </p:extLst>
-          </p:nvPr>
-        </p:nvGraphicFramePr>
-        <p:xfrm>
-          <a:off x="566928" y="4178808"/>
-          <a:ext cx="11057839" cy="914400"/>
-        </p:xfrm>
-        <a:graphic>
-          <a:graphicData uri="http://schemas.openxmlformats.org/drawingml/2006/table">
-            <a:tbl>
-              <a:tblPr/>
-              <a:tblGrid>
-                <a:gridCol w="3685946"/>
-                <a:gridCol w="3685946"/>
-                <a:gridCol w="3685946"/>
-              </a:tblGrid>
-              <a:tr h="329184">
-                <a:tc>
-                  <a:txBody>
-                    <a:bodyPr/>
-                    <a:lstStyle/>
-                    <a:p>
-                      <a:pPr indent="0" marL="0">
-                        <a:buNone/>
-                      </a:pPr>
-                      <a:r>
-                        <a:rPr lang="en-US" sz="1050" b="1" dirty="0">
-                          <a:solidFill>
-                            <a:srgbClr val="718096"/>
-                          </a:solidFill>
-                          <a:latin typeface="Pretendard" pitchFamily="34" charset="0"/>
-                          <a:ea typeface="Pretendard" pitchFamily="34" charset="-122"/>
-                          <a:cs typeface="Pretendard" pitchFamily="34" charset="-120"/>
-                        </a:rPr>
-                        <a:t>유형</a:t>
-                      </a:r>
-                      <a:endParaRPr lang="en-US" sz="1050" dirty="0">
-                        <a:latin typeface="Pretendard" charset="0"/>
-                        <a:ea typeface="Pretendard" charset="0"/>
-                        <a:cs typeface="Pretendard" charset="0"/>
-                      </a:endParaRPr>
-                    </a:p>
-                  </a:txBody>
-                  <a:tcPr marL="50800" marR="50800" marT="25400" marB="25400" anchor="ctr">
-                    <a:lnL w="3810" cap="flat" cmpd="sng" algn="ctr">
-                      <a:solidFill>
-                        <a:srgbClr val="CBD5E0"/>
-                      </a:solidFill>
-                      <a:prstDash val="solid"/>
-                      <a:round/>
-                      <a:headEnd type="none" w="med" len="med"/>
-                      <a:tailEnd type="none" w="med" len="med"/>
-                    </a:lnL>
-                    <a:lnR w="3810" cap="flat" cmpd="sng" algn="ctr">
-                      <a:solidFill>
-                        <a:srgbClr val="CBD5E0"/>
-                      </a:solidFill>
-                      <a:prstDash val="solid"/>
-                      <a:round/>
-                      <a:headEnd type="none" w="med" len="med"/>
-                      <a:tailEnd type="none" w="med" len="med"/>
-                    </a:lnR>
-                    <a:lnT w="3810" cap="flat" cmpd="sng" algn="ctr">
-                      <a:solidFill>
-                        <a:srgbClr val="CBD5E0"/>
-                      </a:solidFill>
-                      <a:prstDash val="solid"/>
-                      <a:round/>
-                      <a:headEnd type="none" w="med" len="med"/>
-                      <a:tailEnd type="none" w="med" len="med"/>
-                    </a:lnT>
-                    <a:lnB w="3810" cap="flat" cmpd="sng" algn="ctr">
-                      <a:solidFill>
-                        <a:srgbClr val="CBD5E0"/>
-                      </a:solidFill>
-                      <a:prstDash val="solid"/>
-                      <a:round/>
-                      <a:headEnd type="none" w="med" len="med"/>
-                      <a:tailEnd type="none" w="med" len="med"/>
-                    </a:lnB>
-                    <a:solidFill>
-                      <a:srgbClr val="F7FAFC"/>
-                    </a:solidFill>
-                  </a:tcPr>
-                </a:tc>
-                <a:tc>
-                  <a:txBody>
-                    <a:bodyPr/>
-                    <a:lstStyle/>
-                    <a:p>
-                      <a:pPr indent="0" marL="0">
-                        <a:buNone/>
-                      </a:pPr>
-                      <a:r>
-                        <a:rPr lang="en-US" sz="1050" b="1" dirty="0">
-                          <a:solidFill>
-                            <a:srgbClr val="718096"/>
-                          </a:solidFill>
-                          <a:latin typeface="Pretendard" pitchFamily="34" charset="0"/>
-                          <a:ea typeface="Pretendard" pitchFamily="34" charset="-122"/>
-                          <a:cs typeface="Pretendard" pitchFamily="34" charset="-120"/>
-                        </a:rPr>
-                        <a:t>적합도</a:t>
-                      </a:r>
-                      <a:endParaRPr lang="en-US" sz="1050" dirty="0">
-                        <a:latin typeface="Pretendard" charset="0"/>
-                        <a:ea typeface="Pretendard" charset="0"/>
-                        <a:cs typeface="Pretendard" charset="0"/>
-                      </a:endParaRPr>
-                    </a:p>
-                  </a:txBody>
-                  <a:tcPr marL="50800" marR="50800" marT="25400" marB="25400" anchor="ctr">
-                    <a:lnL w="3810" cap="flat" cmpd="sng" algn="ctr">
-                      <a:solidFill>
-                        <a:srgbClr val="CBD5E0"/>
-                      </a:solidFill>
-                      <a:prstDash val="solid"/>
-                      <a:round/>
-                      <a:headEnd type="none" w="med" len="med"/>
-                      <a:tailEnd type="none" w="med" len="med"/>
-                    </a:lnL>
-                    <a:lnR w="3810" cap="flat" cmpd="sng" algn="ctr">
-                      <a:solidFill>
-                        <a:srgbClr val="CBD5E0"/>
-                      </a:solidFill>
-                      <a:prstDash val="solid"/>
-                      <a:round/>
-                      <a:headEnd type="none" w="med" len="med"/>
-                      <a:tailEnd type="none" w="med" len="med"/>
-                    </a:lnR>
-                    <a:lnT w="3810" cap="flat" cmpd="sng" algn="ctr">
-                      <a:solidFill>
-                        <a:srgbClr val="CBD5E0"/>
-                      </a:solidFill>
-                      <a:prstDash val="solid"/>
-                      <a:round/>
-                      <a:headEnd type="none" w="med" len="med"/>
-                      <a:tailEnd type="none" w="med" len="med"/>
-                    </a:lnT>
-                    <a:lnB w="3810" cap="flat" cmpd="sng" algn="ctr">
-                      <a:solidFill>
-                        <a:srgbClr val="CBD5E0"/>
-                      </a:solidFill>
-                      <a:prstDash val="solid"/>
-                      <a:round/>
-                      <a:headEnd type="none" w="med" len="med"/>
-                      <a:tailEnd type="none" w="med" len="med"/>
-                    </a:lnB>
-                    <a:solidFill>
-                      <a:srgbClr val="F7FAFC"/>
-                    </a:solidFill>
-                  </a:tcPr>
-                </a:tc>
-                <a:tc>
-                  <a:txBody>
-                    <a:bodyPr/>
-                    <a:lstStyle/>
-                    <a:p>
-                      <a:pPr indent="0" marL="0">
-                        <a:buNone/>
-                      </a:pPr>
-                      <a:r>
-                        <a:rPr lang="en-US" sz="1050" b="1" dirty="0">
-                          <a:solidFill>
-                            <a:srgbClr val="718096"/>
-                          </a:solidFill>
-                          <a:latin typeface="Pretendard" pitchFamily="34" charset="0"/>
-                          <a:ea typeface="Pretendard" pitchFamily="34" charset="-122"/>
-                          <a:cs typeface="Pretendard" pitchFamily="34" charset="-120"/>
-                        </a:rPr>
-                        <a:t>이유</a:t>
-                      </a:r>
-                      <a:endParaRPr lang="en-US" sz="1050" dirty="0">
-                        <a:latin typeface="Pretendard" charset="0"/>
-                        <a:ea typeface="Pretendard" charset="0"/>
-                        <a:cs typeface="Pretendard" charset="0"/>
-                      </a:endParaRPr>
-                    </a:p>
-                  </a:txBody>
-                  <a:tcPr marL="50800" marR="50800" marT="25400" marB="25400" anchor="ctr">
-                    <a:lnL w="3810" cap="flat" cmpd="sng" algn="ctr">
-                      <a:solidFill>
-                        <a:srgbClr val="CBD5E0"/>
-                      </a:solidFill>
-                      <a:prstDash val="solid"/>
-                      <a:round/>
-                      <a:headEnd type="none" w="med" len="med"/>
-                      <a:tailEnd type="none" w="med" len="med"/>
-                    </a:lnL>
-                    <a:lnR w="3810" cap="flat" cmpd="sng" algn="ctr">
-                      <a:solidFill>
-                        <a:srgbClr val="CBD5E0"/>
-                      </a:solidFill>
-                      <a:prstDash val="solid"/>
-                      <a:round/>
-                      <a:headEnd type="none" w="med" len="med"/>
-                      <a:tailEnd type="none" w="med" len="med"/>
-                    </a:lnR>
-                    <a:lnT w="3810" cap="flat" cmpd="sng" algn="ctr">
-                      <a:solidFill>
-                        <a:srgbClr val="CBD5E0"/>
-                      </a:solidFill>
-                      <a:prstDash val="solid"/>
-                      <a:round/>
-                      <a:headEnd type="none" w="med" len="med"/>
-                      <a:tailEnd type="none" w="med" len="med"/>
-                    </a:lnT>
-                    <a:lnB w="3810" cap="flat" cmpd="sng" algn="ctr">
-                      <a:solidFill>
-                        <a:srgbClr val="CBD5E0"/>
-                      </a:solidFill>
-                      <a:prstDash val="solid"/>
-                      <a:round/>
-                      <a:headEnd type="none" w="med" len="med"/>
-                      <a:tailEnd type="none" w="med" len="med"/>
-                    </a:lnB>
-                    <a:solidFill>
-                      <a:srgbClr val="F7FAFC"/>
-                    </a:solidFill>
-                  </a:tcPr>
-                </a:tc>
-              </a:tr>
-              <a:tr h="329184">
-                <a:tc>
-                  <a:txBody>
-                    <a:bodyPr/>
-                    <a:lstStyle/>
-                    <a:p>
-                      <a:pPr indent="0" marL="0">
-                        <a:buNone/>
-                      </a:pPr>
-                      <a:r>
-                        <a:rPr lang="en-US" sz="1050" b="1" dirty="0">
-                          <a:solidFill>
-                            <a:srgbClr val="10161F"/>
-                          </a:solidFill>
-                          <a:latin typeface="Pretendard" pitchFamily="34" charset="0"/>
-                          <a:ea typeface="Pretendard" pitchFamily="34" charset="-122"/>
-                          <a:cs typeface="Pretendard" pitchFamily="34" charset="-120"/>
-                        </a:rPr>
-                        <a:t>(임대수익)</a:t>
-                      </a:r>
-                      <a:endParaRPr lang="en-US" sz="1050" dirty="0">
-                        <a:latin typeface="Pretendard" charset="0"/>
-                        <a:ea typeface="Pretendard" charset="0"/>
-                        <a:cs typeface="Pretendard" charset="0"/>
-                      </a:endParaRPr>
-                    </a:p>
-                  </a:txBody>
-                  <a:tcPr marL="50800" marR="50800" marT="25400" marB="25400" anchor="ctr">
-                    <a:lnL w="3810" cap="flat" cmpd="sng" algn="ctr">
-                      <a:solidFill>
-                        <a:srgbClr val="CBD5E0"/>
-                      </a:solidFill>
-                      <a:prstDash val="solid"/>
-                      <a:round/>
-                      <a:headEnd type="none" w="med" len="med"/>
-                      <a:tailEnd type="none" w="med" len="med"/>
-                    </a:lnL>
-                    <a:lnR w="3810" cap="flat" cmpd="sng" algn="ctr">
-                      <a:solidFill>
-                        <a:srgbClr val="CBD5E0"/>
-                      </a:solidFill>
-                      <a:prstDash val="solid"/>
-                      <a:round/>
-                      <a:headEnd type="none" w="med" len="med"/>
-                      <a:tailEnd type="none" w="med" len="med"/>
-                    </a:lnR>
-                    <a:lnT w="3810" cap="flat" cmpd="sng" algn="ctr">
-                      <a:solidFill>
-                        <a:srgbClr val="CBD5E0"/>
-                      </a:solidFill>
-                      <a:prstDash val="solid"/>
-                      <a:round/>
-                      <a:headEnd type="none" w="med" len="med"/>
-                      <a:tailEnd type="none" w="med" len="med"/>
-                    </a:lnT>
-                    <a:lnB w="3810" cap="flat" cmpd="sng" algn="ctr">
-                      <a:solidFill>
-                        <a:srgbClr val="CBD5E0"/>
-                      </a:solidFill>
-                      <a:prstDash val="solid"/>
-                      <a:round/>
-                      <a:headEnd type="none" w="med" len="med"/>
-                      <a:tailEnd type="none" w="med" len="med"/>
-                    </a:lnB>
-                    <a:solidFill>
-                      <a:srgbClr val="FFFFFF"/>
-                    </a:solidFill>
-                  </a:tcPr>
-                </a:tc>
-                <a:tc>
-                  <a:txBody>
-                    <a:bodyPr/>
-                    <a:lstStyle/>
-                    <a:p>
-                      <a:pPr indent="0" marL="0">
-                        <a:buNone/>
-                      </a:pPr>
-                      <a:r>
-                        <a:rPr lang="en-US" sz="1050" dirty="0">
-                          <a:solidFill>
-                            <a:srgbClr val="10161F"/>
-                          </a:solidFill>
-                          <a:latin typeface="Pretendard" pitchFamily="34" charset="0"/>
-                          <a:ea typeface="Pretendard" pitchFamily="34" charset="-122"/>
-                          <a:cs typeface="Pretendard" pitchFamily="34" charset="-120"/>
-                        </a:rPr>
-                        <a:t>★★★★★</a:t>
-                      </a:r>
-                      <a:endParaRPr lang="en-US" sz="1050" dirty="0">
-                        <a:latin typeface="Pretendard" charset="0"/>
-                        <a:ea typeface="Pretendard" charset="0"/>
-                        <a:cs typeface="Pretendard" charset="0"/>
-                      </a:endParaRPr>
-                    </a:p>
-                  </a:txBody>
-                  <a:tcPr marL="50800" marR="50800" marT="25400" marB="25400" anchor="ctr">
-                    <a:lnL w="3810" cap="flat" cmpd="sng" algn="ctr">
-                      <a:solidFill>
-                        <a:srgbClr val="CBD5E0"/>
-                      </a:solidFill>
-                      <a:prstDash val="solid"/>
-                      <a:round/>
-                      <a:headEnd type="none" w="med" len="med"/>
-                      <a:tailEnd type="none" w="med" len="med"/>
-                    </a:lnL>
-                    <a:lnR w="3810" cap="flat" cmpd="sng" algn="ctr">
-                      <a:solidFill>
-                        <a:srgbClr val="CBD5E0"/>
-                      </a:solidFill>
-                      <a:prstDash val="solid"/>
-                      <a:round/>
-                      <a:headEnd type="none" w="med" len="med"/>
-                      <a:tailEnd type="none" w="med" len="med"/>
-                    </a:lnR>
-                    <a:lnT w="3810" cap="flat" cmpd="sng" algn="ctr">
-                      <a:solidFill>
-                        <a:srgbClr val="CBD5E0"/>
-                      </a:solidFill>
-                      <a:prstDash val="solid"/>
-                      <a:round/>
-                      <a:headEnd type="none" w="med" len="med"/>
-                      <a:tailEnd type="none" w="med" len="med"/>
-                    </a:lnT>
-                    <a:lnB w="3810" cap="flat" cmpd="sng" algn="ctr">
-                      <a:solidFill>
-                        <a:srgbClr val="CBD5E0"/>
-                      </a:solidFill>
-                      <a:prstDash val="solid"/>
-                      <a:round/>
-                      <a:headEnd type="none" w="med" len="med"/>
-                      <a:tailEnd type="none" w="med" len="med"/>
-                    </a:lnB>
-                    <a:solidFill>
-                      <a:srgbClr val="FFFFFF"/>
-                    </a:solidFill>
-                  </a:tcPr>
-                </a:tc>
-                <a:tc>
-                  <a:txBody>
-                    <a:bodyPr/>
-                    <a:lstStyle/>
-                    <a:p>
-                      <a:pPr indent="0" marL="0">
-                        <a:buNone/>
-                      </a:pPr>
-                      <a:r>
-                        <a:rPr lang="en-US" sz="1050" dirty="0">
-                          <a:solidFill>
-                            <a:srgbClr val="10161F"/>
-                          </a:solidFill>
-                          <a:latin typeface="Pretendard" pitchFamily="34" charset="0"/>
-                          <a:ea typeface="Pretendard" pitchFamily="34" charset="-122"/>
-                          <a:cs typeface="Pretendard" pitchFamily="34" charset="-120"/>
-                        </a:rPr>
-                        <a:t>소형 </a:t>
-                      </a:r>
-                      <a:pPr indent="0" marL="0">
-                        <a:buNone/>
-                      </a:pPr>
-                      <a:r>
-                        <a:rPr lang="en-US" sz="1050" dirty="0">
-                          <a:solidFill>
-                            <a:srgbClr val="10161F"/>
-                          </a:solidFill>
-                          <a:latin typeface="Pretendard" pitchFamily="34" charset="0"/>
-                          <a:ea typeface="Pretendard" pitchFamily="34" charset="-122"/>
-                          <a:cs typeface="Pretendard" pitchFamily="34" charset="-120"/>
-                        </a:rPr>
-                        <a:t>빌딩 </a:t>
-                      </a:r>
-                      <a:pPr indent="0" marL="0">
-                        <a:buNone/>
-                      </a:pPr>
-                      <a:r>
-                        <a:rPr lang="en-US" sz="1050" dirty="0">
-                          <a:solidFill>
-                            <a:srgbClr val="10161F"/>
-                          </a:solidFill>
-                          <a:latin typeface="Pretendard" pitchFamily="34" charset="0"/>
-                          <a:ea typeface="Pretendard" pitchFamily="34" charset="-122"/>
-                          <a:cs typeface="Pretendard" pitchFamily="34" charset="-120"/>
-                        </a:rPr>
-                        <a:t>안정 </a:t>
-                      </a:r>
-                      <a:pPr indent="0" marL="0">
-                        <a:buNone/>
-                      </a:pPr>
-                      <a:r>
-                        <a:rPr lang="en-US" sz="1050" dirty="0">
-                          <a:solidFill>
-                            <a:srgbClr val="10161F"/>
-                          </a:solidFill>
-                          <a:latin typeface="Pretendard" pitchFamily="34" charset="0"/>
-                          <a:ea typeface="Pretendard" pitchFamily="34" charset="-122"/>
-                          <a:cs typeface="Pretendard" pitchFamily="34" charset="-120"/>
-                        </a:rPr>
-                        <a:t>수익 </a:t>
-                      </a:r>
-                      <a:pPr indent="0" marL="0">
-                        <a:buNone/>
-                      </a:pPr>
-                      <a:r>
-                        <a:rPr lang="en-US" sz="1050" dirty="0">
-                          <a:solidFill>
-                            <a:srgbClr val="10161F"/>
-                          </a:solidFill>
-                          <a:latin typeface="Pretendard" pitchFamily="34" charset="0"/>
-                          <a:ea typeface="Pretendard" pitchFamily="34" charset="-122"/>
-                          <a:cs typeface="Pretendard" pitchFamily="34" charset="-120"/>
-                        </a:rPr>
-                        <a:t>최적</a:t>
-                      </a:r>
-                      <a:endParaRPr lang="en-US" sz="1050" dirty="0">
-                        <a:latin typeface="Pretendard" charset="0"/>
-                        <a:ea typeface="Pretendard" charset="0"/>
-                        <a:cs typeface="Pretendard" charset="0"/>
-                      </a:endParaRPr>
-                    </a:p>
-                  </a:txBody>
-                  <a:tcPr marL="50800" marR="50800" marT="25400" marB="25400" anchor="ctr">
-                    <a:lnL w="3810" cap="flat" cmpd="sng" algn="ctr">
-                      <a:solidFill>
-                        <a:srgbClr val="CBD5E0"/>
-                      </a:solidFill>
-                      <a:prstDash val="solid"/>
-                      <a:round/>
-                      <a:headEnd type="none" w="med" len="med"/>
-                      <a:tailEnd type="none" w="med" len="med"/>
-                    </a:lnL>
-                    <a:lnR w="3810" cap="flat" cmpd="sng" algn="ctr">
-                      <a:solidFill>
-                        <a:srgbClr val="CBD5E0"/>
-                      </a:solidFill>
-                      <a:prstDash val="solid"/>
-                      <a:round/>
-                      <a:headEnd type="none" w="med" len="med"/>
-                      <a:tailEnd type="none" w="med" len="med"/>
-                    </a:lnR>
-                    <a:lnT w="3810" cap="flat" cmpd="sng" algn="ctr">
-                      <a:solidFill>
-                        <a:srgbClr val="CBD5E0"/>
-                      </a:solidFill>
-                      <a:prstDash val="solid"/>
-                      <a:round/>
-                      <a:headEnd type="none" w="med" len="med"/>
-                      <a:tailEnd type="none" w="med" len="med"/>
-                    </a:lnT>
-                    <a:lnB w="3810" cap="flat" cmpd="sng" algn="ctr">
-                      <a:solidFill>
-                        <a:srgbClr val="CBD5E0"/>
-                      </a:solidFill>
-                      <a:prstDash val="solid"/>
-                      <a:round/>
-                      <a:headEnd type="none" w="med" len="med"/>
-                      <a:tailEnd type="none" w="med" len="med"/>
-                    </a:lnB>
-                    <a:solidFill>
-                      <a:srgbClr val="FFFFFF"/>
-                    </a:solidFill>
-                  </a:tcPr>
-                </a:tc>
-              </a:tr>
-              <a:tr h="329184">
-                <a:tc>
-                  <a:txBody>
-                    <a:bodyPr/>
-                    <a:lstStyle/>
-                    <a:p>
-                      <a:pPr indent="0" marL="0">
-                        <a:buNone/>
-                      </a:pPr>
-                      <a:r>
-                        <a:rPr lang="en-US" sz="1050" b="1" dirty="0">
-                          <a:solidFill>
-                            <a:srgbClr val="10161F"/>
-                          </a:solidFill>
-                          <a:latin typeface="Pretendard" pitchFamily="34" charset="0"/>
-                          <a:ea typeface="Pretendard" pitchFamily="34" charset="-122"/>
-                          <a:cs typeface="Pretendard" pitchFamily="34" charset="-120"/>
-                        </a:rPr>
-                        <a:t>법인 </a:t>
-                      </a:r>
-                      <a:pPr indent="0" marL="0">
-                        <a:buNone/>
-                      </a:pPr>
-                      <a:r>
-                        <a:rPr lang="en-US" sz="1050" b="1" dirty="0">
-                          <a:solidFill>
-                            <a:srgbClr val="10161F"/>
-                          </a:solidFill>
-                          <a:latin typeface="Pretendard" pitchFamily="34" charset="0"/>
-                          <a:ea typeface="Pretendard" pitchFamily="34" charset="-122"/>
-                          <a:cs typeface="Pretendard" pitchFamily="34" charset="-120"/>
-                        </a:rPr>
-                        <a:t>사옥 </a:t>
-                      </a:r>
-                      <a:pPr indent="0" marL="0">
-                        <a:buNone/>
-                      </a:pPr>
-                      <a:r>
-                        <a:rPr lang="en-US" sz="1050" b="1" dirty="0">
-                          <a:solidFill>
-                            <a:srgbClr val="10161F"/>
-                          </a:solidFill>
-                          <a:latin typeface="Pretendard" pitchFamily="34" charset="0"/>
-                          <a:ea typeface="Pretendard" pitchFamily="34" charset="-122"/>
-                          <a:cs typeface="Pretendard" pitchFamily="34" charset="-120"/>
-                        </a:rPr>
-                        <a:t>이전</a:t>
-                      </a:r>
-                      <a:endParaRPr lang="en-US" sz="1050" dirty="0">
-                        <a:latin typeface="Pretendard" charset="0"/>
-                        <a:ea typeface="Pretendard" charset="0"/>
-                        <a:cs typeface="Pretendard" charset="0"/>
-                      </a:endParaRPr>
-                    </a:p>
-                  </a:txBody>
-                  <a:tcPr marL="50800" marR="50800" marT="25400" marB="25400" anchor="ctr">
-                    <a:lnL w="3810" cap="flat" cmpd="sng" algn="ctr">
-                      <a:solidFill>
-                        <a:srgbClr val="CBD5E0"/>
-                      </a:solidFill>
-                      <a:prstDash val="solid"/>
-                      <a:round/>
-                      <a:headEnd type="none" w="med" len="med"/>
-                      <a:tailEnd type="none" w="med" len="med"/>
-                    </a:lnL>
-                    <a:lnR w="3810" cap="flat" cmpd="sng" algn="ctr">
-                      <a:solidFill>
-                        <a:srgbClr val="CBD5E0"/>
-                      </a:solidFill>
-                      <a:prstDash val="solid"/>
-                      <a:round/>
-                      <a:headEnd type="none" w="med" len="med"/>
-                      <a:tailEnd type="none" w="med" len="med"/>
-                    </a:lnR>
-                    <a:lnT w="3810" cap="flat" cmpd="sng" algn="ctr">
-                      <a:solidFill>
-                        <a:srgbClr val="CBD5E0"/>
-                      </a:solidFill>
-                      <a:prstDash val="solid"/>
-                      <a:round/>
-                      <a:headEnd type="none" w="med" len="med"/>
-                      <a:tailEnd type="none" w="med" len="med"/>
-                    </a:lnT>
-                    <a:lnB w="3810" cap="flat" cmpd="sng" algn="ctr">
-                      <a:solidFill>
-                        <a:srgbClr val="CBD5E0"/>
-                      </a:solidFill>
-                      <a:prstDash val="solid"/>
-                      <a:round/>
-                      <a:headEnd type="none" w="med" len="med"/>
-                      <a:tailEnd type="none" w="med" len="med"/>
-                    </a:lnB>
-                    <a:solidFill>
-                      <a:srgbClr val="F7FAFC"/>
-                    </a:solidFill>
-                  </a:tcPr>
-                </a:tc>
-                <a:tc>
-                  <a:txBody>
-                    <a:bodyPr/>
-                    <a:lstStyle/>
-                    <a:p>
-                      <a:pPr indent="0" marL="0">
-                        <a:buNone/>
-                      </a:pPr>
-                      <a:r>
-                        <a:rPr lang="en-US" sz="1050" dirty="0">
-                          <a:solidFill>
-                            <a:srgbClr val="10161F"/>
-                          </a:solidFill>
-                          <a:latin typeface="Pretendard" pitchFamily="34" charset="0"/>
-                          <a:ea typeface="Pretendard" pitchFamily="34" charset="-122"/>
-                          <a:cs typeface="Pretendard" pitchFamily="34" charset="-120"/>
-                        </a:rPr>
-                        <a:t>★★★★</a:t>
-                      </a:r>
-                      <a:endParaRPr lang="en-US" sz="1050" dirty="0">
-                        <a:latin typeface="Pretendard" charset="0"/>
-                        <a:ea typeface="Pretendard" charset="0"/>
-                        <a:cs typeface="Pretendard" charset="0"/>
-                      </a:endParaRPr>
-                    </a:p>
-                  </a:txBody>
-                  <a:tcPr marL="50800" marR="50800" marT="25400" marB="25400" anchor="ctr">
-                    <a:lnL w="3810" cap="flat" cmpd="sng" algn="ctr">
-                      <a:solidFill>
-                        <a:srgbClr val="CBD5E0"/>
-                      </a:solidFill>
-                      <a:prstDash val="solid"/>
-                      <a:round/>
-                      <a:headEnd type="none" w="med" len="med"/>
-                      <a:tailEnd type="none" w="med" len="med"/>
-                    </a:lnL>
-                    <a:lnR w="3810" cap="flat" cmpd="sng" algn="ctr">
-                      <a:solidFill>
-                        <a:srgbClr val="CBD5E0"/>
-                      </a:solidFill>
-                      <a:prstDash val="solid"/>
-                      <a:round/>
-                      <a:headEnd type="none" w="med" len="med"/>
-                      <a:tailEnd type="none" w="med" len="med"/>
-                    </a:lnR>
-                    <a:lnT w="3810" cap="flat" cmpd="sng" algn="ctr">
-                      <a:solidFill>
-                        <a:srgbClr val="CBD5E0"/>
-                      </a:solidFill>
-                      <a:prstDash val="solid"/>
-                      <a:round/>
-                      <a:headEnd type="none" w="med" len="med"/>
-                      <a:tailEnd type="none" w="med" len="med"/>
-                    </a:lnT>
-                    <a:lnB w="3810" cap="flat" cmpd="sng" algn="ctr">
-                      <a:solidFill>
-                        <a:srgbClr val="CBD5E0"/>
-                      </a:solidFill>
-                      <a:prstDash val="solid"/>
-                      <a:round/>
-                      <a:headEnd type="none" w="med" len="med"/>
-                      <a:tailEnd type="none" w="med" len="med"/>
-                    </a:lnB>
-                    <a:solidFill>
-                      <a:srgbClr val="F7FAFC"/>
-                    </a:solidFill>
-                  </a:tcPr>
-                </a:tc>
-                <a:tc>
-                  <a:txBody>
-                    <a:bodyPr/>
-                    <a:lstStyle/>
-                    <a:p>
-                      <a:pPr indent="0" marL="0">
-                        <a:buNone/>
-                      </a:pPr>
-                      <a:r>
-                        <a:rPr lang="en-US" sz="1050" dirty="0">
-                          <a:solidFill>
-                            <a:srgbClr val="10161F"/>
-                          </a:solidFill>
-                          <a:latin typeface="Pretendard" pitchFamily="34" charset="0"/>
-                          <a:ea typeface="Pretendard" pitchFamily="34" charset="-122"/>
-                          <a:cs typeface="Pretendard" pitchFamily="34" charset="-120"/>
-                        </a:rPr>
-                        <a:t>한남권역 </a:t>
-                      </a:r>
-                      <a:pPr indent="0" marL="0">
-                        <a:buNone/>
-                      </a:pPr>
-                      <a:r>
-                        <a:rPr lang="en-US" sz="1050" dirty="0">
-                          <a:solidFill>
-                            <a:srgbClr val="10161F"/>
-                          </a:solidFill>
-                          <a:latin typeface="Pretendard" pitchFamily="34" charset="0"/>
-                          <a:ea typeface="Pretendard" pitchFamily="34" charset="-122"/>
-                          <a:cs typeface="Pretendard" pitchFamily="34" charset="-120"/>
-                        </a:rPr>
-                        <a:t>직주근접</a:t>
-                      </a:r>
-                      <a:endParaRPr lang="en-US" sz="1050" dirty="0">
-                        <a:latin typeface="Pretendard" charset="0"/>
-                        <a:ea typeface="Pretendard" charset="0"/>
-                        <a:cs typeface="Pretendard" charset="0"/>
-                      </a:endParaRPr>
-                    </a:p>
-                  </a:txBody>
-                  <a:tcPr marL="50800" marR="50800" marT="25400" marB="25400" anchor="ctr">
-                    <a:lnL w="3810" cap="flat" cmpd="sng" algn="ctr">
-                      <a:solidFill>
-                        <a:srgbClr val="CBD5E0"/>
-                      </a:solidFill>
-                      <a:prstDash val="solid"/>
-                      <a:round/>
-                      <a:headEnd type="none" w="med" len="med"/>
-                      <a:tailEnd type="none" w="med" len="med"/>
-                    </a:lnL>
-                    <a:lnR w="3810" cap="flat" cmpd="sng" algn="ctr">
-                      <a:solidFill>
-                        <a:srgbClr val="CBD5E0"/>
-                      </a:solidFill>
-                      <a:prstDash val="solid"/>
-                      <a:round/>
-                      <a:headEnd type="none" w="med" len="med"/>
-                      <a:tailEnd type="none" w="med" len="med"/>
-                    </a:lnR>
-                    <a:lnT w="3810" cap="flat" cmpd="sng" algn="ctr">
-                      <a:solidFill>
-                        <a:srgbClr val="CBD5E0"/>
-                      </a:solidFill>
-                      <a:prstDash val="solid"/>
-                      <a:round/>
-                      <a:headEnd type="none" w="med" len="med"/>
-                      <a:tailEnd type="none" w="med" len="med"/>
-                    </a:lnT>
-                    <a:lnB w="3810" cap="flat" cmpd="sng" algn="ctr">
-                      <a:solidFill>
-                        <a:srgbClr val="CBD5E0"/>
-                      </a:solidFill>
-                      <a:prstDash val="solid"/>
-                      <a:round/>
-                      <a:headEnd type="none" w="med" len="med"/>
-                      <a:tailEnd type="none" w="med" len="med"/>
-                    </a:lnB>
-                    <a:solidFill>
-                      <a:srgbClr val="F7FAFC"/>
-                    </a:solidFill>
-                  </a:tcPr>
-                </a:tc>
-              </a:tr>
-              <a:tr h="329184">
-                <a:tc>
-                  <a:txBody>
-                    <a:bodyPr/>
-                    <a:lstStyle/>
-                    <a:p>
-                      <a:pPr indent="0" marL="0">
-                        <a:buNone/>
-                      </a:pPr>
-                      <a:r>
-                        <a:rPr lang="en-US" sz="1050" b="1" dirty="0">
-                          <a:solidFill>
-                            <a:srgbClr val="10161F"/>
-                          </a:solidFill>
-                          <a:latin typeface="Pretendard" pitchFamily="34" charset="0"/>
-                          <a:ea typeface="Pretendard" pitchFamily="34" charset="-122"/>
-                          <a:cs typeface="Pretendard" pitchFamily="34" charset="-120"/>
-                        </a:rPr>
-                        <a:t>소규모 </a:t>
-                      </a:r>
-                      <a:pPr indent="0" marL="0">
-                        <a:buNone/>
-                      </a:pPr>
-                      <a:r>
-                        <a:rPr lang="en-US" sz="1050" b="1" dirty="0">
-                          <a:solidFill>
-                            <a:srgbClr val="10161F"/>
-                          </a:solidFill>
-                          <a:latin typeface="Pretendard" pitchFamily="34" charset="0"/>
-                          <a:ea typeface="Pretendard" pitchFamily="34" charset="-122"/>
-                          <a:cs typeface="Pretendard" pitchFamily="34" charset="-120"/>
-                        </a:rPr>
-                        <a:t>개발업체</a:t>
-                      </a:r>
-                      <a:endParaRPr lang="en-US" sz="1050" dirty="0">
-                        <a:latin typeface="Pretendard" charset="0"/>
-                        <a:ea typeface="Pretendard" charset="0"/>
-                        <a:cs typeface="Pretendard" charset="0"/>
-                      </a:endParaRPr>
-                    </a:p>
-                  </a:txBody>
-                  <a:tcPr marL="50800" marR="50800" marT="25400" marB="25400" anchor="ctr">
-                    <a:lnL w="3810" cap="flat" cmpd="sng" algn="ctr">
-                      <a:solidFill>
-                        <a:srgbClr val="CBD5E0"/>
-                      </a:solidFill>
-                      <a:prstDash val="solid"/>
-                      <a:round/>
-                      <a:headEnd type="none" w="med" len="med"/>
-                      <a:tailEnd type="none" w="med" len="med"/>
-                    </a:lnL>
-                    <a:lnR w="3810" cap="flat" cmpd="sng" algn="ctr">
-                      <a:solidFill>
-                        <a:srgbClr val="CBD5E0"/>
-                      </a:solidFill>
-                      <a:prstDash val="solid"/>
-                      <a:round/>
-                      <a:headEnd type="none" w="med" len="med"/>
-                      <a:tailEnd type="none" w="med" len="med"/>
-                    </a:lnR>
-                    <a:lnT w="3810" cap="flat" cmpd="sng" algn="ctr">
-                      <a:solidFill>
-                        <a:srgbClr val="CBD5E0"/>
-                      </a:solidFill>
-                      <a:prstDash val="solid"/>
-                      <a:round/>
-                      <a:headEnd type="none" w="med" len="med"/>
-                      <a:tailEnd type="none" w="med" len="med"/>
-                    </a:lnT>
-                    <a:lnB w="3810" cap="flat" cmpd="sng" algn="ctr">
-                      <a:solidFill>
-                        <a:srgbClr val="CBD5E0"/>
-                      </a:solidFill>
-                      <a:prstDash val="solid"/>
-                      <a:round/>
-                      <a:headEnd type="none" w="med" len="med"/>
-                      <a:tailEnd type="none" w="med" len="med"/>
-                    </a:lnB>
-                    <a:solidFill>
-                      <a:srgbClr val="FFFFFF"/>
-                    </a:solidFill>
-                  </a:tcPr>
-                </a:tc>
-                <a:tc>
-                  <a:txBody>
-                    <a:bodyPr/>
-                    <a:lstStyle/>
-                    <a:p>
-                      <a:pPr indent="0" marL="0">
-                        <a:buNone/>
-                      </a:pPr>
-                      <a:r>
-                        <a:rPr lang="en-US" sz="1050" dirty="0">
-                          <a:solidFill>
-                            <a:srgbClr val="10161F"/>
-                          </a:solidFill>
-                          <a:latin typeface="Pretendard" pitchFamily="34" charset="0"/>
-                          <a:ea typeface="Pretendard" pitchFamily="34" charset="-122"/>
-                          <a:cs typeface="Pretendard" pitchFamily="34" charset="-120"/>
-                        </a:rPr>
-                        <a:t>★★★</a:t>
-                      </a:r>
-                      <a:endParaRPr lang="en-US" sz="1050" dirty="0">
-                        <a:latin typeface="Pretendard" charset="0"/>
-                        <a:ea typeface="Pretendard" charset="0"/>
-                        <a:cs typeface="Pretendard" charset="0"/>
-                      </a:endParaRPr>
-                    </a:p>
-                  </a:txBody>
-                  <a:tcPr marL="50800" marR="50800" marT="25400" marB="25400" anchor="ctr">
-                    <a:lnL w="3810" cap="flat" cmpd="sng" algn="ctr">
-                      <a:solidFill>
-                        <a:srgbClr val="CBD5E0"/>
-                      </a:solidFill>
-                      <a:prstDash val="solid"/>
-                      <a:round/>
-                      <a:headEnd type="none" w="med" len="med"/>
-                      <a:tailEnd type="none" w="med" len="med"/>
-                    </a:lnL>
-                    <a:lnR w="3810" cap="flat" cmpd="sng" algn="ctr">
-                      <a:solidFill>
-                        <a:srgbClr val="CBD5E0"/>
-                      </a:solidFill>
-                      <a:prstDash val="solid"/>
-                      <a:round/>
-                      <a:headEnd type="none" w="med" len="med"/>
-                      <a:tailEnd type="none" w="med" len="med"/>
-                    </a:lnR>
-                    <a:lnT w="3810" cap="flat" cmpd="sng" algn="ctr">
-                      <a:solidFill>
-                        <a:srgbClr val="CBD5E0"/>
-                      </a:solidFill>
-                      <a:prstDash val="solid"/>
-                      <a:round/>
-                      <a:headEnd type="none" w="med" len="med"/>
-                      <a:tailEnd type="none" w="med" len="med"/>
-                    </a:lnT>
-                    <a:lnB w="3810" cap="flat" cmpd="sng" algn="ctr">
-                      <a:solidFill>
-                        <a:srgbClr val="CBD5E0"/>
-                      </a:solidFill>
-                      <a:prstDash val="solid"/>
-                      <a:round/>
-                      <a:headEnd type="none" w="med" len="med"/>
-                      <a:tailEnd type="none" w="med" len="med"/>
-                    </a:lnB>
-                    <a:solidFill>
-                      <a:srgbClr val="FFFFFF"/>
-                    </a:solidFill>
-                  </a:tcPr>
-                </a:tc>
-                <a:tc>
-                  <a:txBody>
-                    <a:bodyPr/>
-                    <a:lstStyle/>
-                    <a:p>
-                      <a:pPr indent="0" marL="0">
-                        <a:buNone/>
-                      </a:pPr>
-                      <a:r>
-                        <a:rPr lang="en-US" sz="1050" dirty="0">
-                          <a:solidFill>
-                            <a:srgbClr val="10161F"/>
-                          </a:solidFill>
-                          <a:latin typeface="Pretendard" pitchFamily="34" charset="0"/>
-                          <a:ea typeface="Pretendard" pitchFamily="34" charset="-122"/>
-                          <a:cs typeface="Pretendard" pitchFamily="34" charset="-120"/>
-                        </a:rPr>
-                        <a:t>밸류업 </a:t>
-                      </a:r>
-                      <a:pPr indent="0" marL="0">
-                        <a:buNone/>
-                      </a:pPr>
-                      <a:r>
-                        <a:rPr lang="en-US" sz="1050" dirty="0">
-                          <a:solidFill>
-                            <a:srgbClr val="10161F"/>
-                          </a:solidFill>
-                          <a:latin typeface="Pretendard" pitchFamily="34" charset="0"/>
-                          <a:ea typeface="Pretendard" pitchFamily="34" charset="-122"/>
-                          <a:cs typeface="Pretendard" pitchFamily="34" charset="-120"/>
-                        </a:rPr>
-                        <a:t>후 </a:t>
-                      </a:r>
-                      <a:pPr indent="0" marL="0">
-                        <a:buNone/>
-                      </a:pPr>
-                      <a:r>
-                        <a:rPr lang="en-US" sz="1050" dirty="0">
-                          <a:solidFill>
-                            <a:srgbClr val="10161F"/>
-                          </a:solidFill>
-                          <a:latin typeface="Pretendard" pitchFamily="34" charset="0"/>
-                          <a:ea typeface="Pretendard" pitchFamily="34" charset="-122"/>
-                          <a:cs typeface="Pretendard" pitchFamily="34" charset="-120"/>
-                        </a:rPr>
-                        <a:t>매각 </a:t>
-                      </a:r>
-                      <a:pPr indent="0" marL="0">
-                        <a:buNone/>
-                      </a:pPr>
-                      <a:r>
-                        <a:rPr lang="en-US" sz="1050" dirty="0">
-                          <a:solidFill>
-                            <a:srgbClr val="10161F"/>
-                          </a:solidFill>
-                          <a:latin typeface="Pretendard" pitchFamily="34" charset="0"/>
-                          <a:ea typeface="Pretendard" pitchFamily="34" charset="-122"/>
-                          <a:cs typeface="Pretendard" pitchFamily="34" charset="-120"/>
-                        </a:rPr>
-                        <a:t>시나리오</a:t>
-                      </a:r>
-                      <a:endParaRPr lang="en-US" sz="1050" dirty="0">
-                        <a:latin typeface="Pretendard" charset="0"/>
-                        <a:ea typeface="Pretendard" charset="0"/>
-                        <a:cs typeface="Pretendard" charset="0"/>
-                      </a:endParaRPr>
-                    </a:p>
-                  </a:txBody>
-                  <a:tcPr marL="50800" marR="50800" marT="25400" marB="25400" anchor="ctr">
-                    <a:lnL w="3810" cap="flat" cmpd="sng" algn="ctr">
-                      <a:solidFill>
-                        <a:srgbClr val="CBD5E0"/>
-                      </a:solidFill>
-                      <a:prstDash val="solid"/>
-                      <a:round/>
-                      <a:headEnd type="none" w="med" len="med"/>
-                      <a:tailEnd type="none" w="med" len="med"/>
-                    </a:lnL>
-                    <a:lnR w="3810" cap="flat" cmpd="sng" algn="ctr">
-                      <a:solidFill>
-                        <a:srgbClr val="CBD5E0"/>
-                      </a:solidFill>
-                      <a:prstDash val="solid"/>
-                      <a:round/>
-                      <a:headEnd type="none" w="med" len="med"/>
-                      <a:tailEnd type="none" w="med" len="med"/>
-                    </a:lnR>
-                    <a:lnT w="3810" cap="flat" cmpd="sng" algn="ctr">
-                      <a:solidFill>
-                        <a:srgbClr val="CBD5E0"/>
-                      </a:solidFill>
-                      <a:prstDash val="solid"/>
-                      <a:round/>
-                      <a:headEnd type="none" w="med" len="med"/>
-                      <a:tailEnd type="none" w="med" len="med"/>
-                    </a:lnT>
-                    <a:lnB w="3810" cap="flat" cmpd="sng" algn="ctr">
-                      <a:solidFill>
-                        <a:srgbClr val="CBD5E0"/>
-                      </a:solidFill>
-                      <a:prstDash val="solid"/>
-                      <a:round/>
-                      <a:headEnd type="none" w="med" len="med"/>
-                      <a:tailEnd type="none" w="med" len="med"/>
-                    </a:lnB>
-                    <a:solidFill>
-                      <a:srgbClr val="FFFFFF"/>
-                    </a:solidFill>
-                  </a:tcPr>
-                </a:tc>
-              </a:tr>
-            </a:tbl>
-          </a:graphicData>
-        </a:graphic>
-      </p:graphicFrame>
-      <p:sp>
-        <p:nvSpPr>
-          <p:cNvPr id="29" name="Shape 26"/>
-          <p:cNvSpPr/>
-          <p:nvPr/>
-        </p:nvSpPr>
-        <p:spPr>
-          <a:xfrm>
-            <a:off x="566928" y="5678424"/>
+          <p:cNvPr id="6" name="Shape 4"/>
+          <p:cNvSpPr/>
+          <p:nvPr/>
+        </p:nvSpPr>
+        <p:spPr>
+          <a:xfrm>
+            <a:off x="566928" y="4983480"/>
             <a:ext cx="11057839" cy="804672"/>
           </a:xfrm>
           <a:prstGeom prst="roundRect">
@@ -8949,13 +8187,13 @@
       </p:sp>
       <p:sp>
         <p:nvSpPr>
-          <p:cNvPr id="30" name="Text 27"/>
-          <p:cNvSpPr/>
-          <p:nvPr/>
-        </p:nvSpPr>
-        <p:spPr>
-          <a:xfrm>
-            <a:off x="749808" y="5788152"/>
+          <p:cNvPr id="7" name="Text 5"/>
+          <p:cNvSpPr/>
+          <p:nvPr/>
+        </p:nvSpPr>
+        <p:spPr>
+          <a:xfrm>
+            <a:off x="749808" y="5093208"/>
             <a:ext cx="1691640" cy="256032"/>
           </a:xfrm>
           <a:prstGeom prst="rect">
@@ -8988,13 +8226,13 @@
       </p:sp>
       <p:sp>
         <p:nvSpPr>
-          <p:cNvPr id="31" name="Text 28"/>
-          <p:cNvSpPr/>
-          <p:nvPr/>
-        </p:nvSpPr>
-        <p:spPr>
-          <a:xfrm>
-            <a:off x="2487168" y="5751576"/>
+          <p:cNvPr id="8" name="Text 6"/>
+          <p:cNvSpPr/>
+          <p:nvPr/>
+        </p:nvSpPr>
+        <p:spPr>
+          <a:xfrm>
+            <a:off x="2487168" y="5056632"/>
             <a:ext cx="8954719" cy="658368"/>
           </a:xfrm>
           <a:prstGeom prst="rect">
@@ -9022,7 +8260,7 @@
                 <a:ea typeface="Pretendard" pitchFamily="34" charset="-122"/>
                 <a:cs typeface="Pretendard" pitchFamily="34" charset="-120"/>
               </a:rPr>
-              <a:t>[참고] 종합 가치 제안: 한남권역 핵심 상권의 희소성 높은 우량 자산으로, 안정적인 임대 수익과 향후 공법상 밸류업 및 권역 지가 상승에 따른 자본 이득(Capital Gain)을 동시에 실현할 수 있는 전략적 매물입니다.</a:t>
+              <a:t>{"ok":true,"mocked":true,"extractedFields":{"area_signal":"역삼","asset_type":"오피스빌딩","price_band":"300억","size_signal":"3000평(약 9917.4㎡)"},"extractedFacts":{"region":"역삼","exactAddressCandidate":"역삼동 742-1","assetType":"오피스빌딩","priceText":"300억","sizeText":"3000평(약 9917.4㎡)","currentUse":"오피스","currentUseSignal":"근린생활시설","leaseSignal":"임대중","vacancySignal":"공실없음","tenantNames":["쿠팡","네이버"],"unitRentTexts":["301호: 1500만"],"sellerMotivationText":"자산 효율화","brokerNotes":["초역세권 매물"]},"detectedSensitiveFields":["exact_address","tenant_name"],"ambiguousFields":[],"warnings":[],"areaSignal":"역삼","assetType":"오피스빌딩","priceBand":"300억","sizeSignal":"3000평(약 9917.4㎡)","dealType":"매각","buildingName":"역삼 센트럴타워","exactAddress":"역삼동 742-1","totalFloorArea":9917.3,"buildYear":2015,"currentUseSignal":"근린생활시설","vacancySignal":"공실 없음","fitSummary":"초역세권 근생 빌딩으로 시행/사옥 매입에 최적화","cautionSummary":"주요 임차 업종 만기 조율 필요","hiddenFields":["exact_address","seller_motivation"],"confidence":{"areaSignal":"confirmed","assetType":"confirmed","priceBand":"ai_hypothesis","fitSummary":"ai_hypothesis"},"missingData":["sizeSignal"],"boundaryNote":"본 자료는 실거래 통계 기반 참고치입니다.","buyerType":"법인 사옥형","budgetRange":{"min":50,"max":80,"display":"50억~80억"},"preferredRegions":["강남","성수"],"assetTypes":["꼬마빌딩","사옥용"],"purchasePurpose":"사옥용 매입","mustHave":["초역세권","주차"],"niceToHave":["테라스","루프탑"],"riskTolerance":"medium","financingNote":"자본금 50% 준비","missingQuestions":["구체적인 입주 시기가 언제인가요?","선호하는 수익률이 있나요?"],"privacyNotes":["연락처 비공개"],"fitReasons":["매수자 예산(50-80억)에 부합하는 매물입니다.","요청하신 성수/강남 권역에 해당합니다."],"cautionReasons":["요청한 용도와 달리 명도 협의가 다소 필요합니다."],"recommendedNextAction":"현장 답사 제안","kakaoMessage":"안녕하세요! 요청하신 조건에 부합하는 추천 매물이 있어 안내해 드립니다. 확인해보시고 피드백 부탁드립니다.","title":"강남 역삼역 초역세권 오피스 사옥용 빌딩 매각","shortSummary":"역삼역 도보 5분 거리의 준신축급 대형 오피스빌딩입니다.","dealPoints":["초역세권","사옥 최적"],"cautionPoints":["명도 조율 필요"],"hiddenInfoNotice":["보증금 및 지번은 인가 후 확인 가능"],"gateMessage":"G1 등급 등록이 필요합니다.","kakaoText":"강남 역삼역 오피스 빌딩 매각 안내입니다.","exactUnitCandidate":"101호","floor":"1층","areaSqmText":"150㎡","spaceType":"office","depositText":"5000만","monthlyRentText":"400만","maintenanceFeeText":"50만","availableFromText":"즉시입주","leaseTermMonthsText":"24","incentivesText":"렌트프리 2개월","restrictions":[],"landlordIdentity":"김성수","currentTenant":"스타트업","vacancyReason":"이전 확장","rentNegotiation":"협의 가능","region":"성수동","areaSqm":150,"deposit":5000,"monthlyRent":400,"maintenanceFee":50,"availableFrom":"즉시입주","leaseTermMonths":24,"incentives":{"rentFreeMonths":2,"interiorSupport":"일부 인테리어 지원","freeRentDetail":"렌트프리 2개월 지원"},"shortSummaryLease":"성수역 도보 5분 거리 1층 리테일 상가 매물입니다."}</a:t>
             </a:r>
             <a:endParaRPr lang="en-US" sz="1100" dirty="0"/>
           </a:p>
@@ -9030,7 +8268,7 @@
       </p:sp>
       <p:sp>
         <p:nvSpPr>
-          <p:cNvPr id="32" name="Text 29"/>
+          <p:cNvPr id="9" name="Text 7"/>
           <p:cNvSpPr/>
           <p:nvPr/>
         </p:nvSpPr>
@@ -9069,7 +8307,7 @@
       </p:sp>
       <p:sp>
         <p:nvSpPr>
-          <p:cNvPr id="33" name="Text 30"/>
+          <p:cNvPr id="10" name="Text 8"/>
           <p:cNvSpPr/>
           <p:nvPr/>
         </p:nvSpPr>
@@ -9284,11 +8522,11 @@
         <p:spPr>
           <a:xfrm>
             <a:off x="566928" y="1572768"/>
-            <a:ext cx="11057839" cy="3200400"/>
+            <a:ext cx="2490140" cy="3200400"/>
           </a:xfrm>
           <a:prstGeom prst="roundRect">
             <a:avLst>
-              <a:gd name="adj" fmla="val 1714"/>
+              <a:gd name="adj" fmla="val 2203"/>
             </a:avLst>
           </a:prstGeom>
           <a:solidFill>
@@ -9370,7 +8608,7 @@
         <p:spPr>
           <a:xfrm>
             <a:off x="786384" y="2304288"/>
-            <a:ext cx="10618927" cy="365760"/>
+            <a:ext cx="2051228" cy="365760"/>
           </a:xfrm>
           <a:prstGeom prst="rect">
             <a:avLst/>
@@ -9394,7 +8632,7 @@
                 <a:ea typeface="Pretendard" pitchFamily="34" charset="-122"/>
                 <a:cs typeface="Pretendard" pitchFamily="34" charset="-120"/>
               </a:rPr>
-              <a:t>{"ok"</a:t>
+              <a:t>초기 관심 표명 → 담당자 연락</a:t>
             </a:r>
             <a:endParaRPr lang="en-US" sz="1600" dirty="0"/>
           </a:p>
@@ -9409,7 +8647,7 @@
         <p:spPr>
           <a:xfrm>
             <a:off x="786384" y="2761488"/>
-            <a:ext cx="10618927" cy="1828800"/>
+            <a:ext cx="2051228" cy="1828800"/>
           </a:xfrm>
           <a:prstGeom prst="rect">
             <a:avLst/>
@@ -9424,8 +8662,147 @@
             <a:pPr indent="0" marL="0">
               <a:buNone/>
             </a:pPr>
-            <a:r>
-              <a:rPr lang="en-US" sz="1100" dirty="0">
+            <a:endParaRPr lang="en-US" sz="1100" dirty="0"/>
+          </a:p>
+        </p:txBody>
+      </p:sp>
+      <p:sp>
+        <p:nvSpPr>
+          <p:cNvPr id="11" name="Shape 9"/>
+          <p:cNvSpPr/>
+          <p:nvPr/>
+        </p:nvSpPr>
+        <p:spPr>
+          <a:xfrm>
+            <a:off x="3148508" y="3035808"/>
+            <a:ext cx="182880" cy="274320"/>
+          </a:xfrm>
+          <a:prstGeom prst="rightArrow">
+            <a:avLst/>
+          </a:prstGeom>
+          <a:solidFill>
+            <a:srgbClr val="CBD5E0"/>
+          </a:solidFill>
+          <a:ln w="6350">
+            <a:solidFill>
+              <a:srgbClr val="718096"/>
+            </a:solidFill>
+            <a:prstDash val="solid"/>
+          </a:ln>
+        </p:spPr>
+      </p:sp>
+      <p:sp>
+        <p:nvSpPr>
+          <p:cNvPr id="12" name="Shape 10"/>
+          <p:cNvSpPr/>
+          <p:nvPr/>
+        </p:nvSpPr>
+        <p:spPr>
+          <a:xfrm>
+            <a:off x="3422828" y="1572768"/>
+            <a:ext cx="2490140" cy="3200400"/>
+          </a:xfrm>
+          <a:prstGeom prst="roundRect">
+            <a:avLst>
+              <a:gd name="adj" fmla="val 2203"/>
+            </a:avLst>
+          </a:prstGeom>
+          <a:solidFill>
+            <a:srgbClr val="F7FAFC"/>
+          </a:solidFill>
+          <a:ln w="6350">
+            <a:solidFill>
+              <a:srgbClr val="CBD5E0"/>
+            </a:solidFill>
+            <a:prstDash val="solid"/>
+          </a:ln>
+        </p:spPr>
+      </p:sp>
+      <p:sp>
+        <p:nvSpPr>
+          <p:cNvPr id="13" name="Shape 11"/>
+          <p:cNvSpPr/>
+          <p:nvPr/>
+        </p:nvSpPr>
+        <p:spPr>
+          <a:xfrm>
+            <a:off x="3642284" y="1792224"/>
+            <a:ext cx="384048" cy="384048"/>
+          </a:xfrm>
+          <a:prstGeom prst="ellipse">
+            <a:avLst/>
+          </a:prstGeom>
+          <a:solidFill>
+            <a:srgbClr val="B98A2E"/>
+          </a:solidFill>
+          <a:ln/>
+        </p:spPr>
+      </p:sp>
+      <p:sp>
+        <p:nvSpPr>
+          <p:cNvPr id="14" name="Text 12"/>
+          <p:cNvSpPr/>
+          <p:nvPr/>
+        </p:nvSpPr>
+        <p:spPr>
+          <a:xfrm>
+            <a:off x="3642284" y="1792224"/>
+            <a:ext cx="384048" cy="384048"/>
+          </a:xfrm>
+          <a:prstGeom prst="rect">
+            <a:avLst/>
+          </a:prstGeom>
+          <a:noFill/>
+          <a:ln/>
+        </p:spPr>
+        <p:txBody>
+          <a:bodyPr wrap="square" lIns="0" tIns="0" rIns="0" bIns="0" rtlCol="0" anchor="ctr"/>
+          <a:lstStyle/>
+          <a:p>
+            <a:pPr algn="ctr" indent="0" marL="0">
+              <a:buNone/>
+            </a:pPr>
+            <a:r>
+              <a:rPr lang="en-US" sz="1300" b="1" dirty="0">
+                <a:solidFill>
+                  <a:srgbClr val="FFFFFF"/>
+                </a:solidFill>
+                <a:latin typeface="Arial" pitchFamily="34" charset="0"/>
+                <a:ea typeface="Arial" pitchFamily="34" charset="-122"/>
+                <a:cs typeface="Arial" pitchFamily="34" charset="-120"/>
+              </a:rPr>
+              <a:t>STEP 2</a:t>
+            </a:r>
+            <a:endParaRPr lang="en-US" sz="1300" dirty="0"/>
+          </a:p>
+        </p:txBody>
+      </p:sp>
+      <p:sp>
+        <p:nvSpPr>
+          <p:cNvPr id="15" name="Text 13"/>
+          <p:cNvSpPr/>
+          <p:nvPr/>
+        </p:nvSpPr>
+        <p:spPr>
+          <a:xfrm>
+            <a:off x="3642284" y="2304288"/>
+            <a:ext cx="2051228" cy="365760"/>
+          </a:xfrm>
+          <a:prstGeom prst="rect">
+            <a:avLst/>
+          </a:prstGeom>
+          <a:noFill/>
+          <a:ln/>
+        </p:spPr>
+        <p:txBody>
+          <a:bodyPr wrap="square" rtlCol="0" anchor="ctr"/>
+          <a:lstStyle/>
+          <a:p>
+            <a:pPr indent="0" marL="0">
+              <a:buNone/>
+            </a:pPr>
+            <a:r>
+              <a:rPr lang="en-US" sz="1600" b="1" dirty="0">
                 <a:solidFill>
                   <a:srgbClr val="10161F"/>
                 </a:solidFill>
@@ -9433,15 +8810,399 @@
                 <a:ea typeface="Pretendard" pitchFamily="34" charset="-122"/>
                 <a:cs typeface="Pretendard" pitchFamily="34" charset="-120"/>
               </a:rPr>
-              <a:t>true,"mocked":true,"extractedFields":{"area_signal":"역삼","asset_type":"오피스빌딩","price_band":"300억","size_signal":"3000평(약 9917.4㎡)"},"extractedFacts":{"region":"역삼","exactAddressCandidate":"역삼동 742-1","assetType":"오피스빌딩","priceText":"300억","sizeText":"3000평(약 9917.4㎡)","currentUse":"오피스","currentUseSignal":"근린생활시설","leaseSignal":"임대중","vacancySignal":"공실없음","tenantNames":["쿠팡","네이버"],"unitRentTexts":["301호: 1500만"],"sellerMotivationText":"자산 효율화","brokerNotes":["초역세권 매물"]},"detectedSensitiveFields":["exact_address","tenant_name"],"ambiguousFields":[],"warnings":[],"areaSignal":"역삼","assetType":"오피스빌딩","priceBand":"300억","sizeSignal":"3000평(약 9917.4㎡)","dealType":"매각","buildingName":"역삼 센트럴타워","exactAddress":"역삼동 742-1","totalFloorArea":9917.3,"buildYear":2015,"currentUseSignal":"근린생활시설","vacancySignal":"공실 없음","fitSummary":"초역세권 근생 빌딩으로 시행/사옥 매입에 최적화","cautionSummary":"주요 임차 업종 만기 조율 필요","hiddenFields":["exact_address","seller_motivation"],"confidence":{"areaSignal":"confirmed","assetType":"confirmed","priceBand":"ai_hypothesis","fitSummary":"ai_hypothesis"},"missingData":["sizeSignal"],"boundaryNote":"본 자료는 실거래 통계 기반 참고치입니다.","buyerType":"법인 사옥형","budgetRange":{"min":50,"max":80,"display":"50억~80억"},"preferredRegions":["강남","성수"],"assetTypes":["꼬마빌딩","사옥용"],"purchasePurpose":"사옥용 매입","mustHave":["초역세권","주차"],"niceToHave":["테라스","루프탑"],"riskTolerance":"medium","financingNote":"자본금 50% 준비","missingQuestions":["구체적인 입주 시기가 언제인가요?","선호하는 수익률이 있나요?"],"privacyNotes":["연락처 비공개"],"fitReasons":["매수자 예산(50-80억)에 부합하는 매물입니다.","요청하신 성수/강남 권역에 해당합니다."],"cautionReasons":["요청한 용도와 달리 명도 협의가 다소 필요합니다."],"recommendedNextAction":"현장 답사 제안","kakaoMessage":"안녕하세요! 요청하신 조건에 부합하는 추천 매물이 있어 안내해 드립니다. 확인해보시고 피드백 부탁드립니다.","title":"강남 역삼역 초역세권 오피스 사옥용 빌딩 매각","shortSummary":"역삼역 도보 5분 거리의 준신축급 대형 오피스빌딩입니다.","dealPoints":["초역세권","사옥 최적"],"cautionPoints":["명도 조율 필요"],"hiddenInfoNotice":["보증금 및 지번은 인가 후 확인 가능"],"gateMessage":"G1 등급 등록이 필요합니다.","kakaoText":"강남 역삼역 오피스 빌딩 매각 안내입니다.","exactUnitCandidate":"101호","floor":"1층","areaSqmText":"150㎡","spaceType":"office","depositText":"5000만","monthlyRentText":"400만","maintenanceFeeText":"50만","availableFromText":"즉시입주","leaseTermMonthsText":"24","incentivesText":"렌트프리 2개월","restrictions":[],"landlordIdentity":"김성수","currentTenant":"스타트업","vacancyReason":"이전 확장","rentNegotiation":"협의 가능","region":"성수동","areaSqm":150,"deposit":5000,"monthlyRent":400,"maintenanceFee":50,"availableFrom":"즉시입주","leaseTermMonths":24,"incentives":{"rentFreeMonths":2,"interiorSupport":"일부 인테리어 지원","freeRentDetail":"렌트프리 2개월 지원"},"shortSummaryLease":"성수역 도보 5분 거리 1층 리테일 상가 매물입니다."}</a:t>
-            </a:r>
+              <a:t>NDA 체결 → 임차인 정보 및 임대차계약서 제공</a:t>
+            </a:r>
+            <a:endParaRPr lang="en-US" sz="1600" dirty="0"/>
+          </a:p>
+        </p:txBody>
+      </p:sp>
+      <p:sp>
+        <p:nvSpPr>
+          <p:cNvPr id="16" name="Text 14"/>
+          <p:cNvSpPr/>
+          <p:nvPr/>
+        </p:nvSpPr>
+        <p:spPr>
+          <a:xfrm>
+            <a:off x="3642284" y="2761488"/>
+            <a:ext cx="2051228" cy="1828800"/>
+          </a:xfrm>
+          <a:prstGeom prst="rect">
+            <a:avLst/>
+          </a:prstGeom>
+          <a:noFill/>
+          <a:ln/>
+        </p:spPr>
+        <p:txBody>
+          <a:bodyPr wrap="square" rtlCol="0" anchor="t"/>
+          <a:lstStyle/>
+          <a:p>
+            <a:pPr indent="0" marL="0">
+              <a:buNone/>
+            </a:pPr>
             <a:endParaRPr lang="en-US" sz="1100" dirty="0"/>
           </a:p>
         </p:txBody>
       </p:sp>
       <p:sp>
         <p:nvSpPr>
-          <p:cNvPr id="11" name="Text 9"/>
+          <p:cNvPr id="17" name="Shape 15"/>
+          <p:cNvSpPr/>
+          <p:nvPr/>
+        </p:nvSpPr>
+        <p:spPr>
+          <a:xfrm>
+            <a:off x="6004408" y="3035808"/>
+            <a:ext cx="182880" cy="274320"/>
+          </a:xfrm>
+          <a:prstGeom prst="rightArrow">
+            <a:avLst/>
+          </a:prstGeom>
+          <a:solidFill>
+            <a:srgbClr val="CBD5E0"/>
+          </a:solidFill>
+          <a:ln w="6350">
+            <a:solidFill>
+              <a:srgbClr val="718096"/>
+            </a:solidFill>
+            <a:prstDash val="solid"/>
+          </a:ln>
+        </p:spPr>
+      </p:sp>
+      <p:sp>
+        <p:nvSpPr>
+          <p:cNvPr id="18" name="Shape 16"/>
+          <p:cNvSpPr/>
+          <p:nvPr/>
+        </p:nvSpPr>
+        <p:spPr>
+          <a:xfrm>
+            <a:off x="6278728" y="1572768"/>
+            <a:ext cx="2490140" cy="3200400"/>
+          </a:xfrm>
+          <a:prstGeom prst="roundRect">
+            <a:avLst>
+              <a:gd name="adj" fmla="val 2203"/>
+            </a:avLst>
+          </a:prstGeom>
+          <a:solidFill>
+            <a:srgbClr val="F7FAFC"/>
+          </a:solidFill>
+          <a:ln w="6350">
+            <a:solidFill>
+              <a:srgbClr val="CBD5E0"/>
+            </a:solidFill>
+            <a:prstDash val="solid"/>
+          </a:ln>
+        </p:spPr>
+      </p:sp>
+      <p:sp>
+        <p:nvSpPr>
+          <p:cNvPr id="19" name="Shape 17"/>
+          <p:cNvSpPr/>
+          <p:nvPr/>
+        </p:nvSpPr>
+        <p:spPr>
+          <a:xfrm>
+            <a:off x="6498184" y="1792224"/>
+            <a:ext cx="384048" cy="384048"/>
+          </a:xfrm>
+          <a:prstGeom prst="ellipse">
+            <a:avLst/>
+          </a:prstGeom>
+          <a:solidFill>
+            <a:srgbClr val="B98A2E"/>
+          </a:solidFill>
+          <a:ln/>
+        </p:spPr>
+      </p:sp>
+      <p:sp>
+        <p:nvSpPr>
+          <p:cNvPr id="20" name="Text 18"/>
+          <p:cNvSpPr/>
+          <p:nvPr/>
+        </p:nvSpPr>
+        <p:spPr>
+          <a:xfrm>
+            <a:off x="6498184" y="1792224"/>
+            <a:ext cx="384048" cy="384048"/>
+          </a:xfrm>
+          <a:prstGeom prst="rect">
+            <a:avLst/>
+          </a:prstGeom>
+          <a:noFill/>
+          <a:ln/>
+        </p:spPr>
+        <p:txBody>
+          <a:bodyPr wrap="square" lIns="0" tIns="0" rIns="0" bIns="0" rtlCol="0" anchor="ctr"/>
+          <a:lstStyle/>
+          <a:p>
+            <a:pPr algn="ctr" indent="0" marL="0">
+              <a:buNone/>
+            </a:pPr>
+            <a:r>
+              <a:rPr lang="en-US" sz="1300" b="1" dirty="0">
+                <a:solidFill>
+                  <a:srgbClr val="FFFFFF"/>
+                </a:solidFill>
+                <a:latin typeface="Arial" pitchFamily="34" charset="0"/>
+                <a:ea typeface="Arial" pitchFamily="34" charset="-122"/>
+                <a:cs typeface="Arial" pitchFamily="34" charset="-120"/>
+              </a:rPr>
+              <a:t>STEP 3</a:t>
+            </a:r>
+            <a:endParaRPr lang="en-US" sz="1300" dirty="0"/>
+          </a:p>
+        </p:txBody>
+      </p:sp>
+      <p:sp>
+        <p:nvSpPr>
+          <p:cNvPr id="21" name="Text 19"/>
+          <p:cNvSpPr/>
+          <p:nvPr/>
+        </p:nvSpPr>
+        <p:spPr>
+          <a:xfrm>
+            <a:off x="6498184" y="2304288"/>
+            <a:ext cx="2051228" cy="365760"/>
+          </a:xfrm>
+          <a:prstGeom prst="rect">
+            <a:avLst/>
+          </a:prstGeom>
+          <a:noFill/>
+          <a:ln/>
+        </p:spPr>
+        <p:txBody>
+          <a:bodyPr wrap="square" rtlCol="0" anchor="ctr"/>
+          <a:lstStyle/>
+          <a:p>
+            <a:pPr indent="0" marL="0">
+              <a:buNone/>
+            </a:pPr>
+            <a:r>
+              <a:rPr lang="en-US" sz="1600" b="1" dirty="0">
+                <a:solidFill>
+                  <a:srgbClr val="10161F"/>
+                </a:solidFill>
+                <a:latin typeface="Pretendard" pitchFamily="34" charset="0"/>
+                <a:ea typeface="Pretendard" pitchFamily="34" charset="-122"/>
+                <a:cs typeface="Pretendard" pitchFamily="34" charset="-120"/>
+              </a:rPr>
+              <a:t>현장 실사 일정 조율 → 건물 컨디션 및 설비 직접 확인</a:t>
+            </a:r>
+            <a:endParaRPr lang="en-US" sz="1600" dirty="0"/>
+          </a:p>
+        </p:txBody>
+      </p:sp>
+      <p:sp>
+        <p:nvSpPr>
+          <p:cNvPr id="22" name="Text 20"/>
+          <p:cNvSpPr/>
+          <p:nvPr/>
+        </p:nvSpPr>
+        <p:spPr>
+          <a:xfrm>
+            <a:off x="6498184" y="2761488"/>
+            <a:ext cx="2051228" cy="1828800"/>
+          </a:xfrm>
+          <a:prstGeom prst="rect">
+            <a:avLst/>
+          </a:prstGeom>
+          <a:noFill/>
+          <a:ln/>
+        </p:spPr>
+        <p:txBody>
+          <a:bodyPr wrap="square" rtlCol="0" anchor="t"/>
+          <a:lstStyle/>
+          <a:p>
+            <a:pPr indent="0" marL="0">
+              <a:buNone/>
+            </a:pPr>
+            <a:endParaRPr lang="en-US" sz="1100" dirty="0"/>
+          </a:p>
+        </p:txBody>
+      </p:sp>
+      <p:sp>
+        <p:nvSpPr>
+          <p:cNvPr id="23" name="Shape 21"/>
+          <p:cNvSpPr/>
+          <p:nvPr/>
+        </p:nvSpPr>
+        <p:spPr>
+          <a:xfrm>
+            <a:off x="8860307" y="3035808"/>
+            <a:ext cx="182880" cy="274320"/>
+          </a:xfrm>
+          <a:prstGeom prst="rightArrow">
+            <a:avLst/>
+          </a:prstGeom>
+          <a:solidFill>
+            <a:srgbClr val="CBD5E0"/>
+          </a:solidFill>
+          <a:ln w="6350">
+            <a:solidFill>
+              <a:srgbClr val="718096"/>
+            </a:solidFill>
+            <a:prstDash val="solid"/>
+          </a:ln>
+        </p:spPr>
+      </p:sp>
+      <p:sp>
+        <p:nvSpPr>
+          <p:cNvPr id="24" name="Shape 22"/>
+          <p:cNvSpPr/>
+          <p:nvPr/>
+        </p:nvSpPr>
+        <p:spPr>
+          <a:xfrm>
+            <a:off x="9134627" y="1572768"/>
+            <a:ext cx="2490140" cy="3200400"/>
+          </a:xfrm>
+          <a:prstGeom prst="roundRect">
+            <a:avLst>
+              <a:gd name="adj" fmla="val 2203"/>
+            </a:avLst>
+          </a:prstGeom>
+          <a:solidFill>
+            <a:srgbClr val="F7FAFC"/>
+          </a:solidFill>
+          <a:ln w="6350">
+            <a:solidFill>
+              <a:srgbClr val="CBD5E0"/>
+            </a:solidFill>
+            <a:prstDash val="solid"/>
+          </a:ln>
+        </p:spPr>
+      </p:sp>
+      <p:sp>
+        <p:nvSpPr>
+          <p:cNvPr id="25" name="Shape 23"/>
+          <p:cNvSpPr/>
+          <p:nvPr/>
+        </p:nvSpPr>
+        <p:spPr>
+          <a:xfrm>
+            <a:off x="9354083" y="1792224"/>
+            <a:ext cx="384048" cy="384048"/>
+          </a:xfrm>
+          <a:prstGeom prst="ellipse">
+            <a:avLst/>
+          </a:prstGeom>
+          <a:solidFill>
+            <a:srgbClr val="B98A2E"/>
+          </a:solidFill>
+          <a:ln/>
+        </p:spPr>
+      </p:sp>
+      <p:sp>
+        <p:nvSpPr>
+          <p:cNvPr id="26" name="Text 24"/>
+          <p:cNvSpPr/>
+          <p:nvPr/>
+        </p:nvSpPr>
+        <p:spPr>
+          <a:xfrm>
+            <a:off x="9354083" y="1792224"/>
+            <a:ext cx="384048" cy="384048"/>
+          </a:xfrm>
+          <a:prstGeom prst="rect">
+            <a:avLst/>
+          </a:prstGeom>
+          <a:noFill/>
+          <a:ln/>
+        </p:spPr>
+        <p:txBody>
+          <a:bodyPr wrap="square" lIns="0" tIns="0" rIns="0" bIns="0" rtlCol="0" anchor="ctr"/>
+          <a:lstStyle/>
+          <a:p>
+            <a:pPr algn="ctr" indent="0" marL="0">
+              <a:buNone/>
+            </a:pPr>
+            <a:r>
+              <a:rPr lang="en-US" sz="1300" b="1" dirty="0">
+                <a:solidFill>
+                  <a:srgbClr val="FFFFFF"/>
+                </a:solidFill>
+                <a:latin typeface="Arial" pitchFamily="34" charset="0"/>
+                <a:ea typeface="Arial" pitchFamily="34" charset="-122"/>
+                <a:cs typeface="Arial" pitchFamily="34" charset="-120"/>
+              </a:rPr>
+              <a:t>STEP 4</a:t>
+            </a:r>
+            <a:endParaRPr lang="en-US" sz="1300" dirty="0"/>
+          </a:p>
+        </p:txBody>
+      </p:sp>
+      <p:sp>
+        <p:nvSpPr>
+          <p:cNvPr id="27" name="Text 25"/>
+          <p:cNvSpPr/>
+          <p:nvPr/>
+        </p:nvSpPr>
+        <p:spPr>
+          <a:xfrm>
+            <a:off x="9354083" y="2304288"/>
+            <a:ext cx="2051228" cy="365760"/>
+          </a:xfrm>
+          <a:prstGeom prst="rect">
+            <a:avLst/>
+          </a:prstGeom>
+          <a:noFill/>
+          <a:ln/>
+        </p:spPr>
+        <p:txBody>
+          <a:bodyPr wrap="square" rtlCol="0" anchor="ctr"/>
+          <a:lstStyle/>
+          <a:p>
+            <a:pPr indent="0" marL="0">
+              <a:buNone/>
+            </a:pPr>
+            <a:r>
+              <a:rPr lang="en-US" sz="1600" b="1" dirty="0">
+                <a:solidFill>
+                  <a:srgbClr val="10161F"/>
+                </a:solidFill>
+                <a:latin typeface="Pretendard" pitchFamily="34" charset="0"/>
+                <a:ea typeface="Pretendard" pitchFamily="34" charset="-122"/>
+                <a:cs typeface="Pretendard" pitchFamily="34" charset="-120"/>
+              </a:rPr>
+              <a:t>LOI(투자의향서) 제출 → 가격 협의 개시</a:t>
+            </a:r>
+            <a:endParaRPr lang="en-US" sz="1600" dirty="0"/>
+          </a:p>
+        </p:txBody>
+      </p:sp>
+      <p:sp>
+        <p:nvSpPr>
+          <p:cNvPr id="28" name="Text 26"/>
+          <p:cNvSpPr/>
+          <p:nvPr/>
+        </p:nvSpPr>
+        <p:spPr>
+          <a:xfrm>
+            <a:off x="9354083" y="2761488"/>
+            <a:ext cx="2051228" cy="1828800"/>
+          </a:xfrm>
+          <a:prstGeom prst="rect">
+            <a:avLst/>
+          </a:prstGeom>
+          <a:noFill/>
+          <a:ln/>
+        </p:spPr>
+        <p:txBody>
+          <a:bodyPr wrap="square" rtlCol="0" anchor="t"/>
+          <a:lstStyle/>
+          <a:p>
+            <a:pPr indent="0" marL="0">
+              <a:buNone/>
+            </a:pPr>
+            <a:endParaRPr lang="en-US" sz="1100" dirty="0"/>
+          </a:p>
+        </p:txBody>
+      </p:sp>
+      <p:sp>
+        <p:nvSpPr>
+          <p:cNvPr id="29" name="Text 27"/>
           <p:cNvSpPr/>
           <p:nvPr/>
         </p:nvSpPr>
@@ -9480,7 +9241,7 @@
       </p:sp>
       <p:sp>
         <p:nvSpPr>
-          <p:cNvPr id="12" name="Text 10"/>
+          <p:cNvPr id="30" name="Text 28"/>
           <p:cNvSpPr/>
           <p:nvPr/>
         </p:nvSpPr>

--- a/docs/test/stress/e2e-outputs/owner_occupied_case08_hannam_flagship_basic.pptx
+++ b/docs/test/stress/e2e-outputs/owner_occupied_case08_hannam_flagship_basic.pptx
@@ -1905,7 +1905,7 @@
                 <a:ea typeface="Arial" pitchFamily="34" charset="-122"/>
                 <a:cs typeface="Arial" pitchFamily="34" charset="-120"/>
               </a:rPr>
-              <a:t>BASIC IM</a:t>
+              <a:t>INVESTMENT MEMORANDUM</a:t>
             </a:r>
             <a:endParaRPr lang="en-US" sz="1000" dirty="0"/>
           </a:p>
@@ -3988,7 +3988,7 @@
                 <a:ea typeface="Pretendard" pitchFamily="34" charset="-122"/>
                 <a:cs typeface="Pretendard" pitchFamily="34" charset="-120"/>
               </a:rPr>
-              <a:t>한남권역 내 사옥, 매각 희망가 180억. 입지·임대차 현황을 감안할 때 투자 검토 가치가 있는 물건입니다.</a:t>
+              <a:t>한남권역 소재 사옥, 희망가 180억 투자 검토 자료입니다.</a:t>
             </a:r>
             <a:endParaRPr lang="en-US" sz="1500" dirty="0"/>
           </a:p>
@@ -4610,7 +4610,7 @@
                 <a:ea typeface="Pretendard" pitchFamily="34" charset="-122"/>
                 <a:cs typeface="Pretendard" pitchFamily="34" charset="-120"/>
               </a:rPr>
-              <a:t>원금 안전판: 한남권역 핵심 입지 및 우량 대지 지분 가치로 하방 경직성 확보</a:t>
+              <a:t>입지 가치: 한남권역 소재 자산으로 중장기 자산 가치 및 안정적 수요 검토</a:t>
             </a:r>
             <a:endParaRPr lang="en-US" sz="1150" dirty="0"/>
           </a:p>
@@ -4742,7 +4742,7 @@
                 <a:ea typeface="Pretendard" pitchFamily="34" charset="-122"/>
                 <a:cs typeface="Pretendard" pitchFamily="34" charset="-120"/>
               </a:rPr>
-              <a:t>수익 안정성: 매각 희망가 180억 대비 안정적인 월 임대수익 창출 구조</a:t>
+              <a:t>임대 구조: 180억 수준의 가격대 및 현 임대차 기반의 현금흐름 분석</a:t>
             </a:r>
             <a:endParaRPr lang="en-US" sz="1150" dirty="0"/>
           </a:p>
@@ -4874,7 +4874,7 @@
                 <a:ea typeface="Pretendard" pitchFamily="34" charset="-122"/>
                 <a:cs typeface="Pretendard" pitchFamily="34" charset="-120"/>
               </a:rPr>
-              <a:t>미래 가치: 향후 권역 지가 상승 및 공법상 잔여 용적률 활용 밸류업 기회</a:t>
+              <a:t>실사 점검: 계약서 및 공부 확인을 통한 권리관계·물리적 상태 정밀 진단</a:t>
             </a:r>
             <a:endParaRPr lang="en-US" sz="1150" dirty="0"/>
           </a:p>
@@ -5346,7 +5346,7 @@
                 <a:ea typeface="Pretendard" pitchFamily="34" charset="-122"/>
                 <a:cs typeface="Pretendard" pitchFamily="34" charset="-120"/>
               </a:rPr>
-              <a:t>{"ok":true,"mocked":true,"extractedFields":{"area_signal":"역삼","asset_type":"오피스빌딩","price_band":"300억","size_signal":"3000평(약 9917.4㎡)"},"extractedFacts":{"region":"역삼","exactAddressCandidate":"역삼동 742-1","assetType":"오피스빌딩","priceText":"300억","sizeText":"3000평(약 9917.4㎡)","currentUse":"오피스","currentUseSignal":"근린생활시설","leaseSignal":"임대중","vacancySignal":"공실없음","tenantNames":["쿠팡","네이버"],"unitRentTexts":["301호: 1500만"],"sellerMotivationText":"자산 효율화","brokerNotes":["초역세권 매물"]},"detectedSensitiveFields":["exact_address","tenant_name"],"ambiguousFields":[],"warnings":[],"areaSignal":"역삼","assetType":"오피스빌딩","priceBand":"300억","sizeSignal":"3000평(약 9917.4㎡)","dealType":"매각","buildingName":"역삼 센트럴타워","exactAddress":"역삼동 742-1","totalFloorArea":9917.3,"buildYear":2015,"currentUseSignal":"근린생활시설","vacancySignal":"공실 없음","fitSummary":"초역세권 근생 빌딩으로 시행/사옥 매입에 최적화","cautionSummary":"주요 임차 업종 만기 조율 필요","hiddenFields":["exact_address","seller_motivation"],"confidence":{"areaSignal":"confirmed","assetType":"confirmed","priceBand":"ai_hypothesis","fitSummary":"ai_hypothesis"},"missingData":["sizeSignal"],"boundaryNote":"본 자료는 실거래 통계 기반 참고치입니다.","buyerType":"법인 사옥형","budgetRange":{"min":50,"max":80,"display":"50억~80억"},"preferredRegions":["강남","성수"],"assetTypes":["꼬마빌딩","사옥용"],"purchasePurpose":"사옥용 매입","mustHave":["초역세권","주차"],"niceToHave":["테라스","루프탑"],"riskTolerance":"medium","financingNote":"자본금 50% 준비","missingQuestions":["구체적인 입주 시기가 언제인가요?","선호하는 수익률이 있나요?"],"privacyNotes":["연락처 비공개"],"fitReasons":["매수자 예산(50-80억)에 부합하는 매물입니다.","요청하신 성수/강남 권역에 해당합니다."],"cautionReasons":["요청한 용도와 달리 명도 협의가 다소 필요합니다."],"recommendedNextAction":"현장 답사 제안","kakaoMessage":"안녕하세요! 요청하신 조건에 부합하는 추천 매물이 있어 안내해 드립니다. 확인해보시고 피드백 부탁드립니다.","title":"강남 역삼역 초역세권 오피스 사옥용 빌딩 매각","shortSummary":"역삼역 도보 5분 거리의 준신축급 대형 오피스빌딩입니다.","dealPoints":["초역세권","사옥 최적"],"cautionPoints":["명도 조율 필요"],"hiddenInfoNotice":["보증금 및 지번은 인가 후 확인 가능"],"gateMessage":"G1 등급 등록이 필요합니다.","kakaoText":"강남 역삼역 오피스 빌딩 매각 안내입니다.","exactUnitCandidate":"101호","floor":"1층","areaSqmText":"150㎡","spaceType":"office","depositText":"5000만","monthlyRentText":"400만","maintenanceFeeText":"50만","availableFromText":"즉시입주","leaseTermMonthsText":"24","incentivesText":"렌트프리 2개월","restrictions":[],"landlordIdentity":"김성수","currentTenant":"스타트업","vacancyReason":"이전 확장","rentNegotiation":"협의 가능","region":"성수동","areaSqm":150,"deposit":5000,"monthlyRent":400,"maintenanceFee":50,"availableFrom":"즉시입주","leaseTermMonths":24,"incentives":{"rentFreeMonths":2,"interiorSupport":"일부 인테리어 지원","freeRentDetail":"렌트프리 2개월 지원"},"shortSummaryLease":"성수역 도보 5분 거리 1층 리테일 상가 매물입니다."}</a:t>
+              <a:t>{"ok":true,"mocked":true,"extractedFields":{"area_signal":"역삼","asset_type":"오피스빌딩","price_band":"300억","size_signal":"3000평(약 9917.4㎡)"},"extractedFacts":{"region":"역삼","exactAddressCandidate":"역삼동 742-1","assetType":"오피스빌딩","priceText":"300억","sizeText":"3000평(약 9917.4㎡)","currentUse":"오피스","currentUseSignal":"근린생활시설","leaseSignal":"임대중","vacancySignal":"공실없음","tenantNames":["쿠팡","네이버"],"unitRentTexts":["301호: 1500만"],"sellerMotivationText":"자산 효율화","brokerNotes":["초역세권 매물"]},"detectedSensitiveFields":["exact_address","tenant_name"],"ambiguousFields":[],"warnings":[],"areaSignal":"역삼","assetType":"오피스빌딩","priceBand":"300억","sizeSignal":"3000평(약 9917.4㎡)","dealType":"매각","buildingName":"역삼 센트럴타워","exactAddress":"역삼동 742-1","totalFloorArea":9917.3,"buildYear":2015,"currentUseSignal":"근린생활시설","vacancySignal":"공실 없음","fitSummary":"초역세권 근생 빌딩으로 시행/사옥 매입에 최적화","cautionSummary":"주요 임차인 만기 조율 필요","hiddenFields":["exact_address","seller_motivation"],"confidence":{"areaSignal":"confirmed","assetType":"confirmed","priceBand":"ai_hypothesis","fitSummary":"ai_hypothesis"},"missingData":["sizeSignal"],"boundaryNote":"본 자료는 실거래 통계 기반 참고치입니다.","buyerType":"법인 사옥형","budgetRange":{"min":50,"max":80,"display":"50억~80억"},"preferredRegions":["강남","성수"],"assetTypes":["꼬마빌딩","사옥용"],"purchasePurpose":"사옥용 매입","mustHave":["초역세권","주차"],"niceToHave":["테라스","루프탑"],"riskTolerance":"medium","financingNote":"자본금 50% 준비","missingQuestions":["구체적인 입주 시기가 언제인가요?","선호하는 수익률이 있나요?"],"privacyNotes":["연락처 비공개"],"fitReasons":["매수자 예산(50-80억)에 부합하는 매물입니다.","요청하신 성수/강남 권역에 해당합니다."],"cautionReasons":["요청한 용도와 달리 명도 협의가 다소 필요합니다."],"recommendedNextAction":"현장 답사 제안","kakaoMessage":"안녕하세요! 요청하신 조건에 부합하는 추천 매물이 있어 안내해 드립니다. 확인해보시고 피드백 부탁드립니다.","title":"강남 역삼역 초역세권 오피스 사옥용 빌딩 매각","shortSummary":"역삼역 도보 5분 거리의 준신축급 대형 오피스빌딩입니다.","dealPoints":["초역세권","사옥 최적"],"cautionPoints":["명도 조율 필요"],"hiddenInfoNotice":["보증금 및 지번은 인가 후 확인 가능"],"gateMessage":"G1 등급 등록이 필요합니다.","kakaoText":"강남 역삼역 오피스 빌딩 매각 안내입니다.","exactUnitCandidate":"101호","floor":"1층","areaSqmText":"150㎡","spaceType":"office","depositText":"5000만","monthlyRentText":"400만","maintenanceFeeText":"50만","availableFromText":"즉시입주","leaseTermMonthsText":"24","incentivesText":"렌트프리 2개월","restrictions":[],"landlordIdentity":"김성수","currentTenant":"스타트업","vacancyReason":"이전 확장","rentNegotiation":"협의 가능","region":"성수동","areaSqm":150,"deposit":5000,"monthlyRent":400,"maintenanceFee":50,"availableFrom":"즉시입주","leaseTermMonths":24,"incentives":{"rentFreeMonths":2,"interiorSupport":"일부 인테리어 지원","freeRentDetail":"렌트프리 2개월 지원"},"shortSummaryLease":"성수역 도보 5분 거리 1층 리테일 상가 매물입니다."}</a:t>
             </a:r>
             <a:endParaRPr lang="en-US" sz="1000" dirty="0"/>
           </a:p>
@@ -5596,7 +5596,7 @@
                 <a:ea typeface="Pretendard" pitchFamily="34" charset="-122"/>
                 <a:cs typeface="Pretendard" pitchFamily="34" charset="-120"/>
               </a:rPr>
-              <a:t>소재지</a:t>
+              <a:t>주요 용도</a:t>
             </a:r>
             <a:endParaRPr lang="en-US" sz="1400" dirty="0"/>
           </a:p>
@@ -5638,7 +5638,7 @@
                 <a:ea typeface="Pretendard" pitchFamily="34" charset="-122"/>
                 <a:cs typeface="Pretendard" pitchFamily="34" charset="-120"/>
               </a:rPr>
-              <a:t>한남권역</a:t>
+              <a:t>확인 필요</a:t>
             </a:r>
             <a:endParaRPr lang="en-US" sz="1400" dirty="0"/>
           </a:p>
@@ -5703,7 +5703,7 @@
                 <a:ea typeface="Pretendard" pitchFamily="34" charset="-122"/>
                 <a:cs typeface="Pretendard" pitchFamily="34" charset="-120"/>
               </a:rPr>
-              <a:t>주요 용도</a:t>
+              <a:t>연면적</a:t>
             </a:r>
             <a:endParaRPr lang="en-US" sz="1400" dirty="0"/>
           </a:p>
@@ -5745,7 +5745,7 @@
                 <a:ea typeface="Pretendard" pitchFamily="34" charset="-122"/>
                 <a:cs typeface="Pretendard" pitchFamily="34" charset="-120"/>
               </a:rPr>
-              <a:t>근린생활시설</a:t>
+              <a:t>5,000㎡ (약 1513평(약 5001.7㎡))</a:t>
             </a:r>
             <a:endParaRPr lang="en-US" sz="1400" dirty="0"/>
           </a:p>
@@ -5810,7 +5810,7 @@
                 <a:ea typeface="Pretendard" pitchFamily="34" charset="-122"/>
                 <a:cs typeface="Pretendard" pitchFamily="34" charset="-120"/>
               </a:rPr>
-              <a:t>연면적</a:t>
+              <a:t>대지면적</a:t>
             </a:r>
             <a:endParaRPr lang="en-US" sz="1400" dirty="0"/>
           </a:p>
@@ -5852,7 +5852,7 @@
                 <a:ea typeface="Pretendard" pitchFamily="34" charset="-122"/>
                 <a:cs typeface="Pretendard" pitchFamily="34" charset="-120"/>
               </a:rPr>
-              <a:t>5,000㎡ (약 1513평(약 5001.7㎡))</a:t>
+              <a:t>1,000㎡ (약 303평(약 1001.7㎡))</a:t>
             </a:r>
             <a:endParaRPr lang="en-US" sz="1400" dirty="0"/>
           </a:p>
@@ -5917,7 +5917,7 @@
                 <a:ea typeface="Pretendard" pitchFamily="34" charset="-122"/>
                 <a:cs typeface="Pretendard" pitchFamily="34" charset="-120"/>
               </a:rPr>
-              <a:t>대지면적</a:t>
+              <a:t>용도지역</a:t>
             </a:r>
             <a:endParaRPr lang="en-US" sz="1400" dirty="0"/>
           </a:p>
@@ -5959,7 +5959,7 @@
                 <a:ea typeface="Pretendard" pitchFamily="34" charset="-122"/>
                 <a:cs typeface="Pretendard" pitchFamily="34" charset="-120"/>
               </a:rPr>
-              <a:t>1,000㎡ (약 303평(약 1001.7㎡))</a:t>
+              <a:t>일반상업지역</a:t>
             </a:r>
             <a:endParaRPr lang="en-US" sz="1400" dirty="0"/>
           </a:p>
@@ -6024,7 +6024,7 @@
                 <a:ea typeface="Pretendard" pitchFamily="34" charset="-122"/>
                 <a:cs typeface="Pretendard" pitchFamily="34" charset="-120"/>
               </a:rPr>
-              <a:t>용도지역</a:t>
+              <a:t>매매 희망가</a:t>
             </a:r>
             <a:endParaRPr lang="en-US" sz="1400" dirty="0"/>
           </a:p>
@@ -6066,7 +6066,7 @@
                 <a:ea typeface="Pretendard" pitchFamily="34" charset="-122"/>
                 <a:cs typeface="Pretendard" pitchFamily="34" charset="-120"/>
               </a:rPr>
-              <a:t>일반상업지역</a:t>
+              <a:t>180억</a:t>
             </a:r>
             <a:endParaRPr lang="en-US" sz="1400" dirty="0"/>
           </a:p>
@@ -6075,434 +6075,6 @@
       <p:sp>
         <p:nvSpPr>
           <p:cNvPr id="21" name="Shape 19"/>
-          <p:cNvSpPr/>
-          <p:nvPr/>
-        </p:nvSpPr>
-        <p:spPr>
-          <a:xfrm>
-            <a:off x="566928" y="3657600"/>
-            <a:ext cx="6858000" cy="0"/>
-          </a:xfrm>
-          <a:prstGeom prst="line">
-            <a:avLst/>
-          </a:prstGeom>
-          <a:noFill/>
-          <a:ln w="3810">
-            <a:solidFill>
-              <a:srgbClr val="CBD5E0"/>
-            </a:solidFill>
-            <a:prstDash val="solid"/>
-          </a:ln>
-        </p:spPr>
-      </p:sp>
-      <p:sp>
-        <p:nvSpPr>
-          <p:cNvPr id="22" name="Text 20"/>
-          <p:cNvSpPr/>
-          <p:nvPr/>
-        </p:nvSpPr>
-        <p:spPr>
-          <a:xfrm>
-            <a:off x="566928" y="3657600"/>
-            <a:ext cx="2606040" cy="402336"/>
-          </a:xfrm>
-          <a:prstGeom prst="rect">
-            <a:avLst/>
-          </a:prstGeom>
-          <a:noFill/>
-          <a:ln/>
-        </p:spPr>
-        <p:txBody>
-          <a:bodyPr wrap="square" lIns="0" tIns="0" rIns="0" bIns="0" rtlCol="0" anchor="ctr"/>
-          <a:lstStyle/>
-          <a:p>
-            <a:pPr indent="0" marL="0">
-              <a:lnSpc>
-                <a:spcPct val="120000"/>
-              </a:lnSpc>
-              <a:buNone/>
-            </a:pPr>
-            <a:r>
-              <a:rPr lang="en-US" sz="1400" dirty="0">
-                <a:solidFill>
-                  <a:srgbClr val="718096"/>
-                </a:solidFill>
-                <a:latin typeface="Pretendard" pitchFamily="34" charset="0"/>
-                <a:ea typeface="Pretendard" pitchFamily="34" charset="-122"/>
-                <a:cs typeface="Pretendard" pitchFamily="34" charset="-120"/>
-              </a:rPr>
-              <a:t>승강기</a:t>
-            </a:r>
-            <a:endParaRPr lang="en-US" sz="1400" dirty="0"/>
-          </a:p>
-        </p:txBody>
-      </p:sp>
-      <p:sp>
-        <p:nvSpPr>
-          <p:cNvPr id="23" name="Text 21"/>
-          <p:cNvSpPr/>
-          <p:nvPr/>
-        </p:nvSpPr>
-        <p:spPr>
-          <a:xfrm>
-            <a:off x="3172968" y="3657600"/>
-            <a:ext cx="4251960" cy="402336"/>
-          </a:xfrm>
-          <a:prstGeom prst="rect">
-            <a:avLst/>
-          </a:prstGeom>
-          <a:noFill/>
-          <a:ln/>
-        </p:spPr>
-        <p:txBody>
-          <a:bodyPr wrap="square" lIns="0" tIns="0" rIns="0" bIns="0" rtlCol="0" anchor="ctr"/>
-          <a:lstStyle/>
-          <a:p>
-            <a:pPr indent="0" marL="0">
-              <a:lnSpc>
-                <a:spcPct val="120000"/>
-              </a:lnSpc>
-              <a:buNone/>
-            </a:pPr>
-            <a:r>
-              <a:rPr lang="en-US" sz="1400" b="1" dirty="0">
-                <a:solidFill>
-                  <a:srgbClr val="10161F"/>
-                </a:solidFill>
-                <a:latin typeface="Pretendard" pitchFamily="34" charset="0"/>
-                <a:ea typeface="Pretendard" pitchFamily="34" charset="-122"/>
-                <a:cs typeface="Pretendard" pitchFamily="34" charset="-120"/>
-              </a:rPr>
-              <a:t>1대 (15인승 침대용)</a:t>
-            </a:r>
-            <a:endParaRPr lang="en-US" sz="1400" dirty="0"/>
-          </a:p>
-        </p:txBody>
-      </p:sp>
-      <p:sp>
-        <p:nvSpPr>
-          <p:cNvPr id="24" name="Shape 22"/>
-          <p:cNvSpPr/>
-          <p:nvPr/>
-        </p:nvSpPr>
-        <p:spPr>
-          <a:xfrm>
-            <a:off x="566928" y="4059936"/>
-            <a:ext cx="6858000" cy="0"/>
-          </a:xfrm>
-          <a:prstGeom prst="line">
-            <a:avLst/>
-          </a:prstGeom>
-          <a:noFill/>
-          <a:ln w="3810">
-            <a:solidFill>
-              <a:srgbClr val="CBD5E0"/>
-            </a:solidFill>
-            <a:prstDash val="solid"/>
-          </a:ln>
-        </p:spPr>
-      </p:sp>
-      <p:sp>
-        <p:nvSpPr>
-          <p:cNvPr id="25" name="Text 23"/>
-          <p:cNvSpPr/>
-          <p:nvPr/>
-        </p:nvSpPr>
-        <p:spPr>
-          <a:xfrm>
-            <a:off x="566928" y="4059936"/>
-            <a:ext cx="2606040" cy="402336"/>
-          </a:xfrm>
-          <a:prstGeom prst="rect">
-            <a:avLst/>
-          </a:prstGeom>
-          <a:noFill/>
-          <a:ln/>
-        </p:spPr>
-        <p:txBody>
-          <a:bodyPr wrap="square" lIns="0" tIns="0" rIns="0" bIns="0" rtlCol="0" anchor="ctr"/>
-          <a:lstStyle/>
-          <a:p>
-            <a:pPr indent="0" marL="0">
-              <a:lnSpc>
-                <a:spcPct val="120000"/>
-              </a:lnSpc>
-              <a:buNone/>
-            </a:pPr>
-            <a:r>
-              <a:rPr lang="en-US" sz="1400" dirty="0">
-                <a:solidFill>
-                  <a:srgbClr val="718096"/>
-                </a:solidFill>
-                <a:latin typeface="Pretendard" pitchFamily="34" charset="0"/>
-                <a:ea typeface="Pretendard" pitchFamily="34" charset="-122"/>
-                <a:cs typeface="Pretendard" pitchFamily="34" charset="-120"/>
-              </a:rPr>
-              <a:t>주차 대수</a:t>
-            </a:r>
-            <a:endParaRPr lang="en-US" sz="1400" dirty="0"/>
-          </a:p>
-        </p:txBody>
-      </p:sp>
-      <p:sp>
-        <p:nvSpPr>
-          <p:cNvPr id="26" name="Text 24"/>
-          <p:cNvSpPr/>
-          <p:nvPr/>
-        </p:nvSpPr>
-        <p:spPr>
-          <a:xfrm>
-            <a:off x="3172968" y="4059936"/>
-            <a:ext cx="4251960" cy="402336"/>
-          </a:xfrm>
-          <a:prstGeom prst="rect">
-            <a:avLst/>
-          </a:prstGeom>
-          <a:noFill/>
-          <a:ln/>
-        </p:spPr>
-        <p:txBody>
-          <a:bodyPr wrap="square" lIns="0" tIns="0" rIns="0" bIns="0" rtlCol="0" anchor="ctr"/>
-          <a:lstStyle/>
-          <a:p>
-            <a:pPr indent="0" marL="0">
-              <a:lnSpc>
-                <a:spcPct val="120000"/>
-              </a:lnSpc>
-              <a:buNone/>
-            </a:pPr>
-            <a:r>
-              <a:rPr lang="en-US" sz="1400" b="1" dirty="0">
-                <a:solidFill>
-                  <a:srgbClr val="10161F"/>
-                </a:solidFill>
-                <a:latin typeface="Pretendard" pitchFamily="34" charset="0"/>
-                <a:ea typeface="Pretendard" pitchFamily="34" charset="-122"/>
-                <a:cs typeface="Pretendard" pitchFamily="34" charset="-120"/>
-              </a:rPr>
-              <a:t>18대 (자주식 완비)</a:t>
-            </a:r>
-            <a:endParaRPr lang="en-US" sz="1400" dirty="0"/>
-          </a:p>
-        </p:txBody>
-      </p:sp>
-      <p:sp>
-        <p:nvSpPr>
-          <p:cNvPr id="27" name="Shape 25"/>
-          <p:cNvSpPr/>
-          <p:nvPr/>
-        </p:nvSpPr>
-        <p:spPr>
-          <a:xfrm>
-            <a:off x="566928" y="4462272"/>
-            <a:ext cx="6858000" cy="0"/>
-          </a:xfrm>
-          <a:prstGeom prst="line">
-            <a:avLst/>
-          </a:prstGeom>
-          <a:noFill/>
-          <a:ln w="3810">
-            <a:solidFill>
-              <a:srgbClr val="CBD5E0"/>
-            </a:solidFill>
-            <a:prstDash val="solid"/>
-          </a:ln>
-        </p:spPr>
-      </p:sp>
-      <p:sp>
-        <p:nvSpPr>
-          <p:cNvPr id="28" name="Text 26"/>
-          <p:cNvSpPr/>
-          <p:nvPr/>
-        </p:nvSpPr>
-        <p:spPr>
-          <a:xfrm>
-            <a:off x="566928" y="4462272"/>
-            <a:ext cx="2606040" cy="402336"/>
-          </a:xfrm>
-          <a:prstGeom prst="rect">
-            <a:avLst/>
-          </a:prstGeom>
-          <a:noFill/>
-          <a:ln/>
-        </p:spPr>
-        <p:txBody>
-          <a:bodyPr wrap="square" lIns="0" tIns="0" rIns="0" bIns="0" rtlCol="0" anchor="ctr"/>
-          <a:lstStyle/>
-          <a:p>
-            <a:pPr indent="0" marL="0">
-              <a:lnSpc>
-                <a:spcPct val="120000"/>
-              </a:lnSpc>
-              <a:buNone/>
-            </a:pPr>
-            <a:r>
-              <a:rPr lang="en-US" sz="1400" dirty="0">
-                <a:solidFill>
-                  <a:srgbClr val="718096"/>
-                </a:solidFill>
-                <a:latin typeface="Pretendard" pitchFamily="34" charset="0"/>
-                <a:ea typeface="Pretendard" pitchFamily="34" charset="-122"/>
-                <a:cs typeface="Pretendard" pitchFamily="34" charset="-120"/>
-              </a:rPr>
-              <a:t>주구조</a:t>
-            </a:r>
-            <a:endParaRPr lang="en-US" sz="1400" dirty="0"/>
-          </a:p>
-        </p:txBody>
-      </p:sp>
-      <p:sp>
-        <p:nvSpPr>
-          <p:cNvPr id="29" name="Text 27"/>
-          <p:cNvSpPr/>
-          <p:nvPr/>
-        </p:nvSpPr>
-        <p:spPr>
-          <a:xfrm>
-            <a:off x="3172968" y="4462272"/>
-            <a:ext cx="4251960" cy="402336"/>
-          </a:xfrm>
-          <a:prstGeom prst="rect">
-            <a:avLst/>
-          </a:prstGeom>
-          <a:noFill/>
-          <a:ln/>
-        </p:spPr>
-        <p:txBody>
-          <a:bodyPr wrap="square" lIns="0" tIns="0" rIns="0" bIns="0" rtlCol="0" anchor="ctr"/>
-          <a:lstStyle/>
-          <a:p>
-            <a:pPr indent="0" marL="0">
-              <a:lnSpc>
-                <a:spcPct val="120000"/>
-              </a:lnSpc>
-              <a:buNone/>
-            </a:pPr>
-            <a:r>
-              <a:rPr lang="en-US" sz="1400" b="1" dirty="0">
-                <a:solidFill>
-                  <a:srgbClr val="10161F"/>
-                </a:solidFill>
-                <a:latin typeface="Pretendard" pitchFamily="34" charset="0"/>
-                <a:ea typeface="Pretendard" pitchFamily="34" charset="-122"/>
-                <a:cs typeface="Pretendard" pitchFamily="34" charset="-120"/>
-              </a:rPr>
-              <a:t>철근콘크리트구조</a:t>
-            </a:r>
-            <a:endParaRPr lang="en-US" sz="1400" dirty="0"/>
-          </a:p>
-        </p:txBody>
-      </p:sp>
-      <p:sp>
-        <p:nvSpPr>
-          <p:cNvPr id="30" name="Shape 28"/>
-          <p:cNvSpPr/>
-          <p:nvPr/>
-        </p:nvSpPr>
-        <p:spPr>
-          <a:xfrm>
-            <a:off x="566928" y="4864608"/>
-            <a:ext cx="6858000" cy="0"/>
-          </a:xfrm>
-          <a:prstGeom prst="line">
-            <a:avLst/>
-          </a:prstGeom>
-          <a:noFill/>
-          <a:ln w="3810">
-            <a:solidFill>
-              <a:srgbClr val="CBD5E0"/>
-            </a:solidFill>
-            <a:prstDash val="solid"/>
-          </a:ln>
-        </p:spPr>
-      </p:sp>
-      <p:sp>
-        <p:nvSpPr>
-          <p:cNvPr id="31" name="Text 29"/>
-          <p:cNvSpPr/>
-          <p:nvPr/>
-        </p:nvSpPr>
-        <p:spPr>
-          <a:xfrm>
-            <a:off x="566928" y="4864608"/>
-            <a:ext cx="2606040" cy="402336"/>
-          </a:xfrm>
-          <a:prstGeom prst="rect">
-            <a:avLst/>
-          </a:prstGeom>
-          <a:noFill/>
-          <a:ln/>
-        </p:spPr>
-        <p:txBody>
-          <a:bodyPr wrap="square" lIns="0" tIns="0" rIns="0" bIns="0" rtlCol="0" anchor="ctr"/>
-          <a:lstStyle/>
-          <a:p>
-            <a:pPr indent="0" marL="0">
-              <a:lnSpc>
-                <a:spcPct val="120000"/>
-              </a:lnSpc>
-              <a:buNone/>
-            </a:pPr>
-            <a:r>
-              <a:rPr lang="en-US" sz="1400" dirty="0">
-                <a:solidFill>
-                  <a:srgbClr val="718096"/>
-                </a:solidFill>
-                <a:latin typeface="Pretendard" pitchFamily="34" charset="0"/>
-                <a:ea typeface="Pretendard" pitchFamily="34" charset="-122"/>
-                <a:cs typeface="Pretendard" pitchFamily="34" charset="-120"/>
-              </a:rPr>
-              <a:t>매매 희망가</a:t>
-            </a:r>
-            <a:endParaRPr lang="en-US" sz="1400" dirty="0"/>
-          </a:p>
-        </p:txBody>
-      </p:sp>
-      <p:sp>
-        <p:nvSpPr>
-          <p:cNvPr id="32" name="Text 30"/>
-          <p:cNvSpPr/>
-          <p:nvPr/>
-        </p:nvSpPr>
-        <p:spPr>
-          <a:xfrm>
-            <a:off x="3172968" y="4864608"/>
-            <a:ext cx="4251960" cy="402336"/>
-          </a:xfrm>
-          <a:prstGeom prst="rect">
-            <a:avLst/>
-          </a:prstGeom>
-          <a:noFill/>
-          <a:ln/>
-        </p:spPr>
-        <p:txBody>
-          <a:bodyPr wrap="square" lIns="0" tIns="0" rIns="0" bIns="0" rtlCol="0" anchor="ctr"/>
-          <a:lstStyle/>
-          <a:p>
-            <a:pPr indent="0" marL="0">
-              <a:lnSpc>
-                <a:spcPct val="120000"/>
-              </a:lnSpc>
-              <a:buNone/>
-            </a:pPr>
-            <a:r>
-              <a:rPr lang="en-US" sz="1400" b="1" dirty="0">
-                <a:solidFill>
-                  <a:srgbClr val="10161F"/>
-                </a:solidFill>
-                <a:latin typeface="Pretendard" pitchFamily="34" charset="0"/>
-                <a:ea typeface="Pretendard" pitchFamily="34" charset="-122"/>
-                <a:cs typeface="Pretendard" pitchFamily="34" charset="-120"/>
-              </a:rPr>
-              <a:t>180억</a:t>
-            </a:r>
-            <a:endParaRPr lang="en-US" sz="1400" dirty="0"/>
-          </a:p>
-        </p:txBody>
-      </p:sp>
-      <p:sp>
-        <p:nvSpPr>
-          <p:cNvPr id="33" name="Shape 31"/>
           <p:cNvSpPr/>
           <p:nvPr/>
         </p:nvSpPr>
@@ -6525,18 +6097,18 @@
       </p:sp>
       <p:sp>
         <p:nvSpPr>
-          <p:cNvPr id="34" name="Shape 32"/>
+          <p:cNvPr id="22" name="Shape 20"/>
           <p:cNvSpPr/>
           <p:nvPr/>
         </p:nvSpPr>
         <p:spPr>
           <a:xfrm>
             <a:off x="7784287" y="1645920"/>
-            <a:ext cx="3840480" cy="1645920"/>
+            <a:ext cx="3840480" cy="2103120"/>
           </a:xfrm>
           <a:prstGeom prst="roundRect">
             <a:avLst>
-              <a:gd name="adj" fmla="val 3333"/>
+              <a:gd name="adj" fmla="val 2609"/>
             </a:avLst>
           </a:prstGeom>
           <a:solidFill>
@@ -6547,14 +6119,14 @@
       </p:sp>
       <p:sp>
         <p:nvSpPr>
-          <p:cNvPr id="35" name="Shape 33"/>
+          <p:cNvPr id="23" name="Shape 21"/>
           <p:cNvSpPr/>
           <p:nvPr/>
         </p:nvSpPr>
         <p:spPr>
           <a:xfrm>
             <a:off x="7784287" y="1700784"/>
-            <a:ext cx="36576" cy="1536192"/>
+            <a:ext cx="36576" cy="1993392"/>
           </a:xfrm>
           <a:prstGeom prst="rect">
             <a:avLst/>
@@ -6567,7 +6139,7 @@
       </p:sp>
       <p:sp>
         <p:nvSpPr>
-          <p:cNvPr id="36" name="Text 34"/>
+          <p:cNvPr id="24" name="Text 22"/>
           <p:cNvSpPr/>
           <p:nvPr/>
         </p:nvSpPr>
@@ -6589,20 +6161,31 @@
             <a:pPr indent="0" marL="0">
               <a:buNone/>
             </a:pPr>
+            <a:r>
+              <a:rPr lang="en-US" sz="1050" b="1" dirty="0">
+                <a:solidFill>
+                  <a:srgbClr val="2B6CB0"/>
+                </a:solidFill>
+                <a:latin typeface="Pretendard" pitchFamily="34" charset="0"/>
+                <a:ea typeface="Pretendard" pitchFamily="34" charset="-122"/>
+                <a:cs typeface="Pretendard" pitchFamily="34" charset="-120"/>
+              </a:rPr>
+              <a:t>토지 및 건물 분석 포인트</a:t>
+            </a:r>
             <a:endParaRPr lang="en-US" sz="1050" dirty="0"/>
           </a:p>
         </p:txBody>
       </p:sp>
       <p:sp>
         <p:nvSpPr>
-          <p:cNvPr id="37" name="Text 35"/>
+          <p:cNvPr id="25" name="Text 23"/>
           <p:cNvSpPr/>
           <p:nvPr/>
         </p:nvSpPr>
         <p:spPr>
           <a:xfrm>
             <a:off x="7967167" y="1975104"/>
-            <a:ext cx="3511296" cy="1243584"/>
+            <a:ext cx="3511296" cy="1700784"/>
           </a:xfrm>
           <a:prstGeom prst="rect">
             <a:avLst/>
@@ -6614,11 +6197,12 @@
           <a:bodyPr wrap="square" lIns="0" tIns="0" rIns="0" bIns="0" rtlCol="0" anchor="t"/>
           <a:lstStyle/>
           <a:p>
-            <a:pPr indent="0" marL="0">
+            <a:pPr marL="342900" indent="-342900">
               <a:lnSpc>
                 <a:spcPct val="120000"/>
               </a:lnSpc>
-              <a:buNone/>
+              <a:buSzPct val="100000"/>
+              <a:buChar char="•"/>
             </a:pPr>
             <a:r>
               <a:rPr lang="en-US" sz="930" dirty="0">
@@ -6629,15 +6213,223 @@
                 <a:ea typeface="Pretendard" pitchFamily="34" charset="-122"/>
                 <a:cs typeface="Pretendard" pitchFamily="34" charset="-120"/>
               </a:rPr>
-              <a:t>본 매물은 한남권역 입지의 안정적 운영 자산입니다.</a:t>
+              <a:t>물건 접면 도로 및 교통 여건은 현장 확인 사항입니다</a:t>
             </a:r>
             <a:endParaRPr lang="en-US" sz="930" dirty="0"/>
           </a:p>
-        </p:txBody>
-      </p:sp>
-      <p:sp>
-        <p:nvSpPr>
-          <p:cNvPr id="38" name="Text 36"/>
+          <a:p>
+            <a:pPr marL="342900" indent="-342900">
+              <a:lnSpc>
+                <a:spcPct val="120000"/>
+              </a:lnSpc>
+              <a:buSzPct val="100000"/>
+              <a:buChar char="•"/>
+            </a:pPr>
+            <a:r>
+              <a:rPr lang="en-US" sz="930" dirty="0">
+                <a:solidFill>
+                  <a:srgbClr val="10161F"/>
+                </a:solidFill>
+                <a:latin typeface="Pretendard" pitchFamily="34" charset="0"/>
+                <a:ea typeface="Pretendard" pitchFamily="34" charset="-122"/>
+                <a:cs typeface="Pretendard" pitchFamily="34" charset="-120"/>
+              </a:rPr>
+              <a:t>상세 건물 제원은 실사 자료를 참조하시기 바랍니다</a:t>
+            </a:r>
+            <a:endParaRPr lang="en-US" sz="930" dirty="0"/>
+          </a:p>
+          <a:p>
+            <a:pPr marL="342900" indent="-342900">
+              <a:lnSpc>
+                <a:spcPct val="120000"/>
+              </a:lnSpc>
+              <a:buSzPct val="100000"/>
+              <a:buChar char="•"/>
+            </a:pPr>
+            <a:r>
+              <a:rPr lang="en-US" sz="930" dirty="0">
+                <a:solidFill>
+                  <a:srgbClr val="10161F"/>
+                </a:solidFill>
+                <a:latin typeface="Pretendard" pitchFamily="34" charset="0"/>
+                <a:ea typeface="Pretendard" pitchFamily="34" charset="-122"/>
+                <a:cs typeface="Pretendard" pitchFamily="34" charset="-120"/>
+              </a:rPr>
+              <a:t>건물 현황 및 규모는 첨부 대장을 기준으로 합니다</a:t>
+            </a:r>
+            <a:endParaRPr lang="en-US" sz="930" dirty="0"/>
+          </a:p>
+        </p:txBody>
+      </p:sp>
+      <p:sp>
+        <p:nvSpPr>
+          <p:cNvPr id="26" name="Shape 24"/>
+          <p:cNvSpPr/>
+          <p:nvPr/>
+        </p:nvSpPr>
+        <p:spPr>
+          <a:xfrm>
+            <a:off x="7784287" y="3977640"/>
+            <a:ext cx="3840480" cy="2148840"/>
+          </a:xfrm>
+          <a:prstGeom prst="roundRect">
+            <a:avLst>
+              <a:gd name="adj" fmla="val 2553"/>
+            </a:avLst>
+          </a:prstGeom>
+          <a:solidFill>
+            <a:srgbClr val="BEE3F8"/>
+          </a:solidFill>
+          <a:ln/>
+        </p:spPr>
+      </p:sp>
+      <p:sp>
+        <p:nvSpPr>
+          <p:cNvPr id="27" name="Shape 25"/>
+          <p:cNvSpPr/>
+          <p:nvPr/>
+        </p:nvSpPr>
+        <p:spPr>
+          <a:xfrm>
+            <a:off x="7784287" y="4032504"/>
+            <a:ext cx="36576" cy="2039112"/>
+          </a:xfrm>
+          <a:prstGeom prst="rect">
+            <a:avLst/>
+          </a:prstGeom>
+          <a:solidFill>
+            <a:srgbClr val="2B6CB0"/>
+          </a:solidFill>
+          <a:ln/>
+        </p:spPr>
+      </p:sp>
+      <p:sp>
+        <p:nvSpPr>
+          <p:cNvPr id="28" name="Text 26"/>
+          <p:cNvSpPr/>
+          <p:nvPr/>
+        </p:nvSpPr>
+        <p:spPr>
+          <a:xfrm>
+            <a:off x="7967167" y="4087368"/>
+            <a:ext cx="3511296" cy="201168"/>
+          </a:xfrm>
+          <a:prstGeom prst="rect">
+            <a:avLst/>
+          </a:prstGeom>
+          <a:noFill/>
+          <a:ln/>
+        </p:spPr>
+        <p:txBody>
+          <a:bodyPr wrap="square" lIns="0" tIns="0" rIns="0" bIns="0" rtlCol="0" anchor="ctr"/>
+          <a:lstStyle/>
+          <a:p>
+            <a:pPr indent="0" marL="0">
+              <a:buNone/>
+            </a:pPr>
+            <a:r>
+              <a:rPr lang="en-US" sz="1050" b="1" dirty="0">
+                <a:solidFill>
+                  <a:srgbClr val="2B6CB0"/>
+                </a:solidFill>
+                <a:latin typeface="Pretendard" pitchFamily="34" charset="0"/>
+                <a:ea typeface="Pretendard" pitchFamily="34" charset="-122"/>
+                <a:cs typeface="Pretendard" pitchFamily="34" charset="-120"/>
+              </a:rPr>
+              <a:t>물건 실사 및 관리 상태</a:t>
+            </a:r>
+            <a:endParaRPr lang="en-US" sz="1050" dirty="0"/>
+          </a:p>
+        </p:txBody>
+      </p:sp>
+      <p:sp>
+        <p:nvSpPr>
+          <p:cNvPr id="29" name="Text 27"/>
+          <p:cNvSpPr/>
+          <p:nvPr/>
+        </p:nvSpPr>
+        <p:spPr>
+          <a:xfrm>
+            <a:off x="7967167" y="4306824"/>
+            <a:ext cx="3511296" cy="1746504"/>
+          </a:xfrm>
+          <a:prstGeom prst="rect">
+            <a:avLst/>
+          </a:prstGeom>
+          <a:noFill/>
+          <a:ln/>
+        </p:spPr>
+        <p:txBody>
+          <a:bodyPr wrap="square" lIns="0" tIns="0" rIns="0" bIns="0" rtlCol="0" anchor="t"/>
+          <a:lstStyle/>
+          <a:p>
+            <a:pPr marL="342900" indent="-342900">
+              <a:lnSpc>
+                <a:spcPct val="120000"/>
+              </a:lnSpc>
+              <a:buSzPct val="100000"/>
+              <a:buChar char="•"/>
+            </a:pPr>
+            <a:r>
+              <a:rPr lang="en-US" sz="930" dirty="0">
+                <a:solidFill>
+                  <a:srgbClr val="10161F"/>
+                </a:solidFill>
+                <a:latin typeface="Pretendard" pitchFamily="34" charset="0"/>
+                <a:ea typeface="Pretendard" pitchFamily="34" charset="-122"/>
+                <a:cs typeface="Pretendard" pitchFamily="34" charset="-120"/>
+              </a:rPr>
+              <a:t>건물 상태 및 설비 현황은 실사 보고서를 참조하십시오</a:t>
+            </a:r>
+            <a:endParaRPr lang="en-US" sz="930" dirty="0"/>
+          </a:p>
+          <a:p>
+            <a:pPr marL="342900" indent="-342900">
+              <a:lnSpc>
+                <a:spcPct val="120000"/>
+              </a:lnSpc>
+              <a:buSzPct val="100000"/>
+              <a:buChar char="•"/>
+            </a:pPr>
+            <a:r>
+              <a:rPr lang="en-US" sz="930" dirty="0">
+                <a:solidFill>
+                  <a:srgbClr val="10161F"/>
+                </a:solidFill>
+                <a:latin typeface="Pretendard" pitchFamily="34" charset="0"/>
+                <a:ea typeface="Pretendard" pitchFamily="34" charset="-122"/>
+                <a:cs typeface="Pretendard" pitchFamily="34" charset="-120"/>
+              </a:rPr>
+              <a:t>자금 조달 및 대출 조건은 금융 자문 후 확정됩니다</a:t>
+            </a:r>
+            <a:endParaRPr lang="en-US" sz="930" dirty="0"/>
+          </a:p>
+          <a:p>
+            <a:pPr marL="342900" indent="-342900">
+              <a:lnSpc>
+                <a:spcPct val="120000"/>
+              </a:lnSpc>
+              <a:buSzPct val="100000"/>
+              <a:buChar char="•"/>
+            </a:pPr>
+            <a:r>
+              <a:rPr lang="en-US" sz="930" dirty="0">
+                <a:solidFill>
+                  <a:srgbClr val="10161F"/>
+                </a:solidFill>
+                <a:latin typeface="Pretendard" pitchFamily="34" charset="0"/>
+                <a:ea typeface="Pretendard" pitchFamily="34" charset="-122"/>
+                <a:cs typeface="Pretendard" pitchFamily="34" charset="-120"/>
+              </a:rPr>
+              <a:t>상세 실사 단계에서 구체적인 계약 조건 및 세무 검토가 진행됩니다</a:t>
+            </a:r>
+            <a:endParaRPr lang="en-US" sz="930" dirty="0"/>
+          </a:p>
+        </p:txBody>
+      </p:sp>
+      <p:sp>
+        <p:nvSpPr>
+          <p:cNvPr id="30" name="Text 28"/>
           <p:cNvSpPr/>
           <p:nvPr/>
         </p:nvSpPr>
@@ -6676,7 +6468,7 @@
       </p:sp>
       <p:sp>
         <p:nvSpPr>
-          <p:cNvPr id="39" name="Text 37"/>
+          <p:cNvPr id="31" name="Text 29"/>
           <p:cNvSpPr/>
           <p:nvPr/>
         </p:nvSpPr>
@@ -6915,7 +6707,7 @@
                 <a:ea typeface="Pretendard" pitchFamily="34" charset="-122"/>
                 <a:cs typeface="Pretendard" pitchFamily="34" charset="-120"/>
               </a:rPr>
-              <a:t>건축물 개요 및 물리 스펙</a:t>
+              <a:t>사옥 입주 적합성 분석</a:t>
             </a:r>
             <a:endParaRPr lang="en-US" sz="1100" dirty="0"/>
           </a:p>
@@ -6957,7 +6749,7 @@
                 <a:ea typeface="Pretendard" pitchFamily="34" charset="-122"/>
                 <a:cs typeface="Pretendard" pitchFamily="34" charset="-120"/>
               </a:rPr>
-              <a:t>{"ok"</a:t>
+              <a:t>층별 독점성</a:t>
             </a:r>
             <a:endParaRPr lang="en-US" sz="1400" dirty="0"/>
           </a:p>
@@ -6999,7 +6791,7 @@
                 <a:ea typeface="Pretendard" pitchFamily="34" charset="-122"/>
                 <a:cs typeface="Pretendard" pitchFamily="34" charset="-120"/>
               </a:rPr>
-              <a:t>true,"mocked":true,"extractedFields":{"area_signal":"역삼","asset_type":"오피스빌딩","price_band":"300억","size_signal":"3000평(약 9917.4㎡)"},"extractedFacts":{"region":"역삼","exactAddressCandidate":"역삼동 742-1","assetType":"오피스빌딩","priceText":"300억","sizeText":"3000평(약 9917.4㎡)","currentUse":"오피스","currentUseSignal":"근린생활시설","leaseSignal":"임대중","vacancySignal":"공실없음","tenantNames":"쿠팡","네이버","unitRentTexts":"301호: 1500만","sellerMotivationText":"자산 효율화","brokerNotes":"초역세권 매물"},"detectedSensitiveFields":"exact_address","tenant_name","ambiguousFields":,"warnings":,"areaSignal":"역삼","assetType":"오피스빌딩","priceBand":"300억","sizeSignal":"3000평(약 9917.4㎡)","dealType":"매각","buildingName":"역삼 센트럴타워","exactAddress":"역삼동 742-1","totalFloorArea":9917.3,"buildYear":2015,"currentUseSignal":"근린생활시설","vacancySignal":"공실 없음","fitSummary":"초역세권 근생 빌딩으로 시행/사옥 매입에 최적화","cautionSummary":"주요 임차 업종 만기 조율 필요","hiddenFields":"exact_address","seller_motivation","confidence":{"areaSignal":"confirmed","assetType":"confirmed","priceBand":"ai_hypothesis","fitSummary":"ai_hypothesis"},"missingData":"sizeSignal","boundaryNote":"본 자료는 실거래 통계 기반 참고치입니다.","buyerType":"법인 사옥형","budgetRange":{"min":50,"max":80,"display":"50억~80억"},"preferredRegions":"강남","성수","assetTypes":"꼬마빌딩","사옥용","purchasePurpose":"사옥용 매입","mustHave":"초역세권","주차","niceToHave":"테라스","루프탑","riskTolerance":"medium","financingNote":"자본금 50% 준비","missingQuestions":"구체적인 입주 시기가 언제인가요?","선호하는 수익률이 있나요?","privacyNotes":"연락처 비공개","fitReasons":"매수자 예산(50-80억)에 부합하는 매물입니다.","요청하신 성수/강남 권역에 해당합니다.","cautionReasons":"요청한 용도와 달리 명도 협의가 다소 필요합니다.","recommendedNextAction":"현장 답사 제안","kakaoMessage":"안녕하세요! 요청하신 조건에 부합하는 추천 매물이 있어 안내해 드립니다. 확인해보시고 피드백 부탁드립니다.","title":"강남 역삼역 초역세권 오피스 사옥용 빌딩 매각","shortSummary":"역삼역 도보 5분 거리의 준신축급 대형 오피스빌딩입니다.","dealPoints":"초역세권","사옥 최적","cautionPoints":"명도 조율 필요","hiddenInfoNotice":"보증금 및 지번은 인가 후 확인 가능","gateMessage":"G1 등급 등록이 필요합니다.","kakaoText":"강남 역삼역 오피스 빌딩 매각 안내입니다.","exactUnitCandidate":"101호","floor":"1층","areaSqmText":"150㎡","spaceType":"office","depositText":"5000만","monthlyRentText":"400만","maintenanceFeeText":"50만","availableFromText":"즉시입주","leaseTermMonthsText":"24","incentivesText":"렌트프리 2개월","restrictions":,"landlordIdentity":"김성수","currentTenant":"스타트업","vacancyReason":"이전 확장","rentNegotiation":"협의 가능","region":"성수동","areaSqm":150,"deposit":5000,"monthlyRent":400,"maintenanceFee":50,"availableFrom":"즉시입주","leaseTermMonths":24,"incentives":{"rentFreeMonths":2,"interiorSupport":"일부 인테리어 지원","freeRentDetail":"렌트프리 2개월 지원"},"shortSummaryLease":"성수역 도보 5분 거리 1층 리테일 상가 매물입니다."}</a:t>
+              <a:t>층별 사용 구조 확인 필요</a:t>
             </a:r>
             <a:endParaRPr lang="en-US" sz="1400" dirty="0"/>
           </a:p>
@@ -7008,6 +6800,220 @@
       <p:sp>
         <p:nvSpPr>
           <p:cNvPr id="9" name="Shape 7"/>
+          <p:cNvSpPr/>
+          <p:nvPr/>
+        </p:nvSpPr>
+        <p:spPr>
+          <a:xfrm>
+            <a:off x="566928" y="2048256"/>
+            <a:ext cx="6858000" cy="0"/>
+          </a:xfrm>
+          <a:prstGeom prst="line">
+            <a:avLst/>
+          </a:prstGeom>
+          <a:noFill/>
+          <a:ln w="3810">
+            <a:solidFill>
+              <a:srgbClr val="CBD5E0"/>
+            </a:solidFill>
+            <a:prstDash val="solid"/>
+          </a:ln>
+        </p:spPr>
+      </p:sp>
+      <p:sp>
+        <p:nvSpPr>
+          <p:cNvPr id="10" name="Text 8"/>
+          <p:cNvSpPr/>
+          <p:nvPr/>
+        </p:nvSpPr>
+        <p:spPr>
+          <a:xfrm>
+            <a:off x="566928" y="2048256"/>
+            <a:ext cx="2606040" cy="402336"/>
+          </a:xfrm>
+          <a:prstGeom prst="rect">
+            <a:avLst/>
+          </a:prstGeom>
+          <a:noFill/>
+          <a:ln/>
+        </p:spPr>
+        <p:txBody>
+          <a:bodyPr wrap="square" lIns="0" tIns="0" rIns="0" bIns="0" rtlCol="0" anchor="ctr"/>
+          <a:lstStyle/>
+          <a:p>
+            <a:pPr indent="0" marL="0">
+              <a:lnSpc>
+                <a:spcPct val="120000"/>
+              </a:lnSpc>
+              <a:buNone/>
+            </a:pPr>
+            <a:r>
+              <a:rPr lang="en-US" sz="1400" dirty="0">
+                <a:solidFill>
+                  <a:srgbClr val="718096"/>
+                </a:solidFill>
+                <a:latin typeface="Pretendard" pitchFamily="34" charset="0"/>
+                <a:ea typeface="Pretendard" pitchFamily="34" charset="-122"/>
+                <a:cs typeface="Pretendard" pitchFamily="34" charset="-120"/>
+              </a:rPr>
+              <a:t>주차 및 접근성</a:t>
+            </a:r>
+            <a:endParaRPr lang="en-US" sz="1400" dirty="0"/>
+          </a:p>
+        </p:txBody>
+      </p:sp>
+      <p:sp>
+        <p:nvSpPr>
+          <p:cNvPr id="11" name="Text 9"/>
+          <p:cNvSpPr/>
+          <p:nvPr/>
+        </p:nvSpPr>
+        <p:spPr>
+          <a:xfrm>
+            <a:off x="3172968" y="2048256"/>
+            <a:ext cx="4251960" cy="402336"/>
+          </a:xfrm>
+          <a:prstGeom prst="rect">
+            <a:avLst/>
+          </a:prstGeom>
+          <a:noFill/>
+          <a:ln/>
+        </p:spPr>
+        <p:txBody>
+          <a:bodyPr wrap="square" lIns="0" tIns="0" rIns="0" bIns="0" rtlCol="0" anchor="ctr"/>
+          <a:lstStyle/>
+          <a:p>
+            <a:pPr indent="0" marL="0">
+              <a:lnSpc>
+                <a:spcPct val="120000"/>
+              </a:lnSpc>
+              <a:buNone/>
+            </a:pPr>
+            <a:r>
+              <a:rPr lang="en-US" sz="1400" b="1" dirty="0">
+                <a:solidFill>
+                  <a:srgbClr val="10161F"/>
+                </a:solidFill>
+                <a:latin typeface="Pretendard" pitchFamily="34" charset="0"/>
+                <a:ea typeface="Pretendard" pitchFamily="34" charset="-122"/>
+                <a:cs typeface="Pretendard" pitchFamily="34" charset="-120"/>
+              </a:rPr>
+              <a:t>지상/지하 주차 및 대중교통 우수</a:t>
+            </a:r>
+            <a:endParaRPr lang="en-US" sz="1400" dirty="0"/>
+          </a:p>
+        </p:txBody>
+      </p:sp>
+      <p:sp>
+        <p:nvSpPr>
+          <p:cNvPr id="12" name="Shape 10"/>
+          <p:cNvSpPr/>
+          <p:nvPr/>
+        </p:nvSpPr>
+        <p:spPr>
+          <a:xfrm>
+            <a:off x="566928" y="2450592"/>
+            <a:ext cx="6858000" cy="0"/>
+          </a:xfrm>
+          <a:prstGeom prst="line">
+            <a:avLst/>
+          </a:prstGeom>
+          <a:noFill/>
+          <a:ln w="3810">
+            <a:solidFill>
+              <a:srgbClr val="CBD5E0"/>
+            </a:solidFill>
+            <a:prstDash val="solid"/>
+          </a:ln>
+        </p:spPr>
+      </p:sp>
+      <p:sp>
+        <p:nvSpPr>
+          <p:cNvPr id="13" name="Text 11"/>
+          <p:cNvSpPr/>
+          <p:nvPr/>
+        </p:nvSpPr>
+        <p:spPr>
+          <a:xfrm>
+            <a:off x="566928" y="2450592"/>
+            <a:ext cx="2606040" cy="402336"/>
+          </a:xfrm>
+          <a:prstGeom prst="rect">
+            <a:avLst/>
+          </a:prstGeom>
+          <a:noFill/>
+          <a:ln/>
+        </p:spPr>
+        <p:txBody>
+          <a:bodyPr wrap="square" lIns="0" tIns="0" rIns="0" bIns="0" rtlCol="0" anchor="ctr"/>
+          <a:lstStyle/>
+          <a:p>
+            <a:pPr indent="0" marL="0">
+              <a:lnSpc>
+                <a:spcPct val="120000"/>
+              </a:lnSpc>
+              <a:buNone/>
+            </a:pPr>
+            <a:r>
+              <a:rPr lang="en-US" sz="1400" dirty="0">
+                <a:solidFill>
+                  <a:srgbClr val="718096"/>
+                </a:solidFill>
+                <a:latin typeface="Pretendard" pitchFamily="34" charset="0"/>
+                <a:ea typeface="Pretendard" pitchFamily="34" charset="-122"/>
+                <a:cs typeface="Pretendard" pitchFamily="34" charset="-120"/>
+              </a:rPr>
+              <a:t>파사드 브랜딩</a:t>
+            </a:r>
+            <a:endParaRPr lang="en-US" sz="1400" dirty="0"/>
+          </a:p>
+        </p:txBody>
+      </p:sp>
+      <p:sp>
+        <p:nvSpPr>
+          <p:cNvPr id="14" name="Text 12"/>
+          <p:cNvSpPr/>
+          <p:nvPr/>
+        </p:nvSpPr>
+        <p:spPr>
+          <a:xfrm>
+            <a:off x="3172968" y="2450592"/>
+            <a:ext cx="4251960" cy="402336"/>
+          </a:xfrm>
+          <a:prstGeom prst="rect">
+            <a:avLst/>
+          </a:prstGeom>
+          <a:noFill/>
+          <a:ln/>
+        </p:spPr>
+        <p:txBody>
+          <a:bodyPr wrap="square" lIns="0" tIns="0" rIns="0" bIns="0" rtlCol="0" anchor="ctr"/>
+          <a:lstStyle/>
+          <a:p>
+            <a:pPr indent="0" marL="0">
+              <a:lnSpc>
+                <a:spcPct val="120000"/>
+              </a:lnSpc>
+              <a:buNone/>
+            </a:pPr>
+            <a:r>
+              <a:rPr lang="en-US" sz="1400" b="1" dirty="0">
+                <a:solidFill>
+                  <a:srgbClr val="10161F"/>
+                </a:solidFill>
+                <a:latin typeface="Pretendard" pitchFamily="34" charset="0"/>
+                <a:ea typeface="Pretendard" pitchFamily="34" charset="-122"/>
+                <a:cs typeface="Pretendard" pitchFamily="34" charset="-120"/>
+              </a:rPr>
+              <a:t>건물 외벽 사인물 가능 여부 확인 필요</a:t>
+            </a:r>
+            <a:endParaRPr lang="en-US" sz="1400" dirty="0"/>
+          </a:p>
+        </p:txBody>
+      </p:sp>
+      <p:sp>
+        <p:nvSpPr>
+          <p:cNvPr id="15" name="Shape 13"/>
           <p:cNvSpPr/>
           <p:nvPr/>
         </p:nvSpPr>
@@ -7030,7 +7036,7 @@
       </p:sp>
       <p:sp>
         <p:nvSpPr>
-          <p:cNvPr id="10" name="Shape 8"/>
+          <p:cNvPr id="16" name="Shape 14"/>
           <p:cNvSpPr/>
           <p:nvPr/>
         </p:nvSpPr>
@@ -7052,7 +7058,7 @@
       </p:sp>
       <p:sp>
         <p:nvSpPr>
-          <p:cNvPr id="11" name="Shape 9"/>
+          <p:cNvPr id="17" name="Shape 15"/>
           <p:cNvSpPr/>
           <p:nvPr/>
         </p:nvSpPr>
@@ -7072,7 +7078,7 @@
       </p:sp>
       <p:sp>
         <p:nvSpPr>
-          <p:cNvPr id="12" name="Text 10"/>
+          <p:cNvPr id="18" name="Text 16"/>
           <p:cNvSpPr/>
           <p:nvPr/>
         </p:nvSpPr>
@@ -7100,7 +7106,7 @@
       </p:sp>
       <p:sp>
         <p:nvSpPr>
-          <p:cNvPr id="13" name="Text 11"/>
+          <p:cNvPr id="19" name="Text 17"/>
           <p:cNvSpPr/>
           <p:nvPr/>
         </p:nvSpPr>
@@ -7134,7 +7140,7 @@
                 <a:ea typeface="Pretendard" pitchFamily="34" charset="-122"/>
                 <a:cs typeface="Pretendard" pitchFamily="34" charset="-120"/>
               </a:rPr>
-              <a:t>{"ok":true,"mocked":true,"extractedFields":{"area_signal":"역삼","asset_type":"오피스빌딩","price_band":"300억","size_signal":"3</a:t>
+              <a:t>본 자산은 연면적 약 1513평(약 5001.7㎡) (대지 약 303평(약 1001.7㎡)) 규모로, 본사 사옥 및 대형 사업장 입주에 적합한 공간 스펙을 갖추고 있습니다. ### 입주 적합성 지표</a:t>
             </a:r>
             <a:endParaRPr lang="en-US" sz="930" dirty="0"/>
           </a:p>
@@ -7142,7 +7148,7 @@
       </p:sp>
       <p:sp>
         <p:nvSpPr>
-          <p:cNvPr id="14" name="Text 12"/>
+          <p:cNvPr id="20" name="Text 18"/>
           <p:cNvSpPr/>
           <p:nvPr/>
         </p:nvSpPr>
@@ -7181,7 +7187,7 @@
       </p:sp>
       <p:sp>
         <p:nvSpPr>
-          <p:cNvPr id="15" name="Text 13"/>
+          <p:cNvPr id="21" name="Text 19"/>
           <p:cNvSpPr/>
           <p:nvPr/>
         </p:nvSpPr>
@@ -7498,7 +7504,7 @@
                 <a:ea typeface="Pretendard" pitchFamily="34" charset="-122"/>
                 <a:cs typeface="Pretendard" pitchFamily="34" charset="-120"/>
               </a:rPr>
-              <a:t>{"ok":true,"mocked":true,"extractedFields":{"area_signal":"역삼","asset_type":"오피스빌딩","price_band":"300억","size_signal":"3000평(약 9917.4㎡)"},"extractedFacts":{"region":"역삼","exactAddressCandidate":"역삼동 742-1","assetType":"오피스빌딩","priceText":"300억","sizeText":"3000평(약 9917.4㎡)","currentUse":"오피스","currentUseSignal":"근린생활시설","leaseSignal":"임대중","vacancySignal":"공실없음","tenantNames":["쿠팡","네이버"],"unitRentTexts":["301호: 1500만"],"sellerMotivationText":"자산 효율화","brokerNotes":["초역세권 매물"]},"detectedSensitiveFields":["exact_address","tenant_name"],"ambiguousFields":[],"warnings":[],"areaSignal":"역삼","assetType":"오피스빌딩","priceBand":"300억","sizeSignal":"3000평(약 9917.4㎡)","dealType":"매각","buildingName":"역삼 센트럴타워","exactAddress":"역삼동 742-1","totalFloorArea":9917.3,"buildYear":2015,"currentUseSignal":"근린생활시설","vacancySignal":"공실 없음","fitSummary":"초역세권 근생 빌딩으로 시행/사옥 매입에 최적화","cautionSummary":"주요 임차 업종 만기 조율 필요","hiddenFields":["exact_address","seller_motivation"],"confidence":{"areaSignal":"confirmed","assetType":"confirmed","priceBand":"ai_hypothesis","fitSummary":"ai_hypothesis"},"missingData":["sizeSignal"],"boundaryNote":"본 자료는 실거래 통계 기반 참고치입니다.","buyerType":"법인 사옥형","budgetRange":{"min":50,"max":80,"display":"50억~80억"},"preferredRegions":["강남","성수"],"assetTypes":["꼬마빌딩","사옥용"],"purchasePurpose":"사옥용 매입","mustHave":["초역세권","주차"],"niceToHave":["테라스","루프탑"],"riskTolerance":"medium","financingNote":"자본금 50% 준비","missingQuestions":["구체적인 입주 시기가 언제인가요?","선호하는 수익률이 있나요?"],"privacyNotes":["연락처 비공개"],"fitReasons":["매수자 예산(50-80억)에 부합하는 매물입니다.","요청하신 성수/강남 권역에 해당합니다."],"cautionReasons":["요청한 용도와 달리 명도 협의가 다소 필요합니다."],"recommendedNextAction":"현장 답사 제안","kakaoMessage":"안녕하세요! 요청하신 조건에 부합하는 추천 매물이 있어 안내해 드립니다. 확인해보시고 피드백 부탁드립니다.","title":"강남 역삼역 초역세권 오피스 사옥용 빌딩 매각","shortSummary":"역삼역 도보 5분 거리의 준신축급 대형 오피스빌딩입니다.","dealPoints":["초역세권","사옥 최적"],"cautionPoints":["명도 조율 필요"],"hiddenInfoNotice":["보증금 및 지번은 인가 후 확인 가능"],"gateMessage":"G1 등급 등록이 필요합니다.","kakaoText":"강남 역삼역 오피스 빌딩 매각 안내입니다.","exactUnitCandidate":"101호","floor":"1층","areaSqmText":"150㎡","spaceType":"office","depositText":"5000만","monthlyRentText":"400만","maintenanceFeeText":"50만","availableFromText":"즉시입주","leaseTermMonthsText":"24","incentivesText":"렌트프리 2개월","restrictions":[],"landlordIdentity":"김성수","currentTenant":"스타트업","vacancyReason":"이전 확장","rentNegotiation":"협의 가능","region":"성수동","areaSqm":150,"deposit":5000,"monthlyRent":400,"maintenanceFee":50,"availableFrom":"즉시입주","leaseTermMonths":24,"incentives":{"rentFreeMonths":2,"interiorSupport":"일부 인테리어 지원","freeRentDetail":"렌트프리 2개월 지원"},"shortSummaryLease":"성수역 도보 5분 거리 1층 리테일 상가 매물입니다."}</a:t>
+              <a:t>{"ok":true,"mocked":true,"extractedFields":{"area_signal":"역삼","asset_type":"오피스빌딩","price_band":"300억","size_signal":"3000평(약 9917.4㎡)"},"extractedFacts":{"region":"역삼","exactAddressCandidate":"역삼동 742-1","assetType":"오피스빌딩","priceText":"300억","sizeText":"3000평(약 9917.4㎡)","currentUse":"오피스","currentUseSignal":"근린생활시설","leaseSignal":"임대중","vacancySignal":"공실없음","tenantNames":["쿠팡","네이버"],"unitRentTexts":["301호: 1500만"],"sellerMotivationText":"자산 효율화","brokerNotes":["초역세권 매물"]},"detectedSensitiveFields":["exact_address","tenant_name"],"ambiguousFields":[],"warnings":[],"areaSignal":"역삼","assetType":"오피스빌딩","priceBand":"300억","sizeSignal":"3000평(약 9917.4㎡)","dealType":"매각","buildingName":"역삼 센트럴타워","exactAddress":"역삼동 742-1","totalFloorArea":9917.3,"buildYear":2015,"currentUseSignal":"근린생활시설","vacancySignal":"공실 없음","fitSummary":"초역세권 근생 빌딩으로 시행/사옥 매입에 최적화","cautionSummary":"주요 임차인 만기 조율 필요","hiddenFields":["exact_address","seller_motivation"],"confidence":{"areaSignal":"confirmed","assetType":"confirmed","priceBand":"ai_hypothesis","fitSummary":"ai_hypothesis"},"missingData":["sizeSignal"],"boundaryNote":"본 자료는 실거래 통계 기반 참고치입니다.","buyerType":"법인 사옥형","budgetRange":{"min":50,"max":80,"display":"50억~80억"},"preferredRegions":["강남","성수"],"assetTypes":["꼬마빌딩","사옥용"],"purchasePurpose":"사옥용 매입","mustHave":["초역세권","주차"],"niceToHave":["테라스","루프탑"],"riskTolerance":"medium","financingNote":"자본금 50% 준비","missingQuestions":["구체적인 입주 시기가 언제인가요?","선호하는 수익률이 있나요?"],"privacyNotes":["연락처 비공개"],"fitReasons":["매수자 예산(50-80억)에 부합하는 매물입니다.","요청하신 성수/강남 권역에 해당합니다."],"cautionReasons":["요청한 용도와 달리 명도 협의가 다소 필요합니다."],"recommendedNextAction":"현장 답사 제안","kakaoMessage":"안녕하세요! 요청하신 조건에 부합하는 추천 매물이 있어 안내해 드립니다. 확인해보시고 피드백 부탁드립니다.","title":"강남 역삼역 초역세권 오피스 사옥용 빌딩 매각","shortSummary":"역삼역 도보 5분 거리의 준신축급 대형 오피스빌딩입니다.","dealPoints":["초역세권","사옥 최적"],"cautionPoints":["명도 조율 필요"],"hiddenInfoNotice":["보증금 및 지번은 인가 후 확인 가능"],"gateMessage":"G1 등급 등록이 필요합니다.","kakaoText":"강남 역삼역 오피스 빌딩 매각 안내입니다.","exactUnitCandidate":"101호","floor":"1층","areaSqmText":"150㎡","spaceType":"office","depositText":"5000만","monthlyRentText":"400만","maintenanceFeeText":"50만","availableFromText":"즉시입주","leaseTermMonthsText":"24","incentivesText":"렌트프리 2개월","restrictions":[],"landlordIdentity":"김성수","currentTenant":"스타트업","vacancyReason":"이전 확장","rentNegotiation":"협의 가능","region":"성수동","areaSqm":150,"deposit":5000,"monthlyRent":400,"maintenanceFee":50,"availableFrom":"즉시입주","leaseTermMonths":24,"incentives":{"rentFreeMonths":2,"interiorSupport":"일부 인테리어 지원","freeRentDetail":"렌트프리 2개월 지원"},"shortSummaryLease":"성수역 도보 5분 거리 1층 리테일 상가 매물입니다."}</a:t>
             </a:r>
             <a:endParaRPr lang="en-US" sz="1000" dirty="0"/>
           </a:p>
@@ -7682,11 +7688,11 @@
         <p:spPr>
           <a:xfrm>
             <a:off x="566928" y="1417320"/>
-            <a:ext cx="11057839" cy="3657600"/>
+            <a:ext cx="3515258" cy="3657600"/>
           </a:xfrm>
           <a:prstGeom prst="roundRect">
             <a:avLst>
-              <a:gd name="adj" fmla="val 1500"/>
+              <a:gd name="adj" fmla="val 1561"/>
             </a:avLst>
           </a:prstGeom>
           <a:solidFill>
@@ -7709,7 +7715,7 @@
         <p:spPr>
           <a:xfrm>
             <a:off x="566928" y="1417320"/>
-            <a:ext cx="11057839" cy="45720"/>
+            <a:ext cx="3515258" cy="45720"/>
           </a:xfrm>
           <a:prstGeom prst="rect">
             <a:avLst/>
@@ -7729,7 +7735,7 @@
         <p:spPr>
           <a:xfrm>
             <a:off x="795528" y="1618488"/>
-            <a:ext cx="10600639" cy="292608"/>
+            <a:ext cx="3058058" cy="292608"/>
           </a:xfrm>
           <a:prstGeom prst="rect">
             <a:avLst/>
@@ -7753,7 +7759,7 @@
                 <a:ea typeface="Pretendard" pitchFamily="34" charset="-122"/>
                 <a:cs typeface="Pretendard" pitchFamily="34" charset="-120"/>
               </a:rPr>
-              <a:t>용도 리스크</a:t>
+              <a:t>건물 물리적 상태</a:t>
             </a:r>
             <a:endParaRPr lang="en-US" sz="1350" dirty="0"/>
           </a:p>
@@ -7768,7 +7774,7 @@
         <p:spPr>
           <a:xfrm>
             <a:off x="795528" y="1947672"/>
-            <a:ext cx="10600639" cy="365760"/>
+            <a:ext cx="3058058" cy="365760"/>
           </a:xfrm>
           <a:prstGeom prst="rect">
             <a:avLst/>
@@ -7794,7 +7800,7 @@
                 <a:ea typeface="Pretendard" pitchFamily="34" charset="-122"/>
                 <a:cs typeface="Pretendard" pitchFamily="34" charset="-120"/>
               </a:rPr>
-              <a:t>—</a:t>
+              <a:t>준공연도 확인 필요, 구조 확인 필요</a:t>
             </a:r>
             <a:endParaRPr lang="en-US" sz="1250" dirty="0"/>
           </a:p>
@@ -7809,7 +7815,7 @@
         <p:spPr>
           <a:xfrm>
             <a:off x="795528" y="2377440"/>
-            <a:ext cx="10600639" cy="2606040"/>
+            <a:ext cx="3058058" cy="2606040"/>
           </a:xfrm>
           <a:prstGeom prst="rect">
             <a:avLst/>
@@ -7839,10 +7845,58 @@
                 <a:ea typeface="Pretendard" pitchFamily="34" charset="-122"/>
                 <a:cs typeface="Pretendard" pitchFamily="34" charset="-120"/>
               </a:rPr>
-              <a:t>{"ok":true,"mocked":true,"extractedFields":{"area_signal":"역삼","asset_type":"오피스빌딩","price_band":"300억","size_signal":"3000평(약 9917.4㎡)"},"extractedFacts":{"region":"역삼","exactAddressCandidate":"역삼동 7</a:t>
+              <a:t>누수</a:t>
             </a:r>
             <a:endParaRPr lang="en-US" sz="1100" dirty="0"/>
           </a:p>
+          <a:p>
+            <a:pPr marL="342900" indent="-342900">
+              <a:lnSpc>
+                <a:spcPct val="125000"/>
+              </a:lnSpc>
+              <a:spcBef>
+                <a:spcPts val="600"/>
+              </a:spcBef>
+              <a:buSzPct val="100000"/>
+              <a:buChar char="•"/>
+            </a:pPr>
+            <a:r>
+              <a:rPr lang="en-US" sz="1100" dirty="0">
+                <a:solidFill>
+                  <a:srgbClr val="10161F"/>
+                </a:solidFill>
+                <a:latin typeface="Pretendard" pitchFamily="34" charset="0"/>
+                <a:ea typeface="Pretendard" pitchFamily="34" charset="-122"/>
+                <a:cs typeface="Pretendard" pitchFamily="34" charset="-120"/>
+              </a:rPr>
+              <a:t>균열</a:t>
+            </a:r>
+            <a:endParaRPr lang="en-US" sz="1100" dirty="0"/>
+          </a:p>
+          <a:p>
+            <a:pPr marL="342900" indent="-342900">
+              <a:lnSpc>
+                <a:spcPct val="125000"/>
+              </a:lnSpc>
+              <a:spcBef>
+                <a:spcPts val="600"/>
+              </a:spcBef>
+              <a:buSzPct val="100000"/>
+              <a:buChar char="•"/>
+            </a:pPr>
+            <a:r>
+              <a:rPr lang="en-US" sz="1100" dirty="0">
+                <a:solidFill>
+                  <a:srgbClr val="10161F"/>
+                </a:solidFill>
+                <a:latin typeface="Pretendard" pitchFamily="34" charset="0"/>
+                <a:ea typeface="Pretendard" pitchFamily="34" charset="-122"/>
+                <a:cs typeface="Pretendard" pitchFamily="34" charset="-120"/>
+              </a:rPr>
+              <a:t>설비 노후 여부 현장 점검 필요</a:t>
+            </a:r>
+            <a:endParaRPr lang="en-US" sz="1100" dirty="0"/>
+          </a:p>
         </p:txBody>
       </p:sp>
       <p:sp>
@@ -7853,12 +7907,12 @@
         </p:nvSpPr>
         <p:spPr>
           <a:xfrm>
-            <a:off x="566928" y="5193792"/>
-            <a:ext cx="11057839" cy="621792"/>
+            <a:off x="4338218" y="1417320"/>
+            <a:ext cx="3515258" cy="3657600"/>
           </a:xfrm>
           <a:prstGeom prst="roundRect">
             <a:avLst>
-              <a:gd name="adj" fmla="val 8824"/>
+              <a:gd name="adj" fmla="val 1561"/>
             </a:avLst>
           </a:prstGeom>
           <a:solidFill>
@@ -7874,7 +7928,351 @@
       </p:sp>
       <p:sp>
         <p:nvSpPr>
-          <p:cNvPr id="12" name="Text 10"/>
+          <p:cNvPr id="12" name="Shape 10"/>
+          <p:cNvSpPr/>
+          <p:nvPr/>
+        </p:nvSpPr>
+        <p:spPr>
+          <a:xfrm>
+            <a:off x="4338218" y="1417320"/>
+            <a:ext cx="3515258" cy="45720"/>
+          </a:xfrm>
+          <a:prstGeom prst="rect">
+            <a:avLst/>
+          </a:prstGeom>
+          <a:solidFill>
+            <a:srgbClr val="B98A2E"/>
+          </a:solidFill>
+          <a:ln/>
+        </p:spPr>
+      </p:sp>
+      <p:sp>
+        <p:nvSpPr>
+          <p:cNvPr id="13" name="Text 11"/>
+          <p:cNvSpPr/>
+          <p:nvPr/>
+        </p:nvSpPr>
+        <p:spPr>
+          <a:xfrm>
+            <a:off x="4566818" y="1618488"/>
+            <a:ext cx="3058058" cy="292608"/>
+          </a:xfrm>
+          <a:prstGeom prst="rect">
+            <a:avLst/>
+          </a:prstGeom>
+          <a:noFill/>
+          <a:ln/>
+        </p:spPr>
+        <p:txBody>
+          <a:bodyPr wrap="square" lIns="0" tIns="0" rIns="0" bIns="0" rtlCol="0" anchor="ctr"/>
+          <a:lstStyle/>
+          <a:p>
+            <a:pPr indent="0" marL="0">
+              <a:buNone/>
+            </a:pPr>
+            <a:r>
+              <a:rPr lang="en-US" sz="1350" b="1" dirty="0">
+                <a:solidFill>
+                  <a:srgbClr val="977024"/>
+                </a:solidFill>
+                <a:latin typeface="Pretendard" pitchFamily="34" charset="0"/>
+                <a:ea typeface="Pretendard" pitchFamily="34" charset="-122"/>
+                <a:cs typeface="Pretendard" pitchFamily="34" charset="-120"/>
+              </a:rPr>
+              <a:t>승강기 및 설비</a:t>
+            </a:r>
+            <a:endParaRPr lang="en-US" sz="1350" dirty="0"/>
+          </a:p>
+        </p:txBody>
+      </p:sp>
+      <p:sp>
+        <p:nvSpPr>
+          <p:cNvPr id="14" name="Text 12"/>
+          <p:cNvSpPr/>
+          <p:nvPr/>
+        </p:nvSpPr>
+        <p:spPr>
+          <a:xfrm>
+            <a:off x="4566818" y="1947672"/>
+            <a:ext cx="3058058" cy="365760"/>
+          </a:xfrm>
+          <a:prstGeom prst="rect">
+            <a:avLst/>
+          </a:prstGeom>
+          <a:noFill/>
+          <a:ln/>
+        </p:spPr>
+        <p:txBody>
+          <a:bodyPr wrap="square" lIns="0" tIns="0" rIns="0" bIns="0" rtlCol="0" anchor="ctr">
+            <a:normAutofit/>
+          </a:bodyPr>
+          <a:lstStyle/>
+          <a:p>
+            <a:pPr indent="0" marL="0">
+              <a:buNone/>
+            </a:pPr>
+            <a:r>
+              <a:rPr lang="en-US" sz="1250" b="1" dirty="0">
+                <a:solidFill>
+                  <a:srgbClr val="10161F"/>
+                </a:solidFill>
+                <a:latin typeface="Pretendard" pitchFamily="34" charset="0"/>
+                <a:ea typeface="Pretendard" pitchFamily="34" charset="-122"/>
+                <a:cs typeface="Pretendard" pitchFamily="34" charset="-120"/>
+              </a:rPr>
+              <a:t>승강기 정보 확인 필요</a:t>
+            </a:r>
+            <a:endParaRPr lang="en-US" sz="1250" dirty="0"/>
+          </a:p>
+        </p:txBody>
+      </p:sp>
+      <p:sp>
+        <p:nvSpPr>
+          <p:cNvPr id="15" name="Text 13"/>
+          <p:cNvSpPr/>
+          <p:nvPr/>
+        </p:nvSpPr>
+        <p:spPr>
+          <a:xfrm>
+            <a:off x="4566818" y="2377440"/>
+            <a:ext cx="3058058" cy="2606040"/>
+          </a:xfrm>
+          <a:prstGeom prst="rect">
+            <a:avLst/>
+          </a:prstGeom>
+          <a:noFill/>
+          <a:ln/>
+        </p:spPr>
+        <p:txBody>
+          <a:bodyPr wrap="square" lIns="0" tIns="0" rIns="0" bIns="0" rtlCol="0" anchor="t">
+            <a:normAutofit/>
+          </a:bodyPr>
+          <a:lstStyle/>
+          <a:p>
+            <a:pPr marL="342900" indent="-342900">
+              <a:lnSpc>
+                <a:spcPct val="125000"/>
+              </a:lnSpc>
+              <a:buSzPct val="100000"/>
+              <a:buChar char="•"/>
+            </a:pPr>
+            <a:r>
+              <a:rPr lang="en-US" sz="1100" dirty="0">
+                <a:solidFill>
+                  <a:srgbClr val="10161F"/>
+                </a:solidFill>
+                <a:latin typeface="Pretendard" pitchFamily="34" charset="0"/>
+                <a:ea typeface="Pretendard" pitchFamily="34" charset="-122"/>
+                <a:cs typeface="Pretendard" pitchFamily="34" charset="-120"/>
+              </a:rPr>
+              <a:t>정기검사 이력, 냉난방 설비 상태 확인 필요</a:t>
+            </a:r>
+            <a:endParaRPr lang="en-US" sz="1100" dirty="0"/>
+          </a:p>
+        </p:txBody>
+      </p:sp>
+      <p:sp>
+        <p:nvSpPr>
+          <p:cNvPr id="16" name="Shape 14"/>
+          <p:cNvSpPr/>
+          <p:nvPr/>
+        </p:nvSpPr>
+        <p:spPr>
+          <a:xfrm>
+            <a:off x="8109509" y="1417320"/>
+            <a:ext cx="3515258" cy="3657600"/>
+          </a:xfrm>
+          <a:prstGeom prst="roundRect">
+            <a:avLst>
+              <a:gd name="adj" fmla="val 1561"/>
+            </a:avLst>
+          </a:prstGeom>
+          <a:solidFill>
+            <a:srgbClr val="F7FAFC"/>
+          </a:solidFill>
+          <a:ln w="6350">
+            <a:solidFill>
+              <a:srgbClr val="CBD5E0"/>
+            </a:solidFill>
+            <a:prstDash val="solid"/>
+          </a:ln>
+        </p:spPr>
+      </p:sp>
+      <p:sp>
+        <p:nvSpPr>
+          <p:cNvPr id="17" name="Shape 15"/>
+          <p:cNvSpPr/>
+          <p:nvPr/>
+        </p:nvSpPr>
+        <p:spPr>
+          <a:xfrm>
+            <a:off x="8109509" y="1417320"/>
+            <a:ext cx="3515258" cy="45720"/>
+          </a:xfrm>
+          <a:prstGeom prst="rect">
+            <a:avLst/>
+          </a:prstGeom>
+          <a:solidFill>
+            <a:srgbClr val="B98A2E"/>
+          </a:solidFill>
+          <a:ln/>
+        </p:spPr>
+      </p:sp>
+      <p:sp>
+        <p:nvSpPr>
+          <p:cNvPr id="18" name="Text 16"/>
+          <p:cNvSpPr/>
+          <p:nvPr/>
+        </p:nvSpPr>
+        <p:spPr>
+          <a:xfrm>
+            <a:off x="8338109" y="1618488"/>
+            <a:ext cx="3058058" cy="292608"/>
+          </a:xfrm>
+          <a:prstGeom prst="rect">
+            <a:avLst/>
+          </a:prstGeom>
+          <a:noFill/>
+          <a:ln/>
+        </p:spPr>
+        <p:txBody>
+          <a:bodyPr wrap="square" lIns="0" tIns="0" rIns="0" bIns="0" rtlCol="0" anchor="ctr"/>
+          <a:lstStyle/>
+          <a:p>
+            <a:pPr indent="0" marL="0">
+              <a:buNone/>
+            </a:pPr>
+            <a:r>
+              <a:rPr lang="en-US" sz="1350" b="1" dirty="0">
+                <a:solidFill>
+                  <a:srgbClr val="977024"/>
+                </a:solidFill>
+                <a:latin typeface="Pretendard" pitchFamily="34" charset="0"/>
+                <a:ea typeface="Pretendard" pitchFamily="34" charset="-122"/>
+                <a:cs typeface="Pretendard" pitchFamily="34" charset="-120"/>
+              </a:rPr>
+              <a:t>임차인 이탈 위험</a:t>
+            </a:r>
+            <a:endParaRPr lang="en-US" sz="1350" dirty="0"/>
+          </a:p>
+        </p:txBody>
+      </p:sp>
+      <p:sp>
+        <p:nvSpPr>
+          <p:cNvPr id="19" name="Text 17"/>
+          <p:cNvSpPr/>
+          <p:nvPr/>
+        </p:nvSpPr>
+        <p:spPr>
+          <a:xfrm>
+            <a:off x="8338109" y="1947672"/>
+            <a:ext cx="3058058" cy="365760"/>
+          </a:xfrm>
+          <a:prstGeom prst="rect">
+            <a:avLst/>
+          </a:prstGeom>
+          <a:noFill/>
+          <a:ln/>
+        </p:spPr>
+        <p:txBody>
+          <a:bodyPr wrap="square" lIns="0" tIns="0" rIns="0" bIns="0" rtlCol="0" anchor="ctr">
+            <a:normAutofit/>
+          </a:bodyPr>
+          <a:lstStyle/>
+          <a:p>
+            <a:pPr indent="0" marL="0">
+              <a:buNone/>
+            </a:pPr>
+            <a:r>
+              <a:rPr lang="en-US" sz="1250" b="1" dirty="0">
+                <a:solidFill>
+                  <a:srgbClr val="10161F"/>
+                </a:solidFill>
+                <a:latin typeface="Pretendard" pitchFamily="34" charset="0"/>
+                <a:ea typeface="Pretendard" pitchFamily="34" charset="-122"/>
+                <a:cs typeface="Pretendard" pitchFamily="34" charset="-120"/>
+              </a:rPr>
+              <a:t>임대차 계약 현황 LOI 접수 후 열람</a:t>
+            </a:r>
+            <a:endParaRPr lang="en-US" sz="1250" dirty="0"/>
+          </a:p>
+        </p:txBody>
+      </p:sp>
+      <p:sp>
+        <p:nvSpPr>
+          <p:cNvPr id="20" name="Text 18"/>
+          <p:cNvSpPr/>
+          <p:nvPr/>
+        </p:nvSpPr>
+        <p:spPr>
+          <a:xfrm>
+            <a:off x="8338109" y="2377440"/>
+            <a:ext cx="3058058" cy="2606040"/>
+          </a:xfrm>
+          <a:prstGeom prst="rect">
+            <a:avLst/>
+          </a:prstGeom>
+          <a:noFill/>
+          <a:ln/>
+        </p:spPr>
+        <p:txBody>
+          <a:bodyPr wrap="square" lIns="0" tIns="0" rIns="0" bIns="0" rtlCol="0" anchor="t">
+            <a:normAutofit/>
+          </a:bodyPr>
+          <a:lstStyle/>
+          <a:p>
+            <a:pPr marL="342900" indent="-342900">
+              <a:lnSpc>
+                <a:spcPct val="125000"/>
+              </a:lnSpc>
+              <a:buSzPct val="100000"/>
+              <a:buChar char="•"/>
+            </a:pPr>
+            <a:r>
+              <a:rPr lang="en-US" sz="1100" dirty="0">
+                <a:solidFill>
+                  <a:srgbClr val="10161F"/>
+                </a:solidFill>
+                <a:latin typeface="Pretendard" pitchFamily="34" charset="0"/>
+                <a:ea typeface="Pretendard" pitchFamily="34" charset="-122"/>
+                <a:cs typeface="Pretendard" pitchFamily="34" charset="-120"/>
+              </a:rPr>
+              <a:t>잔여 계약기간(WALE), 임차인 신용도 확인 필요</a:t>
+            </a:r>
+            <a:endParaRPr lang="en-US" sz="1100" dirty="0"/>
+          </a:p>
+        </p:txBody>
+      </p:sp>
+      <p:sp>
+        <p:nvSpPr>
+          <p:cNvPr id="21" name="Shape 19"/>
+          <p:cNvSpPr/>
+          <p:nvPr/>
+        </p:nvSpPr>
+        <p:spPr>
+          <a:xfrm>
+            <a:off x="566928" y="5193792"/>
+            <a:ext cx="11057839" cy="621792"/>
+          </a:xfrm>
+          <a:prstGeom prst="roundRect">
+            <a:avLst>
+              <a:gd name="adj" fmla="val 8824"/>
+            </a:avLst>
+          </a:prstGeom>
+          <a:solidFill>
+            <a:srgbClr val="F7FAFC"/>
+          </a:solidFill>
+          <a:ln w="6350">
+            <a:solidFill>
+              <a:srgbClr val="CBD5E0"/>
+            </a:solidFill>
+            <a:prstDash val="solid"/>
+          </a:ln>
+        </p:spPr>
+      </p:sp>
+      <p:sp>
+        <p:nvSpPr>
+          <p:cNvPr id="22" name="Text 20"/>
           <p:cNvSpPr/>
           <p:nvPr/>
         </p:nvSpPr>
@@ -7913,7 +8311,7 @@
       </p:sp>
       <p:sp>
         <p:nvSpPr>
-          <p:cNvPr id="13" name="Text 11"/>
+          <p:cNvPr id="23" name="Text 21"/>
           <p:cNvSpPr/>
           <p:nvPr/>
         </p:nvSpPr>
@@ -7952,7 +8350,7 @@
       </p:sp>
       <p:sp>
         <p:nvSpPr>
-          <p:cNvPr id="14" name="Text 12"/>
+          <p:cNvPr id="24" name="Text 22"/>
           <p:cNvSpPr/>
           <p:nvPr/>
         </p:nvSpPr>
@@ -8260,7 +8658,7 @@
                 <a:ea typeface="Pretendard" pitchFamily="34" charset="-122"/>
                 <a:cs typeface="Pretendard" pitchFamily="34" charset="-120"/>
               </a:rPr>
-              <a:t>{"ok":true,"mocked":true,"extractedFields":{"area_signal":"역삼","asset_type":"오피스빌딩","price_band":"300억","size_signal":"3000평(약 9917.4㎡)"},"extractedFacts":{"region":"역삼","exactAddressCandidate":"역삼동 742-1","assetType":"오피스빌딩","priceText":"300억","sizeText":"3000평(약 9917.4㎡)","currentUse":"오피스","currentUseSignal":"근린생활시설","leaseSignal":"임대중","vacancySignal":"공실없음","tenantNames":["쿠팡","네이버"],"unitRentTexts":["301호: 1500만"],"sellerMotivationText":"자산 효율화","brokerNotes":["초역세권 매물"]},"detectedSensitiveFields":["exact_address","tenant_name"],"ambiguousFields":[],"warnings":[],"areaSignal":"역삼","assetType":"오피스빌딩","priceBand":"300억","sizeSignal":"3000평(약 9917.4㎡)","dealType":"매각","buildingName":"역삼 센트럴타워","exactAddress":"역삼동 742-1","totalFloorArea":9917.3,"buildYear":2015,"currentUseSignal":"근린생활시설","vacancySignal":"공실 없음","fitSummary":"초역세권 근생 빌딩으로 시행/사옥 매입에 최적화","cautionSummary":"주요 임차 업종 만기 조율 필요","hiddenFields":["exact_address","seller_motivation"],"confidence":{"areaSignal":"confirmed","assetType":"confirmed","priceBand":"ai_hypothesis","fitSummary":"ai_hypothesis"},"missingData":["sizeSignal"],"boundaryNote":"본 자료는 실거래 통계 기반 참고치입니다.","buyerType":"법인 사옥형","budgetRange":{"min":50,"max":80,"display":"50억~80억"},"preferredRegions":["강남","성수"],"assetTypes":["꼬마빌딩","사옥용"],"purchasePurpose":"사옥용 매입","mustHave":["초역세권","주차"],"niceToHave":["테라스","루프탑"],"riskTolerance":"medium","financingNote":"자본금 50% 준비","missingQuestions":["구체적인 입주 시기가 언제인가요?","선호하는 수익률이 있나요?"],"privacyNotes":["연락처 비공개"],"fitReasons":["매수자 예산(50-80억)에 부합하는 매물입니다.","요청하신 성수/강남 권역에 해당합니다."],"cautionReasons":["요청한 용도와 달리 명도 협의가 다소 필요합니다."],"recommendedNextAction":"현장 답사 제안","kakaoMessage":"안녕하세요! 요청하신 조건에 부합하는 추천 매물이 있어 안내해 드립니다. 확인해보시고 피드백 부탁드립니다.","title":"강남 역삼역 초역세권 오피스 사옥용 빌딩 매각","shortSummary":"역삼역 도보 5분 거리의 준신축급 대형 오피스빌딩입니다.","dealPoints":["초역세권","사옥 최적"],"cautionPoints":["명도 조율 필요"],"hiddenInfoNotice":["보증금 및 지번은 인가 후 확인 가능"],"gateMessage":"G1 등급 등록이 필요합니다.","kakaoText":"강남 역삼역 오피스 빌딩 매각 안내입니다.","exactUnitCandidate":"101호","floor":"1층","areaSqmText":"150㎡","spaceType":"office","depositText":"5000만","monthlyRentText":"400만","maintenanceFeeText":"50만","availableFromText":"즉시입주","leaseTermMonthsText":"24","incentivesText":"렌트프리 2개월","restrictions":[],"landlordIdentity":"김성수","currentTenant":"스타트업","vacancyReason":"이전 확장","rentNegotiation":"협의 가능","region":"성수동","areaSqm":150,"deposit":5000,"monthlyRent":400,"maintenanceFee":50,"availableFrom":"즉시입주","leaseTermMonths":24,"incentives":{"rentFreeMonths":2,"interiorSupport":"일부 인테리어 지원","freeRentDetail":"렌트프리 2개월 지원"},"shortSummaryLease":"성수역 도보 5분 거리 1층 리테일 상가 매물입니다."}</a:t>
+              <a:t>{"ok":true,"mocked":true,"extractedFields":{"area_signal":"역삼","asset_type":"오피스빌딩","price_band":"300억","size_signal":"3000평(약 9917.4㎡)"},"extractedFacts":{"region":"역삼","exactAddressCandidate":"역삼동 742-1","assetType":"오피스빌딩","priceText":"300억","sizeText":"3000평(약 9917.4㎡)","currentUse":"오피스","currentUseSignal":"근린생활시설","leaseSignal":"임대중","vacancySignal":"공실없음","tenantNames":["쿠팡","네이버"],"unitRentTexts":["301호: 1500만"],"sellerMotivationText":"자산 효율화","brokerNotes":["초역세권 매물"]},"detectedSensitiveFields":["exact_address","tenant_name"],"ambiguousFields":[],"warnings":[],"areaSignal":"역삼","assetType":"오피스빌딩","priceBand":"300억","sizeSignal":"3000평(약 9917.4㎡)","dealType":"매각","buildingName":"역삼 센트럴타워","exactAddress":"역삼동 742-1","totalFloorArea":9917.3,"buildYear":2015,"currentUseSignal":"근린생활시설","vacancySignal":"공실 없음","fitSummary":"초역세권 근생 빌딩으로 시행/사옥 매입에 최적화","cautionSummary":"주요 임차인 만기 조율 필요","hiddenFields":["exact_address","seller_motivation"],"confidence":{"areaSignal":"confirmed","assetType":"confirmed","priceBand":"ai_hypothesis","fitSummary":"ai_hypothesis"},"missingData":["sizeSignal"],"boundaryNote":"본 자료는 실거래 통계 기반 참고치입니다.","buyerType":"법인 사옥형","budgetRange":{"min":50,"max":80,"display":"50억~80억"},"preferredRegions":["강남","성수"],"assetTypes":["꼬마빌딩","사옥용"],"purchasePurpose":"사옥용 매입","mustHave":["초역세권","주차"],"niceToHave":["테라스","루프탑"],"riskTolerance":"medium","financingNote":"자본금 50% 준비","missingQuestions":["구체적인 입주 시기가 언제인가요?","선호하는 수익률이 있나요?"],"privacyNotes":["연락처 비공개"],"fitReasons":["매수자 예산(50-80억)에 부합하는 매물입니다.","요청하신 성수/강남 권역에 해당합니다."],"cautionReasons":["요청한 용도와 달리 명도 협의가 다소 필요합니다."],"recommendedNextAction":"현장 답사 제안","kakaoMessage":"안녕하세요! 요청하신 조건에 부합하는 추천 매물이 있어 안내해 드립니다. 확인해보시고 피드백 부탁드립니다.","title":"강남 역삼역 초역세권 오피스 사옥용 빌딩 매각","shortSummary":"역삼역 도보 5분 거리의 준신축급 대형 오피스빌딩입니다.","dealPoints":["초역세권","사옥 최적"],"cautionPoints":["명도 조율 필요"],"hiddenInfoNotice":["보증금 및 지번은 인가 후 확인 가능"],"gateMessage":"G1 등급 등록이 필요합니다.","kakaoText":"강남 역삼역 오피스 빌딩 매각 안내입니다.","exactUnitCandidate":"101호","floor":"1층","areaSqmText":"150㎡","spaceType":"office","depositText":"5000만","monthlyRentText":"400만","maintenanceFeeText":"50만","availableFromText":"즉시입주","leaseTermMonthsText":"24","incentivesText":"렌트프리 2개월","restrictions":[],"landlordIdentity":"김성수","currentTenant":"스타트업","vacancyReason":"이전 확장","rentNegotiation":"협의 가능","region":"성수동","areaSqm":150,"deposit":5000,"monthlyRent":400,"maintenanceFee":50,"availableFrom":"즉시입주","leaseTermMonths":24,"incentives":{"rentFreeMonths":2,"interiorSupport":"일부 인테리어 지원","freeRentDetail":"렌트프리 2개월 지원"},"shortSummaryLease":"성수역 도보 5분 거리 1층 리테일 상가 매물입니다."}</a:t>
             </a:r>
             <a:endParaRPr lang="en-US" sz="1100" dirty="0"/>
           </a:p>
@@ -8522,11 +8920,11 @@
         <p:spPr>
           <a:xfrm>
             <a:off x="566928" y="1572768"/>
-            <a:ext cx="2490140" cy="3200400"/>
+            <a:ext cx="11057839" cy="3200400"/>
           </a:xfrm>
           <a:prstGeom prst="roundRect">
             <a:avLst>
-              <a:gd name="adj" fmla="val 2203"/>
+              <a:gd name="adj" fmla="val 1714"/>
             </a:avLst>
           </a:prstGeom>
           <a:solidFill>
@@ -8549,7 +8947,7 @@
         <p:spPr>
           <a:xfrm>
             <a:off x="786384" y="1792224"/>
-            <a:ext cx="384048" cy="384048"/>
+            <a:ext cx="438912" cy="438912"/>
           </a:xfrm>
           <a:prstGeom prst="ellipse">
             <a:avLst/>
@@ -8569,7 +8967,7 @@
         <p:spPr>
           <a:xfrm>
             <a:off x="786384" y="1792224"/>
-            <a:ext cx="384048" cy="384048"/>
+            <a:ext cx="438912" cy="438912"/>
           </a:xfrm>
           <a:prstGeom prst="rect">
             <a:avLst/>
@@ -8585,7 +8983,7 @@
               <a:buNone/>
             </a:pPr>
             <a:r>
-              <a:rPr lang="en-US" sz="1300" b="1" dirty="0">
+              <a:rPr lang="en-US" sz="1400" b="1" dirty="0">
                 <a:solidFill>
                   <a:srgbClr val="FFFFFF"/>
                 </a:solidFill>
@@ -8593,9 +8991,9 @@
                 <a:ea typeface="Arial" pitchFamily="34" charset="-122"/>
                 <a:cs typeface="Arial" pitchFamily="34" charset="-120"/>
               </a:rPr>
-              <a:t>STEP 1</a:t>
-            </a:r>
-            <a:endParaRPr lang="en-US" sz="1300" dirty="0"/>
+              <a:t>01</a:t>
+            </a:r>
+            <a:endParaRPr lang="en-US" sz="1400" dirty="0"/>
           </a:p>
         </p:txBody>
       </p:sp>
@@ -8608,7 +9006,7 @@
         <p:spPr>
           <a:xfrm>
             <a:off x="786384" y="2304288"/>
-            <a:ext cx="2051228" cy="365760"/>
+            <a:ext cx="10618927" cy="365760"/>
           </a:xfrm>
           <a:prstGeom prst="rect">
             <a:avLst/>
@@ -8632,7 +9030,7 @@
                 <a:ea typeface="Pretendard" pitchFamily="34" charset="-122"/>
                 <a:cs typeface="Pretendard" pitchFamily="34" charset="-120"/>
               </a:rPr>
-              <a:t>초기 관심 표명 → 담당자 연락</a:t>
+              <a:t>1단계</a:t>
             </a:r>
             <a:endParaRPr lang="en-US" sz="1600" dirty="0"/>
           </a:p>
@@ -8647,7 +9045,7 @@
         <p:spPr>
           <a:xfrm>
             <a:off x="786384" y="2761488"/>
-            <a:ext cx="2051228" cy="1828800"/>
+            <a:ext cx="10618927" cy="1828800"/>
           </a:xfrm>
           <a:prstGeom prst="rect">
             <a:avLst/>
@@ -8662,147 +9060,25 @@
             <a:pPr indent="0" marL="0">
               <a:buNone/>
             </a:pPr>
+            <a:r>
+              <a:rPr lang="en-US" sz="1100" dirty="0">
+                <a:solidFill>
+                  <a:srgbClr val="10161F"/>
+                </a:solidFill>
+                <a:latin typeface="Pretendard" pitchFamily="34" charset="0"/>
+                <a:ea typeface="Pretendard" pitchFamily="34" charset="-122"/>
+                <a:cs typeface="Pretendard" pitchFamily="34" charset="-120"/>
+              </a:rPr>
+              <a:t>{"ok"</a:t>
+            </a:r>
             <a:endParaRPr lang="en-US" sz="1100" dirty="0"/>
           </a:p>
-        </p:txBody>
-      </p:sp>
-      <p:sp>
-        <p:nvSpPr>
-          <p:cNvPr id="11" name="Shape 9"/>
-          <p:cNvSpPr/>
-          <p:nvPr/>
-        </p:nvSpPr>
-        <p:spPr>
-          <a:xfrm>
-            <a:off x="3148508" y="3035808"/>
-            <a:ext cx="182880" cy="274320"/>
-          </a:xfrm>
-          <a:prstGeom prst="rightArrow">
-            <a:avLst/>
-          </a:prstGeom>
-          <a:solidFill>
-            <a:srgbClr val="CBD5E0"/>
-          </a:solidFill>
-          <a:ln w="6350">
-            <a:solidFill>
-              <a:srgbClr val="718096"/>
-            </a:solidFill>
-            <a:prstDash val="solid"/>
-          </a:ln>
-        </p:spPr>
-      </p:sp>
-      <p:sp>
-        <p:nvSpPr>
-          <p:cNvPr id="12" name="Shape 10"/>
-          <p:cNvSpPr/>
-          <p:nvPr/>
-        </p:nvSpPr>
-        <p:spPr>
-          <a:xfrm>
-            <a:off x="3422828" y="1572768"/>
-            <a:ext cx="2490140" cy="3200400"/>
-          </a:xfrm>
-          <a:prstGeom prst="roundRect">
-            <a:avLst>
-              <a:gd name="adj" fmla="val 2203"/>
-            </a:avLst>
-          </a:prstGeom>
-          <a:solidFill>
-            <a:srgbClr val="F7FAFC"/>
-          </a:solidFill>
-          <a:ln w="6350">
-            <a:solidFill>
-              <a:srgbClr val="CBD5E0"/>
-            </a:solidFill>
-            <a:prstDash val="solid"/>
-          </a:ln>
-        </p:spPr>
-      </p:sp>
-      <p:sp>
-        <p:nvSpPr>
-          <p:cNvPr id="13" name="Shape 11"/>
-          <p:cNvSpPr/>
-          <p:nvPr/>
-        </p:nvSpPr>
-        <p:spPr>
-          <a:xfrm>
-            <a:off x="3642284" y="1792224"/>
-            <a:ext cx="384048" cy="384048"/>
-          </a:xfrm>
-          <a:prstGeom prst="ellipse">
-            <a:avLst/>
-          </a:prstGeom>
-          <a:solidFill>
-            <a:srgbClr val="B98A2E"/>
-          </a:solidFill>
-          <a:ln/>
-        </p:spPr>
-      </p:sp>
-      <p:sp>
-        <p:nvSpPr>
-          <p:cNvPr id="14" name="Text 12"/>
-          <p:cNvSpPr/>
-          <p:nvPr/>
-        </p:nvSpPr>
-        <p:spPr>
-          <a:xfrm>
-            <a:off x="3642284" y="1792224"/>
-            <a:ext cx="384048" cy="384048"/>
-          </a:xfrm>
-          <a:prstGeom prst="rect">
-            <a:avLst/>
-          </a:prstGeom>
-          <a:noFill/>
-          <a:ln/>
-        </p:spPr>
-        <p:txBody>
-          <a:bodyPr wrap="square" lIns="0" tIns="0" rIns="0" bIns="0" rtlCol="0" anchor="ctr"/>
-          <a:lstStyle/>
-          <a:p>
-            <a:pPr algn="ctr" indent="0" marL="0">
-              <a:buNone/>
-            </a:pPr>
-            <a:r>
-              <a:rPr lang="en-US" sz="1300" b="1" dirty="0">
-                <a:solidFill>
-                  <a:srgbClr val="FFFFFF"/>
-                </a:solidFill>
-                <a:latin typeface="Arial" pitchFamily="34" charset="0"/>
-                <a:ea typeface="Arial" pitchFamily="34" charset="-122"/>
-                <a:cs typeface="Arial" pitchFamily="34" charset="-120"/>
-              </a:rPr>
-              <a:t>STEP 2</a:t>
-            </a:r>
-            <a:endParaRPr lang="en-US" sz="1300" dirty="0"/>
-          </a:p>
-        </p:txBody>
-      </p:sp>
-      <p:sp>
-        <p:nvSpPr>
-          <p:cNvPr id="15" name="Text 13"/>
-          <p:cNvSpPr/>
-          <p:nvPr/>
-        </p:nvSpPr>
-        <p:spPr>
-          <a:xfrm>
-            <a:off x="3642284" y="2304288"/>
-            <a:ext cx="2051228" cy="365760"/>
-          </a:xfrm>
-          <a:prstGeom prst="rect">
-            <a:avLst/>
-          </a:prstGeom>
-          <a:noFill/>
-          <a:ln/>
-        </p:spPr>
-        <p:txBody>
-          <a:bodyPr wrap="square" rtlCol="0" anchor="ctr"/>
-          <a:lstStyle/>
-          <a:p>
-            <a:pPr indent="0" marL="0">
-              <a:buNone/>
-            </a:pPr>
-            <a:r>
-              <a:rPr lang="en-US" sz="1600" b="1" dirty="0">
+          <a:p>
+            <a:pPr indent="0" marL="0">
+              <a:buNone/>
+            </a:pPr>
+            <a:r>
+              <a:rPr lang="en-US" sz="1100" dirty="0">
                 <a:solidFill>
                   <a:srgbClr val="10161F"/>
                 </a:solidFill>
@@ -8810,399 +9086,15 @@
                 <a:ea typeface="Pretendard" pitchFamily="34" charset="-122"/>
                 <a:cs typeface="Pretendard" pitchFamily="34" charset="-120"/>
               </a:rPr>
-              <a:t>NDA 체결 → 임차인 정보 및 임대차계약서 제공</a:t>
-            </a:r>
-            <a:endParaRPr lang="en-US" sz="1600" dirty="0"/>
-          </a:p>
-        </p:txBody>
-      </p:sp>
-      <p:sp>
-        <p:nvSpPr>
-          <p:cNvPr id="16" name="Text 14"/>
-          <p:cNvSpPr/>
-          <p:nvPr/>
-        </p:nvSpPr>
-        <p:spPr>
-          <a:xfrm>
-            <a:off x="3642284" y="2761488"/>
-            <a:ext cx="2051228" cy="1828800"/>
-          </a:xfrm>
-          <a:prstGeom prst="rect">
-            <a:avLst/>
-          </a:prstGeom>
-          <a:noFill/>
-          <a:ln/>
-        </p:spPr>
-        <p:txBody>
-          <a:bodyPr wrap="square" rtlCol="0" anchor="t"/>
-          <a:lstStyle/>
-          <a:p>
-            <a:pPr indent="0" marL="0">
-              <a:buNone/>
-            </a:pPr>
+              <a:t>true,"mocked":true,"extractedFields":{"area_signal":"역삼","asset_type":"오피스빌딩","price_band":"300억","size_signal":"3000평(약 9917.4㎡)"},"extractedFacts":{"region":"역삼","exactAddressCandidate":"역삼동 742-1","assetType":"오피스빌딩","priceText":"300억","sizeText":"3000평(약 9917.4㎡)","currentUse":"오피스","currentUseSignal":"근린생활시설","leaseSignal":"임대중","vacancySignal":"공실없음","tenantNames":["쿠팡","네이버"],"unitRentTexts":["301호: 1500만"],"sellerMotivationText":"자산 효율화","brokerNotes":["초역세권 매물"]},"detectedSensitiveFields":["exact_address","tenant_name"],"ambiguousFields":[],"warnings":[],"areaSignal":"역삼","assetType":"오피스빌딩","priceBand":"300억","sizeSignal":"3000평(약 9917.4㎡)","dealType":"매각","buildingName":"역삼 센트럴타워","exactAddress":"역삼동 742-1","totalFloorArea":9917.3,"buildYear":2015,"currentUseSignal":"근린생활시설","vacancySignal":"공실 없음","fitSummary":"초역세권 근생 빌딩으로 시행/사옥 매입에 최적화","cautionSummary":"주요 임차인 만기 조율 필요","hiddenFields":["exact_address","seller_motivation"],"confidence":{"areaSignal":"confirmed","assetType":"confirmed","priceBand":"ai_hypothesis","fitSummary":"ai_hypothesis"},"missingData":["sizeSignal"],"boundaryNote":"본 자료는 실거래 통계 기반 참고치입니다.","buyerType":"법인 사옥형","budgetRange":{"min":50,"max":80,"display":"50억~80억"},"preferredRegions":["강남","성수"],"assetTypes":["꼬마빌딩","사옥용"],"purchasePurpose":"사옥용 매입","mustHave":["초역세권","주차"],"niceToHave":["테라스","루프탑"],"riskTolerance":"medium","financingNote":"자본금 50% 준비","missingQuestions":["구체적인 입주 시기가 언제인가요?","선호하는 수익률이 있나요?"],"privacyNotes":["연락처 비공개"],"fitReasons":["매수자 예산(50-80억)에 부합하는 매물입니다.","요청하신 성수/강남 권역에 해당합니다."],"cautionReasons":["요청한 용도와 달리 명도 협의가 다소 필요합니다."],"recommendedNextAction":"현장 답사 제안","kakaoMessage":"안녕하세요! 요청하신 조건에 부합하는 추천 매물이 있어 안내해 드립니다. 확인해보시고 피드백 부탁드립니다.","title":"강남 역삼역 초역세권 오피스 사옥용 빌딩 매각","shortSummary":"역삼역 도보 5분 거리의 준신축급 대형 오피스빌딩입니다.","dealPoints":["초역세권","사옥 최적"],"cautionPoints":["명도 조율 필요"],"hiddenInfoNotice":["보증금 및 지번은 인가 후 확인 가능"],"gateMessage":"G1 등급 등록이 필요합니다.","kakaoText":"강남 역삼역 오피스 빌딩 매각 안내입니다.","exactUnitCandidate":"101호","floor":"1층","areaSqmText":"150㎡","spaceType":"office","depositText":"5000만","monthlyRentText":"400만","maintenanceFeeText":"50만","availableFromText":"즉시입주","leaseTermMonthsText":"24","incentivesText":"렌트프리 2개월","restrictions":[],"landlordIdentity":"김성수","currentTenant":"스타트업","vacancyReason":"이전 확장","rentNegotiation":"협의 가능","region":"성수동","areaSqm":150,"deposit":5000,"monthlyRent":400,"maintenanceFee":50,"availableFrom":"즉시입주","leaseTermMonths":24,"incentives":{"rentFreeMonths":2,"interiorSupport":"일부 인테리어 지원","freeRentDetail":"렌트프리 2개월 지원"},"shortSummaryLease":"성수역 도보 5분 거리 1층 리테일 상가 매물입니다."}</a:t>
+            </a:r>
             <a:endParaRPr lang="en-US" sz="1100" dirty="0"/>
           </a:p>
         </p:txBody>
       </p:sp>
       <p:sp>
         <p:nvSpPr>
-          <p:cNvPr id="17" name="Shape 15"/>
-          <p:cNvSpPr/>
-          <p:nvPr/>
-        </p:nvSpPr>
-        <p:spPr>
-          <a:xfrm>
-            <a:off x="6004408" y="3035808"/>
-            <a:ext cx="182880" cy="274320"/>
-          </a:xfrm>
-          <a:prstGeom prst="rightArrow">
-            <a:avLst/>
-          </a:prstGeom>
-          <a:solidFill>
-            <a:srgbClr val="CBD5E0"/>
-          </a:solidFill>
-          <a:ln w="6350">
-            <a:solidFill>
-              <a:srgbClr val="718096"/>
-            </a:solidFill>
-            <a:prstDash val="solid"/>
-          </a:ln>
-        </p:spPr>
-      </p:sp>
-      <p:sp>
-        <p:nvSpPr>
-          <p:cNvPr id="18" name="Shape 16"/>
-          <p:cNvSpPr/>
-          <p:nvPr/>
-        </p:nvSpPr>
-        <p:spPr>
-          <a:xfrm>
-            <a:off x="6278728" y="1572768"/>
-            <a:ext cx="2490140" cy="3200400"/>
-          </a:xfrm>
-          <a:prstGeom prst="roundRect">
-            <a:avLst>
-              <a:gd name="adj" fmla="val 2203"/>
-            </a:avLst>
-          </a:prstGeom>
-          <a:solidFill>
-            <a:srgbClr val="F7FAFC"/>
-          </a:solidFill>
-          <a:ln w="6350">
-            <a:solidFill>
-              <a:srgbClr val="CBD5E0"/>
-            </a:solidFill>
-            <a:prstDash val="solid"/>
-          </a:ln>
-        </p:spPr>
-      </p:sp>
-      <p:sp>
-        <p:nvSpPr>
-          <p:cNvPr id="19" name="Shape 17"/>
-          <p:cNvSpPr/>
-          <p:nvPr/>
-        </p:nvSpPr>
-        <p:spPr>
-          <a:xfrm>
-            <a:off x="6498184" y="1792224"/>
-            <a:ext cx="384048" cy="384048"/>
-          </a:xfrm>
-          <a:prstGeom prst="ellipse">
-            <a:avLst/>
-          </a:prstGeom>
-          <a:solidFill>
-            <a:srgbClr val="B98A2E"/>
-          </a:solidFill>
-          <a:ln/>
-        </p:spPr>
-      </p:sp>
-      <p:sp>
-        <p:nvSpPr>
-          <p:cNvPr id="20" name="Text 18"/>
-          <p:cNvSpPr/>
-          <p:nvPr/>
-        </p:nvSpPr>
-        <p:spPr>
-          <a:xfrm>
-            <a:off x="6498184" y="1792224"/>
-            <a:ext cx="384048" cy="384048"/>
-          </a:xfrm>
-          <a:prstGeom prst="rect">
-            <a:avLst/>
-          </a:prstGeom>
-          <a:noFill/>
-          <a:ln/>
-        </p:spPr>
-        <p:txBody>
-          <a:bodyPr wrap="square" lIns="0" tIns="0" rIns="0" bIns="0" rtlCol="0" anchor="ctr"/>
-          <a:lstStyle/>
-          <a:p>
-            <a:pPr algn="ctr" indent="0" marL="0">
-              <a:buNone/>
-            </a:pPr>
-            <a:r>
-              <a:rPr lang="en-US" sz="1300" b="1" dirty="0">
-                <a:solidFill>
-                  <a:srgbClr val="FFFFFF"/>
-                </a:solidFill>
-                <a:latin typeface="Arial" pitchFamily="34" charset="0"/>
-                <a:ea typeface="Arial" pitchFamily="34" charset="-122"/>
-                <a:cs typeface="Arial" pitchFamily="34" charset="-120"/>
-              </a:rPr>
-              <a:t>STEP 3</a:t>
-            </a:r>
-            <a:endParaRPr lang="en-US" sz="1300" dirty="0"/>
-          </a:p>
-        </p:txBody>
-      </p:sp>
-      <p:sp>
-        <p:nvSpPr>
-          <p:cNvPr id="21" name="Text 19"/>
-          <p:cNvSpPr/>
-          <p:nvPr/>
-        </p:nvSpPr>
-        <p:spPr>
-          <a:xfrm>
-            <a:off x="6498184" y="2304288"/>
-            <a:ext cx="2051228" cy="365760"/>
-          </a:xfrm>
-          <a:prstGeom prst="rect">
-            <a:avLst/>
-          </a:prstGeom>
-          <a:noFill/>
-          <a:ln/>
-        </p:spPr>
-        <p:txBody>
-          <a:bodyPr wrap="square" rtlCol="0" anchor="ctr"/>
-          <a:lstStyle/>
-          <a:p>
-            <a:pPr indent="0" marL="0">
-              <a:buNone/>
-            </a:pPr>
-            <a:r>
-              <a:rPr lang="en-US" sz="1600" b="1" dirty="0">
-                <a:solidFill>
-                  <a:srgbClr val="10161F"/>
-                </a:solidFill>
-                <a:latin typeface="Pretendard" pitchFamily="34" charset="0"/>
-                <a:ea typeface="Pretendard" pitchFamily="34" charset="-122"/>
-                <a:cs typeface="Pretendard" pitchFamily="34" charset="-120"/>
-              </a:rPr>
-              <a:t>현장 실사 일정 조율 → 건물 컨디션 및 설비 직접 확인</a:t>
-            </a:r>
-            <a:endParaRPr lang="en-US" sz="1600" dirty="0"/>
-          </a:p>
-        </p:txBody>
-      </p:sp>
-      <p:sp>
-        <p:nvSpPr>
-          <p:cNvPr id="22" name="Text 20"/>
-          <p:cNvSpPr/>
-          <p:nvPr/>
-        </p:nvSpPr>
-        <p:spPr>
-          <a:xfrm>
-            <a:off x="6498184" y="2761488"/>
-            <a:ext cx="2051228" cy="1828800"/>
-          </a:xfrm>
-          <a:prstGeom prst="rect">
-            <a:avLst/>
-          </a:prstGeom>
-          <a:noFill/>
-          <a:ln/>
-        </p:spPr>
-        <p:txBody>
-          <a:bodyPr wrap="square" rtlCol="0" anchor="t"/>
-          <a:lstStyle/>
-          <a:p>
-            <a:pPr indent="0" marL="0">
-              <a:buNone/>
-            </a:pPr>
-            <a:endParaRPr lang="en-US" sz="1100" dirty="0"/>
-          </a:p>
-        </p:txBody>
-      </p:sp>
-      <p:sp>
-        <p:nvSpPr>
-          <p:cNvPr id="23" name="Shape 21"/>
-          <p:cNvSpPr/>
-          <p:nvPr/>
-        </p:nvSpPr>
-        <p:spPr>
-          <a:xfrm>
-            <a:off x="8860307" y="3035808"/>
-            <a:ext cx="182880" cy="274320"/>
-          </a:xfrm>
-          <a:prstGeom prst="rightArrow">
-            <a:avLst/>
-          </a:prstGeom>
-          <a:solidFill>
-            <a:srgbClr val="CBD5E0"/>
-          </a:solidFill>
-          <a:ln w="6350">
-            <a:solidFill>
-              <a:srgbClr val="718096"/>
-            </a:solidFill>
-            <a:prstDash val="solid"/>
-          </a:ln>
-        </p:spPr>
-      </p:sp>
-      <p:sp>
-        <p:nvSpPr>
-          <p:cNvPr id="24" name="Shape 22"/>
-          <p:cNvSpPr/>
-          <p:nvPr/>
-        </p:nvSpPr>
-        <p:spPr>
-          <a:xfrm>
-            <a:off x="9134627" y="1572768"/>
-            <a:ext cx="2490140" cy="3200400"/>
-          </a:xfrm>
-          <a:prstGeom prst="roundRect">
-            <a:avLst>
-              <a:gd name="adj" fmla="val 2203"/>
-            </a:avLst>
-          </a:prstGeom>
-          <a:solidFill>
-            <a:srgbClr val="F7FAFC"/>
-          </a:solidFill>
-          <a:ln w="6350">
-            <a:solidFill>
-              <a:srgbClr val="CBD5E0"/>
-            </a:solidFill>
-            <a:prstDash val="solid"/>
-          </a:ln>
-        </p:spPr>
-      </p:sp>
-      <p:sp>
-        <p:nvSpPr>
-          <p:cNvPr id="25" name="Shape 23"/>
-          <p:cNvSpPr/>
-          <p:nvPr/>
-        </p:nvSpPr>
-        <p:spPr>
-          <a:xfrm>
-            <a:off x="9354083" y="1792224"/>
-            <a:ext cx="384048" cy="384048"/>
-          </a:xfrm>
-          <a:prstGeom prst="ellipse">
-            <a:avLst/>
-          </a:prstGeom>
-          <a:solidFill>
-            <a:srgbClr val="B98A2E"/>
-          </a:solidFill>
-          <a:ln/>
-        </p:spPr>
-      </p:sp>
-      <p:sp>
-        <p:nvSpPr>
-          <p:cNvPr id="26" name="Text 24"/>
-          <p:cNvSpPr/>
-          <p:nvPr/>
-        </p:nvSpPr>
-        <p:spPr>
-          <a:xfrm>
-            <a:off x="9354083" y="1792224"/>
-            <a:ext cx="384048" cy="384048"/>
-          </a:xfrm>
-          <a:prstGeom prst="rect">
-            <a:avLst/>
-          </a:prstGeom>
-          <a:noFill/>
-          <a:ln/>
-        </p:spPr>
-        <p:txBody>
-          <a:bodyPr wrap="square" lIns="0" tIns="0" rIns="0" bIns="0" rtlCol="0" anchor="ctr"/>
-          <a:lstStyle/>
-          <a:p>
-            <a:pPr algn="ctr" indent="0" marL="0">
-              <a:buNone/>
-            </a:pPr>
-            <a:r>
-              <a:rPr lang="en-US" sz="1300" b="1" dirty="0">
-                <a:solidFill>
-                  <a:srgbClr val="FFFFFF"/>
-                </a:solidFill>
-                <a:latin typeface="Arial" pitchFamily="34" charset="0"/>
-                <a:ea typeface="Arial" pitchFamily="34" charset="-122"/>
-                <a:cs typeface="Arial" pitchFamily="34" charset="-120"/>
-              </a:rPr>
-              <a:t>STEP 4</a:t>
-            </a:r>
-            <a:endParaRPr lang="en-US" sz="1300" dirty="0"/>
-          </a:p>
-        </p:txBody>
-      </p:sp>
-      <p:sp>
-        <p:nvSpPr>
-          <p:cNvPr id="27" name="Text 25"/>
-          <p:cNvSpPr/>
-          <p:nvPr/>
-        </p:nvSpPr>
-        <p:spPr>
-          <a:xfrm>
-            <a:off x="9354083" y="2304288"/>
-            <a:ext cx="2051228" cy="365760"/>
-          </a:xfrm>
-          <a:prstGeom prst="rect">
-            <a:avLst/>
-          </a:prstGeom>
-          <a:noFill/>
-          <a:ln/>
-        </p:spPr>
-        <p:txBody>
-          <a:bodyPr wrap="square" rtlCol="0" anchor="ctr"/>
-          <a:lstStyle/>
-          <a:p>
-            <a:pPr indent="0" marL="0">
-              <a:buNone/>
-            </a:pPr>
-            <a:r>
-              <a:rPr lang="en-US" sz="1600" b="1" dirty="0">
-                <a:solidFill>
-                  <a:srgbClr val="10161F"/>
-                </a:solidFill>
-                <a:latin typeface="Pretendard" pitchFamily="34" charset="0"/>
-                <a:ea typeface="Pretendard" pitchFamily="34" charset="-122"/>
-                <a:cs typeface="Pretendard" pitchFamily="34" charset="-120"/>
-              </a:rPr>
-              <a:t>LOI(투자의향서) 제출 → 가격 협의 개시</a:t>
-            </a:r>
-            <a:endParaRPr lang="en-US" sz="1600" dirty="0"/>
-          </a:p>
-        </p:txBody>
-      </p:sp>
-      <p:sp>
-        <p:nvSpPr>
-          <p:cNvPr id="28" name="Text 26"/>
-          <p:cNvSpPr/>
-          <p:nvPr/>
-        </p:nvSpPr>
-        <p:spPr>
-          <a:xfrm>
-            <a:off x="9354083" y="2761488"/>
-            <a:ext cx="2051228" cy="1828800"/>
-          </a:xfrm>
-          <a:prstGeom prst="rect">
-            <a:avLst/>
-          </a:prstGeom>
-          <a:noFill/>
-          <a:ln/>
-        </p:spPr>
-        <p:txBody>
-          <a:bodyPr wrap="square" rtlCol="0" anchor="t"/>
-          <a:lstStyle/>
-          <a:p>
-            <a:pPr indent="0" marL="0">
-              <a:buNone/>
-            </a:pPr>
-            <a:endParaRPr lang="en-US" sz="1100" dirty="0"/>
-          </a:p>
-        </p:txBody>
-      </p:sp>
-      <p:sp>
-        <p:nvSpPr>
-          <p:cNvPr id="29" name="Text 27"/>
+          <p:cNvPr id="11" name="Text 9"/>
           <p:cNvSpPr/>
           <p:nvPr/>
         </p:nvSpPr>
@@ -9241,7 +9133,7 @@
       </p:sp>
       <p:sp>
         <p:nvSpPr>
-          <p:cNvPr id="30" name="Text 28"/>
+          <p:cNvPr id="12" name="Text 10"/>
           <p:cNvSpPr/>
           <p:nvPr/>
         </p:nvSpPr>

--- a/docs/test/stress/e2e-outputs/owner_occupied_case08_hannam_flagship_basic.pptx
+++ b/docs/test/stress/e2e-outputs/owner_occupied_case08_hannam_flagship_basic.pptx
@@ -15,9 +15,10 @@
     <p:sldId id="263" r:id="rId9"/>
     <p:sldId id="264" r:id="rId10"/>
     <p:sldId id="265" r:id="rId11"/>
+    <p:sldId id="266" r:id="rId12"/>
   </p:sldIdLst>
   <p:notesMasterIdLst>
-    <p:notesMasterId r:id="rId12"/>
+    <p:notesMasterId r:id="rId13"/>
   </p:notesMasterIdLst>
   <p:sldSz cx="12192000" cy="6858000"/>
   <p:notesSz cx="6858000" cy="12192000"/>
@@ -623,6 +624,94 @@
             <a:fld id="{F7021451-1387-4CA6-816F-3879F97B5CBC}" type="slidenum">
               <a:rPr lang="en-US"/>
               <a:t>10</a:t>
+            </a:fld>
+            <a:endParaRPr lang="en-US"/>
+          </a:p>
+        </p:txBody>
+      </p:sp>
+    </p:spTree>
+    <p:extLst>
+      <p:ext uri="{BB962C8B-B14F-4D97-AF65-F5344CB8AC3E}">
+        <p14:creationId xmlns:p14="http://schemas.microsoft.com/office/powerpoint/2010/main" val="1024086991"/>
+      </p:ext>
+    </p:extLst>
+  </p:cSld>
+  <p:clrMapOvr>
+    <a:masterClrMapping/>
+  </p:clrMapOvr>
+</p:notes>
+</file>
+
+<file path=ppt/notesSlides/notesSlide11.xml><?xml version="1.0" encoding="utf-8"?>
+<p:notes xmlns:a="http://schemas.openxmlformats.org/drawingml/2006/main" xmlns:r="http://schemas.openxmlformats.org/officeDocument/2006/relationships" xmlns:p="http://schemas.openxmlformats.org/presentationml/2006/main">
+  <p:cSld>
+    <p:spTree>
+      <p:nvGrpSpPr>
+        <p:cNvPr id="1" name=""/>
+        <p:cNvGrpSpPr/>
+        <p:nvPr/>
+      </p:nvGrpSpPr>
+      <p:grpSpPr>
+        <a:xfrm>
+          <a:off x="0" y="0"/>
+          <a:ext cx="0" cy="0"/>
+          <a:chOff x="0" y="0"/>
+          <a:chExt cx="0" cy="0"/>
+        </a:xfrm>
+      </p:grpSpPr>
+      <p:sp>
+        <p:nvSpPr>
+          <p:cNvPr id="2" name="Slide Image Placeholder 1"/>
+          <p:cNvSpPr>
+            <a:spLocks noGrp="1" noRot="1" noChangeAspect="1"/>
+          </p:cNvSpPr>
+          <p:nvPr>
+            <p:ph type="sldImg"/>
+          </p:nvPr>
+        </p:nvSpPr>
+        <p:spPr/>
+      </p:sp>
+      <p:sp>
+        <p:nvSpPr>
+          <p:cNvPr id="3" name="Notes Placeholder 2"/>
+          <p:cNvSpPr>
+            <a:spLocks noGrp="1"/>
+          </p:cNvSpPr>
+          <p:nvPr>
+            <p:ph type="body" idx="1"/>
+          </p:nvPr>
+        </p:nvSpPr>
+        <p:spPr/>
+        <p:txBody>
+          <a:bodyPr/>
+          <a:lstStyle/>
+          <a:p>
+            <a:r>
+              <a:rPr lang="en-US" dirty="0"/>
+              <a:t/>
+            </a:r>
+            <a:endParaRPr lang="en-US" dirty="0"/>
+          </a:p>
+        </p:txBody>
+      </p:sp>
+      <p:sp>
+        <p:nvSpPr>
+          <p:cNvPr id="4" name="Slide Number Placeholder 3"/>
+          <p:cNvSpPr>
+            <a:spLocks noGrp="1"/>
+          </p:cNvSpPr>
+          <p:nvPr>
+            <p:ph type="sldNum" sz="quarter" idx="10"/>
+          </p:nvPr>
+        </p:nvSpPr>
+        <p:spPr/>
+        <p:txBody>
+          <a:bodyPr/>
+          <a:lstStyle/>
+          <a:p>
+            <a:fld id="{F7021451-1387-4CA6-816F-3879F97B5CBC}" type="slidenum">
+              <a:rPr lang="en-US"/>
+              <a:t>11</a:t>
             </a:fld>
             <a:endParaRPr lang="en-US"/>
           </a:p>
@@ -2297,6 +2386,434 @@
     <p:bg>
       <p:bgPr>
         <a:solidFill>
+          <a:srgbClr val="FFFFFF"/>
+        </a:solidFill>
+      </p:bgPr>
+    </p:bg>
+    <p:spTree>
+      <p:nvGrpSpPr>
+        <p:cNvPr id="1" name=""/>
+        <p:cNvGrpSpPr/>
+        <p:nvPr/>
+      </p:nvGrpSpPr>
+      <p:grpSpPr>
+        <a:xfrm>
+          <a:off x="0" y="0"/>
+          <a:ext cx="0" cy="0"/>
+          <a:chOff x="0" y="0"/>
+          <a:chExt cx="0" cy="0"/>
+        </a:xfrm>
+      </p:grpSpPr>
+      <p:sp>
+        <p:nvSpPr>
+          <p:cNvPr id="2" name="Shape 0"/>
+          <p:cNvSpPr/>
+          <p:nvPr/>
+        </p:nvSpPr>
+        <p:spPr>
+          <a:xfrm>
+            <a:off x="566928" y="457200"/>
+            <a:ext cx="384048" cy="384048"/>
+          </a:xfrm>
+          <a:prstGeom prst="ellipse">
+            <a:avLst/>
+          </a:prstGeom>
+          <a:solidFill>
+            <a:srgbClr val="B98A2E"/>
+          </a:solidFill>
+          <a:ln/>
+        </p:spPr>
+      </p:sp>
+      <p:sp>
+        <p:nvSpPr>
+          <p:cNvPr id="3" name="Text 1"/>
+          <p:cNvSpPr/>
+          <p:nvPr/>
+        </p:nvSpPr>
+        <p:spPr>
+          <a:xfrm>
+            <a:off x="566928" y="457200"/>
+            <a:ext cx="384048" cy="384048"/>
+          </a:xfrm>
+          <a:prstGeom prst="rect">
+            <a:avLst/>
+          </a:prstGeom>
+          <a:noFill/>
+          <a:ln/>
+        </p:spPr>
+        <p:txBody>
+          <a:bodyPr wrap="square" lIns="0" tIns="0" rIns="0" bIns="0" rtlCol="0" anchor="ctr"/>
+          <a:lstStyle/>
+          <a:p>
+            <a:pPr algn="ctr" indent="0" marL="0">
+              <a:buNone/>
+            </a:pPr>
+            <a:r>
+              <a:rPr lang="en-US" sz="1300" b="1" dirty="0">
+                <a:solidFill>
+                  <a:srgbClr val="FFFFFF"/>
+                </a:solidFill>
+                <a:latin typeface="Arial" pitchFamily="34" charset="0"/>
+                <a:ea typeface="Arial" pitchFamily="34" charset="-122"/>
+                <a:cs typeface="Arial" pitchFamily="34" charset="-120"/>
+              </a:rPr>
+              <a:t>10</a:t>
+            </a:r>
+            <a:endParaRPr lang="en-US" sz="1300" dirty="0"/>
+          </a:p>
+        </p:txBody>
+      </p:sp>
+      <p:sp>
+        <p:nvSpPr>
+          <p:cNvPr id="4" name="Text 2"/>
+          <p:cNvSpPr/>
+          <p:nvPr/>
+        </p:nvSpPr>
+        <p:spPr>
+          <a:xfrm>
+            <a:off x="1133856" y="457200"/>
+            <a:ext cx="10490911" cy="182880"/>
+          </a:xfrm>
+          <a:prstGeom prst="rect">
+            <a:avLst/>
+          </a:prstGeom>
+          <a:noFill/>
+          <a:ln/>
+        </p:spPr>
+        <p:txBody>
+          <a:bodyPr wrap="square" lIns="0" tIns="0" rIns="0" bIns="0" rtlCol="0" anchor="ctr"/>
+          <a:lstStyle/>
+          <a:p>
+            <a:pPr indent="0" marL="0">
+              <a:buNone/>
+            </a:pPr>
+            <a:r>
+              <a:rPr lang="en-US" sz="950" b="1" spc="200" kern="0" dirty="0">
+                <a:solidFill>
+                  <a:srgbClr val="B98A2E"/>
+                </a:solidFill>
+                <a:latin typeface="Arial" pitchFamily="34" charset="0"/>
+                <a:ea typeface="Arial" pitchFamily="34" charset="-122"/>
+                <a:cs typeface="Arial" pitchFamily="34" charset="-120"/>
+              </a:rPr>
+              <a:t>Process</a:t>
+            </a:r>
+            <a:endParaRPr lang="en-US" sz="950" dirty="0"/>
+          </a:p>
+        </p:txBody>
+      </p:sp>
+      <p:sp>
+        <p:nvSpPr>
+          <p:cNvPr id="5" name="Text 3"/>
+          <p:cNvSpPr/>
+          <p:nvPr/>
+        </p:nvSpPr>
+        <p:spPr>
+          <a:xfrm>
+            <a:off x="1133856" y="640080"/>
+            <a:ext cx="10490911" cy="365760"/>
+          </a:xfrm>
+          <a:prstGeom prst="rect">
+            <a:avLst/>
+          </a:prstGeom>
+          <a:noFill/>
+          <a:ln/>
+        </p:spPr>
+        <p:txBody>
+          <a:bodyPr wrap="square" lIns="0" tIns="0" rIns="0" bIns="0" rtlCol="0" anchor="ctr"/>
+          <a:lstStyle/>
+          <a:p>
+            <a:pPr indent="0" marL="0">
+              <a:buNone/>
+            </a:pPr>
+            <a:r>
+              <a:rPr lang="en-US" sz="2300" b="1" dirty="0">
+                <a:solidFill>
+                  <a:srgbClr val="10161F"/>
+                </a:solidFill>
+                <a:latin typeface="Pretendard" pitchFamily="34" charset="0"/>
+                <a:ea typeface="Pretendard" pitchFamily="34" charset="-122"/>
+                <a:cs typeface="Pretendard" pitchFamily="34" charset="-120"/>
+              </a:rPr>
+              <a:t>검토 후 다음 단계는 무엇인가</a:t>
+            </a:r>
+            <a:endParaRPr lang="en-US" sz="2300" dirty="0"/>
+          </a:p>
+        </p:txBody>
+      </p:sp>
+      <p:sp>
+        <p:nvSpPr>
+          <p:cNvPr id="6" name="Shape 4"/>
+          <p:cNvSpPr/>
+          <p:nvPr/>
+        </p:nvSpPr>
+        <p:spPr>
+          <a:xfrm>
+            <a:off x="566928" y="1572768"/>
+            <a:ext cx="11057839" cy="3200400"/>
+          </a:xfrm>
+          <a:prstGeom prst="roundRect">
+            <a:avLst>
+              <a:gd name="adj" fmla="val 1714"/>
+            </a:avLst>
+          </a:prstGeom>
+          <a:solidFill>
+            <a:srgbClr val="F7FAFC"/>
+          </a:solidFill>
+          <a:ln w="6350">
+            <a:solidFill>
+              <a:srgbClr val="CBD5E0"/>
+            </a:solidFill>
+            <a:prstDash val="solid"/>
+          </a:ln>
+        </p:spPr>
+      </p:sp>
+      <p:sp>
+        <p:nvSpPr>
+          <p:cNvPr id="7" name="Shape 5"/>
+          <p:cNvSpPr/>
+          <p:nvPr/>
+        </p:nvSpPr>
+        <p:spPr>
+          <a:xfrm>
+            <a:off x="786384" y="1792224"/>
+            <a:ext cx="438912" cy="438912"/>
+          </a:xfrm>
+          <a:prstGeom prst="ellipse">
+            <a:avLst/>
+          </a:prstGeom>
+          <a:solidFill>
+            <a:srgbClr val="B98A2E"/>
+          </a:solidFill>
+          <a:ln/>
+        </p:spPr>
+      </p:sp>
+      <p:sp>
+        <p:nvSpPr>
+          <p:cNvPr id="8" name="Text 6"/>
+          <p:cNvSpPr/>
+          <p:nvPr/>
+        </p:nvSpPr>
+        <p:spPr>
+          <a:xfrm>
+            <a:off x="786384" y="1792224"/>
+            <a:ext cx="438912" cy="438912"/>
+          </a:xfrm>
+          <a:prstGeom prst="rect">
+            <a:avLst/>
+          </a:prstGeom>
+          <a:noFill/>
+          <a:ln/>
+        </p:spPr>
+        <p:txBody>
+          <a:bodyPr wrap="square" lIns="0" tIns="0" rIns="0" bIns="0" rtlCol="0" anchor="ctr"/>
+          <a:lstStyle/>
+          <a:p>
+            <a:pPr algn="ctr" indent="0" marL="0">
+              <a:buNone/>
+            </a:pPr>
+            <a:r>
+              <a:rPr lang="en-US" sz="1400" b="1" dirty="0">
+                <a:solidFill>
+                  <a:srgbClr val="FFFFFF"/>
+                </a:solidFill>
+                <a:latin typeface="Arial" pitchFamily="34" charset="0"/>
+                <a:ea typeface="Arial" pitchFamily="34" charset="-122"/>
+                <a:cs typeface="Arial" pitchFamily="34" charset="-120"/>
+              </a:rPr>
+              <a:t>01</a:t>
+            </a:r>
+            <a:endParaRPr lang="en-US" sz="1400" dirty="0"/>
+          </a:p>
+        </p:txBody>
+      </p:sp>
+      <p:sp>
+        <p:nvSpPr>
+          <p:cNvPr id="9" name="Text 7"/>
+          <p:cNvSpPr/>
+          <p:nvPr/>
+        </p:nvSpPr>
+        <p:spPr>
+          <a:xfrm>
+            <a:off x="786384" y="2304288"/>
+            <a:ext cx="10618927" cy="365760"/>
+          </a:xfrm>
+          <a:prstGeom prst="rect">
+            <a:avLst/>
+          </a:prstGeom>
+          <a:noFill/>
+          <a:ln/>
+        </p:spPr>
+        <p:txBody>
+          <a:bodyPr wrap="square" rtlCol="0" anchor="ctr"/>
+          <a:lstStyle/>
+          <a:p>
+            <a:pPr indent="0" marL="0">
+              <a:buNone/>
+            </a:pPr>
+            <a:r>
+              <a:rPr lang="en-US" sz="1600" b="1" dirty="0">
+                <a:solidFill>
+                  <a:srgbClr val="10161F"/>
+                </a:solidFill>
+                <a:latin typeface="Pretendard" pitchFamily="34" charset="0"/>
+                <a:ea typeface="Pretendard" pitchFamily="34" charset="-122"/>
+                <a:cs typeface="Pretendard" pitchFamily="34" charset="-120"/>
+              </a:rPr>
+              <a:t>1단계</a:t>
+            </a:r>
+            <a:endParaRPr lang="en-US" sz="1600" dirty="0"/>
+          </a:p>
+        </p:txBody>
+      </p:sp>
+      <p:sp>
+        <p:nvSpPr>
+          <p:cNvPr id="10" name="Text 8"/>
+          <p:cNvSpPr/>
+          <p:nvPr/>
+        </p:nvSpPr>
+        <p:spPr>
+          <a:xfrm>
+            <a:off x="786384" y="2761488"/>
+            <a:ext cx="10618927" cy="1828800"/>
+          </a:xfrm>
+          <a:prstGeom prst="rect">
+            <a:avLst/>
+          </a:prstGeom>
+          <a:noFill/>
+          <a:ln/>
+        </p:spPr>
+        <p:txBody>
+          <a:bodyPr wrap="square" rtlCol="0" anchor="t"/>
+          <a:lstStyle/>
+          <a:p>
+            <a:pPr indent="0" marL="0">
+              <a:buNone/>
+            </a:pPr>
+            <a:r>
+              <a:rPr lang="en-US" sz="1100" dirty="0">
+                <a:solidFill>
+                  <a:srgbClr val="10161F"/>
+                </a:solidFill>
+                <a:latin typeface="Pretendard" pitchFamily="34" charset="0"/>
+                <a:ea typeface="Pretendard" pitchFamily="34" charset="-122"/>
+                <a:cs typeface="Pretendard" pitchFamily="34" charset="-120"/>
+              </a:rPr>
+              <a:t>{"ok"</a:t>
+            </a:r>
+            <a:endParaRPr lang="en-US" sz="1100" dirty="0"/>
+          </a:p>
+          <a:p>
+            <a:pPr indent="0" marL="0">
+              <a:buNone/>
+            </a:pPr>
+            <a:r>
+              <a:rPr lang="en-US" sz="1100" dirty="0">
+                <a:solidFill>
+                  <a:srgbClr val="10161F"/>
+                </a:solidFill>
+                <a:latin typeface="Pretendard" pitchFamily="34" charset="0"/>
+                <a:ea typeface="Pretendard" pitchFamily="34" charset="-122"/>
+                <a:cs typeface="Pretendard" pitchFamily="34" charset="-120"/>
+              </a:rPr>
+              <a:t>true,"mocked":true,"extractedFields":{"area_signal":"역삼","asset_type":"오피스빌딩","price_band":"300억","size_signal":"3000평(약 9917.4㎡)"},"extractedFacts":{"region":"역삼","exactAddressCandidate":"역삼동 742-1","assetType":"오피스빌딩","priceText":"300억","sizeText":"3000평(약 9917.4㎡)","currentUse":"오피스","currentUseSignal":"근린생활시설","leaseSignal":"임대중","vacancySignal":"공실없음","tenantNames":["쿠팡","네이버"],"unitRentTexts":["301호: 1500만"],"sellerMotivationText":"자산 효율화","brokerNotes":["초역세권 매물"]},"detectedSensitiveFields":["exact_address","tenant_name"],"ambiguousFields":[],"warnings":[],"areaSignal":"역삼","assetType":"오피스빌딩","priceBand":"300억","sizeSignal":"3000평(약 9917.4㎡)","dealType":"매각","buildingName":"역삼 센트럴타워","exactAddress":"역삼동 742-1","totalFloorArea":9917.3,"buildYear":2015,"currentUseSignal":"근린생활시설","vacancySignal":"공실 없음","fitSummary":"초역세권 근생 빌딩으로 시행/사옥 매입에 최적화","cautionSummary":"주요 임차인 만기 조율 필요","hiddenFields":["exact_address","seller_motivation"],"confidence":{"areaSignal":"confirmed","assetType":"confirmed","priceBand":"ai_hypothesis","fitSummary":"ai_hypothesis"},"missingData":["sizeSignal"],"boundaryNote":"본 자료는 실거래 통계 기반 참고치입니다.","buyerType":"법인 사옥형","budgetRange":{"min":50,"max":80,"display":"50억~80억"},"preferredRegions":["강남","성수"],"assetTypes":["꼬마빌딩","사옥용"],"purchasePurpose":"사옥용 매입","mustHave":["초역세권","주차"],"niceToHave":["테라스","루프탑"],"riskTolerance":"medium","financingNote":"자본금 50% 준비","missingQuestions":["구체적인 입주 시기가 언제인가요?","선호하는 수익률이 있나요?"],"privacyNotes":["연락처 비공개"],"fitReasons":["매수자 예산(50-80억)에 부합하는 매물입니다.","요청하신 성수/강남 권역에 해당합니다."],"cautionReasons":["요청한 용도와 달리 명도 협의가 다소 필요합니다."],"recommendedNextAction":"현장 답사 제안","kakaoMessage":"안녕하세요! 요청하신 조건에 부합하는 추천 매물이 있어 안내해 드립니다. 확인해보시고 피드백 부탁드립니다.","title":"강남 역삼역 초역세권 오피스 사옥용 빌딩 매각","shortSummary":"역삼역 도보 5분 거리의 준신축급 대형 오피스빌딩입니다.","dealPoints":["초역세권","사옥 최적"],"cautionPoints":["명도 조율 필요"],"hiddenInfoNotice":["보증금 및 지번은 인가 후 확인 가능"],"gateMessage":"G1 등급 등록이 필요합니다.","kakaoText":"강남 역삼역 오피스 빌딩 매각 안내입니다.","exactUnitCandidate":"101호","floor":"1층","areaSqmText":"150㎡","spaceType":"office","depositText":"5000만","monthlyRentText":"400만","maintenanceFeeText":"50만","availableFromText":"즉시입주","leaseTermMonthsText":"24","incentivesText":"렌트프리 2개월","restrictions":[],"landlordIdentity":"김성수","currentTenant":"스타트업","vacancyReason":"이전 확장","rentNegotiation":"협의 가능","region":"성수동","areaSqm":150,"deposit":5000,"monthlyRent":400,"maintenanceFee":50,"availableFrom":"즉시입주","leaseTermMonths":24,"incentives":{"rentFreeMonths":2,"interiorSupport":"일부 인테리어 지원","freeRentDetail":"렌트프리 2개월 지원"},"shortSummaryLease":"성수역 도보 5분 거리 1층 리테일 상가 매물입니다."}</a:t>
+            </a:r>
+            <a:endParaRPr lang="en-US" sz="1100" dirty="0"/>
+          </a:p>
+        </p:txBody>
+      </p:sp>
+      <p:sp>
+        <p:nvSpPr>
+          <p:cNvPr id="11" name="Text 9"/>
+          <p:cNvSpPr/>
+          <p:nvPr/>
+        </p:nvSpPr>
+        <p:spPr>
+          <a:xfrm>
+            <a:off x="566928" y="6382512"/>
+            <a:ext cx="7315200" cy="219456"/>
+          </a:xfrm>
+          <a:prstGeom prst="rect">
+            <a:avLst/>
+          </a:prstGeom>
+          <a:noFill/>
+          <a:ln/>
+        </p:spPr>
+        <p:txBody>
+          <a:bodyPr wrap="square" lIns="0" tIns="0" rIns="0" bIns="0" rtlCol="0" anchor="ctr"/>
+          <a:lstStyle/>
+          <a:p>
+            <a:pPr indent="0" marL="0">
+              <a:buNone/>
+            </a:pPr>
+            <a:r>
+              <a:rPr lang="en-US" sz="800" dirty="0">
+                <a:solidFill>
+                  <a:srgbClr val="718096"/>
+                </a:solidFill>
+                <a:latin typeface="Pretendard" pitchFamily="34" charset="0"/>
+                <a:ea typeface="Pretendard" pitchFamily="34" charset="-122"/>
+                <a:cs typeface="Pretendard" pitchFamily="34" charset="-120"/>
+              </a:rPr>
+              <a:t>크리딜   |   </a:t>
+            </a:r>
+            <a:endParaRPr lang="en-US" sz="800" dirty="0"/>
+          </a:p>
+        </p:txBody>
+      </p:sp>
+      <p:sp>
+        <p:nvSpPr>
+          <p:cNvPr id="12" name="Text 10"/>
+          <p:cNvSpPr/>
+          <p:nvPr/>
+        </p:nvSpPr>
+        <p:spPr>
+          <a:xfrm>
+            <a:off x="10710367" y="6382512"/>
+            <a:ext cx="914400" cy="219456"/>
+          </a:xfrm>
+          <a:prstGeom prst="rect">
+            <a:avLst/>
+          </a:prstGeom>
+          <a:noFill/>
+          <a:ln/>
+        </p:spPr>
+        <p:txBody>
+          <a:bodyPr wrap="square" lIns="0" tIns="0" rIns="0" bIns="0" rtlCol="0" anchor="ctr"/>
+          <a:lstStyle/>
+          <a:p>
+            <a:pPr algn="r" indent="0" marL="0">
+              <a:buNone/>
+            </a:pPr>
+            <a:r>
+              <a:rPr lang="en-US" sz="900" b="1" dirty="0">
+                <a:solidFill>
+                  <a:srgbClr val="B98A2E"/>
+                </a:solidFill>
+                <a:latin typeface="Arial" pitchFamily="34" charset="0"/>
+                <a:ea typeface="Arial" pitchFamily="34" charset="-122"/>
+                <a:cs typeface="Arial" pitchFamily="34" charset="-120"/>
+              </a:rPr>
+              <a:t>10</a:t>
+            </a:r>
+            <a:endParaRPr lang="en-US" sz="900" dirty="0"/>
+          </a:p>
+        </p:txBody>
+      </p:sp>
+    </p:spTree>
+  </p:cSld>
+  <p:clrMapOvr>
+    <a:masterClrMapping/>
+  </p:clrMapOvr>
+</p:sld>
+</file>
+
+<file path=ppt/slides/slide11.xml><?xml version="1.0" encoding="utf-8"?>
+<p:sld xmlns:a="http://schemas.openxmlformats.org/drawingml/2006/main" xmlns:r="http://schemas.openxmlformats.org/officeDocument/2006/relationships" xmlns:p="http://schemas.openxmlformats.org/presentationml/2006/main">
+  <p:cSld name="Slide 11">
+    <p:bg>
+      <p:bgPr>
+        <a:solidFill>
           <a:srgbClr val="10161F"/>
         </a:solidFill>
       </p:bgPr>
@@ -2368,7 +2885,7 @@
                 <a:ea typeface="Arial" pitchFamily="34" charset="-122"/>
                 <a:cs typeface="Arial" pitchFamily="34" charset="-120"/>
               </a:rPr>
-              <a:t>10</a:t>
+              <a:t>11</a:t>
             </a:r>
             <a:endParaRPr lang="en-US" sz="1300" dirty="0"/>
           </a:p>
@@ -3780,7 +4297,7 @@
                 <a:ea typeface="Arial" pitchFamily="34" charset="-122"/>
                 <a:cs typeface="Arial" pitchFamily="34" charset="-120"/>
               </a:rPr>
-              <a:t>10</a:t>
+              <a:t>11</a:t>
             </a:r>
             <a:endParaRPr lang="en-US" sz="900" dirty="0"/>
           </a:p>
@@ -5187,7 +5704,7 @@
                 <a:ea typeface="Pretendard" pitchFamily="34" charset="-122"/>
                 <a:cs typeface="Pretendard" pitchFamily="34" charset="-120"/>
               </a:rPr>
-              <a:t>교통 접근성</a:t>
+              <a:t>교통 접근성 상세 정보는 담당 브로커를 통해 확인하</a:t>
             </a:r>
             <a:endParaRPr lang="en-US" sz="1300" dirty="0"/>
           </a:p>
@@ -5220,16 +5737,70 @@
               </a:lnSpc>
               <a:buNone/>
             </a:pPr>
-            <a:r>
-              <a:rPr lang="en-US" sz="1300" b="1" dirty="0">
-                <a:solidFill>
-                  <a:srgbClr val="10161F"/>
+            <a:endParaRPr lang="en-US" sz="1300" dirty="0"/>
+          </a:p>
+        </p:txBody>
+      </p:sp>
+      <p:sp>
+        <p:nvSpPr>
+          <p:cNvPr id="9" name="Shape 6"/>
+          <p:cNvSpPr/>
+          <p:nvPr/>
+        </p:nvSpPr>
+        <p:spPr>
+          <a:xfrm>
+            <a:off x="6053328" y="1975104"/>
+            <a:ext cx="5571439" cy="0"/>
+          </a:xfrm>
+          <a:prstGeom prst="line">
+            <a:avLst/>
+          </a:prstGeom>
+          <a:noFill/>
+          <a:ln w="3810">
+            <a:solidFill>
+              <a:srgbClr val="CBD5E0"/>
+            </a:solidFill>
+            <a:prstDash val="solid"/>
+          </a:ln>
+        </p:spPr>
+      </p:sp>
+      <p:sp>
+        <p:nvSpPr>
+          <p:cNvPr id="10" name="Text 7"/>
+          <p:cNvSpPr/>
+          <p:nvPr/>
+        </p:nvSpPr>
+        <p:spPr>
+          <a:xfrm>
+            <a:off x="6053328" y="1975104"/>
+            <a:ext cx="2117147" cy="493776"/>
+          </a:xfrm>
+          <a:prstGeom prst="rect">
+            <a:avLst/>
+          </a:prstGeom>
+          <a:noFill/>
+          <a:ln/>
+        </p:spPr>
+        <p:txBody>
+          <a:bodyPr wrap="square" lIns="0" tIns="0" rIns="0" bIns="0" rtlCol="0" anchor="ctr"/>
+          <a:lstStyle/>
+          <a:p>
+            <a:pPr indent="0" marL="0">
+              <a:lnSpc>
+                <a:spcPct val="120000"/>
+              </a:lnSpc>
+              <a:buNone/>
+            </a:pPr>
+            <a:r>
+              <a:rPr lang="en-US" sz="1300" dirty="0">
+                <a:solidFill>
+                  <a:srgbClr val="718096"/>
                 </a:solidFill>
                 <a:latin typeface="Pretendard" pitchFamily="34" charset="0"/>
                 <a:ea typeface="Pretendard" pitchFamily="34" charset="-122"/>
                 <a:cs typeface="Pretendard" pitchFamily="34" charset="-120"/>
               </a:rPr>
-              <a:t>{"ok":true,"mocked":true,"extractedFields":{"area_signal":"역삼","asset_type":"오피스빌딩","price_band":"300억","size_signal":"3000평(약 9917.</a:t>
+              <a:t>[건물] 주변 상권</a:t>
             </a:r>
             <a:endParaRPr lang="en-US" sz="1300" dirty="0"/>
           </a:p>
@@ -5237,14 +5808,14 @@
       </p:sp>
       <p:sp>
         <p:nvSpPr>
-          <p:cNvPr id="9" name="Text 6"/>
-          <p:cNvSpPr/>
-          <p:nvPr/>
-        </p:nvSpPr>
-        <p:spPr>
-          <a:xfrm>
-            <a:off x="566928" y="6382512"/>
-            <a:ext cx="7315200" cy="219456"/>
+          <p:cNvPr id="11" name="Text 8"/>
+          <p:cNvSpPr/>
+          <p:nvPr/>
+        </p:nvSpPr>
+        <p:spPr>
+          <a:xfrm>
+            <a:off x="8170475" y="1975104"/>
+            <a:ext cx="3454292" cy="493776"/>
           </a:xfrm>
           <a:prstGeom prst="rect">
             <a:avLst/>
@@ -5257,17 +5828,155 @@
           <a:lstStyle/>
           <a:p>
             <a:pPr indent="0" marL="0">
-              <a:buNone/>
-            </a:pPr>
-            <a:r>
-              <a:rPr lang="en-US" sz="800" dirty="0">
-                <a:solidFill>
-                  <a:srgbClr val="718096"/>
+              <a:lnSpc>
+                <a:spcPct val="120000"/>
+              </a:lnSpc>
+              <a:buNone/>
+            </a:pPr>
+            <a:r>
+              <a:rPr lang="en-US" sz="1300" b="1" dirty="0">
+                <a:solidFill>
+                  <a:srgbClr val="10161F"/>
                 </a:solidFill>
                 <a:latin typeface="Pretendard" pitchFamily="34" charset="0"/>
                 <a:ea typeface="Pretendard" pitchFamily="34" charset="-122"/>
                 <a:cs typeface="Pretendard" pitchFamily="34" charset="-120"/>
               </a:rPr>
+              <a:t>한남권역 내 주요 비즈니스 및 유동인구 풍부한 상권 입지 ### [성장] 입지 평가</a:t>
+            </a:r>
+            <a:endParaRPr lang="en-US" sz="1300" dirty="0"/>
+          </a:p>
+        </p:txBody>
+      </p:sp>
+      <p:sp>
+        <p:nvSpPr>
+          <p:cNvPr id="12" name="Shape 9"/>
+          <p:cNvSpPr/>
+          <p:nvPr/>
+        </p:nvSpPr>
+        <p:spPr>
+          <a:xfrm>
+            <a:off x="6053328" y="2468880"/>
+            <a:ext cx="5571439" cy="0"/>
+          </a:xfrm>
+          <a:prstGeom prst="line">
+            <a:avLst/>
+          </a:prstGeom>
+          <a:noFill/>
+          <a:ln w="3810">
+            <a:solidFill>
+              <a:srgbClr val="CBD5E0"/>
+            </a:solidFill>
+            <a:prstDash val="solid"/>
+          </a:ln>
+        </p:spPr>
+      </p:sp>
+      <p:sp>
+        <p:nvSpPr>
+          <p:cNvPr id="13" name="Text 10"/>
+          <p:cNvSpPr/>
+          <p:nvPr/>
+        </p:nvSpPr>
+        <p:spPr>
+          <a:xfrm>
+            <a:off x="6053328" y="2468880"/>
+            <a:ext cx="2117147" cy="493776"/>
+          </a:xfrm>
+          <a:prstGeom prst="rect">
+            <a:avLst/>
+          </a:prstGeom>
+          <a:noFill/>
+          <a:ln/>
+        </p:spPr>
+        <p:txBody>
+          <a:bodyPr wrap="square" lIns="0" tIns="0" rIns="0" bIns="0" rtlCol="0" anchor="ctr"/>
+          <a:lstStyle/>
+          <a:p>
+            <a:pPr indent="0" marL="0">
+              <a:lnSpc>
+                <a:spcPct val="120000"/>
+              </a:lnSpc>
+              <a:buNone/>
+            </a:pPr>
+            <a:r>
+              <a:rPr lang="en-US" sz="1300" dirty="0">
+                <a:solidFill>
+                  <a:srgbClr val="718096"/>
+                </a:solidFill>
+                <a:latin typeface="Pretendard" pitchFamily="34" charset="0"/>
+                <a:ea typeface="Pretendard" pitchFamily="34" charset="-122"/>
+                <a:cs typeface="Pretendard" pitchFamily="34" charset="-120"/>
+              </a:rPr>
+              <a:t>한남권역 내 위치하며 접근성과 가시성이 양호한 입지</a:t>
+            </a:r>
+            <a:endParaRPr lang="en-US" sz="1300" dirty="0"/>
+          </a:p>
+        </p:txBody>
+      </p:sp>
+      <p:sp>
+        <p:nvSpPr>
+          <p:cNvPr id="14" name="Text 11"/>
+          <p:cNvSpPr/>
+          <p:nvPr/>
+        </p:nvSpPr>
+        <p:spPr>
+          <a:xfrm>
+            <a:off x="8170475" y="2468880"/>
+            <a:ext cx="3454292" cy="493776"/>
+          </a:xfrm>
+          <a:prstGeom prst="rect">
+            <a:avLst/>
+          </a:prstGeom>
+          <a:noFill/>
+          <a:ln/>
+        </p:spPr>
+        <p:txBody>
+          <a:bodyPr wrap="square" lIns="0" tIns="0" rIns="0" bIns="0" rtlCol="0" anchor="ctr"/>
+          <a:lstStyle/>
+          <a:p>
+            <a:pPr indent="0" marL="0">
+              <a:lnSpc>
+                <a:spcPct val="120000"/>
+              </a:lnSpc>
+              <a:buNone/>
+            </a:pPr>
+            <a:endParaRPr lang="en-US" sz="1300" dirty="0"/>
+          </a:p>
+        </p:txBody>
+      </p:sp>
+      <p:sp>
+        <p:nvSpPr>
+          <p:cNvPr id="15" name="Text 12"/>
+          <p:cNvSpPr/>
+          <p:nvPr/>
+        </p:nvSpPr>
+        <p:spPr>
+          <a:xfrm>
+            <a:off x="566928" y="6382512"/>
+            <a:ext cx="7315200" cy="219456"/>
+          </a:xfrm>
+          <a:prstGeom prst="rect">
+            <a:avLst/>
+          </a:prstGeom>
+          <a:noFill/>
+          <a:ln/>
+        </p:spPr>
+        <p:txBody>
+          <a:bodyPr wrap="square" lIns="0" tIns="0" rIns="0" bIns="0" rtlCol="0" anchor="ctr"/>
+          <a:lstStyle/>
+          <a:p>
+            <a:pPr indent="0" marL="0">
+              <a:buNone/>
+            </a:pPr>
+            <a:r>
+              <a:rPr lang="en-US" sz="800" dirty="0">
+                <a:solidFill>
+                  <a:srgbClr val="718096"/>
+                </a:solidFill>
+                <a:latin typeface="Pretendard" pitchFamily="34" charset="0"/>
+                <a:ea typeface="Pretendard" pitchFamily="34" charset="-122"/>
+                <a:cs typeface="Pretendard" pitchFamily="34" charset="-120"/>
+              </a:rPr>
               <a:t>크리딜   |   </a:t>
             </a:r>
             <a:endParaRPr lang="en-US" sz="800" dirty="0"/>
@@ -5276,7 +5985,7 @@
       </p:sp>
       <p:sp>
         <p:nvSpPr>
-          <p:cNvPr id="10" name="Text 7"/>
+          <p:cNvPr id="16" name="Text 13"/>
           <p:cNvSpPr/>
           <p:nvPr/>
         </p:nvSpPr>
@@ -5310,45 +6019,6 @@
               <a:t>3</a:t>
             </a:r>
             <a:endParaRPr lang="en-US" sz="900" dirty="0"/>
-          </a:p>
-        </p:txBody>
-      </p:sp>
-      <p:sp>
-        <p:nvSpPr>
-          <p:cNvPr id="11" name="Text 8"/>
-          <p:cNvSpPr/>
-          <p:nvPr/>
-        </p:nvSpPr>
-        <p:spPr>
-          <a:xfrm>
-            <a:off x="566928" y="1481328"/>
-            <a:ext cx="11057839" cy="9692640"/>
-          </a:xfrm>
-          <a:prstGeom prst="rect">
-            <a:avLst/>
-          </a:prstGeom>
-          <a:noFill/>
-          <a:ln/>
-        </p:spPr>
-        <p:txBody>
-          <a:bodyPr wrap="square" lIns="0" tIns="0" rIns="0" bIns="0" rtlCol="0" anchor="t"/>
-          <a:lstStyle/>
-          <a:p>
-            <a:pPr indent="0" marL="0">
-              <a:buNone/>
-            </a:pPr>
-            <a:r>
-              <a:rPr lang="en-US" sz="1000" dirty="0">
-                <a:solidFill>
-                  <a:srgbClr val="10161F"/>
-                </a:solidFill>
-                <a:latin typeface="Pretendard" pitchFamily="34" charset="0"/>
-                <a:ea typeface="Pretendard" pitchFamily="34" charset="-122"/>
-                <a:cs typeface="Pretendard" pitchFamily="34" charset="-120"/>
-              </a:rPr>
-              <a:t>{"ok":true,"mocked":true,"extractedFields":{"area_signal":"역삼","asset_type":"오피스빌딩","price_band":"300억","size_signal":"3000평(약 9917.4㎡)"},"extractedFacts":{"region":"역삼","exactAddressCandidate":"역삼동 742-1","assetType":"오피스빌딩","priceText":"300억","sizeText":"3000평(약 9917.4㎡)","currentUse":"오피스","currentUseSignal":"근린생활시설","leaseSignal":"임대중","vacancySignal":"공실없음","tenantNames":["쿠팡","네이버"],"unitRentTexts":["301호: 1500만"],"sellerMotivationText":"자산 효율화","brokerNotes":["초역세권 매물"]},"detectedSensitiveFields":["exact_address","tenant_name"],"ambiguousFields":[],"warnings":[],"areaSignal":"역삼","assetType":"오피스빌딩","priceBand":"300억","sizeSignal":"3000평(약 9917.4㎡)","dealType":"매각","buildingName":"역삼 센트럴타워","exactAddress":"역삼동 742-1","totalFloorArea":9917.3,"buildYear":2015,"currentUseSignal":"근린생활시설","vacancySignal":"공실 없음","fitSummary":"초역세권 근생 빌딩으로 시행/사옥 매입에 최적화","cautionSummary":"주요 임차인 만기 조율 필요","hiddenFields":["exact_address","seller_motivation"],"confidence":{"areaSignal":"confirmed","assetType":"confirmed","priceBand":"ai_hypothesis","fitSummary":"ai_hypothesis"},"missingData":["sizeSignal"],"boundaryNote":"본 자료는 실거래 통계 기반 참고치입니다.","buyerType":"법인 사옥형","budgetRange":{"min":50,"max":80,"display":"50억~80억"},"preferredRegions":["강남","성수"],"assetTypes":["꼬마빌딩","사옥용"],"purchasePurpose":"사옥용 매입","mustHave":["초역세권","주차"],"niceToHave":["테라스","루프탑"],"riskTolerance":"medium","financingNote":"자본금 50% 준비","missingQuestions":["구체적인 입주 시기가 언제인가요?","선호하는 수익률이 있나요?"],"privacyNotes":["연락처 비공개"],"fitReasons":["매수자 예산(50-80억)에 부합하는 매물입니다.","요청하신 성수/강남 권역에 해당합니다."],"cautionReasons":["요청한 용도와 달리 명도 협의가 다소 필요합니다."],"recommendedNextAction":"현장 답사 제안","kakaoMessage":"안녕하세요! 요청하신 조건에 부합하는 추천 매물이 있어 안내해 드립니다. 확인해보시고 피드백 부탁드립니다.","title":"강남 역삼역 초역세권 오피스 사옥용 빌딩 매각","shortSummary":"역삼역 도보 5분 거리의 준신축급 대형 오피스빌딩입니다.","dealPoints":["초역세권","사옥 최적"],"cautionPoints":["명도 조율 필요"],"hiddenInfoNotice":["보증금 및 지번은 인가 후 확인 가능"],"gateMessage":"G1 등급 등록이 필요합니다.","kakaoText":"강남 역삼역 오피스 빌딩 매각 안내입니다.","exactUnitCandidate":"101호","floor":"1층","areaSqmText":"150㎡","spaceType":"office","depositText":"5000만","monthlyRentText":"400만","maintenanceFeeText":"50만","availableFromText":"즉시입주","leaseTermMonthsText":"24","incentivesText":"렌트프리 2개월","restrictions":[],"landlordIdentity":"김성수","currentTenant":"스타트업","vacancyReason":"이전 확장","rentNegotiation":"협의 가능","region":"성수동","areaSqm":150,"deposit":5000,"monthlyRent":400,"maintenanceFee":50,"availableFrom":"즉시입주","leaseTermMonths":24,"incentives":{"rentFreeMonths":2,"interiorSupport":"일부 인테리어 지원","freeRentDetail":"렌트프리 2개월 지원"},"shortSummaryLease":"성수역 도보 5분 거리 1층 리테일 상가 매물입니다."}</a:t>
-            </a:r>
-            <a:endParaRPr lang="en-US" sz="1000" dirty="0"/>
           </a:p>
         </p:txBody>
       </p:sp>
@@ -5596,7 +6266,7 @@
                 <a:ea typeface="Pretendard" pitchFamily="34" charset="-122"/>
                 <a:cs typeface="Pretendard" pitchFamily="34" charset="-120"/>
               </a:rPr>
-              <a:t>주요 용도</a:t>
+              <a:t>{"ok"</a:t>
             </a:r>
             <a:endParaRPr lang="en-US" sz="1400" dirty="0"/>
           </a:p>
@@ -5638,7 +6308,7 @@
                 <a:ea typeface="Pretendard" pitchFamily="34" charset="-122"/>
                 <a:cs typeface="Pretendard" pitchFamily="34" charset="-120"/>
               </a:rPr>
-              <a:t>확인 필요</a:t>
+              <a:t>true,"mocked":true,"extractedFields":{"area_signal":"역삼","asset_type":"오피스빌딩","price_band":"300억","size_signal":"3000평(약 9917.4㎡)"},"extractedFacts":{"region":"역삼","exactAddressCandidate":"역삼동 742-1","assetType":"오피스빌딩","priceText":"300억","sizeText":"3000평(약 9917.4㎡)","currentUse":"오피스","currentUseSignal":"근린생활시설","leaseSignal":"임대중","vacancySignal":"공실없음","tenantNames":"쿠팡","네이버","unitRentTexts":"301호: 1500만","sellerMotivationText":"자산 효율화","brokerNotes":"초역세권 매물"},"detectedSensitiveFields":"exact_address","tenant_name","ambiguousFields":,"warnings":,"areaSignal":"역삼","assetType":"오피스빌딩","priceBand":"300억","sizeSignal":"3000평(약 9917.4㎡)","dealType":"매각","buildingName":"역삼 센트럴타워","exactAddress":"역삼동 742-1","totalFloorArea":9917.3,"buildYear":2015,"currentUseSignal":"근린생활시설","vacancySignal":"공실 없음","fitSummary":"초역세권 근생 빌딩으로 시행/사옥 매입에 최적화","cautionSummary":"주요 임차인 만기 조율 필요","hiddenFields":"exact_address","seller_motivation","confidence":{"areaSignal":"confirmed","assetType":"confirmed","priceBand":"ai_hypothesis","fitSummary":"ai_hypothesis"},"missingData":"sizeSignal","boundaryNote":"본 자료는 실거래 통계 기반 참고치입니다.","buyerType":"법인 사옥형","budgetRange":{"min":50,"max":80,"display":"50억~80억"},"preferredRegions":"강남","성수","assetTypes":"꼬마빌딩","사옥용","purchasePurpose":"사옥용 매입","mustHave":"초역세권","주차","niceToHave":"테라스","루프탑","riskTolerance":"medium","financingNote":"자본금 50% 준비","missingQuestions":"구체적인 입주 시기가 언제인가요?","선호하는 수익률이 있나요?","privacyNotes":"연락처 비공개","fitReasons":"매수자 예산(50-80억)에 부합하는 매물입니다.","요청하신 성수/강남 권역에 해당합니다.","cautionReasons":"요청한 용도와 달리 명도 협의가 다소 필요합니다.","recommendedNextAction":"현장 답사 제안","kakaoMessage":"안녕하세요! 요청하신 조건에 부합하는 추천 매물이 있어 안내해 드립니다. 확인해보시고 피드백 부탁드립니다.","title":"강남 역삼역 초역세권 오피스 사옥용 빌딩 매각","shortSummary":"역삼역 도보 5분 거리의 준신축급 대형 오피스빌딩입니다.","dealPoints":"초역세권","사옥 최적","cautionPoints":"명도 조율 필요","hiddenInfoNotice":"보증금 및 지번은 인가 후 확인 가능","gateMessage":"G1 등급 등록이 필요합니다.","kakaoText":"강남 역삼역 오피스 빌딩 매각 안내입니다.","exactUnitCandidate":"101호","floor":"1층","areaSqmText":"150㎡","spaceType":"office","depositText":"5000만","monthlyRentText":"400만","maintenanceFeeText":"50만","availableFromText":"즉시입주","leaseTermMonthsText":"24","incentivesText":"렌트프리 2개월","restrictions":,"landlordIdentity":"김성수","currentTenant":"스타트업","vacancyReason":"이전 확장","rentNegotiation":"협의 가능","region":"성수동","areaSqm":150,"deposit":5000,"monthlyRent":400,"maintenanceFee":50,"availableFrom":"즉시입주","leaseTermMonths":24,"incentives":{"rentFreeMonths":2,"interiorSupport":"일부 인테리어 지원","freeRentDetail":"렌트프리 2개월 지원"},"shortSummaryLease":"성수역 도보 5분 거리 1층 리테일 상가 매물입니다."}</a:t>
             </a:r>
             <a:endParaRPr lang="en-US" sz="1400" dirty="0"/>
           </a:p>
@@ -5647,434 +6317,6 @@
       <p:sp>
         <p:nvSpPr>
           <p:cNvPr id="9" name="Shape 7"/>
-          <p:cNvSpPr/>
-          <p:nvPr/>
-        </p:nvSpPr>
-        <p:spPr>
-          <a:xfrm>
-            <a:off x="566928" y="2048256"/>
-            <a:ext cx="6858000" cy="0"/>
-          </a:xfrm>
-          <a:prstGeom prst="line">
-            <a:avLst/>
-          </a:prstGeom>
-          <a:noFill/>
-          <a:ln w="3810">
-            <a:solidFill>
-              <a:srgbClr val="CBD5E0"/>
-            </a:solidFill>
-            <a:prstDash val="solid"/>
-          </a:ln>
-        </p:spPr>
-      </p:sp>
-      <p:sp>
-        <p:nvSpPr>
-          <p:cNvPr id="10" name="Text 8"/>
-          <p:cNvSpPr/>
-          <p:nvPr/>
-        </p:nvSpPr>
-        <p:spPr>
-          <a:xfrm>
-            <a:off x="566928" y="2048256"/>
-            <a:ext cx="2606040" cy="402336"/>
-          </a:xfrm>
-          <a:prstGeom prst="rect">
-            <a:avLst/>
-          </a:prstGeom>
-          <a:noFill/>
-          <a:ln/>
-        </p:spPr>
-        <p:txBody>
-          <a:bodyPr wrap="square" lIns="0" tIns="0" rIns="0" bIns="0" rtlCol="0" anchor="ctr"/>
-          <a:lstStyle/>
-          <a:p>
-            <a:pPr indent="0" marL="0">
-              <a:lnSpc>
-                <a:spcPct val="120000"/>
-              </a:lnSpc>
-              <a:buNone/>
-            </a:pPr>
-            <a:r>
-              <a:rPr lang="en-US" sz="1400" dirty="0">
-                <a:solidFill>
-                  <a:srgbClr val="718096"/>
-                </a:solidFill>
-                <a:latin typeface="Pretendard" pitchFamily="34" charset="0"/>
-                <a:ea typeface="Pretendard" pitchFamily="34" charset="-122"/>
-                <a:cs typeface="Pretendard" pitchFamily="34" charset="-120"/>
-              </a:rPr>
-              <a:t>연면적</a:t>
-            </a:r>
-            <a:endParaRPr lang="en-US" sz="1400" dirty="0"/>
-          </a:p>
-        </p:txBody>
-      </p:sp>
-      <p:sp>
-        <p:nvSpPr>
-          <p:cNvPr id="11" name="Text 9"/>
-          <p:cNvSpPr/>
-          <p:nvPr/>
-        </p:nvSpPr>
-        <p:spPr>
-          <a:xfrm>
-            <a:off x="3172968" y="2048256"/>
-            <a:ext cx="4251960" cy="402336"/>
-          </a:xfrm>
-          <a:prstGeom prst="rect">
-            <a:avLst/>
-          </a:prstGeom>
-          <a:noFill/>
-          <a:ln/>
-        </p:spPr>
-        <p:txBody>
-          <a:bodyPr wrap="square" lIns="0" tIns="0" rIns="0" bIns="0" rtlCol="0" anchor="ctr"/>
-          <a:lstStyle/>
-          <a:p>
-            <a:pPr indent="0" marL="0">
-              <a:lnSpc>
-                <a:spcPct val="120000"/>
-              </a:lnSpc>
-              <a:buNone/>
-            </a:pPr>
-            <a:r>
-              <a:rPr lang="en-US" sz="1400" b="1" dirty="0">
-                <a:solidFill>
-                  <a:srgbClr val="10161F"/>
-                </a:solidFill>
-                <a:latin typeface="Pretendard" pitchFamily="34" charset="0"/>
-                <a:ea typeface="Pretendard" pitchFamily="34" charset="-122"/>
-                <a:cs typeface="Pretendard" pitchFamily="34" charset="-120"/>
-              </a:rPr>
-              <a:t>5,000㎡ (약 1513평(약 5001.7㎡))</a:t>
-            </a:r>
-            <a:endParaRPr lang="en-US" sz="1400" dirty="0"/>
-          </a:p>
-        </p:txBody>
-      </p:sp>
-      <p:sp>
-        <p:nvSpPr>
-          <p:cNvPr id="12" name="Shape 10"/>
-          <p:cNvSpPr/>
-          <p:nvPr/>
-        </p:nvSpPr>
-        <p:spPr>
-          <a:xfrm>
-            <a:off x="566928" y="2450592"/>
-            <a:ext cx="6858000" cy="0"/>
-          </a:xfrm>
-          <a:prstGeom prst="line">
-            <a:avLst/>
-          </a:prstGeom>
-          <a:noFill/>
-          <a:ln w="3810">
-            <a:solidFill>
-              <a:srgbClr val="CBD5E0"/>
-            </a:solidFill>
-            <a:prstDash val="solid"/>
-          </a:ln>
-        </p:spPr>
-      </p:sp>
-      <p:sp>
-        <p:nvSpPr>
-          <p:cNvPr id="13" name="Text 11"/>
-          <p:cNvSpPr/>
-          <p:nvPr/>
-        </p:nvSpPr>
-        <p:spPr>
-          <a:xfrm>
-            <a:off x="566928" y="2450592"/>
-            <a:ext cx="2606040" cy="402336"/>
-          </a:xfrm>
-          <a:prstGeom prst="rect">
-            <a:avLst/>
-          </a:prstGeom>
-          <a:noFill/>
-          <a:ln/>
-        </p:spPr>
-        <p:txBody>
-          <a:bodyPr wrap="square" lIns="0" tIns="0" rIns="0" bIns="0" rtlCol="0" anchor="ctr"/>
-          <a:lstStyle/>
-          <a:p>
-            <a:pPr indent="0" marL="0">
-              <a:lnSpc>
-                <a:spcPct val="120000"/>
-              </a:lnSpc>
-              <a:buNone/>
-            </a:pPr>
-            <a:r>
-              <a:rPr lang="en-US" sz="1400" dirty="0">
-                <a:solidFill>
-                  <a:srgbClr val="718096"/>
-                </a:solidFill>
-                <a:latin typeface="Pretendard" pitchFamily="34" charset="0"/>
-                <a:ea typeface="Pretendard" pitchFamily="34" charset="-122"/>
-                <a:cs typeface="Pretendard" pitchFamily="34" charset="-120"/>
-              </a:rPr>
-              <a:t>대지면적</a:t>
-            </a:r>
-            <a:endParaRPr lang="en-US" sz="1400" dirty="0"/>
-          </a:p>
-        </p:txBody>
-      </p:sp>
-      <p:sp>
-        <p:nvSpPr>
-          <p:cNvPr id="14" name="Text 12"/>
-          <p:cNvSpPr/>
-          <p:nvPr/>
-        </p:nvSpPr>
-        <p:spPr>
-          <a:xfrm>
-            <a:off x="3172968" y="2450592"/>
-            <a:ext cx="4251960" cy="402336"/>
-          </a:xfrm>
-          <a:prstGeom prst="rect">
-            <a:avLst/>
-          </a:prstGeom>
-          <a:noFill/>
-          <a:ln/>
-        </p:spPr>
-        <p:txBody>
-          <a:bodyPr wrap="square" lIns="0" tIns="0" rIns="0" bIns="0" rtlCol="0" anchor="ctr"/>
-          <a:lstStyle/>
-          <a:p>
-            <a:pPr indent="0" marL="0">
-              <a:lnSpc>
-                <a:spcPct val="120000"/>
-              </a:lnSpc>
-              <a:buNone/>
-            </a:pPr>
-            <a:r>
-              <a:rPr lang="en-US" sz="1400" b="1" dirty="0">
-                <a:solidFill>
-                  <a:srgbClr val="10161F"/>
-                </a:solidFill>
-                <a:latin typeface="Pretendard" pitchFamily="34" charset="0"/>
-                <a:ea typeface="Pretendard" pitchFamily="34" charset="-122"/>
-                <a:cs typeface="Pretendard" pitchFamily="34" charset="-120"/>
-              </a:rPr>
-              <a:t>1,000㎡ (약 303평(약 1001.7㎡))</a:t>
-            </a:r>
-            <a:endParaRPr lang="en-US" sz="1400" dirty="0"/>
-          </a:p>
-        </p:txBody>
-      </p:sp>
-      <p:sp>
-        <p:nvSpPr>
-          <p:cNvPr id="15" name="Shape 13"/>
-          <p:cNvSpPr/>
-          <p:nvPr/>
-        </p:nvSpPr>
-        <p:spPr>
-          <a:xfrm>
-            <a:off x="566928" y="2852928"/>
-            <a:ext cx="6858000" cy="0"/>
-          </a:xfrm>
-          <a:prstGeom prst="line">
-            <a:avLst/>
-          </a:prstGeom>
-          <a:noFill/>
-          <a:ln w="3810">
-            <a:solidFill>
-              <a:srgbClr val="CBD5E0"/>
-            </a:solidFill>
-            <a:prstDash val="solid"/>
-          </a:ln>
-        </p:spPr>
-      </p:sp>
-      <p:sp>
-        <p:nvSpPr>
-          <p:cNvPr id="16" name="Text 14"/>
-          <p:cNvSpPr/>
-          <p:nvPr/>
-        </p:nvSpPr>
-        <p:spPr>
-          <a:xfrm>
-            <a:off x="566928" y="2852928"/>
-            <a:ext cx="2606040" cy="402336"/>
-          </a:xfrm>
-          <a:prstGeom prst="rect">
-            <a:avLst/>
-          </a:prstGeom>
-          <a:noFill/>
-          <a:ln/>
-        </p:spPr>
-        <p:txBody>
-          <a:bodyPr wrap="square" lIns="0" tIns="0" rIns="0" bIns="0" rtlCol="0" anchor="ctr"/>
-          <a:lstStyle/>
-          <a:p>
-            <a:pPr indent="0" marL="0">
-              <a:lnSpc>
-                <a:spcPct val="120000"/>
-              </a:lnSpc>
-              <a:buNone/>
-            </a:pPr>
-            <a:r>
-              <a:rPr lang="en-US" sz="1400" dirty="0">
-                <a:solidFill>
-                  <a:srgbClr val="718096"/>
-                </a:solidFill>
-                <a:latin typeface="Pretendard" pitchFamily="34" charset="0"/>
-                <a:ea typeface="Pretendard" pitchFamily="34" charset="-122"/>
-                <a:cs typeface="Pretendard" pitchFamily="34" charset="-120"/>
-              </a:rPr>
-              <a:t>용도지역</a:t>
-            </a:r>
-            <a:endParaRPr lang="en-US" sz="1400" dirty="0"/>
-          </a:p>
-        </p:txBody>
-      </p:sp>
-      <p:sp>
-        <p:nvSpPr>
-          <p:cNvPr id="17" name="Text 15"/>
-          <p:cNvSpPr/>
-          <p:nvPr/>
-        </p:nvSpPr>
-        <p:spPr>
-          <a:xfrm>
-            <a:off x="3172968" y="2852928"/>
-            <a:ext cx="4251960" cy="402336"/>
-          </a:xfrm>
-          <a:prstGeom prst="rect">
-            <a:avLst/>
-          </a:prstGeom>
-          <a:noFill/>
-          <a:ln/>
-        </p:spPr>
-        <p:txBody>
-          <a:bodyPr wrap="square" lIns="0" tIns="0" rIns="0" bIns="0" rtlCol="0" anchor="ctr"/>
-          <a:lstStyle/>
-          <a:p>
-            <a:pPr indent="0" marL="0">
-              <a:lnSpc>
-                <a:spcPct val="120000"/>
-              </a:lnSpc>
-              <a:buNone/>
-            </a:pPr>
-            <a:r>
-              <a:rPr lang="en-US" sz="1400" b="1" dirty="0">
-                <a:solidFill>
-                  <a:srgbClr val="10161F"/>
-                </a:solidFill>
-                <a:latin typeface="Pretendard" pitchFamily="34" charset="0"/>
-                <a:ea typeface="Pretendard" pitchFamily="34" charset="-122"/>
-                <a:cs typeface="Pretendard" pitchFamily="34" charset="-120"/>
-              </a:rPr>
-              <a:t>일반상업지역</a:t>
-            </a:r>
-            <a:endParaRPr lang="en-US" sz="1400" dirty="0"/>
-          </a:p>
-        </p:txBody>
-      </p:sp>
-      <p:sp>
-        <p:nvSpPr>
-          <p:cNvPr id="18" name="Shape 16"/>
-          <p:cNvSpPr/>
-          <p:nvPr/>
-        </p:nvSpPr>
-        <p:spPr>
-          <a:xfrm>
-            <a:off x="566928" y="3255264"/>
-            <a:ext cx="6858000" cy="0"/>
-          </a:xfrm>
-          <a:prstGeom prst="line">
-            <a:avLst/>
-          </a:prstGeom>
-          <a:noFill/>
-          <a:ln w="3810">
-            <a:solidFill>
-              <a:srgbClr val="CBD5E0"/>
-            </a:solidFill>
-            <a:prstDash val="solid"/>
-          </a:ln>
-        </p:spPr>
-      </p:sp>
-      <p:sp>
-        <p:nvSpPr>
-          <p:cNvPr id="19" name="Text 17"/>
-          <p:cNvSpPr/>
-          <p:nvPr/>
-        </p:nvSpPr>
-        <p:spPr>
-          <a:xfrm>
-            <a:off x="566928" y="3255264"/>
-            <a:ext cx="2606040" cy="402336"/>
-          </a:xfrm>
-          <a:prstGeom prst="rect">
-            <a:avLst/>
-          </a:prstGeom>
-          <a:noFill/>
-          <a:ln/>
-        </p:spPr>
-        <p:txBody>
-          <a:bodyPr wrap="square" lIns="0" tIns="0" rIns="0" bIns="0" rtlCol="0" anchor="ctr"/>
-          <a:lstStyle/>
-          <a:p>
-            <a:pPr indent="0" marL="0">
-              <a:lnSpc>
-                <a:spcPct val="120000"/>
-              </a:lnSpc>
-              <a:buNone/>
-            </a:pPr>
-            <a:r>
-              <a:rPr lang="en-US" sz="1400" dirty="0">
-                <a:solidFill>
-                  <a:srgbClr val="718096"/>
-                </a:solidFill>
-                <a:latin typeface="Pretendard" pitchFamily="34" charset="0"/>
-                <a:ea typeface="Pretendard" pitchFamily="34" charset="-122"/>
-                <a:cs typeface="Pretendard" pitchFamily="34" charset="-120"/>
-              </a:rPr>
-              <a:t>매매 희망가</a:t>
-            </a:r>
-            <a:endParaRPr lang="en-US" sz="1400" dirty="0"/>
-          </a:p>
-        </p:txBody>
-      </p:sp>
-      <p:sp>
-        <p:nvSpPr>
-          <p:cNvPr id="20" name="Text 18"/>
-          <p:cNvSpPr/>
-          <p:nvPr/>
-        </p:nvSpPr>
-        <p:spPr>
-          <a:xfrm>
-            <a:off x="3172968" y="3255264"/>
-            <a:ext cx="4251960" cy="402336"/>
-          </a:xfrm>
-          <a:prstGeom prst="rect">
-            <a:avLst/>
-          </a:prstGeom>
-          <a:noFill/>
-          <a:ln/>
-        </p:spPr>
-        <p:txBody>
-          <a:bodyPr wrap="square" lIns="0" tIns="0" rIns="0" bIns="0" rtlCol="0" anchor="ctr"/>
-          <a:lstStyle/>
-          <a:p>
-            <a:pPr indent="0" marL="0">
-              <a:lnSpc>
-                <a:spcPct val="120000"/>
-              </a:lnSpc>
-              <a:buNone/>
-            </a:pPr>
-            <a:r>
-              <a:rPr lang="en-US" sz="1400" b="1" dirty="0">
-                <a:solidFill>
-                  <a:srgbClr val="10161F"/>
-                </a:solidFill>
-                <a:latin typeface="Pretendard" pitchFamily="34" charset="0"/>
-                <a:ea typeface="Pretendard" pitchFamily="34" charset="-122"/>
-                <a:cs typeface="Pretendard" pitchFamily="34" charset="-120"/>
-              </a:rPr>
-              <a:t>180억</a:t>
-            </a:r>
-            <a:endParaRPr lang="en-US" sz="1400" dirty="0"/>
-          </a:p>
-        </p:txBody>
-      </p:sp>
-      <p:sp>
-        <p:nvSpPr>
-          <p:cNvPr id="21" name="Shape 19"/>
           <p:cNvSpPr/>
           <p:nvPr/>
         </p:nvSpPr>
@@ -6097,7 +6339,7 @@
       </p:sp>
       <p:sp>
         <p:nvSpPr>
-          <p:cNvPr id="22" name="Shape 20"/>
+          <p:cNvPr id="10" name="Shape 8"/>
           <p:cNvSpPr/>
           <p:nvPr/>
         </p:nvSpPr>
@@ -6112,14 +6354,14 @@
             </a:avLst>
           </a:prstGeom>
           <a:solidFill>
-            <a:srgbClr val="BEE3F8"/>
+            <a:srgbClr val="F3EBDA"/>
           </a:solidFill>
           <a:ln/>
         </p:spPr>
       </p:sp>
       <p:sp>
         <p:nvSpPr>
-          <p:cNvPr id="23" name="Shape 21"/>
+          <p:cNvPr id="11" name="Shape 9"/>
           <p:cNvSpPr/>
           <p:nvPr/>
         </p:nvSpPr>
@@ -6132,14 +6374,14 @@
             <a:avLst/>
           </a:prstGeom>
           <a:solidFill>
-            <a:srgbClr val="2B6CB0"/>
+            <a:srgbClr val="977024"/>
           </a:solidFill>
           <a:ln/>
         </p:spPr>
       </p:sp>
       <p:sp>
         <p:nvSpPr>
-          <p:cNvPr id="24" name="Text 22"/>
+          <p:cNvPr id="12" name="Text 10"/>
           <p:cNvSpPr/>
           <p:nvPr/>
         </p:nvSpPr>
@@ -6161,305 +6403,85 @@
             <a:pPr indent="0" marL="0">
               <a:buNone/>
             </a:pPr>
-            <a:r>
-              <a:rPr lang="en-US" sz="1050" b="1" dirty="0">
-                <a:solidFill>
-                  <a:srgbClr val="2B6CB0"/>
+            <a:endParaRPr lang="en-US" sz="1050" dirty="0"/>
+          </a:p>
+        </p:txBody>
+      </p:sp>
+      <p:sp>
+        <p:nvSpPr>
+          <p:cNvPr id="13" name="Text 11"/>
+          <p:cNvSpPr/>
+          <p:nvPr/>
+        </p:nvSpPr>
+        <p:spPr>
+          <a:xfrm>
+            <a:off x="7967167" y="1975104"/>
+            <a:ext cx="3511296" cy="1700784"/>
+          </a:xfrm>
+          <a:prstGeom prst="rect">
+            <a:avLst/>
+          </a:prstGeom>
+          <a:noFill/>
+          <a:ln/>
+        </p:spPr>
+        <p:txBody>
+          <a:bodyPr wrap="square" lIns="0" tIns="0" rIns="0" bIns="0" rtlCol="0" anchor="t"/>
+          <a:lstStyle/>
+          <a:p>
+            <a:pPr indent="0" marL="0">
+              <a:lnSpc>
+                <a:spcPct val="120000"/>
+              </a:lnSpc>
+              <a:buNone/>
+            </a:pPr>
+            <a:r>
+              <a:rPr lang="en-US" sz="930" dirty="0">
+                <a:solidFill>
+                  <a:srgbClr val="10161F"/>
                 </a:solidFill>
                 <a:latin typeface="Pretendard" pitchFamily="34" charset="0"/>
                 <a:ea typeface="Pretendard" pitchFamily="34" charset="-122"/>
                 <a:cs typeface="Pretendard" pitchFamily="34" charset="-120"/>
               </a:rPr>
-              <a:t>토지 및 건물 분석 포인트</a:t>
-            </a:r>
-            <a:endParaRPr lang="en-US" sz="1050" dirty="0"/>
-          </a:p>
-        </p:txBody>
-      </p:sp>
-      <p:sp>
-        <p:nvSpPr>
-          <p:cNvPr id="25" name="Text 23"/>
-          <p:cNvSpPr/>
-          <p:nvPr/>
-        </p:nvSpPr>
-        <p:spPr>
-          <a:xfrm>
-            <a:off x="7967167" y="1975104"/>
-            <a:ext cx="3511296" cy="1700784"/>
-          </a:xfrm>
-          <a:prstGeom prst="rect">
-            <a:avLst/>
-          </a:prstGeom>
-          <a:noFill/>
-          <a:ln/>
-        </p:spPr>
-        <p:txBody>
-          <a:bodyPr wrap="square" lIns="0" tIns="0" rIns="0" bIns="0" rtlCol="0" anchor="t"/>
-          <a:lstStyle/>
-          <a:p>
-            <a:pPr marL="342900" indent="-342900">
-              <a:lnSpc>
-                <a:spcPct val="120000"/>
-              </a:lnSpc>
-              <a:buSzPct val="100000"/>
-              <a:buChar char="•"/>
-            </a:pPr>
-            <a:r>
-              <a:rPr lang="en-US" sz="930" dirty="0">
-                <a:solidFill>
-                  <a:srgbClr val="10161F"/>
+              <a:t>{"ok":true,"mocked":true,"extractedFields":{"area_signal":"역삼","asset_type":"오피스빌딩","price_band":"300억","size_signal":"3</a:t>
+            </a:r>
+            <a:endParaRPr lang="en-US" sz="930" dirty="0"/>
+          </a:p>
+        </p:txBody>
+      </p:sp>
+      <p:sp>
+        <p:nvSpPr>
+          <p:cNvPr id="14" name="Text 12"/>
+          <p:cNvSpPr/>
+          <p:nvPr/>
+        </p:nvSpPr>
+        <p:spPr>
+          <a:xfrm>
+            <a:off x="566928" y="6382512"/>
+            <a:ext cx="7315200" cy="219456"/>
+          </a:xfrm>
+          <a:prstGeom prst="rect">
+            <a:avLst/>
+          </a:prstGeom>
+          <a:noFill/>
+          <a:ln/>
+        </p:spPr>
+        <p:txBody>
+          <a:bodyPr wrap="square" lIns="0" tIns="0" rIns="0" bIns="0" rtlCol="0" anchor="ctr"/>
+          <a:lstStyle/>
+          <a:p>
+            <a:pPr indent="0" marL="0">
+              <a:buNone/>
+            </a:pPr>
+            <a:r>
+              <a:rPr lang="en-US" sz="800" dirty="0">
+                <a:solidFill>
+                  <a:srgbClr val="718096"/>
                 </a:solidFill>
                 <a:latin typeface="Pretendard" pitchFamily="34" charset="0"/>
                 <a:ea typeface="Pretendard" pitchFamily="34" charset="-122"/>
                 <a:cs typeface="Pretendard" pitchFamily="34" charset="-120"/>
               </a:rPr>
-              <a:t>물건 접면 도로 및 교통 여건은 현장 확인 사항입니다</a:t>
-            </a:r>
-            <a:endParaRPr lang="en-US" sz="930" dirty="0"/>
-          </a:p>
-          <a:p>
-            <a:pPr marL="342900" indent="-342900">
-              <a:lnSpc>
-                <a:spcPct val="120000"/>
-              </a:lnSpc>
-              <a:buSzPct val="100000"/>
-              <a:buChar char="•"/>
-            </a:pPr>
-            <a:r>
-              <a:rPr lang="en-US" sz="930" dirty="0">
-                <a:solidFill>
-                  <a:srgbClr val="10161F"/>
-                </a:solidFill>
-                <a:latin typeface="Pretendard" pitchFamily="34" charset="0"/>
-                <a:ea typeface="Pretendard" pitchFamily="34" charset="-122"/>
-                <a:cs typeface="Pretendard" pitchFamily="34" charset="-120"/>
-              </a:rPr>
-              <a:t>상세 건물 제원은 실사 자료를 참조하시기 바랍니다</a:t>
-            </a:r>
-            <a:endParaRPr lang="en-US" sz="930" dirty="0"/>
-          </a:p>
-          <a:p>
-            <a:pPr marL="342900" indent="-342900">
-              <a:lnSpc>
-                <a:spcPct val="120000"/>
-              </a:lnSpc>
-              <a:buSzPct val="100000"/>
-              <a:buChar char="•"/>
-            </a:pPr>
-            <a:r>
-              <a:rPr lang="en-US" sz="930" dirty="0">
-                <a:solidFill>
-                  <a:srgbClr val="10161F"/>
-                </a:solidFill>
-                <a:latin typeface="Pretendard" pitchFamily="34" charset="0"/>
-                <a:ea typeface="Pretendard" pitchFamily="34" charset="-122"/>
-                <a:cs typeface="Pretendard" pitchFamily="34" charset="-120"/>
-              </a:rPr>
-              <a:t>건물 현황 및 규모는 첨부 대장을 기준으로 합니다</a:t>
-            </a:r>
-            <a:endParaRPr lang="en-US" sz="930" dirty="0"/>
-          </a:p>
-        </p:txBody>
-      </p:sp>
-      <p:sp>
-        <p:nvSpPr>
-          <p:cNvPr id="26" name="Shape 24"/>
-          <p:cNvSpPr/>
-          <p:nvPr/>
-        </p:nvSpPr>
-        <p:spPr>
-          <a:xfrm>
-            <a:off x="7784287" y="3977640"/>
-            <a:ext cx="3840480" cy="2148840"/>
-          </a:xfrm>
-          <a:prstGeom prst="roundRect">
-            <a:avLst>
-              <a:gd name="adj" fmla="val 2553"/>
-            </a:avLst>
-          </a:prstGeom>
-          <a:solidFill>
-            <a:srgbClr val="BEE3F8"/>
-          </a:solidFill>
-          <a:ln/>
-        </p:spPr>
-      </p:sp>
-      <p:sp>
-        <p:nvSpPr>
-          <p:cNvPr id="27" name="Shape 25"/>
-          <p:cNvSpPr/>
-          <p:nvPr/>
-        </p:nvSpPr>
-        <p:spPr>
-          <a:xfrm>
-            <a:off x="7784287" y="4032504"/>
-            <a:ext cx="36576" cy="2039112"/>
-          </a:xfrm>
-          <a:prstGeom prst="rect">
-            <a:avLst/>
-          </a:prstGeom>
-          <a:solidFill>
-            <a:srgbClr val="2B6CB0"/>
-          </a:solidFill>
-          <a:ln/>
-        </p:spPr>
-      </p:sp>
-      <p:sp>
-        <p:nvSpPr>
-          <p:cNvPr id="28" name="Text 26"/>
-          <p:cNvSpPr/>
-          <p:nvPr/>
-        </p:nvSpPr>
-        <p:spPr>
-          <a:xfrm>
-            <a:off x="7967167" y="4087368"/>
-            <a:ext cx="3511296" cy="201168"/>
-          </a:xfrm>
-          <a:prstGeom prst="rect">
-            <a:avLst/>
-          </a:prstGeom>
-          <a:noFill/>
-          <a:ln/>
-        </p:spPr>
-        <p:txBody>
-          <a:bodyPr wrap="square" lIns="0" tIns="0" rIns="0" bIns="0" rtlCol="0" anchor="ctr"/>
-          <a:lstStyle/>
-          <a:p>
-            <a:pPr indent="0" marL="0">
-              <a:buNone/>
-            </a:pPr>
-            <a:r>
-              <a:rPr lang="en-US" sz="1050" b="1" dirty="0">
-                <a:solidFill>
-                  <a:srgbClr val="2B6CB0"/>
-                </a:solidFill>
-                <a:latin typeface="Pretendard" pitchFamily="34" charset="0"/>
-                <a:ea typeface="Pretendard" pitchFamily="34" charset="-122"/>
-                <a:cs typeface="Pretendard" pitchFamily="34" charset="-120"/>
-              </a:rPr>
-              <a:t>물건 실사 및 관리 상태</a:t>
-            </a:r>
-            <a:endParaRPr lang="en-US" sz="1050" dirty="0"/>
-          </a:p>
-        </p:txBody>
-      </p:sp>
-      <p:sp>
-        <p:nvSpPr>
-          <p:cNvPr id="29" name="Text 27"/>
-          <p:cNvSpPr/>
-          <p:nvPr/>
-        </p:nvSpPr>
-        <p:spPr>
-          <a:xfrm>
-            <a:off x="7967167" y="4306824"/>
-            <a:ext cx="3511296" cy="1746504"/>
-          </a:xfrm>
-          <a:prstGeom prst="rect">
-            <a:avLst/>
-          </a:prstGeom>
-          <a:noFill/>
-          <a:ln/>
-        </p:spPr>
-        <p:txBody>
-          <a:bodyPr wrap="square" lIns="0" tIns="0" rIns="0" bIns="0" rtlCol="0" anchor="t"/>
-          <a:lstStyle/>
-          <a:p>
-            <a:pPr marL="342900" indent="-342900">
-              <a:lnSpc>
-                <a:spcPct val="120000"/>
-              </a:lnSpc>
-              <a:buSzPct val="100000"/>
-              <a:buChar char="•"/>
-            </a:pPr>
-            <a:r>
-              <a:rPr lang="en-US" sz="930" dirty="0">
-                <a:solidFill>
-                  <a:srgbClr val="10161F"/>
-                </a:solidFill>
-                <a:latin typeface="Pretendard" pitchFamily="34" charset="0"/>
-                <a:ea typeface="Pretendard" pitchFamily="34" charset="-122"/>
-                <a:cs typeface="Pretendard" pitchFamily="34" charset="-120"/>
-              </a:rPr>
-              <a:t>건물 상태 및 설비 현황은 실사 보고서를 참조하십시오</a:t>
-            </a:r>
-            <a:endParaRPr lang="en-US" sz="930" dirty="0"/>
-          </a:p>
-          <a:p>
-            <a:pPr marL="342900" indent="-342900">
-              <a:lnSpc>
-                <a:spcPct val="120000"/>
-              </a:lnSpc>
-              <a:buSzPct val="100000"/>
-              <a:buChar char="•"/>
-            </a:pPr>
-            <a:r>
-              <a:rPr lang="en-US" sz="930" dirty="0">
-                <a:solidFill>
-                  <a:srgbClr val="10161F"/>
-                </a:solidFill>
-                <a:latin typeface="Pretendard" pitchFamily="34" charset="0"/>
-                <a:ea typeface="Pretendard" pitchFamily="34" charset="-122"/>
-                <a:cs typeface="Pretendard" pitchFamily="34" charset="-120"/>
-              </a:rPr>
-              <a:t>자금 조달 및 대출 조건은 금융 자문 후 확정됩니다</a:t>
-            </a:r>
-            <a:endParaRPr lang="en-US" sz="930" dirty="0"/>
-          </a:p>
-          <a:p>
-            <a:pPr marL="342900" indent="-342900">
-              <a:lnSpc>
-                <a:spcPct val="120000"/>
-              </a:lnSpc>
-              <a:buSzPct val="100000"/>
-              <a:buChar char="•"/>
-            </a:pPr>
-            <a:r>
-              <a:rPr lang="en-US" sz="930" dirty="0">
-                <a:solidFill>
-                  <a:srgbClr val="10161F"/>
-                </a:solidFill>
-                <a:latin typeface="Pretendard" pitchFamily="34" charset="0"/>
-                <a:ea typeface="Pretendard" pitchFamily="34" charset="-122"/>
-                <a:cs typeface="Pretendard" pitchFamily="34" charset="-120"/>
-              </a:rPr>
-              <a:t>상세 실사 단계에서 구체적인 계약 조건 및 세무 검토가 진행됩니다</a:t>
-            </a:r>
-            <a:endParaRPr lang="en-US" sz="930" dirty="0"/>
-          </a:p>
-        </p:txBody>
-      </p:sp>
-      <p:sp>
-        <p:nvSpPr>
-          <p:cNvPr id="30" name="Text 28"/>
-          <p:cNvSpPr/>
-          <p:nvPr/>
-        </p:nvSpPr>
-        <p:spPr>
-          <a:xfrm>
-            <a:off x="566928" y="6382512"/>
-            <a:ext cx="7315200" cy="219456"/>
-          </a:xfrm>
-          <a:prstGeom prst="rect">
-            <a:avLst/>
-          </a:prstGeom>
-          <a:noFill/>
-          <a:ln/>
-        </p:spPr>
-        <p:txBody>
-          <a:bodyPr wrap="square" lIns="0" tIns="0" rIns="0" bIns="0" rtlCol="0" anchor="ctr"/>
-          <a:lstStyle/>
-          <a:p>
-            <a:pPr indent="0" marL="0">
-              <a:buNone/>
-            </a:pPr>
-            <a:r>
-              <a:rPr lang="en-US" sz="800" dirty="0">
-                <a:solidFill>
-                  <a:srgbClr val="718096"/>
-                </a:solidFill>
-                <a:latin typeface="Pretendard" pitchFamily="34" charset="0"/>
-                <a:ea typeface="Pretendard" pitchFamily="34" charset="-122"/>
-                <a:cs typeface="Pretendard" pitchFamily="34" charset="-120"/>
-              </a:rPr>
               <a:t>크리딜   |   </a:t>
             </a:r>
             <a:endParaRPr lang="en-US" sz="800" dirty="0"/>
@@ -6468,7 +6490,7 @@
       </p:sp>
       <p:sp>
         <p:nvSpPr>
-          <p:cNvPr id="31" name="Text 29"/>
+          <p:cNvPr id="15" name="Text 13"/>
           <p:cNvSpPr/>
           <p:nvPr/>
         </p:nvSpPr>
@@ -7393,9 +7415,1571 @@
           </a:p>
         </p:txBody>
       </p:sp>
-      <p:sp>
-        <p:nvSpPr>
-          <p:cNvPr id="6" name="Text 4"/>
+      <p:graphicFrame>
+        <p:nvGraphicFramePr>
+          <p:cNvPr id="7" name="Table 0"/>
+          <p:cNvGraphicFramePr>
+            <a:graphicFrameLocks noGrp="1"/>
+          </p:cNvGraphicFramePr>
+          <p:nvPr>
+            <p:extLst>
+              <p:ext uri="{D42A27DB-BD31-4B8C-83A1-F6EECF244321}">
+                <p14:modId xmlns:p14="http://schemas.microsoft.com/office/powerpoint/2010/main" val="1579011935"/>
+              </p:ext>
+            </p:extLst>
+          </p:nvPr>
+        </p:nvGraphicFramePr>
+        <p:xfrm>
+          <a:off x="566928" y="1737360"/>
+          <a:ext cx="6675120" cy="914400"/>
+        </p:xfrm>
+        <a:graphic>
+          <a:graphicData uri="http://schemas.openxmlformats.org/drawingml/2006/table">
+            <a:tbl>
+              <a:tblPr/>
+              <a:tblGrid>
+                <a:gridCol w="1668780"/>
+                <a:gridCol w="1668780"/>
+                <a:gridCol w="1668780"/>
+                <a:gridCol w="1668780"/>
+              </a:tblGrid>
+              <a:tr h="420624">
+                <a:tc>
+                  <a:txBody>
+                    <a:bodyPr/>
+                    <a:lstStyle/>
+                    <a:p>
+                      <a:pPr indent="0" marL="0">
+                        <a:buNone/>
+                      </a:pPr>
+                      <a:r>
+                        <a:rPr lang="en-US" sz="1300" b="1" dirty="0">
+                          <a:solidFill>
+                            <a:srgbClr val="718096"/>
+                          </a:solidFill>
+                          <a:latin typeface="Pretendard" pitchFamily="34" charset="0"/>
+                          <a:ea typeface="Pretendard" pitchFamily="34" charset="-122"/>
+                          <a:cs typeface="Pretendard" pitchFamily="34" charset="-120"/>
+                        </a:rPr>
+                        <a:t>구분</a:t>
+                      </a:r>
+                      <a:endParaRPr lang="en-US" sz="1300" dirty="0">
+                        <a:latin typeface="Pretendard" charset="0"/>
+                        <a:ea typeface="Pretendard" charset="0"/>
+                        <a:cs typeface="Pretendard" charset="0"/>
+                      </a:endParaRPr>
+                    </a:p>
+                  </a:txBody>
+                  <a:tcPr marL="50800" marR="50800" marT="25400" marB="25400" anchor="ctr">
+                    <a:lnL w="3810" cap="flat" cmpd="sng" algn="ctr">
+                      <a:solidFill>
+                        <a:srgbClr val="CBD5E0"/>
+                      </a:solidFill>
+                      <a:prstDash val="solid"/>
+                      <a:round/>
+                      <a:headEnd type="none" w="med" len="med"/>
+                      <a:tailEnd type="none" w="med" len="med"/>
+                    </a:lnL>
+                    <a:lnR w="3810" cap="flat" cmpd="sng" algn="ctr">
+                      <a:solidFill>
+                        <a:srgbClr val="CBD5E0"/>
+                      </a:solidFill>
+                      <a:prstDash val="solid"/>
+                      <a:round/>
+                      <a:headEnd type="none" w="med" len="med"/>
+                      <a:tailEnd type="none" w="med" len="med"/>
+                    </a:lnR>
+                    <a:lnT w="3810" cap="flat" cmpd="sng" algn="ctr">
+                      <a:solidFill>
+                        <a:srgbClr val="CBD5E0"/>
+                      </a:solidFill>
+                      <a:prstDash val="solid"/>
+                      <a:round/>
+                      <a:headEnd type="none" w="med" len="med"/>
+                      <a:tailEnd type="none" w="med" len="med"/>
+                    </a:lnT>
+                    <a:lnB w="3810" cap="flat" cmpd="sng" algn="ctr">
+                      <a:solidFill>
+                        <a:srgbClr val="CBD5E0"/>
+                      </a:solidFill>
+                      <a:prstDash val="solid"/>
+                      <a:round/>
+                      <a:headEnd type="none" w="med" len="med"/>
+                      <a:tailEnd type="none" w="med" len="med"/>
+                    </a:lnB>
+                    <a:solidFill>
+                      <a:srgbClr val="F7FAFC"/>
+                    </a:solidFill>
+                  </a:tcPr>
+                </a:tc>
+                <a:tc>
+                  <a:txBody>
+                    <a:bodyPr/>
+                    <a:lstStyle/>
+                    <a:p>
+                      <a:pPr indent="0" marL="0">
+                        <a:buNone/>
+                      </a:pPr>
+                      <a:r>
+                        <a:rPr lang="en-US" sz="1300" b="1" dirty="0">
+                          <a:solidFill>
+                            <a:srgbClr val="718096"/>
+                          </a:solidFill>
+                          <a:latin typeface="Pretendard" pitchFamily="34" charset="0"/>
+                          <a:ea typeface="Pretendard" pitchFamily="34" charset="-122"/>
+                          <a:cs typeface="Pretendard" pitchFamily="34" charset="-120"/>
+                        </a:rPr>
+                        <a:t>임차 </a:t>
+                      </a:r>
+                      <a:pPr indent="0" marL="0">
+                        <a:buNone/>
+                      </a:pPr>
+                      <a:r>
+                        <a:rPr lang="en-US" sz="1300" b="1" dirty="0">
+                          <a:solidFill>
+                            <a:srgbClr val="718096"/>
+                          </a:solidFill>
+                          <a:latin typeface="Pretendard" pitchFamily="34" charset="0"/>
+                          <a:ea typeface="Pretendard" pitchFamily="34" charset="-122"/>
+                          <a:cs typeface="Pretendard" pitchFamily="34" charset="-120"/>
+                        </a:rPr>
+                        <a:t>유지 </a:t>
+                      </a:r>
+                      <a:pPr indent="0" marL="0">
+                        <a:buNone/>
+                      </a:pPr>
+                      <a:r>
+                        <a:rPr lang="en-US" sz="1300" b="1" dirty="0">
+                          <a:solidFill>
+                            <a:srgbClr val="718096"/>
+                          </a:solidFill>
+                          <a:latin typeface="Pretendard" pitchFamily="34" charset="0"/>
+                          <a:ea typeface="Pretendard" pitchFamily="34" charset="-122"/>
+                          <a:cs typeface="Pretendard" pitchFamily="34" charset="-120"/>
+                        </a:rPr>
+                        <a:t>시</a:t>
+                      </a:r>
+                      <a:endParaRPr lang="en-US" sz="1300" dirty="0">
+                        <a:latin typeface="Pretendard" charset="0"/>
+                        <a:ea typeface="Pretendard" charset="0"/>
+                        <a:cs typeface="Pretendard" charset="0"/>
+                      </a:endParaRPr>
+                    </a:p>
+                  </a:txBody>
+                  <a:tcPr marL="50800" marR="50800" marT="25400" marB="25400" anchor="ctr">
+                    <a:lnL w="3810" cap="flat" cmpd="sng" algn="ctr">
+                      <a:solidFill>
+                        <a:srgbClr val="CBD5E0"/>
+                      </a:solidFill>
+                      <a:prstDash val="solid"/>
+                      <a:round/>
+                      <a:headEnd type="none" w="med" len="med"/>
+                      <a:tailEnd type="none" w="med" len="med"/>
+                    </a:lnL>
+                    <a:lnR w="3810" cap="flat" cmpd="sng" algn="ctr">
+                      <a:solidFill>
+                        <a:srgbClr val="CBD5E0"/>
+                      </a:solidFill>
+                      <a:prstDash val="solid"/>
+                      <a:round/>
+                      <a:headEnd type="none" w="med" len="med"/>
+                      <a:tailEnd type="none" w="med" len="med"/>
+                    </a:lnR>
+                    <a:lnT w="3810" cap="flat" cmpd="sng" algn="ctr">
+                      <a:solidFill>
+                        <a:srgbClr val="CBD5E0"/>
+                      </a:solidFill>
+                      <a:prstDash val="solid"/>
+                      <a:round/>
+                      <a:headEnd type="none" w="med" len="med"/>
+                      <a:tailEnd type="none" w="med" len="med"/>
+                    </a:lnT>
+                    <a:lnB w="3810" cap="flat" cmpd="sng" algn="ctr">
+                      <a:solidFill>
+                        <a:srgbClr val="CBD5E0"/>
+                      </a:solidFill>
+                      <a:prstDash val="solid"/>
+                      <a:round/>
+                      <a:headEnd type="none" w="med" len="med"/>
+                      <a:tailEnd type="none" w="med" len="med"/>
+                    </a:lnB>
+                    <a:solidFill>
+                      <a:srgbClr val="F7FAFC"/>
+                    </a:solidFill>
+                  </a:tcPr>
+                </a:tc>
+                <a:tc>
+                  <a:txBody>
+                    <a:bodyPr/>
+                    <a:lstStyle/>
+                    <a:p>
+                      <a:pPr indent="0" marL="0">
+                        <a:buNone/>
+                      </a:pPr>
+                      <a:r>
+                        <a:rPr lang="en-US" sz="1300" b="1" dirty="0">
+                          <a:solidFill>
+                            <a:srgbClr val="718096"/>
+                          </a:solidFill>
+                          <a:latin typeface="Pretendard" pitchFamily="34" charset="0"/>
+                          <a:ea typeface="Pretendard" pitchFamily="34" charset="-122"/>
+                          <a:cs typeface="Pretendard" pitchFamily="34" charset="-120"/>
+                        </a:rPr>
+                        <a:t>사옥 </a:t>
+                      </a:r>
+                      <a:pPr indent="0" marL="0">
+                        <a:buNone/>
+                      </a:pPr>
+                      <a:r>
+                        <a:rPr lang="en-US" sz="1300" b="1" dirty="0">
+                          <a:solidFill>
+                            <a:srgbClr val="718096"/>
+                          </a:solidFill>
+                          <a:latin typeface="Pretendard" pitchFamily="34" charset="0"/>
+                          <a:ea typeface="Pretendard" pitchFamily="34" charset="-122"/>
+                          <a:cs typeface="Pretendard" pitchFamily="34" charset="-120"/>
+                        </a:rPr>
+                        <a:t>자가소유 </a:t>
+                      </a:r>
+                      <a:pPr indent="0" marL="0">
+                        <a:buNone/>
+                      </a:pPr>
+                      <a:r>
+                        <a:rPr lang="en-US" sz="1300" b="1" dirty="0">
+                          <a:solidFill>
+                            <a:srgbClr val="718096"/>
+                          </a:solidFill>
+                          <a:latin typeface="Pretendard" pitchFamily="34" charset="0"/>
+                          <a:ea typeface="Pretendard" pitchFamily="34" charset="-122"/>
+                          <a:cs typeface="Pretendard" pitchFamily="34" charset="-120"/>
+                        </a:rPr>
+                        <a:t>시</a:t>
+                      </a:r>
+                      <a:endParaRPr lang="en-US" sz="1300" dirty="0">
+                        <a:latin typeface="Pretendard" charset="0"/>
+                        <a:ea typeface="Pretendard" charset="0"/>
+                        <a:cs typeface="Pretendard" charset="0"/>
+                      </a:endParaRPr>
+                    </a:p>
+                  </a:txBody>
+                  <a:tcPr marL="50800" marR="50800" marT="25400" marB="25400" anchor="ctr">
+                    <a:lnL w="3810" cap="flat" cmpd="sng" algn="ctr">
+                      <a:solidFill>
+                        <a:srgbClr val="CBD5E0"/>
+                      </a:solidFill>
+                      <a:prstDash val="solid"/>
+                      <a:round/>
+                      <a:headEnd type="none" w="med" len="med"/>
+                      <a:tailEnd type="none" w="med" len="med"/>
+                    </a:lnL>
+                    <a:lnR w="3810" cap="flat" cmpd="sng" algn="ctr">
+                      <a:solidFill>
+                        <a:srgbClr val="CBD5E0"/>
+                      </a:solidFill>
+                      <a:prstDash val="solid"/>
+                      <a:round/>
+                      <a:headEnd type="none" w="med" len="med"/>
+                      <a:tailEnd type="none" w="med" len="med"/>
+                    </a:lnR>
+                    <a:lnT w="3810" cap="flat" cmpd="sng" algn="ctr">
+                      <a:solidFill>
+                        <a:srgbClr val="CBD5E0"/>
+                      </a:solidFill>
+                      <a:prstDash val="solid"/>
+                      <a:round/>
+                      <a:headEnd type="none" w="med" len="med"/>
+                      <a:tailEnd type="none" w="med" len="med"/>
+                    </a:lnT>
+                    <a:lnB w="3810" cap="flat" cmpd="sng" algn="ctr">
+                      <a:solidFill>
+                        <a:srgbClr val="CBD5E0"/>
+                      </a:solidFill>
+                      <a:prstDash val="solid"/>
+                      <a:round/>
+                      <a:headEnd type="none" w="med" len="med"/>
+                      <a:tailEnd type="none" w="med" len="med"/>
+                    </a:lnB>
+                    <a:solidFill>
+                      <a:srgbClr val="F7FAFC"/>
+                    </a:solidFill>
+                  </a:tcPr>
+                </a:tc>
+                <a:tc>
+                  <a:txBody>
+                    <a:bodyPr/>
+                    <a:lstStyle/>
+                    <a:p>
+                      <a:pPr indent="0" marL="0">
+                        <a:buNone/>
+                      </a:pPr>
+                      <a:r>
+                        <a:rPr lang="en-US" sz="1300" b="1" dirty="0">
+                          <a:solidFill>
+                            <a:srgbClr val="718096"/>
+                          </a:solidFill>
+                          <a:latin typeface="Pretendard" pitchFamily="34" charset="0"/>
+                          <a:ea typeface="Pretendard" pitchFamily="34" charset="-122"/>
+                          <a:cs typeface="Pretendard" pitchFamily="34" charset="-120"/>
+                        </a:rPr>
+                        <a:t>절감 </a:t>
+                      </a:r>
+                      <a:pPr indent="0" marL="0">
+                        <a:buNone/>
+                      </a:pPr>
+                      <a:r>
+                        <a:rPr lang="en-US" sz="1300" b="1" dirty="0">
+                          <a:solidFill>
+                            <a:srgbClr val="718096"/>
+                          </a:solidFill>
+                          <a:latin typeface="Pretendard" pitchFamily="34" charset="0"/>
+                          <a:ea typeface="Pretendard" pitchFamily="34" charset="-122"/>
+                          <a:cs typeface="Pretendard" pitchFamily="34" charset="-120"/>
+                        </a:rPr>
+                        <a:t>효과</a:t>
+                      </a:r>
+                      <a:endParaRPr lang="en-US" sz="1300" dirty="0">
+                        <a:latin typeface="Pretendard" charset="0"/>
+                        <a:ea typeface="Pretendard" charset="0"/>
+                        <a:cs typeface="Pretendard" charset="0"/>
+                      </a:endParaRPr>
+                    </a:p>
+                  </a:txBody>
+                  <a:tcPr marL="50800" marR="50800" marT="25400" marB="25400" anchor="ctr">
+                    <a:lnL w="3810" cap="flat" cmpd="sng" algn="ctr">
+                      <a:solidFill>
+                        <a:srgbClr val="CBD5E0"/>
+                      </a:solidFill>
+                      <a:prstDash val="solid"/>
+                      <a:round/>
+                      <a:headEnd type="none" w="med" len="med"/>
+                      <a:tailEnd type="none" w="med" len="med"/>
+                    </a:lnL>
+                    <a:lnR w="3810" cap="flat" cmpd="sng" algn="ctr">
+                      <a:solidFill>
+                        <a:srgbClr val="CBD5E0"/>
+                      </a:solidFill>
+                      <a:prstDash val="solid"/>
+                      <a:round/>
+                      <a:headEnd type="none" w="med" len="med"/>
+                      <a:tailEnd type="none" w="med" len="med"/>
+                    </a:lnR>
+                    <a:lnT w="3810" cap="flat" cmpd="sng" algn="ctr">
+                      <a:solidFill>
+                        <a:srgbClr val="CBD5E0"/>
+                      </a:solidFill>
+                      <a:prstDash val="solid"/>
+                      <a:round/>
+                      <a:headEnd type="none" w="med" len="med"/>
+                      <a:tailEnd type="none" w="med" len="med"/>
+                    </a:lnT>
+                    <a:lnB w="3810" cap="flat" cmpd="sng" algn="ctr">
+                      <a:solidFill>
+                        <a:srgbClr val="CBD5E0"/>
+                      </a:solidFill>
+                      <a:prstDash val="solid"/>
+                      <a:round/>
+                      <a:headEnd type="none" w="med" len="med"/>
+                      <a:tailEnd type="none" w="med" len="med"/>
+                    </a:lnB>
+                    <a:solidFill>
+                      <a:srgbClr val="F7FAFC"/>
+                    </a:solidFill>
+                  </a:tcPr>
+                </a:tc>
+              </a:tr>
+              <a:tr h="420624">
+                <a:tc>
+                  <a:txBody>
+                    <a:bodyPr/>
+                    <a:lstStyle/>
+                    <a:p>
+                      <a:pPr indent="0" marL="0">
+                        <a:buNone/>
+                      </a:pPr>
+                      <a:r>
+                        <a:rPr lang="en-US" sz="1300" b="1" dirty="0">
+                          <a:solidFill>
+                            <a:srgbClr val="10161F"/>
+                          </a:solidFill>
+                          <a:latin typeface="Pretendard" pitchFamily="34" charset="0"/>
+                          <a:ea typeface="Pretendard" pitchFamily="34" charset="-122"/>
+                          <a:cs typeface="Pretendard" pitchFamily="34" charset="-120"/>
+                        </a:rPr>
+                        <a:t>연간 </a:t>
+                      </a:r>
+                      <a:pPr indent="0" marL="0">
+                        <a:buNone/>
+                      </a:pPr>
+                      <a:r>
+                        <a:rPr lang="en-US" sz="1300" b="1" dirty="0">
+                          <a:solidFill>
+                            <a:srgbClr val="10161F"/>
+                          </a:solidFill>
+                          <a:latin typeface="Pretendard" pitchFamily="34" charset="0"/>
+                          <a:ea typeface="Pretendard" pitchFamily="34" charset="-122"/>
+                          <a:cs typeface="Pretendard" pitchFamily="34" charset="-120"/>
+                        </a:rPr>
+                        <a:t>소요 </a:t>
+                      </a:r>
+                      <a:pPr indent="0" marL="0">
+                        <a:buNone/>
+                      </a:pPr>
+                      <a:r>
+                        <a:rPr lang="en-US" sz="1300" b="1" dirty="0">
+                          <a:solidFill>
+                            <a:srgbClr val="10161F"/>
+                          </a:solidFill>
+                          <a:latin typeface="Pretendard" pitchFamily="34" charset="0"/>
+                          <a:ea typeface="Pretendard" pitchFamily="34" charset="-122"/>
+                          <a:cs typeface="Pretendard" pitchFamily="34" charset="-120"/>
+                        </a:rPr>
+                        <a:t>비용</a:t>
+                      </a:r>
+                      <a:endParaRPr lang="en-US" sz="1300" dirty="0">
+                        <a:latin typeface="Pretendard" charset="0"/>
+                        <a:ea typeface="Pretendard" charset="0"/>
+                        <a:cs typeface="Pretendard" charset="0"/>
+                      </a:endParaRPr>
+                    </a:p>
+                  </a:txBody>
+                  <a:tcPr marL="50800" marR="50800" marT="25400" marB="25400" anchor="ctr">
+                    <a:lnL w="3810" cap="flat" cmpd="sng" algn="ctr">
+                      <a:solidFill>
+                        <a:srgbClr val="CBD5E0"/>
+                      </a:solidFill>
+                      <a:prstDash val="solid"/>
+                      <a:round/>
+                      <a:headEnd type="none" w="med" len="med"/>
+                      <a:tailEnd type="none" w="med" len="med"/>
+                    </a:lnL>
+                    <a:lnR w="3810" cap="flat" cmpd="sng" algn="ctr">
+                      <a:solidFill>
+                        <a:srgbClr val="CBD5E0"/>
+                      </a:solidFill>
+                      <a:prstDash val="solid"/>
+                      <a:round/>
+                      <a:headEnd type="none" w="med" len="med"/>
+                      <a:tailEnd type="none" w="med" len="med"/>
+                    </a:lnR>
+                    <a:lnT w="3810" cap="flat" cmpd="sng" algn="ctr">
+                      <a:solidFill>
+                        <a:srgbClr val="CBD5E0"/>
+                      </a:solidFill>
+                      <a:prstDash val="solid"/>
+                      <a:round/>
+                      <a:headEnd type="none" w="med" len="med"/>
+                      <a:tailEnd type="none" w="med" len="med"/>
+                    </a:lnT>
+                    <a:lnB w="3810" cap="flat" cmpd="sng" algn="ctr">
+                      <a:solidFill>
+                        <a:srgbClr val="CBD5E0"/>
+                      </a:solidFill>
+                      <a:prstDash val="solid"/>
+                      <a:round/>
+                      <a:headEnd type="none" w="med" len="med"/>
+                      <a:tailEnd type="none" w="med" len="med"/>
+                    </a:lnB>
+                    <a:solidFill>
+                      <a:srgbClr val="FFFFFF"/>
+                    </a:solidFill>
+                  </a:tcPr>
+                </a:tc>
+                <a:tc>
+                  <a:txBody>
+                    <a:bodyPr/>
+                    <a:lstStyle/>
+                    <a:p>
+                      <a:pPr indent="0" marL="0">
+                        <a:buNone/>
+                      </a:pPr>
+                      <a:r>
+                        <a:rPr lang="en-US" sz="1300" dirty="0">
+                          <a:solidFill>
+                            <a:srgbClr val="10161F"/>
+                          </a:solidFill>
+                          <a:latin typeface="Pretendard" pitchFamily="34" charset="0"/>
+                          <a:ea typeface="Pretendard" pitchFamily="34" charset="-122"/>
+                          <a:cs typeface="Pretendard" pitchFamily="34" charset="-120"/>
+                        </a:rPr>
+                        <a:t>주변 </a:t>
+                      </a:r>
+                      <a:pPr indent="0" marL="0">
+                        <a:buNone/>
+                      </a:pPr>
+                      <a:r>
+                        <a:rPr lang="en-US" sz="1300" dirty="0">
+                          <a:solidFill>
+                            <a:srgbClr val="10161F"/>
+                          </a:solidFill>
+                          <a:latin typeface="Pretendard" pitchFamily="34" charset="0"/>
+                          <a:ea typeface="Pretendard" pitchFamily="34" charset="-122"/>
+                          <a:cs typeface="Pretendard" pitchFamily="34" charset="-120"/>
+                        </a:rPr>
+                        <a:t>시장 </a:t>
+                      </a:r>
+                      <a:pPr indent="0" marL="0">
+                        <a:buNone/>
+                      </a:pPr>
+                      <a:r>
+                        <a:rPr lang="en-US" sz="1300" dirty="0">
+                          <a:solidFill>
+                            <a:srgbClr val="10161F"/>
+                          </a:solidFill>
+                          <a:latin typeface="Pretendard" pitchFamily="34" charset="0"/>
+                          <a:ea typeface="Pretendard" pitchFamily="34" charset="-122"/>
+                          <a:cs typeface="Pretendard" pitchFamily="34" charset="-120"/>
+                        </a:rPr>
+                        <a:t>임대료 </a:t>
+                      </a:r>
+                      <a:pPr indent="0" marL="0">
+                        <a:buNone/>
+                      </a:pPr>
+                      <a:r>
+                        <a:rPr lang="en-US" sz="1300" dirty="0">
+                          <a:solidFill>
+                            <a:srgbClr val="10161F"/>
+                          </a:solidFill>
+                          <a:latin typeface="Pretendard" pitchFamily="34" charset="0"/>
+                          <a:ea typeface="Pretendard" pitchFamily="34" charset="-122"/>
+                          <a:cs typeface="Pretendard" pitchFamily="34" charset="-120"/>
+                        </a:rPr>
+                        <a:t>지출</a:t>
+                      </a:r>
+                      <a:endParaRPr lang="en-US" sz="1300" dirty="0">
+                        <a:latin typeface="Pretendard" charset="0"/>
+                        <a:ea typeface="Pretendard" charset="0"/>
+                        <a:cs typeface="Pretendard" charset="0"/>
+                      </a:endParaRPr>
+                    </a:p>
+                  </a:txBody>
+                  <a:tcPr marL="50800" marR="50800" marT="25400" marB="25400" anchor="ctr">
+                    <a:lnL w="3810" cap="flat" cmpd="sng" algn="ctr">
+                      <a:solidFill>
+                        <a:srgbClr val="CBD5E0"/>
+                      </a:solidFill>
+                      <a:prstDash val="solid"/>
+                      <a:round/>
+                      <a:headEnd type="none" w="med" len="med"/>
+                      <a:tailEnd type="none" w="med" len="med"/>
+                    </a:lnL>
+                    <a:lnR w="3810" cap="flat" cmpd="sng" algn="ctr">
+                      <a:solidFill>
+                        <a:srgbClr val="CBD5E0"/>
+                      </a:solidFill>
+                      <a:prstDash val="solid"/>
+                      <a:round/>
+                      <a:headEnd type="none" w="med" len="med"/>
+                      <a:tailEnd type="none" w="med" len="med"/>
+                    </a:lnR>
+                    <a:lnT w="3810" cap="flat" cmpd="sng" algn="ctr">
+                      <a:solidFill>
+                        <a:srgbClr val="CBD5E0"/>
+                      </a:solidFill>
+                      <a:prstDash val="solid"/>
+                      <a:round/>
+                      <a:headEnd type="none" w="med" len="med"/>
+                      <a:tailEnd type="none" w="med" len="med"/>
+                    </a:lnT>
+                    <a:lnB w="3810" cap="flat" cmpd="sng" algn="ctr">
+                      <a:solidFill>
+                        <a:srgbClr val="CBD5E0"/>
+                      </a:solidFill>
+                      <a:prstDash val="solid"/>
+                      <a:round/>
+                      <a:headEnd type="none" w="med" len="med"/>
+                      <a:tailEnd type="none" w="med" len="med"/>
+                    </a:lnB>
+                    <a:solidFill>
+                      <a:srgbClr val="FFFFFF"/>
+                    </a:solidFill>
+                  </a:tcPr>
+                </a:tc>
+                <a:tc>
+                  <a:txBody>
+                    <a:bodyPr/>
+                    <a:lstStyle/>
+                    <a:p>
+                      <a:pPr indent="0" marL="0">
+                        <a:buNone/>
+                      </a:pPr>
+                      <a:r>
+                        <a:rPr lang="en-US" sz="1300" dirty="0">
+                          <a:solidFill>
+                            <a:srgbClr val="10161F"/>
+                          </a:solidFill>
+                          <a:latin typeface="Pretendard" pitchFamily="34" charset="0"/>
+                          <a:ea typeface="Pretendard" pitchFamily="34" charset="-122"/>
+                          <a:cs typeface="Pretendard" pitchFamily="34" charset="-120"/>
+                        </a:rPr>
+                        <a:t>대출 </a:t>
+                      </a:r>
+                      <a:pPr indent="0" marL="0">
+                        <a:buNone/>
+                      </a:pPr>
+                      <a:r>
+                        <a:rPr lang="en-US" sz="1300" dirty="0">
+                          <a:solidFill>
+                            <a:srgbClr val="10161F"/>
+                          </a:solidFill>
+                          <a:latin typeface="Pretendard" pitchFamily="34" charset="0"/>
+                          <a:ea typeface="Pretendard" pitchFamily="34" charset="-122"/>
+                          <a:cs typeface="Pretendard" pitchFamily="34" charset="-120"/>
+                        </a:rPr>
+                        <a:t>이자 </a:t>
+                      </a:r>
+                      <a:pPr indent="0" marL="0">
+                        <a:buNone/>
+                      </a:pPr>
+                      <a:r>
+                        <a:rPr lang="en-US" sz="1300" dirty="0">
+                          <a:solidFill>
+                            <a:srgbClr val="10161F"/>
+                          </a:solidFill>
+                          <a:latin typeface="Pretendard" pitchFamily="34" charset="0"/>
+                          <a:ea typeface="Pretendard" pitchFamily="34" charset="-122"/>
+                          <a:cs typeface="Pretendard" pitchFamily="34" charset="-120"/>
+                        </a:rPr>
+                        <a:t>+ </a:t>
+                      </a:r>
+                      <a:pPr indent="0" marL="0">
+                        <a:buNone/>
+                      </a:pPr>
+                      <a:r>
+                        <a:rPr lang="en-US" sz="1300" dirty="0">
+                          <a:solidFill>
+                            <a:srgbClr val="10161F"/>
+                          </a:solidFill>
+                          <a:latin typeface="Pretendard" pitchFamily="34" charset="0"/>
+                          <a:ea typeface="Pretendard" pitchFamily="34" charset="-122"/>
+                          <a:cs typeface="Pretendard" pitchFamily="34" charset="-120"/>
+                        </a:rPr>
+                        <a:t>운영 </a:t>
+                      </a:r>
+                      <a:pPr indent="0" marL="0">
+                        <a:buNone/>
+                      </a:pPr>
+                      <a:r>
+                        <a:rPr lang="en-US" sz="1300" dirty="0">
+                          <a:solidFill>
+                            <a:srgbClr val="10161F"/>
+                          </a:solidFill>
+                          <a:latin typeface="Pretendard" pitchFamily="34" charset="0"/>
+                          <a:ea typeface="Pretendard" pitchFamily="34" charset="-122"/>
+                          <a:cs typeface="Pretendard" pitchFamily="34" charset="-120"/>
+                        </a:rPr>
+                        <a:t>관리비</a:t>
+                      </a:r>
+                      <a:endParaRPr lang="en-US" sz="1300" dirty="0">
+                        <a:latin typeface="Pretendard" charset="0"/>
+                        <a:ea typeface="Pretendard" charset="0"/>
+                        <a:cs typeface="Pretendard" charset="0"/>
+                      </a:endParaRPr>
+                    </a:p>
+                  </a:txBody>
+                  <a:tcPr marL="50800" marR="50800" marT="25400" marB="25400" anchor="ctr">
+                    <a:lnL w="3810" cap="flat" cmpd="sng" algn="ctr">
+                      <a:solidFill>
+                        <a:srgbClr val="CBD5E0"/>
+                      </a:solidFill>
+                      <a:prstDash val="solid"/>
+                      <a:round/>
+                      <a:headEnd type="none" w="med" len="med"/>
+                      <a:tailEnd type="none" w="med" len="med"/>
+                    </a:lnL>
+                    <a:lnR w="3810" cap="flat" cmpd="sng" algn="ctr">
+                      <a:solidFill>
+                        <a:srgbClr val="CBD5E0"/>
+                      </a:solidFill>
+                      <a:prstDash val="solid"/>
+                      <a:round/>
+                      <a:headEnd type="none" w="med" len="med"/>
+                      <a:tailEnd type="none" w="med" len="med"/>
+                    </a:lnR>
+                    <a:lnT w="3810" cap="flat" cmpd="sng" algn="ctr">
+                      <a:solidFill>
+                        <a:srgbClr val="CBD5E0"/>
+                      </a:solidFill>
+                      <a:prstDash val="solid"/>
+                      <a:round/>
+                      <a:headEnd type="none" w="med" len="med"/>
+                      <a:tailEnd type="none" w="med" len="med"/>
+                    </a:lnT>
+                    <a:lnB w="3810" cap="flat" cmpd="sng" algn="ctr">
+                      <a:solidFill>
+                        <a:srgbClr val="CBD5E0"/>
+                      </a:solidFill>
+                      <a:prstDash val="solid"/>
+                      <a:round/>
+                      <a:headEnd type="none" w="med" len="med"/>
+                      <a:tailEnd type="none" w="med" len="med"/>
+                    </a:lnB>
+                    <a:solidFill>
+                      <a:srgbClr val="FFFFFF"/>
+                    </a:solidFill>
+                  </a:tcPr>
+                </a:tc>
+                <a:tc>
+                  <a:txBody>
+                    <a:bodyPr/>
+                    <a:lstStyle/>
+                    <a:p>
+                      <a:pPr indent="0" marL="0">
+                        <a:buNone/>
+                      </a:pPr>
+                      <a:r>
+                        <a:rPr lang="en-US" sz="1300" dirty="0">
+                          <a:solidFill>
+                            <a:srgbClr val="10161F"/>
+                          </a:solidFill>
+                          <a:latin typeface="Pretendard" pitchFamily="34" charset="0"/>
+                          <a:ea typeface="Pretendard" pitchFamily="34" charset="-122"/>
+                          <a:cs typeface="Pretendard" pitchFamily="34" charset="-120"/>
+                        </a:rPr>
+                        <a:t>연간 </a:t>
+                      </a:r>
+                      <a:pPr indent="0" marL="0">
+                        <a:buNone/>
+                      </a:pPr>
+                      <a:r>
+                        <a:rPr lang="en-US" sz="1300" dirty="0">
+                          <a:solidFill>
+                            <a:srgbClr val="10161F"/>
+                          </a:solidFill>
+                          <a:latin typeface="Pretendard" pitchFamily="34" charset="0"/>
+                          <a:ea typeface="Pretendard" pitchFamily="34" charset="-122"/>
+                          <a:cs typeface="Pretendard" pitchFamily="34" charset="-120"/>
+                        </a:rPr>
+                        <a:t>임대료 </a:t>
+                      </a:r>
+                      <a:pPr indent="0" marL="0">
+                        <a:buNone/>
+                      </a:pPr>
+                      <a:r>
+                        <a:rPr lang="en-US" sz="1300" dirty="0">
+                          <a:solidFill>
+                            <a:srgbClr val="10161F"/>
+                          </a:solidFill>
+                          <a:latin typeface="Pretendard" pitchFamily="34" charset="0"/>
+                          <a:ea typeface="Pretendard" pitchFamily="34" charset="-122"/>
+                          <a:cs typeface="Pretendard" pitchFamily="34" charset="-120"/>
+                        </a:rPr>
+                        <a:t>절감</a:t>
+                      </a:r>
+                      <a:endParaRPr lang="en-US" sz="1300" dirty="0">
+                        <a:latin typeface="Pretendard" charset="0"/>
+                        <a:ea typeface="Pretendard" charset="0"/>
+                        <a:cs typeface="Pretendard" charset="0"/>
+                      </a:endParaRPr>
+                    </a:p>
+                  </a:txBody>
+                  <a:tcPr marL="50800" marR="50800" marT="25400" marB="25400" anchor="ctr">
+                    <a:lnL w="3810" cap="flat" cmpd="sng" algn="ctr">
+                      <a:solidFill>
+                        <a:srgbClr val="CBD5E0"/>
+                      </a:solidFill>
+                      <a:prstDash val="solid"/>
+                      <a:round/>
+                      <a:headEnd type="none" w="med" len="med"/>
+                      <a:tailEnd type="none" w="med" len="med"/>
+                    </a:lnL>
+                    <a:lnR w="3810" cap="flat" cmpd="sng" algn="ctr">
+                      <a:solidFill>
+                        <a:srgbClr val="CBD5E0"/>
+                      </a:solidFill>
+                      <a:prstDash val="solid"/>
+                      <a:round/>
+                      <a:headEnd type="none" w="med" len="med"/>
+                      <a:tailEnd type="none" w="med" len="med"/>
+                    </a:lnR>
+                    <a:lnT w="3810" cap="flat" cmpd="sng" algn="ctr">
+                      <a:solidFill>
+                        <a:srgbClr val="CBD5E0"/>
+                      </a:solidFill>
+                      <a:prstDash val="solid"/>
+                      <a:round/>
+                      <a:headEnd type="none" w="med" len="med"/>
+                      <a:tailEnd type="none" w="med" len="med"/>
+                    </a:lnT>
+                    <a:lnB w="3810" cap="flat" cmpd="sng" algn="ctr">
+                      <a:solidFill>
+                        <a:srgbClr val="CBD5E0"/>
+                      </a:solidFill>
+                      <a:prstDash val="solid"/>
+                      <a:round/>
+                      <a:headEnd type="none" w="med" len="med"/>
+                      <a:tailEnd type="none" w="med" len="med"/>
+                    </a:lnB>
+                    <a:solidFill>
+                      <a:srgbClr val="FFFFFF"/>
+                    </a:solidFill>
+                  </a:tcPr>
+                </a:tc>
+              </a:tr>
+              <a:tr h="420624">
+                <a:tc>
+                  <a:txBody>
+                    <a:bodyPr/>
+                    <a:lstStyle/>
+                    <a:p>
+                      <a:pPr indent="0" marL="0">
+                        <a:buNone/>
+                      </a:pPr>
+                      <a:r>
+                        <a:rPr lang="en-US" sz="1300" b="1" dirty="0">
+                          <a:solidFill>
+                            <a:srgbClr val="10161F"/>
+                          </a:solidFill>
+                          <a:latin typeface="Pretendard" pitchFamily="34" charset="0"/>
+                          <a:ea typeface="Pretendard" pitchFamily="34" charset="-122"/>
+                          <a:cs typeface="Pretendard" pitchFamily="34" charset="-120"/>
+                        </a:rPr>
+                        <a:t>자산 </a:t>
+                      </a:r>
+                      <a:pPr indent="0" marL="0">
+                        <a:buNone/>
+                      </a:pPr>
+                      <a:r>
+                        <a:rPr lang="en-US" sz="1300" b="1" dirty="0">
+                          <a:solidFill>
+                            <a:srgbClr val="10161F"/>
+                          </a:solidFill>
+                          <a:latin typeface="Pretendard" pitchFamily="34" charset="0"/>
+                          <a:ea typeface="Pretendard" pitchFamily="34" charset="-122"/>
+                          <a:cs typeface="Pretendard" pitchFamily="34" charset="-120"/>
+                        </a:rPr>
+                        <a:t>가치</a:t>
+                      </a:r>
+                      <a:endParaRPr lang="en-US" sz="1300" dirty="0">
+                        <a:latin typeface="Pretendard" charset="0"/>
+                        <a:ea typeface="Pretendard" charset="0"/>
+                        <a:cs typeface="Pretendard" charset="0"/>
+                      </a:endParaRPr>
+                    </a:p>
+                  </a:txBody>
+                  <a:tcPr marL="50800" marR="50800" marT="25400" marB="25400" anchor="ctr">
+                    <a:lnL w="3810" cap="flat" cmpd="sng" algn="ctr">
+                      <a:solidFill>
+                        <a:srgbClr val="CBD5E0"/>
+                      </a:solidFill>
+                      <a:prstDash val="solid"/>
+                      <a:round/>
+                      <a:headEnd type="none" w="med" len="med"/>
+                      <a:tailEnd type="none" w="med" len="med"/>
+                    </a:lnL>
+                    <a:lnR w="3810" cap="flat" cmpd="sng" algn="ctr">
+                      <a:solidFill>
+                        <a:srgbClr val="CBD5E0"/>
+                      </a:solidFill>
+                      <a:prstDash val="solid"/>
+                      <a:round/>
+                      <a:headEnd type="none" w="med" len="med"/>
+                      <a:tailEnd type="none" w="med" len="med"/>
+                    </a:lnR>
+                    <a:lnT w="3810" cap="flat" cmpd="sng" algn="ctr">
+                      <a:solidFill>
+                        <a:srgbClr val="CBD5E0"/>
+                      </a:solidFill>
+                      <a:prstDash val="solid"/>
+                      <a:round/>
+                      <a:headEnd type="none" w="med" len="med"/>
+                      <a:tailEnd type="none" w="med" len="med"/>
+                    </a:lnT>
+                    <a:lnB w="3810" cap="flat" cmpd="sng" algn="ctr">
+                      <a:solidFill>
+                        <a:srgbClr val="CBD5E0"/>
+                      </a:solidFill>
+                      <a:prstDash val="solid"/>
+                      <a:round/>
+                      <a:headEnd type="none" w="med" len="med"/>
+                      <a:tailEnd type="none" w="med" len="med"/>
+                    </a:lnB>
+                    <a:solidFill>
+                      <a:srgbClr val="F7FAFC"/>
+                    </a:solidFill>
+                  </a:tcPr>
+                </a:tc>
+                <a:tc>
+                  <a:txBody>
+                    <a:bodyPr/>
+                    <a:lstStyle/>
+                    <a:p>
+                      <a:pPr indent="0" marL="0">
+                        <a:buNone/>
+                      </a:pPr>
+                      <a:r>
+                        <a:rPr lang="en-US" sz="1300" dirty="0">
+                          <a:solidFill>
+                            <a:srgbClr val="10161F"/>
+                          </a:solidFill>
+                          <a:latin typeface="Pretendard" pitchFamily="34" charset="0"/>
+                          <a:ea typeface="Pretendard" pitchFamily="34" charset="-122"/>
+                          <a:cs typeface="Pretendard" pitchFamily="34" charset="-120"/>
+                        </a:rPr>
+                        <a:t>비용 </a:t>
+                      </a:r>
+                      <a:pPr indent="0" marL="0">
+                        <a:buNone/>
+                      </a:pPr>
+                      <a:r>
+                        <a:rPr lang="en-US" sz="1300" dirty="0">
+                          <a:solidFill>
+                            <a:srgbClr val="10161F"/>
+                          </a:solidFill>
+                          <a:latin typeface="Pretendard" pitchFamily="34" charset="0"/>
+                          <a:ea typeface="Pretendard" pitchFamily="34" charset="-122"/>
+                          <a:cs typeface="Pretendard" pitchFamily="34" charset="-120"/>
+                        </a:rPr>
+                        <a:t>소멸</a:t>
+                      </a:r>
+                      <a:endParaRPr lang="en-US" sz="1300" dirty="0">
+                        <a:latin typeface="Pretendard" charset="0"/>
+                        <a:ea typeface="Pretendard" charset="0"/>
+                        <a:cs typeface="Pretendard" charset="0"/>
+                      </a:endParaRPr>
+                    </a:p>
+                  </a:txBody>
+                  <a:tcPr marL="50800" marR="50800" marT="25400" marB="25400" anchor="ctr">
+                    <a:lnL w="3810" cap="flat" cmpd="sng" algn="ctr">
+                      <a:solidFill>
+                        <a:srgbClr val="CBD5E0"/>
+                      </a:solidFill>
+                      <a:prstDash val="solid"/>
+                      <a:round/>
+                      <a:headEnd type="none" w="med" len="med"/>
+                      <a:tailEnd type="none" w="med" len="med"/>
+                    </a:lnL>
+                    <a:lnR w="3810" cap="flat" cmpd="sng" algn="ctr">
+                      <a:solidFill>
+                        <a:srgbClr val="CBD5E0"/>
+                      </a:solidFill>
+                      <a:prstDash val="solid"/>
+                      <a:round/>
+                      <a:headEnd type="none" w="med" len="med"/>
+                      <a:tailEnd type="none" w="med" len="med"/>
+                    </a:lnR>
+                    <a:lnT w="3810" cap="flat" cmpd="sng" algn="ctr">
+                      <a:solidFill>
+                        <a:srgbClr val="CBD5E0"/>
+                      </a:solidFill>
+                      <a:prstDash val="solid"/>
+                      <a:round/>
+                      <a:headEnd type="none" w="med" len="med"/>
+                      <a:tailEnd type="none" w="med" len="med"/>
+                    </a:lnT>
+                    <a:lnB w="3810" cap="flat" cmpd="sng" algn="ctr">
+                      <a:solidFill>
+                        <a:srgbClr val="CBD5E0"/>
+                      </a:solidFill>
+                      <a:prstDash val="solid"/>
+                      <a:round/>
+                      <a:headEnd type="none" w="med" len="med"/>
+                      <a:tailEnd type="none" w="med" len="med"/>
+                    </a:lnB>
+                    <a:solidFill>
+                      <a:srgbClr val="F7FAFC"/>
+                    </a:solidFill>
+                  </a:tcPr>
+                </a:tc>
+                <a:tc>
+                  <a:txBody>
+                    <a:bodyPr/>
+                    <a:lstStyle/>
+                    <a:p>
+                      <a:pPr indent="0" marL="0">
+                        <a:buNone/>
+                      </a:pPr>
+                      <a:r>
+                        <a:rPr lang="en-US" sz="1300" dirty="0">
+                          <a:solidFill>
+                            <a:srgbClr val="10161F"/>
+                          </a:solidFill>
+                          <a:latin typeface="Pretendard" pitchFamily="34" charset="0"/>
+                          <a:ea typeface="Pretendard" pitchFamily="34" charset="-122"/>
+                          <a:cs typeface="Pretendard" pitchFamily="34" charset="-120"/>
+                        </a:rPr>
+                        <a:t>건물/토지 </a:t>
+                      </a:r>
+                      <a:pPr indent="0" marL="0">
+                        <a:buNone/>
+                      </a:pPr>
+                      <a:r>
+                        <a:rPr lang="en-US" sz="1300" dirty="0">
+                          <a:solidFill>
+                            <a:srgbClr val="10161F"/>
+                          </a:solidFill>
+                          <a:latin typeface="Pretendard" pitchFamily="34" charset="0"/>
+                          <a:ea typeface="Pretendard" pitchFamily="34" charset="-122"/>
+                          <a:cs typeface="Pretendard" pitchFamily="34" charset="-120"/>
+                        </a:rPr>
+                        <a:t>가치 </a:t>
+                      </a:r>
+                      <a:pPr indent="0" marL="0">
+                        <a:buNone/>
+                      </a:pPr>
+                      <a:r>
+                        <a:rPr lang="en-US" sz="1300" dirty="0">
+                          <a:solidFill>
+                            <a:srgbClr val="10161F"/>
+                          </a:solidFill>
+                          <a:latin typeface="Pretendard" pitchFamily="34" charset="0"/>
+                          <a:ea typeface="Pretendard" pitchFamily="34" charset="-122"/>
+                          <a:cs typeface="Pretendard" pitchFamily="34" charset="-120"/>
+                        </a:rPr>
+                        <a:t>상승 </a:t>
+                      </a:r>
+                      <a:pPr indent="0" marL="0">
+                        <a:buNone/>
+                      </a:pPr>
+                      <a:r>
+                        <a:rPr lang="en-US" sz="1300" dirty="0">
+                          <a:solidFill>
+                            <a:srgbClr val="10161F"/>
+                          </a:solidFill>
+                          <a:latin typeface="Pretendard" pitchFamily="34" charset="0"/>
+                          <a:ea typeface="Pretendard" pitchFamily="34" charset="-122"/>
+                          <a:cs typeface="Pretendard" pitchFamily="34" charset="-120"/>
+                        </a:rPr>
+                        <a:t>유인</a:t>
+                      </a:r>
+                      <a:endParaRPr lang="en-US" sz="1300" dirty="0">
+                        <a:latin typeface="Pretendard" charset="0"/>
+                        <a:ea typeface="Pretendard" charset="0"/>
+                        <a:cs typeface="Pretendard" charset="0"/>
+                      </a:endParaRPr>
+                    </a:p>
+                  </a:txBody>
+                  <a:tcPr marL="50800" marR="50800" marT="25400" marB="25400" anchor="ctr">
+                    <a:lnL w="3810" cap="flat" cmpd="sng" algn="ctr">
+                      <a:solidFill>
+                        <a:srgbClr val="CBD5E0"/>
+                      </a:solidFill>
+                      <a:prstDash val="solid"/>
+                      <a:round/>
+                      <a:headEnd type="none" w="med" len="med"/>
+                      <a:tailEnd type="none" w="med" len="med"/>
+                    </a:lnL>
+                    <a:lnR w="3810" cap="flat" cmpd="sng" algn="ctr">
+                      <a:solidFill>
+                        <a:srgbClr val="CBD5E0"/>
+                      </a:solidFill>
+                      <a:prstDash val="solid"/>
+                      <a:round/>
+                      <a:headEnd type="none" w="med" len="med"/>
+                      <a:tailEnd type="none" w="med" len="med"/>
+                    </a:lnR>
+                    <a:lnT w="3810" cap="flat" cmpd="sng" algn="ctr">
+                      <a:solidFill>
+                        <a:srgbClr val="CBD5E0"/>
+                      </a:solidFill>
+                      <a:prstDash val="solid"/>
+                      <a:round/>
+                      <a:headEnd type="none" w="med" len="med"/>
+                      <a:tailEnd type="none" w="med" len="med"/>
+                    </a:lnT>
+                    <a:lnB w="3810" cap="flat" cmpd="sng" algn="ctr">
+                      <a:solidFill>
+                        <a:srgbClr val="CBD5E0"/>
+                      </a:solidFill>
+                      <a:prstDash val="solid"/>
+                      <a:round/>
+                      <a:headEnd type="none" w="med" len="med"/>
+                      <a:tailEnd type="none" w="med" len="med"/>
+                    </a:lnB>
+                    <a:solidFill>
+                      <a:srgbClr val="F7FAFC"/>
+                    </a:solidFill>
+                  </a:tcPr>
+                </a:tc>
+                <a:tc>
+                  <a:txBody>
+                    <a:bodyPr/>
+                    <a:lstStyle/>
+                    <a:p>
+                      <a:pPr indent="0" marL="0">
+                        <a:buNone/>
+                      </a:pPr>
+                      <a:r>
+                        <a:rPr lang="en-US" sz="1300" dirty="0">
+                          <a:solidFill>
+                            <a:srgbClr val="10161F"/>
+                          </a:solidFill>
+                          <a:latin typeface="Pretendard" pitchFamily="34" charset="0"/>
+                          <a:ea typeface="Pretendard" pitchFamily="34" charset="-122"/>
+                          <a:cs typeface="Pretendard" pitchFamily="34" charset="-120"/>
+                        </a:rPr>
+                        <a:t>자본 </a:t>
+                      </a:r>
+                      <a:pPr indent="0" marL="0">
+                        <a:buNone/>
+                      </a:pPr>
+                      <a:r>
+                        <a:rPr lang="en-US" sz="1300" dirty="0">
+                          <a:solidFill>
+                            <a:srgbClr val="10161F"/>
+                          </a:solidFill>
+                          <a:latin typeface="Pretendard" pitchFamily="34" charset="0"/>
+                          <a:ea typeface="Pretendard" pitchFamily="34" charset="-122"/>
+                          <a:cs typeface="Pretendard" pitchFamily="34" charset="-120"/>
+                        </a:rPr>
+                        <a:t>이득 </a:t>
+                      </a:r>
+                      <a:pPr indent="0" marL="0">
+                        <a:buNone/>
+                      </a:pPr>
+                      <a:r>
+                        <a:rPr lang="en-US" sz="1300" dirty="0">
+                          <a:solidFill>
+                            <a:srgbClr val="10161F"/>
+                          </a:solidFill>
+                          <a:latin typeface="Pretendard" pitchFamily="34" charset="0"/>
+                          <a:ea typeface="Pretendard" pitchFamily="34" charset="-122"/>
+                          <a:cs typeface="Pretendard" pitchFamily="34" charset="-120"/>
+                        </a:rPr>
+                        <a:t>형성</a:t>
+                      </a:r>
+                      <a:endParaRPr lang="en-US" sz="1300" dirty="0">
+                        <a:latin typeface="Pretendard" charset="0"/>
+                        <a:ea typeface="Pretendard" charset="0"/>
+                        <a:cs typeface="Pretendard" charset="0"/>
+                      </a:endParaRPr>
+                    </a:p>
+                  </a:txBody>
+                  <a:tcPr marL="50800" marR="50800" marT="25400" marB="25400" anchor="ctr">
+                    <a:lnL w="3810" cap="flat" cmpd="sng" algn="ctr">
+                      <a:solidFill>
+                        <a:srgbClr val="CBD5E0"/>
+                      </a:solidFill>
+                      <a:prstDash val="solid"/>
+                      <a:round/>
+                      <a:headEnd type="none" w="med" len="med"/>
+                      <a:tailEnd type="none" w="med" len="med"/>
+                    </a:lnL>
+                    <a:lnR w="3810" cap="flat" cmpd="sng" algn="ctr">
+                      <a:solidFill>
+                        <a:srgbClr val="CBD5E0"/>
+                      </a:solidFill>
+                      <a:prstDash val="solid"/>
+                      <a:round/>
+                      <a:headEnd type="none" w="med" len="med"/>
+                      <a:tailEnd type="none" w="med" len="med"/>
+                    </a:lnR>
+                    <a:lnT w="3810" cap="flat" cmpd="sng" algn="ctr">
+                      <a:solidFill>
+                        <a:srgbClr val="CBD5E0"/>
+                      </a:solidFill>
+                      <a:prstDash val="solid"/>
+                      <a:round/>
+                      <a:headEnd type="none" w="med" len="med"/>
+                      <a:tailEnd type="none" w="med" len="med"/>
+                    </a:lnT>
+                    <a:lnB w="3810" cap="flat" cmpd="sng" algn="ctr">
+                      <a:solidFill>
+                        <a:srgbClr val="CBD5E0"/>
+                      </a:solidFill>
+                      <a:prstDash val="solid"/>
+                      <a:round/>
+                      <a:headEnd type="none" w="med" len="med"/>
+                      <a:tailEnd type="none" w="med" len="med"/>
+                    </a:lnB>
+                    <a:solidFill>
+                      <a:srgbClr val="F7FAFC"/>
+                    </a:solidFill>
+                  </a:tcPr>
+                </a:tc>
+              </a:tr>
+              <a:tr h="420624">
+                <a:tc>
+                  <a:txBody>
+                    <a:bodyPr/>
+                    <a:lstStyle/>
+                    <a:p>
+                      <a:pPr indent="0" marL="0">
+                        <a:buNone/>
+                      </a:pPr>
+                      <a:r>
+                        <a:rPr lang="en-US" sz="1300" b="1" dirty="0">
+                          <a:solidFill>
+                            <a:srgbClr val="10161F"/>
+                          </a:solidFill>
+                          <a:latin typeface="Pretendard" pitchFamily="34" charset="0"/>
+                          <a:ea typeface="Pretendard" pitchFamily="34" charset="-122"/>
+                          <a:cs typeface="Pretendard" pitchFamily="34" charset="-120"/>
+                        </a:rPr>
+                        <a:t>세제 </a:t>
+                      </a:r>
+                      <a:pPr indent="0" marL="0">
+                        <a:buNone/>
+                      </a:pPr>
+                      <a:r>
+                        <a:rPr lang="en-US" sz="1300" b="1" dirty="0">
+                          <a:solidFill>
+                            <a:srgbClr val="10161F"/>
+                          </a:solidFill>
+                          <a:latin typeface="Pretendard" pitchFamily="34" charset="0"/>
+                          <a:ea typeface="Pretendard" pitchFamily="34" charset="-122"/>
+                          <a:cs typeface="Pretendard" pitchFamily="34" charset="-120"/>
+                        </a:rPr>
+                        <a:t>혜택</a:t>
+                      </a:r>
+                      <a:endParaRPr lang="en-US" sz="1300" dirty="0">
+                        <a:latin typeface="Pretendard" charset="0"/>
+                        <a:ea typeface="Pretendard" charset="0"/>
+                        <a:cs typeface="Pretendard" charset="0"/>
+                      </a:endParaRPr>
+                    </a:p>
+                  </a:txBody>
+                  <a:tcPr marL="50800" marR="50800" marT="25400" marB="25400" anchor="ctr">
+                    <a:lnL w="3810" cap="flat" cmpd="sng" algn="ctr">
+                      <a:solidFill>
+                        <a:srgbClr val="CBD5E0"/>
+                      </a:solidFill>
+                      <a:prstDash val="solid"/>
+                      <a:round/>
+                      <a:headEnd type="none" w="med" len="med"/>
+                      <a:tailEnd type="none" w="med" len="med"/>
+                    </a:lnL>
+                    <a:lnR w="3810" cap="flat" cmpd="sng" algn="ctr">
+                      <a:solidFill>
+                        <a:srgbClr val="CBD5E0"/>
+                      </a:solidFill>
+                      <a:prstDash val="solid"/>
+                      <a:round/>
+                      <a:headEnd type="none" w="med" len="med"/>
+                      <a:tailEnd type="none" w="med" len="med"/>
+                    </a:lnR>
+                    <a:lnT w="3810" cap="flat" cmpd="sng" algn="ctr">
+                      <a:solidFill>
+                        <a:srgbClr val="CBD5E0"/>
+                      </a:solidFill>
+                      <a:prstDash val="solid"/>
+                      <a:round/>
+                      <a:headEnd type="none" w="med" len="med"/>
+                      <a:tailEnd type="none" w="med" len="med"/>
+                    </a:lnT>
+                    <a:lnB w="3810" cap="flat" cmpd="sng" algn="ctr">
+                      <a:solidFill>
+                        <a:srgbClr val="CBD5E0"/>
+                      </a:solidFill>
+                      <a:prstDash val="solid"/>
+                      <a:round/>
+                      <a:headEnd type="none" w="med" len="med"/>
+                      <a:tailEnd type="none" w="med" len="med"/>
+                    </a:lnB>
+                    <a:solidFill>
+                      <a:srgbClr val="FFFFFF"/>
+                    </a:solidFill>
+                  </a:tcPr>
+                </a:tc>
+                <a:tc>
+                  <a:txBody>
+                    <a:bodyPr/>
+                    <a:lstStyle/>
+                    <a:p>
+                      <a:pPr indent="0" marL="0">
+                        <a:buNone/>
+                      </a:pPr>
+                      <a:r>
+                        <a:rPr lang="en-US" sz="1300" dirty="0">
+                          <a:solidFill>
+                            <a:srgbClr val="10161F"/>
+                          </a:solidFill>
+                          <a:latin typeface="Pretendard" pitchFamily="34" charset="0"/>
+                          <a:ea typeface="Pretendard" pitchFamily="34" charset="-122"/>
+                          <a:cs typeface="Pretendard" pitchFamily="34" charset="-120"/>
+                        </a:rPr>
+                        <a:t>임대료 </a:t>
+                      </a:r>
+                      <a:pPr indent="0" marL="0">
+                        <a:buNone/>
+                      </a:pPr>
+                      <a:r>
+                        <a:rPr lang="en-US" sz="1300" dirty="0">
+                          <a:solidFill>
+                            <a:srgbClr val="10161F"/>
+                          </a:solidFill>
+                          <a:latin typeface="Pretendard" pitchFamily="34" charset="0"/>
+                          <a:ea typeface="Pretendard" pitchFamily="34" charset="-122"/>
+                          <a:cs typeface="Pretendard" pitchFamily="34" charset="-120"/>
+                        </a:rPr>
+                        <a:t>손비 </a:t>
+                      </a:r>
+                      <a:pPr indent="0" marL="0">
+                        <a:buNone/>
+                      </a:pPr>
+                      <a:r>
+                        <a:rPr lang="en-US" sz="1300" dirty="0">
+                          <a:solidFill>
+                            <a:srgbClr val="10161F"/>
+                          </a:solidFill>
+                          <a:latin typeface="Pretendard" pitchFamily="34" charset="0"/>
+                          <a:ea typeface="Pretendard" pitchFamily="34" charset="-122"/>
+                          <a:cs typeface="Pretendard" pitchFamily="34" charset="-120"/>
+                        </a:rPr>
+                        <a:t>처리</a:t>
+                      </a:r>
+                      <a:endParaRPr lang="en-US" sz="1300" dirty="0">
+                        <a:latin typeface="Pretendard" charset="0"/>
+                        <a:ea typeface="Pretendard" charset="0"/>
+                        <a:cs typeface="Pretendard" charset="0"/>
+                      </a:endParaRPr>
+                    </a:p>
+                  </a:txBody>
+                  <a:tcPr marL="50800" marR="50800" marT="25400" marB="25400" anchor="ctr">
+                    <a:lnL w="3810" cap="flat" cmpd="sng" algn="ctr">
+                      <a:solidFill>
+                        <a:srgbClr val="CBD5E0"/>
+                      </a:solidFill>
+                      <a:prstDash val="solid"/>
+                      <a:round/>
+                      <a:headEnd type="none" w="med" len="med"/>
+                      <a:tailEnd type="none" w="med" len="med"/>
+                    </a:lnL>
+                    <a:lnR w="3810" cap="flat" cmpd="sng" algn="ctr">
+                      <a:solidFill>
+                        <a:srgbClr val="CBD5E0"/>
+                      </a:solidFill>
+                      <a:prstDash val="solid"/>
+                      <a:round/>
+                      <a:headEnd type="none" w="med" len="med"/>
+                      <a:tailEnd type="none" w="med" len="med"/>
+                    </a:lnR>
+                    <a:lnT w="3810" cap="flat" cmpd="sng" algn="ctr">
+                      <a:solidFill>
+                        <a:srgbClr val="CBD5E0"/>
+                      </a:solidFill>
+                      <a:prstDash val="solid"/>
+                      <a:round/>
+                      <a:headEnd type="none" w="med" len="med"/>
+                      <a:tailEnd type="none" w="med" len="med"/>
+                    </a:lnT>
+                    <a:lnB w="3810" cap="flat" cmpd="sng" algn="ctr">
+                      <a:solidFill>
+                        <a:srgbClr val="CBD5E0"/>
+                      </a:solidFill>
+                      <a:prstDash val="solid"/>
+                      <a:round/>
+                      <a:headEnd type="none" w="med" len="med"/>
+                      <a:tailEnd type="none" w="med" len="med"/>
+                    </a:lnB>
+                    <a:solidFill>
+                      <a:srgbClr val="FFFFFF"/>
+                    </a:solidFill>
+                  </a:tcPr>
+                </a:tc>
+                <a:tc>
+                  <a:txBody>
+                    <a:bodyPr/>
+                    <a:lstStyle/>
+                    <a:p>
+                      <a:pPr indent="0" marL="0">
+                        <a:buNone/>
+                      </a:pPr>
+                      <a:r>
+                        <a:rPr lang="en-US" sz="1300" dirty="0">
+                          <a:solidFill>
+                            <a:srgbClr val="10161F"/>
+                          </a:solidFill>
+                          <a:latin typeface="Pretendard" pitchFamily="34" charset="0"/>
+                          <a:ea typeface="Pretendard" pitchFamily="34" charset="-122"/>
+                          <a:cs typeface="Pretendard" pitchFamily="34" charset="-120"/>
+                        </a:rPr>
+                        <a:t>감가상각 </a:t>
+                      </a:r>
+                      <a:pPr indent="0" marL="0">
+                        <a:buNone/>
+                      </a:pPr>
+                      <a:r>
+                        <a:rPr lang="en-US" sz="1300" dirty="0">
+                          <a:solidFill>
+                            <a:srgbClr val="10161F"/>
+                          </a:solidFill>
+                          <a:latin typeface="Pretendard" pitchFamily="34" charset="0"/>
+                          <a:ea typeface="Pretendard" pitchFamily="34" charset="-122"/>
+                          <a:cs typeface="Pretendard" pitchFamily="34" charset="-120"/>
+                        </a:rPr>
+                        <a:t>및 </a:t>
+                      </a:r>
+                      <a:pPr indent="0" marL="0">
+                        <a:buNone/>
+                      </a:pPr>
+                      <a:r>
+                        <a:rPr lang="en-US" sz="1300" dirty="0">
+                          <a:solidFill>
+                            <a:srgbClr val="10161F"/>
+                          </a:solidFill>
+                          <a:latin typeface="Pretendard" pitchFamily="34" charset="0"/>
+                          <a:ea typeface="Pretendard" pitchFamily="34" charset="-122"/>
+                          <a:cs typeface="Pretendard" pitchFamily="34" charset="-120"/>
+                        </a:rPr>
+                        <a:t>이자 </a:t>
+                      </a:r>
+                      <a:pPr indent="0" marL="0">
+                        <a:buNone/>
+                      </a:pPr>
+                      <a:r>
+                        <a:rPr lang="en-US" sz="1300" dirty="0">
+                          <a:solidFill>
+                            <a:srgbClr val="10161F"/>
+                          </a:solidFill>
+                          <a:latin typeface="Pretendard" pitchFamily="34" charset="0"/>
+                          <a:ea typeface="Pretendard" pitchFamily="34" charset="-122"/>
+                          <a:cs typeface="Pretendard" pitchFamily="34" charset="-120"/>
+                        </a:rPr>
+                        <a:t>비용 </a:t>
+                      </a:r>
+                      <a:pPr indent="0" marL="0">
+                        <a:buNone/>
+                      </a:pPr>
+                      <a:r>
+                        <a:rPr lang="en-US" sz="1300" dirty="0">
+                          <a:solidFill>
+                            <a:srgbClr val="10161F"/>
+                          </a:solidFill>
+                          <a:latin typeface="Pretendard" pitchFamily="34" charset="0"/>
+                          <a:ea typeface="Pretendard" pitchFamily="34" charset="-122"/>
+                          <a:cs typeface="Pretendard" pitchFamily="34" charset="-120"/>
+                        </a:rPr>
+                        <a:t>처리</a:t>
+                      </a:r>
+                      <a:endParaRPr lang="en-US" sz="1300" dirty="0">
+                        <a:latin typeface="Pretendard" charset="0"/>
+                        <a:ea typeface="Pretendard" charset="0"/>
+                        <a:cs typeface="Pretendard" charset="0"/>
+                      </a:endParaRPr>
+                    </a:p>
+                  </a:txBody>
+                  <a:tcPr marL="50800" marR="50800" marT="25400" marB="25400" anchor="ctr">
+                    <a:lnL w="3810" cap="flat" cmpd="sng" algn="ctr">
+                      <a:solidFill>
+                        <a:srgbClr val="CBD5E0"/>
+                      </a:solidFill>
+                      <a:prstDash val="solid"/>
+                      <a:round/>
+                      <a:headEnd type="none" w="med" len="med"/>
+                      <a:tailEnd type="none" w="med" len="med"/>
+                    </a:lnL>
+                    <a:lnR w="3810" cap="flat" cmpd="sng" algn="ctr">
+                      <a:solidFill>
+                        <a:srgbClr val="CBD5E0"/>
+                      </a:solidFill>
+                      <a:prstDash val="solid"/>
+                      <a:round/>
+                      <a:headEnd type="none" w="med" len="med"/>
+                      <a:tailEnd type="none" w="med" len="med"/>
+                    </a:lnR>
+                    <a:lnT w="3810" cap="flat" cmpd="sng" algn="ctr">
+                      <a:solidFill>
+                        <a:srgbClr val="CBD5E0"/>
+                      </a:solidFill>
+                      <a:prstDash val="solid"/>
+                      <a:round/>
+                      <a:headEnd type="none" w="med" len="med"/>
+                      <a:tailEnd type="none" w="med" len="med"/>
+                    </a:lnT>
+                    <a:lnB w="3810" cap="flat" cmpd="sng" algn="ctr">
+                      <a:solidFill>
+                        <a:srgbClr val="CBD5E0"/>
+                      </a:solidFill>
+                      <a:prstDash val="solid"/>
+                      <a:round/>
+                      <a:headEnd type="none" w="med" len="med"/>
+                      <a:tailEnd type="none" w="med" len="med"/>
+                    </a:lnB>
+                    <a:solidFill>
+                      <a:srgbClr val="FFFFFF"/>
+                    </a:solidFill>
+                  </a:tcPr>
+                </a:tc>
+                <a:tc>
+                  <a:txBody>
+                    <a:bodyPr/>
+                    <a:lstStyle/>
+                    <a:p>
+                      <a:pPr indent="0" marL="0">
+                        <a:buNone/>
+                      </a:pPr>
+                      <a:r>
+                        <a:rPr lang="en-US" sz="1300" dirty="0">
+                          <a:solidFill>
+                            <a:srgbClr val="10161F"/>
+                          </a:solidFill>
+                          <a:latin typeface="Pretendard" pitchFamily="34" charset="0"/>
+                          <a:ea typeface="Pretendard" pitchFamily="34" charset="-122"/>
+                          <a:cs typeface="Pretendard" pitchFamily="34" charset="-120"/>
+                        </a:rPr>
+                        <a:t>법인세 </a:t>
+                      </a:r>
+                      <a:pPr indent="0" marL="0">
+                        <a:buNone/>
+                      </a:pPr>
+                      <a:r>
+                        <a:rPr lang="en-US" sz="1300" dirty="0">
+                          <a:solidFill>
+                            <a:srgbClr val="10161F"/>
+                          </a:solidFill>
+                          <a:latin typeface="Pretendard" pitchFamily="34" charset="0"/>
+                          <a:ea typeface="Pretendard" pitchFamily="34" charset="-122"/>
+                          <a:cs typeface="Pretendard" pitchFamily="34" charset="-120"/>
+                        </a:rPr>
+                        <a:t>절감</a:t>
+                      </a:r>
+                      <a:endParaRPr lang="en-US" sz="1300" dirty="0">
+                        <a:latin typeface="Pretendard" charset="0"/>
+                        <a:ea typeface="Pretendard" charset="0"/>
+                        <a:cs typeface="Pretendard" charset="0"/>
+                      </a:endParaRPr>
+                    </a:p>
+                  </a:txBody>
+                  <a:tcPr marL="50800" marR="50800" marT="25400" marB="25400" anchor="ctr">
+                    <a:lnL w="3810" cap="flat" cmpd="sng" algn="ctr">
+                      <a:solidFill>
+                        <a:srgbClr val="CBD5E0"/>
+                      </a:solidFill>
+                      <a:prstDash val="solid"/>
+                      <a:round/>
+                      <a:headEnd type="none" w="med" len="med"/>
+                      <a:tailEnd type="none" w="med" len="med"/>
+                    </a:lnL>
+                    <a:lnR w="3810" cap="flat" cmpd="sng" algn="ctr">
+                      <a:solidFill>
+                        <a:srgbClr val="CBD5E0"/>
+                      </a:solidFill>
+                      <a:prstDash val="solid"/>
+                      <a:round/>
+                      <a:headEnd type="none" w="med" len="med"/>
+                      <a:tailEnd type="none" w="med" len="med"/>
+                    </a:lnR>
+                    <a:lnT w="3810" cap="flat" cmpd="sng" algn="ctr">
+                      <a:solidFill>
+                        <a:srgbClr val="CBD5E0"/>
+                      </a:solidFill>
+                      <a:prstDash val="solid"/>
+                      <a:round/>
+                      <a:headEnd type="none" w="med" len="med"/>
+                      <a:tailEnd type="none" w="med" len="med"/>
+                    </a:lnT>
+                    <a:lnB w="3810" cap="flat" cmpd="sng" algn="ctr">
+                      <a:solidFill>
+                        <a:srgbClr val="CBD5E0"/>
+                      </a:solidFill>
+                      <a:prstDash val="solid"/>
+                      <a:round/>
+                      <a:headEnd type="none" w="med" len="med"/>
+                      <a:tailEnd type="none" w="med" len="med"/>
+                    </a:lnB>
+                    <a:solidFill>
+                      <a:srgbClr val="FFFFFF"/>
+                    </a:solidFill>
+                  </a:tcPr>
+                </a:tc>
+              </a:tr>
+            </a:tbl>
+          </a:graphicData>
+        </a:graphic>
+      </p:graphicFrame>
+      <p:sp>
+        <p:nvSpPr>
+          <p:cNvPr id="7" name="Text 4"/>
           <p:cNvSpPr/>
           <p:nvPr/>
         </p:nvSpPr>
@@ -7434,7 +9018,7 @@
       </p:sp>
       <p:sp>
         <p:nvSpPr>
-          <p:cNvPr id="7" name="Text 5"/>
+          <p:cNvPr id="8" name="Text 5"/>
           <p:cNvSpPr/>
           <p:nvPr/>
         </p:nvSpPr>
@@ -7468,45 +9052,6 @@
               <a:t>6</a:t>
             </a:r>
             <a:endParaRPr lang="en-US" sz="900" dirty="0"/>
-          </a:p>
-        </p:txBody>
-      </p:sp>
-      <p:sp>
-        <p:nvSpPr>
-          <p:cNvPr id="8" name="Text 6"/>
-          <p:cNvSpPr/>
-          <p:nvPr/>
-        </p:nvSpPr>
-        <p:spPr>
-          <a:xfrm>
-            <a:off x="566928" y="1481328"/>
-            <a:ext cx="11057839" cy="9692640"/>
-          </a:xfrm>
-          <a:prstGeom prst="rect">
-            <a:avLst/>
-          </a:prstGeom>
-          <a:noFill/>
-          <a:ln/>
-        </p:spPr>
-        <p:txBody>
-          <a:bodyPr wrap="square" lIns="0" tIns="0" rIns="0" bIns="0" rtlCol="0" anchor="t"/>
-          <a:lstStyle/>
-          <a:p>
-            <a:pPr indent="0" marL="0">
-              <a:buNone/>
-            </a:pPr>
-            <a:r>
-              <a:rPr lang="en-US" sz="1000" dirty="0">
-                <a:solidFill>
-                  <a:srgbClr val="10161F"/>
-                </a:solidFill>
-                <a:latin typeface="Pretendard" pitchFamily="34" charset="0"/>
-                <a:ea typeface="Pretendard" pitchFamily="34" charset="-122"/>
-                <a:cs typeface="Pretendard" pitchFamily="34" charset="-120"/>
-              </a:rPr>
-              <a:t>{"ok":true,"mocked":true,"extractedFields":{"area_signal":"역삼","asset_type":"오피스빌딩","price_band":"300억","size_signal":"3000평(약 9917.4㎡)"},"extractedFacts":{"region":"역삼","exactAddressCandidate":"역삼동 742-1","assetType":"오피스빌딩","priceText":"300억","sizeText":"3000평(약 9917.4㎡)","currentUse":"오피스","currentUseSignal":"근린생활시설","leaseSignal":"임대중","vacancySignal":"공실없음","tenantNames":["쿠팡","네이버"],"unitRentTexts":["301호: 1500만"],"sellerMotivationText":"자산 효율화","brokerNotes":["초역세권 매물"]},"detectedSensitiveFields":["exact_address","tenant_name"],"ambiguousFields":[],"warnings":[],"areaSignal":"역삼","assetType":"오피스빌딩","priceBand":"300억","sizeSignal":"3000평(약 9917.4㎡)","dealType":"매각","buildingName":"역삼 센트럴타워","exactAddress":"역삼동 742-1","totalFloorArea":9917.3,"buildYear":2015,"currentUseSignal":"근린생활시설","vacancySignal":"공실 없음","fitSummary":"초역세권 근생 빌딩으로 시행/사옥 매입에 최적화","cautionSummary":"주요 임차인 만기 조율 필요","hiddenFields":["exact_address","seller_motivation"],"confidence":{"areaSignal":"confirmed","assetType":"confirmed","priceBand":"ai_hypothesis","fitSummary":"ai_hypothesis"},"missingData":["sizeSignal"],"boundaryNote":"본 자료는 실거래 통계 기반 참고치입니다.","buyerType":"법인 사옥형","budgetRange":{"min":50,"max":80,"display":"50억~80억"},"preferredRegions":["강남","성수"],"assetTypes":["꼬마빌딩","사옥용"],"purchasePurpose":"사옥용 매입","mustHave":["초역세권","주차"],"niceToHave":["테라스","루프탑"],"riskTolerance":"medium","financingNote":"자본금 50% 준비","missingQuestions":["구체적인 입주 시기가 언제인가요?","선호하는 수익률이 있나요?"],"privacyNotes":["연락처 비공개"],"fitReasons":["매수자 예산(50-80억)에 부합하는 매물입니다.","요청하신 성수/강남 권역에 해당합니다."],"cautionReasons":["요청한 용도와 달리 명도 협의가 다소 필요합니다."],"recommendedNextAction":"현장 답사 제안","kakaoMessage":"안녕하세요! 요청하신 조건에 부합하는 추천 매물이 있어 안내해 드립니다. 확인해보시고 피드백 부탁드립니다.","title":"강남 역삼역 초역세권 오피스 사옥용 빌딩 매각","shortSummary":"역삼역 도보 5분 거리의 준신축급 대형 오피스빌딩입니다.","dealPoints":["초역세권","사옥 최적"],"cautionPoints":["명도 조율 필요"],"hiddenInfoNotice":["보증금 및 지번은 인가 후 확인 가능"],"gateMessage":"G1 등급 등록이 필요합니다.","kakaoText":"강남 역삼역 오피스 빌딩 매각 안내입니다.","exactUnitCandidate":"101호","floor":"1층","areaSqmText":"150㎡","spaceType":"office","depositText":"5000만","monthlyRentText":"400만","maintenanceFeeText":"50만","availableFromText":"즉시입주","leaseTermMonthsText":"24","incentivesText":"렌트프리 2개월","restrictions":[],"landlordIdentity":"김성수","currentTenant":"스타트업","vacancyReason":"이전 확장","rentNegotiation":"협의 가능","region":"성수동","areaSqm":150,"deposit":5000,"monthlyRent":400,"maintenanceFee":50,"availableFrom":"즉시입주","leaseTermMonths":24,"incentives":{"rentFreeMonths":2,"interiorSupport":"일부 인테리어 지원","freeRentDetail":"렌트프리 2개월 지원"},"shortSummaryLease":"성수역 도보 5분 거리 1층 리테일 상가 매물입니다."}</a:t>
-            </a:r>
-            <a:endParaRPr lang="en-US" sz="1000" dirty="0"/>
           </a:p>
         </p:txBody>
       </p:sp>
@@ -7688,11 +9233,11 @@
         <p:spPr>
           <a:xfrm>
             <a:off x="566928" y="1417320"/>
-            <a:ext cx="3515258" cy="3657600"/>
+            <a:ext cx="11057839" cy="3657600"/>
           </a:xfrm>
           <a:prstGeom prst="roundRect">
             <a:avLst>
-              <a:gd name="adj" fmla="val 1561"/>
+              <a:gd name="adj" fmla="val 1500"/>
             </a:avLst>
           </a:prstGeom>
           <a:solidFill>
@@ -7715,7 +9260,7 @@
         <p:spPr>
           <a:xfrm>
             <a:off x="566928" y="1417320"/>
-            <a:ext cx="3515258" cy="45720"/>
+            <a:ext cx="11057839" cy="45720"/>
           </a:xfrm>
           <a:prstGeom prst="rect">
             <a:avLst/>
@@ -7735,7 +9280,7 @@
         <p:spPr>
           <a:xfrm>
             <a:off x="795528" y="1618488"/>
-            <a:ext cx="3058058" cy="292608"/>
+            <a:ext cx="10600639" cy="292608"/>
           </a:xfrm>
           <a:prstGeom prst="rect">
             <a:avLst/>
@@ -7759,7 +9304,7 @@
                 <a:ea typeface="Pretendard" pitchFamily="34" charset="-122"/>
                 <a:cs typeface="Pretendard" pitchFamily="34" charset="-120"/>
               </a:rPr>
-              <a:t>건물 물리적 상태</a:t>
+              <a:t>용도 리스크</a:t>
             </a:r>
             <a:endParaRPr lang="en-US" sz="1350" dirty="0"/>
           </a:p>
@@ -7774,7 +9319,7 @@
         <p:spPr>
           <a:xfrm>
             <a:off x="795528" y="1947672"/>
-            <a:ext cx="3058058" cy="365760"/>
+            <a:ext cx="10600639" cy="365760"/>
           </a:xfrm>
           <a:prstGeom prst="rect">
             <a:avLst/>
@@ -7800,7 +9345,7 @@
                 <a:ea typeface="Pretendard" pitchFamily="34" charset="-122"/>
                 <a:cs typeface="Pretendard" pitchFamily="34" charset="-120"/>
               </a:rPr>
-              <a:t>준공연도 확인 필요, 구조 확인 필요</a:t>
+              <a:t>—</a:t>
             </a:r>
             <a:endParaRPr lang="en-US" sz="1250" dirty="0"/>
           </a:p>
@@ -7815,7 +9360,7 @@
         <p:spPr>
           <a:xfrm>
             <a:off x="795528" y="2377440"/>
-            <a:ext cx="3058058" cy="2606040"/>
+            <a:ext cx="10600639" cy="2606040"/>
           </a:xfrm>
           <a:prstGeom prst="rect">
             <a:avLst/>
@@ -7845,58 +9390,10 @@
                 <a:ea typeface="Pretendard" pitchFamily="34" charset="-122"/>
                 <a:cs typeface="Pretendard" pitchFamily="34" charset="-120"/>
               </a:rPr>
-              <a:t>누수</a:t>
+              <a:t>{"ok":true,"mocked":true,"extractedFields":{"area_signal":"역삼","asset_type":"오피스빌딩","price_band":"300억","size_signal":"3000평(약 9917.4㎡)"},"extractedFacts":{"region":"역삼","exactAddressCandidate":"역삼동 7</a:t>
             </a:r>
             <a:endParaRPr lang="en-US" sz="1100" dirty="0"/>
           </a:p>
-          <a:p>
-            <a:pPr marL="342900" indent="-342900">
-              <a:lnSpc>
-                <a:spcPct val="125000"/>
-              </a:lnSpc>
-              <a:spcBef>
-                <a:spcPts val="600"/>
-              </a:spcBef>
-              <a:buSzPct val="100000"/>
-              <a:buChar char="•"/>
-            </a:pPr>
-            <a:r>
-              <a:rPr lang="en-US" sz="1100" dirty="0">
-                <a:solidFill>
-                  <a:srgbClr val="10161F"/>
-                </a:solidFill>
-                <a:latin typeface="Pretendard" pitchFamily="34" charset="0"/>
-                <a:ea typeface="Pretendard" pitchFamily="34" charset="-122"/>
-                <a:cs typeface="Pretendard" pitchFamily="34" charset="-120"/>
-              </a:rPr>
-              <a:t>균열</a:t>
-            </a:r>
-            <a:endParaRPr lang="en-US" sz="1100" dirty="0"/>
-          </a:p>
-          <a:p>
-            <a:pPr marL="342900" indent="-342900">
-              <a:lnSpc>
-                <a:spcPct val="125000"/>
-              </a:lnSpc>
-              <a:spcBef>
-                <a:spcPts val="600"/>
-              </a:spcBef>
-              <a:buSzPct val="100000"/>
-              <a:buChar char="•"/>
-            </a:pPr>
-            <a:r>
-              <a:rPr lang="en-US" sz="1100" dirty="0">
-                <a:solidFill>
-                  <a:srgbClr val="10161F"/>
-                </a:solidFill>
-                <a:latin typeface="Pretendard" pitchFamily="34" charset="0"/>
-                <a:ea typeface="Pretendard" pitchFamily="34" charset="-122"/>
-                <a:cs typeface="Pretendard" pitchFamily="34" charset="-120"/>
-              </a:rPr>
-              <a:t>설비 노후 여부 현장 점검 필요</a:t>
-            </a:r>
-            <a:endParaRPr lang="en-US" sz="1100" dirty="0"/>
-          </a:p>
         </p:txBody>
       </p:sp>
       <p:sp>
@@ -7907,12 +9404,12 @@
         </p:nvSpPr>
         <p:spPr>
           <a:xfrm>
-            <a:off x="4338218" y="1417320"/>
-            <a:ext cx="3515258" cy="3657600"/>
+            <a:off x="566928" y="5193792"/>
+            <a:ext cx="11057839" cy="621792"/>
           </a:xfrm>
           <a:prstGeom prst="roundRect">
             <a:avLst>
-              <a:gd name="adj" fmla="val 1561"/>
+              <a:gd name="adj" fmla="val 8824"/>
             </a:avLst>
           </a:prstGeom>
           <a:solidFill>
@@ -7928,34 +9425,14 @@
       </p:sp>
       <p:sp>
         <p:nvSpPr>
-          <p:cNvPr id="12" name="Shape 10"/>
-          <p:cNvSpPr/>
-          <p:nvPr/>
-        </p:nvSpPr>
-        <p:spPr>
-          <a:xfrm>
-            <a:off x="4338218" y="1417320"/>
-            <a:ext cx="3515258" cy="45720"/>
-          </a:xfrm>
-          <a:prstGeom prst="rect">
-            <a:avLst/>
-          </a:prstGeom>
-          <a:solidFill>
-            <a:srgbClr val="B98A2E"/>
-          </a:solidFill>
-          <a:ln/>
-        </p:spPr>
-      </p:sp>
-      <p:sp>
-        <p:nvSpPr>
-          <p:cNvPr id="13" name="Text 11"/>
-          <p:cNvSpPr/>
-          <p:nvPr/>
-        </p:nvSpPr>
-        <p:spPr>
-          <a:xfrm>
-            <a:off x="4566818" y="1618488"/>
-            <a:ext cx="3058058" cy="292608"/>
+          <p:cNvPr id="12" name="Text 10"/>
+          <p:cNvSpPr/>
+          <p:nvPr/>
+        </p:nvSpPr>
+        <p:spPr>
+          <a:xfrm>
+            <a:off x="795528" y="5193792"/>
+            <a:ext cx="10600639" cy="621792"/>
           </a:xfrm>
           <a:prstGeom prst="rect">
             <a:avLst/>
@@ -7971,377 +9448,53 @@
               <a:buNone/>
             </a:pPr>
             <a:r>
-              <a:rPr lang="en-US" sz="1350" b="1" dirty="0">
-                <a:solidFill>
-                  <a:srgbClr val="977024"/>
+              <a:rPr lang="en-US" sz="1100" dirty="0">
+                <a:solidFill>
+                  <a:srgbClr val="10161F"/>
                 </a:solidFill>
                 <a:latin typeface="Pretendard" pitchFamily="34" charset="0"/>
                 <a:ea typeface="Pretendard" pitchFamily="34" charset="-122"/>
                 <a:cs typeface="Pretendard" pitchFamily="34" charset="-120"/>
               </a:rPr>
-              <a:t>승강기 및 설비</a:t>
-            </a:r>
-            <a:endParaRPr lang="en-US" sz="1350" dirty="0"/>
-          </a:p>
-        </p:txBody>
-      </p:sp>
-      <p:sp>
-        <p:nvSpPr>
-          <p:cNvPr id="14" name="Text 12"/>
-          <p:cNvSpPr/>
-          <p:nvPr/>
-        </p:nvSpPr>
-        <p:spPr>
-          <a:xfrm>
-            <a:off x="4566818" y="1947672"/>
-            <a:ext cx="3058058" cy="365760"/>
-          </a:xfrm>
-          <a:prstGeom prst="rect">
-            <a:avLst/>
-          </a:prstGeom>
-          <a:noFill/>
-          <a:ln/>
-        </p:spPr>
-        <p:txBody>
-          <a:bodyPr wrap="square" lIns="0" tIns="0" rIns="0" bIns="0" rtlCol="0" anchor="ctr">
-            <a:normAutofit/>
-          </a:bodyPr>
+              <a:t>※ 본 리스크 체크는 공부 및 브로커 확인 기반이며, 매수 전 전문 실사팀(변호사/건축사)을 통한 정밀 실사가 필요합니다.</a:t>
+            </a:r>
+            <a:endParaRPr lang="en-US" sz="1100" dirty="0"/>
+          </a:p>
+        </p:txBody>
+      </p:sp>
+      <p:sp>
+        <p:nvSpPr>
+          <p:cNvPr id="13" name="Text 11"/>
+          <p:cNvSpPr/>
+          <p:nvPr/>
+        </p:nvSpPr>
+        <p:spPr>
+          <a:xfrm>
+            <a:off x="566928" y="6382512"/>
+            <a:ext cx="7315200" cy="219456"/>
+          </a:xfrm>
+          <a:prstGeom prst="rect">
+            <a:avLst/>
+          </a:prstGeom>
+          <a:noFill/>
+          <a:ln/>
+        </p:spPr>
+        <p:txBody>
+          <a:bodyPr wrap="square" lIns="0" tIns="0" rIns="0" bIns="0" rtlCol="0" anchor="ctr"/>
           <a:lstStyle/>
           <a:p>
             <a:pPr indent="0" marL="0">
               <a:buNone/>
             </a:pPr>
             <a:r>
-              <a:rPr lang="en-US" sz="1250" b="1" dirty="0">
-                <a:solidFill>
-                  <a:srgbClr val="10161F"/>
+              <a:rPr lang="en-US" sz="800" dirty="0">
+                <a:solidFill>
+                  <a:srgbClr val="718096"/>
                 </a:solidFill>
                 <a:latin typeface="Pretendard" pitchFamily="34" charset="0"/>
                 <a:ea typeface="Pretendard" pitchFamily="34" charset="-122"/>
                 <a:cs typeface="Pretendard" pitchFamily="34" charset="-120"/>
               </a:rPr>
-              <a:t>승강기 정보 확인 필요</a:t>
-            </a:r>
-            <a:endParaRPr lang="en-US" sz="1250" dirty="0"/>
-          </a:p>
-        </p:txBody>
-      </p:sp>
-      <p:sp>
-        <p:nvSpPr>
-          <p:cNvPr id="15" name="Text 13"/>
-          <p:cNvSpPr/>
-          <p:nvPr/>
-        </p:nvSpPr>
-        <p:spPr>
-          <a:xfrm>
-            <a:off x="4566818" y="2377440"/>
-            <a:ext cx="3058058" cy="2606040"/>
-          </a:xfrm>
-          <a:prstGeom prst="rect">
-            <a:avLst/>
-          </a:prstGeom>
-          <a:noFill/>
-          <a:ln/>
-        </p:spPr>
-        <p:txBody>
-          <a:bodyPr wrap="square" lIns="0" tIns="0" rIns="0" bIns="0" rtlCol="0" anchor="t">
-            <a:normAutofit/>
-          </a:bodyPr>
-          <a:lstStyle/>
-          <a:p>
-            <a:pPr marL="342900" indent="-342900">
-              <a:lnSpc>
-                <a:spcPct val="125000"/>
-              </a:lnSpc>
-              <a:buSzPct val="100000"/>
-              <a:buChar char="•"/>
-            </a:pPr>
-            <a:r>
-              <a:rPr lang="en-US" sz="1100" dirty="0">
-                <a:solidFill>
-                  <a:srgbClr val="10161F"/>
-                </a:solidFill>
-                <a:latin typeface="Pretendard" pitchFamily="34" charset="0"/>
-                <a:ea typeface="Pretendard" pitchFamily="34" charset="-122"/>
-                <a:cs typeface="Pretendard" pitchFamily="34" charset="-120"/>
-              </a:rPr>
-              <a:t>정기검사 이력, 냉난방 설비 상태 확인 필요</a:t>
-            </a:r>
-            <a:endParaRPr lang="en-US" sz="1100" dirty="0"/>
-          </a:p>
-        </p:txBody>
-      </p:sp>
-      <p:sp>
-        <p:nvSpPr>
-          <p:cNvPr id="16" name="Shape 14"/>
-          <p:cNvSpPr/>
-          <p:nvPr/>
-        </p:nvSpPr>
-        <p:spPr>
-          <a:xfrm>
-            <a:off x="8109509" y="1417320"/>
-            <a:ext cx="3515258" cy="3657600"/>
-          </a:xfrm>
-          <a:prstGeom prst="roundRect">
-            <a:avLst>
-              <a:gd name="adj" fmla="val 1561"/>
-            </a:avLst>
-          </a:prstGeom>
-          <a:solidFill>
-            <a:srgbClr val="F7FAFC"/>
-          </a:solidFill>
-          <a:ln w="6350">
-            <a:solidFill>
-              <a:srgbClr val="CBD5E0"/>
-            </a:solidFill>
-            <a:prstDash val="solid"/>
-          </a:ln>
-        </p:spPr>
-      </p:sp>
-      <p:sp>
-        <p:nvSpPr>
-          <p:cNvPr id="17" name="Shape 15"/>
-          <p:cNvSpPr/>
-          <p:nvPr/>
-        </p:nvSpPr>
-        <p:spPr>
-          <a:xfrm>
-            <a:off x="8109509" y="1417320"/>
-            <a:ext cx="3515258" cy="45720"/>
-          </a:xfrm>
-          <a:prstGeom prst="rect">
-            <a:avLst/>
-          </a:prstGeom>
-          <a:solidFill>
-            <a:srgbClr val="B98A2E"/>
-          </a:solidFill>
-          <a:ln/>
-        </p:spPr>
-      </p:sp>
-      <p:sp>
-        <p:nvSpPr>
-          <p:cNvPr id="18" name="Text 16"/>
-          <p:cNvSpPr/>
-          <p:nvPr/>
-        </p:nvSpPr>
-        <p:spPr>
-          <a:xfrm>
-            <a:off x="8338109" y="1618488"/>
-            <a:ext cx="3058058" cy="292608"/>
-          </a:xfrm>
-          <a:prstGeom prst="rect">
-            <a:avLst/>
-          </a:prstGeom>
-          <a:noFill/>
-          <a:ln/>
-        </p:spPr>
-        <p:txBody>
-          <a:bodyPr wrap="square" lIns="0" tIns="0" rIns="0" bIns="0" rtlCol="0" anchor="ctr"/>
-          <a:lstStyle/>
-          <a:p>
-            <a:pPr indent="0" marL="0">
-              <a:buNone/>
-            </a:pPr>
-            <a:r>
-              <a:rPr lang="en-US" sz="1350" b="1" dirty="0">
-                <a:solidFill>
-                  <a:srgbClr val="977024"/>
-                </a:solidFill>
-                <a:latin typeface="Pretendard" pitchFamily="34" charset="0"/>
-                <a:ea typeface="Pretendard" pitchFamily="34" charset="-122"/>
-                <a:cs typeface="Pretendard" pitchFamily="34" charset="-120"/>
-              </a:rPr>
-              <a:t>임차인 이탈 위험</a:t>
-            </a:r>
-            <a:endParaRPr lang="en-US" sz="1350" dirty="0"/>
-          </a:p>
-        </p:txBody>
-      </p:sp>
-      <p:sp>
-        <p:nvSpPr>
-          <p:cNvPr id="19" name="Text 17"/>
-          <p:cNvSpPr/>
-          <p:nvPr/>
-        </p:nvSpPr>
-        <p:spPr>
-          <a:xfrm>
-            <a:off x="8338109" y="1947672"/>
-            <a:ext cx="3058058" cy="365760"/>
-          </a:xfrm>
-          <a:prstGeom prst="rect">
-            <a:avLst/>
-          </a:prstGeom>
-          <a:noFill/>
-          <a:ln/>
-        </p:spPr>
-        <p:txBody>
-          <a:bodyPr wrap="square" lIns="0" tIns="0" rIns="0" bIns="0" rtlCol="0" anchor="ctr">
-            <a:normAutofit/>
-          </a:bodyPr>
-          <a:lstStyle/>
-          <a:p>
-            <a:pPr indent="0" marL="0">
-              <a:buNone/>
-            </a:pPr>
-            <a:r>
-              <a:rPr lang="en-US" sz="1250" b="1" dirty="0">
-                <a:solidFill>
-                  <a:srgbClr val="10161F"/>
-                </a:solidFill>
-                <a:latin typeface="Pretendard" pitchFamily="34" charset="0"/>
-                <a:ea typeface="Pretendard" pitchFamily="34" charset="-122"/>
-                <a:cs typeface="Pretendard" pitchFamily="34" charset="-120"/>
-              </a:rPr>
-              <a:t>임대차 계약 현황 LOI 접수 후 열람</a:t>
-            </a:r>
-            <a:endParaRPr lang="en-US" sz="1250" dirty="0"/>
-          </a:p>
-        </p:txBody>
-      </p:sp>
-      <p:sp>
-        <p:nvSpPr>
-          <p:cNvPr id="20" name="Text 18"/>
-          <p:cNvSpPr/>
-          <p:nvPr/>
-        </p:nvSpPr>
-        <p:spPr>
-          <a:xfrm>
-            <a:off x="8338109" y="2377440"/>
-            <a:ext cx="3058058" cy="2606040"/>
-          </a:xfrm>
-          <a:prstGeom prst="rect">
-            <a:avLst/>
-          </a:prstGeom>
-          <a:noFill/>
-          <a:ln/>
-        </p:spPr>
-        <p:txBody>
-          <a:bodyPr wrap="square" lIns="0" tIns="0" rIns="0" bIns="0" rtlCol="0" anchor="t">
-            <a:normAutofit/>
-          </a:bodyPr>
-          <a:lstStyle/>
-          <a:p>
-            <a:pPr marL="342900" indent="-342900">
-              <a:lnSpc>
-                <a:spcPct val="125000"/>
-              </a:lnSpc>
-              <a:buSzPct val="100000"/>
-              <a:buChar char="•"/>
-            </a:pPr>
-            <a:r>
-              <a:rPr lang="en-US" sz="1100" dirty="0">
-                <a:solidFill>
-                  <a:srgbClr val="10161F"/>
-                </a:solidFill>
-                <a:latin typeface="Pretendard" pitchFamily="34" charset="0"/>
-                <a:ea typeface="Pretendard" pitchFamily="34" charset="-122"/>
-                <a:cs typeface="Pretendard" pitchFamily="34" charset="-120"/>
-              </a:rPr>
-              <a:t>잔여 계약기간(WALE), 임차인 신용도 확인 필요</a:t>
-            </a:r>
-            <a:endParaRPr lang="en-US" sz="1100" dirty="0"/>
-          </a:p>
-        </p:txBody>
-      </p:sp>
-      <p:sp>
-        <p:nvSpPr>
-          <p:cNvPr id="21" name="Shape 19"/>
-          <p:cNvSpPr/>
-          <p:nvPr/>
-        </p:nvSpPr>
-        <p:spPr>
-          <a:xfrm>
-            <a:off x="566928" y="5193792"/>
-            <a:ext cx="11057839" cy="621792"/>
-          </a:xfrm>
-          <a:prstGeom prst="roundRect">
-            <a:avLst>
-              <a:gd name="adj" fmla="val 8824"/>
-            </a:avLst>
-          </a:prstGeom>
-          <a:solidFill>
-            <a:srgbClr val="F7FAFC"/>
-          </a:solidFill>
-          <a:ln w="6350">
-            <a:solidFill>
-              <a:srgbClr val="CBD5E0"/>
-            </a:solidFill>
-            <a:prstDash val="solid"/>
-          </a:ln>
-        </p:spPr>
-      </p:sp>
-      <p:sp>
-        <p:nvSpPr>
-          <p:cNvPr id="22" name="Text 20"/>
-          <p:cNvSpPr/>
-          <p:nvPr/>
-        </p:nvSpPr>
-        <p:spPr>
-          <a:xfrm>
-            <a:off x="795528" y="5193792"/>
-            <a:ext cx="10600639" cy="621792"/>
-          </a:xfrm>
-          <a:prstGeom prst="rect">
-            <a:avLst/>
-          </a:prstGeom>
-          <a:noFill/>
-          <a:ln/>
-        </p:spPr>
-        <p:txBody>
-          <a:bodyPr wrap="square" lIns="0" tIns="0" rIns="0" bIns="0" rtlCol="0" anchor="ctr"/>
-          <a:lstStyle/>
-          <a:p>
-            <a:pPr indent="0" marL="0">
-              <a:buNone/>
-            </a:pPr>
-            <a:r>
-              <a:rPr lang="en-US" sz="1100" dirty="0">
-                <a:solidFill>
-                  <a:srgbClr val="10161F"/>
-                </a:solidFill>
-                <a:latin typeface="Pretendard" pitchFamily="34" charset="0"/>
-                <a:ea typeface="Pretendard" pitchFamily="34" charset="-122"/>
-                <a:cs typeface="Pretendard" pitchFamily="34" charset="-120"/>
-              </a:rPr>
-              <a:t>※ 본 리스크 체크는 공부 및 브로커 확인 기반이며, 매수 전 전문 실사팀(변호사/건축사)을 통한 정밀 실사가 필요합니다.</a:t>
-            </a:r>
-            <a:endParaRPr lang="en-US" sz="1100" dirty="0"/>
-          </a:p>
-        </p:txBody>
-      </p:sp>
-      <p:sp>
-        <p:nvSpPr>
-          <p:cNvPr id="23" name="Text 21"/>
-          <p:cNvSpPr/>
-          <p:nvPr/>
-        </p:nvSpPr>
-        <p:spPr>
-          <a:xfrm>
-            <a:off x="566928" y="6382512"/>
-            <a:ext cx="7315200" cy="219456"/>
-          </a:xfrm>
-          <a:prstGeom prst="rect">
-            <a:avLst/>
-          </a:prstGeom>
-          <a:noFill/>
-          <a:ln/>
-        </p:spPr>
-        <p:txBody>
-          <a:bodyPr wrap="square" lIns="0" tIns="0" rIns="0" bIns="0" rtlCol="0" anchor="ctr"/>
-          <a:lstStyle/>
-          <a:p>
-            <a:pPr indent="0" marL="0">
-              <a:buNone/>
-            </a:pPr>
-            <a:r>
-              <a:rPr lang="en-US" sz="800" dirty="0">
-                <a:solidFill>
-                  <a:srgbClr val="718096"/>
-                </a:solidFill>
-                <a:latin typeface="Pretendard" pitchFamily="34" charset="0"/>
-                <a:ea typeface="Pretendard" pitchFamily="34" charset="-122"/>
-                <a:cs typeface="Pretendard" pitchFamily="34" charset="-120"/>
-              </a:rPr>
               <a:t>크리딜   |   </a:t>
             </a:r>
             <a:endParaRPr lang="en-US" sz="800" dirty="0"/>
@@ -8350,7 +9503,7 @@
       </p:sp>
       <p:sp>
         <p:nvSpPr>
-          <p:cNvPr id="24" name="Text 22"/>
+          <p:cNvPr id="14" name="Text 12"/>
           <p:cNvSpPr/>
           <p:nvPr/>
         </p:nvSpPr>
@@ -8398,13 +9551,6 @@
 <file path=ppt/slides/slide8.xml><?xml version="1.0" encoding="utf-8"?>
 <p:sld xmlns:a="http://schemas.openxmlformats.org/drawingml/2006/main" xmlns:r="http://schemas.openxmlformats.org/officeDocument/2006/relationships" xmlns:p="http://schemas.openxmlformats.org/presentationml/2006/main">
   <p:cSld name="Slide 8">
-    <p:bg>
-      <p:bgPr>
-        <a:solidFill>
-          <a:srgbClr val="FFFFFF"/>
-        </a:solidFill>
-      </p:bgPr>
-    </p:bg>
     <p:spTree>
       <p:nvGrpSpPr>
         <p:cNvPr id="1" name=""/>
@@ -8511,7 +9657,7 @@
                 <a:ea typeface="Arial" pitchFamily="34" charset="-122"/>
                 <a:cs typeface="Arial" pitchFamily="34" charset="-120"/>
               </a:rPr>
-              <a:t>Thesis</a:t>
+              <a:t>Checklist</a:t>
             </a:r>
             <a:endParaRPr lang="en-US" sz="950" dirty="0"/>
           </a:p>
@@ -8550,7 +9696,7 @@
                 <a:ea typeface="Pretendard" pitchFamily="34" charset="-122"/>
                 <a:cs typeface="Pretendard" pitchFamily="34" charset="-120"/>
               </a:rPr>
-              <a:t>왜 지금 이 매물을 사야 하는가</a:t>
+              <a:t>섹션 상세</a:t>
             </a:r>
             <a:endParaRPr lang="en-US" sz="2300" dirty="0"/>
           </a:p>
@@ -8558,30 +9704,31 @@
       </p:sp>
       <p:sp>
         <p:nvSpPr>
-          <p:cNvPr id="6" name="Shape 4"/>
-          <p:cNvSpPr/>
-          <p:nvPr/>
-        </p:nvSpPr>
-        <p:spPr>
-          <a:xfrm>
-            <a:off x="566928" y="4983480"/>
-            <a:ext cx="11057839" cy="804672"/>
-          </a:xfrm>
-          <a:prstGeom prst="roundRect">
-            <a:avLst>
-              <a:gd name="adj" fmla="val 6818"/>
-            </a:avLst>
-          </a:prstGeom>
-          <a:solidFill>
-            <a:srgbClr val="F3EBDA"/>
-          </a:solidFill>
-          <a:ln w="10160">
-            <a:solidFill>
-              <a:srgbClr val="D9B668"/>
-            </a:solidFill>
-            <a:prstDash val="solid"/>
-          </a:ln>
-        </p:spPr>
+          <p:cNvPr id="6" name="Text 4"/>
+          <p:cNvSpPr/>
+          <p:nvPr/>
+        </p:nvSpPr>
+        <p:spPr>
+          <a:xfrm>
+            <a:off x="566928" y="1517904"/>
+            <a:ext cx="6492240" cy="274320"/>
+          </a:xfrm>
+          <a:prstGeom prst="rect">
+            <a:avLst/>
+          </a:prstGeom>
+          <a:noFill/>
+          <a:ln/>
+        </p:spPr>
+        <p:txBody>
+          <a:bodyPr wrap="square" rtlCol="0" anchor="ctr"/>
+          <a:lstStyle/>
+          <a:p>
+            <a:pPr indent="0" marL="0">
+              <a:buNone/>
+            </a:pPr>
+            <a:endParaRPr lang="en-US" sz="1400" dirty="0"/>
+          </a:p>
+        </p:txBody>
       </p:sp>
       <p:sp>
         <p:nvSpPr>
@@ -8591,121 +9738,68 @@
         </p:nvSpPr>
         <p:spPr>
           <a:xfrm>
-            <a:off x="749808" y="5093208"/>
-            <a:ext cx="1691640" cy="256032"/>
-          </a:xfrm>
-          <a:prstGeom prst="rect">
-            <a:avLst/>
-          </a:prstGeom>
-          <a:noFill/>
-          <a:ln/>
-        </p:spPr>
-        <p:txBody>
-          <a:bodyPr wrap="square" lIns="0" tIns="0" rIns="0" bIns="0" rtlCol="0" anchor="ctr"/>
+            <a:off x="566928" y="1874520"/>
+            <a:ext cx="6492240" cy="182880"/>
+          </a:xfrm>
+          <a:prstGeom prst="rect">
+            <a:avLst/>
+          </a:prstGeom>
+          <a:noFill/>
+          <a:ln/>
+        </p:spPr>
+        <p:txBody>
+          <a:bodyPr wrap="square" rtlCol="0" anchor="ctr"/>
           <a:lstStyle/>
           <a:p>
             <a:pPr indent="0" marL="0">
               <a:buNone/>
             </a:pPr>
-            <a:r>
-              <a:rPr lang="en-US" sz="1050" b="1" dirty="0">
-                <a:solidFill>
-                  <a:srgbClr val="977024"/>
+            <a:endParaRPr lang="en-US" sz="900" dirty="0"/>
+          </a:p>
+        </p:txBody>
+      </p:sp>
+      <p:sp>
+        <p:nvSpPr>
+          <p:cNvPr id="8" name="Text 6"/>
+          <p:cNvSpPr/>
+          <p:nvPr/>
+        </p:nvSpPr>
+        <p:spPr>
+          <a:xfrm>
+            <a:off x="566928" y="6382512"/>
+            <a:ext cx="7315200" cy="219456"/>
+          </a:xfrm>
+          <a:prstGeom prst="rect">
+            <a:avLst/>
+          </a:prstGeom>
+          <a:noFill/>
+          <a:ln/>
+        </p:spPr>
+        <p:txBody>
+          <a:bodyPr wrap="square" lIns="0" tIns="0" rIns="0" bIns="0" rtlCol="0" anchor="ctr"/>
+          <a:lstStyle/>
+          <a:p>
+            <a:pPr indent="0" marL="0">
+              <a:buNone/>
+            </a:pPr>
+            <a:r>
+              <a:rPr lang="en-US" sz="800" dirty="0">
+                <a:solidFill>
+                  <a:srgbClr val="718096"/>
                 </a:solidFill>
                 <a:latin typeface="Pretendard" pitchFamily="34" charset="0"/>
                 <a:ea typeface="Pretendard" pitchFamily="34" charset="-122"/>
                 <a:cs typeface="Pretendard" pitchFamily="34" charset="-120"/>
               </a:rPr>
-              <a:t>종합 가치 제안</a:t>
-            </a:r>
-            <a:endParaRPr lang="en-US" sz="1050" dirty="0"/>
-          </a:p>
-        </p:txBody>
-      </p:sp>
-      <p:sp>
-        <p:nvSpPr>
-          <p:cNvPr id="8" name="Text 6"/>
-          <p:cNvSpPr/>
-          <p:nvPr/>
-        </p:nvSpPr>
-        <p:spPr>
-          <a:xfrm>
-            <a:off x="2487168" y="5056632"/>
-            <a:ext cx="8954719" cy="658368"/>
-          </a:xfrm>
-          <a:prstGeom prst="rect">
-            <a:avLst/>
-          </a:prstGeom>
-          <a:noFill/>
-          <a:ln/>
-        </p:spPr>
-        <p:txBody>
-          <a:bodyPr wrap="square" lIns="0" tIns="0" rIns="0" bIns="0" rtlCol="0" anchor="ctr"/>
-          <a:lstStyle/>
-          <a:p>
-            <a:pPr indent="0" marL="0">
-              <a:lnSpc>
-                <a:spcPct val="125000"/>
-              </a:lnSpc>
-              <a:buNone/>
-            </a:pPr>
-            <a:r>
-              <a:rPr lang="en-US" sz="1100" dirty="0">
-                <a:solidFill>
-                  <a:srgbClr val="10161F"/>
-                </a:solidFill>
-                <a:latin typeface="Pretendard" pitchFamily="34" charset="0"/>
-                <a:ea typeface="Pretendard" pitchFamily="34" charset="-122"/>
-                <a:cs typeface="Pretendard" pitchFamily="34" charset="-120"/>
-              </a:rPr>
-              <a:t>{"ok":true,"mocked":true,"extractedFields":{"area_signal":"역삼","asset_type":"오피스빌딩","price_band":"300억","size_signal":"3000평(약 9917.4㎡)"},"extractedFacts":{"region":"역삼","exactAddressCandidate":"역삼동 742-1","assetType":"오피스빌딩","priceText":"300억","sizeText":"3000평(약 9917.4㎡)","currentUse":"오피스","currentUseSignal":"근린생활시설","leaseSignal":"임대중","vacancySignal":"공실없음","tenantNames":["쿠팡","네이버"],"unitRentTexts":["301호: 1500만"],"sellerMotivationText":"자산 효율화","brokerNotes":["초역세권 매물"]},"detectedSensitiveFields":["exact_address","tenant_name"],"ambiguousFields":[],"warnings":[],"areaSignal":"역삼","assetType":"오피스빌딩","priceBand":"300억","sizeSignal":"3000평(약 9917.4㎡)","dealType":"매각","buildingName":"역삼 센트럴타워","exactAddress":"역삼동 742-1","totalFloorArea":9917.3,"buildYear":2015,"currentUseSignal":"근린생활시설","vacancySignal":"공실 없음","fitSummary":"초역세권 근생 빌딩으로 시행/사옥 매입에 최적화","cautionSummary":"주요 임차인 만기 조율 필요","hiddenFields":["exact_address","seller_motivation"],"confidence":{"areaSignal":"confirmed","assetType":"confirmed","priceBand":"ai_hypothesis","fitSummary":"ai_hypothesis"},"missingData":["sizeSignal"],"boundaryNote":"본 자료는 실거래 통계 기반 참고치입니다.","buyerType":"법인 사옥형","budgetRange":{"min":50,"max":80,"display":"50억~80억"},"preferredRegions":["강남","성수"],"assetTypes":["꼬마빌딩","사옥용"],"purchasePurpose":"사옥용 매입","mustHave":["초역세권","주차"],"niceToHave":["테라스","루프탑"],"riskTolerance":"medium","financingNote":"자본금 50% 준비","missingQuestions":["구체적인 입주 시기가 언제인가요?","선호하는 수익률이 있나요?"],"privacyNotes":["연락처 비공개"],"fitReasons":["매수자 예산(50-80억)에 부합하는 매물입니다.","요청하신 성수/강남 권역에 해당합니다."],"cautionReasons":["요청한 용도와 달리 명도 협의가 다소 필요합니다."],"recommendedNextAction":"현장 답사 제안","kakaoMessage":"안녕하세요! 요청하신 조건에 부합하는 추천 매물이 있어 안내해 드립니다. 확인해보시고 피드백 부탁드립니다.","title":"강남 역삼역 초역세권 오피스 사옥용 빌딩 매각","shortSummary":"역삼역 도보 5분 거리의 준신축급 대형 오피스빌딩입니다.","dealPoints":["초역세권","사옥 최적"],"cautionPoints":["명도 조율 필요"],"hiddenInfoNotice":["보증금 및 지번은 인가 후 확인 가능"],"gateMessage":"G1 등급 등록이 필요합니다.","kakaoText":"강남 역삼역 오피스 빌딩 매각 안내입니다.","exactUnitCandidate":"101호","floor":"1층","areaSqmText":"150㎡","spaceType":"office","depositText":"5000만","monthlyRentText":"400만","maintenanceFeeText":"50만","availableFromText":"즉시입주","leaseTermMonthsText":"24","incentivesText":"렌트프리 2개월","restrictions":[],"landlordIdentity":"김성수","currentTenant":"스타트업","vacancyReason":"이전 확장","rentNegotiation":"협의 가능","region":"성수동","areaSqm":150,"deposit":5000,"monthlyRent":400,"maintenanceFee":50,"availableFrom":"즉시입주","leaseTermMonths":24,"incentives":{"rentFreeMonths":2,"interiorSupport":"일부 인테리어 지원","freeRentDetail":"렌트프리 2개월 지원"},"shortSummaryLease":"성수역 도보 5분 거리 1층 리테일 상가 매물입니다."}</a:t>
-            </a:r>
-            <a:endParaRPr lang="en-US" sz="1100" dirty="0"/>
+              <a:t>크리딜   |   </a:t>
+            </a:r>
+            <a:endParaRPr lang="en-US" sz="800" dirty="0"/>
           </a:p>
         </p:txBody>
       </p:sp>
       <p:sp>
         <p:nvSpPr>
           <p:cNvPr id="9" name="Text 7"/>
-          <p:cNvSpPr/>
-          <p:nvPr/>
-        </p:nvSpPr>
-        <p:spPr>
-          <a:xfrm>
-            <a:off x="566928" y="6382512"/>
-            <a:ext cx="7315200" cy="219456"/>
-          </a:xfrm>
-          <a:prstGeom prst="rect">
-            <a:avLst/>
-          </a:prstGeom>
-          <a:noFill/>
-          <a:ln/>
-        </p:spPr>
-        <p:txBody>
-          <a:bodyPr wrap="square" lIns="0" tIns="0" rIns="0" bIns="0" rtlCol="0" anchor="ctr"/>
-          <a:lstStyle/>
-          <a:p>
-            <a:pPr indent="0" marL="0">
-              <a:buNone/>
-            </a:pPr>
-            <a:r>
-              <a:rPr lang="en-US" sz="800" dirty="0">
-                <a:solidFill>
-                  <a:srgbClr val="718096"/>
-                </a:solidFill>
-                <a:latin typeface="Pretendard" pitchFamily="34" charset="0"/>
-                <a:ea typeface="Pretendard" pitchFamily="34" charset="-122"/>
-                <a:cs typeface="Pretendard" pitchFamily="34" charset="-120"/>
-              </a:rPr>
-              <a:t>크리딜   |   </a:t>
-            </a:r>
-            <a:endParaRPr lang="en-US" sz="800" dirty="0"/>
-          </a:p>
-        </p:txBody>
-      </p:sp>
-      <p:sp>
-        <p:nvSpPr>
-          <p:cNvPr id="10" name="Text 8"/>
           <p:cNvSpPr/>
           <p:nvPr/>
         </p:nvSpPr>
@@ -8866,7 +9960,7 @@
                 <a:ea typeface="Arial" pitchFamily="34" charset="-122"/>
                 <a:cs typeface="Arial" pitchFamily="34" charset="-120"/>
               </a:rPr>
-              <a:t>Process</a:t>
+              <a:t>Thesis</a:t>
             </a:r>
             <a:endParaRPr lang="en-US" sz="950" dirty="0"/>
           </a:p>
@@ -8905,7 +9999,7 @@
                 <a:ea typeface="Pretendard" pitchFamily="34" charset="-122"/>
                 <a:cs typeface="Pretendard" pitchFamily="34" charset="-120"/>
               </a:rPr>
-              <a:t>검토 후 다음 단계는 무엇인가</a:t>
+              <a:t>왜 지금 이 매물을 사야 하는가</a:t>
             </a:r>
             <a:endParaRPr lang="en-US" sz="2300" dirty="0"/>
           </a:p>
@@ -8919,20 +10013,20 @@
         </p:nvSpPr>
         <p:spPr>
           <a:xfrm>
-            <a:off x="566928" y="1572768"/>
-            <a:ext cx="11057839" cy="3200400"/>
+            <a:off x="566928" y="4983480"/>
+            <a:ext cx="11057839" cy="804672"/>
           </a:xfrm>
           <a:prstGeom prst="roundRect">
             <a:avLst>
-              <a:gd name="adj" fmla="val 1714"/>
+              <a:gd name="adj" fmla="val 6818"/>
             </a:avLst>
           </a:prstGeom>
           <a:solidFill>
-            <a:srgbClr val="F7FAFC"/>
+            <a:srgbClr val="F3EBDA"/>
           </a:solidFill>
-          <a:ln w="6350">
+          <a:ln w="10160">
             <a:solidFill>
-              <a:srgbClr val="CBD5E0"/>
+              <a:srgbClr val="D9B668"/>
             </a:solidFill>
             <a:prstDash val="solid"/>
           </a:ln>
@@ -8940,124 +10034,68 @@
       </p:sp>
       <p:sp>
         <p:nvSpPr>
-          <p:cNvPr id="7" name="Shape 5"/>
-          <p:cNvSpPr/>
-          <p:nvPr/>
-        </p:nvSpPr>
-        <p:spPr>
-          <a:xfrm>
-            <a:off x="786384" y="1792224"/>
-            <a:ext cx="438912" cy="438912"/>
-          </a:xfrm>
-          <a:prstGeom prst="ellipse">
-            <a:avLst/>
-          </a:prstGeom>
-          <a:solidFill>
-            <a:srgbClr val="B98A2E"/>
-          </a:solidFill>
-          <a:ln/>
-        </p:spPr>
-      </p:sp>
-      <p:sp>
-        <p:nvSpPr>
-          <p:cNvPr id="8" name="Text 6"/>
-          <p:cNvSpPr/>
-          <p:nvPr/>
-        </p:nvSpPr>
-        <p:spPr>
-          <a:xfrm>
-            <a:off x="786384" y="1792224"/>
-            <a:ext cx="438912" cy="438912"/>
-          </a:xfrm>
-          <a:prstGeom prst="rect">
-            <a:avLst/>
-          </a:prstGeom>
-          <a:noFill/>
-          <a:ln/>
-        </p:spPr>
-        <p:txBody>
-          <a:bodyPr wrap="square" lIns="0" tIns="0" rIns="0" bIns="0" rtlCol="0" anchor="ctr"/>
-          <a:lstStyle/>
-          <a:p>
-            <a:pPr algn="ctr" indent="0" marL="0">
-              <a:buNone/>
-            </a:pPr>
-            <a:r>
-              <a:rPr lang="en-US" sz="1400" b="1" dirty="0">
-                <a:solidFill>
-                  <a:srgbClr val="FFFFFF"/>
-                </a:solidFill>
-                <a:latin typeface="Arial" pitchFamily="34" charset="0"/>
-                <a:ea typeface="Arial" pitchFamily="34" charset="-122"/>
-                <a:cs typeface="Arial" pitchFamily="34" charset="-120"/>
-              </a:rPr>
-              <a:t>01</a:t>
-            </a:r>
-            <a:endParaRPr lang="en-US" sz="1400" dirty="0"/>
-          </a:p>
-        </p:txBody>
-      </p:sp>
-      <p:sp>
-        <p:nvSpPr>
-          <p:cNvPr id="9" name="Text 7"/>
-          <p:cNvSpPr/>
-          <p:nvPr/>
-        </p:nvSpPr>
-        <p:spPr>
-          <a:xfrm>
-            <a:off x="786384" y="2304288"/>
-            <a:ext cx="10618927" cy="365760"/>
-          </a:xfrm>
-          <a:prstGeom prst="rect">
-            <a:avLst/>
-          </a:prstGeom>
-          <a:noFill/>
-          <a:ln/>
-        </p:spPr>
-        <p:txBody>
-          <a:bodyPr wrap="square" rtlCol="0" anchor="ctr"/>
+          <p:cNvPr id="7" name="Text 5"/>
+          <p:cNvSpPr/>
+          <p:nvPr/>
+        </p:nvSpPr>
+        <p:spPr>
+          <a:xfrm>
+            <a:off x="749808" y="5093208"/>
+            <a:ext cx="1691640" cy="256032"/>
+          </a:xfrm>
+          <a:prstGeom prst="rect">
+            <a:avLst/>
+          </a:prstGeom>
+          <a:noFill/>
+          <a:ln/>
+        </p:spPr>
+        <p:txBody>
+          <a:bodyPr wrap="square" lIns="0" tIns="0" rIns="0" bIns="0" rtlCol="0" anchor="ctr"/>
           <a:lstStyle/>
           <a:p>
             <a:pPr indent="0" marL="0">
               <a:buNone/>
             </a:pPr>
             <a:r>
-              <a:rPr lang="en-US" sz="1600" b="1" dirty="0">
-                <a:solidFill>
-                  <a:srgbClr val="10161F"/>
+              <a:rPr lang="en-US" sz="1050" b="1" dirty="0">
+                <a:solidFill>
+                  <a:srgbClr val="977024"/>
                 </a:solidFill>
                 <a:latin typeface="Pretendard" pitchFamily="34" charset="0"/>
                 <a:ea typeface="Pretendard" pitchFamily="34" charset="-122"/>
                 <a:cs typeface="Pretendard" pitchFamily="34" charset="-120"/>
               </a:rPr>
-              <a:t>1단계</a:t>
-            </a:r>
-            <a:endParaRPr lang="en-US" sz="1600" dirty="0"/>
-          </a:p>
-        </p:txBody>
-      </p:sp>
-      <p:sp>
-        <p:nvSpPr>
-          <p:cNvPr id="10" name="Text 8"/>
-          <p:cNvSpPr/>
-          <p:nvPr/>
-        </p:nvSpPr>
-        <p:spPr>
-          <a:xfrm>
-            <a:off x="786384" y="2761488"/>
-            <a:ext cx="10618927" cy="1828800"/>
-          </a:xfrm>
-          <a:prstGeom prst="rect">
-            <a:avLst/>
-          </a:prstGeom>
-          <a:noFill/>
-          <a:ln/>
-        </p:spPr>
-        <p:txBody>
-          <a:bodyPr wrap="square" rtlCol="0" anchor="t"/>
+              <a:t>종합 가치 제안</a:t>
+            </a:r>
+            <a:endParaRPr lang="en-US" sz="1050" dirty="0"/>
+          </a:p>
+        </p:txBody>
+      </p:sp>
+      <p:sp>
+        <p:nvSpPr>
+          <p:cNvPr id="8" name="Text 6"/>
+          <p:cNvSpPr/>
+          <p:nvPr/>
+        </p:nvSpPr>
+        <p:spPr>
+          <a:xfrm>
+            <a:off x="2487168" y="5056632"/>
+            <a:ext cx="8954719" cy="658368"/>
+          </a:xfrm>
+          <a:prstGeom prst="rect">
+            <a:avLst/>
+          </a:prstGeom>
+          <a:noFill/>
+          <a:ln/>
+        </p:spPr>
+        <p:txBody>
+          <a:bodyPr wrap="square" lIns="0" tIns="0" rIns="0" bIns="0" rtlCol="0" anchor="ctr"/>
           <a:lstStyle/>
           <a:p>
             <a:pPr indent="0" marL="0">
+              <a:lnSpc>
+                <a:spcPct val="125000"/>
+              </a:lnSpc>
               <a:buNone/>
             </a:pPr>
             <a:r>
@@ -9069,62 +10107,45 @@
                 <a:ea typeface="Pretendard" pitchFamily="34" charset="-122"/>
                 <a:cs typeface="Pretendard" pitchFamily="34" charset="-120"/>
               </a:rPr>
-              <a:t>{"ok"</a:t>
+              <a:t>{"ok":true,"mocked":true,"extractedFields":{"area_signal":"역삼","asset_type":"오피스빌딩","price_band":"300억","size_signal":"3000평(약 9917.4㎡)"},"extractedFacts":{"region":"역삼","exactAddressCandidate":"역삼동 742-1","assetType":"오피스빌딩","priceText":"300억","sizeText":"3000평(약 9917.4㎡)","currentUse":"오피스","currentUseSignal":"근린생활시설","leaseSignal":"임대중","vacancySignal":"공실없음","tenantNames":["쿠팡","네이버"],"unitRentTexts":["301호: 1500만"],"sellerMotivationText":"자산 효율화","brokerNotes":["초역세권 매물"]},"detectedSensitiveFields":["exact_address","tenant_name"],"ambiguousFields":[],"warnings":[],"areaSignal":"역삼","assetType":"오피스빌딩","priceBand":"300억","sizeSignal":"3000평(약 9917.4㎡)","dealType":"매각","buildingName":"역삼 센트럴타워","exactAddress":"역삼동 742-1","totalFloorArea":9917.3,"buildYear":2015,"currentUseSignal":"근린생활시설","vacancySignal":"공실 없음","fitSummary":"초역세권 근생 빌딩으로 시행/사옥 매입에 최적화","cautionSummary":"주요 임차인 만기 조율 필요","hiddenFields":["exact_address","seller_motivation"],"confidence":{"areaSignal":"confirmed","assetType":"confirmed","priceBand":"ai_hypothesis","fitSummary":"ai_hypothesis"},"missingData":["sizeSignal"],"boundaryNote":"본 자료는 실거래 통계 기반 참고치입니다.","buyerType":"법인 사옥형","budgetRange":{"min":50,"max":80,"display":"50억~80억"},"preferredRegions":["강남","성수"],"assetTypes":["꼬마빌딩","사옥용"],"purchasePurpose":"사옥용 매입","mustHave":["초역세권","주차"],"niceToHave":["테라스","루프탑"],"riskTolerance":"medium","financingNote":"자본금 50% 준비","missingQuestions":["구체적인 입주 시기가 언제인가요?","선호하는 수익률이 있나요?"],"privacyNotes":["연락처 비공개"],"fitReasons":["매수자 예산(50-80억)에 부합하는 매물입니다.","요청하신 성수/강남 권역에 해당합니다."],"cautionReasons":["요청한 용도와 달리 명도 협의가 다소 필요합니다."],"recommendedNextAction":"현장 답사 제안","kakaoMessage":"안녕하세요! 요청하신 조건에 부합하는 추천 매물이 있어 안내해 드립니다. 확인해보시고 피드백 부탁드립니다.","title":"강남 역삼역 초역세권 오피스 사옥용 빌딩 매각","shortSummary":"역삼역 도보 5분 거리의 준신축급 대형 오피스빌딩입니다.","dealPoints":["초역세권","사옥 최적"],"cautionPoints":["명도 조율 필요"],"hiddenInfoNotice":["보증금 및 지번은 인가 후 확인 가능"],"gateMessage":"G1 등급 등록이 필요합니다.","kakaoText":"강남 역삼역 오피스 빌딩 매각 안내입니다.","exactUnitCandidate":"101호","floor":"1층","areaSqmText":"150㎡","spaceType":"office","depositText":"5000만","monthlyRentText":"400만","maintenanceFeeText":"50만","availableFromText":"즉시입주","leaseTermMonthsText":"24","incentivesText":"렌트프리 2개월","restrictions":[],"landlordIdentity":"김성수","currentTenant":"스타트업","vacancyReason":"이전 확장","rentNegotiation":"협의 가능","region":"성수동","areaSqm":150,"deposit":5000,"monthlyRent":400,"maintenanceFee":50,"availableFrom":"즉시입주","leaseTermMonths":24,"incentives":{"rentFreeMonths":2,"interiorSupport":"일부 인테리어 지원","freeRentDetail":"렌트프리 2개월 지원"},"shortSummaryLease":"성수역 도보 5분 거리 1층 리테일 상가 매물입니다."}</a:t>
             </a:r>
             <a:endParaRPr lang="en-US" sz="1100" dirty="0"/>
           </a:p>
+        </p:txBody>
+      </p:sp>
+      <p:sp>
+        <p:nvSpPr>
+          <p:cNvPr id="9" name="Text 7"/>
+          <p:cNvSpPr/>
+          <p:nvPr/>
+        </p:nvSpPr>
+        <p:spPr>
+          <a:xfrm>
+            <a:off x="566928" y="6382512"/>
+            <a:ext cx="7315200" cy="219456"/>
+          </a:xfrm>
+          <a:prstGeom prst="rect">
+            <a:avLst/>
+          </a:prstGeom>
+          <a:noFill/>
+          <a:ln/>
+        </p:spPr>
+        <p:txBody>
+          <a:bodyPr wrap="square" lIns="0" tIns="0" rIns="0" bIns="0" rtlCol="0" anchor="ctr"/>
+          <a:lstStyle/>
           <a:p>
             <a:pPr indent="0" marL="0">
               <a:buNone/>
             </a:pPr>
             <a:r>
-              <a:rPr lang="en-US" sz="1100" dirty="0">
-                <a:solidFill>
-                  <a:srgbClr val="10161F"/>
+              <a:rPr lang="en-US" sz="800" dirty="0">
+                <a:solidFill>
+                  <a:srgbClr val="718096"/>
                 </a:solidFill>
                 <a:latin typeface="Pretendard" pitchFamily="34" charset="0"/>
                 <a:ea typeface="Pretendard" pitchFamily="34" charset="-122"/>
                 <a:cs typeface="Pretendard" pitchFamily="34" charset="-120"/>
               </a:rPr>
-              <a:t>true,"mocked":true,"extractedFields":{"area_signal":"역삼","asset_type":"오피스빌딩","price_band":"300억","size_signal":"3000평(약 9917.4㎡)"},"extractedFacts":{"region":"역삼","exactAddressCandidate":"역삼동 742-1","assetType":"오피스빌딩","priceText":"300억","sizeText":"3000평(약 9917.4㎡)","currentUse":"오피스","currentUseSignal":"근린생활시설","leaseSignal":"임대중","vacancySignal":"공실없음","tenantNames":["쿠팡","네이버"],"unitRentTexts":["301호: 1500만"],"sellerMotivationText":"자산 효율화","brokerNotes":["초역세권 매물"]},"detectedSensitiveFields":["exact_address","tenant_name"],"ambiguousFields":[],"warnings":[],"areaSignal":"역삼","assetType":"오피스빌딩","priceBand":"300억","sizeSignal":"3000평(약 9917.4㎡)","dealType":"매각","buildingName":"역삼 센트럴타워","exactAddress":"역삼동 742-1","totalFloorArea":9917.3,"buildYear":2015,"currentUseSignal":"근린생활시설","vacancySignal":"공실 없음","fitSummary":"초역세권 근생 빌딩으로 시행/사옥 매입에 최적화","cautionSummary":"주요 임차인 만기 조율 필요","hiddenFields":["exact_address","seller_motivation"],"confidence":{"areaSignal":"confirmed","assetType":"confirmed","priceBand":"ai_hypothesis","fitSummary":"ai_hypothesis"},"missingData":["sizeSignal"],"boundaryNote":"본 자료는 실거래 통계 기반 참고치입니다.","buyerType":"법인 사옥형","budgetRange":{"min":50,"max":80,"display":"50억~80억"},"preferredRegions":["강남","성수"],"assetTypes":["꼬마빌딩","사옥용"],"purchasePurpose":"사옥용 매입","mustHave":["초역세권","주차"],"niceToHave":["테라스","루프탑"],"riskTolerance":"medium","financingNote":"자본금 50% 준비","missingQuestions":["구체적인 입주 시기가 언제인가요?","선호하는 수익률이 있나요?"],"privacyNotes":["연락처 비공개"],"fitReasons":["매수자 예산(50-80억)에 부합하는 매물입니다.","요청하신 성수/강남 권역에 해당합니다."],"cautionReasons":["요청한 용도와 달리 명도 협의가 다소 필요합니다."],"recommendedNextAction":"현장 답사 제안","kakaoMessage":"안녕하세요! 요청하신 조건에 부합하는 추천 매물이 있어 안내해 드립니다. 확인해보시고 피드백 부탁드립니다.","title":"강남 역삼역 초역세권 오피스 사옥용 빌딩 매각","shortSummary":"역삼역 도보 5분 거리의 준신축급 대형 오피스빌딩입니다.","dealPoints":["초역세권","사옥 최적"],"cautionPoints":["명도 조율 필요"],"hiddenInfoNotice":["보증금 및 지번은 인가 후 확인 가능"],"gateMessage":"G1 등급 등록이 필요합니다.","kakaoText":"강남 역삼역 오피스 빌딩 매각 안내입니다.","exactUnitCandidate":"101호","floor":"1층","areaSqmText":"150㎡","spaceType":"office","depositText":"5000만","monthlyRentText":"400만","maintenanceFeeText":"50만","availableFromText":"즉시입주","leaseTermMonthsText":"24","incentivesText":"렌트프리 2개월","restrictions":[],"landlordIdentity":"김성수","currentTenant":"스타트업","vacancyReason":"이전 확장","rentNegotiation":"협의 가능","region":"성수동","areaSqm":150,"deposit":5000,"monthlyRent":400,"maintenanceFee":50,"availableFrom":"즉시입주","leaseTermMonths":24,"incentives":{"rentFreeMonths":2,"interiorSupport":"일부 인테리어 지원","freeRentDetail":"렌트프리 2개월 지원"},"shortSummaryLease":"성수역 도보 5분 거리 1층 리테일 상가 매물입니다."}</a:t>
-            </a:r>
-            <a:endParaRPr lang="en-US" sz="1100" dirty="0"/>
-          </a:p>
-        </p:txBody>
-      </p:sp>
-      <p:sp>
-        <p:nvSpPr>
-          <p:cNvPr id="11" name="Text 9"/>
-          <p:cNvSpPr/>
-          <p:nvPr/>
-        </p:nvSpPr>
-        <p:spPr>
-          <a:xfrm>
-            <a:off x="566928" y="6382512"/>
-            <a:ext cx="7315200" cy="219456"/>
-          </a:xfrm>
-          <a:prstGeom prst="rect">
-            <a:avLst/>
-          </a:prstGeom>
-          <a:noFill/>
-          <a:ln/>
-        </p:spPr>
-        <p:txBody>
-          <a:bodyPr wrap="square" lIns="0" tIns="0" rIns="0" bIns="0" rtlCol="0" anchor="ctr"/>
-          <a:lstStyle/>
-          <a:p>
-            <a:pPr indent="0" marL="0">
-              <a:buNone/>
-            </a:pPr>
-            <a:r>
-              <a:rPr lang="en-US" sz="800" dirty="0">
-                <a:solidFill>
-                  <a:srgbClr val="718096"/>
-                </a:solidFill>
-                <a:latin typeface="Pretendard" pitchFamily="34" charset="0"/>
-                <a:ea typeface="Pretendard" pitchFamily="34" charset="-122"/>
-                <a:cs typeface="Pretendard" pitchFamily="34" charset="-120"/>
-              </a:rPr>
               <a:t>크리딜   |   </a:t>
             </a:r>
             <a:endParaRPr lang="en-US" sz="800" dirty="0"/>
@@ -9133,7 +10154,7 @@
       </p:sp>
       <p:sp>
         <p:nvSpPr>
-          <p:cNvPr id="12" name="Text 10"/>
+          <p:cNvPr id="10" name="Text 8"/>
           <p:cNvSpPr/>
           <p:nvPr/>
         </p:nvSpPr>

--- a/docs/test/stress/e2e-outputs/owner_occupied_case08_hannam_flagship_basic.pptx
+++ b/docs/test/stress/e2e-outputs/owner_occupied_case08_hannam_flagship_basic.pptx
@@ -16,9 +16,13 @@
     <p:sldId id="264" r:id="rId10"/>
     <p:sldId id="265" r:id="rId11"/>
     <p:sldId id="266" r:id="rId12"/>
+    <p:sldId id="267" r:id="rId13"/>
+    <p:sldId id="268" r:id="rId14"/>
+    <p:sldId id="269" r:id="rId15"/>
+    <p:sldId id="270" r:id="rId16"/>
   </p:sldIdLst>
   <p:notesMasterIdLst>
-    <p:notesMasterId r:id="rId13"/>
+    <p:notesMasterId r:id="rId17"/>
   </p:notesMasterIdLst>
   <p:sldSz cx="12192000" cy="6858000"/>
   <p:notesSz cx="6858000" cy="12192000"/>
@@ -712,6 +716,358 @@
             <a:fld id="{F7021451-1387-4CA6-816F-3879F97B5CBC}" type="slidenum">
               <a:rPr lang="en-US"/>
               <a:t>11</a:t>
+            </a:fld>
+            <a:endParaRPr lang="en-US"/>
+          </a:p>
+        </p:txBody>
+      </p:sp>
+    </p:spTree>
+    <p:extLst>
+      <p:ext uri="{BB962C8B-B14F-4D97-AF65-F5344CB8AC3E}">
+        <p14:creationId xmlns:p14="http://schemas.microsoft.com/office/powerpoint/2010/main" val="1024086991"/>
+      </p:ext>
+    </p:extLst>
+  </p:cSld>
+  <p:clrMapOvr>
+    <a:masterClrMapping/>
+  </p:clrMapOvr>
+</p:notes>
+</file>
+
+<file path=ppt/notesSlides/notesSlide12.xml><?xml version="1.0" encoding="utf-8"?>
+<p:notes xmlns:a="http://schemas.openxmlformats.org/drawingml/2006/main" xmlns:r="http://schemas.openxmlformats.org/officeDocument/2006/relationships" xmlns:p="http://schemas.openxmlformats.org/presentationml/2006/main">
+  <p:cSld>
+    <p:spTree>
+      <p:nvGrpSpPr>
+        <p:cNvPr id="1" name=""/>
+        <p:cNvGrpSpPr/>
+        <p:nvPr/>
+      </p:nvGrpSpPr>
+      <p:grpSpPr>
+        <a:xfrm>
+          <a:off x="0" y="0"/>
+          <a:ext cx="0" cy="0"/>
+          <a:chOff x="0" y="0"/>
+          <a:chExt cx="0" cy="0"/>
+        </a:xfrm>
+      </p:grpSpPr>
+      <p:sp>
+        <p:nvSpPr>
+          <p:cNvPr id="2" name="Slide Image Placeholder 1"/>
+          <p:cNvSpPr>
+            <a:spLocks noGrp="1" noRot="1" noChangeAspect="1"/>
+          </p:cNvSpPr>
+          <p:nvPr>
+            <p:ph type="sldImg"/>
+          </p:nvPr>
+        </p:nvSpPr>
+        <p:spPr/>
+      </p:sp>
+      <p:sp>
+        <p:nvSpPr>
+          <p:cNvPr id="3" name="Notes Placeholder 2"/>
+          <p:cNvSpPr>
+            <a:spLocks noGrp="1"/>
+          </p:cNvSpPr>
+          <p:nvPr>
+            <p:ph type="body" idx="1"/>
+          </p:nvPr>
+        </p:nvSpPr>
+        <p:spPr/>
+        <p:txBody>
+          <a:bodyPr/>
+          <a:lstStyle/>
+          <a:p>
+            <a:r>
+              <a:rPr lang="en-US" dirty="0"/>
+              <a:t/>
+            </a:r>
+            <a:endParaRPr lang="en-US" dirty="0"/>
+          </a:p>
+        </p:txBody>
+      </p:sp>
+      <p:sp>
+        <p:nvSpPr>
+          <p:cNvPr id="4" name="Slide Number Placeholder 3"/>
+          <p:cNvSpPr>
+            <a:spLocks noGrp="1"/>
+          </p:cNvSpPr>
+          <p:nvPr>
+            <p:ph type="sldNum" sz="quarter" idx="10"/>
+          </p:nvPr>
+        </p:nvSpPr>
+        <p:spPr/>
+        <p:txBody>
+          <a:bodyPr/>
+          <a:lstStyle/>
+          <a:p>
+            <a:fld id="{F7021451-1387-4CA6-816F-3879F97B5CBC}" type="slidenum">
+              <a:rPr lang="en-US"/>
+              <a:t>12</a:t>
+            </a:fld>
+            <a:endParaRPr lang="en-US"/>
+          </a:p>
+        </p:txBody>
+      </p:sp>
+    </p:spTree>
+    <p:extLst>
+      <p:ext uri="{BB962C8B-B14F-4D97-AF65-F5344CB8AC3E}">
+        <p14:creationId xmlns:p14="http://schemas.microsoft.com/office/powerpoint/2010/main" val="1024086991"/>
+      </p:ext>
+    </p:extLst>
+  </p:cSld>
+  <p:clrMapOvr>
+    <a:masterClrMapping/>
+  </p:clrMapOvr>
+</p:notes>
+</file>
+
+<file path=ppt/notesSlides/notesSlide13.xml><?xml version="1.0" encoding="utf-8"?>
+<p:notes xmlns:a="http://schemas.openxmlformats.org/drawingml/2006/main" xmlns:r="http://schemas.openxmlformats.org/officeDocument/2006/relationships" xmlns:p="http://schemas.openxmlformats.org/presentationml/2006/main">
+  <p:cSld>
+    <p:spTree>
+      <p:nvGrpSpPr>
+        <p:cNvPr id="1" name=""/>
+        <p:cNvGrpSpPr/>
+        <p:nvPr/>
+      </p:nvGrpSpPr>
+      <p:grpSpPr>
+        <a:xfrm>
+          <a:off x="0" y="0"/>
+          <a:ext cx="0" cy="0"/>
+          <a:chOff x="0" y="0"/>
+          <a:chExt cx="0" cy="0"/>
+        </a:xfrm>
+      </p:grpSpPr>
+      <p:sp>
+        <p:nvSpPr>
+          <p:cNvPr id="2" name="Slide Image Placeholder 1"/>
+          <p:cNvSpPr>
+            <a:spLocks noGrp="1" noRot="1" noChangeAspect="1"/>
+          </p:cNvSpPr>
+          <p:nvPr>
+            <p:ph type="sldImg"/>
+          </p:nvPr>
+        </p:nvSpPr>
+        <p:spPr/>
+      </p:sp>
+      <p:sp>
+        <p:nvSpPr>
+          <p:cNvPr id="3" name="Notes Placeholder 2"/>
+          <p:cNvSpPr>
+            <a:spLocks noGrp="1"/>
+          </p:cNvSpPr>
+          <p:nvPr>
+            <p:ph type="body" idx="1"/>
+          </p:nvPr>
+        </p:nvSpPr>
+        <p:spPr/>
+        <p:txBody>
+          <a:bodyPr/>
+          <a:lstStyle/>
+          <a:p>
+            <a:r>
+              <a:rPr lang="en-US" dirty="0"/>
+              <a:t/>
+            </a:r>
+            <a:endParaRPr lang="en-US" dirty="0"/>
+          </a:p>
+        </p:txBody>
+      </p:sp>
+      <p:sp>
+        <p:nvSpPr>
+          <p:cNvPr id="4" name="Slide Number Placeholder 3"/>
+          <p:cNvSpPr>
+            <a:spLocks noGrp="1"/>
+          </p:cNvSpPr>
+          <p:nvPr>
+            <p:ph type="sldNum" sz="quarter" idx="10"/>
+          </p:nvPr>
+        </p:nvSpPr>
+        <p:spPr/>
+        <p:txBody>
+          <a:bodyPr/>
+          <a:lstStyle/>
+          <a:p>
+            <a:fld id="{F7021451-1387-4CA6-816F-3879F97B5CBC}" type="slidenum">
+              <a:rPr lang="en-US"/>
+              <a:t>13</a:t>
+            </a:fld>
+            <a:endParaRPr lang="en-US"/>
+          </a:p>
+        </p:txBody>
+      </p:sp>
+    </p:spTree>
+    <p:extLst>
+      <p:ext uri="{BB962C8B-B14F-4D97-AF65-F5344CB8AC3E}">
+        <p14:creationId xmlns:p14="http://schemas.microsoft.com/office/powerpoint/2010/main" val="1024086991"/>
+      </p:ext>
+    </p:extLst>
+  </p:cSld>
+  <p:clrMapOvr>
+    <a:masterClrMapping/>
+  </p:clrMapOvr>
+</p:notes>
+</file>
+
+<file path=ppt/notesSlides/notesSlide14.xml><?xml version="1.0" encoding="utf-8"?>
+<p:notes xmlns:a="http://schemas.openxmlformats.org/drawingml/2006/main" xmlns:r="http://schemas.openxmlformats.org/officeDocument/2006/relationships" xmlns:p="http://schemas.openxmlformats.org/presentationml/2006/main">
+  <p:cSld>
+    <p:spTree>
+      <p:nvGrpSpPr>
+        <p:cNvPr id="1" name=""/>
+        <p:cNvGrpSpPr/>
+        <p:nvPr/>
+      </p:nvGrpSpPr>
+      <p:grpSpPr>
+        <a:xfrm>
+          <a:off x="0" y="0"/>
+          <a:ext cx="0" cy="0"/>
+          <a:chOff x="0" y="0"/>
+          <a:chExt cx="0" cy="0"/>
+        </a:xfrm>
+      </p:grpSpPr>
+      <p:sp>
+        <p:nvSpPr>
+          <p:cNvPr id="2" name="Slide Image Placeholder 1"/>
+          <p:cNvSpPr>
+            <a:spLocks noGrp="1" noRot="1" noChangeAspect="1"/>
+          </p:cNvSpPr>
+          <p:nvPr>
+            <p:ph type="sldImg"/>
+          </p:nvPr>
+        </p:nvSpPr>
+        <p:spPr/>
+      </p:sp>
+      <p:sp>
+        <p:nvSpPr>
+          <p:cNvPr id="3" name="Notes Placeholder 2"/>
+          <p:cNvSpPr>
+            <a:spLocks noGrp="1"/>
+          </p:cNvSpPr>
+          <p:nvPr>
+            <p:ph type="body" idx="1"/>
+          </p:nvPr>
+        </p:nvSpPr>
+        <p:spPr/>
+        <p:txBody>
+          <a:bodyPr/>
+          <a:lstStyle/>
+          <a:p>
+            <a:r>
+              <a:rPr lang="en-US" dirty="0"/>
+              <a:t/>
+            </a:r>
+            <a:endParaRPr lang="en-US" dirty="0"/>
+          </a:p>
+        </p:txBody>
+      </p:sp>
+      <p:sp>
+        <p:nvSpPr>
+          <p:cNvPr id="4" name="Slide Number Placeholder 3"/>
+          <p:cNvSpPr>
+            <a:spLocks noGrp="1"/>
+          </p:cNvSpPr>
+          <p:nvPr>
+            <p:ph type="sldNum" sz="quarter" idx="10"/>
+          </p:nvPr>
+        </p:nvSpPr>
+        <p:spPr/>
+        <p:txBody>
+          <a:bodyPr/>
+          <a:lstStyle/>
+          <a:p>
+            <a:fld id="{F7021451-1387-4CA6-816F-3879F97B5CBC}" type="slidenum">
+              <a:rPr lang="en-US"/>
+              <a:t>14</a:t>
+            </a:fld>
+            <a:endParaRPr lang="en-US"/>
+          </a:p>
+        </p:txBody>
+      </p:sp>
+    </p:spTree>
+    <p:extLst>
+      <p:ext uri="{BB962C8B-B14F-4D97-AF65-F5344CB8AC3E}">
+        <p14:creationId xmlns:p14="http://schemas.microsoft.com/office/powerpoint/2010/main" val="1024086991"/>
+      </p:ext>
+    </p:extLst>
+  </p:cSld>
+  <p:clrMapOvr>
+    <a:masterClrMapping/>
+  </p:clrMapOvr>
+</p:notes>
+</file>
+
+<file path=ppt/notesSlides/notesSlide15.xml><?xml version="1.0" encoding="utf-8"?>
+<p:notes xmlns:a="http://schemas.openxmlformats.org/drawingml/2006/main" xmlns:r="http://schemas.openxmlformats.org/officeDocument/2006/relationships" xmlns:p="http://schemas.openxmlformats.org/presentationml/2006/main">
+  <p:cSld>
+    <p:spTree>
+      <p:nvGrpSpPr>
+        <p:cNvPr id="1" name=""/>
+        <p:cNvGrpSpPr/>
+        <p:nvPr/>
+      </p:nvGrpSpPr>
+      <p:grpSpPr>
+        <a:xfrm>
+          <a:off x="0" y="0"/>
+          <a:ext cx="0" cy="0"/>
+          <a:chOff x="0" y="0"/>
+          <a:chExt cx="0" cy="0"/>
+        </a:xfrm>
+      </p:grpSpPr>
+      <p:sp>
+        <p:nvSpPr>
+          <p:cNvPr id="2" name="Slide Image Placeholder 1"/>
+          <p:cNvSpPr>
+            <a:spLocks noGrp="1" noRot="1" noChangeAspect="1"/>
+          </p:cNvSpPr>
+          <p:nvPr>
+            <p:ph type="sldImg"/>
+          </p:nvPr>
+        </p:nvSpPr>
+        <p:spPr/>
+      </p:sp>
+      <p:sp>
+        <p:nvSpPr>
+          <p:cNvPr id="3" name="Notes Placeholder 2"/>
+          <p:cNvSpPr>
+            <a:spLocks noGrp="1"/>
+          </p:cNvSpPr>
+          <p:nvPr>
+            <p:ph type="body" idx="1"/>
+          </p:nvPr>
+        </p:nvSpPr>
+        <p:spPr/>
+        <p:txBody>
+          <a:bodyPr/>
+          <a:lstStyle/>
+          <a:p>
+            <a:r>
+              <a:rPr lang="en-US" dirty="0"/>
+              <a:t/>
+            </a:r>
+            <a:endParaRPr lang="en-US" dirty="0"/>
+          </a:p>
+        </p:txBody>
+      </p:sp>
+      <p:sp>
+        <p:nvSpPr>
+          <p:cNvPr id="4" name="Slide Number Placeholder 3"/>
+          <p:cNvSpPr>
+            <a:spLocks noGrp="1"/>
+          </p:cNvSpPr>
+          <p:nvPr>
+            <p:ph type="sldNum" sz="quarter" idx="10"/>
+          </p:nvPr>
+        </p:nvSpPr>
+        <p:spPr/>
+        <p:txBody>
+          <a:bodyPr/>
+          <a:lstStyle/>
+          <a:p>
+            <a:fld id="{F7021451-1387-4CA6-816F-3879F97B5CBC}" type="slidenum">
+              <a:rPr lang="en-US"/>
+              <a:t>15</a:t>
             </a:fld>
             <a:endParaRPr lang="en-US"/>
           </a:p>
@@ -2290,7 +2646,7 @@
             <a:pPr indent="0" marL="0">
               <a:buNone/>
             </a:pPr>
-            <a:endParaRPr lang="en-US" sz="850" dirty="0"/>
+            <a:endParaRPr lang="en-US" sz="900" dirty="0"/>
           </a:p>
         </p:txBody>
       </p:sp>
@@ -2457,7 +2813,7 @@
                 <a:ea typeface="Arial" pitchFamily="34" charset="-122"/>
                 <a:cs typeface="Arial" pitchFamily="34" charset="-120"/>
               </a:rPr>
-              <a:t>10</a:t>
+              <a:t>08</a:t>
             </a:r>
             <a:endParaRPr lang="en-US" sz="1300" dirty="0"/>
           </a:p>
@@ -2496,7 +2852,7 @@
                 <a:ea typeface="Arial" pitchFamily="34" charset="-122"/>
                 <a:cs typeface="Arial" pitchFamily="34" charset="-120"/>
               </a:rPr>
-              <a:t>Process</a:t>
+              <a:t>Thesis</a:t>
             </a:r>
             <a:endParaRPr lang="en-US" sz="950" dirty="0"/>
           </a:p>
@@ -2535,7 +2891,7 @@
                 <a:ea typeface="Pretendard" pitchFamily="34" charset="-122"/>
                 <a:cs typeface="Pretendard" pitchFamily="34" charset="-120"/>
               </a:rPr>
-              <a:t>검토 후 다음 단계는 무엇인가</a:t>
+              <a:t>왜 지금 이 매물을 사야 하는가</a:t>
             </a:r>
             <a:endParaRPr lang="en-US" sz="2300" dirty="0"/>
           </a:p>
@@ -2549,20 +2905,20 @@
         </p:nvSpPr>
         <p:spPr>
           <a:xfrm>
-            <a:off x="566928" y="1572768"/>
-            <a:ext cx="11057839" cy="3200400"/>
+            <a:off x="566928" y="4983480"/>
+            <a:ext cx="11057839" cy="804672"/>
           </a:xfrm>
           <a:prstGeom prst="roundRect">
             <a:avLst>
-              <a:gd name="adj" fmla="val 1714"/>
+              <a:gd name="adj" fmla="val 6818"/>
             </a:avLst>
           </a:prstGeom>
           <a:solidFill>
-            <a:srgbClr val="F7FAFC"/>
+            <a:srgbClr val="F3EBDA"/>
           </a:solidFill>
-          <a:ln w="6350">
+          <a:ln w="10160">
             <a:solidFill>
-              <a:srgbClr val="CBD5E0"/>
+              <a:srgbClr val="D9B668"/>
             </a:solidFill>
             <a:prstDash val="solid"/>
           </a:ln>
@@ -2570,23 +2926,42 @@
       </p:sp>
       <p:sp>
         <p:nvSpPr>
-          <p:cNvPr id="7" name="Shape 5"/>
-          <p:cNvSpPr/>
-          <p:nvPr/>
-        </p:nvSpPr>
-        <p:spPr>
-          <a:xfrm>
-            <a:off x="786384" y="1792224"/>
-            <a:ext cx="438912" cy="438912"/>
-          </a:xfrm>
-          <a:prstGeom prst="ellipse">
-            <a:avLst/>
-          </a:prstGeom>
-          <a:solidFill>
-            <a:srgbClr val="B98A2E"/>
-          </a:solidFill>
-          <a:ln/>
-        </p:spPr>
+          <p:cNvPr id="7" name="Text 5"/>
+          <p:cNvSpPr/>
+          <p:nvPr/>
+        </p:nvSpPr>
+        <p:spPr>
+          <a:xfrm>
+            <a:off x="749808" y="5093208"/>
+            <a:ext cx="1691640" cy="256032"/>
+          </a:xfrm>
+          <a:prstGeom prst="rect">
+            <a:avLst/>
+          </a:prstGeom>
+          <a:noFill/>
+          <a:ln/>
+        </p:spPr>
+        <p:txBody>
+          <a:bodyPr wrap="square" lIns="0" tIns="0" rIns="0" bIns="0" rtlCol="0" anchor="ctr"/>
+          <a:lstStyle/>
+          <a:p>
+            <a:pPr indent="0" marL="0">
+              <a:buNone/>
+            </a:pPr>
+            <a:r>
+              <a:rPr lang="en-US" sz="1050" b="1" dirty="0">
+                <a:solidFill>
+                  <a:srgbClr val="977024"/>
+                </a:solidFill>
+                <a:latin typeface="Pretendard" pitchFamily="34" charset="0"/>
+                <a:ea typeface="Pretendard" pitchFamily="34" charset="-122"/>
+                <a:cs typeface="Pretendard" pitchFamily="34" charset="-120"/>
+              </a:rPr>
+              <a:t>종합 가치 제안</a:t>
+            </a:r>
+            <a:endParaRPr lang="en-US" sz="1050" dirty="0"/>
+          </a:p>
+        </p:txBody>
       </p:sp>
       <p:sp>
         <p:nvSpPr>
@@ -2596,205 +2971,113 @@
         </p:nvSpPr>
         <p:spPr>
           <a:xfrm>
-            <a:off x="786384" y="1792224"/>
-            <a:ext cx="438912" cy="438912"/>
-          </a:xfrm>
-          <a:prstGeom prst="rect">
-            <a:avLst/>
-          </a:prstGeom>
-          <a:noFill/>
-          <a:ln/>
-        </p:spPr>
-        <p:txBody>
-          <a:bodyPr wrap="square" lIns="0" tIns="0" rIns="0" bIns="0" rtlCol="0" anchor="ctr"/>
-          <a:lstStyle/>
-          <a:p>
-            <a:pPr algn="ctr" indent="0" marL="0">
-              <a:buNone/>
-            </a:pPr>
-            <a:r>
-              <a:rPr lang="en-US" sz="1400" b="1" dirty="0">
-                <a:solidFill>
-                  <a:srgbClr val="FFFFFF"/>
+            <a:off x="2487168" y="5056632"/>
+            <a:ext cx="8954719" cy="658368"/>
+          </a:xfrm>
+          <a:prstGeom prst="rect">
+            <a:avLst/>
+          </a:prstGeom>
+          <a:noFill/>
+          <a:ln/>
+        </p:spPr>
+        <p:txBody>
+          <a:bodyPr wrap="square" lIns="0" tIns="0" rIns="0" bIns="0" rtlCol="0" anchor="ctr"/>
+          <a:lstStyle/>
+          <a:p>
+            <a:pPr indent="0" marL="0">
+              <a:lnSpc>
+                <a:spcPct val="125000"/>
+              </a:lnSpc>
+              <a:buNone/>
+            </a:pPr>
+            <a:r>
+              <a:rPr lang="en-US" sz="1100" dirty="0">
+                <a:solidFill>
+                  <a:srgbClr val="10161F"/>
+                </a:solidFill>
+                <a:latin typeface="Pretendard" pitchFamily="34" charset="0"/>
+                <a:ea typeface="Pretendard" pitchFamily="34" charset="-122"/>
+                <a:cs typeface="Pretendard" pitchFamily="34" charset="-120"/>
+              </a:rPr>
+              <a:t>{"ok":true,"mocked":true,"extractedFields":{"area_signal":"역삼","asset_type":"[건물명 비공개]","price_band":"300억","size_signal":"3000평(약 9917.4㎡)"},"extractedFacts":{"region":"역삼","exactAddressCandidate":"역삼동 742-1","assetType":"[건물명 비공개]","priceText":"300억","sizeText":"3000평(약 9917.4㎡)","currentUse":"오피스","currentUseSignal":"근린생활시설","leaseSignal":"임대중","vacancySignal":"공실없음","tenantNames":["쿠팡","네이버"],"unitRentTexts":["301호: 1500만"],"sellerMotivationText":"자산 효율화","brokerNotes":["역세권 도보 3분 이내 매물"]},"detectedSensitiveFields":["exact_address","tenant_name"],"ambiguousFields":[],"warnings":[],"areaSignal":"역삼","assetType":"[건물명 비공개]","priceBand":"300억","sizeSignal":"3000평(약 9917.4㎡)","dealType":"매각","buildingName":"역삼 [건물명 비공개]","exactAddress":"역삼동 742-1","totalFloorArea":9917.3,"buildYear":2015,"currentUseSignal":"근린생활시설","vacancySignal":"공실 없음","fitSummary":"역세권 도보 3분 이내 근생 빌딩으로 시행/사옥 매입에 최적화","cautionSummary":"주요 임차인 만기 조율 필요","hiddenFields":["exact_address","seller_motivation"],"confidence":{"areaSignal":"confirmed","assetType":"confirmed","priceBand":"ai_hypothesis","fitSummary":"ai_hypothesis"},"missingData":["sizeSignal"],"boundaryNote":"본 자료는 실거래 통계 기반 참고치입니다.","buyerType":"법인 사옥형","budgetRange":{"min":50,"max":80,"display":"50억~80억"},"preferredRegions":["강남","성수"],"assetTypes":["[건물명 비공개]","사옥용"],"purchasePurpose":"사옥용 매입","mustHave":["역세권 도보 3분 이내","주차"],"niceToHave":["테라스","루프탑"],"riskTolerance":"medium","financingNote":"자본금 50% 준비","missingQuestions":["구체적인 입주 시기가 언제인가요?","선호하는 수익률이 있나요?"],"privacyNotes":["연락처 비공개"],"fitReasons":["매수자 예산(50-80억)에 부합하는 매물입니다.","요청하신 성수/강남 권역에 해당합니다."],"cautionReasons":["요청한 용도와 달리 명도 협의가 다소 필요합니다."],"recommendedNextAction":"현장 답사 제안","kakaoMessage":"안녕하세요! 요청하신 조건에 부합하는 추천 매물이 있어 안내해 드립니다. 확인해보시고 피드백 부탁드립니다.","title":"강남 역삼역 역세권 도보 3분 이내 오피스 사옥용 빌딩 매각","shortSummary":"역삼역 도보 5분 거리의 준신축급 대형 [건물명 비공개]입니다.","dealPoints":["역세권 도보 3분 이내","사옥 최적"],"cautionPoints":["명도 조율 필요"],"hiddenInfoNotice":["보증금 및 지번은 인가 후 확인 가능"],"gateMessage":"G1 등급 등록이 필요합니다.","kakaoText":"강남 역삼역 오피스 빌딩 매각 안내입니다.","exactUnitCandidate":"101호","floor":"1층","areaSqmText":"150㎡","spaceType":"office","depositText":"5000만","monthlyRentText":"400만","maintenanceFeeText":"50만","availableFromText":"즉시입주","leaseTermMonthsText":"24","incentivesText":"렌트프리(무상임대) 2개월","restrictions":[],"landlordIdentity":"김성수","currentTenant":"스타트업","vacancyReason":"이전 확장","rentNegotiation":"협의 가능","region":"성수동","areaSqm":150,"deposit":5000,"monthlyRent":400,"maintenanceFee":50,"availableFrom":"즉시입주","leaseTermMonths":24,"incentives":{"렌트프리(무상임대)(무상임대)Months":2,"interiorSupport":"일부 인테리어 지원","freeRentDetail":"렌트프리(무상임대) 2개월 지원"},"shortSummaryLease":"성수역 도보 5분 거리 1층 리테일 상가 매물입니다."}</a:t>
+            </a:r>
+            <a:endParaRPr lang="en-US" sz="1100" dirty="0"/>
+          </a:p>
+        </p:txBody>
+      </p:sp>
+      <p:sp>
+        <p:nvSpPr>
+          <p:cNvPr id="9" name="Text 7"/>
+          <p:cNvSpPr/>
+          <p:nvPr/>
+        </p:nvSpPr>
+        <p:spPr>
+          <a:xfrm>
+            <a:off x="566928" y="6382512"/>
+            <a:ext cx="7315200" cy="219456"/>
+          </a:xfrm>
+          <a:prstGeom prst="rect">
+            <a:avLst/>
+          </a:prstGeom>
+          <a:noFill/>
+          <a:ln/>
+        </p:spPr>
+        <p:txBody>
+          <a:bodyPr wrap="square" lIns="0" tIns="0" rIns="0" bIns="0" rtlCol="0" anchor="ctr"/>
+          <a:lstStyle/>
+          <a:p>
+            <a:pPr indent="0" marL="0">
+              <a:buNone/>
+            </a:pPr>
+            <a:r>
+              <a:rPr lang="en-US" sz="800" dirty="0">
+                <a:solidFill>
+                  <a:srgbClr val="718096"/>
+                </a:solidFill>
+                <a:latin typeface="Pretendard" pitchFamily="34" charset="0"/>
+                <a:ea typeface="Pretendard" pitchFamily="34" charset="-122"/>
+                <a:cs typeface="Pretendard" pitchFamily="34" charset="-120"/>
+              </a:rPr>
+              <a:t>크리딜   |   </a:t>
+            </a:r>
+            <a:endParaRPr lang="en-US" sz="800" dirty="0"/>
+          </a:p>
+        </p:txBody>
+      </p:sp>
+      <p:sp>
+        <p:nvSpPr>
+          <p:cNvPr id="10" name="Text 8"/>
+          <p:cNvSpPr/>
+          <p:nvPr/>
+        </p:nvSpPr>
+        <p:spPr>
+          <a:xfrm>
+            <a:off x="10710367" y="6382512"/>
+            <a:ext cx="914400" cy="219456"/>
+          </a:xfrm>
+          <a:prstGeom prst="rect">
+            <a:avLst/>
+          </a:prstGeom>
+          <a:noFill/>
+          <a:ln/>
+        </p:spPr>
+        <p:txBody>
+          <a:bodyPr wrap="square" lIns="0" tIns="0" rIns="0" bIns="0" rtlCol="0" anchor="ctr"/>
+          <a:lstStyle/>
+          <a:p>
+            <a:pPr algn="r" indent="0" marL="0">
+              <a:buNone/>
+            </a:pPr>
+            <a:r>
+              <a:rPr lang="en-US" sz="900" b="1" dirty="0">
+                <a:solidFill>
+                  <a:srgbClr val="B98A2E"/>
                 </a:solidFill>
                 <a:latin typeface="Arial" pitchFamily="34" charset="0"/>
                 <a:ea typeface="Arial" pitchFamily="34" charset="-122"/>
                 <a:cs typeface="Arial" pitchFamily="34" charset="-120"/>
               </a:rPr>
-              <a:t>01</a:t>
-            </a:r>
-            <a:endParaRPr lang="en-US" sz="1400" dirty="0"/>
-          </a:p>
-        </p:txBody>
-      </p:sp>
-      <p:sp>
-        <p:nvSpPr>
-          <p:cNvPr id="9" name="Text 7"/>
-          <p:cNvSpPr/>
-          <p:nvPr/>
-        </p:nvSpPr>
-        <p:spPr>
-          <a:xfrm>
-            <a:off x="786384" y="2304288"/>
-            <a:ext cx="10618927" cy="365760"/>
-          </a:xfrm>
-          <a:prstGeom prst="rect">
-            <a:avLst/>
-          </a:prstGeom>
-          <a:noFill/>
-          <a:ln/>
-        </p:spPr>
-        <p:txBody>
-          <a:bodyPr wrap="square" rtlCol="0" anchor="ctr"/>
-          <a:lstStyle/>
-          <a:p>
-            <a:pPr indent="0" marL="0">
-              <a:buNone/>
-            </a:pPr>
-            <a:r>
-              <a:rPr lang="en-US" sz="1600" b="1" dirty="0">
-                <a:solidFill>
-                  <a:srgbClr val="10161F"/>
-                </a:solidFill>
-                <a:latin typeface="Pretendard" pitchFamily="34" charset="0"/>
-                <a:ea typeface="Pretendard" pitchFamily="34" charset="-122"/>
-                <a:cs typeface="Pretendard" pitchFamily="34" charset="-120"/>
-              </a:rPr>
-              <a:t>1단계</a:t>
-            </a:r>
-            <a:endParaRPr lang="en-US" sz="1600" dirty="0"/>
-          </a:p>
-        </p:txBody>
-      </p:sp>
-      <p:sp>
-        <p:nvSpPr>
-          <p:cNvPr id="10" name="Text 8"/>
-          <p:cNvSpPr/>
-          <p:nvPr/>
-        </p:nvSpPr>
-        <p:spPr>
-          <a:xfrm>
-            <a:off x="786384" y="2761488"/>
-            <a:ext cx="10618927" cy="1828800"/>
-          </a:xfrm>
-          <a:prstGeom prst="rect">
-            <a:avLst/>
-          </a:prstGeom>
-          <a:noFill/>
-          <a:ln/>
-        </p:spPr>
-        <p:txBody>
-          <a:bodyPr wrap="square" rtlCol="0" anchor="t"/>
-          <a:lstStyle/>
-          <a:p>
-            <a:pPr indent="0" marL="0">
-              <a:buNone/>
-            </a:pPr>
-            <a:r>
-              <a:rPr lang="en-US" sz="1100" dirty="0">
-                <a:solidFill>
-                  <a:srgbClr val="10161F"/>
-                </a:solidFill>
-                <a:latin typeface="Pretendard" pitchFamily="34" charset="0"/>
-                <a:ea typeface="Pretendard" pitchFamily="34" charset="-122"/>
-                <a:cs typeface="Pretendard" pitchFamily="34" charset="-120"/>
-              </a:rPr>
-              <a:t>{"ok"</a:t>
-            </a:r>
-            <a:endParaRPr lang="en-US" sz="1100" dirty="0"/>
-          </a:p>
-          <a:p>
-            <a:pPr indent="0" marL="0">
-              <a:buNone/>
-            </a:pPr>
-            <a:r>
-              <a:rPr lang="en-US" sz="1100" dirty="0">
-                <a:solidFill>
-                  <a:srgbClr val="10161F"/>
-                </a:solidFill>
-                <a:latin typeface="Pretendard" pitchFamily="34" charset="0"/>
-                <a:ea typeface="Pretendard" pitchFamily="34" charset="-122"/>
-                <a:cs typeface="Pretendard" pitchFamily="34" charset="-120"/>
-              </a:rPr>
-              <a:t>true,"mocked":true,"extractedFields":{"area_signal":"역삼","asset_type":"오피스빌딩","price_band":"300억","size_signal":"3000평(약 9917.4㎡)"},"extractedFacts":{"region":"역삼","exactAddressCandidate":"역삼동 742-1","assetType":"오피스빌딩","priceText":"300억","sizeText":"3000평(약 9917.4㎡)","currentUse":"오피스","currentUseSignal":"근린생활시설","leaseSignal":"임대중","vacancySignal":"공실없음","tenantNames":["쿠팡","네이버"],"unitRentTexts":["301호: 1500만"],"sellerMotivationText":"자산 효율화","brokerNotes":["초역세권 매물"]},"detectedSensitiveFields":["exact_address","tenant_name"],"ambiguousFields":[],"warnings":[],"areaSignal":"역삼","assetType":"오피스빌딩","priceBand":"300억","sizeSignal":"3000평(약 9917.4㎡)","dealType":"매각","buildingName":"역삼 센트럴타워","exactAddress":"역삼동 742-1","totalFloorArea":9917.3,"buildYear":2015,"currentUseSignal":"근린생활시설","vacancySignal":"공실 없음","fitSummary":"초역세권 근생 빌딩으로 시행/사옥 매입에 최적화","cautionSummary":"주요 임차인 만기 조율 필요","hiddenFields":["exact_address","seller_motivation"],"confidence":{"areaSignal":"confirmed","assetType":"confirmed","priceBand":"ai_hypothesis","fitSummary":"ai_hypothesis"},"missingData":["sizeSignal"],"boundaryNote":"본 자료는 실거래 통계 기반 참고치입니다.","buyerType":"법인 사옥형","budgetRange":{"min":50,"max":80,"display":"50억~80억"},"preferredRegions":["강남","성수"],"assetTypes":["꼬마빌딩","사옥용"],"purchasePurpose":"사옥용 매입","mustHave":["초역세권","주차"],"niceToHave":["테라스","루프탑"],"riskTolerance":"medium","financingNote":"자본금 50% 준비","missingQuestions":["구체적인 입주 시기가 언제인가요?","선호하는 수익률이 있나요?"],"privacyNotes":["연락처 비공개"],"fitReasons":["매수자 예산(50-80억)에 부합하는 매물입니다.","요청하신 성수/강남 권역에 해당합니다."],"cautionReasons":["요청한 용도와 달리 명도 협의가 다소 필요합니다."],"recommendedNextAction":"현장 답사 제안","kakaoMessage":"안녕하세요! 요청하신 조건에 부합하는 추천 매물이 있어 안내해 드립니다. 확인해보시고 피드백 부탁드립니다.","title":"강남 역삼역 초역세권 오피스 사옥용 빌딩 매각","shortSummary":"역삼역 도보 5분 거리의 준신축급 대형 오피스빌딩입니다.","dealPoints":["초역세권","사옥 최적"],"cautionPoints":["명도 조율 필요"],"hiddenInfoNotice":["보증금 및 지번은 인가 후 확인 가능"],"gateMessage":"G1 등급 등록이 필요합니다.","kakaoText":"강남 역삼역 오피스 빌딩 매각 안내입니다.","exactUnitCandidate":"101호","floor":"1층","areaSqmText":"150㎡","spaceType":"office","depositText":"5000만","monthlyRentText":"400만","maintenanceFeeText":"50만","availableFromText":"즉시입주","leaseTermMonthsText":"24","incentivesText":"렌트프리 2개월","restrictions":[],"landlordIdentity":"김성수","currentTenant":"스타트업","vacancyReason":"이전 확장","rentNegotiation":"협의 가능","region":"성수동","areaSqm":150,"deposit":5000,"monthlyRent":400,"maintenanceFee":50,"availableFrom":"즉시입주","leaseTermMonths":24,"incentives":{"rentFreeMonths":2,"interiorSupport":"일부 인테리어 지원","freeRentDetail":"렌트프리 2개월 지원"},"shortSummaryLease":"성수역 도보 5분 거리 1층 리테일 상가 매물입니다."}</a:t>
-            </a:r>
-            <a:endParaRPr lang="en-US" sz="1100" dirty="0"/>
-          </a:p>
-        </p:txBody>
-      </p:sp>
-      <p:sp>
-        <p:nvSpPr>
-          <p:cNvPr id="11" name="Text 9"/>
-          <p:cNvSpPr/>
-          <p:nvPr/>
-        </p:nvSpPr>
-        <p:spPr>
-          <a:xfrm>
-            <a:off x="566928" y="6382512"/>
-            <a:ext cx="7315200" cy="219456"/>
-          </a:xfrm>
-          <a:prstGeom prst="rect">
-            <a:avLst/>
-          </a:prstGeom>
-          <a:noFill/>
-          <a:ln/>
-        </p:spPr>
-        <p:txBody>
-          <a:bodyPr wrap="square" lIns="0" tIns="0" rIns="0" bIns="0" rtlCol="0" anchor="ctr"/>
-          <a:lstStyle/>
-          <a:p>
-            <a:pPr indent="0" marL="0">
-              <a:buNone/>
-            </a:pPr>
-            <a:r>
-              <a:rPr lang="en-US" sz="800" dirty="0">
-                <a:solidFill>
-                  <a:srgbClr val="718096"/>
-                </a:solidFill>
-                <a:latin typeface="Pretendard" pitchFamily="34" charset="0"/>
-                <a:ea typeface="Pretendard" pitchFamily="34" charset="-122"/>
-                <a:cs typeface="Pretendard" pitchFamily="34" charset="-120"/>
-              </a:rPr>
-              <a:t>크리딜   |   </a:t>
-            </a:r>
-            <a:endParaRPr lang="en-US" sz="800" dirty="0"/>
-          </a:p>
-        </p:txBody>
-      </p:sp>
-      <p:sp>
-        <p:nvSpPr>
-          <p:cNvPr id="12" name="Text 10"/>
-          <p:cNvSpPr/>
-          <p:nvPr/>
-        </p:nvSpPr>
-        <p:spPr>
-          <a:xfrm>
-            <a:off x="10710367" y="6382512"/>
-            <a:ext cx="914400" cy="219456"/>
-          </a:xfrm>
-          <a:prstGeom prst="rect">
-            <a:avLst/>
-          </a:prstGeom>
-          <a:noFill/>
-          <a:ln/>
-        </p:spPr>
-        <p:txBody>
-          <a:bodyPr wrap="square" lIns="0" tIns="0" rIns="0" bIns="0" rtlCol="0" anchor="ctr"/>
-          <a:lstStyle/>
-          <a:p>
-            <a:pPr algn="r" indent="0" marL="0">
-              <a:buNone/>
-            </a:pPr>
-            <a:r>
-              <a:rPr lang="en-US" sz="900" b="1" dirty="0">
-                <a:solidFill>
-                  <a:srgbClr val="B98A2E"/>
-                </a:solidFill>
-                <a:latin typeface="Arial" pitchFamily="34" charset="0"/>
-                <a:ea typeface="Arial" pitchFamily="34" charset="-122"/>
-                <a:cs typeface="Arial" pitchFamily="34" charset="-120"/>
-              </a:rPr>
-              <a:t>10</a:t>
+              <a:t>8</a:t>
             </a:r>
             <a:endParaRPr lang="en-US" sz="900" dirty="0"/>
           </a:p>
@@ -2811,6 +3094,2020 @@
 <file path=ppt/slides/slide11.xml><?xml version="1.0" encoding="utf-8"?>
 <p:sld xmlns:a="http://schemas.openxmlformats.org/drawingml/2006/main" xmlns:r="http://schemas.openxmlformats.org/officeDocument/2006/relationships" xmlns:p="http://schemas.openxmlformats.org/presentationml/2006/main">
   <p:cSld name="Slide 11">
+    <p:bg>
+      <p:bgPr>
+        <a:solidFill>
+          <a:srgbClr val="FFFFFF"/>
+        </a:solidFill>
+      </p:bgPr>
+    </p:bg>
+    <p:spTree>
+      <p:nvGrpSpPr>
+        <p:cNvPr id="1" name=""/>
+        <p:cNvGrpSpPr/>
+        <p:nvPr/>
+      </p:nvGrpSpPr>
+      <p:grpSpPr>
+        <a:xfrm>
+          <a:off x="0" y="0"/>
+          <a:ext cx="0" cy="0"/>
+          <a:chOff x="0" y="0"/>
+          <a:chExt cx="0" cy="0"/>
+        </a:xfrm>
+      </p:grpSpPr>
+      <p:sp>
+        <p:nvSpPr>
+          <p:cNvPr id="2" name="Shape 0"/>
+          <p:cNvSpPr/>
+          <p:nvPr/>
+        </p:nvSpPr>
+        <p:spPr>
+          <a:xfrm>
+            <a:off x="566928" y="457200"/>
+            <a:ext cx="384048" cy="384048"/>
+          </a:xfrm>
+          <a:prstGeom prst="ellipse">
+            <a:avLst/>
+          </a:prstGeom>
+          <a:solidFill>
+            <a:srgbClr val="B98A2E"/>
+          </a:solidFill>
+          <a:ln/>
+        </p:spPr>
+      </p:sp>
+      <p:sp>
+        <p:nvSpPr>
+          <p:cNvPr id="3" name="Text 1"/>
+          <p:cNvSpPr/>
+          <p:nvPr/>
+        </p:nvSpPr>
+        <p:spPr>
+          <a:xfrm>
+            <a:off x="566928" y="457200"/>
+            <a:ext cx="384048" cy="384048"/>
+          </a:xfrm>
+          <a:prstGeom prst="rect">
+            <a:avLst/>
+          </a:prstGeom>
+          <a:noFill/>
+          <a:ln/>
+        </p:spPr>
+        <p:txBody>
+          <a:bodyPr wrap="square" lIns="0" tIns="0" rIns="0" bIns="0" rtlCol="0" anchor="ctr"/>
+          <a:lstStyle/>
+          <a:p>
+            <a:pPr algn="ctr" indent="0" marL="0">
+              <a:buNone/>
+            </a:pPr>
+            <a:r>
+              <a:rPr lang="en-US" sz="1300" b="1" dirty="0">
+                <a:solidFill>
+                  <a:srgbClr val="FFFFFF"/>
+                </a:solidFill>
+                <a:latin typeface="Arial" pitchFamily="34" charset="0"/>
+                <a:ea typeface="Arial" pitchFamily="34" charset="-122"/>
+                <a:cs typeface="Arial" pitchFamily="34" charset="-120"/>
+              </a:rPr>
+              <a:t>09</a:t>
+            </a:r>
+            <a:endParaRPr lang="en-US" sz="1300" dirty="0"/>
+          </a:p>
+        </p:txBody>
+      </p:sp>
+      <p:sp>
+        <p:nvSpPr>
+          <p:cNvPr id="4" name="Text 2"/>
+          <p:cNvSpPr/>
+          <p:nvPr/>
+        </p:nvSpPr>
+        <p:spPr>
+          <a:xfrm>
+            <a:off x="1133856" y="457200"/>
+            <a:ext cx="10490911" cy="182880"/>
+          </a:xfrm>
+          <a:prstGeom prst="rect">
+            <a:avLst/>
+          </a:prstGeom>
+          <a:noFill/>
+          <a:ln/>
+        </p:spPr>
+        <p:txBody>
+          <a:bodyPr wrap="square" lIns="0" tIns="0" rIns="0" bIns="0" rtlCol="0" anchor="ctr"/>
+          <a:lstStyle/>
+          <a:p>
+            <a:pPr indent="0" marL="0">
+              <a:buNone/>
+            </a:pPr>
+            <a:r>
+              <a:rPr lang="en-US" sz="950" b="1" spc="200" kern="0" dirty="0">
+                <a:solidFill>
+                  <a:srgbClr val="B98A2E"/>
+                </a:solidFill>
+                <a:latin typeface="Arial" pitchFamily="34" charset="0"/>
+                <a:ea typeface="Arial" pitchFamily="34" charset="-122"/>
+                <a:cs typeface="Arial" pitchFamily="34" charset="-120"/>
+              </a:rPr>
+              <a:t>Risk</a:t>
+            </a:r>
+            <a:endParaRPr lang="en-US" sz="950" dirty="0"/>
+          </a:p>
+        </p:txBody>
+      </p:sp>
+      <p:sp>
+        <p:nvSpPr>
+          <p:cNvPr id="5" name="Text 3"/>
+          <p:cNvSpPr/>
+          <p:nvPr/>
+        </p:nvSpPr>
+        <p:spPr>
+          <a:xfrm>
+            <a:off x="1133856" y="640080"/>
+            <a:ext cx="10490911" cy="365760"/>
+          </a:xfrm>
+          <a:prstGeom prst="rect">
+            <a:avLst/>
+          </a:prstGeom>
+          <a:noFill/>
+          <a:ln/>
+        </p:spPr>
+        <p:txBody>
+          <a:bodyPr wrap="square" lIns="0" tIns="0" rIns="0" bIns="0" rtlCol="0" anchor="ctr"/>
+          <a:lstStyle/>
+          <a:p>
+            <a:pPr indent="0" marL="0">
+              <a:buNone/>
+            </a:pPr>
+            <a:r>
+              <a:rPr lang="en-US" sz="2300" b="1" dirty="0">
+                <a:solidFill>
+                  <a:srgbClr val="10161F"/>
+                </a:solidFill>
+                <a:latin typeface="Pretendard" pitchFamily="34" charset="0"/>
+                <a:ea typeface="Pretendard" pitchFamily="34" charset="-122"/>
+                <a:cs typeface="Pretendard" pitchFamily="34" charset="-120"/>
+              </a:rPr>
+              <a:t>리스크는 무엇이고 대응책은 있는가</a:t>
+            </a:r>
+            <a:endParaRPr lang="en-US" sz="2300" dirty="0"/>
+          </a:p>
+        </p:txBody>
+      </p:sp>
+      <p:sp>
+        <p:nvSpPr>
+          <p:cNvPr id="6" name="Shape 4"/>
+          <p:cNvSpPr/>
+          <p:nvPr/>
+        </p:nvSpPr>
+        <p:spPr>
+          <a:xfrm>
+            <a:off x="566928" y="1417320"/>
+            <a:ext cx="11057839" cy="3657600"/>
+          </a:xfrm>
+          <a:prstGeom prst="roundRect">
+            <a:avLst>
+              <a:gd name="adj" fmla="val 1500"/>
+            </a:avLst>
+          </a:prstGeom>
+          <a:solidFill>
+            <a:srgbClr val="F7FAFC"/>
+          </a:solidFill>
+          <a:ln w="6350">
+            <a:solidFill>
+              <a:srgbClr val="CBD5E0"/>
+            </a:solidFill>
+            <a:prstDash val="solid"/>
+          </a:ln>
+        </p:spPr>
+      </p:sp>
+      <p:sp>
+        <p:nvSpPr>
+          <p:cNvPr id="7" name="Shape 5"/>
+          <p:cNvSpPr/>
+          <p:nvPr/>
+        </p:nvSpPr>
+        <p:spPr>
+          <a:xfrm>
+            <a:off x="566928" y="1417320"/>
+            <a:ext cx="11057839" cy="45720"/>
+          </a:xfrm>
+          <a:prstGeom prst="rect">
+            <a:avLst/>
+          </a:prstGeom>
+          <a:solidFill>
+            <a:srgbClr val="B98A2E"/>
+          </a:solidFill>
+          <a:ln/>
+        </p:spPr>
+      </p:sp>
+      <p:sp>
+        <p:nvSpPr>
+          <p:cNvPr id="8" name="Text 6"/>
+          <p:cNvSpPr/>
+          <p:nvPr/>
+        </p:nvSpPr>
+        <p:spPr>
+          <a:xfrm>
+            <a:off x="795528" y="1618488"/>
+            <a:ext cx="10600639" cy="292608"/>
+          </a:xfrm>
+          <a:prstGeom prst="rect">
+            <a:avLst/>
+          </a:prstGeom>
+          <a:noFill/>
+          <a:ln/>
+        </p:spPr>
+        <p:txBody>
+          <a:bodyPr wrap="square" lIns="0" tIns="0" rIns="0" bIns="0" rtlCol="0" anchor="ctr"/>
+          <a:lstStyle/>
+          <a:p>
+            <a:pPr indent="0" marL="0">
+              <a:buNone/>
+            </a:pPr>
+            <a:r>
+              <a:rPr lang="en-US" sz="1350" b="1" dirty="0">
+                <a:solidFill>
+                  <a:srgbClr val="977024"/>
+                </a:solidFill>
+                <a:latin typeface="Pretendard" pitchFamily="34" charset="0"/>
+                <a:ea typeface="Pretendard" pitchFamily="34" charset="-122"/>
+                <a:cs typeface="Pretendard" pitchFamily="34" charset="-120"/>
+              </a:rPr>
+              <a:t>용도 리스크</a:t>
+            </a:r>
+            <a:endParaRPr lang="en-US" sz="1350" dirty="0"/>
+          </a:p>
+        </p:txBody>
+      </p:sp>
+      <p:sp>
+        <p:nvSpPr>
+          <p:cNvPr id="9" name="Text 7"/>
+          <p:cNvSpPr/>
+          <p:nvPr/>
+        </p:nvSpPr>
+        <p:spPr>
+          <a:xfrm>
+            <a:off x="795528" y="1947672"/>
+            <a:ext cx="10600639" cy="365760"/>
+          </a:xfrm>
+          <a:prstGeom prst="rect">
+            <a:avLst/>
+          </a:prstGeom>
+          <a:noFill/>
+          <a:ln/>
+        </p:spPr>
+        <p:txBody>
+          <a:bodyPr wrap="square" lIns="0" tIns="0" rIns="0" bIns="0" rtlCol="0" anchor="ctr">
+            <a:normAutofit/>
+          </a:bodyPr>
+          <a:lstStyle/>
+          <a:p>
+            <a:pPr indent="0" marL="0">
+              <a:buNone/>
+            </a:pPr>
+            <a:r>
+              <a:rPr lang="en-US" sz="1250" b="1" dirty="0">
+                <a:solidFill>
+                  <a:srgbClr val="10161F"/>
+                </a:solidFill>
+                <a:latin typeface="Pretendard" pitchFamily="34" charset="0"/>
+                <a:ea typeface="Pretendard" pitchFamily="34" charset="-122"/>
+                <a:cs typeface="Pretendard" pitchFamily="34" charset="-120"/>
+              </a:rPr>
+              <a:t>—</a:t>
+            </a:r>
+            <a:endParaRPr lang="en-US" sz="1250" dirty="0"/>
+          </a:p>
+        </p:txBody>
+      </p:sp>
+      <p:sp>
+        <p:nvSpPr>
+          <p:cNvPr id="10" name="Text 8"/>
+          <p:cNvSpPr/>
+          <p:nvPr/>
+        </p:nvSpPr>
+        <p:spPr>
+          <a:xfrm>
+            <a:off x="795528" y="2377440"/>
+            <a:ext cx="10600639" cy="2606040"/>
+          </a:xfrm>
+          <a:prstGeom prst="rect">
+            <a:avLst/>
+          </a:prstGeom>
+          <a:noFill/>
+          <a:ln/>
+        </p:spPr>
+        <p:txBody>
+          <a:bodyPr wrap="square" lIns="0" tIns="0" rIns="0" bIns="0" rtlCol="0" anchor="t">
+            <a:normAutofit/>
+          </a:bodyPr>
+          <a:lstStyle/>
+          <a:p>
+            <a:pPr marL="342900" indent="-342900">
+              <a:lnSpc>
+                <a:spcPct val="125000"/>
+              </a:lnSpc>
+              <a:buSzPct val="100000"/>
+              <a:buChar char="•"/>
+            </a:pPr>
+            <a:r>
+              <a:rPr lang="en-US" sz="1100" dirty="0">
+                <a:solidFill>
+                  <a:srgbClr val="10161F"/>
+                </a:solidFill>
+                <a:latin typeface="Pretendard" pitchFamily="34" charset="0"/>
+                <a:ea typeface="Pretendard" pitchFamily="34" charset="-122"/>
+                <a:cs typeface="Pretendard" pitchFamily="34" charset="-120"/>
+              </a:rPr>
+              <a:t>{"ok":true,"mocked":true,"extractedFields":{"area_signal":"역삼","asset_type":"[건물명 비공개]","price_band":"300억","size_signal":"3000평(약 9917.4㎡)"},"extractedFacts":{"region":"역삼","exactAddressCandidate":"역</a:t>
+            </a:r>
+            <a:endParaRPr lang="en-US" sz="1100" dirty="0"/>
+          </a:p>
+        </p:txBody>
+      </p:sp>
+      <p:sp>
+        <p:nvSpPr>
+          <p:cNvPr id="11" name="Shape 9"/>
+          <p:cNvSpPr/>
+          <p:nvPr/>
+        </p:nvSpPr>
+        <p:spPr>
+          <a:xfrm>
+            <a:off x="566928" y="5193792"/>
+            <a:ext cx="11057839" cy="621792"/>
+          </a:xfrm>
+          <a:prstGeom prst="roundRect">
+            <a:avLst>
+              <a:gd name="adj" fmla="val 8824"/>
+            </a:avLst>
+          </a:prstGeom>
+          <a:solidFill>
+            <a:srgbClr val="F7FAFC"/>
+          </a:solidFill>
+          <a:ln w="6350">
+            <a:solidFill>
+              <a:srgbClr val="CBD5E0"/>
+            </a:solidFill>
+            <a:prstDash val="solid"/>
+          </a:ln>
+        </p:spPr>
+      </p:sp>
+      <p:sp>
+        <p:nvSpPr>
+          <p:cNvPr id="12" name="Text 10"/>
+          <p:cNvSpPr/>
+          <p:nvPr/>
+        </p:nvSpPr>
+        <p:spPr>
+          <a:xfrm>
+            <a:off x="795528" y="5193792"/>
+            <a:ext cx="10600639" cy="621792"/>
+          </a:xfrm>
+          <a:prstGeom prst="rect">
+            <a:avLst/>
+          </a:prstGeom>
+          <a:noFill/>
+          <a:ln/>
+        </p:spPr>
+        <p:txBody>
+          <a:bodyPr wrap="square" lIns="0" tIns="0" rIns="0" bIns="0" rtlCol="0" anchor="ctr"/>
+          <a:lstStyle/>
+          <a:p>
+            <a:pPr indent="0" marL="0">
+              <a:buNone/>
+            </a:pPr>
+            <a:r>
+              <a:rPr lang="en-US" sz="1100" dirty="0">
+                <a:solidFill>
+                  <a:srgbClr val="10161F"/>
+                </a:solidFill>
+                <a:latin typeface="Pretendard" pitchFamily="34" charset="0"/>
+                <a:ea typeface="Pretendard" pitchFamily="34" charset="-122"/>
+                <a:cs typeface="Pretendard" pitchFamily="34" charset="-120"/>
+              </a:rPr>
+              <a:t>※ 본 리스크 체크는 공부 및 브로커 확인 기반이며, 매수 전 전문 실사팀(변호사/건축사)을 통한 정밀 실사가 필요합니다.</a:t>
+            </a:r>
+            <a:endParaRPr lang="en-US" sz="1100" dirty="0"/>
+          </a:p>
+        </p:txBody>
+      </p:sp>
+      <p:sp>
+        <p:nvSpPr>
+          <p:cNvPr id="13" name="Text 11"/>
+          <p:cNvSpPr/>
+          <p:nvPr/>
+        </p:nvSpPr>
+        <p:spPr>
+          <a:xfrm>
+            <a:off x="566928" y="6382512"/>
+            <a:ext cx="7315200" cy="219456"/>
+          </a:xfrm>
+          <a:prstGeom prst="rect">
+            <a:avLst/>
+          </a:prstGeom>
+          <a:noFill/>
+          <a:ln/>
+        </p:spPr>
+        <p:txBody>
+          <a:bodyPr wrap="square" lIns="0" tIns="0" rIns="0" bIns="0" rtlCol="0" anchor="ctr"/>
+          <a:lstStyle/>
+          <a:p>
+            <a:pPr indent="0" marL="0">
+              <a:buNone/>
+            </a:pPr>
+            <a:r>
+              <a:rPr lang="en-US" sz="800" dirty="0">
+                <a:solidFill>
+                  <a:srgbClr val="718096"/>
+                </a:solidFill>
+                <a:latin typeface="Pretendard" pitchFamily="34" charset="0"/>
+                <a:ea typeface="Pretendard" pitchFamily="34" charset="-122"/>
+                <a:cs typeface="Pretendard" pitchFamily="34" charset="-120"/>
+              </a:rPr>
+              <a:t>크리딜   |   </a:t>
+            </a:r>
+            <a:endParaRPr lang="en-US" sz="800" dirty="0"/>
+          </a:p>
+        </p:txBody>
+      </p:sp>
+      <p:sp>
+        <p:nvSpPr>
+          <p:cNvPr id="14" name="Text 12"/>
+          <p:cNvSpPr/>
+          <p:nvPr/>
+        </p:nvSpPr>
+        <p:spPr>
+          <a:xfrm>
+            <a:off x="10710367" y="6382512"/>
+            <a:ext cx="914400" cy="219456"/>
+          </a:xfrm>
+          <a:prstGeom prst="rect">
+            <a:avLst/>
+          </a:prstGeom>
+          <a:noFill/>
+          <a:ln/>
+        </p:spPr>
+        <p:txBody>
+          <a:bodyPr wrap="square" lIns="0" tIns="0" rIns="0" bIns="0" rtlCol="0" anchor="ctr"/>
+          <a:lstStyle/>
+          <a:p>
+            <a:pPr algn="r" indent="0" marL="0">
+              <a:buNone/>
+            </a:pPr>
+            <a:r>
+              <a:rPr lang="en-US" sz="900" b="1" dirty="0">
+                <a:solidFill>
+                  <a:srgbClr val="B98A2E"/>
+                </a:solidFill>
+                <a:latin typeface="Arial" pitchFamily="34" charset="0"/>
+                <a:ea typeface="Arial" pitchFamily="34" charset="-122"/>
+                <a:cs typeface="Arial" pitchFamily="34" charset="-120"/>
+              </a:rPr>
+              <a:t>9</a:t>
+            </a:r>
+            <a:endParaRPr lang="en-US" sz="900" dirty="0"/>
+          </a:p>
+        </p:txBody>
+      </p:sp>
+    </p:spTree>
+  </p:cSld>
+  <p:clrMapOvr>
+    <a:masterClrMapping/>
+  </p:clrMapOvr>
+</p:sld>
+</file>
+
+<file path=ppt/slides/slide12.xml><?xml version="1.0" encoding="utf-8"?>
+<p:sld xmlns:a="http://schemas.openxmlformats.org/drawingml/2006/main" xmlns:r="http://schemas.openxmlformats.org/officeDocument/2006/relationships" xmlns:p="http://schemas.openxmlformats.org/presentationml/2006/main">
+  <p:cSld name="Slide 12">
+    <p:bg>
+      <p:bgPr>
+        <a:solidFill>
+          <a:srgbClr val="FFFFFF"/>
+        </a:solidFill>
+      </p:bgPr>
+    </p:bg>
+    <p:spTree>
+      <p:nvGrpSpPr>
+        <p:cNvPr id="1" name=""/>
+        <p:cNvGrpSpPr/>
+        <p:nvPr/>
+      </p:nvGrpSpPr>
+      <p:grpSpPr>
+        <a:xfrm>
+          <a:off x="0" y="0"/>
+          <a:ext cx="0" cy="0"/>
+          <a:chOff x="0" y="0"/>
+          <a:chExt cx="0" cy="0"/>
+        </a:xfrm>
+      </p:grpSpPr>
+      <p:sp>
+        <p:nvSpPr>
+          <p:cNvPr id="2" name="Shape 0"/>
+          <p:cNvSpPr/>
+          <p:nvPr/>
+        </p:nvSpPr>
+        <p:spPr>
+          <a:xfrm>
+            <a:off x="566928" y="457200"/>
+            <a:ext cx="384048" cy="384048"/>
+          </a:xfrm>
+          <a:prstGeom prst="ellipse">
+            <a:avLst/>
+          </a:prstGeom>
+          <a:solidFill>
+            <a:srgbClr val="B98A2E"/>
+          </a:solidFill>
+          <a:ln/>
+        </p:spPr>
+      </p:sp>
+      <p:sp>
+        <p:nvSpPr>
+          <p:cNvPr id="3" name="Text 1"/>
+          <p:cNvSpPr/>
+          <p:nvPr/>
+        </p:nvSpPr>
+        <p:spPr>
+          <a:xfrm>
+            <a:off x="566928" y="457200"/>
+            <a:ext cx="384048" cy="384048"/>
+          </a:xfrm>
+          <a:prstGeom prst="rect">
+            <a:avLst/>
+          </a:prstGeom>
+          <a:noFill/>
+          <a:ln/>
+        </p:spPr>
+        <p:txBody>
+          <a:bodyPr wrap="square" lIns="0" tIns="0" rIns="0" bIns="0" rtlCol="0" anchor="ctr"/>
+          <a:lstStyle/>
+          <a:p>
+            <a:pPr algn="ctr" indent="0" marL="0">
+              <a:buNone/>
+            </a:pPr>
+            <a:r>
+              <a:rPr lang="en-US" sz="1300" b="1" dirty="0">
+                <a:solidFill>
+                  <a:srgbClr val="FFFFFF"/>
+                </a:solidFill>
+                <a:latin typeface="Arial" pitchFamily="34" charset="0"/>
+                <a:ea typeface="Arial" pitchFamily="34" charset="-122"/>
+                <a:cs typeface="Arial" pitchFamily="34" charset="-120"/>
+              </a:rPr>
+              <a:t>10</a:t>
+            </a:r>
+            <a:endParaRPr lang="en-US" sz="1300" dirty="0"/>
+          </a:p>
+        </p:txBody>
+      </p:sp>
+      <p:sp>
+        <p:nvSpPr>
+          <p:cNvPr id="4" name="Text 2"/>
+          <p:cNvSpPr/>
+          <p:nvPr/>
+        </p:nvSpPr>
+        <p:spPr>
+          <a:xfrm>
+            <a:off x="1133856" y="457200"/>
+            <a:ext cx="10490911" cy="182880"/>
+          </a:xfrm>
+          <a:prstGeom prst="rect">
+            <a:avLst/>
+          </a:prstGeom>
+          <a:noFill/>
+          <a:ln/>
+        </p:spPr>
+        <p:txBody>
+          <a:bodyPr wrap="square" lIns="0" tIns="0" rIns="0" bIns="0" rtlCol="0" anchor="ctr"/>
+          <a:lstStyle/>
+          <a:p>
+            <a:pPr indent="0" marL="0">
+              <a:buNone/>
+            </a:pPr>
+            <a:r>
+              <a:rPr lang="en-US" sz="950" b="1" spc="200" kern="0" dirty="0">
+                <a:solidFill>
+                  <a:srgbClr val="B98A2E"/>
+                </a:solidFill>
+                <a:latin typeface="Arial" pitchFamily="34" charset="0"/>
+                <a:ea typeface="Arial" pitchFamily="34" charset="-122"/>
+                <a:cs typeface="Arial" pitchFamily="34" charset="-120"/>
+              </a:rPr>
+              <a:t>Checklist</a:t>
+            </a:r>
+            <a:endParaRPr lang="en-US" sz="950" dirty="0"/>
+          </a:p>
+        </p:txBody>
+      </p:sp>
+      <p:sp>
+        <p:nvSpPr>
+          <p:cNvPr id="5" name="Text 3"/>
+          <p:cNvSpPr/>
+          <p:nvPr/>
+        </p:nvSpPr>
+        <p:spPr>
+          <a:xfrm>
+            <a:off x="1133856" y="640080"/>
+            <a:ext cx="10490911" cy="365760"/>
+          </a:xfrm>
+          <a:prstGeom prst="rect">
+            <a:avLst/>
+          </a:prstGeom>
+          <a:noFill/>
+          <a:ln/>
+        </p:spPr>
+        <p:txBody>
+          <a:bodyPr wrap="square" lIns="0" tIns="0" rIns="0" bIns="0" rtlCol="0" anchor="ctr"/>
+          <a:lstStyle/>
+          <a:p>
+            <a:pPr indent="0" marL="0">
+              <a:buNone/>
+            </a:pPr>
+            <a:r>
+              <a:rPr lang="en-US" sz="2300" b="1" dirty="0">
+                <a:solidFill>
+                  <a:srgbClr val="10161F"/>
+                </a:solidFill>
+                <a:latin typeface="Pretendard" pitchFamily="34" charset="0"/>
+                <a:ea typeface="Pretendard" pitchFamily="34" charset="-122"/>
+                <a:cs typeface="Pretendard" pitchFamily="34" charset="-120"/>
+              </a:rPr>
+              <a:t>실사 및 확인 필요사항</a:t>
+            </a:r>
+            <a:endParaRPr lang="en-US" sz="2300" dirty="0"/>
+          </a:p>
+        </p:txBody>
+      </p:sp>
+      <p:sp>
+        <p:nvSpPr>
+          <p:cNvPr id="6" name="Text 4"/>
+          <p:cNvSpPr/>
+          <p:nvPr/>
+        </p:nvSpPr>
+        <p:spPr>
+          <a:xfrm>
+            <a:off x="566928" y="1371600"/>
+            <a:ext cx="11057839" cy="237744"/>
+          </a:xfrm>
+          <a:prstGeom prst="rect">
+            <a:avLst/>
+          </a:prstGeom>
+          <a:noFill/>
+          <a:ln/>
+        </p:spPr>
+        <p:txBody>
+          <a:bodyPr wrap="square" lIns="0" tIns="0" rIns="0" bIns="0" rtlCol="0" anchor="ctr"/>
+          <a:lstStyle/>
+          <a:p>
+            <a:pPr indent="0" marL="0">
+              <a:buNone/>
+            </a:pPr>
+            <a:r>
+              <a:rPr lang="en-US" sz="1100" b="1" dirty="0">
+                <a:solidFill>
+                  <a:srgbClr val="10161F"/>
+                </a:solidFill>
+                <a:latin typeface="Pretendard" pitchFamily="34" charset="0"/>
+                <a:ea typeface="Pretendard" pitchFamily="34" charset="-122"/>
+                <a:cs typeface="Pretendard" pitchFamily="34" charset="-120"/>
+              </a:rPr>
+              <a:t>거래 안정성 확보를 위한 필수 법률·물리·임대차 실사 점검 항목 (총 6건)</a:t>
+            </a:r>
+            <a:endParaRPr lang="en-US" sz="1100" dirty="0"/>
+          </a:p>
+        </p:txBody>
+      </p:sp>
+      <p:sp>
+        <p:nvSpPr>
+          <p:cNvPr id="7" name="Shape 5"/>
+          <p:cNvSpPr/>
+          <p:nvPr/>
+        </p:nvSpPr>
+        <p:spPr>
+          <a:xfrm>
+            <a:off x="566928" y="1719072"/>
+            <a:ext cx="5368900" cy="868680"/>
+          </a:xfrm>
+          <a:prstGeom prst="rect">
+            <a:avLst/>
+          </a:prstGeom>
+          <a:solidFill>
+            <a:srgbClr val="F7FAFC"/>
+          </a:solidFill>
+          <a:ln w="6350">
+            <a:solidFill>
+              <a:srgbClr val="D9B668"/>
+            </a:solidFill>
+            <a:prstDash val="solid"/>
+          </a:ln>
+        </p:spPr>
+      </p:sp>
+      <p:sp>
+        <p:nvSpPr>
+          <p:cNvPr id="8" name="Shape 6"/>
+          <p:cNvSpPr/>
+          <p:nvPr/>
+        </p:nvSpPr>
+        <p:spPr>
+          <a:xfrm>
+            <a:off x="704088" y="1883664"/>
+            <a:ext cx="320040" cy="320040"/>
+          </a:xfrm>
+          <a:prstGeom prst="rect">
+            <a:avLst/>
+          </a:prstGeom>
+          <a:solidFill>
+            <a:srgbClr val="977024"/>
+          </a:solidFill>
+          <a:ln/>
+        </p:spPr>
+      </p:sp>
+      <p:sp>
+        <p:nvSpPr>
+          <p:cNvPr id="9" name="Text 7"/>
+          <p:cNvSpPr/>
+          <p:nvPr/>
+        </p:nvSpPr>
+        <p:spPr>
+          <a:xfrm>
+            <a:off x="704088" y="1883664"/>
+            <a:ext cx="320040" cy="320040"/>
+          </a:xfrm>
+          <a:prstGeom prst="rect">
+            <a:avLst/>
+          </a:prstGeom>
+          <a:noFill/>
+          <a:ln/>
+        </p:spPr>
+        <p:txBody>
+          <a:bodyPr wrap="square" rtlCol="0" anchor="ctr"/>
+          <a:lstStyle/>
+          <a:p>
+            <a:pPr algn="ctr" indent="0" marL="0">
+              <a:buNone/>
+            </a:pPr>
+            <a:r>
+              <a:rPr lang="en-US" sz="1100" b="1" dirty="0">
+                <a:solidFill>
+                  <a:srgbClr val="000000"/>
+                </a:solidFill>
+                <a:latin typeface="Pretendard" pitchFamily="34" charset="0"/>
+                <a:ea typeface="Pretendard" pitchFamily="34" charset="-122"/>
+                <a:cs typeface="Pretendard" pitchFamily="34" charset="-120"/>
+              </a:rPr>
+              <a:t>✓</a:t>
+            </a:r>
+            <a:endParaRPr lang="en-US" sz="1100" dirty="0"/>
+          </a:p>
+        </p:txBody>
+      </p:sp>
+      <p:sp>
+        <p:nvSpPr>
+          <p:cNvPr id="10" name="Text 8"/>
+          <p:cNvSpPr/>
+          <p:nvPr/>
+        </p:nvSpPr>
+        <p:spPr>
+          <a:xfrm>
+            <a:off x="1115568" y="1828800"/>
+            <a:ext cx="4683100" cy="685800"/>
+          </a:xfrm>
+          <a:prstGeom prst="rect">
+            <a:avLst/>
+          </a:prstGeom>
+          <a:noFill/>
+          <a:ln/>
+        </p:spPr>
+        <p:txBody>
+          <a:bodyPr wrap="square" rtlCol="0" anchor="ctr"/>
+          <a:lstStyle/>
+          <a:p>
+            <a:pPr indent="0" marL="0">
+              <a:lnSpc>
+                <a:spcPct val="115000"/>
+              </a:lnSpc>
+              <a:buNone/>
+            </a:pPr>
+            <a:r>
+              <a:rPr lang="en-US" sz="1050" dirty="0">
+                <a:solidFill>
+                  <a:srgbClr val="10161F"/>
+                </a:solidFill>
+                <a:latin typeface="Pretendard" pitchFamily="34" charset="0"/>
+                <a:ea typeface="Pretendard" pitchFamily="34" charset="-122"/>
+                <a:cs typeface="Pretendard" pitchFamily="34" charset="-120"/>
+              </a:rPr>
+              <a:t>등기부등본 갑구/을구 권리관계 및 근저당 채권최고액 전액 말소 조건 원본 대조</a:t>
+            </a:r>
+            <a:endParaRPr lang="en-US" sz="1050" dirty="0"/>
+          </a:p>
+        </p:txBody>
+      </p:sp>
+      <p:sp>
+        <p:nvSpPr>
+          <p:cNvPr id="11" name="Shape 9"/>
+          <p:cNvSpPr/>
+          <p:nvPr/>
+        </p:nvSpPr>
+        <p:spPr>
+          <a:xfrm>
+            <a:off x="566928" y="2715768"/>
+            <a:ext cx="5368900" cy="868680"/>
+          </a:xfrm>
+          <a:prstGeom prst="rect">
+            <a:avLst/>
+          </a:prstGeom>
+          <a:solidFill>
+            <a:srgbClr val="F7FAFC"/>
+          </a:solidFill>
+          <a:ln w="6350">
+            <a:solidFill>
+              <a:srgbClr val="D9B668"/>
+            </a:solidFill>
+            <a:prstDash val="solid"/>
+          </a:ln>
+        </p:spPr>
+      </p:sp>
+      <p:sp>
+        <p:nvSpPr>
+          <p:cNvPr id="12" name="Shape 10"/>
+          <p:cNvSpPr/>
+          <p:nvPr/>
+        </p:nvSpPr>
+        <p:spPr>
+          <a:xfrm>
+            <a:off x="704088" y="2880360"/>
+            <a:ext cx="320040" cy="320040"/>
+          </a:xfrm>
+          <a:prstGeom prst="rect">
+            <a:avLst/>
+          </a:prstGeom>
+          <a:solidFill>
+            <a:srgbClr val="977024"/>
+          </a:solidFill>
+          <a:ln/>
+        </p:spPr>
+      </p:sp>
+      <p:sp>
+        <p:nvSpPr>
+          <p:cNvPr id="13" name="Text 11"/>
+          <p:cNvSpPr/>
+          <p:nvPr/>
+        </p:nvSpPr>
+        <p:spPr>
+          <a:xfrm>
+            <a:off x="704088" y="2880360"/>
+            <a:ext cx="320040" cy="320040"/>
+          </a:xfrm>
+          <a:prstGeom prst="rect">
+            <a:avLst/>
+          </a:prstGeom>
+          <a:noFill/>
+          <a:ln/>
+        </p:spPr>
+        <p:txBody>
+          <a:bodyPr wrap="square" rtlCol="0" anchor="ctr"/>
+          <a:lstStyle/>
+          <a:p>
+            <a:pPr algn="ctr" indent="0" marL="0">
+              <a:buNone/>
+            </a:pPr>
+            <a:r>
+              <a:rPr lang="en-US" sz="1100" b="1" dirty="0">
+                <a:solidFill>
+                  <a:srgbClr val="000000"/>
+                </a:solidFill>
+                <a:latin typeface="Pretendard" pitchFamily="34" charset="0"/>
+                <a:ea typeface="Pretendard" pitchFamily="34" charset="-122"/>
+                <a:cs typeface="Pretendard" pitchFamily="34" charset="-120"/>
+              </a:rPr>
+              <a:t>✓</a:t>
+            </a:r>
+            <a:endParaRPr lang="en-US" sz="1100" dirty="0"/>
+          </a:p>
+        </p:txBody>
+      </p:sp>
+      <p:sp>
+        <p:nvSpPr>
+          <p:cNvPr id="14" name="Text 12"/>
+          <p:cNvSpPr/>
+          <p:nvPr/>
+        </p:nvSpPr>
+        <p:spPr>
+          <a:xfrm>
+            <a:off x="1115568" y="2825496"/>
+            <a:ext cx="4683100" cy="685800"/>
+          </a:xfrm>
+          <a:prstGeom prst="rect">
+            <a:avLst/>
+          </a:prstGeom>
+          <a:noFill/>
+          <a:ln/>
+        </p:spPr>
+        <p:txBody>
+          <a:bodyPr wrap="square" rtlCol="0" anchor="ctr"/>
+          <a:lstStyle/>
+          <a:p>
+            <a:pPr indent="0" marL="0">
+              <a:lnSpc>
+                <a:spcPct val="115000"/>
+              </a:lnSpc>
+              <a:buNone/>
+            </a:pPr>
+            <a:r>
+              <a:rPr lang="en-US" sz="1050" dirty="0">
+                <a:solidFill>
+                  <a:srgbClr val="10161F"/>
+                </a:solidFill>
+                <a:latin typeface="Pretendard" pitchFamily="34" charset="0"/>
+                <a:ea typeface="Pretendard" pitchFamily="34" charset="-122"/>
+                <a:cs typeface="Pretendard" pitchFamily="34" charset="-120"/>
+              </a:rPr>
+              <a:t>임대차 원본 계약서 대조 (보증금, 월임대료, 관리비 실입금 내역 및 제소전화해조서)</a:t>
+            </a:r>
+            <a:endParaRPr lang="en-US" sz="1050" dirty="0"/>
+          </a:p>
+        </p:txBody>
+      </p:sp>
+      <p:sp>
+        <p:nvSpPr>
+          <p:cNvPr id="15" name="Shape 13"/>
+          <p:cNvSpPr/>
+          <p:nvPr/>
+        </p:nvSpPr>
+        <p:spPr>
+          <a:xfrm>
+            <a:off x="566928" y="3712464"/>
+            <a:ext cx="5368900" cy="868680"/>
+          </a:xfrm>
+          <a:prstGeom prst="rect">
+            <a:avLst/>
+          </a:prstGeom>
+          <a:solidFill>
+            <a:srgbClr val="F7FAFC"/>
+          </a:solidFill>
+          <a:ln w="6350">
+            <a:solidFill>
+              <a:srgbClr val="D9B668"/>
+            </a:solidFill>
+            <a:prstDash val="solid"/>
+          </a:ln>
+        </p:spPr>
+      </p:sp>
+      <p:sp>
+        <p:nvSpPr>
+          <p:cNvPr id="16" name="Shape 14"/>
+          <p:cNvSpPr/>
+          <p:nvPr/>
+        </p:nvSpPr>
+        <p:spPr>
+          <a:xfrm>
+            <a:off x="704088" y="3877056"/>
+            <a:ext cx="320040" cy="320040"/>
+          </a:xfrm>
+          <a:prstGeom prst="rect">
+            <a:avLst/>
+          </a:prstGeom>
+          <a:solidFill>
+            <a:srgbClr val="977024"/>
+          </a:solidFill>
+          <a:ln/>
+        </p:spPr>
+      </p:sp>
+      <p:sp>
+        <p:nvSpPr>
+          <p:cNvPr id="17" name="Text 15"/>
+          <p:cNvSpPr/>
+          <p:nvPr/>
+        </p:nvSpPr>
+        <p:spPr>
+          <a:xfrm>
+            <a:off x="704088" y="3877056"/>
+            <a:ext cx="320040" cy="320040"/>
+          </a:xfrm>
+          <a:prstGeom prst="rect">
+            <a:avLst/>
+          </a:prstGeom>
+          <a:noFill/>
+          <a:ln/>
+        </p:spPr>
+        <p:txBody>
+          <a:bodyPr wrap="square" rtlCol="0" anchor="ctr"/>
+          <a:lstStyle/>
+          <a:p>
+            <a:pPr algn="ctr" indent="0" marL="0">
+              <a:buNone/>
+            </a:pPr>
+            <a:r>
+              <a:rPr lang="en-US" sz="1100" b="1" dirty="0">
+                <a:solidFill>
+                  <a:srgbClr val="000000"/>
+                </a:solidFill>
+                <a:latin typeface="Pretendard" pitchFamily="34" charset="0"/>
+                <a:ea typeface="Pretendard" pitchFamily="34" charset="-122"/>
+                <a:cs typeface="Pretendard" pitchFamily="34" charset="-120"/>
+              </a:rPr>
+              <a:t>✓</a:t>
+            </a:r>
+            <a:endParaRPr lang="en-US" sz="1100" dirty="0"/>
+          </a:p>
+        </p:txBody>
+      </p:sp>
+      <p:sp>
+        <p:nvSpPr>
+          <p:cNvPr id="18" name="Text 16"/>
+          <p:cNvSpPr/>
+          <p:nvPr/>
+        </p:nvSpPr>
+        <p:spPr>
+          <a:xfrm>
+            <a:off x="1115568" y="3822192"/>
+            <a:ext cx="4683100" cy="685800"/>
+          </a:xfrm>
+          <a:prstGeom prst="rect">
+            <a:avLst/>
+          </a:prstGeom>
+          <a:noFill/>
+          <a:ln/>
+        </p:spPr>
+        <p:txBody>
+          <a:bodyPr wrap="square" rtlCol="0" anchor="ctr"/>
+          <a:lstStyle/>
+          <a:p>
+            <a:pPr indent="0" marL="0">
+              <a:lnSpc>
+                <a:spcPct val="115000"/>
+              </a:lnSpc>
+              <a:buNone/>
+            </a:pPr>
+            <a:r>
+              <a:rPr lang="en-US" sz="1050" dirty="0">
+                <a:solidFill>
+                  <a:srgbClr val="10161F"/>
+                </a:solidFill>
+                <a:latin typeface="Pretendard" pitchFamily="34" charset="0"/>
+                <a:ea typeface="Pretendard" pitchFamily="34" charset="-122"/>
+                <a:cs typeface="Pretendard" pitchFamily="34" charset="-120"/>
+              </a:rPr>
+              <a:t>건축물대장상 위반건축물 등재 여부 및 불법 증축·용도변경 이행강제금 납부 이력 점검</a:t>
+            </a:r>
+            <a:endParaRPr lang="en-US" sz="1050" dirty="0"/>
+          </a:p>
+        </p:txBody>
+      </p:sp>
+      <p:sp>
+        <p:nvSpPr>
+          <p:cNvPr id="19" name="Shape 17"/>
+          <p:cNvSpPr/>
+          <p:nvPr/>
+        </p:nvSpPr>
+        <p:spPr>
+          <a:xfrm>
+            <a:off x="6255868" y="1719072"/>
+            <a:ext cx="5368900" cy="868680"/>
+          </a:xfrm>
+          <a:prstGeom prst="rect">
+            <a:avLst/>
+          </a:prstGeom>
+          <a:solidFill>
+            <a:srgbClr val="F7FAFC"/>
+          </a:solidFill>
+          <a:ln w="6350">
+            <a:solidFill>
+              <a:srgbClr val="D9B668"/>
+            </a:solidFill>
+            <a:prstDash val="solid"/>
+          </a:ln>
+        </p:spPr>
+      </p:sp>
+      <p:sp>
+        <p:nvSpPr>
+          <p:cNvPr id="20" name="Shape 18"/>
+          <p:cNvSpPr/>
+          <p:nvPr/>
+        </p:nvSpPr>
+        <p:spPr>
+          <a:xfrm>
+            <a:off x="6393028" y="1883664"/>
+            <a:ext cx="320040" cy="320040"/>
+          </a:xfrm>
+          <a:prstGeom prst="rect">
+            <a:avLst/>
+          </a:prstGeom>
+          <a:solidFill>
+            <a:srgbClr val="977024"/>
+          </a:solidFill>
+          <a:ln/>
+        </p:spPr>
+      </p:sp>
+      <p:sp>
+        <p:nvSpPr>
+          <p:cNvPr id="21" name="Text 19"/>
+          <p:cNvSpPr/>
+          <p:nvPr/>
+        </p:nvSpPr>
+        <p:spPr>
+          <a:xfrm>
+            <a:off x="6393028" y="1883664"/>
+            <a:ext cx="320040" cy="320040"/>
+          </a:xfrm>
+          <a:prstGeom prst="rect">
+            <a:avLst/>
+          </a:prstGeom>
+          <a:noFill/>
+          <a:ln/>
+        </p:spPr>
+        <p:txBody>
+          <a:bodyPr wrap="square" rtlCol="0" anchor="ctr"/>
+          <a:lstStyle/>
+          <a:p>
+            <a:pPr algn="ctr" indent="0" marL="0">
+              <a:buNone/>
+            </a:pPr>
+            <a:r>
+              <a:rPr lang="en-US" sz="1100" b="1" dirty="0">
+                <a:solidFill>
+                  <a:srgbClr val="000000"/>
+                </a:solidFill>
+                <a:latin typeface="Pretendard" pitchFamily="34" charset="0"/>
+                <a:ea typeface="Pretendard" pitchFamily="34" charset="-122"/>
+                <a:cs typeface="Pretendard" pitchFamily="34" charset="-120"/>
+              </a:rPr>
+              <a:t>✓</a:t>
+            </a:r>
+            <a:endParaRPr lang="en-US" sz="1100" dirty="0"/>
+          </a:p>
+        </p:txBody>
+      </p:sp>
+      <p:sp>
+        <p:nvSpPr>
+          <p:cNvPr id="22" name="Text 20"/>
+          <p:cNvSpPr/>
+          <p:nvPr/>
+        </p:nvSpPr>
+        <p:spPr>
+          <a:xfrm>
+            <a:off x="6804508" y="1828800"/>
+            <a:ext cx="4683100" cy="685800"/>
+          </a:xfrm>
+          <a:prstGeom prst="rect">
+            <a:avLst/>
+          </a:prstGeom>
+          <a:noFill/>
+          <a:ln/>
+        </p:spPr>
+        <p:txBody>
+          <a:bodyPr wrap="square" rtlCol="0" anchor="ctr"/>
+          <a:lstStyle/>
+          <a:p>
+            <a:pPr indent="0" marL="0">
+              <a:lnSpc>
+                <a:spcPct val="115000"/>
+              </a:lnSpc>
+              <a:buNone/>
+            </a:pPr>
+            <a:r>
+              <a:rPr lang="en-US" sz="1050" dirty="0">
+                <a:solidFill>
+                  <a:srgbClr val="10161F"/>
+                </a:solidFill>
+                <a:latin typeface="Pretendard" pitchFamily="34" charset="0"/>
+                <a:ea typeface="Pretendard" pitchFamily="34" charset="-122"/>
+                <a:cs typeface="Pretendard" pitchFamily="34" charset="-120"/>
+              </a:rPr>
+              <a:t>토지이용계획확인원상 도시계획시설 저촉, 건축선 후퇴, 지구단위계획 특별계획구역 확인</a:t>
+            </a:r>
+            <a:endParaRPr lang="en-US" sz="1050" dirty="0"/>
+          </a:p>
+        </p:txBody>
+      </p:sp>
+      <p:sp>
+        <p:nvSpPr>
+          <p:cNvPr id="23" name="Shape 21"/>
+          <p:cNvSpPr/>
+          <p:nvPr/>
+        </p:nvSpPr>
+        <p:spPr>
+          <a:xfrm>
+            <a:off x="6255868" y="2715768"/>
+            <a:ext cx="5368900" cy="868680"/>
+          </a:xfrm>
+          <a:prstGeom prst="rect">
+            <a:avLst/>
+          </a:prstGeom>
+          <a:solidFill>
+            <a:srgbClr val="F7FAFC"/>
+          </a:solidFill>
+          <a:ln w="6350">
+            <a:solidFill>
+              <a:srgbClr val="D9B668"/>
+            </a:solidFill>
+            <a:prstDash val="solid"/>
+          </a:ln>
+        </p:spPr>
+      </p:sp>
+      <p:sp>
+        <p:nvSpPr>
+          <p:cNvPr id="24" name="Shape 22"/>
+          <p:cNvSpPr/>
+          <p:nvPr/>
+        </p:nvSpPr>
+        <p:spPr>
+          <a:xfrm>
+            <a:off x="6393028" y="2880360"/>
+            <a:ext cx="320040" cy="320040"/>
+          </a:xfrm>
+          <a:prstGeom prst="rect">
+            <a:avLst/>
+          </a:prstGeom>
+          <a:solidFill>
+            <a:srgbClr val="977024"/>
+          </a:solidFill>
+          <a:ln/>
+        </p:spPr>
+      </p:sp>
+      <p:sp>
+        <p:nvSpPr>
+          <p:cNvPr id="25" name="Text 23"/>
+          <p:cNvSpPr/>
+          <p:nvPr/>
+        </p:nvSpPr>
+        <p:spPr>
+          <a:xfrm>
+            <a:off x="6393028" y="2880360"/>
+            <a:ext cx="320040" cy="320040"/>
+          </a:xfrm>
+          <a:prstGeom prst="rect">
+            <a:avLst/>
+          </a:prstGeom>
+          <a:noFill/>
+          <a:ln/>
+        </p:spPr>
+        <p:txBody>
+          <a:bodyPr wrap="square" rtlCol="0" anchor="ctr"/>
+          <a:lstStyle/>
+          <a:p>
+            <a:pPr algn="ctr" indent="0" marL="0">
+              <a:buNone/>
+            </a:pPr>
+            <a:r>
+              <a:rPr lang="en-US" sz="1100" b="1" dirty="0">
+                <a:solidFill>
+                  <a:srgbClr val="000000"/>
+                </a:solidFill>
+                <a:latin typeface="Pretendard" pitchFamily="34" charset="0"/>
+                <a:ea typeface="Pretendard" pitchFamily="34" charset="-122"/>
+                <a:cs typeface="Pretendard" pitchFamily="34" charset="-120"/>
+              </a:rPr>
+              <a:t>✓</a:t>
+            </a:r>
+            <a:endParaRPr lang="en-US" sz="1100" dirty="0"/>
+          </a:p>
+        </p:txBody>
+      </p:sp>
+      <p:sp>
+        <p:nvSpPr>
+          <p:cNvPr id="26" name="Text 24"/>
+          <p:cNvSpPr/>
+          <p:nvPr/>
+        </p:nvSpPr>
+        <p:spPr>
+          <a:xfrm>
+            <a:off x="6804508" y="2825496"/>
+            <a:ext cx="4683100" cy="685800"/>
+          </a:xfrm>
+          <a:prstGeom prst="rect">
+            <a:avLst/>
+          </a:prstGeom>
+          <a:noFill/>
+          <a:ln/>
+        </p:spPr>
+        <p:txBody>
+          <a:bodyPr wrap="square" rtlCol="0" anchor="ctr"/>
+          <a:lstStyle/>
+          <a:p>
+            <a:pPr indent="0" marL="0">
+              <a:lnSpc>
+                <a:spcPct val="115000"/>
+              </a:lnSpc>
+              <a:buNone/>
+            </a:pPr>
+            <a:r>
+              <a:rPr lang="en-US" sz="1050" dirty="0">
+                <a:solidFill>
+                  <a:srgbClr val="10161F"/>
+                </a:solidFill>
+                <a:latin typeface="Pretendard" pitchFamily="34" charset="0"/>
+                <a:ea typeface="Pretendard" pitchFamily="34" charset="-122"/>
+                <a:cs typeface="Pretendard" pitchFamily="34" charset="-120"/>
+              </a:rPr>
+              <a:t>기계식 주차기 정기 안전점검 합격증, 승강기 검사필증, 소방 완비증명서 실물 실사</a:t>
+            </a:r>
+            <a:endParaRPr lang="en-US" sz="1050" dirty="0"/>
+          </a:p>
+        </p:txBody>
+      </p:sp>
+      <p:sp>
+        <p:nvSpPr>
+          <p:cNvPr id="27" name="Shape 25"/>
+          <p:cNvSpPr/>
+          <p:nvPr/>
+        </p:nvSpPr>
+        <p:spPr>
+          <a:xfrm>
+            <a:off x="6255868" y="3712464"/>
+            <a:ext cx="5368900" cy="868680"/>
+          </a:xfrm>
+          <a:prstGeom prst="rect">
+            <a:avLst/>
+          </a:prstGeom>
+          <a:solidFill>
+            <a:srgbClr val="F7FAFC"/>
+          </a:solidFill>
+          <a:ln w="6350">
+            <a:solidFill>
+              <a:srgbClr val="D9B668"/>
+            </a:solidFill>
+            <a:prstDash val="solid"/>
+          </a:ln>
+        </p:spPr>
+      </p:sp>
+      <p:sp>
+        <p:nvSpPr>
+          <p:cNvPr id="28" name="Shape 26"/>
+          <p:cNvSpPr/>
+          <p:nvPr/>
+        </p:nvSpPr>
+        <p:spPr>
+          <a:xfrm>
+            <a:off x="6393028" y="3877056"/>
+            <a:ext cx="320040" cy="320040"/>
+          </a:xfrm>
+          <a:prstGeom prst="rect">
+            <a:avLst/>
+          </a:prstGeom>
+          <a:solidFill>
+            <a:srgbClr val="977024"/>
+          </a:solidFill>
+          <a:ln/>
+        </p:spPr>
+      </p:sp>
+      <p:sp>
+        <p:nvSpPr>
+          <p:cNvPr id="29" name="Text 27"/>
+          <p:cNvSpPr/>
+          <p:nvPr/>
+        </p:nvSpPr>
+        <p:spPr>
+          <a:xfrm>
+            <a:off x="6393028" y="3877056"/>
+            <a:ext cx="320040" cy="320040"/>
+          </a:xfrm>
+          <a:prstGeom prst="rect">
+            <a:avLst/>
+          </a:prstGeom>
+          <a:noFill/>
+          <a:ln/>
+        </p:spPr>
+        <p:txBody>
+          <a:bodyPr wrap="square" rtlCol="0" anchor="ctr"/>
+          <a:lstStyle/>
+          <a:p>
+            <a:pPr algn="ctr" indent="0" marL="0">
+              <a:buNone/>
+            </a:pPr>
+            <a:r>
+              <a:rPr lang="en-US" sz="1100" b="1" dirty="0">
+                <a:solidFill>
+                  <a:srgbClr val="000000"/>
+                </a:solidFill>
+                <a:latin typeface="Pretendard" pitchFamily="34" charset="0"/>
+                <a:ea typeface="Pretendard" pitchFamily="34" charset="-122"/>
+                <a:cs typeface="Pretendard" pitchFamily="34" charset="-120"/>
+              </a:rPr>
+              <a:t>✓</a:t>
+            </a:r>
+            <a:endParaRPr lang="en-US" sz="1100" dirty="0"/>
+          </a:p>
+        </p:txBody>
+      </p:sp>
+      <p:sp>
+        <p:nvSpPr>
+          <p:cNvPr id="30" name="Text 28"/>
+          <p:cNvSpPr/>
+          <p:nvPr/>
+        </p:nvSpPr>
+        <p:spPr>
+          <a:xfrm>
+            <a:off x="6804508" y="3822192"/>
+            <a:ext cx="4683100" cy="685800"/>
+          </a:xfrm>
+          <a:prstGeom prst="rect">
+            <a:avLst/>
+          </a:prstGeom>
+          <a:noFill/>
+          <a:ln/>
+        </p:spPr>
+        <p:txBody>
+          <a:bodyPr wrap="square" rtlCol="0" anchor="ctr"/>
+          <a:lstStyle/>
+          <a:p>
+            <a:pPr indent="0" marL="0">
+              <a:lnSpc>
+                <a:spcPct val="115000"/>
+              </a:lnSpc>
+              <a:buNone/>
+            </a:pPr>
+            <a:r>
+              <a:rPr lang="en-US" sz="1050" dirty="0">
+                <a:solidFill>
+                  <a:srgbClr val="10161F"/>
+                </a:solidFill>
+                <a:latin typeface="Pretendard" pitchFamily="34" charset="0"/>
+                <a:ea typeface="Pretendard" pitchFamily="34" charset="-122"/>
+                <a:cs typeface="Pretendard" pitchFamily="34" charset="-120"/>
+              </a:rPr>
+              <a:t>정화조 용량 대비 현 업종 적합성 및 하수도 원인자부담금 추가 부과 대상 여부 확인</a:t>
+            </a:r>
+            <a:endParaRPr lang="en-US" sz="1050" dirty="0"/>
+          </a:p>
+        </p:txBody>
+      </p:sp>
+      <p:sp>
+        <p:nvSpPr>
+          <p:cNvPr id="31" name="Shape 29"/>
+          <p:cNvSpPr/>
+          <p:nvPr/>
+        </p:nvSpPr>
+        <p:spPr>
+          <a:xfrm>
+            <a:off x="566928" y="5760720"/>
+            <a:ext cx="11057839" cy="594360"/>
+          </a:xfrm>
+          <a:prstGeom prst="rect">
+            <a:avLst/>
+          </a:prstGeom>
+          <a:solidFill>
+            <a:srgbClr val="D9B668"/>
+          </a:solidFill>
+          <a:ln/>
+        </p:spPr>
+      </p:sp>
+      <p:sp>
+        <p:nvSpPr>
+          <p:cNvPr id="32" name="Text 30"/>
+          <p:cNvSpPr/>
+          <p:nvPr/>
+        </p:nvSpPr>
+        <p:spPr>
+          <a:xfrm>
+            <a:off x="749808" y="5833872"/>
+            <a:ext cx="10692079" cy="448056"/>
+          </a:xfrm>
+          <a:prstGeom prst="rect">
+            <a:avLst/>
+          </a:prstGeom>
+          <a:noFill/>
+          <a:ln/>
+        </p:spPr>
+        <p:txBody>
+          <a:bodyPr wrap="square" rtlCol="0" anchor="ctr"/>
+          <a:lstStyle/>
+          <a:p>
+            <a:pPr indent="0" marL="0">
+              <a:buNone/>
+            </a:pPr>
+            <a:r>
+              <a:rPr lang="en-US" sz="950" b="1" dirty="0">
+                <a:solidFill>
+                  <a:srgbClr val="977024"/>
+                </a:solidFill>
+                <a:latin typeface="Pretendard" pitchFamily="34" charset="0"/>
+                <a:ea typeface="Pretendard" pitchFamily="34" charset="-122"/>
+                <a:cs typeface="Pretendard" pitchFamily="34" charset="-120"/>
+              </a:rPr>
+              <a:t>※ 본 체크리스트는 계약 전 매수인의 안전한 자산 인수를 위한 필수 확인 사항이며, 실사(Due Diligence) 결과에 따라 매매 조건 및 잔금 일정이 조정될 수 있습니다.</a:t>
+            </a:r>
+            <a:endParaRPr lang="en-US" sz="950" dirty="0"/>
+          </a:p>
+        </p:txBody>
+      </p:sp>
+      <p:sp>
+        <p:nvSpPr>
+          <p:cNvPr id="33" name="Text 31"/>
+          <p:cNvSpPr/>
+          <p:nvPr/>
+        </p:nvSpPr>
+        <p:spPr>
+          <a:xfrm>
+            <a:off x="566928" y="6382512"/>
+            <a:ext cx="7315200" cy="219456"/>
+          </a:xfrm>
+          <a:prstGeom prst="rect">
+            <a:avLst/>
+          </a:prstGeom>
+          <a:noFill/>
+          <a:ln/>
+        </p:spPr>
+        <p:txBody>
+          <a:bodyPr wrap="square" lIns="0" tIns="0" rIns="0" bIns="0" rtlCol="0" anchor="ctr"/>
+          <a:lstStyle/>
+          <a:p>
+            <a:pPr indent="0" marL="0">
+              <a:buNone/>
+            </a:pPr>
+            <a:r>
+              <a:rPr lang="en-US" sz="800" dirty="0">
+                <a:solidFill>
+                  <a:srgbClr val="718096"/>
+                </a:solidFill>
+                <a:latin typeface="Pretendard" pitchFamily="34" charset="0"/>
+                <a:ea typeface="Pretendard" pitchFamily="34" charset="-122"/>
+                <a:cs typeface="Pretendard" pitchFamily="34" charset="-120"/>
+              </a:rPr>
+              <a:t>크리딜   |   </a:t>
+            </a:r>
+            <a:endParaRPr lang="en-US" sz="800" dirty="0"/>
+          </a:p>
+        </p:txBody>
+      </p:sp>
+      <p:sp>
+        <p:nvSpPr>
+          <p:cNvPr id="34" name="Text 32"/>
+          <p:cNvSpPr/>
+          <p:nvPr/>
+        </p:nvSpPr>
+        <p:spPr>
+          <a:xfrm>
+            <a:off x="10710367" y="6382512"/>
+            <a:ext cx="914400" cy="219456"/>
+          </a:xfrm>
+          <a:prstGeom prst="rect">
+            <a:avLst/>
+          </a:prstGeom>
+          <a:noFill/>
+          <a:ln/>
+        </p:spPr>
+        <p:txBody>
+          <a:bodyPr wrap="square" lIns="0" tIns="0" rIns="0" bIns="0" rtlCol="0" anchor="ctr"/>
+          <a:lstStyle/>
+          <a:p>
+            <a:pPr algn="r" indent="0" marL="0">
+              <a:buNone/>
+            </a:pPr>
+            <a:r>
+              <a:rPr lang="en-US" sz="900" b="1" dirty="0">
+                <a:solidFill>
+                  <a:srgbClr val="B98A2E"/>
+                </a:solidFill>
+                <a:latin typeface="Arial" pitchFamily="34" charset="0"/>
+                <a:ea typeface="Arial" pitchFamily="34" charset="-122"/>
+                <a:cs typeface="Arial" pitchFamily="34" charset="-120"/>
+              </a:rPr>
+              <a:t>10</a:t>
+            </a:r>
+            <a:endParaRPr lang="en-US" sz="900" dirty="0"/>
+          </a:p>
+        </p:txBody>
+      </p:sp>
+    </p:spTree>
+  </p:cSld>
+  <p:clrMapOvr>
+    <a:masterClrMapping/>
+  </p:clrMapOvr>
+</p:sld>
+</file>
+
+<file path=ppt/slides/slide13.xml><?xml version="1.0" encoding="utf-8"?>
+<p:sld xmlns:a="http://schemas.openxmlformats.org/drawingml/2006/main" xmlns:r="http://schemas.openxmlformats.org/officeDocument/2006/relationships" xmlns:p="http://schemas.openxmlformats.org/presentationml/2006/main">
+  <p:cSld name="Slide 13">
+    <p:bg>
+      <p:bgPr>
+        <a:solidFill>
+          <a:srgbClr val="FFFFFF"/>
+        </a:solidFill>
+      </p:bgPr>
+    </p:bg>
+    <p:spTree>
+      <p:nvGrpSpPr>
+        <p:cNvPr id="1" name=""/>
+        <p:cNvGrpSpPr/>
+        <p:nvPr/>
+      </p:nvGrpSpPr>
+      <p:grpSpPr>
+        <a:xfrm>
+          <a:off x="0" y="0"/>
+          <a:ext cx="0" cy="0"/>
+          <a:chOff x="0" y="0"/>
+          <a:chExt cx="0" cy="0"/>
+        </a:xfrm>
+      </p:grpSpPr>
+      <p:sp>
+        <p:nvSpPr>
+          <p:cNvPr id="2" name="Shape 0"/>
+          <p:cNvSpPr/>
+          <p:nvPr/>
+        </p:nvSpPr>
+        <p:spPr>
+          <a:xfrm>
+            <a:off x="566928" y="457200"/>
+            <a:ext cx="384048" cy="384048"/>
+          </a:xfrm>
+          <a:prstGeom prst="ellipse">
+            <a:avLst/>
+          </a:prstGeom>
+          <a:solidFill>
+            <a:srgbClr val="B98A2E"/>
+          </a:solidFill>
+          <a:ln/>
+        </p:spPr>
+      </p:sp>
+      <p:sp>
+        <p:nvSpPr>
+          <p:cNvPr id="3" name="Text 1"/>
+          <p:cNvSpPr/>
+          <p:nvPr/>
+        </p:nvSpPr>
+        <p:spPr>
+          <a:xfrm>
+            <a:off x="566928" y="457200"/>
+            <a:ext cx="384048" cy="384048"/>
+          </a:xfrm>
+          <a:prstGeom prst="rect">
+            <a:avLst/>
+          </a:prstGeom>
+          <a:noFill/>
+          <a:ln/>
+        </p:spPr>
+        <p:txBody>
+          <a:bodyPr wrap="square" lIns="0" tIns="0" rIns="0" bIns="0" rtlCol="0" anchor="ctr"/>
+          <a:lstStyle/>
+          <a:p>
+            <a:pPr algn="ctr" indent="0" marL="0">
+              <a:buNone/>
+            </a:pPr>
+            <a:r>
+              <a:rPr lang="en-US" sz="1300" b="1" dirty="0">
+                <a:solidFill>
+                  <a:srgbClr val="FFFFFF"/>
+                </a:solidFill>
+                <a:latin typeface="Arial" pitchFamily="34" charset="0"/>
+                <a:ea typeface="Arial" pitchFamily="34" charset="-122"/>
+                <a:cs typeface="Arial" pitchFamily="34" charset="-120"/>
+              </a:rPr>
+              <a:t>11</a:t>
+            </a:r>
+            <a:endParaRPr lang="en-US" sz="1300" dirty="0"/>
+          </a:p>
+        </p:txBody>
+      </p:sp>
+      <p:sp>
+        <p:nvSpPr>
+          <p:cNvPr id="4" name="Text 2"/>
+          <p:cNvSpPr/>
+          <p:nvPr/>
+        </p:nvSpPr>
+        <p:spPr>
+          <a:xfrm>
+            <a:off x="1133856" y="457200"/>
+            <a:ext cx="10490911" cy="182880"/>
+          </a:xfrm>
+          <a:prstGeom prst="rect">
+            <a:avLst/>
+          </a:prstGeom>
+          <a:noFill/>
+          <a:ln/>
+        </p:spPr>
+        <p:txBody>
+          <a:bodyPr wrap="square" lIns="0" tIns="0" rIns="0" bIns="0" rtlCol="0" anchor="ctr"/>
+          <a:lstStyle/>
+          <a:p>
+            <a:pPr indent="0" marL="0">
+              <a:buNone/>
+            </a:pPr>
+            <a:r>
+              <a:rPr lang="en-US" sz="950" b="1" spc="200" kern="0" dirty="0">
+                <a:solidFill>
+                  <a:srgbClr val="B98A2E"/>
+                </a:solidFill>
+                <a:latin typeface="Arial" pitchFamily="34" charset="0"/>
+                <a:ea typeface="Arial" pitchFamily="34" charset="-122"/>
+                <a:cs typeface="Arial" pitchFamily="34" charset="-120"/>
+              </a:rPr>
+              <a:t>Process</a:t>
+            </a:r>
+            <a:endParaRPr lang="en-US" sz="950" dirty="0"/>
+          </a:p>
+        </p:txBody>
+      </p:sp>
+      <p:sp>
+        <p:nvSpPr>
+          <p:cNvPr id="5" name="Text 3"/>
+          <p:cNvSpPr/>
+          <p:nvPr/>
+        </p:nvSpPr>
+        <p:spPr>
+          <a:xfrm>
+            <a:off x="1133856" y="640080"/>
+            <a:ext cx="10490911" cy="365760"/>
+          </a:xfrm>
+          <a:prstGeom prst="rect">
+            <a:avLst/>
+          </a:prstGeom>
+          <a:noFill/>
+          <a:ln/>
+        </p:spPr>
+        <p:txBody>
+          <a:bodyPr wrap="square" lIns="0" tIns="0" rIns="0" bIns="0" rtlCol="0" anchor="ctr"/>
+          <a:lstStyle/>
+          <a:p>
+            <a:pPr indent="0" marL="0">
+              <a:buNone/>
+            </a:pPr>
+            <a:r>
+              <a:rPr lang="en-US" sz="2300" b="1" dirty="0">
+                <a:solidFill>
+                  <a:srgbClr val="10161F"/>
+                </a:solidFill>
+                <a:latin typeface="Pretendard" pitchFamily="34" charset="0"/>
+                <a:ea typeface="Pretendard" pitchFamily="34" charset="-122"/>
+                <a:cs typeface="Pretendard" pitchFamily="34" charset="-120"/>
+              </a:rPr>
+              <a:t>검토 후 다음 단계는 무엇인가</a:t>
+            </a:r>
+            <a:endParaRPr lang="en-US" sz="2300" dirty="0"/>
+          </a:p>
+        </p:txBody>
+      </p:sp>
+      <p:sp>
+        <p:nvSpPr>
+          <p:cNvPr id="6" name="Shape 4"/>
+          <p:cNvSpPr/>
+          <p:nvPr/>
+        </p:nvSpPr>
+        <p:spPr>
+          <a:xfrm>
+            <a:off x="566928" y="1572768"/>
+            <a:ext cx="11057839" cy="3200400"/>
+          </a:xfrm>
+          <a:prstGeom prst="roundRect">
+            <a:avLst>
+              <a:gd name="adj" fmla="val 1714"/>
+            </a:avLst>
+          </a:prstGeom>
+          <a:solidFill>
+            <a:srgbClr val="F7FAFC"/>
+          </a:solidFill>
+          <a:ln w="6350">
+            <a:solidFill>
+              <a:srgbClr val="CBD5E0"/>
+            </a:solidFill>
+            <a:prstDash val="solid"/>
+          </a:ln>
+        </p:spPr>
+      </p:sp>
+      <p:sp>
+        <p:nvSpPr>
+          <p:cNvPr id="7" name="Shape 5"/>
+          <p:cNvSpPr/>
+          <p:nvPr/>
+        </p:nvSpPr>
+        <p:spPr>
+          <a:xfrm>
+            <a:off x="786384" y="1792224"/>
+            <a:ext cx="438912" cy="438912"/>
+          </a:xfrm>
+          <a:prstGeom prst="ellipse">
+            <a:avLst/>
+          </a:prstGeom>
+          <a:solidFill>
+            <a:srgbClr val="B98A2E"/>
+          </a:solidFill>
+          <a:ln/>
+        </p:spPr>
+      </p:sp>
+      <p:sp>
+        <p:nvSpPr>
+          <p:cNvPr id="8" name="Text 6"/>
+          <p:cNvSpPr/>
+          <p:nvPr/>
+        </p:nvSpPr>
+        <p:spPr>
+          <a:xfrm>
+            <a:off x="786384" y="1792224"/>
+            <a:ext cx="438912" cy="438912"/>
+          </a:xfrm>
+          <a:prstGeom prst="rect">
+            <a:avLst/>
+          </a:prstGeom>
+          <a:noFill/>
+          <a:ln/>
+        </p:spPr>
+        <p:txBody>
+          <a:bodyPr wrap="square" lIns="0" tIns="0" rIns="0" bIns="0" rtlCol="0" anchor="ctr"/>
+          <a:lstStyle/>
+          <a:p>
+            <a:pPr algn="ctr" indent="0" marL="0">
+              <a:buNone/>
+            </a:pPr>
+            <a:r>
+              <a:rPr lang="en-US" sz="1400" b="1" dirty="0">
+                <a:solidFill>
+                  <a:srgbClr val="FFFFFF"/>
+                </a:solidFill>
+                <a:latin typeface="Arial" pitchFamily="34" charset="0"/>
+                <a:ea typeface="Arial" pitchFamily="34" charset="-122"/>
+                <a:cs typeface="Arial" pitchFamily="34" charset="-120"/>
+              </a:rPr>
+              <a:t>01</a:t>
+            </a:r>
+            <a:endParaRPr lang="en-US" sz="1400" dirty="0"/>
+          </a:p>
+        </p:txBody>
+      </p:sp>
+      <p:sp>
+        <p:nvSpPr>
+          <p:cNvPr id="9" name="Text 7"/>
+          <p:cNvSpPr/>
+          <p:nvPr/>
+        </p:nvSpPr>
+        <p:spPr>
+          <a:xfrm>
+            <a:off x="786384" y="2304288"/>
+            <a:ext cx="10618927" cy="365760"/>
+          </a:xfrm>
+          <a:prstGeom prst="rect">
+            <a:avLst/>
+          </a:prstGeom>
+          <a:noFill/>
+          <a:ln/>
+        </p:spPr>
+        <p:txBody>
+          <a:bodyPr wrap="square" rtlCol="0" anchor="ctr"/>
+          <a:lstStyle/>
+          <a:p>
+            <a:pPr indent="0" marL="0">
+              <a:buNone/>
+            </a:pPr>
+            <a:r>
+              <a:rPr lang="en-US" sz="1600" b="1" dirty="0">
+                <a:solidFill>
+                  <a:srgbClr val="10161F"/>
+                </a:solidFill>
+                <a:latin typeface="Pretendard" pitchFamily="34" charset="0"/>
+                <a:ea typeface="Pretendard" pitchFamily="34" charset="-122"/>
+                <a:cs typeface="Pretendard" pitchFamily="34" charset="-120"/>
+              </a:rPr>
+              <a:t>1단계</a:t>
+            </a:r>
+            <a:endParaRPr lang="en-US" sz="1600" dirty="0"/>
+          </a:p>
+        </p:txBody>
+      </p:sp>
+      <p:sp>
+        <p:nvSpPr>
+          <p:cNvPr id="10" name="Text 8"/>
+          <p:cNvSpPr/>
+          <p:nvPr/>
+        </p:nvSpPr>
+        <p:spPr>
+          <a:xfrm>
+            <a:off x="786384" y="2761488"/>
+            <a:ext cx="10618927" cy="1828800"/>
+          </a:xfrm>
+          <a:prstGeom prst="rect">
+            <a:avLst/>
+          </a:prstGeom>
+          <a:noFill/>
+          <a:ln/>
+        </p:spPr>
+        <p:txBody>
+          <a:bodyPr wrap="square" rtlCol="0" anchor="t"/>
+          <a:lstStyle/>
+          <a:p>
+            <a:pPr indent="0" marL="0">
+              <a:buNone/>
+            </a:pPr>
+            <a:r>
+              <a:rPr lang="en-US" sz="1100" dirty="0">
+                <a:solidFill>
+                  <a:srgbClr val="10161F"/>
+                </a:solidFill>
+                <a:latin typeface="Pretendard" pitchFamily="34" charset="0"/>
+                <a:ea typeface="Pretendard" pitchFamily="34" charset="-122"/>
+                <a:cs typeface="Pretendard" pitchFamily="34" charset="-120"/>
+              </a:rPr>
+              <a:t>{"ok"</a:t>
+            </a:r>
+            <a:endParaRPr lang="en-US" sz="1100" dirty="0"/>
+          </a:p>
+          <a:p>
+            <a:pPr indent="0" marL="0">
+              <a:buNone/>
+            </a:pPr>
+            <a:r>
+              <a:rPr lang="en-US" sz="1100" dirty="0">
+                <a:solidFill>
+                  <a:srgbClr val="10161F"/>
+                </a:solidFill>
+                <a:latin typeface="Pretendard" pitchFamily="34" charset="0"/>
+                <a:ea typeface="Pretendard" pitchFamily="34" charset="-122"/>
+                <a:cs typeface="Pretendard" pitchFamily="34" charset="-120"/>
+              </a:rPr>
+              <a:t>true,"mocked":true,"extractedFields":{"area_signal":"역삼","asset_type":"[건물명 비공개]","price_band":"300억","size_signal":"3000평(약 9917.4㎡)"},"extractedFacts":{"region":"역삼","exactAddressCandidate":"역삼동 742-1","assetType":"[건물명 비공개]","priceText":"300억","sizeText":"3000평(약 9917.4㎡)","currentUse":"오피스","currentUseSignal":"근린생활시설","leaseSignal":"임대중","vacancySignal":"공실없음","tenantNames":["쿠팡","네이버"],"unitRentTexts":["301호: 1500만"],"sellerMotivationText":"자산 효율화","brokerNotes":["역세권 도보 3분 이내 매물"]},"detectedSensitiveFields":["exact_address","tenant_name"],"ambiguousFields":[],"warnings":[],"areaSignal":"역삼","assetType":"[건물명 비공개]","priceBand":"300억","sizeSignal":"3000평(약 9917.4㎡)","dealType":"매각","buildingName":"역삼 [건물명 비공개]","exactAddress":"역삼동 742-1","totalFloorArea":9917.3,"buildYear":2015,"currentUseSignal":"근린생활시설","vacancySignal":"공실 없음","fitSummary":"역세권 도보 3분 이내 근생 빌딩으로 시행/사옥 매입에 최적화","cautionSummary":"주요 임차인 만기 조율 필요","hiddenFields":["exact_address","seller_motivation"],"confidence":{"areaSignal":"confirmed","assetType":"confirmed","priceBand":"ai_hypothesis","fitSummary":"ai_hypothesis"},"missingData":["sizeSignal"],"boundaryNote":"본 자료는 실거래 통계 기반 참고치입니다.","buyerType":"법인 사옥형","budgetRange":{"min":50,"max":80,"display":"50억~80억"},"preferredRegions":["강남","성수"],"assetTypes":["[건물명 비공개]","사옥용"],"purchasePurpose":"사옥용 매입","mustHave":["역세권 도보 3분 이내","주차"],"niceToHave":["테라스","루프탑"],"riskTolerance":"medium","financingNote":"자본금 50% 준비","missingQuestions":["구체적인 입주 시기가 언제인가요?","선호하는 수익률이 있나요?"],"privacyNotes":["연락처 비공개"],"fitReasons":["매수자 예산(50-80억)에 부합하는 매물입니다.","요청하신 성수/강남 권역에 해당합니다."],"cautionReasons":["요청한 용도와 달리 명도 협의가 다소 필요합니다."],"recommendedNextAction":"현장 답사 제안","kakaoMessage":"안녕하세요! 요청하신 조건에 부합하는 추천 매물이 있어 안내해 드립니다. 확인해보시고 피드백 부탁드립니다.","title":"강남 역삼역 역세권 도보 3분 이내 오피스 사옥용 빌딩 매각","shortSummary":"역삼역 도보 5분 거리의 준신축급 대형 [건물명 비공개]입니다.","dealPoints":["역세권 도보 3분 이내","사옥 최적"],"cautionPoints":["명도 조율 필요"],"hiddenInfoNotice":["보증금 및 지번은 인가 후 확인 가능"],"gateMessage":"G1 등급 등록이 필요합니다.","kakaoText":"강남 역삼역 오피스 빌딩 매각 안내입니다.","exactUnitCandidate":"101호","floor":"1층","areaSqmText":"150㎡","spaceType":"office","depositText":"5000만","monthlyRentText":"400만","maintenanceFeeText":"50만","availableFromText":"즉시입주","leaseTermMonthsText":"24","incentivesText":"렌트프리(무상임대) 2개월","restrictions":[],"landlordIdentity":"김성수","currentTenant":"스타트업","vacancyReason":"이전 확장","rentNegotiation":"협의 가능","region":"성수동","areaSqm":150,"deposit":5000,"monthlyRent":400,"maintenanceFee":50,"availableFrom":"즉시입주","leaseTermMonths":24,"incentives":{"렌트프리(무상임대)(무상임대)Months":2,"interiorSupport":"일부 인테리어 지원","freeRentDetail":"렌트프리(무상임대) 2개월 지원"},"shortSummaryLease":"성수역 도보 5분 거리 1층 리테일 상가 매물입니다."}</a:t>
+            </a:r>
+            <a:endParaRPr lang="en-US" sz="1100" dirty="0"/>
+          </a:p>
+        </p:txBody>
+      </p:sp>
+      <p:sp>
+        <p:nvSpPr>
+          <p:cNvPr id="11" name="Text 9"/>
+          <p:cNvSpPr/>
+          <p:nvPr/>
+        </p:nvSpPr>
+        <p:spPr>
+          <a:xfrm>
+            <a:off x="566928" y="6382512"/>
+            <a:ext cx="7315200" cy="219456"/>
+          </a:xfrm>
+          <a:prstGeom prst="rect">
+            <a:avLst/>
+          </a:prstGeom>
+          <a:noFill/>
+          <a:ln/>
+        </p:spPr>
+        <p:txBody>
+          <a:bodyPr wrap="square" lIns="0" tIns="0" rIns="0" bIns="0" rtlCol="0" anchor="ctr"/>
+          <a:lstStyle/>
+          <a:p>
+            <a:pPr indent="0" marL="0">
+              <a:buNone/>
+            </a:pPr>
+            <a:r>
+              <a:rPr lang="en-US" sz="800" dirty="0">
+                <a:solidFill>
+                  <a:srgbClr val="718096"/>
+                </a:solidFill>
+                <a:latin typeface="Pretendard" pitchFamily="34" charset="0"/>
+                <a:ea typeface="Pretendard" pitchFamily="34" charset="-122"/>
+                <a:cs typeface="Pretendard" pitchFamily="34" charset="-120"/>
+              </a:rPr>
+              <a:t>크리딜   |   </a:t>
+            </a:r>
+            <a:endParaRPr lang="en-US" sz="800" dirty="0"/>
+          </a:p>
+        </p:txBody>
+      </p:sp>
+      <p:sp>
+        <p:nvSpPr>
+          <p:cNvPr id="12" name="Text 10"/>
+          <p:cNvSpPr/>
+          <p:nvPr/>
+        </p:nvSpPr>
+        <p:spPr>
+          <a:xfrm>
+            <a:off x="10710367" y="6382512"/>
+            <a:ext cx="914400" cy="219456"/>
+          </a:xfrm>
+          <a:prstGeom prst="rect">
+            <a:avLst/>
+          </a:prstGeom>
+          <a:noFill/>
+          <a:ln/>
+        </p:spPr>
+        <p:txBody>
+          <a:bodyPr wrap="square" lIns="0" tIns="0" rIns="0" bIns="0" rtlCol="0" anchor="ctr"/>
+          <a:lstStyle/>
+          <a:p>
+            <a:pPr algn="r" indent="0" marL="0">
+              <a:buNone/>
+            </a:pPr>
+            <a:r>
+              <a:rPr lang="en-US" sz="900" b="1" dirty="0">
+                <a:solidFill>
+                  <a:srgbClr val="B98A2E"/>
+                </a:solidFill>
+                <a:latin typeface="Arial" pitchFamily="34" charset="0"/>
+                <a:ea typeface="Arial" pitchFamily="34" charset="-122"/>
+                <a:cs typeface="Arial" pitchFamily="34" charset="-120"/>
+              </a:rPr>
+              <a:t>11</a:t>
+            </a:r>
+            <a:endParaRPr lang="en-US" sz="900" dirty="0"/>
+          </a:p>
+        </p:txBody>
+      </p:sp>
+    </p:spTree>
+  </p:cSld>
+  <p:clrMapOvr>
+    <a:masterClrMapping/>
+  </p:clrMapOvr>
+</p:sld>
+</file>
+
+<file path=ppt/slides/slide14.xml><?xml version="1.0" encoding="utf-8"?>
+<p:sld xmlns:a="http://schemas.openxmlformats.org/drawingml/2006/main" xmlns:r="http://schemas.openxmlformats.org/officeDocument/2006/relationships" xmlns:p="http://schemas.openxmlformats.org/presentationml/2006/main">
+  <p:cSld name="Slide 14">
     <p:bg>
       <p:bgPr>
         <a:solidFill>
@@ -2885,7 +5182,7 @@
                 <a:ea typeface="Arial" pitchFamily="34" charset="-122"/>
                 <a:cs typeface="Arial" pitchFamily="34" charset="-120"/>
               </a:rPr>
-              <a:t>11</a:t>
+              <a:t>12</a:t>
             </a:r>
             <a:endParaRPr lang="en-US" sz="1300" dirty="0"/>
           </a:p>
@@ -2924,7 +5221,7 @@
                 <a:ea typeface="Arial" pitchFamily="34" charset="-122"/>
                 <a:cs typeface="Arial" pitchFamily="34" charset="-120"/>
               </a:rPr>
-              <a:t>Disclaimer</a:t>
+              <a:t>Closing</a:t>
             </a:r>
             <a:endParaRPr lang="en-US" sz="950" dirty="0"/>
           </a:p>
@@ -3114,7 +5411,7 @@
               <a:buNone/>
             </a:pPr>
             <a:r>
-              <a:rPr lang="en-US" sz="850" dirty="0">
+              <a:rPr lang="en-US" sz="900" dirty="0">
                 <a:solidFill>
                   <a:srgbClr val="A0AEC0"/>
                 </a:solidFill>
@@ -3124,7 +5421,7 @@
               </a:rPr>
               <a:t>담당 중개사에게 초기 관심 표명 및 상담 요청</a:t>
             </a:r>
-            <a:endParaRPr lang="en-US" sz="850" dirty="0"/>
+            <a:endParaRPr lang="en-US" sz="900" dirty="0"/>
           </a:p>
         </p:txBody>
       </p:sp>
@@ -3312,7 +5609,7 @@
               <a:buNone/>
             </a:pPr>
             <a:r>
-              <a:rPr lang="en-US" sz="850" dirty="0">
+              <a:rPr lang="en-US" sz="900" dirty="0">
                 <a:solidFill>
                   <a:srgbClr val="A0AEC0"/>
                 </a:solidFill>
@@ -3322,7 +5619,7 @@
               </a:rPr>
               <a:t>비밀유지계약 후 상세 임대차·재무 자료 제공</a:t>
             </a:r>
-            <a:endParaRPr lang="en-US" sz="850" dirty="0"/>
+            <a:endParaRPr lang="en-US" sz="900" dirty="0"/>
           </a:p>
         </p:txBody>
       </p:sp>
@@ -3510,7 +5807,7 @@
               <a:buNone/>
             </a:pPr>
             <a:r>
-              <a:rPr lang="en-US" sz="850" dirty="0">
+              <a:rPr lang="en-US" sz="900" dirty="0">
                 <a:solidFill>
                   <a:srgbClr val="A0AEC0"/>
                 </a:solidFill>
@@ -3520,7 +5817,7 @@
               </a:rPr>
               <a:t>건물 컨디션 및 설비 직접 확인 후 의향서(LOI) 제출</a:t>
             </a:r>
-            <a:endParaRPr lang="en-US" sz="850" dirty="0"/>
+            <a:endParaRPr lang="en-US" sz="900" dirty="0"/>
           </a:p>
         </p:txBody>
       </p:sp>
@@ -3610,7 +5907,7 @@
               <a:buNone/>
             </a:pPr>
             <a:r>
-              <a:rPr lang="en-US" sz="850" b="1" dirty="0">
+              <a:rPr lang="en-US" sz="900" b="1" dirty="0">
                 <a:solidFill>
                   <a:srgbClr val="FFFFFF"/>
                 </a:solidFill>
@@ -3620,7 +5917,7 @@
               </a:rPr>
               <a:t>✓ 공부확인</a:t>
             </a:r>
-            <a:endParaRPr lang="en-US" sz="850" dirty="0"/>
+            <a:endParaRPr lang="en-US" sz="900" dirty="0"/>
           </a:p>
         </p:txBody>
       </p:sp>
@@ -3710,7 +6007,7 @@
               <a:buNone/>
             </a:pPr>
             <a:r>
-              <a:rPr lang="en-US" sz="850" b="1" dirty="0">
+              <a:rPr lang="en-US" sz="900" b="1" dirty="0">
                 <a:solidFill>
                   <a:srgbClr val="FFFFFF"/>
                 </a:solidFill>
@@ -3720,7 +6017,7 @@
               </a:rPr>
               <a:t>★ 전문가검증</a:t>
             </a:r>
-            <a:endParaRPr lang="en-US" sz="850" dirty="0"/>
+            <a:endParaRPr lang="en-US" sz="900" dirty="0"/>
           </a:p>
         </p:txBody>
       </p:sp>
@@ -3810,7 +6107,7 @@
               <a:buNone/>
             </a:pPr>
             <a:r>
-              <a:rPr lang="en-US" sz="850" b="1" dirty="0">
+              <a:rPr lang="en-US" sz="900" b="1" dirty="0">
                 <a:solidFill>
                   <a:srgbClr val="FFFFFF"/>
                 </a:solidFill>
@@ -3820,7 +6117,7 @@
               </a:rPr>
               <a:t>▲ 매도인고지</a:t>
             </a:r>
-            <a:endParaRPr lang="en-US" sz="850" dirty="0"/>
+            <a:endParaRPr lang="en-US" sz="900" dirty="0"/>
           </a:p>
         </p:txBody>
       </p:sp>
@@ -3910,7 +6207,7 @@
               <a:buNone/>
             </a:pPr>
             <a:r>
-              <a:rPr lang="en-US" sz="850" b="1" dirty="0">
+              <a:rPr lang="en-US" sz="900" b="1" dirty="0">
                 <a:solidFill>
                   <a:srgbClr val="FFFFFF"/>
                 </a:solidFill>
@@ -3920,7 +6217,7 @@
               </a:rPr>
               <a:t>● 중개인입력</a:t>
             </a:r>
-            <a:endParaRPr lang="en-US" sz="850" dirty="0"/>
+            <a:endParaRPr lang="en-US" sz="900" dirty="0"/>
           </a:p>
         </p:txBody>
       </p:sp>
@@ -4010,7 +6307,7 @@
               <a:buNone/>
             </a:pPr>
             <a:r>
-              <a:rPr lang="en-US" sz="850" b="1" dirty="0">
+              <a:rPr lang="en-US" sz="900" b="1" dirty="0">
                 <a:solidFill>
                   <a:srgbClr val="FFFFFF"/>
                 </a:solidFill>
@@ -4020,7 +6317,7 @@
               </a:rPr>
               <a:t>◇ AI추정·가정</a:t>
             </a:r>
-            <a:endParaRPr lang="en-US" sz="850" dirty="0"/>
+            <a:endParaRPr lang="en-US" sz="900" dirty="0"/>
           </a:p>
         </p:txBody>
       </p:sp>
@@ -4152,7 +6449,7 @@
               <a:buNone/>
             </a:pPr>
             <a:r>
-              <a:rPr lang="en-US" sz="850" dirty="0">
+              <a:rPr lang="en-US" sz="900" dirty="0">
                 <a:solidFill>
                   <a:srgbClr val="A0AEC0"/>
                 </a:solidFill>
@@ -4162,7 +6459,7 @@
               </a:rPr>
               <a:t>본 자료는 투자 권유가 아니며, 기재된 정보의 정확성을 보증하지 않습니다.</a:t>
             </a:r>
-            <a:endParaRPr lang="en-US" sz="850" dirty="0"/>
+            <a:endParaRPr lang="en-US" sz="900" dirty="0"/>
           </a:p>
         </p:txBody>
       </p:sp>
@@ -4297,7 +6594,732 @@
                 <a:ea typeface="Arial" pitchFamily="34" charset="-122"/>
                 <a:cs typeface="Arial" pitchFamily="34" charset="-120"/>
               </a:rPr>
-              <a:t>11</a:t>
+              <a:t>12</a:t>
+            </a:r>
+            <a:endParaRPr lang="en-US" sz="900" dirty="0"/>
+          </a:p>
+        </p:txBody>
+      </p:sp>
+    </p:spTree>
+  </p:cSld>
+  <p:clrMapOvr>
+    <a:masterClrMapping/>
+  </p:clrMapOvr>
+</p:sld>
+</file>
+
+<file path=ppt/slides/slide15.xml><?xml version="1.0" encoding="utf-8"?>
+<p:sld xmlns:a="http://schemas.openxmlformats.org/drawingml/2006/main" xmlns:r="http://schemas.openxmlformats.org/officeDocument/2006/relationships" xmlns:p="http://schemas.openxmlformats.org/presentationml/2006/main">
+  <p:cSld name="Slide 15">
+    <p:bg>
+      <p:bgPr>
+        <a:solidFill>
+          <a:srgbClr val="FFFFFF"/>
+        </a:solidFill>
+      </p:bgPr>
+    </p:bg>
+    <p:spTree>
+      <p:nvGrpSpPr>
+        <p:cNvPr id="1" name=""/>
+        <p:cNvGrpSpPr/>
+        <p:nvPr/>
+      </p:nvGrpSpPr>
+      <p:grpSpPr>
+        <a:xfrm>
+          <a:off x="0" y="0"/>
+          <a:ext cx="0" cy="0"/>
+          <a:chOff x="0" y="0"/>
+          <a:chExt cx="0" cy="0"/>
+        </a:xfrm>
+      </p:grpSpPr>
+      <p:sp>
+        <p:nvSpPr>
+          <p:cNvPr id="2" name="Shape 0"/>
+          <p:cNvSpPr/>
+          <p:nvPr/>
+        </p:nvSpPr>
+        <p:spPr>
+          <a:xfrm>
+            <a:off x="566928" y="457200"/>
+            <a:ext cx="384048" cy="384048"/>
+          </a:xfrm>
+          <a:prstGeom prst="ellipse">
+            <a:avLst/>
+          </a:prstGeom>
+          <a:solidFill>
+            <a:srgbClr val="B98A2E"/>
+          </a:solidFill>
+          <a:ln/>
+        </p:spPr>
+      </p:sp>
+      <p:sp>
+        <p:nvSpPr>
+          <p:cNvPr id="3" name="Text 1"/>
+          <p:cNvSpPr/>
+          <p:nvPr/>
+        </p:nvSpPr>
+        <p:spPr>
+          <a:xfrm>
+            <a:off x="566928" y="457200"/>
+            <a:ext cx="384048" cy="384048"/>
+          </a:xfrm>
+          <a:prstGeom prst="rect">
+            <a:avLst/>
+          </a:prstGeom>
+          <a:noFill/>
+          <a:ln/>
+        </p:spPr>
+        <p:txBody>
+          <a:bodyPr wrap="square" lIns="0" tIns="0" rIns="0" bIns="0" rtlCol="0" anchor="ctr"/>
+          <a:lstStyle/>
+          <a:p>
+            <a:pPr algn="ctr" indent="0" marL="0">
+              <a:buNone/>
+            </a:pPr>
+            <a:r>
+              <a:rPr lang="en-US" sz="1300" b="1" dirty="0">
+                <a:solidFill>
+                  <a:srgbClr val="FFFFFF"/>
+                </a:solidFill>
+                <a:latin typeface="Arial" pitchFamily="34" charset="0"/>
+                <a:ea typeface="Arial" pitchFamily="34" charset="-122"/>
+                <a:cs typeface="Arial" pitchFamily="34" charset="-120"/>
+              </a:rPr>
+              <a:t>13</a:t>
+            </a:r>
+            <a:endParaRPr lang="en-US" sz="1300" dirty="0"/>
+          </a:p>
+        </p:txBody>
+      </p:sp>
+      <p:sp>
+        <p:nvSpPr>
+          <p:cNvPr id="4" name="Text 2"/>
+          <p:cNvSpPr/>
+          <p:nvPr/>
+        </p:nvSpPr>
+        <p:spPr>
+          <a:xfrm>
+            <a:off x="1133856" y="457200"/>
+            <a:ext cx="10490911" cy="182880"/>
+          </a:xfrm>
+          <a:prstGeom prst="rect">
+            <a:avLst/>
+          </a:prstGeom>
+          <a:noFill/>
+          <a:ln/>
+        </p:spPr>
+        <p:txBody>
+          <a:bodyPr wrap="square" lIns="0" tIns="0" rIns="0" bIns="0" rtlCol="0" anchor="ctr"/>
+          <a:lstStyle/>
+          <a:p>
+            <a:pPr indent="0" marL="0">
+              <a:buNone/>
+            </a:pPr>
+            <a:r>
+              <a:rPr lang="en-US" sz="950" b="1" spc="200" kern="0" dirty="0">
+                <a:solidFill>
+                  <a:srgbClr val="B98A2E"/>
+                </a:solidFill>
+                <a:latin typeface="Arial" pitchFamily="34" charset="0"/>
+                <a:ea typeface="Arial" pitchFamily="34" charset="-122"/>
+                <a:cs typeface="Arial" pitchFamily="34" charset="-120"/>
+              </a:rPr>
+              <a:t>Records</a:t>
+            </a:r>
+            <a:endParaRPr lang="en-US" sz="950" dirty="0"/>
+          </a:p>
+        </p:txBody>
+      </p:sp>
+      <p:sp>
+        <p:nvSpPr>
+          <p:cNvPr id="5" name="Text 3"/>
+          <p:cNvSpPr/>
+          <p:nvPr/>
+        </p:nvSpPr>
+        <p:spPr>
+          <a:xfrm>
+            <a:off x="1133856" y="640080"/>
+            <a:ext cx="10490911" cy="365760"/>
+          </a:xfrm>
+          <a:prstGeom prst="rect">
+            <a:avLst/>
+          </a:prstGeom>
+          <a:noFill/>
+          <a:ln/>
+        </p:spPr>
+        <p:txBody>
+          <a:bodyPr wrap="square" lIns="0" tIns="0" rIns="0" bIns="0" rtlCol="0" anchor="ctr"/>
+          <a:lstStyle/>
+          <a:p>
+            <a:pPr indent="0" marL="0">
+              <a:buNone/>
+            </a:pPr>
+            <a:r>
+              <a:rPr lang="en-US" sz="2300" b="1" dirty="0">
+                <a:solidFill>
+                  <a:srgbClr val="10161F"/>
+                </a:solidFill>
+                <a:latin typeface="Pretendard" pitchFamily="34" charset="0"/>
+                <a:ea typeface="Pretendard" pitchFamily="34" charset="-122"/>
+                <a:cs typeface="Pretendard" pitchFamily="34" charset="-120"/>
+              </a:rPr>
+              <a:t>공부 발췌</a:t>
+            </a:r>
+            <a:endParaRPr lang="en-US" sz="2300" dirty="0"/>
+          </a:p>
+        </p:txBody>
+      </p:sp>
+      <p:sp>
+        <p:nvSpPr>
+          <p:cNvPr id="6" name="Text 4"/>
+          <p:cNvSpPr/>
+          <p:nvPr/>
+        </p:nvSpPr>
+        <p:spPr>
+          <a:xfrm>
+            <a:off x="566928" y="1371600"/>
+            <a:ext cx="6858000" cy="237744"/>
+          </a:xfrm>
+          <a:prstGeom prst="rect">
+            <a:avLst/>
+          </a:prstGeom>
+          <a:noFill/>
+          <a:ln/>
+        </p:spPr>
+        <p:txBody>
+          <a:bodyPr wrap="square" lIns="0" tIns="0" rIns="0" bIns="0" rtlCol="0" anchor="ctr"/>
+          <a:lstStyle/>
+          <a:p>
+            <a:pPr indent="0" marL="0">
+              <a:buNone/>
+            </a:pPr>
+            <a:r>
+              <a:rPr lang="en-US" sz="1100" b="1" dirty="0">
+                <a:solidFill>
+                  <a:srgbClr val="10161F"/>
+                </a:solidFill>
+                <a:latin typeface="Pretendard" pitchFamily="34" charset="0"/>
+                <a:ea typeface="Pretendard" pitchFamily="34" charset="-122"/>
+                <a:cs typeface="Pretendard" pitchFamily="34" charset="-120"/>
+              </a:rPr>
+              <a:t>건축물대장 표제부</a:t>
+            </a:r>
+            <a:endParaRPr lang="en-US" sz="1100" dirty="0"/>
+          </a:p>
+        </p:txBody>
+      </p:sp>
+      <p:sp>
+        <p:nvSpPr>
+          <p:cNvPr id="7" name="Text 5"/>
+          <p:cNvSpPr/>
+          <p:nvPr/>
+        </p:nvSpPr>
+        <p:spPr>
+          <a:xfrm>
+            <a:off x="566928" y="1645920"/>
+            <a:ext cx="2606040" cy="438912"/>
+          </a:xfrm>
+          <a:prstGeom prst="rect">
+            <a:avLst/>
+          </a:prstGeom>
+          <a:noFill/>
+          <a:ln/>
+        </p:spPr>
+        <p:txBody>
+          <a:bodyPr wrap="square" lIns="0" tIns="0" rIns="0" bIns="0" rtlCol="0" anchor="ctr"/>
+          <a:lstStyle/>
+          <a:p>
+            <a:pPr indent="0" marL="0">
+              <a:lnSpc>
+                <a:spcPct val="120000"/>
+              </a:lnSpc>
+              <a:buNone/>
+            </a:pPr>
+            <a:r>
+              <a:rPr lang="en-US" sz="1350" dirty="0">
+                <a:solidFill>
+                  <a:srgbClr val="718096"/>
+                </a:solidFill>
+                <a:latin typeface="Pretendard" pitchFamily="34" charset="0"/>
+                <a:ea typeface="Pretendard" pitchFamily="34" charset="-122"/>
+                <a:cs typeface="Pretendard" pitchFamily="34" charset="-120"/>
+              </a:rPr>
+              <a:t>연면적</a:t>
+            </a:r>
+            <a:endParaRPr lang="en-US" sz="1350" dirty="0"/>
+          </a:p>
+        </p:txBody>
+      </p:sp>
+      <p:sp>
+        <p:nvSpPr>
+          <p:cNvPr id="8" name="Text 6"/>
+          <p:cNvSpPr/>
+          <p:nvPr/>
+        </p:nvSpPr>
+        <p:spPr>
+          <a:xfrm>
+            <a:off x="3172968" y="1645920"/>
+            <a:ext cx="4251960" cy="438912"/>
+          </a:xfrm>
+          <a:prstGeom prst="rect">
+            <a:avLst/>
+          </a:prstGeom>
+          <a:noFill/>
+          <a:ln/>
+        </p:spPr>
+        <p:txBody>
+          <a:bodyPr wrap="square" lIns="0" tIns="0" rIns="0" bIns="0" rtlCol="0" anchor="ctr"/>
+          <a:lstStyle/>
+          <a:p>
+            <a:pPr indent="0" marL="0">
+              <a:lnSpc>
+                <a:spcPct val="120000"/>
+              </a:lnSpc>
+              <a:buNone/>
+            </a:pPr>
+            <a:r>
+              <a:rPr lang="en-US" sz="1350" b="1" dirty="0">
+                <a:solidFill>
+                  <a:srgbClr val="10161F"/>
+                </a:solidFill>
+                <a:latin typeface="Pretendard" pitchFamily="34" charset="0"/>
+                <a:ea typeface="Pretendard" pitchFamily="34" charset="-122"/>
+                <a:cs typeface="Pretendard" pitchFamily="34" charset="-120"/>
+              </a:rPr>
+              <a:t>5,000㎡ (1512.5평)</a:t>
+            </a:r>
+            <a:endParaRPr lang="en-US" sz="1350" dirty="0"/>
+          </a:p>
+        </p:txBody>
+      </p:sp>
+      <p:sp>
+        <p:nvSpPr>
+          <p:cNvPr id="9" name="Shape 7"/>
+          <p:cNvSpPr/>
+          <p:nvPr/>
+        </p:nvSpPr>
+        <p:spPr>
+          <a:xfrm>
+            <a:off x="7604608" y="1371600"/>
+            <a:ext cx="0" cy="4754880"/>
+          </a:xfrm>
+          <a:prstGeom prst="line">
+            <a:avLst/>
+          </a:prstGeom>
+          <a:noFill/>
+          <a:ln w="8890">
+            <a:solidFill>
+              <a:srgbClr val="B98A2E"/>
+            </a:solidFill>
+            <a:prstDash val="solid"/>
+          </a:ln>
+        </p:spPr>
+      </p:sp>
+      <p:sp>
+        <p:nvSpPr>
+          <p:cNvPr id="10" name="Shape 8"/>
+          <p:cNvSpPr/>
+          <p:nvPr/>
+        </p:nvSpPr>
+        <p:spPr>
+          <a:xfrm>
+            <a:off x="7784287" y="1645920"/>
+            <a:ext cx="3840480" cy="2103120"/>
+          </a:xfrm>
+          <a:prstGeom prst="roundRect">
+            <a:avLst>
+              <a:gd name="adj" fmla="val 2609"/>
+            </a:avLst>
+          </a:prstGeom>
+          <a:solidFill>
+            <a:srgbClr val="BEE3F8"/>
+          </a:solidFill>
+          <a:ln/>
+        </p:spPr>
+      </p:sp>
+      <p:sp>
+        <p:nvSpPr>
+          <p:cNvPr id="11" name="Shape 9"/>
+          <p:cNvSpPr/>
+          <p:nvPr/>
+        </p:nvSpPr>
+        <p:spPr>
+          <a:xfrm>
+            <a:off x="7784287" y="1700784"/>
+            <a:ext cx="36576" cy="1993392"/>
+          </a:xfrm>
+          <a:prstGeom prst="rect">
+            <a:avLst/>
+          </a:prstGeom>
+          <a:solidFill>
+            <a:srgbClr val="2B6CB0"/>
+          </a:solidFill>
+          <a:ln/>
+        </p:spPr>
+      </p:sp>
+      <p:sp>
+        <p:nvSpPr>
+          <p:cNvPr id="12" name="Text 10"/>
+          <p:cNvSpPr/>
+          <p:nvPr/>
+        </p:nvSpPr>
+        <p:spPr>
+          <a:xfrm>
+            <a:off x="7967167" y="1755648"/>
+            <a:ext cx="3511296" cy="201168"/>
+          </a:xfrm>
+          <a:prstGeom prst="rect">
+            <a:avLst/>
+          </a:prstGeom>
+          <a:noFill/>
+          <a:ln/>
+        </p:spPr>
+        <p:txBody>
+          <a:bodyPr wrap="square" lIns="0" tIns="0" rIns="0" bIns="0" rtlCol="0" anchor="ctr"/>
+          <a:lstStyle/>
+          <a:p>
+            <a:pPr indent="0" marL="0">
+              <a:buNone/>
+            </a:pPr>
+            <a:r>
+              <a:rPr lang="en-US" sz="1050" b="1" dirty="0">
+                <a:solidFill>
+                  <a:srgbClr val="2B6CB0"/>
+                </a:solidFill>
+                <a:latin typeface="Pretendard" pitchFamily="34" charset="0"/>
+                <a:ea typeface="Pretendard" pitchFamily="34" charset="-122"/>
+                <a:cs typeface="Pretendard" pitchFamily="34" charset="-120"/>
+              </a:rPr>
+              <a:t>입지 및 권리관계 실사 포인트</a:t>
+            </a:r>
+            <a:endParaRPr lang="en-US" sz="1050" dirty="0"/>
+          </a:p>
+        </p:txBody>
+      </p:sp>
+      <p:sp>
+        <p:nvSpPr>
+          <p:cNvPr id="13" name="Text 11"/>
+          <p:cNvSpPr/>
+          <p:nvPr/>
+        </p:nvSpPr>
+        <p:spPr>
+          <a:xfrm>
+            <a:off x="7967167" y="1975104"/>
+            <a:ext cx="3511296" cy="1700784"/>
+          </a:xfrm>
+          <a:prstGeom prst="rect">
+            <a:avLst/>
+          </a:prstGeom>
+          <a:noFill/>
+          <a:ln/>
+        </p:spPr>
+        <p:txBody>
+          <a:bodyPr wrap="square" lIns="0" tIns="0" rIns="0" bIns="0" rtlCol="0" anchor="t"/>
+          <a:lstStyle/>
+          <a:p>
+            <a:pPr marL="342900" indent="-342900">
+              <a:lnSpc>
+                <a:spcPct val="120000"/>
+              </a:lnSpc>
+              <a:buSzPct val="100000"/>
+              <a:buChar char="•"/>
+            </a:pPr>
+            <a:r>
+              <a:rPr lang="en-US" sz="930" dirty="0">
+                <a:solidFill>
+                  <a:srgbClr val="10161F"/>
+                </a:solidFill>
+                <a:latin typeface="Pretendard" pitchFamily="34" charset="0"/>
+                <a:ea typeface="Pretendard" pitchFamily="34" charset="-122"/>
+                <a:cs typeface="Pretendard" pitchFamily="34" charset="-120"/>
+              </a:rPr>
+              <a:t>물건 접면 도로 폭 및 진출입 여건은 현장 실사 확인 사항입니다</a:t>
+            </a:r>
+            <a:endParaRPr lang="en-US" sz="930" dirty="0"/>
+          </a:p>
+          <a:p>
+            <a:pPr marL="342900" indent="-342900">
+              <a:lnSpc>
+                <a:spcPct val="120000"/>
+              </a:lnSpc>
+              <a:buSzPct val="100000"/>
+              <a:buChar char="•"/>
+            </a:pPr>
+            <a:r>
+              <a:rPr lang="en-US" sz="930" dirty="0">
+                <a:solidFill>
+                  <a:srgbClr val="10161F"/>
+                </a:solidFill>
+                <a:latin typeface="Pretendard" pitchFamily="34" charset="0"/>
+                <a:ea typeface="Pretendard" pitchFamily="34" charset="-122"/>
+                <a:cs typeface="Pretendard" pitchFamily="34" charset="-120"/>
+              </a:rPr>
+              <a:t>등기부등본상 권리관계 및 제한물권 설정 여부를 확인하였습니다</a:t>
+            </a:r>
+            <a:endParaRPr lang="en-US" sz="930" dirty="0"/>
+          </a:p>
+          <a:p>
+            <a:pPr marL="342900" indent="-342900">
+              <a:lnSpc>
+                <a:spcPct val="120000"/>
+              </a:lnSpc>
+              <a:buSzPct val="100000"/>
+              <a:buChar char="•"/>
+            </a:pPr>
+            <a:r>
+              <a:rPr lang="en-US" sz="930" dirty="0">
+                <a:solidFill>
+                  <a:srgbClr val="10161F"/>
+                </a:solidFill>
+                <a:latin typeface="Pretendard" pitchFamily="34" charset="0"/>
+                <a:ea typeface="Pretendard" pitchFamily="34" charset="-122"/>
+                <a:cs typeface="Pretendard" pitchFamily="34" charset="-120"/>
+              </a:rPr>
+              <a:t>지구단위계획 및 토지이용계획상 허용 용도를 검토하였습니다</a:t>
+            </a:r>
+            <a:endParaRPr lang="en-US" sz="930" dirty="0"/>
+          </a:p>
+        </p:txBody>
+      </p:sp>
+      <p:sp>
+        <p:nvSpPr>
+          <p:cNvPr id="14" name="Shape 12"/>
+          <p:cNvSpPr/>
+          <p:nvPr/>
+        </p:nvSpPr>
+        <p:spPr>
+          <a:xfrm>
+            <a:off x="7784287" y="3977640"/>
+            <a:ext cx="3840480" cy="2148840"/>
+          </a:xfrm>
+          <a:prstGeom prst="roundRect">
+            <a:avLst>
+              <a:gd name="adj" fmla="val 2553"/>
+            </a:avLst>
+          </a:prstGeom>
+          <a:solidFill>
+            <a:srgbClr val="BEE3F8"/>
+          </a:solidFill>
+          <a:ln/>
+        </p:spPr>
+      </p:sp>
+      <p:sp>
+        <p:nvSpPr>
+          <p:cNvPr id="15" name="Shape 13"/>
+          <p:cNvSpPr/>
+          <p:nvPr/>
+        </p:nvSpPr>
+        <p:spPr>
+          <a:xfrm>
+            <a:off x="7784287" y="4032504"/>
+            <a:ext cx="36576" cy="2039112"/>
+          </a:xfrm>
+          <a:prstGeom prst="rect">
+            <a:avLst/>
+          </a:prstGeom>
+          <a:solidFill>
+            <a:srgbClr val="2B6CB0"/>
+          </a:solidFill>
+          <a:ln/>
+        </p:spPr>
+      </p:sp>
+      <p:sp>
+        <p:nvSpPr>
+          <p:cNvPr id="16" name="Text 14"/>
+          <p:cNvSpPr/>
+          <p:nvPr/>
+        </p:nvSpPr>
+        <p:spPr>
+          <a:xfrm>
+            <a:off x="7967167" y="4087368"/>
+            <a:ext cx="3511296" cy="201168"/>
+          </a:xfrm>
+          <a:prstGeom prst="rect">
+            <a:avLst/>
+          </a:prstGeom>
+          <a:noFill/>
+          <a:ln/>
+        </p:spPr>
+        <p:txBody>
+          <a:bodyPr wrap="square" lIns="0" tIns="0" rIns="0" bIns="0" rtlCol="0" anchor="ctr"/>
+          <a:lstStyle/>
+          <a:p>
+            <a:pPr indent="0" marL="0">
+              <a:buNone/>
+            </a:pPr>
+            <a:r>
+              <a:rPr lang="en-US" sz="1050" b="1" dirty="0">
+                <a:solidFill>
+                  <a:srgbClr val="2B6CB0"/>
+                </a:solidFill>
+                <a:latin typeface="Pretendard" pitchFamily="34" charset="0"/>
+                <a:ea typeface="Pretendard" pitchFamily="34" charset="-122"/>
+                <a:cs typeface="Pretendard" pitchFamily="34" charset="-120"/>
+              </a:rPr>
+              <a:t>임대차 및 운용 관리 상태</a:t>
+            </a:r>
+            <a:endParaRPr lang="en-US" sz="1050" dirty="0"/>
+          </a:p>
+        </p:txBody>
+      </p:sp>
+      <p:sp>
+        <p:nvSpPr>
+          <p:cNvPr id="17" name="Text 15"/>
+          <p:cNvSpPr/>
+          <p:nvPr/>
+        </p:nvSpPr>
+        <p:spPr>
+          <a:xfrm>
+            <a:off x="7967167" y="4306824"/>
+            <a:ext cx="3511296" cy="1746504"/>
+          </a:xfrm>
+          <a:prstGeom prst="rect">
+            <a:avLst/>
+          </a:prstGeom>
+          <a:noFill/>
+          <a:ln/>
+        </p:spPr>
+        <p:txBody>
+          <a:bodyPr wrap="square" lIns="0" tIns="0" rIns="0" bIns="0" rtlCol="0" anchor="t"/>
+          <a:lstStyle/>
+          <a:p>
+            <a:pPr marL="342900" indent="-342900">
+              <a:lnSpc>
+                <a:spcPct val="120000"/>
+              </a:lnSpc>
+              <a:buSzPct val="100000"/>
+              <a:buChar char="•"/>
+            </a:pPr>
+            <a:r>
+              <a:rPr lang="en-US" sz="930" dirty="0">
+                <a:solidFill>
+                  <a:srgbClr val="10161F"/>
+                </a:solidFill>
+                <a:latin typeface="Pretendard" pitchFamily="34" charset="0"/>
+                <a:ea typeface="Pretendard" pitchFamily="34" charset="-122"/>
+                <a:cs typeface="Pretendard" pitchFamily="34" charset="-120"/>
+              </a:rPr>
+              <a:t>주요 임차인별 계약 만기 분산 및 렌트롤 실사가 필요합니다</a:t>
+            </a:r>
+            <a:endParaRPr lang="en-US" sz="930" dirty="0"/>
+          </a:p>
+          <a:p>
+            <a:pPr marL="342900" indent="-342900">
+              <a:lnSpc>
+                <a:spcPct val="120000"/>
+              </a:lnSpc>
+              <a:buSzPct val="100000"/>
+              <a:buChar char="•"/>
+            </a:pPr>
+            <a:r>
+              <a:rPr lang="en-US" sz="930" dirty="0">
+                <a:solidFill>
+                  <a:srgbClr val="10161F"/>
+                </a:solidFill>
+                <a:latin typeface="Pretendard" pitchFamily="34" charset="0"/>
+                <a:ea typeface="Pretendard" pitchFamily="34" charset="-122"/>
+                <a:cs typeface="Pretendard" pitchFamily="34" charset="-120"/>
+              </a:rPr>
+              <a:t>관리비 정산 내역 및 수선유지비 집행 이력을 점검하였습니다</a:t>
+            </a:r>
+            <a:endParaRPr lang="en-US" sz="930" dirty="0"/>
+          </a:p>
+          <a:p>
+            <a:pPr marL="342900" indent="-342900">
+              <a:lnSpc>
+                <a:spcPct val="120000"/>
+              </a:lnSpc>
+              <a:buSzPct val="100000"/>
+              <a:buChar char="•"/>
+            </a:pPr>
+            <a:r>
+              <a:rPr lang="en-US" sz="930" dirty="0">
+                <a:solidFill>
+                  <a:srgbClr val="10161F"/>
+                </a:solidFill>
+                <a:latin typeface="Pretendard" pitchFamily="34" charset="0"/>
+                <a:ea typeface="Pretendard" pitchFamily="34" charset="-122"/>
+                <a:cs typeface="Pretendard" pitchFamily="34" charset="-120"/>
+              </a:rPr>
+              <a:t>취득세 감면 및 대출 조달 구조는 금융·세무 자문 후 확정됩니다</a:t>
+            </a:r>
+            <a:endParaRPr lang="en-US" sz="930" dirty="0"/>
+          </a:p>
+        </p:txBody>
+      </p:sp>
+      <p:sp>
+        <p:nvSpPr>
+          <p:cNvPr id="18" name="Text 16"/>
+          <p:cNvSpPr/>
+          <p:nvPr/>
+        </p:nvSpPr>
+        <p:spPr>
+          <a:xfrm>
+            <a:off x="566928" y="6382512"/>
+            <a:ext cx="7315200" cy="219456"/>
+          </a:xfrm>
+          <a:prstGeom prst="rect">
+            <a:avLst/>
+          </a:prstGeom>
+          <a:noFill/>
+          <a:ln/>
+        </p:spPr>
+        <p:txBody>
+          <a:bodyPr wrap="square" lIns="0" tIns="0" rIns="0" bIns="0" rtlCol="0" anchor="ctr"/>
+          <a:lstStyle/>
+          <a:p>
+            <a:pPr indent="0" marL="0">
+              <a:buNone/>
+            </a:pPr>
+            <a:r>
+              <a:rPr lang="en-US" sz="800" dirty="0">
+                <a:solidFill>
+                  <a:srgbClr val="718096"/>
+                </a:solidFill>
+                <a:latin typeface="Pretendard" pitchFamily="34" charset="0"/>
+                <a:ea typeface="Pretendard" pitchFamily="34" charset="-122"/>
+                <a:cs typeface="Pretendard" pitchFamily="34" charset="-120"/>
+              </a:rPr>
+              <a:t>크리딜   |   </a:t>
+            </a:r>
+            <a:endParaRPr lang="en-US" sz="800" dirty="0"/>
+          </a:p>
+        </p:txBody>
+      </p:sp>
+      <p:sp>
+        <p:nvSpPr>
+          <p:cNvPr id="19" name="Text 17"/>
+          <p:cNvSpPr/>
+          <p:nvPr/>
+        </p:nvSpPr>
+        <p:spPr>
+          <a:xfrm>
+            <a:off x="10710367" y="6382512"/>
+            <a:ext cx="914400" cy="219456"/>
+          </a:xfrm>
+          <a:prstGeom prst="rect">
+            <a:avLst/>
+          </a:prstGeom>
+          <a:noFill/>
+          <a:ln/>
+        </p:spPr>
+        <p:txBody>
+          <a:bodyPr wrap="square" lIns="0" tIns="0" rIns="0" bIns="0" rtlCol="0" anchor="ctr"/>
+          <a:lstStyle/>
+          <a:p>
+            <a:pPr algn="r" indent="0" marL="0">
+              <a:buNone/>
+            </a:pPr>
+            <a:r>
+              <a:rPr lang="en-US" sz="900" b="1" dirty="0">
+                <a:solidFill>
+                  <a:srgbClr val="B98A2E"/>
+                </a:solidFill>
+                <a:latin typeface="Arial" pitchFamily="34" charset="0"/>
+                <a:ea typeface="Arial" pitchFamily="34" charset="-122"/>
+                <a:cs typeface="Arial" pitchFamily="34" charset="-120"/>
+              </a:rPr>
+              <a:t>13</a:t>
             </a:r>
             <a:endParaRPr lang="en-US" sz="900" dirty="0"/>
           </a:p>
@@ -4608,7 +7630,7 @@
         </p:nvSpPr>
         <p:spPr>
           <a:xfrm>
-            <a:off x="731520" y="2276856"/>
+            <a:off x="731520" y="2313432"/>
             <a:ext cx="2298116" cy="402336"/>
           </a:xfrm>
           <a:prstGeom prst="rect">
@@ -4715,7 +7737,7 @@
         </p:nvSpPr>
         <p:spPr>
           <a:xfrm>
-            <a:off x="3541700" y="2276856"/>
+            <a:off x="3541700" y="2313432"/>
             <a:ext cx="2298116" cy="402336"/>
           </a:xfrm>
           <a:prstGeom prst="rect">
@@ -4822,7 +7844,7 @@
         </p:nvSpPr>
         <p:spPr>
           <a:xfrm>
-            <a:off x="6351880" y="2276856"/>
+            <a:off x="6351880" y="2313432"/>
             <a:ext cx="2298116" cy="402336"/>
           </a:xfrm>
           <a:prstGeom prst="rect">
@@ -4929,7 +7951,7 @@
         </p:nvSpPr>
         <p:spPr>
           <a:xfrm>
-            <a:off x="9162059" y="2276856"/>
+            <a:off x="9162059" y="2313432"/>
             <a:ext cx="2298116" cy="402336"/>
           </a:xfrm>
           <a:prstGeom prst="rect">
@@ -5599,7 +8621,7 @@
                 <a:ea typeface="Arial" pitchFamily="34" charset="-122"/>
                 <a:cs typeface="Arial" pitchFamily="34" charset="-120"/>
               </a:rPr>
-              <a:t>Location</a:t>
+              <a:t>Land</a:t>
             </a:r>
             <a:endParaRPr lang="en-US" sz="950" dirty="0"/>
           </a:p>
@@ -5638,46 +8660,61 @@
                 <a:ea typeface="Pretendard" pitchFamily="34" charset="-122"/>
                 <a:cs typeface="Pretendard" pitchFamily="34" charset="-120"/>
               </a:rPr>
-              <a:t>이 입지, 투자할 만한 곳인가</a:t>
+              <a:t>토지 현황</a:t>
             </a:r>
             <a:endParaRPr lang="en-US" sz="2300" dirty="0"/>
           </a:p>
         </p:txBody>
       </p:sp>
-      <p:pic>
-        <p:nvPicPr>
-          <p:cNvPr id="6" name="Image 0" descr="preencoded.png">    </p:cNvPr>
-          <p:cNvPicPr>
-            <a:picLocks noChangeAspect="1"/>
-          </p:cNvPicPr>
-          <p:nvPr/>
-        </p:nvPicPr>
-        <p:blipFill>
-          <a:blip r:embed="rId1"/>
-          <a:stretch>
-            <a:fillRect/>
-          </a:stretch>
-        </p:blipFill>
-        <p:spPr>
-          <a:xfrm>
-            <a:off x="566928" y="1481328"/>
-            <a:ext cx="5120640" cy="4114800"/>
-          </a:xfrm>
-          <a:prstGeom prst="rect">
-            <a:avLst/>
-          </a:prstGeom>
-        </p:spPr>
-      </p:pic>
-      <p:sp>
-        <p:nvSpPr>
-          <p:cNvPr id="7" name="Text 4"/>
-          <p:cNvSpPr/>
-          <p:nvPr/>
-        </p:nvSpPr>
-        <p:spPr>
-          <a:xfrm>
-            <a:off x="6053328" y="1481328"/>
-            <a:ext cx="2117147" cy="493776"/>
+      <p:sp>
+        <p:nvSpPr>
+          <p:cNvPr id="6" name="Text 4"/>
+          <p:cNvSpPr/>
+          <p:nvPr/>
+        </p:nvSpPr>
+        <p:spPr>
+          <a:xfrm>
+            <a:off x="566928" y="1371600"/>
+            <a:ext cx="6858000" cy="237744"/>
+          </a:xfrm>
+          <a:prstGeom prst="rect">
+            <a:avLst/>
+          </a:prstGeom>
+          <a:noFill/>
+          <a:ln/>
+        </p:spPr>
+        <p:txBody>
+          <a:bodyPr wrap="square" lIns="0" tIns="0" rIns="0" bIns="0" rtlCol="0" anchor="ctr"/>
+          <a:lstStyle/>
+          <a:p>
+            <a:pPr indent="0" marL="0">
+              <a:buNone/>
+            </a:pPr>
+            <a:r>
+              <a:rPr lang="en-US" sz="1100" b="1" dirty="0">
+                <a:solidFill>
+                  <a:srgbClr val="10161F"/>
+                </a:solidFill>
+                <a:latin typeface="Pretendard" pitchFamily="34" charset="0"/>
+                <a:ea typeface="Pretendard" pitchFamily="34" charset="-122"/>
+                <a:cs typeface="Pretendard" pitchFamily="34" charset="-120"/>
+              </a:rPr>
+              <a:t>토지이용계획 · 개별공시지가</a:t>
+            </a:r>
+            <a:endParaRPr lang="en-US" sz="1100" dirty="0"/>
+          </a:p>
+        </p:txBody>
+      </p:sp>
+      <p:sp>
+        <p:nvSpPr>
+          <p:cNvPr id="7" name="Text 5"/>
+          <p:cNvSpPr/>
+          <p:nvPr/>
+        </p:nvSpPr>
+        <p:spPr>
+          <a:xfrm>
+            <a:off x="566928" y="1645920"/>
+            <a:ext cx="2606040" cy="438912"/>
           </a:xfrm>
           <a:prstGeom prst="rect">
             <a:avLst/>
@@ -5696,7 +8733,7 @@
               <a:buNone/>
             </a:pPr>
             <a:r>
-              <a:rPr lang="en-US" sz="1300" dirty="0">
+              <a:rPr lang="en-US" sz="1350" dirty="0">
                 <a:solidFill>
                   <a:srgbClr val="718096"/>
                 </a:solidFill>
@@ -5704,22 +8741,22 @@
                 <a:ea typeface="Pretendard" pitchFamily="34" charset="-122"/>
                 <a:cs typeface="Pretendard" pitchFamily="34" charset="-120"/>
               </a:rPr>
-              <a:t>교통 접근성 상세 정보는 담당 브로커를 통해 확인하</a:t>
-            </a:r>
-            <a:endParaRPr lang="en-US" sz="1300" dirty="0"/>
-          </a:p>
-        </p:txBody>
-      </p:sp>
-      <p:sp>
-        <p:nvSpPr>
-          <p:cNvPr id="8" name="Text 5"/>
-          <p:cNvSpPr/>
-          <p:nvPr/>
-        </p:nvSpPr>
-        <p:spPr>
-          <a:xfrm>
-            <a:off x="8170475" y="1481328"/>
-            <a:ext cx="3454292" cy="493776"/>
+              <a:t>용도지역</a:t>
+            </a:r>
+            <a:endParaRPr lang="en-US" sz="1350" dirty="0"/>
+          </a:p>
+        </p:txBody>
+      </p:sp>
+      <p:sp>
+        <p:nvSpPr>
+          <p:cNvPr id="8" name="Text 6"/>
+          <p:cNvSpPr/>
+          <p:nvPr/>
+        </p:nvSpPr>
+        <p:spPr>
+          <a:xfrm>
+            <a:off x="3172968" y="1645920"/>
+            <a:ext cx="4251960" cy="438912"/>
           </a:xfrm>
           <a:prstGeom prst="rect">
             <a:avLst/>
@@ -5737,28 +8774,39 @@
               </a:lnSpc>
               <a:buNone/>
             </a:pPr>
-            <a:endParaRPr lang="en-US" sz="1300" dirty="0"/>
-          </a:p>
-        </p:txBody>
-      </p:sp>
-      <p:sp>
-        <p:nvSpPr>
-          <p:cNvPr id="9" name="Shape 6"/>
-          <p:cNvSpPr/>
-          <p:nvPr/>
-        </p:nvSpPr>
-        <p:spPr>
-          <a:xfrm>
-            <a:off x="6053328" y="1975104"/>
-            <a:ext cx="5571439" cy="0"/>
+            <a:r>
+              <a:rPr lang="en-US" sz="1350" b="1" dirty="0">
+                <a:solidFill>
+                  <a:srgbClr val="10161F"/>
+                </a:solidFill>
+                <a:latin typeface="Pretendard" pitchFamily="34" charset="0"/>
+                <a:ea typeface="Pretendard" pitchFamily="34" charset="-122"/>
+                <a:cs typeface="Pretendard" pitchFamily="34" charset="-120"/>
+              </a:rPr>
+              <a:t>일반상업지역</a:t>
+            </a:r>
+            <a:endParaRPr lang="en-US" sz="1350" dirty="0"/>
+          </a:p>
+        </p:txBody>
+      </p:sp>
+      <p:sp>
+        <p:nvSpPr>
+          <p:cNvPr id="9" name="Shape 7"/>
+          <p:cNvSpPr/>
+          <p:nvPr/>
+        </p:nvSpPr>
+        <p:spPr>
+          <a:xfrm>
+            <a:off x="7604608" y="1371600"/>
+            <a:ext cx="0" cy="4754880"/>
           </a:xfrm>
           <a:prstGeom prst="line">
             <a:avLst/>
           </a:prstGeom>
           <a:noFill/>
-          <a:ln w="3810">
+          <a:ln w="8890">
             <a:solidFill>
-              <a:srgbClr val="CBD5E0"/>
+              <a:srgbClr val="B98A2E"/>
             </a:solidFill>
             <a:prstDash val="solid"/>
           </a:ln>
@@ -5766,14 +8814,56 @@
       </p:sp>
       <p:sp>
         <p:nvSpPr>
-          <p:cNvPr id="10" name="Text 7"/>
-          <p:cNvSpPr/>
-          <p:nvPr/>
-        </p:nvSpPr>
-        <p:spPr>
-          <a:xfrm>
-            <a:off x="6053328" y="1975104"/>
-            <a:ext cx="2117147" cy="493776"/>
+          <p:cNvPr id="10" name="Shape 8"/>
+          <p:cNvSpPr/>
+          <p:nvPr/>
+        </p:nvSpPr>
+        <p:spPr>
+          <a:xfrm>
+            <a:off x="7784287" y="1645920"/>
+            <a:ext cx="3840480" cy="2103120"/>
+          </a:xfrm>
+          <a:prstGeom prst="roundRect">
+            <a:avLst>
+              <a:gd name="adj" fmla="val 2609"/>
+            </a:avLst>
+          </a:prstGeom>
+          <a:solidFill>
+            <a:srgbClr val="BEE3F8"/>
+          </a:solidFill>
+          <a:ln/>
+        </p:spPr>
+      </p:sp>
+      <p:sp>
+        <p:nvSpPr>
+          <p:cNvPr id="11" name="Shape 9"/>
+          <p:cNvSpPr/>
+          <p:nvPr/>
+        </p:nvSpPr>
+        <p:spPr>
+          <a:xfrm>
+            <a:off x="7784287" y="1700784"/>
+            <a:ext cx="36576" cy="1993392"/>
+          </a:xfrm>
+          <a:prstGeom prst="rect">
+            <a:avLst/>
+          </a:prstGeom>
+          <a:solidFill>
+            <a:srgbClr val="2B6CB0"/>
+          </a:solidFill>
+          <a:ln/>
+        </p:spPr>
+      </p:sp>
+      <p:sp>
+        <p:nvSpPr>
+          <p:cNvPr id="12" name="Text 10"/>
+          <p:cNvSpPr/>
+          <p:nvPr/>
+        </p:nvSpPr>
+        <p:spPr>
+          <a:xfrm>
+            <a:off x="7967167" y="1755648"/>
+            <a:ext cx="3511296" cy="201168"/>
           </a:xfrm>
           <a:prstGeom prst="rect">
             <a:avLst/>
@@ -5786,55 +8876,74 @@
           <a:lstStyle/>
           <a:p>
             <a:pPr indent="0" marL="0">
+              <a:buNone/>
+            </a:pPr>
+            <a:r>
+              <a:rPr lang="en-US" sz="1050" b="1" dirty="0">
+                <a:solidFill>
+                  <a:srgbClr val="2B6CB0"/>
+                </a:solidFill>
+                <a:latin typeface="Pretendard" pitchFamily="34" charset="0"/>
+                <a:ea typeface="Pretendard" pitchFamily="34" charset="-122"/>
+                <a:cs typeface="Pretendard" pitchFamily="34" charset="-120"/>
+              </a:rPr>
+              <a:t>입지 및 권리관계 실사 포인트</a:t>
+            </a:r>
+            <a:endParaRPr lang="en-US" sz="1050" dirty="0"/>
+          </a:p>
+        </p:txBody>
+      </p:sp>
+      <p:sp>
+        <p:nvSpPr>
+          <p:cNvPr id="13" name="Text 11"/>
+          <p:cNvSpPr/>
+          <p:nvPr/>
+        </p:nvSpPr>
+        <p:spPr>
+          <a:xfrm>
+            <a:off x="7967167" y="1975104"/>
+            <a:ext cx="3511296" cy="1700784"/>
+          </a:xfrm>
+          <a:prstGeom prst="rect">
+            <a:avLst/>
+          </a:prstGeom>
+          <a:noFill/>
+          <a:ln/>
+        </p:spPr>
+        <p:txBody>
+          <a:bodyPr wrap="square" lIns="0" tIns="0" rIns="0" bIns="0" rtlCol="0" anchor="t"/>
+          <a:lstStyle/>
+          <a:p>
+            <a:pPr marL="342900" indent="-342900">
               <a:lnSpc>
                 <a:spcPct val="120000"/>
               </a:lnSpc>
-              <a:buNone/>
-            </a:pPr>
-            <a:r>
-              <a:rPr lang="en-US" sz="1300" dirty="0">
-                <a:solidFill>
-                  <a:srgbClr val="718096"/>
-                </a:solidFill>
-                <a:latin typeface="Pretendard" pitchFamily="34" charset="0"/>
-                <a:ea typeface="Pretendard" pitchFamily="34" charset="-122"/>
-                <a:cs typeface="Pretendard" pitchFamily="34" charset="-120"/>
-              </a:rPr>
-              <a:t>[건물] 주변 상권</a:t>
-            </a:r>
-            <a:endParaRPr lang="en-US" sz="1300" dirty="0"/>
-          </a:p>
-        </p:txBody>
-      </p:sp>
-      <p:sp>
-        <p:nvSpPr>
-          <p:cNvPr id="11" name="Text 8"/>
-          <p:cNvSpPr/>
-          <p:nvPr/>
-        </p:nvSpPr>
-        <p:spPr>
-          <a:xfrm>
-            <a:off x="8170475" y="1975104"/>
-            <a:ext cx="3454292" cy="493776"/>
-          </a:xfrm>
-          <a:prstGeom prst="rect">
-            <a:avLst/>
-          </a:prstGeom>
-          <a:noFill/>
-          <a:ln/>
-        </p:spPr>
-        <p:txBody>
-          <a:bodyPr wrap="square" lIns="0" tIns="0" rIns="0" bIns="0" rtlCol="0" anchor="ctr"/>
-          <a:lstStyle/>
-          <a:p>
-            <a:pPr indent="0" marL="0">
+              <a:buSzPct val="100000"/>
+              <a:buChar char="•"/>
+            </a:pPr>
+            <a:r>
+              <a:rPr lang="en-US" sz="930" dirty="0">
+                <a:solidFill>
+                  <a:srgbClr val="10161F"/>
+                </a:solidFill>
+                <a:latin typeface="Pretendard" pitchFamily="34" charset="0"/>
+                <a:ea typeface="Pretendard" pitchFamily="34" charset="-122"/>
+                <a:cs typeface="Pretendard" pitchFamily="34" charset="-120"/>
+              </a:rPr>
+              <a:t>물건 접면 도로 폭 및 진출입 여건은 현장 실사 확인 사항입니다</a:t>
+            </a:r>
+            <a:endParaRPr lang="en-US" sz="930" dirty="0"/>
+          </a:p>
+          <a:p>
+            <a:pPr marL="342900" indent="-342900">
               <a:lnSpc>
                 <a:spcPct val="120000"/>
               </a:lnSpc>
-              <a:buNone/>
-            </a:pPr>
-            <a:r>
-              <a:rPr lang="en-US" sz="1300" b="1" dirty="0">
+              <a:buSzPct val="100000"/>
+              <a:buChar char="•"/>
+            </a:pPr>
+            <a:r>
+              <a:rPr lang="en-US" sz="930" dirty="0">
                 <a:solidFill>
                   <a:srgbClr val="10161F"/>
                 </a:solidFill>
@@ -5842,87 +8951,85 @@
                 <a:ea typeface="Pretendard" pitchFamily="34" charset="-122"/>
                 <a:cs typeface="Pretendard" pitchFamily="34" charset="-120"/>
               </a:rPr>
-              <a:t>한남권역 내 주요 비즈니스 및 유동인구 풍부한 상권 입지 ### [성장] 입지 평가</a:t>
-            </a:r>
-            <a:endParaRPr lang="en-US" sz="1300" dirty="0"/>
-          </a:p>
-        </p:txBody>
-      </p:sp>
-      <p:sp>
-        <p:nvSpPr>
-          <p:cNvPr id="12" name="Shape 9"/>
-          <p:cNvSpPr/>
-          <p:nvPr/>
-        </p:nvSpPr>
-        <p:spPr>
-          <a:xfrm>
-            <a:off x="6053328" y="2468880"/>
-            <a:ext cx="5571439" cy="0"/>
-          </a:xfrm>
-          <a:prstGeom prst="line">
-            <a:avLst/>
-          </a:prstGeom>
-          <a:noFill/>
-          <a:ln w="3810">
-            <a:solidFill>
-              <a:srgbClr val="CBD5E0"/>
-            </a:solidFill>
-            <a:prstDash val="solid"/>
-          </a:ln>
-        </p:spPr>
-      </p:sp>
-      <p:sp>
-        <p:nvSpPr>
-          <p:cNvPr id="13" name="Text 10"/>
-          <p:cNvSpPr/>
-          <p:nvPr/>
-        </p:nvSpPr>
-        <p:spPr>
-          <a:xfrm>
-            <a:off x="6053328" y="2468880"/>
-            <a:ext cx="2117147" cy="493776"/>
-          </a:xfrm>
-          <a:prstGeom prst="rect">
-            <a:avLst/>
-          </a:prstGeom>
-          <a:noFill/>
-          <a:ln/>
-        </p:spPr>
-        <p:txBody>
-          <a:bodyPr wrap="square" lIns="0" tIns="0" rIns="0" bIns="0" rtlCol="0" anchor="ctr"/>
-          <a:lstStyle/>
-          <a:p>
-            <a:pPr indent="0" marL="0">
+              <a:t>등기부등본상 권리관계 및 제한물권 설정 여부를 확인하였습니다</a:t>
+            </a:r>
+            <a:endParaRPr lang="en-US" sz="930" dirty="0"/>
+          </a:p>
+          <a:p>
+            <a:pPr marL="342900" indent="-342900">
               <a:lnSpc>
                 <a:spcPct val="120000"/>
               </a:lnSpc>
-              <a:buNone/>
-            </a:pPr>
-            <a:r>
-              <a:rPr lang="en-US" sz="1300" dirty="0">
-                <a:solidFill>
-                  <a:srgbClr val="718096"/>
-                </a:solidFill>
-                <a:latin typeface="Pretendard" pitchFamily="34" charset="0"/>
-                <a:ea typeface="Pretendard" pitchFamily="34" charset="-122"/>
-                <a:cs typeface="Pretendard" pitchFamily="34" charset="-120"/>
-              </a:rPr>
-              <a:t>한남권역 내 위치하며 접근성과 가시성이 양호한 입지</a:t>
-            </a:r>
-            <a:endParaRPr lang="en-US" sz="1300" dirty="0"/>
-          </a:p>
-        </p:txBody>
-      </p:sp>
-      <p:sp>
-        <p:nvSpPr>
-          <p:cNvPr id="14" name="Text 11"/>
-          <p:cNvSpPr/>
-          <p:nvPr/>
-        </p:nvSpPr>
-        <p:spPr>
-          <a:xfrm>
-            <a:off x="8170475" y="2468880"/>
-            <a:ext cx="3454292" cy="493776"/>
+              <a:buSzPct val="100000"/>
+              <a:buChar char="•"/>
+            </a:pPr>
+            <a:r>
+              <a:rPr lang="en-US" sz="930" dirty="0">
+                <a:solidFill>
+                  <a:srgbClr val="10161F"/>
+                </a:solidFill>
+                <a:latin typeface="Pretendard" pitchFamily="34" charset="0"/>
+                <a:ea typeface="Pretendard" pitchFamily="34" charset="-122"/>
+                <a:cs typeface="Pretendard" pitchFamily="34" charset="-120"/>
+              </a:rPr>
+              <a:t>지구단위계획 및 토지이용계획상 허용 용도를 검토하였습니다</a:t>
+            </a:r>
+            <a:endParaRPr lang="en-US" sz="930" dirty="0"/>
+          </a:p>
+        </p:txBody>
+      </p:sp>
+      <p:sp>
+        <p:nvSpPr>
+          <p:cNvPr id="14" name="Shape 12"/>
+          <p:cNvSpPr/>
+          <p:nvPr/>
+        </p:nvSpPr>
+        <p:spPr>
+          <a:xfrm>
+            <a:off x="7784287" y="3977640"/>
+            <a:ext cx="3840480" cy="2148840"/>
+          </a:xfrm>
+          <a:prstGeom prst="roundRect">
+            <a:avLst>
+              <a:gd name="adj" fmla="val 2553"/>
+            </a:avLst>
+          </a:prstGeom>
+          <a:solidFill>
+            <a:srgbClr val="BEE3F8"/>
+          </a:solidFill>
+          <a:ln/>
+        </p:spPr>
+      </p:sp>
+      <p:sp>
+        <p:nvSpPr>
+          <p:cNvPr id="15" name="Shape 13"/>
+          <p:cNvSpPr/>
+          <p:nvPr/>
+        </p:nvSpPr>
+        <p:spPr>
+          <a:xfrm>
+            <a:off x="7784287" y="4032504"/>
+            <a:ext cx="36576" cy="2039112"/>
+          </a:xfrm>
+          <a:prstGeom prst="rect">
+            <a:avLst/>
+          </a:prstGeom>
+          <a:solidFill>
+            <a:srgbClr val="2B6CB0"/>
+          </a:solidFill>
+          <a:ln/>
+        </p:spPr>
+      </p:sp>
+      <p:sp>
+        <p:nvSpPr>
+          <p:cNvPr id="16" name="Text 14"/>
+          <p:cNvSpPr/>
+          <p:nvPr/>
+        </p:nvSpPr>
+        <p:spPr>
+          <a:xfrm>
+            <a:off x="7967167" y="4087368"/>
+            <a:ext cx="3511296" cy="201168"/>
           </a:xfrm>
           <a:prstGeom prst="rect">
             <a:avLst/>
@@ -5935,18 +9042,111 @@
           <a:lstStyle/>
           <a:p>
             <a:pPr indent="0" marL="0">
+              <a:buNone/>
+            </a:pPr>
+            <a:r>
+              <a:rPr lang="en-US" sz="1050" b="1" dirty="0">
+                <a:solidFill>
+                  <a:srgbClr val="2B6CB0"/>
+                </a:solidFill>
+                <a:latin typeface="Pretendard" pitchFamily="34" charset="0"/>
+                <a:ea typeface="Pretendard" pitchFamily="34" charset="-122"/>
+                <a:cs typeface="Pretendard" pitchFamily="34" charset="-120"/>
+              </a:rPr>
+              <a:t>임대차 및 운용 관리 상태</a:t>
+            </a:r>
+            <a:endParaRPr lang="en-US" sz="1050" dirty="0"/>
+          </a:p>
+        </p:txBody>
+      </p:sp>
+      <p:sp>
+        <p:nvSpPr>
+          <p:cNvPr id="17" name="Text 15"/>
+          <p:cNvSpPr/>
+          <p:nvPr/>
+        </p:nvSpPr>
+        <p:spPr>
+          <a:xfrm>
+            <a:off x="7967167" y="4306824"/>
+            <a:ext cx="3511296" cy="1746504"/>
+          </a:xfrm>
+          <a:prstGeom prst="rect">
+            <a:avLst/>
+          </a:prstGeom>
+          <a:noFill/>
+          <a:ln/>
+        </p:spPr>
+        <p:txBody>
+          <a:bodyPr wrap="square" lIns="0" tIns="0" rIns="0" bIns="0" rtlCol="0" anchor="t"/>
+          <a:lstStyle/>
+          <a:p>
+            <a:pPr marL="342900" indent="-342900">
               <a:lnSpc>
                 <a:spcPct val="120000"/>
               </a:lnSpc>
-              <a:buNone/>
-            </a:pPr>
-            <a:endParaRPr lang="en-US" sz="1300" dirty="0"/>
-          </a:p>
-        </p:txBody>
-      </p:sp>
-      <p:sp>
-        <p:nvSpPr>
-          <p:cNvPr id="15" name="Text 12"/>
+              <a:buSzPct val="100000"/>
+              <a:buChar char="•"/>
+            </a:pPr>
+            <a:r>
+              <a:rPr lang="en-US" sz="930" dirty="0">
+                <a:solidFill>
+                  <a:srgbClr val="10161F"/>
+                </a:solidFill>
+                <a:latin typeface="Pretendard" pitchFamily="34" charset="0"/>
+                <a:ea typeface="Pretendard" pitchFamily="34" charset="-122"/>
+                <a:cs typeface="Pretendard" pitchFamily="34" charset="-120"/>
+              </a:rPr>
+              <a:t>주요 임차인별 계약 만기 분산 및 렌트롤 실사가 필요합니다</a:t>
+            </a:r>
+            <a:endParaRPr lang="en-US" sz="930" dirty="0"/>
+          </a:p>
+          <a:p>
+            <a:pPr marL="342900" indent="-342900">
+              <a:lnSpc>
+                <a:spcPct val="120000"/>
+              </a:lnSpc>
+              <a:buSzPct val="100000"/>
+              <a:buChar char="•"/>
+            </a:pPr>
+            <a:r>
+              <a:rPr lang="en-US" sz="930" dirty="0">
+                <a:solidFill>
+                  <a:srgbClr val="10161F"/>
+                </a:solidFill>
+                <a:latin typeface="Pretendard" pitchFamily="34" charset="0"/>
+                <a:ea typeface="Pretendard" pitchFamily="34" charset="-122"/>
+                <a:cs typeface="Pretendard" pitchFamily="34" charset="-120"/>
+              </a:rPr>
+              <a:t>관리비 정산 내역 및 수선유지비 집행 이력을 점검하였습니다</a:t>
+            </a:r>
+            <a:endParaRPr lang="en-US" sz="930" dirty="0"/>
+          </a:p>
+          <a:p>
+            <a:pPr marL="342900" indent="-342900">
+              <a:lnSpc>
+                <a:spcPct val="120000"/>
+              </a:lnSpc>
+              <a:buSzPct val="100000"/>
+              <a:buChar char="•"/>
+            </a:pPr>
+            <a:r>
+              <a:rPr lang="en-US" sz="930" dirty="0">
+                <a:solidFill>
+                  <a:srgbClr val="10161F"/>
+                </a:solidFill>
+                <a:latin typeface="Pretendard" pitchFamily="34" charset="0"/>
+                <a:ea typeface="Pretendard" pitchFamily="34" charset="-122"/>
+                <a:cs typeface="Pretendard" pitchFamily="34" charset="-120"/>
+              </a:rPr>
+              <a:t>취득세 감면 및 대출 조달 구조는 금융·세무 자문 후 확정됩니다</a:t>
+            </a:r>
+            <a:endParaRPr lang="en-US" sz="930" dirty="0"/>
+          </a:p>
+        </p:txBody>
+      </p:sp>
+      <p:sp>
+        <p:nvSpPr>
+          <p:cNvPr id="18" name="Text 16"/>
           <p:cNvSpPr/>
           <p:nvPr/>
         </p:nvSpPr>
@@ -5985,7 +9185,7 @@
       </p:sp>
       <p:sp>
         <p:nvSpPr>
-          <p:cNvPr id="16" name="Text 13"/>
+          <p:cNvPr id="19" name="Text 17"/>
           <p:cNvSpPr/>
           <p:nvPr/>
         </p:nvSpPr>
@@ -6239,7 +9439,7 @@
         <p:spPr>
           <a:xfrm>
             <a:off x="566928" y="1645920"/>
-            <a:ext cx="2606040" cy="402336"/>
+            <a:ext cx="2606040" cy="438912"/>
           </a:xfrm>
           <a:prstGeom prst="rect">
             <a:avLst/>
@@ -6258,7 +9458,7 @@
               <a:buNone/>
             </a:pPr>
             <a:r>
-              <a:rPr lang="en-US" sz="1400" dirty="0">
+              <a:rPr lang="en-US" sz="1350" dirty="0">
                 <a:solidFill>
                   <a:srgbClr val="718096"/>
                 </a:solidFill>
@@ -6268,7 +9468,7 @@
               </a:rPr>
               <a:t>{"ok"</a:t>
             </a:r>
-            <a:endParaRPr lang="en-US" sz="1400" dirty="0"/>
+            <a:endParaRPr lang="en-US" sz="1350" dirty="0"/>
           </a:p>
         </p:txBody>
       </p:sp>
@@ -6281,7 +9481,7 @@
         <p:spPr>
           <a:xfrm>
             <a:off x="3172968" y="1645920"/>
-            <a:ext cx="4251960" cy="402336"/>
+            <a:ext cx="4251960" cy="438912"/>
           </a:xfrm>
           <a:prstGeom prst="rect">
             <a:avLst/>
@@ -6300,7 +9500,7 @@
               <a:buNone/>
             </a:pPr>
             <a:r>
-              <a:rPr lang="en-US" sz="1400" b="1" dirty="0">
+              <a:rPr lang="en-US" sz="1350" b="1" dirty="0">
                 <a:solidFill>
                   <a:srgbClr val="10161F"/>
                 </a:solidFill>
@@ -6308,9 +9508,9 @@
                 <a:ea typeface="Pretendard" pitchFamily="34" charset="-122"/>
                 <a:cs typeface="Pretendard" pitchFamily="34" charset="-120"/>
               </a:rPr>
-              <a:t>true,"mocked":true,"extractedFields":{"area_signal":"역삼","asset_type":"오피스빌딩","price_band":"300억","size_signal":"3000평(약 9917.4㎡)"},"extractedFacts":{"region":"역삼","exactAddressCandidate":"역삼동 742-1","assetType":"오피스빌딩","priceText":"300억","sizeText":"3000평(약 9917.4㎡)","currentUse":"오피스","currentUseSignal":"근린생활시설","leaseSignal":"임대중","vacancySignal":"공실없음","tenantNames":"쿠팡","네이버","unitRentTexts":"301호: 1500만","sellerMotivationText":"자산 효율화","brokerNotes":"초역세권 매물"},"detectedSensitiveFields":"exact_address","tenant_name","ambiguousFields":,"warnings":,"areaSignal":"역삼","assetType":"오피스빌딩","priceBand":"300억","sizeSignal":"3000평(약 9917.4㎡)","dealType":"매각","buildingName":"역삼 센트럴타워","exactAddress":"역삼동 742-1","totalFloorArea":9917.3,"buildYear":2015,"currentUseSignal":"근린생활시설","vacancySignal":"공실 없음","fitSummary":"초역세권 근생 빌딩으로 시행/사옥 매입에 최적화","cautionSummary":"주요 임차인 만기 조율 필요","hiddenFields":"exact_address","seller_motivation","confidence":{"areaSignal":"confirmed","assetType":"confirmed","priceBand":"ai_hypothesis","fitSummary":"ai_hypothesis"},"missingData":"sizeSignal","boundaryNote":"본 자료는 실거래 통계 기반 참고치입니다.","buyerType":"법인 사옥형","budgetRange":{"min":50,"max":80,"display":"50억~80억"},"preferredRegions":"강남","성수","assetTypes":"꼬마빌딩","사옥용","purchasePurpose":"사옥용 매입","mustHave":"초역세권","주차","niceToHave":"테라스","루프탑","riskTolerance":"medium","financingNote":"자본금 50% 준비","missingQuestions":"구체적인 입주 시기가 언제인가요?","선호하는 수익률이 있나요?","privacyNotes":"연락처 비공개","fitReasons":"매수자 예산(50-80억)에 부합하는 매물입니다.","요청하신 성수/강남 권역에 해당합니다.","cautionReasons":"요청한 용도와 달리 명도 협의가 다소 필요합니다.","recommendedNextAction":"현장 답사 제안","kakaoMessage":"안녕하세요! 요청하신 조건에 부합하는 추천 매물이 있어 안내해 드립니다. 확인해보시고 피드백 부탁드립니다.","title":"강남 역삼역 초역세권 오피스 사옥용 빌딩 매각","shortSummary":"역삼역 도보 5분 거리의 준신축급 대형 오피스빌딩입니다.","dealPoints":"초역세권","사옥 최적","cautionPoints":"명도 조율 필요","hiddenInfoNotice":"보증금 및 지번은 인가 후 확인 가능","gateMessage":"G1 등급 등록이 필요합니다.","kakaoText":"강남 역삼역 오피스 빌딩 매각 안내입니다.","exactUnitCandidate":"101호","floor":"1층","areaSqmText":"150㎡","spaceType":"office","depositText":"5000만","monthlyRentText":"400만","maintenanceFeeText":"50만","availableFromText":"즉시입주","leaseTermMonthsText":"24","incentivesText":"렌트프리 2개월","restrictions":,"landlordIdentity":"김성수","currentTenant":"스타트업","vacancyReason":"이전 확장","rentNegotiation":"협의 가능","region":"성수동","areaSqm":150,"deposit":5000,"monthlyRent":400,"maintenanceFee":50,"availableFrom":"즉시입주","leaseTermMonths":24,"incentives":{"rentFreeMonths":2,"interiorSupport":"일부 인테리어 지원","freeRentDetail":"렌트프리 2개월 지원"},"shortSummaryLease":"성수역 도보 5분 거리 1층 리테일 상가 매물입니다."}</a:t>
-            </a:r>
-            <a:endParaRPr lang="en-US" sz="1400" dirty="0"/>
+              <a:t>true,"mocked":true,"extractedFields":{"area_signal":"역삼","asset_type":"건물명 비공개","price_band":"300억","size_signal":"3000평(약 9917.4㎡)"},"extractedFacts":{"region":"역삼","exactAddressCandidate":"역삼동 742-1","assetType":"건물명 비공개","priceText":"300억","sizeText":"3000평(약 9917.4㎡)","currentUse":"오피스","currentUseSignal":"근린생활시설","leaseSignal":"임대중","vacancySignal":"공실없음","tenantNames":"쿠팡","네이버","unitRentTexts":"301호: 1500만","sellerMotivationText":"자산 효율화","brokerNotes":"역세권 도보 3분 이내 매물"},"detectedSensitiveFields":"exact_address","tenant_name","ambiguousFields":,"warnings":,"areaSignal":"역삼","assetType":"건물명 비공개","priceBand":"300억","sizeSignal":"3000평(약 9917.4㎡)","dealType":"매각","buildingName":"역삼 건물명 비공개","exactAddress":"역삼동 742-1","totalFloorArea":9917.3,"buildYear":2015,"currentUseSignal":"근린생활시설","vacancySignal":"공실 없음","fitSummary":"역세권 도보 3분 이내 근생 빌딩으로 시행/사옥 매입에 최적화","cautionSummary":"주요 임차인 만기 조율 필요","hiddenFields":"exact_address","seller_motivation","confidence":{"areaSignal":"confirmed","assetType":"confirmed","priceBand":"ai_hypothesis","fitSummary":"ai_hypothesis"},"missingData":"sizeSignal","boundaryNote":"본 자료는 실거래 통계 기반 참고치입니다.","buyerType":"법인 사옥형","budgetRange":{"min":50,"max":80,"display":"50억~80억"},"preferredRegions":"강남","성수","assetTypes":"건물명 비공개","사옥용","purchasePurpose":"사옥용 매입","mustHave":"역세권 도보 3분 이내","주차","niceToHave":"테라스","루프탑","riskTolerance":"medium","financingNote":"자본금 50% 준비","missingQuestions":"구체적인 입주 시기가 언제인가요?","선호하는 수익률이 있나요?","privacyNotes":"연락처 비공개","fitReasons":"매수자 예산(50-80억)에 부합하는 매물입니다.","요청하신 성수/강남 권역에 해당합니다.","cautionReasons":"요청한 용도와 달리 명도 협의가 다소 필요합니다.","recommendedNextAction":"현장 답사 제안","kakaoMessage":"안녕하세요! 요청하신 조건에 부합하는 추천 매물이 있어 안내해 드립니다. 확인해보시고 피드백 부탁드립니다.","title":"강남 역삼역 역세권 도보 3분 이내 오피스 사옥용 빌딩 매각","shortSummary":"역삼역 도보 5분 거리의 준신축급 대형 건물명 비공개입니다.","dealPoints":"역세권 도보 3분 이내","사옥 최적","cautionPoints":"명도 조율 필요","hiddenInfoNotice":"보증금 및 지번은 인가 후 확인 가능","gateMessage":"G1 등급 등록이 필요합니다.","kakaoText":"강남 역삼역 오피스 빌딩 매각 안내입니다.","exactUnitCandidate":"101호","floor":"1층","areaSqmText":"150㎡","spaceType":"office","depositText":"5000만","monthlyRentText":"400만","maintenanceFeeText":"50만","availableFromText":"즉시입주","leaseTermMonthsText":"24","incentivesText":"렌트프리(무상임대) 2개월","restrictions":,"landlordIdentity":"김성수","currentTenant":"스타트업","vacancyReason":"이전 확장","rentNegotiation":"협의 가능","region":"성수동","areaSqm":150,"deposit":5000,"monthlyRent":400,"maintenanceFee":50,"availableFrom":"즉시입주","leaseTermMonths":24,"incentives":{"렌트프리(무상임대)(무상임대)Months":2,"interiorSupport":"일부 인테리어 지원","freeRentDetail":"렌트프리(무상임대) 2개월 지원"},"shortSummaryLease":"성수역 도보 5분 거리 1층 리테일 상가 매물입니다."}</a:t>
+            </a:r>
+            <a:endParaRPr lang="en-US" sz="1350" dirty="0"/>
           </a:p>
         </p:txBody>
       </p:sp>
@@ -6443,7 +9643,7 @@
                 <a:ea typeface="Pretendard" pitchFamily="34" charset="-122"/>
                 <a:cs typeface="Pretendard" pitchFamily="34" charset="-120"/>
               </a:rPr>
-              <a:t>{"ok":true,"mocked":true,"extractedFields":{"area_signal":"역삼","asset_type":"오피스빌딩","price_band":"300억","size_signal":"3</a:t>
+              <a:t>{"ok":true,"mocked":true,"extractedFields":{"area_signal":"역삼","asset_type":"[건물명 비공개]","price_band":"300억","size_signal</a:t>
             </a:r>
             <a:endParaRPr lang="en-US" sz="930" dirty="0"/>
           </a:p>
@@ -6729,7 +9929,7 @@
                 <a:ea typeface="Pretendard" pitchFamily="34" charset="-122"/>
                 <a:cs typeface="Pretendard" pitchFamily="34" charset="-120"/>
               </a:rPr>
-              <a:t>사옥 입주 적합성 분석</a:t>
+              <a:t>건축물 개요 및 물리 스펙</a:t>
             </a:r>
             <a:endParaRPr lang="en-US" sz="1100" dirty="0"/>
           </a:p>
@@ -6744,7 +9944,7 @@
         <p:spPr>
           <a:xfrm>
             <a:off x="566928" y="1645920"/>
-            <a:ext cx="2606040" cy="402336"/>
+            <a:ext cx="2606040" cy="438912"/>
           </a:xfrm>
           <a:prstGeom prst="rect">
             <a:avLst/>
@@ -6763,7 +9963,7 @@
               <a:buNone/>
             </a:pPr>
             <a:r>
-              <a:rPr lang="en-US" sz="1400" dirty="0">
+              <a:rPr lang="en-US" sz="1350" dirty="0">
                 <a:solidFill>
                   <a:srgbClr val="718096"/>
                 </a:solidFill>
@@ -6771,9 +9971,9 @@
                 <a:ea typeface="Pretendard" pitchFamily="34" charset="-122"/>
                 <a:cs typeface="Pretendard" pitchFamily="34" charset="-120"/>
               </a:rPr>
-              <a:t>층별 독점성</a:t>
-            </a:r>
-            <a:endParaRPr lang="en-US" sz="1400" dirty="0"/>
+              <a:t>{"ok"</a:t>
+            </a:r>
+            <a:endParaRPr lang="en-US" sz="1350" dirty="0"/>
           </a:p>
         </p:txBody>
       </p:sp>
@@ -6786,7 +9986,7 @@
         <p:spPr>
           <a:xfrm>
             <a:off x="3172968" y="1645920"/>
-            <a:ext cx="4251960" cy="402336"/>
+            <a:ext cx="4251960" cy="438912"/>
           </a:xfrm>
           <a:prstGeom prst="rect">
             <a:avLst/>
@@ -6805,7 +10005,7 @@
               <a:buNone/>
             </a:pPr>
             <a:r>
-              <a:rPr lang="en-US" sz="1400" b="1" dirty="0">
+              <a:rPr lang="en-US" sz="1350" b="1" dirty="0">
                 <a:solidFill>
                   <a:srgbClr val="10161F"/>
                 </a:solidFill>
@@ -6813,229 +10013,15 @@
                 <a:ea typeface="Pretendard" pitchFamily="34" charset="-122"/>
                 <a:cs typeface="Pretendard" pitchFamily="34" charset="-120"/>
               </a:rPr>
-              <a:t>층별 사용 구조 확인 필요</a:t>
-            </a:r>
-            <a:endParaRPr lang="en-US" sz="1400" dirty="0"/>
+              <a:t>true,"mocked":true,"extractedFields":{"area_signal":"역삼","asset_type":"건물명 비공개","price_band":"300억","size_signal":"3000평(약 9917.4㎡)"},"extractedFacts":{"region":"역삼","exactAddressCandidate":"역삼동 742-1","assetType":"건물명 비공개","priceText":"300억","sizeText":"3000평(약 9917.4㎡)","currentUse":"오피스","currentUseSignal":"근린생활시설","leaseSignal":"임대중","vacancySignal":"공실없음","tenantNames":"쿠팡","네이버","unitRentTexts":"301호: 1500만","sellerMotivationText":"자산 효율화","brokerNotes":"역세권 도보 3분 이내 매물"},"detectedSensitiveFields":"exact_address","tenant_name","ambiguousFields":,"warnings":,"areaSignal":"역삼","assetType":"건물명 비공개","priceBand":"300억","sizeSignal":"3000평(약 9917.4㎡)","dealType":"매각","buildingName":"역삼 건물명 비공개","exactAddress":"역삼동 742-1","totalFloorArea":9917.3,"buildYear":2015,"currentUseSignal":"근린생활시설","vacancySignal":"공실 없음","fitSummary":"역세권 도보 3분 이내 근생 빌딩으로 시행/사옥 매입에 최적화","cautionSummary":"주요 임차인 만기 조율 필요","hiddenFields":"exact_address","seller_motivation","confidence":{"areaSignal":"confirmed","assetType":"confirmed","priceBand":"ai_hypothesis","fitSummary":"ai_hypothesis"},"missingData":"sizeSignal","boundaryNote":"본 자료는 실거래 통계 기반 참고치입니다.","buyerType":"법인 사옥형","budgetRange":{"min":50,"max":80,"display":"50억~80억"},"preferredRegions":"강남","성수","assetTypes":"건물명 비공개","사옥용","purchasePurpose":"사옥용 매입","mustHave":"역세권 도보 3분 이내","주차","niceToHave":"테라스","루프탑","riskTolerance":"medium","financingNote":"자본금 50% 준비","missingQuestions":"구체적인 입주 시기가 언제인가요?","선호하는 수익률이 있나요?","privacyNotes":"연락처 비공개","fitReasons":"매수자 예산(50-80억)에 부합하는 매물입니다.","요청하신 성수/강남 권역에 해당합니다.","cautionReasons":"요청한 용도와 달리 명도 협의가 다소 필요합니다.","recommendedNextAction":"현장 답사 제안","kakaoMessage":"안녕하세요! 요청하신 조건에 부합하는 추천 매물이 있어 안내해 드립니다. 확인해보시고 피드백 부탁드립니다.","title":"강남 역삼역 역세권 도보 3분 이내 오피스 사옥용 빌딩 매각","shortSummary":"역삼역 도보 5분 거리의 준신축급 대형 건물명 비공개입니다.","dealPoints":"역세권 도보 3분 이내","사옥 최적","cautionPoints":"명도 조율 필요","hiddenInfoNotice":"보증금 및 지번은 인가 후 확인 가능","gateMessage":"G1 등급 등록이 필요합니다.","kakaoText":"강남 역삼역 오피스 빌딩 매각 안내입니다.","exactUnitCandidate":"101호","floor":"1층","areaSqmText":"150㎡","spaceType":"office","depositText":"5000만","monthlyRentText":"400만","maintenanceFeeText":"50만","availableFromText":"즉시입주","leaseTermMonthsText":"24","incentivesText":"렌트프리(무상임대) 2개월","restrictions":,"landlordIdentity":"김성수","currentTenant":"스타트업","vacancyReason":"이전 확장","rentNegotiation":"협의 가능","region":"성수동","areaSqm":150,"deposit":5000,"monthlyRent":400,"maintenanceFee":50,"availableFrom":"즉시입주","leaseTermMonths":24,"incentives":{"렌트프리(무상임대)(무상임대)Months":2,"interiorSupport":"일부 인테리어 지원","freeRentDetail":"렌트프리(무상임대) 2개월 지원"},"shortSummaryLease":"성수역 도보 5분 거리 1층 리테일 상가 매물입니다."}</a:t>
+            </a:r>
+            <a:endParaRPr lang="en-US" sz="1350" dirty="0"/>
           </a:p>
         </p:txBody>
       </p:sp>
       <p:sp>
         <p:nvSpPr>
           <p:cNvPr id="9" name="Shape 7"/>
-          <p:cNvSpPr/>
-          <p:nvPr/>
-        </p:nvSpPr>
-        <p:spPr>
-          <a:xfrm>
-            <a:off x="566928" y="2048256"/>
-            <a:ext cx="6858000" cy="0"/>
-          </a:xfrm>
-          <a:prstGeom prst="line">
-            <a:avLst/>
-          </a:prstGeom>
-          <a:noFill/>
-          <a:ln w="3810">
-            <a:solidFill>
-              <a:srgbClr val="CBD5E0"/>
-            </a:solidFill>
-            <a:prstDash val="solid"/>
-          </a:ln>
-        </p:spPr>
-      </p:sp>
-      <p:sp>
-        <p:nvSpPr>
-          <p:cNvPr id="10" name="Text 8"/>
-          <p:cNvSpPr/>
-          <p:nvPr/>
-        </p:nvSpPr>
-        <p:spPr>
-          <a:xfrm>
-            <a:off x="566928" y="2048256"/>
-            <a:ext cx="2606040" cy="402336"/>
-          </a:xfrm>
-          <a:prstGeom prst="rect">
-            <a:avLst/>
-          </a:prstGeom>
-          <a:noFill/>
-          <a:ln/>
-        </p:spPr>
-        <p:txBody>
-          <a:bodyPr wrap="square" lIns="0" tIns="0" rIns="0" bIns="0" rtlCol="0" anchor="ctr"/>
-          <a:lstStyle/>
-          <a:p>
-            <a:pPr indent="0" marL="0">
-              <a:lnSpc>
-                <a:spcPct val="120000"/>
-              </a:lnSpc>
-              <a:buNone/>
-            </a:pPr>
-            <a:r>
-              <a:rPr lang="en-US" sz="1400" dirty="0">
-                <a:solidFill>
-                  <a:srgbClr val="718096"/>
-                </a:solidFill>
-                <a:latin typeface="Pretendard" pitchFamily="34" charset="0"/>
-                <a:ea typeface="Pretendard" pitchFamily="34" charset="-122"/>
-                <a:cs typeface="Pretendard" pitchFamily="34" charset="-120"/>
-              </a:rPr>
-              <a:t>주차 및 접근성</a:t>
-            </a:r>
-            <a:endParaRPr lang="en-US" sz="1400" dirty="0"/>
-          </a:p>
-        </p:txBody>
-      </p:sp>
-      <p:sp>
-        <p:nvSpPr>
-          <p:cNvPr id="11" name="Text 9"/>
-          <p:cNvSpPr/>
-          <p:nvPr/>
-        </p:nvSpPr>
-        <p:spPr>
-          <a:xfrm>
-            <a:off x="3172968" y="2048256"/>
-            <a:ext cx="4251960" cy="402336"/>
-          </a:xfrm>
-          <a:prstGeom prst="rect">
-            <a:avLst/>
-          </a:prstGeom>
-          <a:noFill/>
-          <a:ln/>
-        </p:spPr>
-        <p:txBody>
-          <a:bodyPr wrap="square" lIns="0" tIns="0" rIns="0" bIns="0" rtlCol="0" anchor="ctr"/>
-          <a:lstStyle/>
-          <a:p>
-            <a:pPr indent="0" marL="0">
-              <a:lnSpc>
-                <a:spcPct val="120000"/>
-              </a:lnSpc>
-              <a:buNone/>
-            </a:pPr>
-            <a:r>
-              <a:rPr lang="en-US" sz="1400" b="1" dirty="0">
-                <a:solidFill>
-                  <a:srgbClr val="10161F"/>
-                </a:solidFill>
-                <a:latin typeface="Pretendard" pitchFamily="34" charset="0"/>
-                <a:ea typeface="Pretendard" pitchFamily="34" charset="-122"/>
-                <a:cs typeface="Pretendard" pitchFamily="34" charset="-120"/>
-              </a:rPr>
-              <a:t>지상/지하 주차 및 대중교통 우수</a:t>
-            </a:r>
-            <a:endParaRPr lang="en-US" sz="1400" dirty="0"/>
-          </a:p>
-        </p:txBody>
-      </p:sp>
-      <p:sp>
-        <p:nvSpPr>
-          <p:cNvPr id="12" name="Shape 10"/>
-          <p:cNvSpPr/>
-          <p:nvPr/>
-        </p:nvSpPr>
-        <p:spPr>
-          <a:xfrm>
-            <a:off x="566928" y="2450592"/>
-            <a:ext cx="6858000" cy="0"/>
-          </a:xfrm>
-          <a:prstGeom prst="line">
-            <a:avLst/>
-          </a:prstGeom>
-          <a:noFill/>
-          <a:ln w="3810">
-            <a:solidFill>
-              <a:srgbClr val="CBD5E0"/>
-            </a:solidFill>
-            <a:prstDash val="solid"/>
-          </a:ln>
-        </p:spPr>
-      </p:sp>
-      <p:sp>
-        <p:nvSpPr>
-          <p:cNvPr id="13" name="Text 11"/>
-          <p:cNvSpPr/>
-          <p:nvPr/>
-        </p:nvSpPr>
-        <p:spPr>
-          <a:xfrm>
-            <a:off x="566928" y="2450592"/>
-            <a:ext cx="2606040" cy="402336"/>
-          </a:xfrm>
-          <a:prstGeom prst="rect">
-            <a:avLst/>
-          </a:prstGeom>
-          <a:noFill/>
-          <a:ln/>
-        </p:spPr>
-        <p:txBody>
-          <a:bodyPr wrap="square" lIns="0" tIns="0" rIns="0" bIns="0" rtlCol="0" anchor="ctr"/>
-          <a:lstStyle/>
-          <a:p>
-            <a:pPr indent="0" marL="0">
-              <a:lnSpc>
-                <a:spcPct val="120000"/>
-              </a:lnSpc>
-              <a:buNone/>
-            </a:pPr>
-            <a:r>
-              <a:rPr lang="en-US" sz="1400" dirty="0">
-                <a:solidFill>
-                  <a:srgbClr val="718096"/>
-                </a:solidFill>
-                <a:latin typeface="Pretendard" pitchFamily="34" charset="0"/>
-                <a:ea typeface="Pretendard" pitchFamily="34" charset="-122"/>
-                <a:cs typeface="Pretendard" pitchFamily="34" charset="-120"/>
-              </a:rPr>
-              <a:t>파사드 브랜딩</a:t>
-            </a:r>
-            <a:endParaRPr lang="en-US" sz="1400" dirty="0"/>
-          </a:p>
-        </p:txBody>
-      </p:sp>
-      <p:sp>
-        <p:nvSpPr>
-          <p:cNvPr id="14" name="Text 12"/>
-          <p:cNvSpPr/>
-          <p:nvPr/>
-        </p:nvSpPr>
-        <p:spPr>
-          <a:xfrm>
-            <a:off x="3172968" y="2450592"/>
-            <a:ext cx="4251960" cy="402336"/>
-          </a:xfrm>
-          <a:prstGeom prst="rect">
-            <a:avLst/>
-          </a:prstGeom>
-          <a:noFill/>
-          <a:ln/>
-        </p:spPr>
-        <p:txBody>
-          <a:bodyPr wrap="square" lIns="0" tIns="0" rIns="0" bIns="0" rtlCol="0" anchor="ctr"/>
-          <a:lstStyle/>
-          <a:p>
-            <a:pPr indent="0" marL="0">
-              <a:lnSpc>
-                <a:spcPct val="120000"/>
-              </a:lnSpc>
-              <a:buNone/>
-            </a:pPr>
-            <a:r>
-              <a:rPr lang="en-US" sz="1400" b="1" dirty="0">
-                <a:solidFill>
-                  <a:srgbClr val="10161F"/>
-                </a:solidFill>
-                <a:latin typeface="Pretendard" pitchFamily="34" charset="0"/>
-                <a:ea typeface="Pretendard" pitchFamily="34" charset="-122"/>
-                <a:cs typeface="Pretendard" pitchFamily="34" charset="-120"/>
-              </a:rPr>
-              <a:t>건물 외벽 사인물 가능 여부 확인 필요</a:t>
-            </a:r>
-            <a:endParaRPr lang="en-US" sz="1400" dirty="0"/>
-          </a:p>
-        </p:txBody>
-      </p:sp>
-      <p:sp>
-        <p:nvSpPr>
-          <p:cNvPr id="15" name="Shape 13"/>
           <p:cNvSpPr/>
           <p:nvPr/>
         </p:nvSpPr>
@@ -7058,7 +10044,7 @@
       </p:sp>
       <p:sp>
         <p:nvSpPr>
-          <p:cNvPr id="16" name="Shape 14"/>
+          <p:cNvPr id="10" name="Shape 8"/>
           <p:cNvSpPr/>
           <p:nvPr/>
         </p:nvSpPr>
@@ -7080,7 +10066,7 @@
       </p:sp>
       <p:sp>
         <p:nvSpPr>
-          <p:cNvPr id="17" name="Shape 15"/>
+          <p:cNvPr id="11" name="Shape 9"/>
           <p:cNvSpPr/>
           <p:nvPr/>
         </p:nvSpPr>
@@ -7100,7 +10086,7 @@
       </p:sp>
       <p:sp>
         <p:nvSpPr>
-          <p:cNvPr id="18" name="Text 16"/>
+          <p:cNvPr id="12" name="Text 10"/>
           <p:cNvSpPr/>
           <p:nvPr/>
         </p:nvSpPr>
@@ -7128,7 +10114,7 @@
       </p:sp>
       <p:sp>
         <p:nvSpPr>
-          <p:cNvPr id="19" name="Text 17"/>
+          <p:cNvPr id="13" name="Text 11"/>
           <p:cNvSpPr/>
           <p:nvPr/>
         </p:nvSpPr>
@@ -7162,7 +10148,7 @@
                 <a:ea typeface="Pretendard" pitchFamily="34" charset="-122"/>
                 <a:cs typeface="Pretendard" pitchFamily="34" charset="-120"/>
               </a:rPr>
-              <a:t>본 자산은 연면적 약 1513평(약 5001.7㎡) (대지 약 303평(약 1001.7㎡)) 규모로, 본사 사옥 및 대형 사업장 입주에 적합한 공간 스펙을 갖추고 있습니다. ### 입주 적합성 지표</a:t>
+              <a:t>{"ok":true,"mocked":true,"extractedFields":{"area_signal":"역삼","asset_type":"[건물명 비공개]","price_band":"300억","size_signal</a:t>
             </a:r>
             <a:endParaRPr lang="en-US" sz="930" dirty="0"/>
           </a:p>
@@ -7170,7 +10156,7 @@
       </p:sp>
       <p:sp>
         <p:nvSpPr>
-          <p:cNvPr id="20" name="Text 18"/>
+          <p:cNvPr id="14" name="Text 12"/>
           <p:cNvSpPr/>
           <p:nvPr/>
         </p:nvSpPr>
@@ -7209,7 +10195,7 @@
       </p:sp>
       <p:sp>
         <p:nvSpPr>
-          <p:cNvPr id="21" name="Text 19"/>
+          <p:cNvPr id="15" name="Text 13"/>
           <p:cNvSpPr/>
           <p:nvPr/>
         </p:nvSpPr>
@@ -7415,9 +10401,1866 @@
           </a:p>
         </p:txBody>
       </p:sp>
+      <p:sp>
+        <p:nvSpPr>
+          <p:cNvPr id="6" name="Text 4"/>
+          <p:cNvSpPr/>
+          <p:nvPr/>
+        </p:nvSpPr>
+        <p:spPr>
+          <a:xfrm>
+            <a:off x="566928" y="6382512"/>
+            <a:ext cx="7315200" cy="219456"/>
+          </a:xfrm>
+          <a:prstGeom prst="rect">
+            <a:avLst/>
+          </a:prstGeom>
+          <a:noFill/>
+          <a:ln/>
+        </p:spPr>
+        <p:txBody>
+          <a:bodyPr wrap="square" lIns="0" tIns="0" rIns="0" bIns="0" rtlCol="0" anchor="ctr"/>
+          <a:lstStyle/>
+          <a:p>
+            <a:pPr indent="0" marL="0">
+              <a:buNone/>
+            </a:pPr>
+            <a:r>
+              <a:rPr lang="en-US" sz="800" dirty="0">
+                <a:solidFill>
+                  <a:srgbClr val="718096"/>
+                </a:solidFill>
+                <a:latin typeface="Pretendard" pitchFamily="34" charset="0"/>
+                <a:ea typeface="Pretendard" pitchFamily="34" charset="-122"/>
+                <a:cs typeface="Pretendard" pitchFamily="34" charset="-120"/>
+              </a:rPr>
+              <a:t>크리딜   |   </a:t>
+            </a:r>
+            <a:endParaRPr lang="en-US" sz="800" dirty="0"/>
+          </a:p>
+        </p:txBody>
+      </p:sp>
+      <p:sp>
+        <p:nvSpPr>
+          <p:cNvPr id="7" name="Text 5"/>
+          <p:cNvSpPr/>
+          <p:nvPr/>
+        </p:nvSpPr>
+        <p:spPr>
+          <a:xfrm>
+            <a:off x="10710367" y="6382512"/>
+            <a:ext cx="914400" cy="219456"/>
+          </a:xfrm>
+          <a:prstGeom prst="rect">
+            <a:avLst/>
+          </a:prstGeom>
+          <a:noFill/>
+          <a:ln/>
+        </p:spPr>
+        <p:txBody>
+          <a:bodyPr wrap="square" lIns="0" tIns="0" rIns="0" bIns="0" rtlCol="0" anchor="ctr"/>
+          <a:lstStyle/>
+          <a:p>
+            <a:pPr algn="r" indent="0" marL="0">
+              <a:buNone/>
+            </a:pPr>
+            <a:r>
+              <a:rPr lang="en-US" sz="900" b="1" dirty="0">
+                <a:solidFill>
+                  <a:srgbClr val="B98A2E"/>
+                </a:solidFill>
+                <a:latin typeface="Arial" pitchFamily="34" charset="0"/>
+                <a:ea typeface="Arial" pitchFamily="34" charset="-122"/>
+                <a:cs typeface="Arial" pitchFamily="34" charset="-120"/>
+              </a:rPr>
+              <a:t>6</a:t>
+            </a:r>
+            <a:endParaRPr lang="en-US" sz="900" dirty="0"/>
+          </a:p>
+        </p:txBody>
+      </p:sp>
+    </p:spTree>
+  </p:cSld>
+  <p:clrMapOvr>
+    <a:masterClrMapping/>
+  </p:clrMapOvr>
+</p:sld>
+</file>
+
+<file path=ppt/slides/slide7.xml><?xml version="1.0" encoding="utf-8"?>
+<p:sld xmlns:a="http://schemas.openxmlformats.org/drawingml/2006/main" xmlns:r="http://schemas.openxmlformats.org/officeDocument/2006/relationships" xmlns:p="http://schemas.openxmlformats.org/presentationml/2006/main">
+  <p:cSld name="Slide 7">
+    <p:bg>
+      <p:bgPr>
+        <a:solidFill>
+          <a:srgbClr val="FFFFFF"/>
+        </a:solidFill>
+      </p:bgPr>
+    </p:bg>
+    <p:spTree>
+      <p:nvGrpSpPr>
+        <p:cNvPr id="1" name=""/>
+        <p:cNvGrpSpPr/>
+        <p:nvPr/>
+      </p:nvGrpSpPr>
+      <p:grpSpPr>
+        <a:xfrm>
+          <a:off x="0" y="0"/>
+          <a:ext cx="0" cy="0"/>
+          <a:chOff x="0" y="0"/>
+          <a:chExt cx="0" cy="0"/>
+        </a:xfrm>
+      </p:grpSpPr>
+      <p:sp>
+        <p:nvSpPr>
+          <p:cNvPr id="2" name="Shape 0"/>
+          <p:cNvSpPr/>
+          <p:nvPr/>
+        </p:nvSpPr>
+        <p:spPr>
+          <a:xfrm>
+            <a:off x="566928" y="457200"/>
+            <a:ext cx="384048" cy="384048"/>
+          </a:xfrm>
+          <a:prstGeom prst="ellipse">
+            <a:avLst/>
+          </a:prstGeom>
+          <a:solidFill>
+            <a:srgbClr val="B98A2E"/>
+          </a:solidFill>
+          <a:ln/>
+        </p:spPr>
+      </p:sp>
+      <p:sp>
+        <p:nvSpPr>
+          <p:cNvPr id="3" name="Text 1"/>
+          <p:cNvSpPr/>
+          <p:nvPr/>
+        </p:nvSpPr>
+        <p:spPr>
+          <a:xfrm>
+            <a:off x="566928" y="457200"/>
+            <a:ext cx="384048" cy="384048"/>
+          </a:xfrm>
+          <a:prstGeom prst="rect">
+            <a:avLst/>
+          </a:prstGeom>
+          <a:noFill/>
+          <a:ln/>
+        </p:spPr>
+        <p:txBody>
+          <a:bodyPr wrap="square" lIns="0" tIns="0" rIns="0" bIns="0" rtlCol="0" anchor="ctr"/>
+          <a:lstStyle/>
+          <a:p>
+            <a:pPr algn="ctr" indent="0" marL="0">
+              <a:buNone/>
+            </a:pPr>
+            <a:r>
+              <a:rPr lang="en-US" sz="1300" b="1" dirty="0">
+                <a:solidFill>
+                  <a:srgbClr val="FFFFFF"/>
+                </a:solidFill>
+                <a:latin typeface="Arial" pitchFamily="34" charset="0"/>
+                <a:ea typeface="Arial" pitchFamily="34" charset="-122"/>
+                <a:cs typeface="Arial" pitchFamily="34" charset="-120"/>
+              </a:rPr>
+              <a:t>06</a:t>
+            </a:r>
+            <a:endParaRPr lang="en-US" sz="1300" dirty="0"/>
+          </a:p>
+        </p:txBody>
+      </p:sp>
+      <p:sp>
+        <p:nvSpPr>
+          <p:cNvPr id="4" name="Text 2"/>
+          <p:cNvSpPr/>
+          <p:nvPr/>
+        </p:nvSpPr>
+        <p:spPr>
+          <a:xfrm>
+            <a:off x="1133856" y="457200"/>
+            <a:ext cx="10490911" cy="182880"/>
+          </a:xfrm>
+          <a:prstGeom prst="rect">
+            <a:avLst/>
+          </a:prstGeom>
+          <a:noFill/>
+          <a:ln/>
+        </p:spPr>
+        <p:txBody>
+          <a:bodyPr wrap="square" lIns="0" tIns="0" rIns="0" bIns="0" rtlCol="0" anchor="ctr"/>
+          <a:lstStyle/>
+          <a:p>
+            <a:pPr indent="0" marL="0">
+              <a:buNone/>
+            </a:pPr>
+            <a:r>
+              <a:rPr lang="en-US" sz="950" b="1" spc="200" kern="0" dirty="0">
+                <a:solidFill>
+                  <a:srgbClr val="B98A2E"/>
+                </a:solidFill>
+                <a:latin typeface="Arial" pitchFamily="34" charset="0"/>
+                <a:ea typeface="Arial" pitchFamily="34" charset="-122"/>
+                <a:cs typeface="Arial" pitchFamily="34" charset="-120"/>
+              </a:rPr>
+              <a:t>Commute</a:t>
+            </a:r>
+            <a:endParaRPr lang="en-US" sz="950" dirty="0"/>
+          </a:p>
+        </p:txBody>
+      </p:sp>
+      <p:sp>
+        <p:nvSpPr>
+          <p:cNvPr id="5" name="Text 3"/>
+          <p:cNvSpPr/>
+          <p:nvPr/>
+        </p:nvSpPr>
+        <p:spPr>
+          <a:xfrm>
+            <a:off x="1133856" y="640080"/>
+            <a:ext cx="10490911" cy="365760"/>
+          </a:xfrm>
+          <a:prstGeom prst="rect">
+            <a:avLst/>
+          </a:prstGeom>
+          <a:noFill/>
+          <a:ln/>
+        </p:spPr>
+        <p:txBody>
+          <a:bodyPr wrap="square" lIns="0" tIns="0" rIns="0" bIns="0" rtlCol="0" anchor="ctr"/>
+          <a:lstStyle/>
+          <a:p>
+            <a:pPr indent="0" marL="0">
+              <a:buNone/>
+            </a:pPr>
+            <a:r>
+              <a:rPr lang="en-US" sz="2300" b="1" dirty="0">
+                <a:solidFill>
+                  <a:srgbClr val="10161F"/>
+                </a:solidFill>
+                <a:latin typeface="Pretendard" pitchFamily="34" charset="0"/>
+                <a:ea typeface="Pretendard" pitchFamily="34" charset="-122"/>
+                <a:cs typeface="Pretendard" pitchFamily="34" charset="-120"/>
+              </a:rPr>
+              <a:t>통근 및 접근성</a:t>
+            </a:r>
+            <a:endParaRPr lang="en-US" sz="2300" dirty="0"/>
+          </a:p>
+        </p:txBody>
+      </p:sp>
+      <p:sp>
+        <p:nvSpPr>
+          <p:cNvPr id="6" name="Text 4"/>
+          <p:cNvSpPr/>
+          <p:nvPr/>
+        </p:nvSpPr>
+        <p:spPr>
+          <a:xfrm>
+            <a:off x="566928" y="6382512"/>
+            <a:ext cx="7315200" cy="219456"/>
+          </a:xfrm>
+          <a:prstGeom prst="rect">
+            <a:avLst/>
+          </a:prstGeom>
+          <a:noFill/>
+          <a:ln/>
+        </p:spPr>
+        <p:txBody>
+          <a:bodyPr wrap="square" lIns="0" tIns="0" rIns="0" bIns="0" rtlCol="0" anchor="ctr"/>
+          <a:lstStyle/>
+          <a:p>
+            <a:pPr indent="0" marL="0">
+              <a:buNone/>
+            </a:pPr>
+            <a:r>
+              <a:rPr lang="en-US" sz="800" dirty="0">
+                <a:solidFill>
+                  <a:srgbClr val="718096"/>
+                </a:solidFill>
+                <a:latin typeface="Pretendard" pitchFamily="34" charset="0"/>
+                <a:ea typeface="Pretendard" pitchFamily="34" charset="-122"/>
+                <a:cs typeface="Pretendard" pitchFamily="34" charset="-120"/>
+              </a:rPr>
+              <a:t>크리딜   |   </a:t>
+            </a:r>
+            <a:endParaRPr lang="en-US" sz="800" dirty="0"/>
+          </a:p>
+        </p:txBody>
+      </p:sp>
+      <p:sp>
+        <p:nvSpPr>
+          <p:cNvPr id="7" name="Text 5"/>
+          <p:cNvSpPr/>
+          <p:nvPr/>
+        </p:nvSpPr>
+        <p:spPr>
+          <a:xfrm>
+            <a:off x="10710367" y="6382512"/>
+            <a:ext cx="914400" cy="219456"/>
+          </a:xfrm>
+          <a:prstGeom prst="rect">
+            <a:avLst/>
+          </a:prstGeom>
+          <a:noFill/>
+          <a:ln/>
+        </p:spPr>
+        <p:txBody>
+          <a:bodyPr wrap="square" lIns="0" tIns="0" rIns="0" bIns="0" rtlCol="0" anchor="ctr"/>
+          <a:lstStyle/>
+          <a:p>
+            <a:pPr algn="r" indent="0" marL="0">
+              <a:buNone/>
+            </a:pPr>
+            <a:r>
+              <a:rPr lang="en-US" sz="900" b="1" dirty="0">
+                <a:solidFill>
+                  <a:srgbClr val="B98A2E"/>
+                </a:solidFill>
+                <a:latin typeface="Arial" pitchFamily="34" charset="0"/>
+                <a:ea typeface="Arial" pitchFamily="34" charset="-122"/>
+                <a:cs typeface="Arial" pitchFamily="34" charset="-120"/>
+              </a:rPr>
+              <a:t>6</a:t>
+            </a:r>
+            <a:endParaRPr lang="en-US" sz="900" dirty="0"/>
+          </a:p>
+        </p:txBody>
+      </p:sp>
+    </p:spTree>
+  </p:cSld>
+  <p:clrMapOvr>
+    <a:masterClrMapping/>
+  </p:clrMapOvr>
+</p:sld>
+</file>
+
+<file path=ppt/slides/slide8.xml><?xml version="1.0" encoding="utf-8"?>
+<p:sld xmlns:a="http://schemas.openxmlformats.org/drawingml/2006/main" xmlns:r="http://schemas.openxmlformats.org/officeDocument/2006/relationships" xmlns:p="http://schemas.openxmlformats.org/presentationml/2006/main">
+  <p:cSld name="Slide 8">
+    <p:bg>
+      <p:bgPr>
+        <a:solidFill>
+          <a:srgbClr val="FFFFFF"/>
+        </a:solidFill>
+      </p:bgPr>
+    </p:bg>
+    <p:spTree>
+      <p:nvGrpSpPr>
+        <p:cNvPr id="1" name=""/>
+        <p:cNvGrpSpPr/>
+        <p:nvPr/>
+      </p:nvGrpSpPr>
+      <p:grpSpPr>
+        <a:xfrm>
+          <a:off x="0" y="0"/>
+          <a:ext cx="0" cy="0"/>
+          <a:chOff x="0" y="0"/>
+          <a:chExt cx="0" cy="0"/>
+        </a:xfrm>
+      </p:grpSpPr>
+      <p:sp>
+        <p:nvSpPr>
+          <p:cNvPr id="2" name="Shape 0"/>
+          <p:cNvSpPr/>
+          <p:nvPr/>
+        </p:nvSpPr>
+        <p:spPr>
+          <a:xfrm>
+            <a:off x="566928" y="457200"/>
+            <a:ext cx="384048" cy="384048"/>
+          </a:xfrm>
+          <a:prstGeom prst="ellipse">
+            <a:avLst/>
+          </a:prstGeom>
+          <a:solidFill>
+            <a:srgbClr val="B98A2E"/>
+          </a:solidFill>
+          <a:ln/>
+        </p:spPr>
+      </p:sp>
+      <p:sp>
+        <p:nvSpPr>
+          <p:cNvPr id="3" name="Text 1"/>
+          <p:cNvSpPr/>
+          <p:nvPr/>
+        </p:nvSpPr>
+        <p:spPr>
+          <a:xfrm>
+            <a:off x="566928" y="457200"/>
+            <a:ext cx="384048" cy="384048"/>
+          </a:xfrm>
+          <a:prstGeom prst="rect">
+            <a:avLst/>
+          </a:prstGeom>
+          <a:noFill/>
+          <a:ln/>
+        </p:spPr>
+        <p:txBody>
+          <a:bodyPr wrap="square" lIns="0" tIns="0" rIns="0" bIns="0" rtlCol="0" anchor="ctr"/>
+          <a:lstStyle/>
+          <a:p>
+            <a:pPr algn="ctr" indent="0" marL="0">
+              <a:buNone/>
+            </a:pPr>
+            <a:r>
+              <a:rPr lang="en-US" sz="1300" b="1" dirty="0">
+                <a:solidFill>
+                  <a:srgbClr val="FFFFFF"/>
+                </a:solidFill>
+                <a:latin typeface="Arial" pitchFamily="34" charset="0"/>
+                <a:ea typeface="Arial" pitchFamily="34" charset="-122"/>
+                <a:cs typeface="Arial" pitchFamily="34" charset="-120"/>
+              </a:rPr>
+              <a:t>06</a:t>
+            </a:r>
+            <a:endParaRPr lang="en-US" sz="1300" dirty="0"/>
+          </a:p>
+        </p:txBody>
+      </p:sp>
+      <p:sp>
+        <p:nvSpPr>
+          <p:cNvPr id="4" name="Text 2"/>
+          <p:cNvSpPr/>
+          <p:nvPr/>
+        </p:nvSpPr>
+        <p:spPr>
+          <a:xfrm>
+            <a:off x="1133856" y="457200"/>
+            <a:ext cx="10490911" cy="182880"/>
+          </a:xfrm>
+          <a:prstGeom prst="rect">
+            <a:avLst/>
+          </a:prstGeom>
+          <a:noFill/>
+          <a:ln/>
+        </p:spPr>
+        <p:txBody>
+          <a:bodyPr wrap="square" lIns="0" tIns="0" rIns="0" bIns="0" rtlCol="0" anchor="ctr"/>
+          <a:lstStyle/>
+          <a:p>
+            <a:pPr indent="0" marL="0">
+              <a:buNone/>
+            </a:pPr>
+            <a:r>
+              <a:rPr lang="en-US" sz="950" b="1" spc="200" kern="0" dirty="0">
+                <a:solidFill>
+                  <a:srgbClr val="B98A2E"/>
+                </a:solidFill>
+                <a:latin typeface="Arial" pitchFamily="34" charset="0"/>
+                <a:ea typeface="Arial" pitchFamily="34" charset="-122"/>
+                <a:cs typeface="Arial" pitchFamily="34" charset="-120"/>
+              </a:rPr>
+              <a:t>Value</a:t>
+            </a:r>
+            <a:endParaRPr lang="en-US" sz="950" dirty="0"/>
+          </a:p>
+        </p:txBody>
+      </p:sp>
+      <p:sp>
+        <p:nvSpPr>
+          <p:cNvPr id="5" name="Text 3"/>
+          <p:cNvSpPr/>
+          <p:nvPr/>
+        </p:nvSpPr>
+        <p:spPr>
+          <a:xfrm>
+            <a:off x="1133856" y="640080"/>
+            <a:ext cx="10490911" cy="365760"/>
+          </a:xfrm>
+          <a:prstGeom prst="rect">
+            <a:avLst/>
+          </a:prstGeom>
+          <a:noFill/>
+          <a:ln/>
+        </p:spPr>
+        <p:txBody>
+          <a:bodyPr wrap="square" lIns="0" tIns="0" rIns="0" bIns="0" rtlCol="0" anchor="ctr"/>
+          <a:lstStyle/>
+          <a:p>
+            <a:pPr indent="0" marL="0">
+              <a:buNone/>
+            </a:pPr>
+            <a:r>
+              <a:rPr lang="en-US" sz="2300" b="1" dirty="0">
+                <a:solidFill>
+                  <a:srgbClr val="10161F"/>
+                </a:solidFill>
+                <a:latin typeface="Pretendard" pitchFamily="34" charset="0"/>
+                <a:ea typeface="Pretendard" pitchFamily="34" charset="-122"/>
+                <a:cs typeface="Pretendard" pitchFamily="34" charset="-120"/>
+              </a:rPr>
+              <a:t>자산가치</a:t>
+            </a:r>
+            <a:endParaRPr lang="en-US" sz="2300" dirty="0"/>
+          </a:p>
+        </p:txBody>
+      </p:sp>
+      <p:sp>
+        <p:nvSpPr>
+          <p:cNvPr id="6" name="Text 4"/>
+          <p:cNvSpPr/>
+          <p:nvPr/>
+        </p:nvSpPr>
+        <p:spPr>
+          <a:xfrm>
+            <a:off x="566928" y="1371600"/>
+            <a:ext cx="6858000" cy="237744"/>
+          </a:xfrm>
+          <a:prstGeom prst="rect">
+            <a:avLst/>
+          </a:prstGeom>
+          <a:noFill/>
+          <a:ln/>
+        </p:spPr>
+        <p:txBody>
+          <a:bodyPr wrap="square" lIns="0" tIns="0" rIns="0" bIns="0" rtlCol="0" anchor="ctr"/>
+          <a:lstStyle/>
+          <a:p>
+            <a:pPr indent="0" marL="0">
+              <a:buNone/>
+            </a:pPr>
+            <a:r>
+              <a:rPr lang="en-US" sz="1100" b="1" dirty="0">
+                <a:solidFill>
+                  <a:srgbClr val="10161F"/>
+                </a:solidFill>
+                <a:latin typeface="Pretendard" pitchFamily="34" charset="0"/>
+                <a:ea typeface="Pretendard" pitchFamily="34" charset="-122"/>
+                <a:cs typeface="Pretendard" pitchFamily="34" charset="-120"/>
+              </a:rPr>
+              <a:t>건축물 개요 및 물리 스펙</a:t>
+            </a:r>
+            <a:endParaRPr lang="en-US" sz="1100" dirty="0"/>
+          </a:p>
+        </p:txBody>
+      </p:sp>
+      <p:sp>
+        <p:nvSpPr>
+          <p:cNvPr id="7" name="Text 5"/>
+          <p:cNvSpPr/>
+          <p:nvPr/>
+        </p:nvSpPr>
+        <p:spPr>
+          <a:xfrm>
+            <a:off x="566928" y="1645920"/>
+            <a:ext cx="2606040" cy="438912"/>
+          </a:xfrm>
+          <a:prstGeom prst="rect">
+            <a:avLst/>
+          </a:prstGeom>
+          <a:noFill/>
+          <a:ln/>
+        </p:spPr>
+        <p:txBody>
+          <a:bodyPr wrap="square" lIns="0" tIns="0" rIns="0" bIns="0" rtlCol="0" anchor="ctr"/>
+          <a:lstStyle/>
+          <a:p>
+            <a:pPr indent="0" marL="0">
+              <a:lnSpc>
+                <a:spcPct val="120000"/>
+              </a:lnSpc>
+              <a:buNone/>
+            </a:pPr>
+            <a:r>
+              <a:rPr lang="en-US" sz="1350" dirty="0">
+                <a:solidFill>
+                  <a:srgbClr val="718096"/>
+                </a:solidFill>
+                <a:latin typeface="Pretendard" pitchFamily="34" charset="0"/>
+                <a:ea typeface="Pretendard" pitchFamily="34" charset="-122"/>
+                <a:cs typeface="Pretendard" pitchFamily="34" charset="-120"/>
+              </a:rPr>
+              <a:t>{"ok"</a:t>
+            </a:r>
+            <a:endParaRPr lang="en-US" sz="1350" dirty="0"/>
+          </a:p>
+        </p:txBody>
+      </p:sp>
+      <p:sp>
+        <p:nvSpPr>
+          <p:cNvPr id="8" name="Text 6"/>
+          <p:cNvSpPr/>
+          <p:nvPr/>
+        </p:nvSpPr>
+        <p:spPr>
+          <a:xfrm>
+            <a:off x="3172968" y="1645920"/>
+            <a:ext cx="4251960" cy="438912"/>
+          </a:xfrm>
+          <a:prstGeom prst="rect">
+            <a:avLst/>
+          </a:prstGeom>
+          <a:noFill/>
+          <a:ln/>
+        </p:spPr>
+        <p:txBody>
+          <a:bodyPr wrap="square" lIns="0" tIns="0" rIns="0" bIns="0" rtlCol="0" anchor="ctr"/>
+          <a:lstStyle/>
+          <a:p>
+            <a:pPr indent="0" marL="0">
+              <a:lnSpc>
+                <a:spcPct val="120000"/>
+              </a:lnSpc>
+              <a:buNone/>
+            </a:pPr>
+            <a:r>
+              <a:rPr lang="en-US" sz="1350" b="1" dirty="0">
+                <a:solidFill>
+                  <a:srgbClr val="10161F"/>
+                </a:solidFill>
+                <a:latin typeface="Pretendard" pitchFamily="34" charset="0"/>
+                <a:ea typeface="Pretendard" pitchFamily="34" charset="-122"/>
+                <a:cs typeface="Pretendard" pitchFamily="34" charset="-120"/>
+              </a:rPr>
+              <a:t>true,"mocked":true,"extractedFields":{"area_signal":"역삼","asset_type":"건물명 비공개","price_band":"300억","size_signal":"3000평(약 9917.4㎡)"},"extractedFacts":{"region":"역삼","exactAddressCandidate":"역삼동 742-1","assetType":"건물명 비공개","priceText":"300억","sizeText":"3000평(약 9917.4㎡)","currentUse":"오피스","currentUseSignal":"근린생활시설","leaseSignal":"임대중","vacancySignal":"공실없음","tenantNames":"쿠팡","네이버","unitRentTexts":"301호: 1500만","sellerMotivationText":"자산 효율화","brokerNotes":"역세권 도보 3분 이내 매물"},"detectedSensitiveFields":"exact_address","tenant_name","ambiguousFields":,"warnings":,"areaSignal":"역삼","assetType":"건물명 비공개","priceBand":"300억","sizeSignal":"3000평(약 9917.4㎡)","dealType":"매각","buildingName":"역삼 건물명 비공개","exactAddress":"역삼동 742-1","totalFloorArea":9917.3,"buildYear":2015,"currentUseSignal":"근린생활시설","vacancySignal":"공실 없음","fitSummary":"역세권 도보 3분 이내 근생 빌딩으로 시행/사옥 매입에 최적화","cautionSummary":"주요 임차인 만기 조율 필요","hiddenFields":"exact_address","seller_motivation","confidence":{"areaSignal":"confirmed","assetType":"confirmed","priceBand":"ai_hypothesis","fitSummary":"ai_hypothesis"},"missingData":"sizeSignal","boundaryNote":"본 자료는 실거래 통계 기반 참고치입니다.","buyerType":"법인 사옥형","budgetRange":{"min":50,"max":80,"display":"50억~80억"},"preferredRegions":"강남","성수","assetTypes":"건물명 비공개","사옥용","purchasePurpose":"사옥용 매입","mustHave":"역세권 도보 3분 이내","주차","niceToHave":"테라스","루프탑","riskTolerance":"medium","financingNote":"자본금 50% 준비","missingQuestions":"구체적인 입주 시기가 언제인가요?","선호하는 수익률이 있나요?","privacyNotes":"연락처 비공개","fitReasons":"매수자 예산(50-80억)에 부합하는 매물입니다.","요청하신 성수/강남 권역에 해당합니다.","cautionReasons":"요청한 용도와 달리 명도 협의가 다소 필요합니다.","recommendedNextAction":"현장 답사 제안","kakaoMessage":"안녕하세요! 요청하신 조건에 부합하는 추천 매물이 있어 안내해 드립니다. 확인해보시고 피드백 부탁드립니다.","title":"강남 역삼역 역세권 도보 3분 이내 오피스 사옥용 빌딩 매각","shortSummary":"역삼역 도보 5분 거리의 준신축급 대형 건물명 비공개입니다.","dealPoints":"역세권 도보 3분 이내","사옥 최적","cautionPoints":"명도 조율 필요","hiddenInfoNotice":"보증금 및 지번은 인가 후 확인 가능","gateMessage":"G1 등급 등록이 필요합니다.","kakaoText":"강남 역삼역 오피스 빌딩 매각 안내입니다.","exactUnitCandidate":"101호","floor":"1층","areaSqmText":"150㎡","spaceType":"office","depositText":"5000만","monthlyRentText":"400만","maintenanceFeeText":"50만","availableFromText":"즉시입주","leaseTermMonthsText":"24","incentivesText":"렌트프리(무상임대) 2개월","restrictions":,"landlordIdentity":"김성수","currentTenant":"스타트업","vacancyReason":"이전 확장","rentNegotiation":"협의 가능","region":"성수동","areaSqm":150,"deposit":5000,"monthlyRent":400,"maintenanceFee":50,"availableFrom":"즉시입주","leaseTermMonths":24,"incentives":{"렌트프리(무상임대)(무상임대)Months":2,"interiorSupport":"일부 인테리어 지원","freeRentDetail":"렌트프리(무상임대) 2개월 지원"},"shortSummaryLease":"성수역 도보 5분 거리 1층 리테일 상가 매물입니다."}</a:t>
+            </a:r>
+            <a:endParaRPr lang="en-US" sz="1350" dirty="0"/>
+          </a:p>
+        </p:txBody>
+      </p:sp>
+      <p:sp>
+        <p:nvSpPr>
+          <p:cNvPr id="9" name="Shape 7"/>
+          <p:cNvSpPr/>
+          <p:nvPr/>
+        </p:nvSpPr>
+        <p:spPr>
+          <a:xfrm>
+            <a:off x="7604608" y="1371600"/>
+            <a:ext cx="0" cy="4754880"/>
+          </a:xfrm>
+          <a:prstGeom prst="line">
+            <a:avLst/>
+          </a:prstGeom>
+          <a:noFill/>
+          <a:ln w="8890">
+            <a:solidFill>
+              <a:srgbClr val="B98A2E"/>
+            </a:solidFill>
+            <a:prstDash val="solid"/>
+          </a:ln>
+        </p:spPr>
+      </p:sp>
+      <p:sp>
+        <p:nvSpPr>
+          <p:cNvPr id="10" name="Shape 8"/>
+          <p:cNvSpPr/>
+          <p:nvPr/>
+        </p:nvSpPr>
+        <p:spPr>
+          <a:xfrm>
+            <a:off x="7784287" y="1645920"/>
+            <a:ext cx="3840480" cy="2103120"/>
+          </a:xfrm>
+          <a:prstGeom prst="roundRect">
+            <a:avLst>
+              <a:gd name="adj" fmla="val 2609"/>
+            </a:avLst>
+          </a:prstGeom>
+          <a:solidFill>
+            <a:srgbClr val="F3EBDA"/>
+          </a:solidFill>
+          <a:ln/>
+        </p:spPr>
+      </p:sp>
+      <p:sp>
+        <p:nvSpPr>
+          <p:cNvPr id="11" name="Shape 9"/>
+          <p:cNvSpPr/>
+          <p:nvPr/>
+        </p:nvSpPr>
+        <p:spPr>
+          <a:xfrm>
+            <a:off x="7784287" y="1700784"/>
+            <a:ext cx="36576" cy="1993392"/>
+          </a:xfrm>
+          <a:prstGeom prst="rect">
+            <a:avLst/>
+          </a:prstGeom>
+          <a:solidFill>
+            <a:srgbClr val="977024"/>
+          </a:solidFill>
+          <a:ln/>
+        </p:spPr>
+      </p:sp>
+      <p:sp>
+        <p:nvSpPr>
+          <p:cNvPr id="12" name="Text 10"/>
+          <p:cNvSpPr/>
+          <p:nvPr/>
+        </p:nvSpPr>
+        <p:spPr>
+          <a:xfrm>
+            <a:off x="7967167" y="1755648"/>
+            <a:ext cx="3511296" cy="201168"/>
+          </a:xfrm>
+          <a:prstGeom prst="rect">
+            <a:avLst/>
+          </a:prstGeom>
+          <a:noFill/>
+          <a:ln/>
+        </p:spPr>
+        <p:txBody>
+          <a:bodyPr wrap="square" lIns="0" tIns="0" rIns="0" bIns="0" rtlCol="0" anchor="ctr"/>
+          <a:lstStyle/>
+          <a:p>
+            <a:pPr indent="0" marL="0">
+              <a:buNone/>
+            </a:pPr>
+            <a:endParaRPr lang="en-US" sz="1050" dirty="0"/>
+          </a:p>
+        </p:txBody>
+      </p:sp>
+      <p:sp>
+        <p:nvSpPr>
+          <p:cNvPr id="13" name="Text 11"/>
+          <p:cNvSpPr/>
+          <p:nvPr/>
+        </p:nvSpPr>
+        <p:spPr>
+          <a:xfrm>
+            <a:off x="7967167" y="1975104"/>
+            <a:ext cx="3511296" cy="1700784"/>
+          </a:xfrm>
+          <a:prstGeom prst="rect">
+            <a:avLst/>
+          </a:prstGeom>
+          <a:noFill/>
+          <a:ln/>
+        </p:spPr>
+        <p:txBody>
+          <a:bodyPr wrap="square" lIns="0" tIns="0" rIns="0" bIns="0" rtlCol="0" anchor="t"/>
+          <a:lstStyle/>
+          <a:p>
+            <a:pPr indent="0" marL="0">
+              <a:lnSpc>
+                <a:spcPct val="120000"/>
+              </a:lnSpc>
+              <a:buNone/>
+            </a:pPr>
+            <a:r>
+              <a:rPr lang="en-US" sz="930" dirty="0">
+                <a:solidFill>
+                  <a:srgbClr val="10161F"/>
+                </a:solidFill>
+                <a:latin typeface="Pretendard" pitchFamily="34" charset="0"/>
+                <a:ea typeface="Pretendard" pitchFamily="34" charset="-122"/>
+                <a:cs typeface="Pretendard" pitchFamily="34" charset="-120"/>
+              </a:rPr>
+              <a:t>{"ok":true,"mocked":true,"extractedFields":{"area_signal":"역삼","asset_type":"[건물명 비공개]","price_band":"300억","size_signal</a:t>
+            </a:r>
+            <a:endParaRPr lang="en-US" sz="930" dirty="0"/>
+          </a:p>
+        </p:txBody>
+      </p:sp>
+      <p:sp>
+        <p:nvSpPr>
+          <p:cNvPr id="14" name="Text 12"/>
+          <p:cNvSpPr/>
+          <p:nvPr/>
+        </p:nvSpPr>
+        <p:spPr>
+          <a:xfrm>
+            <a:off x="566928" y="6382512"/>
+            <a:ext cx="7315200" cy="219456"/>
+          </a:xfrm>
+          <a:prstGeom prst="rect">
+            <a:avLst/>
+          </a:prstGeom>
+          <a:noFill/>
+          <a:ln/>
+        </p:spPr>
+        <p:txBody>
+          <a:bodyPr wrap="square" lIns="0" tIns="0" rIns="0" bIns="0" rtlCol="0" anchor="ctr"/>
+          <a:lstStyle/>
+          <a:p>
+            <a:pPr indent="0" marL="0">
+              <a:buNone/>
+            </a:pPr>
+            <a:r>
+              <a:rPr lang="en-US" sz="800" dirty="0">
+                <a:solidFill>
+                  <a:srgbClr val="718096"/>
+                </a:solidFill>
+                <a:latin typeface="Pretendard" pitchFamily="34" charset="0"/>
+                <a:ea typeface="Pretendard" pitchFamily="34" charset="-122"/>
+                <a:cs typeface="Pretendard" pitchFamily="34" charset="-120"/>
+              </a:rPr>
+              <a:t>크리딜   |   </a:t>
+            </a:r>
+            <a:endParaRPr lang="en-US" sz="800" dirty="0"/>
+          </a:p>
+        </p:txBody>
+      </p:sp>
+      <p:sp>
+        <p:nvSpPr>
+          <p:cNvPr id="15" name="Text 13"/>
+          <p:cNvSpPr/>
+          <p:nvPr/>
+        </p:nvSpPr>
+        <p:spPr>
+          <a:xfrm>
+            <a:off x="10710367" y="6382512"/>
+            <a:ext cx="914400" cy="219456"/>
+          </a:xfrm>
+          <a:prstGeom prst="rect">
+            <a:avLst/>
+          </a:prstGeom>
+          <a:noFill/>
+          <a:ln/>
+        </p:spPr>
+        <p:txBody>
+          <a:bodyPr wrap="square" lIns="0" tIns="0" rIns="0" bIns="0" rtlCol="0" anchor="ctr"/>
+          <a:lstStyle/>
+          <a:p>
+            <a:pPr algn="r" indent="0" marL="0">
+              <a:buNone/>
+            </a:pPr>
+            <a:r>
+              <a:rPr lang="en-US" sz="900" b="1" dirty="0">
+                <a:solidFill>
+                  <a:srgbClr val="B98A2E"/>
+                </a:solidFill>
+                <a:latin typeface="Arial" pitchFamily="34" charset="0"/>
+                <a:ea typeface="Arial" pitchFamily="34" charset="-122"/>
+                <a:cs typeface="Arial" pitchFamily="34" charset="-120"/>
+              </a:rPr>
+              <a:t>6</a:t>
+            </a:r>
+            <a:endParaRPr lang="en-US" sz="900" dirty="0"/>
+          </a:p>
+        </p:txBody>
+      </p:sp>
+    </p:spTree>
+  </p:cSld>
+  <p:clrMapOvr>
+    <a:masterClrMapping/>
+  </p:clrMapOvr>
+</p:sld>
+</file>
+
+<file path=ppt/slides/slide9.xml><?xml version="1.0" encoding="utf-8"?>
+<p:sld xmlns:a="http://schemas.openxmlformats.org/drawingml/2006/main" xmlns:r="http://schemas.openxmlformats.org/officeDocument/2006/relationships" xmlns:p="http://schemas.openxmlformats.org/presentationml/2006/main">
+  <p:cSld name="Slide 9">
+    <p:bg>
+      <p:bgPr>
+        <a:solidFill>
+          <a:srgbClr val="FFFFFF"/>
+        </a:solidFill>
+      </p:bgPr>
+    </p:bg>
+    <p:spTree>
+      <p:nvGrpSpPr>
+        <p:cNvPr id="1" name=""/>
+        <p:cNvGrpSpPr/>
+        <p:nvPr/>
+      </p:nvGrpSpPr>
+      <p:grpSpPr>
+        <a:xfrm>
+          <a:off x="0" y="0"/>
+          <a:ext cx="0" cy="0"/>
+          <a:chOff x="0" y="0"/>
+          <a:chExt cx="0" cy="0"/>
+        </a:xfrm>
+      </p:grpSpPr>
+      <p:sp>
+        <p:nvSpPr>
+          <p:cNvPr id="2" name="Shape 0"/>
+          <p:cNvSpPr/>
+          <p:nvPr/>
+        </p:nvSpPr>
+        <p:spPr>
+          <a:xfrm>
+            <a:off x="566928" y="457200"/>
+            <a:ext cx="384048" cy="384048"/>
+          </a:xfrm>
+          <a:prstGeom prst="ellipse">
+            <a:avLst/>
+          </a:prstGeom>
+          <a:solidFill>
+            <a:srgbClr val="B98A2E"/>
+          </a:solidFill>
+          <a:ln/>
+        </p:spPr>
+      </p:sp>
+      <p:sp>
+        <p:nvSpPr>
+          <p:cNvPr id="3" name="Text 1"/>
+          <p:cNvSpPr/>
+          <p:nvPr/>
+        </p:nvSpPr>
+        <p:spPr>
+          <a:xfrm>
+            <a:off x="566928" y="457200"/>
+            <a:ext cx="384048" cy="384048"/>
+          </a:xfrm>
+          <a:prstGeom prst="rect">
+            <a:avLst/>
+          </a:prstGeom>
+          <a:noFill/>
+          <a:ln/>
+        </p:spPr>
+        <p:txBody>
+          <a:bodyPr wrap="square" lIns="0" tIns="0" rIns="0" bIns="0" rtlCol="0" anchor="ctr"/>
+          <a:lstStyle/>
+          <a:p>
+            <a:pPr algn="ctr" indent="0" marL="0">
+              <a:buNone/>
+            </a:pPr>
+            <a:r>
+              <a:rPr lang="en-US" sz="1300" b="1" dirty="0">
+                <a:solidFill>
+                  <a:srgbClr val="FFFFFF"/>
+                </a:solidFill>
+                <a:latin typeface="Arial" pitchFamily="34" charset="0"/>
+                <a:ea typeface="Arial" pitchFamily="34" charset="-122"/>
+                <a:cs typeface="Arial" pitchFamily="34" charset="-120"/>
+              </a:rPr>
+              <a:t>07</a:t>
+            </a:r>
+            <a:endParaRPr lang="en-US" sz="1300" dirty="0"/>
+          </a:p>
+        </p:txBody>
+      </p:sp>
+      <p:sp>
+        <p:nvSpPr>
+          <p:cNvPr id="4" name="Text 2"/>
+          <p:cNvSpPr/>
+          <p:nvPr/>
+        </p:nvSpPr>
+        <p:spPr>
+          <a:xfrm>
+            <a:off x="1133856" y="457200"/>
+            <a:ext cx="10490911" cy="182880"/>
+          </a:xfrm>
+          <a:prstGeom prst="rect">
+            <a:avLst/>
+          </a:prstGeom>
+          <a:noFill/>
+          <a:ln/>
+        </p:spPr>
+        <p:txBody>
+          <a:bodyPr wrap="square" lIns="0" tIns="0" rIns="0" bIns="0" rtlCol="0" anchor="ctr"/>
+          <a:lstStyle/>
+          <a:p>
+            <a:pPr indent="0" marL="0">
+              <a:buNone/>
+            </a:pPr>
+            <a:r>
+              <a:rPr lang="en-US" sz="950" b="1" spc="200" kern="0" dirty="0">
+                <a:solidFill>
+                  <a:srgbClr val="B98A2E"/>
+                </a:solidFill>
+                <a:latin typeface="Arial" pitchFamily="34" charset="0"/>
+                <a:ea typeface="Arial" pitchFamily="34" charset="-122"/>
+                <a:cs typeface="Arial" pitchFamily="34" charset="-120"/>
+              </a:rPr>
+              <a:t>Capital</a:t>
+            </a:r>
+            <a:endParaRPr lang="en-US" sz="950" dirty="0"/>
+          </a:p>
+        </p:txBody>
+      </p:sp>
+      <p:sp>
+        <p:nvSpPr>
+          <p:cNvPr id="5" name="Text 3"/>
+          <p:cNvSpPr/>
+          <p:nvPr/>
+        </p:nvSpPr>
+        <p:spPr>
+          <a:xfrm>
+            <a:off x="1133856" y="640080"/>
+            <a:ext cx="10490911" cy="365760"/>
+          </a:xfrm>
+          <a:prstGeom prst="rect">
+            <a:avLst/>
+          </a:prstGeom>
+          <a:noFill/>
+          <a:ln/>
+        </p:spPr>
+        <p:txBody>
+          <a:bodyPr wrap="square" lIns="0" tIns="0" rIns="0" bIns="0" rtlCol="0" anchor="ctr"/>
+          <a:lstStyle/>
+          <a:p>
+            <a:pPr indent="0" marL="0">
+              <a:buNone/>
+            </a:pPr>
+            <a:r>
+              <a:rPr lang="en-US" sz="2300" b="1" dirty="0">
+                <a:solidFill>
+                  <a:srgbClr val="10161F"/>
+                </a:solidFill>
+                <a:latin typeface="Pretendard" pitchFamily="34" charset="0"/>
+                <a:ea typeface="Pretendard" pitchFamily="34" charset="-122"/>
+                <a:cs typeface="Pretendard" pitchFamily="34" charset="-120"/>
+              </a:rPr>
+              <a:t>투자 및 자본 조달 구조 분석</a:t>
+            </a:r>
+            <a:endParaRPr lang="en-US" sz="2300" dirty="0"/>
+          </a:p>
+        </p:txBody>
+      </p:sp>
+      <p:sp>
+        <p:nvSpPr>
+          <p:cNvPr id="6" name="Shape 4"/>
+          <p:cNvSpPr/>
+          <p:nvPr/>
+        </p:nvSpPr>
+        <p:spPr>
+          <a:xfrm>
+            <a:off x="566928" y="1417320"/>
+            <a:ext cx="5391760" cy="4389120"/>
+          </a:xfrm>
+          <a:prstGeom prst="roundRect">
+            <a:avLst>
+              <a:gd name="adj" fmla="val 1250"/>
+            </a:avLst>
+          </a:prstGeom>
+          <a:solidFill>
+            <a:srgbClr val="F7FAFC"/>
+          </a:solidFill>
+          <a:ln w="6350">
+            <a:solidFill>
+              <a:srgbClr val="CBD5E0"/>
+            </a:solidFill>
+            <a:prstDash val="solid"/>
+          </a:ln>
+        </p:spPr>
+      </p:sp>
+      <p:sp>
+        <p:nvSpPr>
+          <p:cNvPr id="7" name="Text 5"/>
+          <p:cNvSpPr/>
+          <p:nvPr/>
+        </p:nvSpPr>
+        <p:spPr>
+          <a:xfrm>
+            <a:off x="795528" y="1618488"/>
+            <a:ext cx="4934560" cy="320040"/>
+          </a:xfrm>
+          <a:prstGeom prst="rect">
+            <a:avLst/>
+          </a:prstGeom>
+          <a:noFill/>
+          <a:ln/>
+        </p:spPr>
+        <p:txBody>
+          <a:bodyPr wrap="square" lIns="0" tIns="0" rIns="0" bIns="0" rtlCol="0" anchor="ctr"/>
+          <a:lstStyle/>
+          <a:p>
+            <a:pPr indent="0" marL="0">
+              <a:buNone/>
+            </a:pPr>
+            <a:r>
+              <a:rPr lang="en-US" sz="1350" b="1" dirty="0">
+                <a:solidFill>
+                  <a:srgbClr val="977024"/>
+                </a:solidFill>
+                <a:latin typeface="Pretendard" pitchFamily="34" charset="0"/>
+                <a:ea typeface="Pretendard" pitchFamily="34" charset="-122"/>
+                <a:cs typeface="Pretendard" pitchFamily="34" charset="-120"/>
+              </a:rPr>
+              <a:t>1. 총취득원가 및 자기자본 소요</a:t>
+            </a:r>
+            <a:endParaRPr lang="en-US" sz="1350" dirty="0"/>
+          </a:p>
+        </p:txBody>
+      </p:sp>
+      <p:sp>
+        <p:nvSpPr>
+          <p:cNvPr id="8" name="Text 6"/>
+          <p:cNvSpPr/>
+          <p:nvPr/>
+        </p:nvSpPr>
+        <p:spPr>
+          <a:xfrm>
+            <a:off x="795528" y="2011680"/>
+            <a:ext cx="1875133" cy="475488"/>
+          </a:xfrm>
+          <a:prstGeom prst="rect">
+            <a:avLst/>
+          </a:prstGeom>
+          <a:noFill/>
+          <a:ln/>
+        </p:spPr>
+        <p:txBody>
+          <a:bodyPr wrap="square" lIns="0" tIns="0" rIns="0" bIns="0" rtlCol="0" anchor="ctr"/>
+          <a:lstStyle/>
+          <a:p>
+            <a:pPr indent="0" marL="0">
+              <a:lnSpc>
+                <a:spcPct val="120000"/>
+              </a:lnSpc>
+              <a:buNone/>
+            </a:pPr>
+            <a:r>
+              <a:rPr lang="en-US" sz="1150" dirty="0">
+                <a:solidFill>
+                  <a:srgbClr val="718096"/>
+                </a:solidFill>
+                <a:latin typeface="Pretendard" pitchFamily="34" charset="0"/>
+                <a:ea typeface="Pretendard" pitchFamily="34" charset="-122"/>
+                <a:cs typeface="Pretendard" pitchFamily="34" charset="-120"/>
+              </a:rPr>
+              <a:t>매매 희망가 (A)</a:t>
+            </a:r>
+            <a:endParaRPr lang="en-US" sz="1150" dirty="0"/>
+          </a:p>
+        </p:txBody>
+      </p:sp>
+      <p:sp>
+        <p:nvSpPr>
+          <p:cNvPr id="9" name="Text 7"/>
+          <p:cNvSpPr/>
+          <p:nvPr/>
+        </p:nvSpPr>
+        <p:spPr>
+          <a:xfrm>
+            <a:off x="2670661" y="2011680"/>
+            <a:ext cx="3059427" cy="475488"/>
+          </a:xfrm>
+          <a:prstGeom prst="rect">
+            <a:avLst/>
+          </a:prstGeom>
+          <a:noFill/>
+          <a:ln/>
+        </p:spPr>
+        <p:txBody>
+          <a:bodyPr wrap="square" lIns="0" tIns="0" rIns="0" bIns="0" rtlCol="0" anchor="ctr"/>
+          <a:lstStyle/>
+          <a:p>
+            <a:pPr indent="0" marL="0">
+              <a:lnSpc>
+                <a:spcPct val="120000"/>
+              </a:lnSpc>
+              <a:buNone/>
+            </a:pPr>
+            <a:r>
+              <a:rPr lang="en-US" sz="1150" b="1" dirty="0">
+                <a:solidFill>
+                  <a:srgbClr val="10161F"/>
+                </a:solidFill>
+                <a:latin typeface="Pretendard" pitchFamily="34" charset="0"/>
+                <a:ea typeface="Pretendard" pitchFamily="34" charset="-122"/>
+                <a:cs typeface="Pretendard" pitchFamily="34" charset="-120"/>
+              </a:rPr>
+              <a:t>180.0억 원</a:t>
+            </a:r>
+            <a:endParaRPr lang="en-US" sz="1150" dirty="0"/>
+          </a:p>
+        </p:txBody>
+      </p:sp>
+      <p:sp>
+        <p:nvSpPr>
+          <p:cNvPr id="10" name="Shape 8"/>
+          <p:cNvSpPr/>
+          <p:nvPr/>
+        </p:nvSpPr>
+        <p:spPr>
+          <a:xfrm>
+            <a:off x="795528" y="2487168"/>
+            <a:ext cx="4934560" cy="0"/>
+          </a:xfrm>
+          <a:prstGeom prst="line">
+            <a:avLst/>
+          </a:prstGeom>
+          <a:noFill/>
+          <a:ln w="3810">
+            <a:solidFill>
+              <a:srgbClr val="CBD5E0"/>
+            </a:solidFill>
+            <a:prstDash val="solid"/>
+          </a:ln>
+        </p:spPr>
+      </p:sp>
+      <p:sp>
+        <p:nvSpPr>
+          <p:cNvPr id="11" name="Text 9"/>
+          <p:cNvSpPr/>
+          <p:nvPr/>
+        </p:nvSpPr>
+        <p:spPr>
+          <a:xfrm>
+            <a:off x="795528" y="2487168"/>
+            <a:ext cx="1875133" cy="475488"/>
+          </a:xfrm>
+          <a:prstGeom prst="rect">
+            <a:avLst/>
+          </a:prstGeom>
+          <a:noFill/>
+          <a:ln/>
+        </p:spPr>
+        <p:txBody>
+          <a:bodyPr wrap="square" lIns="0" tIns="0" rIns="0" bIns="0" rtlCol="0" anchor="ctr"/>
+          <a:lstStyle/>
+          <a:p>
+            <a:pPr indent="0" marL="0">
+              <a:lnSpc>
+                <a:spcPct val="120000"/>
+              </a:lnSpc>
+              <a:buNone/>
+            </a:pPr>
+            <a:r>
+              <a:rPr lang="en-US" sz="1150" dirty="0">
+                <a:solidFill>
+                  <a:srgbClr val="718096"/>
+                </a:solidFill>
+                <a:latin typeface="Pretendard" pitchFamily="34" charset="0"/>
+                <a:ea typeface="Pretendard" pitchFamily="34" charset="-122"/>
+                <a:cs typeface="Pretendard" pitchFamily="34" charset="-120"/>
+              </a:rPr>
+              <a:t>취득세 (4.6% 법정)</a:t>
+            </a:r>
+            <a:endParaRPr lang="en-US" sz="1150" dirty="0"/>
+          </a:p>
+        </p:txBody>
+      </p:sp>
+      <p:sp>
+        <p:nvSpPr>
+          <p:cNvPr id="12" name="Text 10"/>
+          <p:cNvSpPr/>
+          <p:nvPr/>
+        </p:nvSpPr>
+        <p:spPr>
+          <a:xfrm>
+            <a:off x="2670661" y="2487168"/>
+            <a:ext cx="3059427" cy="475488"/>
+          </a:xfrm>
+          <a:prstGeom prst="rect">
+            <a:avLst/>
+          </a:prstGeom>
+          <a:noFill/>
+          <a:ln/>
+        </p:spPr>
+        <p:txBody>
+          <a:bodyPr wrap="square" lIns="0" tIns="0" rIns="0" bIns="0" rtlCol="0" anchor="ctr"/>
+          <a:lstStyle/>
+          <a:p>
+            <a:pPr indent="0" marL="0">
+              <a:lnSpc>
+                <a:spcPct val="120000"/>
+              </a:lnSpc>
+              <a:buNone/>
+            </a:pPr>
+            <a:r>
+              <a:rPr lang="en-US" sz="1150" b="1" dirty="0">
+                <a:solidFill>
+                  <a:srgbClr val="10161F"/>
+                </a:solidFill>
+                <a:latin typeface="Pretendard" pitchFamily="34" charset="0"/>
+                <a:ea typeface="Pretendard" pitchFamily="34" charset="-122"/>
+                <a:cs typeface="Pretendard" pitchFamily="34" charset="-120"/>
+              </a:rPr>
+              <a:t>8.28억 원</a:t>
+            </a:r>
+            <a:endParaRPr lang="en-US" sz="1150" dirty="0"/>
+          </a:p>
+        </p:txBody>
+      </p:sp>
+      <p:sp>
+        <p:nvSpPr>
+          <p:cNvPr id="13" name="Shape 11"/>
+          <p:cNvSpPr/>
+          <p:nvPr/>
+        </p:nvSpPr>
+        <p:spPr>
+          <a:xfrm>
+            <a:off x="795528" y="2962656"/>
+            <a:ext cx="4934560" cy="0"/>
+          </a:xfrm>
+          <a:prstGeom prst="line">
+            <a:avLst/>
+          </a:prstGeom>
+          <a:noFill/>
+          <a:ln w="3810">
+            <a:solidFill>
+              <a:srgbClr val="CBD5E0"/>
+            </a:solidFill>
+            <a:prstDash val="solid"/>
+          </a:ln>
+        </p:spPr>
+      </p:sp>
+      <p:sp>
+        <p:nvSpPr>
+          <p:cNvPr id="14" name="Text 12"/>
+          <p:cNvSpPr/>
+          <p:nvPr/>
+        </p:nvSpPr>
+        <p:spPr>
+          <a:xfrm>
+            <a:off x="795528" y="2962656"/>
+            <a:ext cx="1875133" cy="475488"/>
+          </a:xfrm>
+          <a:prstGeom prst="rect">
+            <a:avLst/>
+          </a:prstGeom>
+          <a:noFill/>
+          <a:ln/>
+        </p:spPr>
+        <p:txBody>
+          <a:bodyPr wrap="square" lIns="0" tIns="0" rIns="0" bIns="0" rtlCol="0" anchor="ctr"/>
+          <a:lstStyle/>
+          <a:p>
+            <a:pPr indent="0" marL="0">
+              <a:lnSpc>
+                <a:spcPct val="120000"/>
+              </a:lnSpc>
+              <a:buNone/>
+            </a:pPr>
+            <a:r>
+              <a:rPr lang="en-US" sz="1150" dirty="0">
+                <a:solidFill>
+                  <a:srgbClr val="718096"/>
+                </a:solidFill>
+                <a:latin typeface="Pretendard" pitchFamily="34" charset="0"/>
+                <a:ea typeface="Pretendard" pitchFamily="34" charset="-122"/>
+                <a:cs typeface="Pretendard" pitchFamily="34" charset="-120"/>
+              </a:rPr>
+              <a:t>중개보수 (0.9% 한도)</a:t>
+            </a:r>
+            <a:endParaRPr lang="en-US" sz="1150" dirty="0"/>
+          </a:p>
+        </p:txBody>
+      </p:sp>
+      <p:sp>
+        <p:nvSpPr>
+          <p:cNvPr id="15" name="Text 13"/>
+          <p:cNvSpPr/>
+          <p:nvPr/>
+        </p:nvSpPr>
+        <p:spPr>
+          <a:xfrm>
+            <a:off x="2670661" y="2962656"/>
+            <a:ext cx="3059427" cy="475488"/>
+          </a:xfrm>
+          <a:prstGeom prst="rect">
+            <a:avLst/>
+          </a:prstGeom>
+          <a:noFill/>
+          <a:ln/>
+        </p:spPr>
+        <p:txBody>
+          <a:bodyPr wrap="square" lIns="0" tIns="0" rIns="0" bIns="0" rtlCol="0" anchor="ctr"/>
+          <a:lstStyle/>
+          <a:p>
+            <a:pPr indent="0" marL="0">
+              <a:lnSpc>
+                <a:spcPct val="120000"/>
+              </a:lnSpc>
+              <a:buNone/>
+            </a:pPr>
+            <a:r>
+              <a:rPr lang="en-US" sz="1150" b="1" dirty="0">
+                <a:solidFill>
+                  <a:srgbClr val="10161F"/>
+                </a:solidFill>
+                <a:latin typeface="Pretendard" pitchFamily="34" charset="0"/>
+                <a:ea typeface="Pretendard" pitchFamily="34" charset="-122"/>
+                <a:cs typeface="Pretendard" pitchFamily="34" charset="-120"/>
+              </a:rPr>
+              <a:t>1.62억 원</a:t>
+            </a:r>
+            <a:endParaRPr lang="en-US" sz="1150" dirty="0"/>
+          </a:p>
+        </p:txBody>
+      </p:sp>
+      <p:sp>
+        <p:nvSpPr>
+          <p:cNvPr id="16" name="Shape 14"/>
+          <p:cNvSpPr/>
+          <p:nvPr/>
+        </p:nvSpPr>
+        <p:spPr>
+          <a:xfrm>
+            <a:off x="795528" y="3438144"/>
+            <a:ext cx="4934560" cy="0"/>
+          </a:xfrm>
+          <a:prstGeom prst="line">
+            <a:avLst/>
+          </a:prstGeom>
+          <a:noFill/>
+          <a:ln w="3810">
+            <a:solidFill>
+              <a:srgbClr val="CBD5E0"/>
+            </a:solidFill>
+            <a:prstDash val="solid"/>
+          </a:ln>
+        </p:spPr>
+      </p:sp>
+      <p:sp>
+        <p:nvSpPr>
+          <p:cNvPr id="17" name="Text 15"/>
+          <p:cNvSpPr/>
+          <p:nvPr/>
+        </p:nvSpPr>
+        <p:spPr>
+          <a:xfrm>
+            <a:off x="795528" y="3438144"/>
+            <a:ext cx="1875133" cy="475488"/>
+          </a:xfrm>
+          <a:prstGeom prst="rect">
+            <a:avLst/>
+          </a:prstGeom>
+          <a:noFill/>
+          <a:ln/>
+        </p:spPr>
+        <p:txBody>
+          <a:bodyPr wrap="square" lIns="0" tIns="0" rIns="0" bIns="0" rtlCol="0" anchor="ctr"/>
+          <a:lstStyle/>
+          <a:p>
+            <a:pPr indent="0" marL="0">
+              <a:lnSpc>
+                <a:spcPct val="120000"/>
+              </a:lnSpc>
+              <a:buNone/>
+            </a:pPr>
+            <a:r>
+              <a:rPr lang="en-US" sz="1150" dirty="0">
+                <a:solidFill>
+                  <a:srgbClr val="718096"/>
+                </a:solidFill>
+                <a:latin typeface="Pretendard" pitchFamily="34" charset="0"/>
+                <a:ea typeface="Pretendard" pitchFamily="34" charset="-122"/>
+                <a:cs typeface="Pretendard" pitchFamily="34" charset="-120"/>
+              </a:rPr>
+              <a:t>총취득원가 (A + 세/비용)</a:t>
+            </a:r>
+            <a:endParaRPr lang="en-US" sz="1150" dirty="0"/>
+          </a:p>
+        </p:txBody>
+      </p:sp>
+      <p:sp>
+        <p:nvSpPr>
+          <p:cNvPr id="18" name="Text 16"/>
+          <p:cNvSpPr/>
+          <p:nvPr/>
+        </p:nvSpPr>
+        <p:spPr>
+          <a:xfrm>
+            <a:off x="2670661" y="3438144"/>
+            <a:ext cx="3059427" cy="475488"/>
+          </a:xfrm>
+          <a:prstGeom prst="rect">
+            <a:avLst/>
+          </a:prstGeom>
+          <a:noFill/>
+          <a:ln/>
+        </p:spPr>
+        <p:txBody>
+          <a:bodyPr wrap="square" lIns="0" tIns="0" rIns="0" bIns="0" rtlCol="0" anchor="ctr"/>
+          <a:lstStyle/>
+          <a:p>
+            <a:pPr indent="0" marL="0">
+              <a:lnSpc>
+                <a:spcPct val="120000"/>
+              </a:lnSpc>
+              <a:buNone/>
+            </a:pPr>
+            <a:r>
+              <a:rPr lang="en-US" sz="1150" b="1" dirty="0">
+                <a:solidFill>
+                  <a:srgbClr val="10161F"/>
+                </a:solidFill>
+                <a:latin typeface="Pretendard" pitchFamily="34" charset="0"/>
+                <a:ea typeface="Pretendard" pitchFamily="34" charset="-122"/>
+                <a:cs typeface="Pretendard" pitchFamily="34" charset="-120"/>
+              </a:rPr>
+              <a:t>189.9억 원</a:t>
+            </a:r>
+            <a:endParaRPr lang="en-US" sz="1150" dirty="0"/>
+          </a:p>
+        </p:txBody>
+      </p:sp>
+      <p:sp>
+        <p:nvSpPr>
+          <p:cNvPr id="19" name="Shape 17"/>
+          <p:cNvSpPr/>
+          <p:nvPr/>
+        </p:nvSpPr>
+        <p:spPr>
+          <a:xfrm>
+            <a:off x="795528" y="3913632"/>
+            <a:ext cx="4934560" cy="0"/>
+          </a:xfrm>
+          <a:prstGeom prst="line">
+            <a:avLst/>
+          </a:prstGeom>
+          <a:noFill/>
+          <a:ln w="3810">
+            <a:solidFill>
+              <a:srgbClr val="CBD5E0"/>
+            </a:solidFill>
+            <a:prstDash val="solid"/>
+          </a:ln>
+        </p:spPr>
+      </p:sp>
+      <p:sp>
+        <p:nvSpPr>
+          <p:cNvPr id="20" name="Text 18"/>
+          <p:cNvSpPr/>
+          <p:nvPr/>
+        </p:nvSpPr>
+        <p:spPr>
+          <a:xfrm>
+            <a:off x="795528" y="3913632"/>
+            <a:ext cx="1875133" cy="475488"/>
+          </a:xfrm>
+          <a:prstGeom prst="rect">
+            <a:avLst/>
+          </a:prstGeom>
+          <a:noFill/>
+          <a:ln/>
+        </p:spPr>
+        <p:txBody>
+          <a:bodyPr wrap="square" lIns="0" tIns="0" rIns="0" bIns="0" rtlCol="0" anchor="ctr"/>
+          <a:lstStyle/>
+          <a:p>
+            <a:pPr indent="0" marL="0">
+              <a:lnSpc>
+                <a:spcPct val="120000"/>
+              </a:lnSpc>
+              <a:buNone/>
+            </a:pPr>
+            <a:r>
+              <a:rPr lang="en-US" sz="1150" dirty="0">
+                <a:solidFill>
+                  <a:srgbClr val="718096"/>
+                </a:solidFill>
+                <a:latin typeface="Pretendard" pitchFamily="34" charset="0"/>
+                <a:ea typeface="Pretendard" pitchFamily="34" charset="-122"/>
+                <a:cs typeface="Pretendard" pitchFamily="34" charset="-120"/>
+              </a:rPr>
+              <a:t>(-) 임대보증금 승계</a:t>
+            </a:r>
+            <a:endParaRPr lang="en-US" sz="1150" dirty="0"/>
+          </a:p>
+        </p:txBody>
+      </p:sp>
+      <p:sp>
+        <p:nvSpPr>
+          <p:cNvPr id="21" name="Text 19"/>
+          <p:cNvSpPr/>
+          <p:nvPr/>
+        </p:nvSpPr>
+        <p:spPr>
+          <a:xfrm>
+            <a:off x="2670661" y="3913632"/>
+            <a:ext cx="3059427" cy="475488"/>
+          </a:xfrm>
+          <a:prstGeom prst="rect">
+            <a:avLst/>
+          </a:prstGeom>
+          <a:noFill/>
+          <a:ln/>
+        </p:spPr>
+        <p:txBody>
+          <a:bodyPr wrap="square" lIns="0" tIns="0" rIns="0" bIns="0" rtlCol="0" anchor="ctr"/>
+          <a:lstStyle/>
+          <a:p>
+            <a:pPr indent="0" marL="0">
+              <a:lnSpc>
+                <a:spcPct val="120000"/>
+              </a:lnSpc>
+              <a:buNone/>
+            </a:pPr>
+            <a:r>
+              <a:rPr lang="en-US" sz="1150" b="1" dirty="0">
+                <a:solidFill>
+                  <a:srgbClr val="10161F"/>
+                </a:solidFill>
+                <a:latin typeface="Pretendard" pitchFamily="34" charset="0"/>
+                <a:ea typeface="Pretendard" pitchFamily="34" charset="-122"/>
+                <a:cs typeface="Pretendard" pitchFamily="34" charset="-120"/>
+              </a:rPr>
+              <a:t>9.0억 원</a:t>
+            </a:r>
+            <a:endParaRPr lang="en-US" sz="1150" dirty="0"/>
+          </a:p>
+        </p:txBody>
+      </p:sp>
+      <p:sp>
+        <p:nvSpPr>
+          <p:cNvPr id="22" name="Shape 20"/>
+          <p:cNvSpPr/>
+          <p:nvPr/>
+        </p:nvSpPr>
+        <p:spPr>
+          <a:xfrm>
+            <a:off x="795528" y="4389120"/>
+            <a:ext cx="4934560" cy="0"/>
+          </a:xfrm>
+          <a:prstGeom prst="line">
+            <a:avLst/>
+          </a:prstGeom>
+          <a:noFill/>
+          <a:ln w="3810">
+            <a:solidFill>
+              <a:srgbClr val="CBD5E0"/>
+            </a:solidFill>
+            <a:prstDash val="solid"/>
+          </a:ln>
+        </p:spPr>
+      </p:sp>
+      <p:sp>
+        <p:nvSpPr>
+          <p:cNvPr id="23" name="Text 21"/>
+          <p:cNvSpPr/>
+          <p:nvPr/>
+        </p:nvSpPr>
+        <p:spPr>
+          <a:xfrm>
+            <a:off x="795528" y="4389120"/>
+            <a:ext cx="1875133" cy="475488"/>
+          </a:xfrm>
+          <a:prstGeom prst="rect">
+            <a:avLst/>
+          </a:prstGeom>
+          <a:noFill/>
+          <a:ln/>
+        </p:spPr>
+        <p:txBody>
+          <a:bodyPr wrap="square" lIns="0" tIns="0" rIns="0" bIns="0" rtlCol="0" anchor="ctr"/>
+          <a:lstStyle/>
+          <a:p>
+            <a:pPr indent="0" marL="0">
+              <a:lnSpc>
+                <a:spcPct val="120000"/>
+              </a:lnSpc>
+              <a:buNone/>
+            </a:pPr>
+            <a:r>
+              <a:rPr lang="en-US" sz="1150" dirty="0">
+                <a:solidFill>
+                  <a:srgbClr val="718096"/>
+                </a:solidFill>
+                <a:latin typeface="Pretendard" pitchFamily="34" charset="0"/>
+                <a:ea typeface="Pretendard" pitchFamily="34" charset="-122"/>
+                <a:cs typeface="Pretendard" pitchFamily="34" charset="-120"/>
+              </a:rPr>
+              <a:t>(-) 담보대출 조달</a:t>
+            </a:r>
+            <a:endParaRPr lang="en-US" sz="1150" dirty="0"/>
+          </a:p>
+        </p:txBody>
+      </p:sp>
+      <p:sp>
+        <p:nvSpPr>
+          <p:cNvPr id="24" name="Text 22"/>
+          <p:cNvSpPr/>
+          <p:nvPr/>
+        </p:nvSpPr>
+        <p:spPr>
+          <a:xfrm>
+            <a:off x="2670661" y="4389120"/>
+            <a:ext cx="3059427" cy="475488"/>
+          </a:xfrm>
+          <a:prstGeom prst="rect">
+            <a:avLst/>
+          </a:prstGeom>
+          <a:noFill/>
+          <a:ln/>
+        </p:spPr>
+        <p:txBody>
+          <a:bodyPr wrap="square" lIns="0" tIns="0" rIns="0" bIns="0" rtlCol="0" anchor="ctr"/>
+          <a:lstStyle/>
+          <a:p>
+            <a:pPr indent="0" marL="0">
+              <a:lnSpc>
+                <a:spcPct val="120000"/>
+              </a:lnSpc>
+              <a:buNone/>
+            </a:pPr>
+            <a:r>
+              <a:rPr lang="en-US" sz="1150" b="1" dirty="0">
+                <a:solidFill>
+                  <a:srgbClr val="10161F"/>
+                </a:solidFill>
+                <a:latin typeface="Pretendard" pitchFamily="34" charset="0"/>
+                <a:ea typeface="Pretendard" pitchFamily="34" charset="-122"/>
+                <a:cs typeface="Pretendard" pitchFamily="34" charset="-120"/>
+              </a:rPr>
+              <a:t>90.0억 원</a:t>
+            </a:r>
+            <a:endParaRPr lang="en-US" sz="1150" dirty="0"/>
+          </a:p>
+        </p:txBody>
+      </p:sp>
+      <p:sp>
+        <p:nvSpPr>
+          <p:cNvPr id="25" name="Shape 23"/>
+          <p:cNvSpPr/>
+          <p:nvPr/>
+        </p:nvSpPr>
+        <p:spPr>
+          <a:xfrm>
+            <a:off x="795528" y="4864608"/>
+            <a:ext cx="4934560" cy="0"/>
+          </a:xfrm>
+          <a:prstGeom prst="line">
+            <a:avLst/>
+          </a:prstGeom>
+          <a:noFill/>
+          <a:ln w="3810">
+            <a:solidFill>
+              <a:srgbClr val="CBD5E0"/>
+            </a:solidFill>
+            <a:prstDash val="solid"/>
+          </a:ln>
+        </p:spPr>
+      </p:sp>
+      <p:sp>
+        <p:nvSpPr>
+          <p:cNvPr id="26" name="Text 24"/>
+          <p:cNvSpPr/>
+          <p:nvPr/>
+        </p:nvSpPr>
+        <p:spPr>
+          <a:xfrm>
+            <a:off x="795528" y="4864608"/>
+            <a:ext cx="1875133" cy="475488"/>
+          </a:xfrm>
+          <a:prstGeom prst="rect">
+            <a:avLst/>
+          </a:prstGeom>
+          <a:noFill/>
+          <a:ln/>
+        </p:spPr>
+        <p:txBody>
+          <a:bodyPr wrap="square" lIns="0" tIns="0" rIns="0" bIns="0" rtlCol="0" anchor="ctr"/>
+          <a:lstStyle/>
+          <a:p>
+            <a:pPr indent="0" marL="0">
+              <a:lnSpc>
+                <a:spcPct val="120000"/>
+              </a:lnSpc>
+              <a:buNone/>
+            </a:pPr>
+            <a:r>
+              <a:rPr lang="en-US" sz="1150" dirty="0">
+                <a:solidFill>
+                  <a:srgbClr val="718096"/>
+                </a:solidFill>
+                <a:latin typeface="Pretendard" pitchFamily="34" charset="0"/>
+                <a:ea typeface="Pretendard" pitchFamily="34" charset="-122"/>
+                <a:cs typeface="Pretendard" pitchFamily="34" charset="-120"/>
+              </a:rPr>
+              <a:t>실투자금 (Net Equity)</a:t>
+            </a:r>
+            <a:endParaRPr lang="en-US" sz="1150" dirty="0"/>
+          </a:p>
+        </p:txBody>
+      </p:sp>
+      <p:sp>
+        <p:nvSpPr>
+          <p:cNvPr id="27" name="Text 25"/>
+          <p:cNvSpPr/>
+          <p:nvPr/>
+        </p:nvSpPr>
+        <p:spPr>
+          <a:xfrm>
+            <a:off x="2670661" y="4864608"/>
+            <a:ext cx="3059427" cy="475488"/>
+          </a:xfrm>
+          <a:prstGeom prst="rect">
+            <a:avLst/>
+          </a:prstGeom>
+          <a:noFill/>
+          <a:ln/>
+        </p:spPr>
+        <p:txBody>
+          <a:bodyPr wrap="square" lIns="0" tIns="0" rIns="0" bIns="0" rtlCol="0" anchor="ctr"/>
+          <a:lstStyle/>
+          <a:p>
+            <a:pPr indent="0" marL="0">
+              <a:lnSpc>
+                <a:spcPct val="120000"/>
+              </a:lnSpc>
+              <a:buNone/>
+            </a:pPr>
+            <a:r>
+              <a:rPr lang="en-US" sz="1150" b="1" dirty="0">
+                <a:solidFill>
+                  <a:srgbClr val="10161F"/>
+                </a:solidFill>
+                <a:latin typeface="Pretendard" pitchFamily="34" charset="0"/>
+                <a:ea typeface="Pretendard" pitchFamily="34" charset="-122"/>
+                <a:cs typeface="Pretendard" pitchFamily="34" charset="-120"/>
+              </a:rPr>
+              <a:t>90.9억 원</a:t>
+            </a:r>
+            <a:endParaRPr lang="en-US" sz="1150" dirty="0"/>
+          </a:p>
+        </p:txBody>
+      </p:sp>
+      <p:sp>
+        <p:nvSpPr>
+          <p:cNvPr id="28" name="Shape 26"/>
+          <p:cNvSpPr/>
+          <p:nvPr/>
+        </p:nvSpPr>
+        <p:spPr>
+          <a:xfrm>
+            <a:off x="6233008" y="1417320"/>
+            <a:ext cx="5391760" cy="4389120"/>
+          </a:xfrm>
+          <a:prstGeom prst="roundRect">
+            <a:avLst>
+              <a:gd name="adj" fmla="val 1250"/>
+            </a:avLst>
+          </a:prstGeom>
+          <a:solidFill>
+            <a:srgbClr val="F7FAFC"/>
+          </a:solidFill>
+          <a:ln w="6350">
+            <a:solidFill>
+              <a:srgbClr val="CBD5E0"/>
+            </a:solidFill>
+            <a:prstDash val="solid"/>
+          </a:ln>
+        </p:spPr>
+      </p:sp>
+      <p:sp>
+        <p:nvSpPr>
+          <p:cNvPr id="29" name="Text 27"/>
+          <p:cNvSpPr/>
+          <p:nvPr/>
+        </p:nvSpPr>
+        <p:spPr>
+          <a:xfrm>
+            <a:off x="6461608" y="1618488"/>
+            <a:ext cx="4934560" cy="320040"/>
+          </a:xfrm>
+          <a:prstGeom prst="rect">
+            <a:avLst/>
+          </a:prstGeom>
+          <a:noFill/>
+          <a:ln/>
+        </p:spPr>
+        <p:txBody>
+          <a:bodyPr wrap="square" lIns="0" tIns="0" rIns="0" bIns="0" rtlCol="0" anchor="ctr"/>
+          <a:lstStyle/>
+          <a:p>
+            <a:pPr indent="0" marL="0">
+              <a:buNone/>
+            </a:pPr>
+            <a:r>
+              <a:rPr lang="en-US" sz="1350" b="1" dirty="0">
+                <a:solidFill>
+                  <a:srgbClr val="977024"/>
+                </a:solidFill>
+                <a:latin typeface="Pretendard" pitchFamily="34" charset="0"/>
+                <a:ea typeface="Pretendard" pitchFamily="34" charset="-122"/>
+                <a:cs typeface="Pretendard" pitchFamily="34" charset="-120"/>
+              </a:rPr>
+              <a:t>2. LTV 시나리오별 레버리지 효과</a:t>
+            </a:r>
+            <a:endParaRPr lang="en-US" sz="1350" dirty="0"/>
+          </a:p>
+        </p:txBody>
+      </p:sp>
       <p:graphicFrame>
         <p:nvGraphicFramePr>
-          <p:cNvPr id="7" name="Table 0"/>
+          <p:cNvPr id="10" name="Table 0"/>
           <p:cNvGraphicFramePr>
             <a:graphicFrameLocks noGrp="1"/>
           </p:cNvGraphicFramePr>
@@ -7430,20 +12273,20 @@
           </p:nvPr>
         </p:nvGraphicFramePr>
         <p:xfrm>
-          <a:off x="566928" y="1737360"/>
-          <a:ext cx="6675120" cy="914400"/>
+          <a:off x="6461608" y="2057400"/>
+          <a:ext cx="4934560" cy="914400"/>
         </p:xfrm>
         <a:graphic>
           <a:graphicData uri="http://schemas.openxmlformats.org/drawingml/2006/table">
             <a:tbl>
               <a:tblPr/>
               <a:tblGrid>
-                <a:gridCol w="1668780"/>
-                <a:gridCol w="1668780"/>
-                <a:gridCol w="1668780"/>
-                <a:gridCol w="1668780"/>
+                <a:gridCol w="1463040"/>
+                <a:gridCol w="1005840"/>
+                <a:gridCol w="1280160"/>
+                <a:gridCol w="1280160"/>
               </a:tblGrid>
-              <a:tr h="420624">
+              <a:tr h="457200">
                 <a:tc>
                   <a:txBody>
                     <a:bodyPr/>
@@ -7453,7 +12296,7 @@
                         <a:buNone/>
                       </a:pPr>
                       <a:r>
-                        <a:rPr lang="en-US" sz="1300" b="1" dirty="0">
+                        <a:rPr lang="en-US" sz="1100" b="1" dirty="0">
                           <a:solidFill>
                             <a:srgbClr val="718096"/>
                           </a:solidFill>
@@ -7463,7 +12306,7 @@
                         </a:rPr>
                         <a:t>구분</a:t>
                       </a:r>
-                      <a:endParaRPr lang="en-US" sz="1300" dirty="0">
+                      <a:endParaRPr lang="en-US" sz="1100" dirty="0">
                         <a:latin typeface="Pretendard" charset="0"/>
                         <a:ea typeface="Pretendard" charset="0"/>
                         <a:cs typeface="Pretendard" charset="0"/>
@@ -7521,7 +12364,7 @@
                         <a:buNone/>
                       </a:pPr>
                       <a:r>
-                        <a:rPr lang="en-US" sz="1300" b="1" dirty="0">
+                        <a:rPr lang="en-US" sz="1100" b="1" dirty="0">
                           <a:solidFill>
                             <a:srgbClr val="718096"/>
                           </a:solidFill>
@@ -7529,37 +12372,9 @@
                           <a:ea typeface="Pretendard" pitchFamily="34" charset="-122"/>
                           <a:cs typeface="Pretendard" pitchFamily="34" charset="-120"/>
                         </a:rPr>
-                        <a:t>임차 </a:t>
+                        <a:t>대출비율</a:t>
                       </a:r>
-                      <a:pPr indent="0" marL="0">
-                        <a:buNone/>
-                      </a:pPr>
-                      <a:r>
-                        <a:rPr lang="en-US" sz="1300" b="1" dirty="0">
-                          <a:solidFill>
-                            <a:srgbClr val="718096"/>
-                          </a:solidFill>
-                          <a:latin typeface="Pretendard" pitchFamily="34" charset="0"/>
-                          <a:ea typeface="Pretendard" pitchFamily="34" charset="-122"/>
-                          <a:cs typeface="Pretendard" pitchFamily="34" charset="-120"/>
-                        </a:rPr>
-                        <a:t>유지 </a:t>
-                      </a:r>
-                      <a:pPr indent="0" marL="0">
-                        <a:buNone/>
-                      </a:pPr>
-                      <a:r>
-                        <a:rPr lang="en-US" sz="1300" b="1" dirty="0">
-                          <a:solidFill>
-                            <a:srgbClr val="718096"/>
-                          </a:solidFill>
-                          <a:latin typeface="Pretendard" pitchFamily="34" charset="0"/>
-                          <a:ea typeface="Pretendard" pitchFamily="34" charset="-122"/>
-                          <a:cs typeface="Pretendard" pitchFamily="34" charset="-120"/>
-                        </a:rPr>
-                        <a:t>시</a:t>
-                      </a:r>
-                      <a:endParaRPr lang="en-US" sz="1300" dirty="0">
+                      <a:endParaRPr lang="en-US" sz="1100" dirty="0">
                         <a:latin typeface="Pretendard" charset="0"/>
                         <a:ea typeface="Pretendard" charset="0"/>
                         <a:cs typeface="Pretendard" charset="0"/>
@@ -7617,7 +12432,7 @@
                         <a:buNone/>
                       </a:pPr>
                       <a:r>
-                        <a:rPr lang="en-US" sz="1300" b="1" dirty="0">
+                        <a:rPr lang="en-US" sz="1100" b="1" dirty="0">
                           <a:solidFill>
                             <a:srgbClr val="718096"/>
                           </a:solidFill>
@@ -7625,37 +12440,9 @@
                           <a:ea typeface="Pretendard" pitchFamily="34" charset="-122"/>
                           <a:cs typeface="Pretendard" pitchFamily="34" charset="-120"/>
                         </a:rPr>
-                        <a:t>사옥 </a:t>
+                        <a:t>실투자금</a:t>
                       </a:r>
-                      <a:pPr indent="0" marL="0">
-                        <a:buNone/>
-                      </a:pPr>
-                      <a:r>
-                        <a:rPr lang="en-US" sz="1300" b="1" dirty="0">
-                          <a:solidFill>
-                            <a:srgbClr val="718096"/>
-                          </a:solidFill>
-                          <a:latin typeface="Pretendard" pitchFamily="34" charset="0"/>
-                          <a:ea typeface="Pretendard" pitchFamily="34" charset="-122"/>
-                          <a:cs typeface="Pretendard" pitchFamily="34" charset="-120"/>
-                        </a:rPr>
-                        <a:t>자가소유 </a:t>
-                      </a:r>
-                      <a:pPr indent="0" marL="0">
-                        <a:buNone/>
-                      </a:pPr>
-                      <a:r>
-                        <a:rPr lang="en-US" sz="1300" b="1" dirty="0">
-                          <a:solidFill>
-                            <a:srgbClr val="718096"/>
-                          </a:solidFill>
-                          <a:latin typeface="Pretendard" pitchFamily="34" charset="0"/>
-                          <a:ea typeface="Pretendard" pitchFamily="34" charset="-122"/>
-                          <a:cs typeface="Pretendard" pitchFamily="34" charset="-120"/>
-                        </a:rPr>
-                        <a:t>시</a:t>
-                      </a:r>
-                      <a:endParaRPr lang="en-US" sz="1300" dirty="0">
+                      <a:endParaRPr lang="en-US" sz="1100" dirty="0">
                         <a:latin typeface="Pretendard" charset="0"/>
                         <a:ea typeface="Pretendard" charset="0"/>
                         <a:cs typeface="Pretendard" charset="0"/>
@@ -7713,7 +12500,7 @@
                         <a:buNone/>
                       </a:pPr>
                       <a:r>
-                        <a:rPr lang="en-US" sz="1300" b="1" dirty="0">
+                        <a:rPr lang="en-US" sz="1100" b="1" dirty="0">
                           <a:solidFill>
                             <a:srgbClr val="718096"/>
                           </a:solidFill>
@@ -7721,23 +12508,9 @@
                           <a:ea typeface="Pretendard" pitchFamily="34" charset="-122"/>
                           <a:cs typeface="Pretendard" pitchFamily="34" charset="-120"/>
                         </a:rPr>
-                        <a:t>절감 </a:t>
+                        <a:t>예상수익률</a:t>
                       </a:r>
-                      <a:pPr indent="0" marL="0">
-                        <a:buNone/>
-                      </a:pPr>
-                      <a:r>
-                        <a:rPr lang="en-US" sz="1300" b="1" dirty="0">
-                          <a:solidFill>
-                            <a:srgbClr val="718096"/>
-                          </a:solidFill>
-                          <a:latin typeface="Pretendard" pitchFamily="34" charset="0"/>
-                          <a:ea typeface="Pretendard" pitchFamily="34" charset="-122"/>
-                          <a:cs typeface="Pretendard" pitchFamily="34" charset="-120"/>
-                        </a:rPr>
-                        <a:t>효과</a:t>
-                      </a:r>
-                      <a:endParaRPr lang="en-US" sz="1300" dirty="0">
+                      <a:endParaRPr lang="en-US" sz="1100" dirty="0">
                         <a:latin typeface="Pretendard" charset="0"/>
                         <a:ea typeface="Pretendard" charset="0"/>
                         <a:cs typeface="Pretendard" charset="0"/>
@@ -7787,7 +12560,7 @@
                   </a:tcPr>
                 </a:tc>
               </a:tr>
-              <a:tr h="420624">
+              <a:tr h="457200">
                 <a:tc>
                   <a:txBody>
                     <a:bodyPr/>
@@ -7797,7 +12570,7 @@
                         <a:buNone/>
                       </a:pPr>
                       <a:r>
-                        <a:rPr lang="en-US" sz="1300" b="1" dirty="0">
+                        <a:rPr lang="en-US" sz="1100" b="1" dirty="0">
                           <a:solidFill>
                             <a:srgbClr val="10161F"/>
                           </a:solidFill>
@@ -7805,13 +12578,13 @@
                           <a:ea typeface="Pretendard" pitchFamily="34" charset="-122"/>
                           <a:cs typeface="Pretendard" pitchFamily="34" charset="-120"/>
                         </a:rPr>
-                        <a:t>연간 </a:t>
+                        <a:t>전액 </a:t>
                       </a:r>
                       <a:pPr indent="0" marL="0">
                         <a:buNone/>
                       </a:pPr>
                       <a:r>
-                        <a:rPr lang="en-US" sz="1300" b="1" dirty="0">
+                        <a:rPr lang="en-US" sz="1100" b="1" dirty="0">
                           <a:solidFill>
                             <a:srgbClr val="10161F"/>
                           </a:solidFill>
@@ -7819,13 +12592,13 @@
                           <a:ea typeface="Pretendard" pitchFamily="34" charset="-122"/>
                           <a:cs typeface="Pretendard" pitchFamily="34" charset="-120"/>
                         </a:rPr>
-                        <a:t>소요 </a:t>
+                        <a:t>자기자본 </a:t>
                       </a:r>
                       <a:pPr indent="0" marL="0">
                         <a:buNone/>
                       </a:pPr>
                       <a:r>
-                        <a:rPr lang="en-US" sz="1300" b="1" dirty="0">
+                        <a:rPr lang="en-US" sz="1100" b="1" dirty="0">
                           <a:solidFill>
                             <a:srgbClr val="10161F"/>
                           </a:solidFill>
@@ -7833,9 +12606,9 @@
                           <a:ea typeface="Pretendard" pitchFamily="34" charset="-122"/>
                           <a:cs typeface="Pretendard" pitchFamily="34" charset="-120"/>
                         </a:rPr>
-                        <a:t>비용</a:t>
+                        <a:t>(무차입)</a:t>
                       </a:r>
-                      <a:endParaRPr lang="en-US" sz="1300" dirty="0">
+                      <a:endParaRPr lang="en-US" sz="1100" dirty="0">
                         <a:latin typeface="Pretendard" charset="0"/>
                         <a:ea typeface="Pretendard" charset="0"/>
                         <a:cs typeface="Pretendard" charset="0"/>
@@ -7893,7 +12666,7 @@
                         <a:buNone/>
                       </a:pPr>
                       <a:r>
-                        <a:rPr lang="en-US" sz="1300" dirty="0">
+                        <a:rPr lang="en-US" sz="1100" dirty="0">
                           <a:solidFill>
                             <a:srgbClr val="10161F"/>
                           </a:solidFill>
@@ -7901,51 +12674,9 @@
                           <a:ea typeface="Pretendard" pitchFamily="34" charset="-122"/>
                           <a:cs typeface="Pretendard" pitchFamily="34" charset="-120"/>
                         </a:rPr>
-                        <a:t>주변 </a:t>
+                        <a:t>0%</a:t>
                       </a:r>
-                      <a:pPr indent="0" marL="0">
-                        <a:buNone/>
-                      </a:pPr>
-                      <a:r>
-                        <a:rPr lang="en-US" sz="1300" dirty="0">
-                          <a:solidFill>
-                            <a:srgbClr val="10161F"/>
-                          </a:solidFill>
-                          <a:latin typeface="Pretendard" pitchFamily="34" charset="0"/>
-                          <a:ea typeface="Pretendard" pitchFamily="34" charset="-122"/>
-                          <a:cs typeface="Pretendard" pitchFamily="34" charset="-120"/>
-                        </a:rPr>
-                        <a:t>시장 </a:t>
-                      </a:r>
-                      <a:pPr indent="0" marL="0">
-                        <a:buNone/>
-                      </a:pPr>
-                      <a:r>
-                        <a:rPr lang="en-US" sz="1300" dirty="0">
-                          <a:solidFill>
-                            <a:srgbClr val="10161F"/>
-                          </a:solidFill>
-                          <a:latin typeface="Pretendard" pitchFamily="34" charset="0"/>
-                          <a:ea typeface="Pretendard" pitchFamily="34" charset="-122"/>
-                          <a:cs typeface="Pretendard" pitchFamily="34" charset="-120"/>
-                        </a:rPr>
-                        <a:t>임대료 </a:t>
-                      </a:r>
-                      <a:pPr indent="0" marL="0">
-                        <a:buNone/>
-                      </a:pPr>
-                      <a:r>
-                        <a:rPr lang="en-US" sz="1300" dirty="0">
-                          <a:solidFill>
-                            <a:srgbClr val="10161F"/>
-                          </a:solidFill>
-                          <a:latin typeface="Pretendard" pitchFamily="34" charset="0"/>
-                          <a:ea typeface="Pretendard" pitchFamily="34" charset="-122"/>
-                          <a:cs typeface="Pretendard" pitchFamily="34" charset="-120"/>
-                        </a:rPr>
-                        <a:t>지출</a:t>
-                      </a:r>
-                      <a:endParaRPr lang="en-US" sz="1300" dirty="0">
+                      <a:endParaRPr lang="en-US" sz="1100" dirty="0">
                         <a:latin typeface="Pretendard" charset="0"/>
                         <a:ea typeface="Pretendard" charset="0"/>
                         <a:cs typeface="Pretendard" charset="0"/>
@@ -8003,7 +12734,7 @@
                         <a:buNone/>
                       </a:pPr>
                       <a:r>
-                        <a:rPr lang="en-US" sz="1300" dirty="0">
+                        <a:rPr lang="en-US" sz="1100" dirty="0">
                           <a:solidFill>
                             <a:srgbClr val="10161F"/>
                           </a:solidFill>
@@ -8011,65 +12742,9 @@
                           <a:ea typeface="Pretendard" pitchFamily="34" charset="-122"/>
                           <a:cs typeface="Pretendard" pitchFamily="34" charset="-120"/>
                         </a:rPr>
-                        <a:t>대출 </a:t>
+                        <a:t>180.9억</a:t>
                       </a:r>
-                      <a:pPr indent="0" marL="0">
-                        <a:buNone/>
-                      </a:pPr>
-                      <a:r>
-                        <a:rPr lang="en-US" sz="1300" dirty="0">
-                          <a:solidFill>
-                            <a:srgbClr val="10161F"/>
-                          </a:solidFill>
-                          <a:latin typeface="Pretendard" pitchFamily="34" charset="0"/>
-                          <a:ea typeface="Pretendard" pitchFamily="34" charset="-122"/>
-                          <a:cs typeface="Pretendard" pitchFamily="34" charset="-120"/>
-                        </a:rPr>
-                        <a:t>이자 </a:t>
-                      </a:r>
-                      <a:pPr indent="0" marL="0">
-                        <a:buNone/>
-                      </a:pPr>
-                      <a:r>
-                        <a:rPr lang="en-US" sz="1300" dirty="0">
-                          <a:solidFill>
-                            <a:srgbClr val="10161F"/>
-                          </a:solidFill>
-                          <a:latin typeface="Pretendard" pitchFamily="34" charset="0"/>
-                          <a:ea typeface="Pretendard" pitchFamily="34" charset="-122"/>
-                          <a:cs typeface="Pretendard" pitchFamily="34" charset="-120"/>
-                        </a:rPr>
-                        <a:t>+ </a:t>
-                      </a:r>
-                      <a:pPr indent="0" marL="0">
-                        <a:buNone/>
-                      </a:pPr>
-                      <a:r>
-                        <a:rPr lang="en-US" sz="1300" dirty="0">
-                          <a:solidFill>
-                            <a:srgbClr val="10161F"/>
-                          </a:solidFill>
-                          <a:latin typeface="Pretendard" pitchFamily="34" charset="0"/>
-                          <a:ea typeface="Pretendard" pitchFamily="34" charset="-122"/>
-                          <a:cs typeface="Pretendard" pitchFamily="34" charset="-120"/>
-                        </a:rPr>
-                        <a:t>운영 </a:t>
-                      </a:r>
-                      <a:pPr indent="0" marL="0">
-                        <a:buNone/>
-                      </a:pPr>
-                      <a:r>
-                        <a:rPr lang="en-US" sz="1300" dirty="0">
-                          <a:solidFill>
-                            <a:srgbClr val="10161F"/>
-                          </a:solidFill>
-                          <a:latin typeface="Pretendard" pitchFamily="34" charset="0"/>
-                          <a:ea typeface="Pretendard" pitchFamily="34" charset="-122"/>
-                          <a:cs typeface="Pretendard" pitchFamily="34" charset="-120"/>
-                        </a:rPr>
-                        <a:t>관리비</a:t>
-                      </a:r>
-                      <a:endParaRPr lang="en-US" sz="1300" dirty="0">
+                      <a:endParaRPr lang="en-US" sz="1100" dirty="0">
                         <a:latin typeface="Pretendard" charset="0"/>
                         <a:ea typeface="Pretendard" charset="0"/>
                         <a:cs typeface="Pretendard" charset="0"/>
@@ -8127,7 +12802,7 @@
                         <a:buNone/>
                       </a:pPr>
                       <a:r>
-                        <a:rPr lang="en-US" sz="1300" dirty="0">
+                        <a:rPr lang="en-US" sz="1100" dirty="0">
                           <a:solidFill>
                             <a:srgbClr val="10161F"/>
                           </a:solidFill>
@@ -8135,37 +12810,9 @@
                           <a:ea typeface="Pretendard" pitchFamily="34" charset="-122"/>
                           <a:cs typeface="Pretendard" pitchFamily="34" charset="-120"/>
                         </a:rPr>
-                        <a:t>연간 </a:t>
+                        <a:t>3.78%</a:t>
                       </a:r>
-                      <a:pPr indent="0" marL="0">
-                        <a:buNone/>
-                      </a:pPr>
-                      <a:r>
-                        <a:rPr lang="en-US" sz="1300" dirty="0">
-                          <a:solidFill>
-                            <a:srgbClr val="10161F"/>
-                          </a:solidFill>
-                          <a:latin typeface="Pretendard" pitchFamily="34" charset="0"/>
-                          <a:ea typeface="Pretendard" pitchFamily="34" charset="-122"/>
-                          <a:cs typeface="Pretendard" pitchFamily="34" charset="-120"/>
-                        </a:rPr>
-                        <a:t>임대료 </a:t>
-                      </a:r>
-                      <a:pPr indent="0" marL="0">
-                        <a:buNone/>
-                      </a:pPr>
-                      <a:r>
-                        <a:rPr lang="en-US" sz="1300" dirty="0">
-                          <a:solidFill>
-                            <a:srgbClr val="10161F"/>
-                          </a:solidFill>
-                          <a:latin typeface="Pretendard" pitchFamily="34" charset="0"/>
-                          <a:ea typeface="Pretendard" pitchFamily="34" charset="-122"/>
-                          <a:cs typeface="Pretendard" pitchFamily="34" charset="-120"/>
-                        </a:rPr>
-                        <a:t>절감</a:t>
-                      </a:r>
-                      <a:endParaRPr lang="en-US" sz="1300" dirty="0">
+                      <a:endParaRPr lang="en-US" sz="1100" dirty="0">
                         <a:latin typeface="Pretendard" charset="0"/>
                         <a:ea typeface="Pretendard" charset="0"/>
                         <a:cs typeface="Pretendard" charset="0"/>
@@ -8215,7 +12862,7 @@
                   </a:tcPr>
                 </a:tc>
               </a:tr>
-              <a:tr h="420624">
+              <a:tr h="457200">
                 <a:tc>
                   <a:txBody>
                     <a:bodyPr/>
@@ -8225,7 +12872,7 @@
                         <a:buNone/>
                       </a:pPr>
                       <a:r>
-                        <a:rPr lang="en-US" sz="1300" b="1" dirty="0">
+                        <a:rPr lang="en-US" sz="1100" b="1" dirty="0">
                           <a:solidFill>
                             <a:srgbClr val="10161F"/>
                           </a:solidFill>
@@ -8233,13 +12880,13 @@
                           <a:ea typeface="Pretendard" pitchFamily="34" charset="-122"/>
                           <a:cs typeface="Pretendard" pitchFamily="34" charset="-120"/>
                         </a:rPr>
-                        <a:t>자산 </a:t>
+                        <a:t>보수적 </a:t>
                       </a:r>
                       <a:pPr indent="0" marL="0">
                         <a:buNone/>
                       </a:pPr>
                       <a:r>
-                        <a:rPr lang="en-US" sz="1300" b="1" dirty="0">
+                        <a:rPr lang="en-US" sz="1100" b="1" dirty="0">
                           <a:solidFill>
                             <a:srgbClr val="10161F"/>
                           </a:solidFill>
@@ -8247,9 +12894,23 @@
                           <a:ea typeface="Pretendard" pitchFamily="34" charset="-122"/>
                           <a:cs typeface="Pretendard" pitchFamily="34" charset="-120"/>
                         </a:rPr>
-                        <a:t>가치</a:t>
+                        <a:t>차입 </a:t>
                       </a:r>
-                      <a:endParaRPr lang="en-US" sz="1300" dirty="0">
+                      <a:pPr indent="0" marL="0">
+                        <a:buNone/>
+                      </a:pPr>
+                      <a:r>
+                        <a:rPr lang="en-US" sz="1100" b="1" dirty="0">
+                          <a:solidFill>
+                            <a:srgbClr val="10161F"/>
+                          </a:solidFill>
+                          <a:latin typeface="Pretendard" pitchFamily="34" charset="0"/>
+                          <a:ea typeface="Pretendard" pitchFamily="34" charset="-122"/>
+                          <a:cs typeface="Pretendard" pitchFamily="34" charset="-120"/>
+                        </a:rPr>
+                        <a:t>(안정형)</a:t>
+                      </a:r>
+                      <a:endParaRPr lang="en-US" sz="1100" dirty="0">
                         <a:latin typeface="Pretendard" charset="0"/>
                         <a:ea typeface="Pretendard" charset="0"/>
                         <a:cs typeface="Pretendard" charset="0"/>
@@ -8307,7 +12968,7 @@
                         <a:buNone/>
                       </a:pPr>
                       <a:r>
-                        <a:rPr lang="en-US" sz="1300" dirty="0">
+                        <a:rPr lang="en-US" sz="1100" dirty="0">
                           <a:solidFill>
                             <a:srgbClr val="10161F"/>
                           </a:solidFill>
@@ -8315,23 +12976,9 @@
                           <a:ea typeface="Pretendard" pitchFamily="34" charset="-122"/>
                           <a:cs typeface="Pretendard" pitchFamily="34" charset="-120"/>
                         </a:rPr>
-                        <a:t>비용 </a:t>
+                        <a:t>40%</a:t>
                       </a:r>
-                      <a:pPr indent="0" marL="0">
-                        <a:buNone/>
-                      </a:pPr>
-                      <a:r>
-                        <a:rPr lang="en-US" sz="1300" dirty="0">
-                          <a:solidFill>
-                            <a:srgbClr val="10161F"/>
-                          </a:solidFill>
-                          <a:latin typeface="Pretendard" pitchFamily="34" charset="0"/>
-                          <a:ea typeface="Pretendard" pitchFamily="34" charset="-122"/>
-                          <a:cs typeface="Pretendard" pitchFamily="34" charset="-120"/>
-                        </a:rPr>
-                        <a:t>소멸</a:t>
-                      </a:r>
-                      <a:endParaRPr lang="en-US" sz="1300" dirty="0">
+                      <a:endParaRPr lang="en-US" sz="1100" dirty="0">
                         <a:latin typeface="Pretendard" charset="0"/>
                         <a:ea typeface="Pretendard" charset="0"/>
                         <a:cs typeface="Pretendard" charset="0"/>
@@ -8389,7 +13036,7 @@
                         <a:buNone/>
                       </a:pPr>
                       <a:r>
-                        <a:rPr lang="en-US" sz="1300" dirty="0">
+                        <a:rPr lang="en-US" sz="1100" dirty="0">
                           <a:solidFill>
                             <a:srgbClr val="10161F"/>
                           </a:solidFill>
@@ -8397,51 +13044,9 @@
                           <a:ea typeface="Pretendard" pitchFamily="34" charset="-122"/>
                           <a:cs typeface="Pretendard" pitchFamily="34" charset="-120"/>
                         </a:rPr>
-                        <a:t>건물/토지 </a:t>
+                        <a:t>108.9억</a:t>
                       </a:r>
-                      <a:pPr indent="0" marL="0">
-                        <a:buNone/>
-                      </a:pPr>
-                      <a:r>
-                        <a:rPr lang="en-US" sz="1300" dirty="0">
-                          <a:solidFill>
-                            <a:srgbClr val="10161F"/>
-                          </a:solidFill>
-                          <a:latin typeface="Pretendard" pitchFamily="34" charset="0"/>
-                          <a:ea typeface="Pretendard" pitchFamily="34" charset="-122"/>
-                          <a:cs typeface="Pretendard" pitchFamily="34" charset="-120"/>
-                        </a:rPr>
-                        <a:t>가치 </a:t>
-                      </a:r>
-                      <a:pPr indent="0" marL="0">
-                        <a:buNone/>
-                      </a:pPr>
-                      <a:r>
-                        <a:rPr lang="en-US" sz="1300" dirty="0">
-                          <a:solidFill>
-                            <a:srgbClr val="10161F"/>
-                          </a:solidFill>
-                          <a:latin typeface="Pretendard" pitchFamily="34" charset="0"/>
-                          <a:ea typeface="Pretendard" pitchFamily="34" charset="-122"/>
-                          <a:cs typeface="Pretendard" pitchFamily="34" charset="-120"/>
-                        </a:rPr>
-                        <a:t>상승 </a:t>
-                      </a:r>
-                      <a:pPr indent="0" marL="0">
-                        <a:buNone/>
-                      </a:pPr>
-                      <a:r>
-                        <a:rPr lang="en-US" sz="1300" dirty="0">
-                          <a:solidFill>
-                            <a:srgbClr val="10161F"/>
-                          </a:solidFill>
-                          <a:latin typeface="Pretendard" pitchFamily="34" charset="0"/>
-                          <a:ea typeface="Pretendard" pitchFamily="34" charset="-122"/>
-                          <a:cs typeface="Pretendard" pitchFamily="34" charset="-120"/>
-                        </a:rPr>
-                        <a:t>유인</a:t>
-                      </a:r>
-                      <a:endParaRPr lang="en-US" sz="1300" dirty="0">
+                      <a:endParaRPr lang="en-US" sz="1100" dirty="0">
                         <a:latin typeface="Pretendard" charset="0"/>
                         <a:ea typeface="Pretendard" charset="0"/>
                         <a:cs typeface="Pretendard" charset="0"/>
@@ -8499,7 +13104,7 @@
                         <a:buNone/>
                       </a:pPr>
                       <a:r>
-                        <a:rPr lang="en-US" sz="1300" dirty="0">
+                        <a:rPr lang="en-US" sz="1100" dirty="0">
                           <a:solidFill>
                             <a:srgbClr val="10161F"/>
                           </a:solidFill>
@@ -8507,37 +13112,9 @@
                           <a:ea typeface="Pretendard" pitchFamily="34" charset="-122"/>
                           <a:cs typeface="Pretendard" pitchFamily="34" charset="-120"/>
                         </a:rPr>
-                        <a:t>자본 </a:t>
+                        <a:t>3.11%</a:t>
                       </a:r>
-                      <a:pPr indent="0" marL="0">
-                        <a:buNone/>
-                      </a:pPr>
-                      <a:r>
-                        <a:rPr lang="en-US" sz="1300" dirty="0">
-                          <a:solidFill>
-                            <a:srgbClr val="10161F"/>
-                          </a:solidFill>
-                          <a:latin typeface="Pretendard" pitchFamily="34" charset="0"/>
-                          <a:ea typeface="Pretendard" pitchFamily="34" charset="-122"/>
-                          <a:cs typeface="Pretendard" pitchFamily="34" charset="-120"/>
-                        </a:rPr>
-                        <a:t>이득 </a:t>
-                      </a:r>
-                      <a:pPr indent="0" marL="0">
-                        <a:buNone/>
-                      </a:pPr>
-                      <a:r>
-                        <a:rPr lang="en-US" sz="1300" dirty="0">
-                          <a:solidFill>
-                            <a:srgbClr val="10161F"/>
-                          </a:solidFill>
-                          <a:latin typeface="Pretendard" pitchFamily="34" charset="0"/>
-                          <a:ea typeface="Pretendard" pitchFamily="34" charset="-122"/>
-                          <a:cs typeface="Pretendard" pitchFamily="34" charset="-120"/>
-                        </a:rPr>
-                        <a:t>형성</a:t>
-                      </a:r>
-                      <a:endParaRPr lang="en-US" sz="1300" dirty="0">
+                      <a:endParaRPr lang="en-US" sz="1100" dirty="0">
                         <a:latin typeface="Pretendard" charset="0"/>
                         <a:ea typeface="Pretendard" charset="0"/>
                         <a:cs typeface="Pretendard" charset="0"/>
@@ -8587,7 +13164,7 @@
                   </a:tcPr>
                 </a:tc>
               </a:tr>
-              <a:tr h="420624">
+              <a:tr h="457200">
                 <a:tc>
                   <a:txBody>
                     <a:bodyPr/>
@@ -8597,7 +13174,7 @@
                         <a:buNone/>
                       </a:pPr>
                       <a:r>
-                        <a:rPr lang="en-US" sz="1300" b="1" dirty="0">
+                        <a:rPr lang="en-US" sz="1100" b="1" dirty="0">
                           <a:solidFill>
                             <a:srgbClr val="10161F"/>
                           </a:solidFill>
@@ -8605,13 +13182,13 @@
                           <a:ea typeface="Pretendard" pitchFamily="34" charset="-122"/>
                           <a:cs typeface="Pretendard" pitchFamily="34" charset="-120"/>
                         </a:rPr>
-                        <a:t>세제 </a:t>
+                        <a:t>표준 </a:t>
                       </a:r>
                       <a:pPr indent="0" marL="0">
                         <a:buNone/>
                       </a:pPr>
                       <a:r>
-                        <a:rPr lang="en-US" sz="1300" b="1" dirty="0">
+                        <a:rPr lang="en-US" sz="1100" b="1" dirty="0">
                           <a:solidFill>
                             <a:srgbClr val="10161F"/>
                           </a:solidFill>
@@ -8619,9 +13196,23 @@
                           <a:ea typeface="Pretendard" pitchFamily="34" charset="-122"/>
                           <a:cs typeface="Pretendard" pitchFamily="34" charset="-120"/>
                         </a:rPr>
-                        <a:t>혜택</a:t>
+                        <a:t>차입 </a:t>
                       </a:r>
-                      <a:endParaRPr lang="en-US" sz="1300" dirty="0">
+                      <a:pPr indent="0" marL="0">
+                        <a:buNone/>
+                      </a:pPr>
+                      <a:r>
+                        <a:rPr lang="en-US" sz="1100" b="1" dirty="0">
+                          <a:solidFill>
+                            <a:srgbClr val="10161F"/>
+                          </a:solidFill>
+                          <a:latin typeface="Pretendard" pitchFamily="34" charset="0"/>
+                          <a:ea typeface="Pretendard" pitchFamily="34" charset="-122"/>
+                          <a:cs typeface="Pretendard" pitchFamily="34" charset="-120"/>
+                        </a:rPr>
+                        <a:t>(기본형)</a:t>
+                      </a:r>
+                      <a:endParaRPr lang="en-US" sz="1100" dirty="0">
                         <a:latin typeface="Pretendard" charset="0"/>
                         <a:ea typeface="Pretendard" charset="0"/>
                         <a:cs typeface="Pretendard" charset="0"/>
@@ -8679,7 +13270,7 @@
                         <a:buNone/>
                       </a:pPr>
                       <a:r>
-                        <a:rPr lang="en-US" sz="1300" dirty="0">
+                        <a:rPr lang="en-US" sz="1100" dirty="0">
                           <a:solidFill>
                             <a:srgbClr val="10161F"/>
                           </a:solidFill>
@@ -8687,37 +13278,9 @@
                           <a:ea typeface="Pretendard" pitchFamily="34" charset="-122"/>
                           <a:cs typeface="Pretendard" pitchFamily="34" charset="-120"/>
                         </a:rPr>
-                        <a:t>임대료 </a:t>
+                        <a:t>50%</a:t>
                       </a:r>
-                      <a:pPr indent="0" marL="0">
-                        <a:buNone/>
-                      </a:pPr>
-                      <a:r>
-                        <a:rPr lang="en-US" sz="1300" dirty="0">
-                          <a:solidFill>
-                            <a:srgbClr val="10161F"/>
-                          </a:solidFill>
-                          <a:latin typeface="Pretendard" pitchFamily="34" charset="0"/>
-                          <a:ea typeface="Pretendard" pitchFamily="34" charset="-122"/>
-                          <a:cs typeface="Pretendard" pitchFamily="34" charset="-120"/>
-                        </a:rPr>
-                        <a:t>손비 </a:t>
-                      </a:r>
-                      <a:pPr indent="0" marL="0">
-                        <a:buNone/>
-                      </a:pPr>
-                      <a:r>
-                        <a:rPr lang="en-US" sz="1300" dirty="0">
-                          <a:solidFill>
-                            <a:srgbClr val="10161F"/>
-                          </a:solidFill>
-                          <a:latin typeface="Pretendard" pitchFamily="34" charset="0"/>
-                          <a:ea typeface="Pretendard" pitchFamily="34" charset="-122"/>
-                          <a:cs typeface="Pretendard" pitchFamily="34" charset="-120"/>
-                        </a:rPr>
-                        <a:t>처리</a:t>
-                      </a:r>
-                      <a:endParaRPr lang="en-US" sz="1300" dirty="0">
+                      <a:endParaRPr lang="en-US" sz="1100" dirty="0">
                         <a:latin typeface="Pretendard" charset="0"/>
                         <a:ea typeface="Pretendard" charset="0"/>
                         <a:cs typeface="Pretendard" charset="0"/>
@@ -8775,7 +13338,7 @@
                         <a:buNone/>
                       </a:pPr>
                       <a:r>
-                        <a:rPr lang="en-US" sz="1300" dirty="0">
+                        <a:rPr lang="en-US" sz="1100" dirty="0">
                           <a:solidFill>
                             <a:srgbClr val="10161F"/>
                           </a:solidFill>
@@ -8783,65 +13346,9 @@
                           <a:ea typeface="Pretendard" pitchFamily="34" charset="-122"/>
                           <a:cs typeface="Pretendard" pitchFamily="34" charset="-120"/>
                         </a:rPr>
-                        <a:t>감가상각 </a:t>
+                        <a:t>90.9억</a:t>
                       </a:r>
-                      <a:pPr indent="0" marL="0">
-                        <a:buNone/>
-                      </a:pPr>
-                      <a:r>
-                        <a:rPr lang="en-US" sz="1300" dirty="0">
-                          <a:solidFill>
-                            <a:srgbClr val="10161F"/>
-                          </a:solidFill>
-                          <a:latin typeface="Pretendard" pitchFamily="34" charset="0"/>
-                          <a:ea typeface="Pretendard" pitchFamily="34" charset="-122"/>
-                          <a:cs typeface="Pretendard" pitchFamily="34" charset="-120"/>
-                        </a:rPr>
-                        <a:t>및 </a:t>
-                      </a:r>
-                      <a:pPr indent="0" marL="0">
-                        <a:buNone/>
-                      </a:pPr>
-                      <a:r>
-                        <a:rPr lang="en-US" sz="1300" dirty="0">
-                          <a:solidFill>
-                            <a:srgbClr val="10161F"/>
-                          </a:solidFill>
-                          <a:latin typeface="Pretendard" pitchFamily="34" charset="0"/>
-                          <a:ea typeface="Pretendard" pitchFamily="34" charset="-122"/>
-                          <a:cs typeface="Pretendard" pitchFamily="34" charset="-120"/>
-                        </a:rPr>
-                        <a:t>이자 </a:t>
-                      </a:r>
-                      <a:pPr indent="0" marL="0">
-                        <a:buNone/>
-                      </a:pPr>
-                      <a:r>
-                        <a:rPr lang="en-US" sz="1300" dirty="0">
-                          <a:solidFill>
-                            <a:srgbClr val="10161F"/>
-                          </a:solidFill>
-                          <a:latin typeface="Pretendard" pitchFamily="34" charset="0"/>
-                          <a:ea typeface="Pretendard" pitchFamily="34" charset="-122"/>
-                          <a:cs typeface="Pretendard" pitchFamily="34" charset="-120"/>
-                        </a:rPr>
-                        <a:t>비용 </a:t>
-                      </a:r>
-                      <a:pPr indent="0" marL="0">
-                        <a:buNone/>
-                      </a:pPr>
-                      <a:r>
-                        <a:rPr lang="en-US" sz="1300" dirty="0">
-                          <a:solidFill>
-                            <a:srgbClr val="10161F"/>
-                          </a:solidFill>
-                          <a:latin typeface="Pretendard" pitchFamily="34" charset="0"/>
-                          <a:ea typeface="Pretendard" pitchFamily="34" charset="-122"/>
-                          <a:cs typeface="Pretendard" pitchFamily="34" charset="-120"/>
-                        </a:rPr>
-                        <a:t>처리</a:t>
-                      </a:r>
-                      <a:endParaRPr lang="en-US" sz="1300" dirty="0">
+                      <a:endParaRPr lang="en-US" sz="1100" dirty="0">
                         <a:latin typeface="Pretendard" charset="0"/>
                         <a:ea typeface="Pretendard" charset="0"/>
                         <a:cs typeface="Pretendard" charset="0"/>
@@ -8899,7 +13406,7 @@
                         <a:buNone/>
                       </a:pPr>
                       <a:r>
-                        <a:rPr lang="en-US" sz="1300" dirty="0">
+                        <a:rPr lang="en-US" sz="1100" dirty="0">
                           <a:solidFill>
                             <a:srgbClr val="10161F"/>
                           </a:solidFill>
@@ -8907,23 +13414,9 @@
                           <a:ea typeface="Pretendard" pitchFamily="34" charset="-122"/>
                           <a:cs typeface="Pretendard" pitchFamily="34" charset="-120"/>
                         </a:rPr>
-                        <a:t>법인세 </a:t>
+                        <a:t>2.77%</a:t>
                       </a:r>
-                      <a:pPr indent="0" marL="0">
-                        <a:buNone/>
-                      </a:pPr>
-                      <a:r>
-                        <a:rPr lang="en-US" sz="1300" dirty="0">
-                          <a:solidFill>
-                            <a:srgbClr val="10161F"/>
-                          </a:solidFill>
-                          <a:latin typeface="Pretendard" pitchFamily="34" charset="0"/>
-                          <a:ea typeface="Pretendard" pitchFamily="34" charset="-122"/>
-                          <a:cs typeface="Pretendard" pitchFamily="34" charset="-120"/>
-                        </a:rPr>
-                        <a:t>절감</a:t>
-                      </a:r>
-                      <a:endParaRPr lang="en-US" sz="1300" dirty="0">
+                      <a:endParaRPr lang="en-US" sz="1100" dirty="0">
                         <a:latin typeface="Pretendard" charset="0"/>
                         <a:ea typeface="Pretendard" charset="0"/>
                         <a:cs typeface="Pretendard" charset="0"/>
@@ -8973,13 +13466,438 @@
                   </a:tcPr>
                 </a:tc>
               </a:tr>
+              <a:tr h="457200">
+                <a:tc>
+                  <a:txBody>
+                    <a:bodyPr/>
+                    <a:lstStyle/>
+                    <a:p>
+                      <a:pPr indent="0" marL="0">
+                        <a:buNone/>
+                      </a:pPr>
+                      <a:r>
+                        <a:rPr lang="en-US" sz="1100" b="1" dirty="0">
+                          <a:solidFill>
+                            <a:srgbClr val="10161F"/>
+                          </a:solidFill>
+                          <a:latin typeface="Pretendard" pitchFamily="34" charset="0"/>
+                          <a:ea typeface="Pretendard" pitchFamily="34" charset="-122"/>
+                          <a:cs typeface="Pretendard" pitchFamily="34" charset="-120"/>
+                        </a:rPr>
+                        <a:t>적극적 </a:t>
+                      </a:r>
+                      <a:pPr indent="0" marL="0">
+                        <a:buNone/>
+                      </a:pPr>
+                      <a:r>
+                        <a:rPr lang="en-US" sz="1100" b="1" dirty="0">
+                          <a:solidFill>
+                            <a:srgbClr val="10161F"/>
+                          </a:solidFill>
+                          <a:latin typeface="Pretendard" pitchFamily="34" charset="0"/>
+                          <a:ea typeface="Pretendard" pitchFamily="34" charset="-122"/>
+                          <a:cs typeface="Pretendard" pitchFamily="34" charset="-120"/>
+                        </a:rPr>
+                        <a:t>차입 </a:t>
+                      </a:r>
+                      <a:pPr indent="0" marL="0">
+                        <a:buNone/>
+                      </a:pPr>
+                      <a:r>
+                        <a:rPr lang="en-US" sz="1100" b="1" dirty="0">
+                          <a:solidFill>
+                            <a:srgbClr val="10161F"/>
+                          </a:solidFill>
+                          <a:latin typeface="Pretendard" pitchFamily="34" charset="0"/>
+                          <a:ea typeface="Pretendard" pitchFamily="34" charset="-122"/>
+                          <a:cs typeface="Pretendard" pitchFamily="34" charset="-120"/>
+                        </a:rPr>
+                        <a:t>(레버리지)</a:t>
+                      </a:r>
+                      <a:endParaRPr lang="en-US" sz="1100" dirty="0">
+                        <a:latin typeface="Pretendard" charset="0"/>
+                        <a:ea typeface="Pretendard" charset="0"/>
+                        <a:cs typeface="Pretendard" charset="0"/>
+                      </a:endParaRPr>
+                    </a:p>
+                  </a:txBody>
+                  <a:tcPr marL="50800" marR="50800" marT="25400" marB="25400" anchor="ctr">
+                    <a:lnL w="3810" cap="flat" cmpd="sng" algn="ctr">
+                      <a:solidFill>
+                        <a:srgbClr val="CBD5E0"/>
+                      </a:solidFill>
+                      <a:prstDash val="solid"/>
+                      <a:round/>
+                      <a:headEnd type="none" w="med" len="med"/>
+                      <a:tailEnd type="none" w="med" len="med"/>
+                    </a:lnL>
+                    <a:lnR w="3810" cap="flat" cmpd="sng" algn="ctr">
+                      <a:solidFill>
+                        <a:srgbClr val="CBD5E0"/>
+                      </a:solidFill>
+                      <a:prstDash val="solid"/>
+                      <a:round/>
+                      <a:headEnd type="none" w="med" len="med"/>
+                      <a:tailEnd type="none" w="med" len="med"/>
+                    </a:lnR>
+                    <a:lnT w="3810" cap="flat" cmpd="sng" algn="ctr">
+                      <a:solidFill>
+                        <a:srgbClr val="CBD5E0"/>
+                      </a:solidFill>
+                      <a:prstDash val="solid"/>
+                      <a:round/>
+                      <a:headEnd type="none" w="med" len="med"/>
+                      <a:tailEnd type="none" w="med" len="med"/>
+                    </a:lnT>
+                    <a:lnB w="3810" cap="flat" cmpd="sng" algn="ctr">
+                      <a:solidFill>
+                        <a:srgbClr val="CBD5E0"/>
+                      </a:solidFill>
+                      <a:prstDash val="solid"/>
+                      <a:round/>
+                      <a:headEnd type="none" w="med" len="med"/>
+                      <a:tailEnd type="none" w="med" len="med"/>
+                    </a:lnB>
+                    <a:solidFill>
+                      <a:srgbClr val="F7FAFC"/>
+                    </a:solidFill>
+                  </a:tcPr>
+                </a:tc>
+                <a:tc>
+                  <a:txBody>
+                    <a:bodyPr/>
+                    <a:lstStyle/>
+                    <a:p>
+                      <a:pPr indent="0" marL="0">
+                        <a:buNone/>
+                      </a:pPr>
+                      <a:r>
+                        <a:rPr lang="en-US" sz="1100" dirty="0">
+                          <a:solidFill>
+                            <a:srgbClr val="10161F"/>
+                          </a:solidFill>
+                          <a:latin typeface="Pretendard" pitchFamily="34" charset="0"/>
+                          <a:ea typeface="Pretendard" pitchFamily="34" charset="-122"/>
+                          <a:cs typeface="Pretendard" pitchFamily="34" charset="-120"/>
+                        </a:rPr>
+                        <a:t>60%</a:t>
+                      </a:r>
+                      <a:endParaRPr lang="en-US" sz="1100" dirty="0">
+                        <a:latin typeface="Pretendard" charset="0"/>
+                        <a:ea typeface="Pretendard" charset="0"/>
+                        <a:cs typeface="Pretendard" charset="0"/>
+                      </a:endParaRPr>
+                    </a:p>
+                  </a:txBody>
+                  <a:tcPr marL="50800" marR="50800" marT="25400" marB="25400" anchor="ctr">
+                    <a:lnL w="3810" cap="flat" cmpd="sng" algn="ctr">
+                      <a:solidFill>
+                        <a:srgbClr val="CBD5E0"/>
+                      </a:solidFill>
+                      <a:prstDash val="solid"/>
+                      <a:round/>
+                      <a:headEnd type="none" w="med" len="med"/>
+                      <a:tailEnd type="none" w="med" len="med"/>
+                    </a:lnL>
+                    <a:lnR w="3810" cap="flat" cmpd="sng" algn="ctr">
+                      <a:solidFill>
+                        <a:srgbClr val="CBD5E0"/>
+                      </a:solidFill>
+                      <a:prstDash val="solid"/>
+                      <a:round/>
+                      <a:headEnd type="none" w="med" len="med"/>
+                      <a:tailEnd type="none" w="med" len="med"/>
+                    </a:lnR>
+                    <a:lnT w="3810" cap="flat" cmpd="sng" algn="ctr">
+                      <a:solidFill>
+                        <a:srgbClr val="CBD5E0"/>
+                      </a:solidFill>
+                      <a:prstDash val="solid"/>
+                      <a:round/>
+                      <a:headEnd type="none" w="med" len="med"/>
+                      <a:tailEnd type="none" w="med" len="med"/>
+                    </a:lnT>
+                    <a:lnB w="3810" cap="flat" cmpd="sng" algn="ctr">
+                      <a:solidFill>
+                        <a:srgbClr val="CBD5E0"/>
+                      </a:solidFill>
+                      <a:prstDash val="solid"/>
+                      <a:round/>
+                      <a:headEnd type="none" w="med" len="med"/>
+                      <a:tailEnd type="none" w="med" len="med"/>
+                    </a:lnB>
+                    <a:solidFill>
+                      <a:srgbClr val="F7FAFC"/>
+                    </a:solidFill>
+                  </a:tcPr>
+                </a:tc>
+                <a:tc>
+                  <a:txBody>
+                    <a:bodyPr/>
+                    <a:lstStyle/>
+                    <a:p>
+                      <a:pPr indent="0" marL="0">
+                        <a:buNone/>
+                      </a:pPr>
+                      <a:r>
+                        <a:rPr lang="en-US" sz="1100" dirty="0">
+                          <a:solidFill>
+                            <a:srgbClr val="10161F"/>
+                          </a:solidFill>
+                          <a:latin typeface="Pretendard" pitchFamily="34" charset="0"/>
+                          <a:ea typeface="Pretendard" pitchFamily="34" charset="-122"/>
+                          <a:cs typeface="Pretendard" pitchFamily="34" charset="-120"/>
+                        </a:rPr>
+                        <a:t>72.9억</a:t>
+                      </a:r>
+                      <a:endParaRPr lang="en-US" sz="1100" dirty="0">
+                        <a:latin typeface="Pretendard" charset="0"/>
+                        <a:ea typeface="Pretendard" charset="0"/>
+                        <a:cs typeface="Pretendard" charset="0"/>
+                      </a:endParaRPr>
+                    </a:p>
+                  </a:txBody>
+                  <a:tcPr marL="50800" marR="50800" marT="25400" marB="25400" anchor="ctr">
+                    <a:lnL w="3810" cap="flat" cmpd="sng" algn="ctr">
+                      <a:solidFill>
+                        <a:srgbClr val="CBD5E0"/>
+                      </a:solidFill>
+                      <a:prstDash val="solid"/>
+                      <a:round/>
+                      <a:headEnd type="none" w="med" len="med"/>
+                      <a:tailEnd type="none" w="med" len="med"/>
+                    </a:lnL>
+                    <a:lnR w="3810" cap="flat" cmpd="sng" algn="ctr">
+                      <a:solidFill>
+                        <a:srgbClr val="CBD5E0"/>
+                      </a:solidFill>
+                      <a:prstDash val="solid"/>
+                      <a:round/>
+                      <a:headEnd type="none" w="med" len="med"/>
+                      <a:tailEnd type="none" w="med" len="med"/>
+                    </a:lnR>
+                    <a:lnT w="3810" cap="flat" cmpd="sng" algn="ctr">
+                      <a:solidFill>
+                        <a:srgbClr val="CBD5E0"/>
+                      </a:solidFill>
+                      <a:prstDash val="solid"/>
+                      <a:round/>
+                      <a:headEnd type="none" w="med" len="med"/>
+                      <a:tailEnd type="none" w="med" len="med"/>
+                    </a:lnT>
+                    <a:lnB w="3810" cap="flat" cmpd="sng" algn="ctr">
+                      <a:solidFill>
+                        <a:srgbClr val="CBD5E0"/>
+                      </a:solidFill>
+                      <a:prstDash val="solid"/>
+                      <a:round/>
+                      <a:headEnd type="none" w="med" len="med"/>
+                      <a:tailEnd type="none" w="med" len="med"/>
+                    </a:lnB>
+                    <a:solidFill>
+                      <a:srgbClr val="F7FAFC"/>
+                    </a:solidFill>
+                  </a:tcPr>
+                </a:tc>
+                <a:tc>
+                  <a:txBody>
+                    <a:bodyPr/>
+                    <a:lstStyle/>
+                    <a:p>
+                      <a:pPr indent="0" marL="0">
+                        <a:buNone/>
+                      </a:pPr>
+                      <a:r>
+                        <a:rPr lang="en-US" sz="1100" dirty="0">
+                          <a:solidFill>
+                            <a:srgbClr val="10161F"/>
+                          </a:solidFill>
+                          <a:latin typeface="Pretendard" pitchFamily="34" charset="0"/>
+                          <a:ea typeface="Pretendard" pitchFamily="34" charset="-122"/>
+                          <a:cs typeface="Pretendard" pitchFamily="34" charset="-120"/>
+                        </a:rPr>
+                        <a:t>2.27%</a:t>
+                      </a:r>
+                      <a:endParaRPr lang="en-US" sz="1100" dirty="0">
+                        <a:latin typeface="Pretendard" charset="0"/>
+                        <a:ea typeface="Pretendard" charset="0"/>
+                        <a:cs typeface="Pretendard" charset="0"/>
+                      </a:endParaRPr>
+                    </a:p>
+                  </a:txBody>
+                  <a:tcPr marL="50800" marR="50800" marT="25400" marB="25400" anchor="ctr">
+                    <a:lnL w="3810" cap="flat" cmpd="sng" algn="ctr">
+                      <a:solidFill>
+                        <a:srgbClr val="CBD5E0"/>
+                      </a:solidFill>
+                      <a:prstDash val="solid"/>
+                      <a:round/>
+                      <a:headEnd type="none" w="med" len="med"/>
+                      <a:tailEnd type="none" w="med" len="med"/>
+                    </a:lnL>
+                    <a:lnR w="3810" cap="flat" cmpd="sng" algn="ctr">
+                      <a:solidFill>
+                        <a:srgbClr val="CBD5E0"/>
+                      </a:solidFill>
+                      <a:prstDash val="solid"/>
+                      <a:round/>
+                      <a:headEnd type="none" w="med" len="med"/>
+                      <a:tailEnd type="none" w="med" len="med"/>
+                    </a:lnR>
+                    <a:lnT w="3810" cap="flat" cmpd="sng" algn="ctr">
+                      <a:solidFill>
+                        <a:srgbClr val="CBD5E0"/>
+                      </a:solidFill>
+                      <a:prstDash val="solid"/>
+                      <a:round/>
+                      <a:headEnd type="none" w="med" len="med"/>
+                      <a:tailEnd type="none" w="med" len="med"/>
+                    </a:lnT>
+                    <a:lnB w="3810" cap="flat" cmpd="sng" algn="ctr">
+                      <a:solidFill>
+                        <a:srgbClr val="CBD5E0"/>
+                      </a:solidFill>
+                      <a:prstDash val="solid"/>
+                      <a:round/>
+                      <a:headEnd type="none" w="med" len="med"/>
+                      <a:tailEnd type="none" w="med" len="med"/>
+                    </a:lnB>
+                    <a:solidFill>
+                      <a:srgbClr val="F7FAFC"/>
+                    </a:solidFill>
+                  </a:tcPr>
+                </a:tc>
+              </a:tr>
             </a:tbl>
           </a:graphicData>
         </a:graphic>
       </p:graphicFrame>
       <p:sp>
         <p:nvSpPr>
-          <p:cNvPr id="7" name="Text 4"/>
+          <p:cNvPr id="31" name="Shape 28"/>
+          <p:cNvSpPr/>
+          <p:nvPr/>
+        </p:nvSpPr>
+        <p:spPr>
+          <a:xfrm>
+            <a:off x="6461608" y="4069080"/>
+            <a:ext cx="4934560" cy="1463040"/>
+          </a:xfrm>
+          <a:prstGeom prst="roundRect">
+            <a:avLst>
+              <a:gd name="adj" fmla="val 3750"/>
+            </a:avLst>
+          </a:prstGeom>
+          <a:solidFill>
+            <a:srgbClr val="FEEBC8"/>
+          </a:solidFill>
+          <a:ln/>
+        </p:spPr>
+      </p:sp>
+      <p:sp>
+        <p:nvSpPr>
+          <p:cNvPr id="32" name="Shape 29"/>
+          <p:cNvSpPr/>
+          <p:nvPr/>
+        </p:nvSpPr>
+        <p:spPr>
+          <a:xfrm>
+            <a:off x="6461608" y="4123944"/>
+            <a:ext cx="36576" cy="1353312"/>
+          </a:xfrm>
+          <a:prstGeom prst="rect">
+            <a:avLst/>
+          </a:prstGeom>
+          <a:solidFill>
+            <a:srgbClr val="9C4221"/>
+          </a:solidFill>
+          <a:ln/>
+        </p:spPr>
+      </p:sp>
+      <p:sp>
+        <p:nvSpPr>
+          <p:cNvPr id="33" name="Text 30"/>
+          <p:cNvSpPr/>
+          <p:nvPr/>
+        </p:nvSpPr>
+        <p:spPr>
+          <a:xfrm>
+            <a:off x="6644488" y="4178808"/>
+            <a:ext cx="4605376" cy="201168"/>
+          </a:xfrm>
+          <a:prstGeom prst="rect">
+            <a:avLst/>
+          </a:prstGeom>
+          <a:noFill/>
+          <a:ln/>
+        </p:spPr>
+        <p:txBody>
+          <a:bodyPr wrap="square" lIns="0" tIns="0" rIns="0" bIns="0" rtlCol="0" anchor="ctr"/>
+          <a:lstStyle/>
+          <a:p>
+            <a:pPr indent="0" marL="0">
+              <a:buNone/>
+            </a:pPr>
+            <a:r>
+              <a:rPr lang="en-US" sz="1050" b="1" dirty="0">
+                <a:solidFill>
+                  <a:srgbClr val="9C4221"/>
+                </a:solidFill>
+                <a:latin typeface="Pretendard" pitchFamily="34" charset="0"/>
+                <a:ea typeface="Pretendard" pitchFamily="34" charset="-122"/>
+                <a:cs typeface="Pretendard" pitchFamily="34" charset="-120"/>
+              </a:rPr>
+              <a:t>역레버리지 유의 구간</a:t>
+            </a:r>
+            <a:endParaRPr lang="en-US" sz="1050" dirty="0"/>
+          </a:p>
+        </p:txBody>
+      </p:sp>
+      <p:sp>
+        <p:nvSpPr>
+          <p:cNvPr id="34" name="Text 31"/>
+          <p:cNvSpPr/>
+          <p:nvPr/>
+        </p:nvSpPr>
+        <p:spPr>
+          <a:xfrm>
+            <a:off x="6644488" y="4398264"/>
+            <a:ext cx="4605376" cy="1060704"/>
+          </a:xfrm>
+          <a:prstGeom prst="rect">
+            <a:avLst/>
+          </a:prstGeom>
+          <a:noFill/>
+          <a:ln/>
+        </p:spPr>
+        <p:txBody>
+          <a:bodyPr wrap="square" lIns="0" tIns="0" rIns="0" bIns="0" rtlCol="0" anchor="t"/>
+          <a:lstStyle/>
+          <a:p>
+            <a:pPr indent="0" marL="0">
+              <a:lnSpc>
+                <a:spcPct val="120000"/>
+              </a:lnSpc>
+              <a:buNone/>
+            </a:pPr>
+            <a:r>
+              <a:rPr lang="en-US" sz="930" dirty="0">
+                <a:solidFill>
+                  <a:srgbClr val="10161F"/>
+                </a:solidFill>
+                <a:latin typeface="Pretendard" pitchFamily="34" charset="0"/>
+                <a:ea typeface="Pretendard" pitchFamily="34" charset="-122"/>
+                <a:cs typeface="Pretendard" pitchFamily="34" charset="-120"/>
+              </a:rPr>
+              <a:t>차입 금리가 자산 총수익률을 상회하여 대출 실행 시 자기자본수익률이 하락할 수 있습니다. 에쿼티 비중 확대를 권장합니다.</a:t>
+            </a:r>
+            <a:endParaRPr lang="en-US" sz="930" dirty="0"/>
+          </a:p>
+        </p:txBody>
+      </p:sp>
+      <p:sp>
+        <p:nvSpPr>
+          <p:cNvPr id="35" name="Text 32"/>
           <p:cNvSpPr/>
           <p:nvPr/>
         </p:nvSpPr>
@@ -9018,7 +13936,7 @@
       </p:sp>
       <p:sp>
         <p:nvSpPr>
-          <p:cNvPr id="8" name="Text 5"/>
+          <p:cNvPr id="36" name="Text 33"/>
           <p:cNvSpPr/>
           <p:nvPr/>
         </p:nvSpPr>
@@ -9049,1143 +13967,7 @@
                 <a:ea typeface="Arial" pitchFamily="34" charset="-122"/>
                 <a:cs typeface="Arial" pitchFamily="34" charset="-120"/>
               </a:rPr>
-              <a:t>6</a:t>
-            </a:r>
-            <a:endParaRPr lang="en-US" sz="900" dirty="0"/>
-          </a:p>
-        </p:txBody>
-      </p:sp>
-    </p:spTree>
-  </p:cSld>
-  <p:clrMapOvr>
-    <a:masterClrMapping/>
-  </p:clrMapOvr>
-</p:sld>
-</file>
-
-<file path=ppt/slides/slide7.xml><?xml version="1.0" encoding="utf-8"?>
-<p:sld xmlns:a="http://schemas.openxmlformats.org/drawingml/2006/main" xmlns:r="http://schemas.openxmlformats.org/officeDocument/2006/relationships" xmlns:p="http://schemas.openxmlformats.org/presentationml/2006/main">
-  <p:cSld name="Slide 7">
-    <p:bg>
-      <p:bgPr>
-        <a:solidFill>
-          <a:srgbClr val="FFFFFF"/>
-        </a:solidFill>
-      </p:bgPr>
-    </p:bg>
-    <p:spTree>
-      <p:nvGrpSpPr>
-        <p:cNvPr id="1" name=""/>
-        <p:cNvGrpSpPr/>
-        <p:nvPr/>
-      </p:nvGrpSpPr>
-      <p:grpSpPr>
-        <a:xfrm>
-          <a:off x="0" y="0"/>
-          <a:ext cx="0" cy="0"/>
-          <a:chOff x="0" y="0"/>
-          <a:chExt cx="0" cy="0"/>
-        </a:xfrm>
-      </p:grpSpPr>
-      <p:sp>
-        <p:nvSpPr>
-          <p:cNvPr id="2" name="Shape 0"/>
-          <p:cNvSpPr/>
-          <p:nvPr/>
-        </p:nvSpPr>
-        <p:spPr>
-          <a:xfrm>
-            <a:off x="566928" y="457200"/>
-            <a:ext cx="384048" cy="384048"/>
-          </a:xfrm>
-          <a:prstGeom prst="ellipse">
-            <a:avLst/>
-          </a:prstGeom>
-          <a:solidFill>
-            <a:srgbClr val="B98A2E"/>
-          </a:solidFill>
-          <a:ln/>
-        </p:spPr>
-      </p:sp>
-      <p:sp>
-        <p:nvSpPr>
-          <p:cNvPr id="3" name="Text 1"/>
-          <p:cNvSpPr/>
-          <p:nvPr/>
-        </p:nvSpPr>
-        <p:spPr>
-          <a:xfrm>
-            <a:off x="566928" y="457200"/>
-            <a:ext cx="384048" cy="384048"/>
-          </a:xfrm>
-          <a:prstGeom prst="rect">
-            <a:avLst/>
-          </a:prstGeom>
-          <a:noFill/>
-          <a:ln/>
-        </p:spPr>
-        <p:txBody>
-          <a:bodyPr wrap="square" lIns="0" tIns="0" rIns="0" bIns="0" rtlCol="0" anchor="ctr"/>
-          <a:lstStyle/>
-          <a:p>
-            <a:pPr algn="ctr" indent="0" marL="0">
-              <a:buNone/>
-            </a:pPr>
-            <a:r>
-              <a:rPr lang="en-US" sz="1300" b="1" dirty="0">
-                <a:solidFill>
-                  <a:srgbClr val="FFFFFF"/>
-                </a:solidFill>
-                <a:latin typeface="Arial" pitchFamily="34" charset="0"/>
-                <a:ea typeface="Arial" pitchFamily="34" charset="-122"/>
-                <a:cs typeface="Arial" pitchFamily="34" charset="-120"/>
-              </a:rPr>
-              <a:t>07</a:t>
-            </a:r>
-            <a:endParaRPr lang="en-US" sz="1300" dirty="0"/>
-          </a:p>
-        </p:txBody>
-      </p:sp>
-      <p:sp>
-        <p:nvSpPr>
-          <p:cNvPr id="4" name="Text 2"/>
-          <p:cNvSpPr/>
-          <p:nvPr/>
-        </p:nvSpPr>
-        <p:spPr>
-          <a:xfrm>
-            <a:off x="1133856" y="457200"/>
-            <a:ext cx="10490911" cy="182880"/>
-          </a:xfrm>
-          <a:prstGeom prst="rect">
-            <a:avLst/>
-          </a:prstGeom>
-          <a:noFill/>
-          <a:ln/>
-        </p:spPr>
-        <p:txBody>
-          <a:bodyPr wrap="square" lIns="0" tIns="0" rIns="0" bIns="0" rtlCol="0" anchor="ctr"/>
-          <a:lstStyle/>
-          <a:p>
-            <a:pPr indent="0" marL="0">
-              <a:buNone/>
-            </a:pPr>
-            <a:r>
-              <a:rPr lang="en-US" sz="950" b="1" spc="200" kern="0" dirty="0">
-                <a:solidFill>
-                  <a:srgbClr val="B98A2E"/>
-                </a:solidFill>
-                <a:latin typeface="Arial" pitchFamily="34" charset="0"/>
-                <a:ea typeface="Arial" pitchFamily="34" charset="-122"/>
-                <a:cs typeface="Arial" pitchFamily="34" charset="-120"/>
-              </a:rPr>
-              <a:t>Risk</a:t>
-            </a:r>
-            <a:endParaRPr lang="en-US" sz="950" dirty="0"/>
-          </a:p>
-        </p:txBody>
-      </p:sp>
-      <p:sp>
-        <p:nvSpPr>
-          <p:cNvPr id="5" name="Text 3"/>
-          <p:cNvSpPr/>
-          <p:nvPr/>
-        </p:nvSpPr>
-        <p:spPr>
-          <a:xfrm>
-            <a:off x="1133856" y="640080"/>
-            <a:ext cx="10490911" cy="365760"/>
-          </a:xfrm>
-          <a:prstGeom prst="rect">
-            <a:avLst/>
-          </a:prstGeom>
-          <a:noFill/>
-          <a:ln/>
-        </p:spPr>
-        <p:txBody>
-          <a:bodyPr wrap="square" lIns="0" tIns="0" rIns="0" bIns="0" rtlCol="0" anchor="ctr"/>
-          <a:lstStyle/>
-          <a:p>
-            <a:pPr indent="0" marL="0">
-              <a:buNone/>
-            </a:pPr>
-            <a:r>
-              <a:rPr lang="en-US" sz="2300" b="1" dirty="0">
-                <a:solidFill>
-                  <a:srgbClr val="10161F"/>
-                </a:solidFill>
-                <a:latin typeface="Pretendard" pitchFamily="34" charset="0"/>
-                <a:ea typeface="Pretendard" pitchFamily="34" charset="-122"/>
-                <a:cs typeface="Pretendard" pitchFamily="34" charset="-120"/>
-              </a:rPr>
-              <a:t>리스크는 무엇이고 대응책은 있는가</a:t>
-            </a:r>
-            <a:endParaRPr lang="en-US" sz="2300" dirty="0"/>
-          </a:p>
-        </p:txBody>
-      </p:sp>
-      <p:sp>
-        <p:nvSpPr>
-          <p:cNvPr id="6" name="Shape 4"/>
-          <p:cNvSpPr/>
-          <p:nvPr/>
-        </p:nvSpPr>
-        <p:spPr>
-          <a:xfrm>
-            <a:off x="566928" y="1417320"/>
-            <a:ext cx="11057839" cy="3657600"/>
-          </a:xfrm>
-          <a:prstGeom prst="roundRect">
-            <a:avLst>
-              <a:gd name="adj" fmla="val 1500"/>
-            </a:avLst>
-          </a:prstGeom>
-          <a:solidFill>
-            <a:srgbClr val="F7FAFC"/>
-          </a:solidFill>
-          <a:ln w="6350">
-            <a:solidFill>
-              <a:srgbClr val="CBD5E0"/>
-            </a:solidFill>
-            <a:prstDash val="solid"/>
-          </a:ln>
-        </p:spPr>
-      </p:sp>
-      <p:sp>
-        <p:nvSpPr>
-          <p:cNvPr id="7" name="Shape 5"/>
-          <p:cNvSpPr/>
-          <p:nvPr/>
-        </p:nvSpPr>
-        <p:spPr>
-          <a:xfrm>
-            <a:off x="566928" y="1417320"/>
-            <a:ext cx="11057839" cy="45720"/>
-          </a:xfrm>
-          <a:prstGeom prst="rect">
-            <a:avLst/>
-          </a:prstGeom>
-          <a:solidFill>
-            <a:srgbClr val="B98A2E"/>
-          </a:solidFill>
-          <a:ln/>
-        </p:spPr>
-      </p:sp>
-      <p:sp>
-        <p:nvSpPr>
-          <p:cNvPr id="8" name="Text 6"/>
-          <p:cNvSpPr/>
-          <p:nvPr/>
-        </p:nvSpPr>
-        <p:spPr>
-          <a:xfrm>
-            <a:off x="795528" y="1618488"/>
-            <a:ext cx="10600639" cy="292608"/>
-          </a:xfrm>
-          <a:prstGeom prst="rect">
-            <a:avLst/>
-          </a:prstGeom>
-          <a:noFill/>
-          <a:ln/>
-        </p:spPr>
-        <p:txBody>
-          <a:bodyPr wrap="square" lIns="0" tIns="0" rIns="0" bIns="0" rtlCol="0" anchor="ctr"/>
-          <a:lstStyle/>
-          <a:p>
-            <a:pPr indent="0" marL="0">
-              <a:buNone/>
-            </a:pPr>
-            <a:r>
-              <a:rPr lang="en-US" sz="1350" b="1" dirty="0">
-                <a:solidFill>
-                  <a:srgbClr val="977024"/>
-                </a:solidFill>
-                <a:latin typeface="Pretendard" pitchFamily="34" charset="0"/>
-                <a:ea typeface="Pretendard" pitchFamily="34" charset="-122"/>
-                <a:cs typeface="Pretendard" pitchFamily="34" charset="-120"/>
-              </a:rPr>
-              <a:t>용도 리스크</a:t>
-            </a:r>
-            <a:endParaRPr lang="en-US" sz="1350" dirty="0"/>
-          </a:p>
-        </p:txBody>
-      </p:sp>
-      <p:sp>
-        <p:nvSpPr>
-          <p:cNvPr id="9" name="Text 7"/>
-          <p:cNvSpPr/>
-          <p:nvPr/>
-        </p:nvSpPr>
-        <p:spPr>
-          <a:xfrm>
-            <a:off x="795528" y="1947672"/>
-            <a:ext cx="10600639" cy="365760"/>
-          </a:xfrm>
-          <a:prstGeom prst="rect">
-            <a:avLst/>
-          </a:prstGeom>
-          <a:noFill/>
-          <a:ln/>
-        </p:spPr>
-        <p:txBody>
-          <a:bodyPr wrap="square" lIns="0" tIns="0" rIns="0" bIns="0" rtlCol="0" anchor="ctr">
-            <a:normAutofit/>
-          </a:bodyPr>
-          <a:lstStyle/>
-          <a:p>
-            <a:pPr indent="0" marL="0">
-              <a:buNone/>
-            </a:pPr>
-            <a:r>
-              <a:rPr lang="en-US" sz="1250" b="1" dirty="0">
-                <a:solidFill>
-                  <a:srgbClr val="10161F"/>
-                </a:solidFill>
-                <a:latin typeface="Pretendard" pitchFamily="34" charset="0"/>
-                <a:ea typeface="Pretendard" pitchFamily="34" charset="-122"/>
-                <a:cs typeface="Pretendard" pitchFamily="34" charset="-120"/>
-              </a:rPr>
-              <a:t>—</a:t>
-            </a:r>
-            <a:endParaRPr lang="en-US" sz="1250" dirty="0"/>
-          </a:p>
-        </p:txBody>
-      </p:sp>
-      <p:sp>
-        <p:nvSpPr>
-          <p:cNvPr id="10" name="Text 8"/>
-          <p:cNvSpPr/>
-          <p:nvPr/>
-        </p:nvSpPr>
-        <p:spPr>
-          <a:xfrm>
-            <a:off x="795528" y="2377440"/>
-            <a:ext cx="10600639" cy="2606040"/>
-          </a:xfrm>
-          <a:prstGeom prst="rect">
-            <a:avLst/>
-          </a:prstGeom>
-          <a:noFill/>
-          <a:ln/>
-        </p:spPr>
-        <p:txBody>
-          <a:bodyPr wrap="square" lIns="0" tIns="0" rIns="0" bIns="0" rtlCol="0" anchor="t">
-            <a:normAutofit/>
-          </a:bodyPr>
-          <a:lstStyle/>
-          <a:p>
-            <a:pPr marL="342900" indent="-342900">
-              <a:lnSpc>
-                <a:spcPct val="125000"/>
-              </a:lnSpc>
-              <a:buSzPct val="100000"/>
-              <a:buChar char="•"/>
-            </a:pPr>
-            <a:r>
-              <a:rPr lang="en-US" sz="1100" dirty="0">
-                <a:solidFill>
-                  <a:srgbClr val="10161F"/>
-                </a:solidFill>
-                <a:latin typeface="Pretendard" pitchFamily="34" charset="0"/>
-                <a:ea typeface="Pretendard" pitchFamily="34" charset="-122"/>
-                <a:cs typeface="Pretendard" pitchFamily="34" charset="-120"/>
-              </a:rPr>
-              <a:t>{"ok":true,"mocked":true,"extractedFields":{"area_signal":"역삼","asset_type":"오피스빌딩","price_band":"300억","size_signal":"3000평(약 9917.4㎡)"},"extractedFacts":{"region":"역삼","exactAddressCandidate":"역삼동 7</a:t>
-            </a:r>
-            <a:endParaRPr lang="en-US" sz="1100" dirty="0"/>
-          </a:p>
-        </p:txBody>
-      </p:sp>
-      <p:sp>
-        <p:nvSpPr>
-          <p:cNvPr id="11" name="Shape 9"/>
-          <p:cNvSpPr/>
-          <p:nvPr/>
-        </p:nvSpPr>
-        <p:spPr>
-          <a:xfrm>
-            <a:off x="566928" y="5193792"/>
-            <a:ext cx="11057839" cy="621792"/>
-          </a:xfrm>
-          <a:prstGeom prst="roundRect">
-            <a:avLst>
-              <a:gd name="adj" fmla="val 8824"/>
-            </a:avLst>
-          </a:prstGeom>
-          <a:solidFill>
-            <a:srgbClr val="F7FAFC"/>
-          </a:solidFill>
-          <a:ln w="6350">
-            <a:solidFill>
-              <a:srgbClr val="CBD5E0"/>
-            </a:solidFill>
-            <a:prstDash val="solid"/>
-          </a:ln>
-        </p:spPr>
-      </p:sp>
-      <p:sp>
-        <p:nvSpPr>
-          <p:cNvPr id="12" name="Text 10"/>
-          <p:cNvSpPr/>
-          <p:nvPr/>
-        </p:nvSpPr>
-        <p:spPr>
-          <a:xfrm>
-            <a:off x="795528" y="5193792"/>
-            <a:ext cx="10600639" cy="621792"/>
-          </a:xfrm>
-          <a:prstGeom prst="rect">
-            <a:avLst/>
-          </a:prstGeom>
-          <a:noFill/>
-          <a:ln/>
-        </p:spPr>
-        <p:txBody>
-          <a:bodyPr wrap="square" lIns="0" tIns="0" rIns="0" bIns="0" rtlCol="0" anchor="ctr"/>
-          <a:lstStyle/>
-          <a:p>
-            <a:pPr indent="0" marL="0">
-              <a:buNone/>
-            </a:pPr>
-            <a:r>
-              <a:rPr lang="en-US" sz="1100" dirty="0">
-                <a:solidFill>
-                  <a:srgbClr val="10161F"/>
-                </a:solidFill>
-                <a:latin typeface="Pretendard" pitchFamily="34" charset="0"/>
-                <a:ea typeface="Pretendard" pitchFamily="34" charset="-122"/>
-                <a:cs typeface="Pretendard" pitchFamily="34" charset="-120"/>
-              </a:rPr>
-              <a:t>※ 본 리스크 체크는 공부 및 브로커 확인 기반이며, 매수 전 전문 실사팀(변호사/건축사)을 통한 정밀 실사가 필요합니다.</a:t>
-            </a:r>
-            <a:endParaRPr lang="en-US" sz="1100" dirty="0"/>
-          </a:p>
-        </p:txBody>
-      </p:sp>
-      <p:sp>
-        <p:nvSpPr>
-          <p:cNvPr id="13" name="Text 11"/>
-          <p:cNvSpPr/>
-          <p:nvPr/>
-        </p:nvSpPr>
-        <p:spPr>
-          <a:xfrm>
-            <a:off x="566928" y="6382512"/>
-            <a:ext cx="7315200" cy="219456"/>
-          </a:xfrm>
-          <a:prstGeom prst="rect">
-            <a:avLst/>
-          </a:prstGeom>
-          <a:noFill/>
-          <a:ln/>
-        </p:spPr>
-        <p:txBody>
-          <a:bodyPr wrap="square" lIns="0" tIns="0" rIns="0" bIns="0" rtlCol="0" anchor="ctr"/>
-          <a:lstStyle/>
-          <a:p>
-            <a:pPr indent="0" marL="0">
-              <a:buNone/>
-            </a:pPr>
-            <a:r>
-              <a:rPr lang="en-US" sz="800" dirty="0">
-                <a:solidFill>
-                  <a:srgbClr val="718096"/>
-                </a:solidFill>
-                <a:latin typeface="Pretendard" pitchFamily="34" charset="0"/>
-                <a:ea typeface="Pretendard" pitchFamily="34" charset="-122"/>
-                <a:cs typeface="Pretendard" pitchFamily="34" charset="-120"/>
-              </a:rPr>
-              <a:t>크리딜   |   </a:t>
-            </a:r>
-            <a:endParaRPr lang="en-US" sz="800" dirty="0"/>
-          </a:p>
-        </p:txBody>
-      </p:sp>
-      <p:sp>
-        <p:nvSpPr>
-          <p:cNvPr id="14" name="Text 12"/>
-          <p:cNvSpPr/>
-          <p:nvPr/>
-        </p:nvSpPr>
-        <p:spPr>
-          <a:xfrm>
-            <a:off x="10710367" y="6382512"/>
-            <a:ext cx="914400" cy="219456"/>
-          </a:xfrm>
-          <a:prstGeom prst="rect">
-            <a:avLst/>
-          </a:prstGeom>
-          <a:noFill/>
-          <a:ln/>
-        </p:spPr>
-        <p:txBody>
-          <a:bodyPr wrap="square" lIns="0" tIns="0" rIns="0" bIns="0" rtlCol="0" anchor="ctr"/>
-          <a:lstStyle/>
-          <a:p>
-            <a:pPr algn="r" indent="0" marL="0">
-              <a:buNone/>
-            </a:pPr>
-            <a:r>
-              <a:rPr lang="en-US" sz="900" b="1" dirty="0">
-                <a:solidFill>
-                  <a:srgbClr val="B98A2E"/>
-                </a:solidFill>
-                <a:latin typeface="Arial" pitchFamily="34" charset="0"/>
-                <a:ea typeface="Arial" pitchFamily="34" charset="-122"/>
-                <a:cs typeface="Arial" pitchFamily="34" charset="-120"/>
-              </a:rPr>
               <a:t>7</a:t>
-            </a:r>
-            <a:endParaRPr lang="en-US" sz="900" dirty="0"/>
-          </a:p>
-        </p:txBody>
-      </p:sp>
-    </p:spTree>
-  </p:cSld>
-  <p:clrMapOvr>
-    <a:masterClrMapping/>
-  </p:clrMapOvr>
-</p:sld>
-</file>
-
-<file path=ppt/slides/slide8.xml><?xml version="1.0" encoding="utf-8"?>
-<p:sld xmlns:a="http://schemas.openxmlformats.org/drawingml/2006/main" xmlns:r="http://schemas.openxmlformats.org/officeDocument/2006/relationships" xmlns:p="http://schemas.openxmlformats.org/presentationml/2006/main">
-  <p:cSld name="Slide 8">
-    <p:spTree>
-      <p:nvGrpSpPr>
-        <p:cNvPr id="1" name=""/>
-        <p:cNvGrpSpPr/>
-        <p:nvPr/>
-      </p:nvGrpSpPr>
-      <p:grpSpPr>
-        <a:xfrm>
-          <a:off x="0" y="0"/>
-          <a:ext cx="0" cy="0"/>
-          <a:chOff x="0" y="0"/>
-          <a:chExt cx="0" cy="0"/>
-        </a:xfrm>
-      </p:grpSpPr>
-      <p:sp>
-        <p:nvSpPr>
-          <p:cNvPr id="2" name="Shape 0"/>
-          <p:cNvSpPr/>
-          <p:nvPr/>
-        </p:nvSpPr>
-        <p:spPr>
-          <a:xfrm>
-            <a:off x="566928" y="457200"/>
-            <a:ext cx="384048" cy="384048"/>
-          </a:xfrm>
-          <a:prstGeom prst="ellipse">
-            <a:avLst/>
-          </a:prstGeom>
-          <a:solidFill>
-            <a:srgbClr val="B98A2E"/>
-          </a:solidFill>
-          <a:ln/>
-        </p:spPr>
-      </p:sp>
-      <p:sp>
-        <p:nvSpPr>
-          <p:cNvPr id="3" name="Text 1"/>
-          <p:cNvSpPr/>
-          <p:nvPr/>
-        </p:nvSpPr>
-        <p:spPr>
-          <a:xfrm>
-            <a:off x="566928" y="457200"/>
-            <a:ext cx="384048" cy="384048"/>
-          </a:xfrm>
-          <a:prstGeom prst="rect">
-            <a:avLst/>
-          </a:prstGeom>
-          <a:noFill/>
-          <a:ln/>
-        </p:spPr>
-        <p:txBody>
-          <a:bodyPr wrap="square" lIns="0" tIns="0" rIns="0" bIns="0" rtlCol="0" anchor="ctr"/>
-          <a:lstStyle/>
-          <a:p>
-            <a:pPr algn="ctr" indent="0" marL="0">
-              <a:buNone/>
-            </a:pPr>
-            <a:r>
-              <a:rPr lang="en-US" sz="1300" b="1" dirty="0">
-                <a:solidFill>
-                  <a:srgbClr val="FFFFFF"/>
-                </a:solidFill>
-                <a:latin typeface="Arial" pitchFamily="34" charset="0"/>
-                <a:ea typeface="Arial" pitchFamily="34" charset="-122"/>
-                <a:cs typeface="Arial" pitchFamily="34" charset="-120"/>
-              </a:rPr>
-              <a:t>08</a:t>
-            </a:r>
-            <a:endParaRPr lang="en-US" sz="1300" dirty="0"/>
-          </a:p>
-        </p:txBody>
-      </p:sp>
-      <p:sp>
-        <p:nvSpPr>
-          <p:cNvPr id="4" name="Text 2"/>
-          <p:cNvSpPr/>
-          <p:nvPr/>
-        </p:nvSpPr>
-        <p:spPr>
-          <a:xfrm>
-            <a:off x="1133856" y="457200"/>
-            <a:ext cx="10490911" cy="182880"/>
-          </a:xfrm>
-          <a:prstGeom prst="rect">
-            <a:avLst/>
-          </a:prstGeom>
-          <a:noFill/>
-          <a:ln/>
-        </p:spPr>
-        <p:txBody>
-          <a:bodyPr wrap="square" lIns="0" tIns="0" rIns="0" bIns="0" rtlCol="0" anchor="ctr"/>
-          <a:lstStyle/>
-          <a:p>
-            <a:pPr indent="0" marL="0">
-              <a:buNone/>
-            </a:pPr>
-            <a:r>
-              <a:rPr lang="en-US" sz="950" b="1" spc="200" kern="0" dirty="0">
-                <a:solidFill>
-                  <a:srgbClr val="B98A2E"/>
-                </a:solidFill>
-                <a:latin typeface="Arial" pitchFamily="34" charset="0"/>
-                <a:ea typeface="Arial" pitchFamily="34" charset="-122"/>
-                <a:cs typeface="Arial" pitchFamily="34" charset="-120"/>
-              </a:rPr>
-              <a:t>Checklist</a:t>
-            </a:r>
-            <a:endParaRPr lang="en-US" sz="950" dirty="0"/>
-          </a:p>
-        </p:txBody>
-      </p:sp>
-      <p:sp>
-        <p:nvSpPr>
-          <p:cNvPr id="5" name="Text 3"/>
-          <p:cNvSpPr/>
-          <p:nvPr/>
-        </p:nvSpPr>
-        <p:spPr>
-          <a:xfrm>
-            <a:off x="1133856" y="640080"/>
-            <a:ext cx="10490911" cy="365760"/>
-          </a:xfrm>
-          <a:prstGeom prst="rect">
-            <a:avLst/>
-          </a:prstGeom>
-          <a:noFill/>
-          <a:ln/>
-        </p:spPr>
-        <p:txBody>
-          <a:bodyPr wrap="square" lIns="0" tIns="0" rIns="0" bIns="0" rtlCol="0" anchor="ctr"/>
-          <a:lstStyle/>
-          <a:p>
-            <a:pPr indent="0" marL="0">
-              <a:buNone/>
-            </a:pPr>
-            <a:r>
-              <a:rPr lang="en-US" sz="2300" b="1" dirty="0">
-                <a:solidFill>
-                  <a:srgbClr val="10161F"/>
-                </a:solidFill>
-                <a:latin typeface="Pretendard" pitchFamily="34" charset="0"/>
-                <a:ea typeface="Pretendard" pitchFamily="34" charset="-122"/>
-                <a:cs typeface="Pretendard" pitchFamily="34" charset="-120"/>
-              </a:rPr>
-              <a:t>섹션 상세</a:t>
-            </a:r>
-            <a:endParaRPr lang="en-US" sz="2300" dirty="0"/>
-          </a:p>
-        </p:txBody>
-      </p:sp>
-      <p:sp>
-        <p:nvSpPr>
-          <p:cNvPr id="6" name="Text 4"/>
-          <p:cNvSpPr/>
-          <p:nvPr/>
-        </p:nvSpPr>
-        <p:spPr>
-          <a:xfrm>
-            <a:off x="566928" y="1517904"/>
-            <a:ext cx="6492240" cy="274320"/>
-          </a:xfrm>
-          <a:prstGeom prst="rect">
-            <a:avLst/>
-          </a:prstGeom>
-          <a:noFill/>
-          <a:ln/>
-        </p:spPr>
-        <p:txBody>
-          <a:bodyPr wrap="square" rtlCol="0" anchor="ctr"/>
-          <a:lstStyle/>
-          <a:p>
-            <a:pPr indent="0" marL="0">
-              <a:buNone/>
-            </a:pPr>
-            <a:endParaRPr lang="en-US" sz="1400" dirty="0"/>
-          </a:p>
-        </p:txBody>
-      </p:sp>
-      <p:sp>
-        <p:nvSpPr>
-          <p:cNvPr id="7" name="Text 5"/>
-          <p:cNvSpPr/>
-          <p:nvPr/>
-        </p:nvSpPr>
-        <p:spPr>
-          <a:xfrm>
-            <a:off x="566928" y="1874520"/>
-            <a:ext cx="6492240" cy="182880"/>
-          </a:xfrm>
-          <a:prstGeom prst="rect">
-            <a:avLst/>
-          </a:prstGeom>
-          <a:noFill/>
-          <a:ln/>
-        </p:spPr>
-        <p:txBody>
-          <a:bodyPr wrap="square" rtlCol="0" anchor="ctr"/>
-          <a:lstStyle/>
-          <a:p>
-            <a:pPr indent="0" marL="0">
-              <a:buNone/>
-            </a:pPr>
-            <a:endParaRPr lang="en-US" sz="900" dirty="0"/>
-          </a:p>
-        </p:txBody>
-      </p:sp>
-      <p:sp>
-        <p:nvSpPr>
-          <p:cNvPr id="8" name="Text 6"/>
-          <p:cNvSpPr/>
-          <p:nvPr/>
-        </p:nvSpPr>
-        <p:spPr>
-          <a:xfrm>
-            <a:off x="566928" y="6382512"/>
-            <a:ext cx="7315200" cy="219456"/>
-          </a:xfrm>
-          <a:prstGeom prst="rect">
-            <a:avLst/>
-          </a:prstGeom>
-          <a:noFill/>
-          <a:ln/>
-        </p:spPr>
-        <p:txBody>
-          <a:bodyPr wrap="square" lIns="0" tIns="0" rIns="0" bIns="0" rtlCol="0" anchor="ctr"/>
-          <a:lstStyle/>
-          <a:p>
-            <a:pPr indent="0" marL="0">
-              <a:buNone/>
-            </a:pPr>
-            <a:r>
-              <a:rPr lang="en-US" sz="800" dirty="0">
-                <a:solidFill>
-                  <a:srgbClr val="718096"/>
-                </a:solidFill>
-                <a:latin typeface="Pretendard" pitchFamily="34" charset="0"/>
-                <a:ea typeface="Pretendard" pitchFamily="34" charset="-122"/>
-                <a:cs typeface="Pretendard" pitchFamily="34" charset="-120"/>
-              </a:rPr>
-              <a:t>크리딜   |   </a:t>
-            </a:r>
-            <a:endParaRPr lang="en-US" sz="800" dirty="0"/>
-          </a:p>
-        </p:txBody>
-      </p:sp>
-      <p:sp>
-        <p:nvSpPr>
-          <p:cNvPr id="9" name="Text 7"/>
-          <p:cNvSpPr/>
-          <p:nvPr/>
-        </p:nvSpPr>
-        <p:spPr>
-          <a:xfrm>
-            <a:off x="10710367" y="6382512"/>
-            <a:ext cx="914400" cy="219456"/>
-          </a:xfrm>
-          <a:prstGeom prst="rect">
-            <a:avLst/>
-          </a:prstGeom>
-          <a:noFill/>
-          <a:ln/>
-        </p:spPr>
-        <p:txBody>
-          <a:bodyPr wrap="square" lIns="0" tIns="0" rIns="0" bIns="0" rtlCol="0" anchor="ctr"/>
-          <a:lstStyle/>
-          <a:p>
-            <a:pPr algn="r" indent="0" marL="0">
-              <a:buNone/>
-            </a:pPr>
-            <a:r>
-              <a:rPr lang="en-US" sz="900" b="1" dirty="0">
-                <a:solidFill>
-                  <a:srgbClr val="B98A2E"/>
-                </a:solidFill>
-                <a:latin typeface="Arial" pitchFamily="34" charset="0"/>
-                <a:ea typeface="Arial" pitchFamily="34" charset="-122"/>
-                <a:cs typeface="Arial" pitchFamily="34" charset="-120"/>
-              </a:rPr>
-              <a:t>8</a:t>
-            </a:r>
-            <a:endParaRPr lang="en-US" sz="900" dirty="0"/>
-          </a:p>
-        </p:txBody>
-      </p:sp>
-    </p:spTree>
-  </p:cSld>
-  <p:clrMapOvr>
-    <a:masterClrMapping/>
-  </p:clrMapOvr>
-</p:sld>
-</file>
-
-<file path=ppt/slides/slide9.xml><?xml version="1.0" encoding="utf-8"?>
-<p:sld xmlns:a="http://schemas.openxmlformats.org/drawingml/2006/main" xmlns:r="http://schemas.openxmlformats.org/officeDocument/2006/relationships" xmlns:p="http://schemas.openxmlformats.org/presentationml/2006/main">
-  <p:cSld name="Slide 9">
-    <p:bg>
-      <p:bgPr>
-        <a:solidFill>
-          <a:srgbClr val="FFFFFF"/>
-        </a:solidFill>
-      </p:bgPr>
-    </p:bg>
-    <p:spTree>
-      <p:nvGrpSpPr>
-        <p:cNvPr id="1" name=""/>
-        <p:cNvGrpSpPr/>
-        <p:nvPr/>
-      </p:nvGrpSpPr>
-      <p:grpSpPr>
-        <a:xfrm>
-          <a:off x="0" y="0"/>
-          <a:ext cx="0" cy="0"/>
-          <a:chOff x="0" y="0"/>
-          <a:chExt cx="0" cy="0"/>
-        </a:xfrm>
-      </p:grpSpPr>
-      <p:sp>
-        <p:nvSpPr>
-          <p:cNvPr id="2" name="Shape 0"/>
-          <p:cNvSpPr/>
-          <p:nvPr/>
-        </p:nvSpPr>
-        <p:spPr>
-          <a:xfrm>
-            <a:off x="566928" y="457200"/>
-            <a:ext cx="384048" cy="384048"/>
-          </a:xfrm>
-          <a:prstGeom prst="ellipse">
-            <a:avLst/>
-          </a:prstGeom>
-          <a:solidFill>
-            <a:srgbClr val="B98A2E"/>
-          </a:solidFill>
-          <a:ln/>
-        </p:spPr>
-      </p:sp>
-      <p:sp>
-        <p:nvSpPr>
-          <p:cNvPr id="3" name="Text 1"/>
-          <p:cNvSpPr/>
-          <p:nvPr/>
-        </p:nvSpPr>
-        <p:spPr>
-          <a:xfrm>
-            <a:off x="566928" y="457200"/>
-            <a:ext cx="384048" cy="384048"/>
-          </a:xfrm>
-          <a:prstGeom prst="rect">
-            <a:avLst/>
-          </a:prstGeom>
-          <a:noFill/>
-          <a:ln/>
-        </p:spPr>
-        <p:txBody>
-          <a:bodyPr wrap="square" lIns="0" tIns="0" rIns="0" bIns="0" rtlCol="0" anchor="ctr"/>
-          <a:lstStyle/>
-          <a:p>
-            <a:pPr algn="ctr" indent="0" marL="0">
-              <a:buNone/>
-            </a:pPr>
-            <a:r>
-              <a:rPr lang="en-US" sz="1300" b="1" dirty="0">
-                <a:solidFill>
-                  <a:srgbClr val="FFFFFF"/>
-                </a:solidFill>
-                <a:latin typeface="Arial" pitchFamily="34" charset="0"/>
-                <a:ea typeface="Arial" pitchFamily="34" charset="-122"/>
-                <a:cs typeface="Arial" pitchFamily="34" charset="-120"/>
-              </a:rPr>
-              <a:t>09</a:t>
-            </a:r>
-            <a:endParaRPr lang="en-US" sz="1300" dirty="0"/>
-          </a:p>
-        </p:txBody>
-      </p:sp>
-      <p:sp>
-        <p:nvSpPr>
-          <p:cNvPr id="4" name="Text 2"/>
-          <p:cNvSpPr/>
-          <p:nvPr/>
-        </p:nvSpPr>
-        <p:spPr>
-          <a:xfrm>
-            <a:off x="1133856" y="457200"/>
-            <a:ext cx="10490911" cy="182880"/>
-          </a:xfrm>
-          <a:prstGeom prst="rect">
-            <a:avLst/>
-          </a:prstGeom>
-          <a:noFill/>
-          <a:ln/>
-        </p:spPr>
-        <p:txBody>
-          <a:bodyPr wrap="square" lIns="0" tIns="0" rIns="0" bIns="0" rtlCol="0" anchor="ctr"/>
-          <a:lstStyle/>
-          <a:p>
-            <a:pPr indent="0" marL="0">
-              <a:buNone/>
-            </a:pPr>
-            <a:r>
-              <a:rPr lang="en-US" sz="950" b="1" spc="200" kern="0" dirty="0">
-                <a:solidFill>
-                  <a:srgbClr val="B98A2E"/>
-                </a:solidFill>
-                <a:latin typeface="Arial" pitchFamily="34" charset="0"/>
-                <a:ea typeface="Arial" pitchFamily="34" charset="-122"/>
-                <a:cs typeface="Arial" pitchFamily="34" charset="-120"/>
-              </a:rPr>
-              <a:t>Thesis</a:t>
-            </a:r>
-            <a:endParaRPr lang="en-US" sz="950" dirty="0"/>
-          </a:p>
-        </p:txBody>
-      </p:sp>
-      <p:sp>
-        <p:nvSpPr>
-          <p:cNvPr id="5" name="Text 3"/>
-          <p:cNvSpPr/>
-          <p:nvPr/>
-        </p:nvSpPr>
-        <p:spPr>
-          <a:xfrm>
-            <a:off x="1133856" y="640080"/>
-            <a:ext cx="10490911" cy="365760"/>
-          </a:xfrm>
-          <a:prstGeom prst="rect">
-            <a:avLst/>
-          </a:prstGeom>
-          <a:noFill/>
-          <a:ln/>
-        </p:spPr>
-        <p:txBody>
-          <a:bodyPr wrap="square" lIns="0" tIns="0" rIns="0" bIns="0" rtlCol="0" anchor="ctr"/>
-          <a:lstStyle/>
-          <a:p>
-            <a:pPr indent="0" marL="0">
-              <a:buNone/>
-            </a:pPr>
-            <a:r>
-              <a:rPr lang="en-US" sz="2300" b="1" dirty="0">
-                <a:solidFill>
-                  <a:srgbClr val="10161F"/>
-                </a:solidFill>
-                <a:latin typeface="Pretendard" pitchFamily="34" charset="0"/>
-                <a:ea typeface="Pretendard" pitchFamily="34" charset="-122"/>
-                <a:cs typeface="Pretendard" pitchFamily="34" charset="-120"/>
-              </a:rPr>
-              <a:t>왜 지금 이 매물을 사야 하는가</a:t>
-            </a:r>
-            <a:endParaRPr lang="en-US" sz="2300" dirty="0"/>
-          </a:p>
-        </p:txBody>
-      </p:sp>
-      <p:sp>
-        <p:nvSpPr>
-          <p:cNvPr id="6" name="Shape 4"/>
-          <p:cNvSpPr/>
-          <p:nvPr/>
-        </p:nvSpPr>
-        <p:spPr>
-          <a:xfrm>
-            <a:off x="566928" y="4983480"/>
-            <a:ext cx="11057839" cy="804672"/>
-          </a:xfrm>
-          <a:prstGeom prst="roundRect">
-            <a:avLst>
-              <a:gd name="adj" fmla="val 6818"/>
-            </a:avLst>
-          </a:prstGeom>
-          <a:solidFill>
-            <a:srgbClr val="F3EBDA"/>
-          </a:solidFill>
-          <a:ln w="10160">
-            <a:solidFill>
-              <a:srgbClr val="D9B668"/>
-            </a:solidFill>
-            <a:prstDash val="solid"/>
-          </a:ln>
-        </p:spPr>
-      </p:sp>
-      <p:sp>
-        <p:nvSpPr>
-          <p:cNvPr id="7" name="Text 5"/>
-          <p:cNvSpPr/>
-          <p:nvPr/>
-        </p:nvSpPr>
-        <p:spPr>
-          <a:xfrm>
-            <a:off x="749808" y="5093208"/>
-            <a:ext cx="1691640" cy="256032"/>
-          </a:xfrm>
-          <a:prstGeom prst="rect">
-            <a:avLst/>
-          </a:prstGeom>
-          <a:noFill/>
-          <a:ln/>
-        </p:spPr>
-        <p:txBody>
-          <a:bodyPr wrap="square" lIns="0" tIns="0" rIns="0" bIns="0" rtlCol="0" anchor="ctr"/>
-          <a:lstStyle/>
-          <a:p>
-            <a:pPr indent="0" marL="0">
-              <a:buNone/>
-            </a:pPr>
-            <a:r>
-              <a:rPr lang="en-US" sz="1050" b="1" dirty="0">
-                <a:solidFill>
-                  <a:srgbClr val="977024"/>
-                </a:solidFill>
-                <a:latin typeface="Pretendard" pitchFamily="34" charset="0"/>
-                <a:ea typeface="Pretendard" pitchFamily="34" charset="-122"/>
-                <a:cs typeface="Pretendard" pitchFamily="34" charset="-120"/>
-              </a:rPr>
-              <a:t>종합 가치 제안</a:t>
-            </a:r>
-            <a:endParaRPr lang="en-US" sz="1050" dirty="0"/>
-          </a:p>
-        </p:txBody>
-      </p:sp>
-      <p:sp>
-        <p:nvSpPr>
-          <p:cNvPr id="8" name="Text 6"/>
-          <p:cNvSpPr/>
-          <p:nvPr/>
-        </p:nvSpPr>
-        <p:spPr>
-          <a:xfrm>
-            <a:off x="2487168" y="5056632"/>
-            <a:ext cx="8954719" cy="658368"/>
-          </a:xfrm>
-          <a:prstGeom prst="rect">
-            <a:avLst/>
-          </a:prstGeom>
-          <a:noFill/>
-          <a:ln/>
-        </p:spPr>
-        <p:txBody>
-          <a:bodyPr wrap="square" lIns="0" tIns="0" rIns="0" bIns="0" rtlCol="0" anchor="ctr"/>
-          <a:lstStyle/>
-          <a:p>
-            <a:pPr indent="0" marL="0">
-              <a:lnSpc>
-                <a:spcPct val="125000"/>
-              </a:lnSpc>
-              <a:buNone/>
-            </a:pPr>
-            <a:r>
-              <a:rPr lang="en-US" sz="1100" dirty="0">
-                <a:solidFill>
-                  <a:srgbClr val="10161F"/>
-                </a:solidFill>
-                <a:latin typeface="Pretendard" pitchFamily="34" charset="0"/>
-                <a:ea typeface="Pretendard" pitchFamily="34" charset="-122"/>
-                <a:cs typeface="Pretendard" pitchFamily="34" charset="-120"/>
-              </a:rPr>
-              <a:t>{"ok":true,"mocked":true,"extractedFields":{"area_signal":"역삼","asset_type":"오피스빌딩","price_band":"300억","size_signal":"3000평(약 9917.4㎡)"},"extractedFacts":{"region":"역삼","exactAddressCandidate":"역삼동 742-1","assetType":"오피스빌딩","priceText":"300억","sizeText":"3000평(약 9917.4㎡)","currentUse":"오피스","currentUseSignal":"근린생활시설","leaseSignal":"임대중","vacancySignal":"공실없음","tenantNames":["쿠팡","네이버"],"unitRentTexts":["301호: 1500만"],"sellerMotivationText":"자산 효율화","brokerNotes":["초역세권 매물"]},"detectedSensitiveFields":["exact_address","tenant_name"],"ambiguousFields":[],"warnings":[],"areaSignal":"역삼","assetType":"오피스빌딩","priceBand":"300억","sizeSignal":"3000평(약 9917.4㎡)","dealType":"매각","buildingName":"역삼 센트럴타워","exactAddress":"역삼동 742-1","totalFloorArea":9917.3,"buildYear":2015,"currentUseSignal":"근린생활시설","vacancySignal":"공실 없음","fitSummary":"초역세권 근생 빌딩으로 시행/사옥 매입에 최적화","cautionSummary":"주요 임차인 만기 조율 필요","hiddenFields":["exact_address","seller_motivation"],"confidence":{"areaSignal":"confirmed","assetType":"confirmed","priceBand":"ai_hypothesis","fitSummary":"ai_hypothesis"},"missingData":["sizeSignal"],"boundaryNote":"본 자료는 실거래 통계 기반 참고치입니다.","buyerType":"법인 사옥형","budgetRange":{"min":50,"max":80,"display":"50억~80억"},"preferredRegions":["강남","성수"],"assetTypes":["꼬마빌딩","사옥용"],"purchasePurpose":"사옥용 매입","mustHave":["초역세권","주차"],"niceToHave":["테라스","루프탑"],"riskTolerance":"medium","financingNote":"자본금 50% 준비","missingQuestions":["구체적인 입주 시기가 언제인가요?","선호하는 수익률이 있나요?"],"privacyNotes":["연락처 비공개"],"fitReasons":["매수자 예산(50-80억)에 부합하는 매물입니다.","요청하신 성수/강남 권역에 해당합니다."],"cautionReasons":["요청한 용도와 달리 명도 협의가 다소 필요합니다."],"recommendedNextAction":"현장 답사 제안","kakaoMessage":"안녕하세요! 요청하신 조건에 부합하는 추천 매물이 있어 안내해 드립니다. 확인해보시고 피드백 부탁드립니다.","title":"강남 역삼역 초역세권 오피스 사옥용 빌딩 매각","shortSummary":"역삼역 도보 5분 거리의 준신축급 대형 오피스빌딩입니다.","dealPoints":["초역세권","사옥 최적"],"cautionPoints":["명도 조율 필요"],"hiddenInfoNotice":["보증금 및 지번은 인가 후 확인 가능"],"gateMessage":"G1 등급 등록이 필요합니다.","kakaoText":"강남 역삼역 오피스 빌딩 매각 안내입니다.","exactUnitCandidate":"101호","floor":"1층","areaSqmText":"150㎡","spaceType":"office","depositText":"5000만","monthlyRentText":"400만","maintenanceFeeText":"50만","availableFromText":"즉시입주","leaseTermMonthsText":"24","incentivesText":"렌트프리 2개월","restrictions":[],"landlordIdentity":"김성수","currentTenant":"스타트업","vacancyReason":"이전 확장","rentNegotiation":"협의 가능","region":"성수동","areaSqm":150,"deposit":5000,"monthlyRent":400,"maintenanceFee":50,"availableFrom":"즉시입주","leaseTermMonths":24,"incentives":{"rentFreeMonths":2,"interiorSupport":"일부 인테리어 지원","freeRentDetail":"렌트프리 2개월 지원"},"shortSummaryLease":"성수역 도보 5분 거리 1층 리테일 상가 매물입니다."}</a:t>
-            </a:r>
-            <a:endParaRPr lang="en-US" sz="1100" dirty="0"/>
-          </a:p>
-        </p:txBody>
-      </p:sp>
-      <p:sp>
-        <p:nvSpPr>
-          <p:cNvPr id="9" name="Text 7"/>
-          <p:cNvSpPr/>
-          <p:nvPr/>
-        </p:nvSpPr>
-        <p:spPr>
-          <a:xfrm>
-            <a:off x="566928" y="6382512"/>
-            <a:ext cx="7315200" cy="219456"/>
-          </a:xfrm>
-          <a:prstGeom prst="rect">
-            <a:avLst/>
-          </a:prstGeom>
-          <a:noFill/>
-          <a:ln/>
-        </p:spPr>
-        <p:txBody>
-          <a:bodyPr wrap="square" lIns="0" tIns="0" rIns="0" bIns="0" rtlCol="0" anchor="ctr"/>
-          <a:lstStyle/>
-          <a:p>
-            <a:pPr indent="0" marL="0">
-              <a:buNone/>
-            </a:pPr>
-            <a:r>
-              <a:rPr lang="en-US" sz="800" dirty="0">
-                <a:solidFill>
-                  <a:srgbClr val="718096"/>
-                </a:solidFill>
-                <a:latin typeface="Pretendard" pitchFamily="34" charset="0"/>
-                <a:ea typeface="Pretendard" pitchFamily="34" charset="-122"/>
-                <a:cs typeface="Pretendard" pitchFamily="34" charset="-120"/>
-              </a:rPr>
-              <a:t>크리딜   |   </a:t>
-            </a:r>
-            <a:endParaRPr lang="en-US" sz="800" dirty="0"/>
-          </a:p>
-        </p:txBody>
-      </p:sp>
-      <p:sp>
-        <p:nvSpPr>
-          <p:cNvPr id="10" name="Text 8"/>
-          <p:cNvSpPr/>
-          <p:nvPr/>
-        </p:nvSpPr>
-        <p:spPr>
-          <a:xfrm>
-            <a:off x="10710367" y="6382512"/>
-            <a:ext cx="914400" cy="219456"/>
-          </a:xfrm>
-          <a:prstGeom prst="rect">
-            <a:avLst/>
-          </a:prstGeom>
-          <a:noFill/>
-          <a:ln/>
-        </p:spPr>
-        <p:txBody>
-          <a:bodyPr wrap="square" lIns="0" tIns="0" rIns="0" bIns="0" rtlCol="0" anchor="ctr"/>
-          <a:lstStyle/>
-          <a:p>
-            <a:pPr algn="r" indent="0" marL="0">
-              <a:buNone/>
-            </a:pPr>
-            <a:r>
-              <a:rPr lang="en-US" sz="900" b="1" dirty="0">
-                <a:solidFill>
-                  <a:srgbClr val="B98A2E"/>
-                </a:solidFill>
-                <a:latin typeface="Arial" pitchFamily="34" charset="0"/>
-                <a:ea typeface="Arial" pitchFamily="34" charset="-122"/>
-                <a:cs typeface="Arial" pitchFamily="34" charset="-120"/>
-              </a:rPr>
-              <a:t>9</a:t>
             </a:r>
             <a:endParaRPr lang="en-US" sz="900" dirty="0"/>
           </a:p>
